--- a/C# 문법.pptx
+++ b/C# 문법.pptx
@@ -11808,7 +11808,7 @@
           <a:p>
             <a:fld id="{80606649-8C48-4DEB-9F5F-3AE3C52C94A0}" type="datetimeFigureOut">
               <a:rPr lang="ko-KR" altLang="en-US" smtClean="0"/>
-              <a:t>2025-09-30</a:t>
+              <a:t>2025-10-28</a:t>
             </a:fld>
             <a:endParaRPr lang="ko-KR" altLang="en-US"/>
           </a:p>
@@ -12006,7 +12006,7 @@
           <a:p>
             <a:fld id="{80606649-8C48-4DEB-9F5F-3AE3C52C94A0}" type="datetimeFigureOut">
               <a:rPr lang="ko-KR" altLang="en-US" smtClean="0"/>
-              <a:t>2025-09-30</a:t>
+              <a:t>2025-10-28</a:t>
             </a:fld>
             <a:endParaRPr lang="ko-KR" altLang="en-US"/>
           </a:p>
@@ -12214,7 +12214,7 @@
           <a:p>
             <a:fld id="{80606649-8C48-4DEB-9F5F-3AE3C52C94A0}" type="datetimeFigureOut">
               <a:rPr lang="ko-KR" altLang="en-US" smtClean="0"/>
-              <a:t>2025-09-30</a:t>
+              <a:t>2025-10-28</a:t>
             </a:fld>
             <a:endParaRPr lang="ko-KR" altLang="en-US"/>
           </a:p>
@@ -12412,7 +12412,7 @@
           <a:p>
             <a:fld id="{80606649-8C48-4DEB-9F5F-3AE3C52C94A0}" type="datetimeFigureOut">
               <a:rPr lang="ko-KR" altLang="en-US" smtClean="0"/>
-              <a:t>2025-09-30</a:t>
+              <a:t>2025-10-28</a:t>
             </a:fld>
             <a:endParaRPr lang="ko-KR" altLang="en-US"/>
           </a:p>
@@ -12687,7 +12687,7 @@
           <a:p>
             <a:fld id="{80606649-8C48-4DEB-9F5F-3AE3C52C94A0}" type="datetimeFigureOut">
               <a:rPr lang="ko-KR" altLang="en-US" smtClean="0"/>
-              <a:t>2025-09-30</a:t>
+              <a:t>2025-10-28</a:t>
             </a:fld>
             <a:endParaRPr lang="ko-KR" altLang="en-US"/>
           </a:p>
@@ -12952,7 +12952,7 @@
           <a:p>
             <a:fld id="{80606649-8C48-4DEB-9F5F-3AE3C52C94A0}" type="datetimeFigureOut">
               <a:rPr lang="ko-KR" altLang="en-US" smtClean="0"/>
-              <a:t>2025-09-30</a:t>
+              <a:t>2025-10-28</a:t>
             </a:fld>
             <a:endParaRPr lang="ko-KR" altLang="en-US"/>
           </a:p>
@@ -13364,7 +13364,7 @@
           <a:p>
             <a:fld id="{80606649-8C48-4DEB-9F5F-3AE3C52C94A0}" type="datetimeFigureOut">
               <a:rPr lang="ko-KR" altLang="en-US" smtClean="0"/>
-              <a:t>2025-09-30</a:t>
+              <a:t>2025-10-28</a:t>
             </a:fld>
             <a:endParaRPr lang="ko-KR" altLang="en-US"/>
           </a:p>
@@ -13505,7 +13505,7 @@
           <a:p>
             <a:fld id="{80606649-8C48-4DEB-9F5F-3AE3C52C94A0}" type="datetimeFigureOut">
               <a:rPr lang="ko-KR" altLang="en-US" smtClean="0"/>
-              <a:t>2025-09-30</a:t>
+              <a:t>2025-10-28</a:t>
             </a:fld>
             <a:endParaRPr lang="ko-KR" altLang="en-US"/>
           </a:p>
@@ -13618,7 +13618,7 @@
           <a:p>
             <a:fld id="{80606649-8C48-4DEB-9F5F-3AE3C52C94A0}" type="datetimeFigureOut">
               <a:rPr lang="ko-KR" altLang="en-US" smtClean="0"/>
-              <a:t>2025-09-30</a:t>
+              <a:t>2025-10-28</a:t>
             </a:fld>
             <a:endParaRPr lang="ko-KR" altLang="en-US"/>
           </a:p>
@@ -13929,7 +13929,7 @@
           <a:p>
             <a:fld id="{80606649-8C48-4DEB-9F5F-3AE3C52C94A0}" type="datetimeFigureOut">
               <a:rPr lang="ko-KR" altLang="en-US" smtClean="0"/>
-              <a:t>2025-09-30</a:t>
+              <a:t>2025-10-28</a:t>
             </a:fld>
             <a:endParaRPr lang="ko-KR" altLang="en-US"/>
           </a:p>
@@ -14217,7 +14217,7 @@
           <a:p>
             <a:fld id="{80606649-8C48-4DEB-9F5F-3AE3C52C94A0}" type="datetimeFigureOut">
               <a:rPr lang="ko-KR" altLang="en-US" smtClean="0"/>
-              <a:t>2025-09-30</a:t>
+              <a:t>2025-10-28</a:t>
             </a:fld>
             <a:endParaRPr lang="ko-KR" altLang="en-US"/>
           </a:p>
@@ -14458,7 +14458,7 @@
           <a:p>
             <a:fld id="{80606649-8C48-4DEB-9F5F-3AE3C52C94A0}" type="datetimeFigureOut">
               <a:rPr lang="ko-KR" altLang="en-US" smtClean="0"/>
-              <a:t>2025-09-30</a:t>
+              <a:t>2025-10-28</a:t>
             </a:fld>
             <a:endParaRPr lang="ko-KR" altLang="en-US"/>
           </a:p>
@@ -19203,14 +19203,14 @@
           <p:nvPr>
             <p:extLst>
               <p:ext uri="{D42A27DB-BD31-4B8C-83A1-F6EECF244321}">
-                <p14:modId xmlns:p14="http://schemas.microsoft.com/office/powerpoint/2010/main" val="3326510657"/>
+                <p14:modId xmlns:p14="http://schemas.microsoft.com/office/powerpoint/2010/main" val="2153809950"/>
               </p:ext>
             </p:extLst>
           </p:nvPr>
         </p:nvGraphicFramePr>
         <p:xfrm>
-          <a:off x="882298" y="2817304"/>
-          <a:ext cx="10424357" cy="3218688"/>
+          <a:off x="498764" y="2817304"/>
+          <a:ext cx="11443854" cy="3218688"/>
         </p:xfrm>
         <a:graphic>
           <a:graphicData uri="http://schemas.openxmlformats.org/drawingml/2006/table">
@@ -19219,21 +19219,21 @@
                 <a:tableStyleId>{5C22544A-7EE6-4342-B048-85BDC9FD1C3A}</a:tableStyleId>
               </a:tblPr>
               <a:tblGrid>
-                <a:gridCol w="2342286">
+                <a:gridCol w="1700121">
                   <a:extLst>
                     <a:ext uri="{9D8B030D-6E8A-4147-A177-3AD203B41FA5}">
                       <a16:colId xmlns:a16="http://schemas.microsoft.com/office/drawing/2014/main" val="3765811720"/>
                     </a:ext>
                   </a:extLst>
                 </a:gridCol>
-                <a:gridCol w="3020389">
+                <a:gridCol w="2199321">
                   <a:extLst>
                     <a:ext uri="{9D8B030D-6E8A-4147-A177-3AD203B41FA5}">
                       <a16:colId xmlns:a16="http://schemas.microsoft.com/office/drawing/2014/main" val="3950916864"/>
                     </a:ext>
                   </a:extLst>
                 </a:gridCol>
-                <a:gridCol w="5061682">
+                <a:gridCol w="7544412">
                   <a:extLst>
                     <a:ext uri="{9D8B030D-6E8A-4147-A177-3AD203B41FA5}">
                       <a16:colId xmlns:a16="http://schemas.microsoft.com/office/drawing/2014/main" val="2572552780"/>
@@ -19329,10 +19329,10 @@
                     <a:p>
                       <a:pPr latinLnBrk="1"/>
                       <a:r>
-                        <a:rPr lang="en-US" altLang="ko-KR" sz="3300"/>
-                        <a:t>value, reference</a:t>
+                        <a:rPr lang="en-US" altLang="ko-KR" sz="3300" dirty="0"/>
+                        <a:t>reference</a:t>
                       </a:r>
-                      <a:endParaRPr lang="ko-KR" altLang="en-US" sz="3300"/>
+                      <a:endParaRPr lang="ko-KR" altLang="en-US" sz="3300" dirty="0"/>
                     </a:p>
                   </a:txBody>
                   <a:tcPr marL="167640" marR="167640" marT="83820" marB="83820"/>
@@ -19377,30 +19377,52 @@
                     <a:bodyPr/>
                     <a:lstStyle/>
                     <a:p>
-                      <a:pPr latinLnBrk="1"/>
+                      <a:pPr marL="457200" indent="-457200" latinLnBrk="1">
+                        <a:buFont typeface="Arial" panose="020B0604020202020204" pitchFamily="34" charset="0"/>
+                        <a:buChar char="•"/>
+                      </a:pPr>
+                      <a:r>
+                        <a:rPr lang="ko-KR" altLang="en-US" sz="3300" dirty="0"/>
+                        <a:t>자식</a:t>
+                      </a:r>
                       <a:r>
                         <a:rPr lang="en-US" altLang="ko-KR" sz="3300" dirty="0"/>
-                        <a:t>1</a:t>
+                        <a:t>, </a:t>
                       </a:r>
                       <a:r>
                         <a:rPr lang="ko-KR" altLang="en-US" sz="3300" dirty="0"/>
-                        <a:t>번만 상속 가능</a:t>
+                        <a:t>손자 등등 지속적인 상속 가능</a:t>
                       </a:r>
                       <a:endParaRPr lang="en-US" altLang="ko-KR" sz="3300" dirty="0"/>
                     </a:p>
                     <a:p>
-                      <a:pPr latinLnBrk="1"/>
+                      <a:pPr marL="457200" indent="-457200" latinLnBrk="1">
+                        <a:buFont typeface="Arial" panose="020B0604020202020204" pitchFamily="34" charset="0"/>
+                        <a:buChar char="•"/>
+                      </a:pPr>
+                      <a:r>
+                        <a:rPr lang="en-US" altLang="ko-KR" sz="3300" dirty="0"/>
+                        <a:t>class</a:t>
+                      </a:r>
                       <a:r>
                         <a:rPr lang="ko-KR" altLang="en-US" sz="3300" dirty="0"/>
-                        <a:t>다중 상속은 </a:t>
+                        <a:t>로 다중 상속은 불가능</a:t>
                       </a:r>
                       <a:r>
                         <a:rPr lang="en-US" altLang="ko-KR" sz="3300" dirty="0"/>
-                        <a:t>interface </a:t>
+                        <a:t>; </a:t>
                       </a:r>
                       <a:r>
                         <a:rPr lang="ko-KR" altLang="en-US" sz="3300" dirty="0"/>
-                        <a:t>사용</a:t>
+                        <a:t>대신 </a:t>
+                      </a:r>
+                      <a:r>
+                        <a:rPr lang="en-US" altLang="ko-KR" sz="3300" dirty="0"/>
+                        <a:t>interface</a:t>
+                      </a:r>
+                      <a:r>
+                        <a:rPr lang="ko-KR" altLang="en-US" sz="3300" dirty="0"/>
+                        <a:t>로는 가능</a:t>
                       </a:r>
                     </a:p>
                   </a:txBody>

--- a/C# 문법.pptx
+++ b/C# 문법.pptx
@@ -15,6 +15,8 @@
     <p:sldId id="264" r:id="rId9"/>
     <p:sldId id="265" r:id="rId10"/>
     <p:sldId id="266" r:id="rId11"/>
+    <p:sldId id="267" r:id="rId12"/>
+    <p:sldId id="268" r:id="rId13"/>
   </p:sldIdLst>
   <p:sldSz cx="12192000" cy="6858000"/>
   <p:notesSz cx="6858000" cy="9144000"/>
@@ -3215,6 +3217,788 @@
   <dgm:styleLbl name="fgShp">
     <dgm:fillClrLst meth="repeat">
       <a:schemeClr val="accent5">
+        <a:tint val="40000"/>
+      </a:schemeClr>
+    </dgm:fillClrLst>
+    <dgm:linClrLst meth="repeat">
+      <a:schemeClr val="lt1"/>
+    </dgm:linClrLst>
+    <dgm:effectClrLst/>
+    <dgm:txLinClrLst/>
+    <dgm:txFillClrLst meth="repeat">
+      <a:schemeClr val="dk1"/>
+    </dgm:txFillClrLst>
+    <dgm:txEffectClrLst/>
+  </dgm:styleLbl>
+  <dgm:styleLbl name="revTx">
+    <dgm:fillClrLst meth="repeat">
+      <a:schemeClr val="lt1">
+        <a:alpha val="0"/>
+      </a:schemeClr>
+    </dgm:fillClrLst>
+    <dgm:linClrLst meth="repeat">
+      <a:schemeClr val="dk1">
+        <a:alpha val="0"/>
+      </a:schemeClr>
+    </dgm:linClrLst>
+    <dgm:effectClrLst/>
+    <dgm:txLinClrLst/>
+    <dgm:txFillClrLst meth="repeat">
+      <a:schemeClr val="tx1"/>
+    </dgm:txFillClrLst>
+    <dgm:txEffectClrLst/>
+  </dgm:styleLbl>
+</dgm:colorsDef>
+</file>
+
+<file path=ppt/diagrams/colors5.xml><?xml version="1.0" encoding="utf-8"?>
+<dgm:colorsDef xmlns:dgm="http://schemas.openxmlformats.org/drawingml/2006/diagram" xmlns:a="http://schemas.openxmlformats.org/drawingml/2006/main" uniqueId="urn:microsoft.com/office/officeart/2005/8/colors/colorful2">
+  <dgm:title val=""/>
+  <dgm:desc val=""/>
+  <dgm:catLst>
+    <dgm:cat type="colorful" pri="10200"/>
+  </dgm:catLst>
+  <dgm:styleLbl name="node0">
+    <dgm:fillClrLst meth="repeat">
+      <a:schemeClr val="accent1"/>
+    </dgm:fillClrLst>
+    <dgm:linClrLst meth="repeat">
+      <a:schemeClr val="lt1"/>
+    </dgm:linClrLst>
+    <dgm:effectClrLst/>
+    <dgm:txLinClrLst/>
+    <dgm:txFillClrLst/>
+    <dgm:txEffectClrLst/>
+  </dgm:styleLbl>
+  <dgm:styleLbl name="node1">
+    <dgm:fillClrLst>
+      <a:schemeClr val="accent2"/>
+      <a:schemeClr val="accent3"/>
+    </dgm:fillClrLst>
+    <dgm:linClrLst meth="repeat">
+      <a:schemeClr val="lt1"/>
+    </dgm:linClrLst>
+    <dgm:effectClrLst/>
+    <dgm:txLinClrLst/>
+    <dgm:txFillClrLst/>
+    <dgm:txEffectClrLst/>
+  </dgm:styleLbl>
+  <dgm:styleLbl name="alignNode1">
+    <dgm:fillClrLst>
+      <a:schemeClr val="accent2"/>
+      <a:schemeClr val="accent3"/>
+    </dgm:fillClrLst>
+    <dgm:linClrLst>
+      <a:schemeClr val="accent2"/>
+      <a:schemeClr val="accent3"/>
+    </dgm:linClrLst>
+    <dgm:effectClrLst/>
+    <dgm:txLinClrLst/>
+    <dgm:txFillClrLst/>
+    <dgm:txEffectClrLst/>
+  </dgm:styleLbl>
+  <dgm:styleLbl name="lnNode1">
+    <dgm:fillClrLst>
+      <a:schemeClr val="accent2"/>
+      <a:schemeClr val="accent3"/>
+    </dgm:fillClrLst>
+    <dgm:linClrLst meth="repeat">
+      <a:schemeClr val="lt1"/>
+    </dgm:linClrLst>
+    <dgm:effectClrLst/>
+    <dgm:txLinClrLst/>
+    <dgm:txFillClrLst/>
+    <dgm:txEffectClrLst/>
+  </dgm:styleLbl>
+  <dgm:styleLbl name="vennNode1">
+    <dgm:fillClrLst>
+      <a:schemeClr val="accent2">
+        <a:alpha val="50000"/>
+      </a:schemeClr>
+      <a:schemeClr val="accent3">
+        <a:alpha val="50000"/>
+      </a:schemeClr>
+    </dgm:fillClrLst>
+    <dgm:linClrLst meth="repeat">
+      <a:schemeClr val="lt1"/>
+    </dgm:linClrLst>
+    <dgm:effectClrLst/>
+    <dgm:txLinClrLst/>
+    <dgm:txFillClrLst/>
+    <dgm:txEffectClrLst/>
+  </dgm:styleLbl>
+  <dgm:styleLbl name="node2">
+    <dgm:fillClrLst>
+      <a:schemeClr val="accent3"/>
+    </dgm:fillClrLst>
+    <dgm:linClrLst meth="repeat">
+      <a:schemeClr val="lt1"/>
+    </dgm:linClrLst>
+    <dgm:effectClrLst/>
+    <dgm:txLinClrLst/>
+    <dgm:txFillClrLst/>
+    <dgm:txEffectClrLst/>
+  </dgm:styleLbl>
+  <dgm:styleLbl name="node3">
+    <dgm:fillClrLst>
+      <a:schemeClr val="accent4"/>
+    </dgm:fillClrLst>
+    <dgm:linClrLst meth="repeat">
+      <a:schemeClr val="lt1"/>
+    </dgm:linClrLst>
+    <dgm:effectClrLst/>
+    <dgm:txLinClrLst/>
+    <dgm:txFillClrLst/>
+    <dgm:txEffectClrLst/>
+  </dgm:styleLbl>
+  <dgm:styleLbl name="node4">
+    <dgm:fillClrLst>
+      <a:schemeClr val="accent5"/>
+    </dgm:fillClrLst>
+    <dgm:linClrLst meth="repeat">
+      <a:schemeClr val="lt1"/>
+    </dgm:linClrLst>
+    <dgm:effectClrLst/>
+    <dgm:txLinClrLst/>
+    <dgm:txFillClrLst/>
+    <dgm:txEffectClrLst/>
+  </dgm:styleLbl>
+  <dgm:styleLbl name="fgImgPlace1">
+    <dgm:fillClrLst>
+      <a:schemeClr val="accent2">
+        <a:tint val="50000"/>
+      </a:schemeClr>
+      <a:schemeClr val="accent3">
+        <a:tint val="50000"/>
+      </a:schemeClr>
+    </dgm:fillClrLst>
+    <dgm:linClrLst meth="repeat">
+      <a:schemeClr val="lt1"/>
+    </dgm:linClrLst>
+    <dgm:effectClrLst/>
+    <dgm:txLinClrLst/>
+    <dgm:txFillClrLst meth="repeat">
+      <a:schemeClr val="lt1"/>
+    </dgm:txFillClrLst>
+    <dgm:txEffectClrLst/>
+  </dgm:styleLbl>
+  <dgm:styleLbl name="alignImgPlace1">
+    <dgm:fillClrLst>
+      <a:schemeClr val="accent2">
+        <a:tint val="50000"/>
+      </a:schemeClr>
+      <a:schemeClr val="accent3">
+        <a:tint val="20000"/>
+      </a:schemeClr>
+    </dgm:fillClrLst>
+    <dgm:linClrLst meth="repeat">
+      <a:schemeClr val="lt1"/>
+    </dgm:linClrLst>
+    <dgm:effectClrLst/>
+    <dgm:txLinClrLst/>
+    <dgm:txFillClrLst meth="repeat">
+      <a:schemeClr val="lt1"/>
+    </dgm:txFillClrLst>
+    <dgm:txEffectClrLst/>
+  </dgm:styleLbl>
+  <dgm:styleLbl name="bgImgPlace1">
+    <dgm:fillClrLst>
+      <a:schemeClr val="accent2">
+        <a:tint val="50000"/>
+      </a:schemeClr>
+      <a:schemeClr val="accent3">
+        <a:tint val="20000"/>
+      </a:schemeClr>
+    </dgm:fillClrLst>
+    <dgm:linClrLst meth="repeat">
+      <a:schemeClr val="lt1"/>
+    </dgm:linClrLst>
+    <dgm:effectClrLst/>
+    <dgm:txLinClrLst/>
+    <dgm:txFillClrLst meth="repeat">
+      <a:schemeClr val="lt1"/>
+    </dgm:txFillClrLst>
+    <dgm:txEffectClrLst/>
+  </dgm:styleLbl>
+  <dgm:styleLbl name="sibTrans2D1">
+    <dgm:fillClrLst>
+      <a:schemeClr val="accent2"/>
+      <a:schemeClr val="accent3"/>
+    </dgm:fillClrLst>
+    <dgm:linClrLst meth="repeat">
+      <a:schemeClr val="lt1"/>
+    </dgm:linClrLst>
+    <dgm:effectClrLst/>
+    <dgm:txLinClrLst/>
+    <dgm:txFillClrLst/>
+    <dgm:txEffectClrLst/>
+  </dgm:styleLbl>
+  <dgm:styleLbl name="fgSibTrans2D1">
+    <dgm:fillClrLst>
+      <a:schemeClr val="accent2"/>
+      <a:schemeClr val="accent3"/>
+    </dgm:fillClrLst>
+    <dgm:linClrLst meth="repeat">
+      <a:schemeClr val="lt1"/>
+    </dgm:linClrLst>
+    <dgm:effectClrLst/>
+    <dgm:txLinClrLst/>
+    <dgm:txFillClrLst meth="repeat">
+      <a:schemeClr val="lt1"/>
+    </dgm:txFillClrLst>
+    <dgm:txEffectClrLst/>
+  </dgm:styleLbl>
+  <dgm:styleLbl name="bgSibTrans2D1">
+    <dgm:fillClrLst>
+      <a:schemeClr val="accent2"/>
+      <a:schemeClr val="accent3"/>
+    </dgm:fillClrLst>
+    <dgm:linClrLst meth="repeat">
+      <a:schemeClr val="lt1"/>
+    </dgm:linClrLst>
+    <dgm:effectClrLst/>
+    <dgm:txLinClrLst/>
+    <dgm:txFillClrLst meth="repeat">
+      <a:schemeClr val="lt1"/>
+    </dgm:txFillClrLst>
+    <dgm:txEffectClrLst/>
+  </dgm:styleLbl>
+  <dgm:styleLbl name="sibTrans1D1">
+    <dgm:fillClrLst/>
+    <dgm:linClrLst>
+      <a:schemeClr val="accent2"/>
+      <a:schemeClr val="accent3"/>
+    </dgm:linClrLst>
+    <dgm:effectClrLst/>
+    <dgm:txLinClrLst/>
+    <dgm:txFillClrLst meth="repeat">
+      <a:schemeClr val="tx1"/>
+    </dgm:txFillClrLst>
+    <dgm:txEffectClrLst/>
+  </dgm:styleLbl>
+  <dgm:styleLbl name="callout">
+    <dgm:fillClrLst meth="repeat">
+      <a:schemeClr val="accent2"/>
+    </dgm:fillClrLst>
+    <dgm:linClrLst meth="repeat">
+      <a:schemeClr val="accent2">
+        <a:tint val="50000"/>
+      </a:schemeClr>
+    </dgm:linClrLst>
+    <dgm:effectClrLst/>
+    <dgm:txLinClrLst/>
+    <dgm:txFillClrLst meth="repeat">
+      <a:schemeClr val="tx1"/>
+    </dgm:txFillClrLst>
+    <dgm:txEffectClrLst/>
+  </dgm:styleLbl>
+  <dgm:styleLbl name="asst0">
+    <dgm:fillClrLst meth="repeat">
+      <a:schemeClr val="accent2"/>
+    </dgm:fillClrLst>
+    <dgm:linClrLst meth="repeat">
+      <a:schemeClr val="lt1">
+        <a:shade val="80000"/>
+      </a:schemeClr>
+    </dgm:linClrLst>
+    <dgm:effectClrLst/>
+    <dgm:txLinClrLst/>
+    <dgm:txFillClrLst/>
+    <dgm:txEffectClrLst/>
+  </dgm:styleLbl>
+  <dgm:styleLbl name="asst1">
+    <dgm:fillClrLst meth="repeat">
+      <a:schemeClr val="accent3"/>
+    </dgm:fillClrLst>
+    <dgm:linClrLst meth="repeat">
+      <a:schemeClr val="lt1">
+        <a:shade val="80000"/>
+      </a:schemeClr>
+    </dgm:linClrLst>
+    <dgm:effectClrLst/>
+    <dgm:txLinClrLst/>
+    <dgm:txFillClrLst/>
+    <dgm:txEffectClrLst/>
+  </dgm:styleLbl>
+  <dgm:styleLbl name="asst2">
+    <dgm:fillClrLst>
+      <a:schemeClr val="accent4"/>
+    </dgm:fillClrLst>
+    <dgm:linClrLst meth="repeat">
+      <a:schemeClr val="lt1"/>
+    </dgm:linClrLst>
+    <dgm:effectClrLst/>
+    <dgm:txLinClrLst/>
+    <dgm:txFillClrLst/>
+    <dgm:txEffectClrLst/>
+  </dgm:styleLbl>
+  <dgm:styleLbl name="asst3">
+    <dgm:fillClrLst>
+      <a:schemeClr val="accent5"/>
+    </dgm:fillClrLst>
+    <dgm:linClrLst meth="repeat">
+      <a:schemeClr val="lt1"/>
+    </dgm:linClrLst>
+    <dgm:effectClrLst/>
+    <dgm:txLinClrLst/>
+    <dgm:txFillClrLst/>
+    <dgm:txEffectClrLst/>
+  </dgm:styleLbl>
+  <dgm:styleLbl name="asst4">
+    <dgm:fillClrLst>
+      <a:schemeClr val="accent6"/>
+    </dgm:fillClrLst>
+    <dgm:linClrLst meth="repeat">
+      <a:schemeClr val="lt1"/>
+    </dgm:linClrLst>
+    <dgm:effectClrLst/>
+    <dgm:txLinClrLst/>
+    <dgm:txFillClrLst/>
+    <dgm:txEffectClrLst/>
+  </dgm:styleLbl>
+  <dgm:styleLbl name="parChTrans2D1">
+    <dgm:fillClrLst meth="repeat">
+      <a:schemeClr val="accent2"/>
+    </dgm:fillClrLst>
+    <dgm:linClrLst meth="repeat">
+      <a:schemeClr val="lt1"/>
+    </dgm:linClrLst>
+    <dgm:effectClrLst/>
+    <dgm:txLinClrLst/>
+    <dgm:txFillClrLst meth="repeat">
+      <a:schemeClr val="lt1"/>
+    </dgm:txFillClrLst>
+    <dgm:txEffectClrLst/>
+  </dgm:styleLbl>
+  <dgm:styleLbl name="parChTrans2D2">
+    <dgm:fillClrLst meth="repeat">
+      <a:schemeClr val="accent3"/>
+    </dgm:fillClrLst>
+    <dgm:linClrLst meth="repeat">
+      <a:schemeClr val="lt1"/>
+    </dgm:linClrLst>
+    <dgm:effectClrLst/>
+    <dgm:txLinClrLst/>
+    <dgm:txFillClrLst/>
+    <dgm:txEffectClrLst/>
+  </dgm:styleLbl>
+  <dgm:styleLbl name="parChTrans2D3">
+    <dgm:fillClrLst meth="repeat">
+      <a:schemeClr val="accent4"/>
+    </dgm:fillClrLst>
+    <dgm:linClrLst meth="repeat">
+      <a:schemeClr val="lt1"/>
+    </dgm:linClrLst>
+    <dgm:effectClrLst/>
+    <dgm:txLinClrLst/>
+    <dgm:txFillClrLst/>
+    <dgm:txEffectClrLst/>
+  </dgm:styleLbl>
+  <dgm:styleLbl name="parChTrans2D4">
+    <dgm:fillClrLst meth="repeat">
+      <a:schemeClr val="accent5"/>
+    </dgm:fillClrLst>
+    <dgm:linClrLst meth="repeat">
+      <a:schemeClr val="lt1"/>
+    </dgm:linClrLst>
+    <dgm:effectClrLst/>
+    <dgm:txLinClrLst/>
+    <dgm:txFillClrLst meth="repeat">
+      <a:schemeClr val="lt1"/>
+    </dgm:txFillClrLst>
+    <dgm:txEffectClrLst/>
+  </dgm:styleLbl>
+  <dgm:styleLbl name="parChTrans1D1">
+    <dgm:fillClrLst meth="repeat">
+      <a:schemeClr val="accent2"/>
+    </dgm:fillClrLst>
+    <dgm:linClrLst meth="repeat">
+      <a:schemeClr val="accent2"/>
+    </dgm:linClrLst>
+    <dgm:effectClrLst/>
+    <dgm:txLinClrLst/>
+    <dgm:txFillClrLst meth="repeat">
+      <a:schemeClr val="tx1"/>
+    </dgm:txFillClrLst>
+    <dgm:txEffectClrLst/>
+  </dgm:styleLbl>
+  <dgm:styleLbl name="parChTrans1D2">
+    <dgm:fillClrLst meth="repeat">
+      <a:schemeClr val="accent2">
+        <a:tint val="90000"/>
+      </a:schemeClr>
+    </dgm:fillClrLst>
+    <dgm:linClrLst meth="repeat">
+      <a:schemeClr val="accent3"/>
+    </dgm:linClrLst>
+    <dgm:effectClrLst/>
+    <dgm:txLinClrLst/>
+    <dgm:txFillClrLst meth="repeat">
+      <a:schemeClr val="tx1"/>
+    </dgm:txFillClrLst>
+    <dgm:txEffectClrLst/>
+  </dgm:styleLbl>
+  <dgm:styleLbl name="parChTrans1D3">
+    <dgm:fillClrLst meth="repeat">
+      <a:schemeClr val="accent2">
+        <a:tint val="70000"/>
+      </a:schemeClr>
+    </dgm:fillClrLst>
+    <dgm:linClrLst meth="repeat">
+      <a:schemeClr val="accent4"/>
+    </dgm:linClrLst>
+    <dgm:effectClrLst/>
+    <dgm:txLinClrLst/>
+    <dgm:txFillClrLst meth="repeat">
+      <a:schemeClr val="tx1"/>
+    </dgm:txFillClrLst>
+    <dgm:txEffectClrLst/>
+  </dgm:styleLbl>
+  <dgm:styleLbl name="parChTrans1D4">
+    <dgm:fillClrLst meth="repeat">
+      <a:schemeClr val="accent2">
+        <a:tint val="50000"/>
+      </a:schemeClr>
+    </dgm:fillClrLst>
+    <dgm:linClrLst meth="repeat">
+      <a:schemeClr val="accent5"/>
+    </dgm:linClrLst>
+    <dgm:effectClrLst/>
+    <dgm:txLinClrLst/>
+    <dgm:txFillClrLst meth="repeat">
+      <a:schemeClr val="tx1"/>
+    </dgm:txFillClrLst>
+    <dgm:txEffectClrLst/>
+  </dgm:styleLbl>
+  <dgm:styleLbl name="fgAcc1">
+    <dgm:fillClrLst meth="repeat">
+      <a:schemeClr val="lt1">
+        <a:alpha val="90000"/>
+      </a:schemeClr>
+    </dgm:fillClrLst>
+    <dgm:linClrLst>
+      <a:schemeClr val="accent2"/>
+      <a:schemeClr val="accent3"/>
+    </dgm:linClrLst>
+    <dgm:effectClrLst/>
+    <dgm:txLinClrLst/>
+    <dgm:txFillClrLst meth="repeat">
+      <a:schemeClr val="dk1"/>
+    </dgm:txFillClrLst>
+    <dgm:txEffectClrLst/>
+  </dgm:styleLbl>
+  <dgm:styleLbl name="conFgAcc1">
+    <dgm:fillClrLst meth="repeat">
+      <a:schemeClr val="lt1">
+        <a:alpha val="90000"/>
+      </a:schemeClr>
+    </dgm:fillClrLst>
+    <dgm:linClrLst>
+      <a:schemeClr val="accent2"/>
+      <a:schemeClr val="accent3"/>
+    </dgm:linClrLst>
+    <dgm:effectClrLst/>
+    <dgm:txLinClrLst/>
+    <dgm:txFillClrLst meth="repeat">
+      <a:schemeClr val="dk1"/>
+    </dgm:txFillClrLst>
+    <dgm:txEffectClrLst/>
+  </dgm:styleLbl>
+  <dgm:styleLbl name="alignAcc1">
+    <dgm:fillClrLst meth="repeat">
+      <a:schemeClr val="lt1">
+        <a:alpha val="90000"/>
+      </a:schemeClr>
+    </dgm:fillClrLst>
+    <dgm:linClrLst>
+      <a:schemeClr val="accent2"/>
+      <a:schemeClr val="accent3"/>
+    </dgm:linClrLst>
+    <dgm:effectClrLst/>
+    <dgm:txLinClrLst/>
+    <dgm:txFillClrLst meth="repeat">
+      <a:schemeClr val="dk1"/>
+    </dgm:txFillClrLst>
+    <dgm:txEffectClrLst/>
+  </dgm:styleLbl>
+  <dgm:styleLbl name="trAlignAcc1">
+    <dgm:fillClrLst meth="repeat">
+      <a:schemeClr val="lt1">
+        <a:alpha val="40000"/>
+      </a:schemeClr>
+    </dgm:fillClrLst>
+    <dgm:linClrLst meth="repeat">
+      <a:schemeClr val="accent2"/>
+    </dgm:linClrLst>
+    <dgm:effectClrLst/>
+    <dgm:txLinClrLst/>
+    <dgm:txFillClrLst meth="repeat">
+      <a:schemeClr val="dk1"/>
+    </dgm:txFillClrLst>
+    <dgm:txEffectClrLst/>
+  </dgm:styleLbl>
+  <dgm:styleLbl name="bgAcc1">
+    <dgm:fillClrLst meth="repeat">
+      <a:schemeClr val="lt1">
+        <a:alpha val="90000"/>
+      </a:schemeClr>
+    </dgm:fillClrLst>
+    <dgm:linClrLst>
+      <a:schemeClr val="accent2"/>
+      <a:schemeClr val="accent3"/>
+    </dgm:linClrLst>
+    <dgm:effectClrLst/>
+    <dgm:txLinClrLst/>
+    <dgm:txFillClrLst meth="repeat">
+      <a:schemeClr val="dk1"/>
+    </dgm:txFillClrLst>
+    <dgm:txEffectClrLst/>
+  </dgm:styleLbl>
+  <dgm:styleLbl name="solidFgAcc1">
+    <dgm:fillClrLst meth="repeat">
+      <a:schemeClr val="lt1"/>
+    </dgm:fillClrLst>
+    <dgm:linClrLst>
+      <a:schemeClr val="accent2"/>
+      <a:schemeClr val="accent3"/>
+    </dgm:linClrLst>
+    <dgm:effectClrLst/>
+    <dgm:txLinClrLst/>
+    <dgm:txFillClrLst meth="repeat">
+      <a:schemeClr val="dk1"/>
+    </dgm:txFillClrLst>
+    <dgm:txEffectClrLst/>
+  </dgm:styleLbl>
+  <dgm:styleLbl name="solidAlignAcc1">
+    <dgm:fillClrLst meth="repeat">
+      <a:schemeClr val="lt1"/>
+    </dgm:fillClrLst>
+    <dgm:linClrLst>
+      <a:schemeClr val="accent2"/>
+      <a:schemeClr val="accent3"/>
+    </dgm:linClrLst>
+    <dgm:effectClrLst/>
+    <dgm:txLinClrLst/>
+    <dgm:txFillClrLst meth="repeat">
+      <a:schemeClr val="dk1"/>
+    </dgm:txFillClrLst>
+    <dgm:txEffectClrLst/>
+  </dgm:styleLbl>
+  <dgm:styleLbl name="solidBgAcc1">
+    <dgm:fillClrLst meth="repeat">
+      <a:schemeClr val="lt1"/>
+    </dgm:fillClrLst>
+    <dgm:linClrLst>
+      <a:schemeClr val="accent2"/>
+      <a:schemeClr val="accent3"/>
+    </dgm:linClrLst>
+    <dgm:effectClrLst/>
+    <dgm:txLinClrLst/>
+    <dgm:txFillClrLst meth="repeat">
+      <a:schemeClr val="dk1"/>
+    </dgm:txFillClrLst>
+    <dgm:txEffectClrLst/>
+  </dgm:styleLbl>
+  <dgm:styleLbl name="fgAccFollowNode1">
+    <dgm:fillClrLst>
+      <a:schemeClr val="accent2">
+        <a:tint val="40000"/>
+        <a:alpha val="90000"/>
+      </a:schemeClr>
+      <a:schemeClr val="accent3">
+        <a:tint val="40000"/>
+        <a:alpha val="90000"/>
+      </a:schemeClr>
+    </dgm:fillClrLst>
+    <dgm:linClrLst>
+      <a:schemeClr val="accent2">
+        <a:tint val="40000"/>
+        <a:alpha val="90000"/>
+      </a:schemeClr>
+      <a:schemeClr val="accent3">
+        <a:tint val="40000"/>
+        <a:alpha val="90000"/>
+      </a:schemeClr>
+    </dgm:linClrLst>
+    <dgm:effectClrLst/>
+    <dgm:txLinClrLst/>
+    <dgm:txFillClrLst meth="repeat">
+      <a:schemeClr val="dk1"/>
+    </dgm:txFillClrLst>
+    <dgm:txEffectClrLst/>
+  </dgm:styleLbl>
+  <dgm:styleLbl name="alignAccFollowNode1">
+    <dgm:fillClrLst>
+      <a:schemeClr val="accent2">
+        <a:tint val="40000"/>
+        <a:alpha val="90000"/>
+      </a:schemeClr>
+      <a:schemeClr val="accent3">
+        <a:tint val="40000"/>
+        <a:alpha val="90000"/>
+      </a:schemeClr>
+    </dgm:fillClrLst>
+    <dgm:linClrLst>
+      <a:schemeClr val="accent2">
+        <a:tint val="40000"/>
+        <a:alpha val="90000"/>
+      </a:schemeClr>
+      <a:schemeClr val="accent3">
+        <a:tint val="40000"/>
+        <a:alpha val="90000"/>
+      </a:schemeClr>
+    </dgm:linClrLst>
+    <dgm:effectClrLst/>
+    <dgm:txLinClrLst/>
+    <dgm:txFillClrLst meth="repeat">
+      <a:schemeClr val="dk1"/>
+    </dgm:txFillClrLst>
+    <dgm:txEffectClrLst/>
+  </dgm:styleLbl>
+  <dgm:styleLbl name="bgAccFollowNode1">
+    <dgm:fillClrLst>
+      <a:schemeClr val="accent2">
+        <a:tint val="40000"/>
+        <a:alpha val="90000"/>
+      </a:schemeClr>
+      <a:schemeClr val="accent3">
+        <a:tint val="40000"/>
+        <a:alpha val="90000"/>
+      </a:schemeClr>
+    </dgm:fillClrLst>
+    <dgm:linClrLst>
+      <a:schemeClr val="accent2">
+        <a:tint val="40000"/>
+        <a:alpha val="90000"/>
+      </a:schemeClr>
+      <a:schemeClr val="accent3">
+        <a:tint val="40000"/>
+        <a:alpha val="90000"/>
+      </a:schemeClr>
+    </dgm:linClrLst>
+    <dgm:effectClrLst/>
+    <dgm:txLinClrLst/>
+    <dgm:txFillClrLst meth="repeat">
+      <a:schemeClr val="dk1"/>
+    </dgm:txFillClrLst>
+    <dgm:txEffectClrLst/>
+  </dgm:styleLbl>
+  <dgm:styleLbl name="fgAcc0">
+    <dgm:fillClrLst meth="repeat">
+      <a:schemeClr val="lt1">
+        <a:alpha val="90000"/>
+      </a:schemeClr>
+    </dgm:fillClrLst>
+    <dgm:linClrLst>
+      <a:schemeClr val="accent1"/>
+    </dgm:linClrLst>
+    <dgm:effectClrLst/>
+    <dgm:txLinClrLst/>
+    <dgm:txFillClrLst meth="repeat">
+      <a:schemeClr val="dk1"/>
+    </dgm:txFillClrLst>
+    <dgm:txEffectClrLst/>
+  </dgm:styleLbl>
+  <dgm:styleLbl name="fgAcc2">
+    <dgm:fillClrLst meth="repeat">
+      <a:schemeClr val="lt1">
+        <a:alpha val="90000"/>
+      </a:schemeClr>
+    </dgm:fillClrLst>
+    <dgm:linClrLst>
+      <a:schemeClr val="accent3"/>
+    </dgm:linClrLst>
+    <dgm:effectClrLst/>
+    <dgm:txLinClrLst/>
+    <dgm:txFillClrLst meth="repeat">
+      <a:schemeClr val="dk1"/>
+    </dgm:txFillClrLst>
+    <dgm:txEffectClrLst/>
+  </dgm:styleLbl>
+  <dgm:styleLbl name="fgAcc3">
+    <dgm:fillClrLst meth="repeat">
+      <a:schemeClr val="lt1">
+        <a:alpha val="90000"/>
+      </a:schemeClr>
+    </dgm:fillClrLst>
+    <dgm:linClrLst>
+      <a:schemeClr val="accent4"/>
+    </dgm:linClrLst>
+    <dgm:effectClrLst/>
+    <dgm:txLinClrLst/>
+    <dgm:txFillClrLst meth="repeat">
+      <a:schemeClr val="dk1"/>
+    </dgm:txFillClrLst>
+    <dgm:txEffectClrLst/>
+  </dgm:styleLbl>
+  <dgm:styleLbl name="fgAcc4">
+    <dgm:fillClrLst meth="repeat">
+      <a:schemeClr val="lt1">
+        <a:alpha val="90000"/>
+      </a:schemeClr>
+    </dgm:fillClrLst>
+    <dgm:linClrLst>
+      <a:schemeClr val="accent5"/>
+    </dgm:linClrLst>
+    <dgm:effectClrLst/>
+    <dgm:txLinClrLst/>
+    <dgm:txFillClrLst meth="repeat">
+      <a:schemeClr val="dk1"/>
+    </dgm:txFillClrLst>
+    <dgm:txEffectClrLst/>
+  </dgm:styleLbl>
+  <dgm:styleLbl name="bgShp">
+    <dgm:fillClrLst meth="repeat">
+      <a:schemeClr val="accent2">
+        <a:tint val="40000"/>
+      </a:schemeClr>
+    </dgm:fillClrLst>
+    <dgm:linClrLst meth="repeat">
+      <a:schemeClr val="dk1"/>
+    </dgm:linClrLst>
+    <dgm:effectClrLst/>
+    <dgm:txLinClrLst/>
+    <dgm:txFillClrLst meth="repeat">
+      <a:schemeClr val="dk1"/>
+    </dgm:txFillClrLst>
+    <dgm:txEffectClrLst/>
+  </dgm:styleLbl>
+  <dgm:styleLbl name="dkBgShp">
+    <dgm:fillClrLst meth="repeat">
+      <a:schemeClr val="accent2">
+        <a:shade val="90000"/>
+      </a:schemeClr>
+    </dgm:fillClrLst>
+    <dgm:linClrLst meth="repeat">
+      <a:schemeClr val="dk1"/>
+    </dgm:linClrLst>
+    <dgm:effectClrLst/>
+    <dgm:txLinClrLst/>
+    <dgm:txFillClrLst meth="repeat">
+      <a:schemeClr val="lt1"/>
+    </dgm:txFillClrLst>
+    <dgm:txEffectClrLst/>
+  </dgm:styleLbl>
+  <dgm:styleLbl name="trBgShp">
+    <dgm:fillClrLst meth="repeat">
+      <a:schemeClr val="accent2">
+        <a:tint val="50000"/>
+        <a:alpha val="40000"/>
+      </a:schemeClr>
+    </dgm:fillClrLst>
+    <dgm:linClrLst meth="repeat">
+      <a:schemeClr val="accent2"/>
+    </dgm:linClrLst>
+    <dgm:effectClrLst/>
+    <dgm:txLinClrLst/>
+    <dgm:txFillClrLst meth="repeat">
+      <a:schemeClr val="lt1"/>
+    </dgm:txFillClrLst>
+    <dgm:txEffectClrLst/>
+  </dgm:styleLbl>
+  <dgm:styleLbl name="fgShp">
+    <dgm:fillClrLst meth="repeat">
+      <a:schemeClr val="accent2">
         <a:tint val="40000"/>
       </a:schemeClr>
     </dgm:fillClrLst>
@@ -4517,6 +5301,333 @@
     <dgm:cxn modelId="{8FA41228-1E14-4CB4-B0C1-0DEA67170BCB}" type="presParOf" srcId="{A06ACAE2-B406-4FB0-B836-7DD1C57A3FE6}" destId="{2B03FA3E-965E-49D7-8830-1D92B487E501}" srcOrd="4" destOrd="0" presId="urn:microsoft.com/office/officeart/2005/8/layout/vList2"/>
     <dgm:cxn modelId="{64867869-F790-4CF7-95A9-9B70E5D2A8EE}" type="presParOf" srcId="{A06ACAE2-B406-4FB0-B836-7DD1C57A3FE6}" destId="{C10B31E7-6C9C-4407-B5A3-659CDC48DD07}" srcOrd="5" destOrd="0" presId="urn:microsoft.com/office/officeart/2005/8/layout/vList2"/>
     <dgm:cxn modelId="{AFE03E7D-2314-4278-AEDA-0646023CA94A}" type="presParOf" srcId="{A06ACAE2-B406-4FB0-B836-7DD1C57A3FE6}" destId="{36668694-BD0F-4ACB-9B1C-330C28227C93}" srcOrd="6" destOrd="0" presId="urn:microsoft.com/office/officeart/2005/8/layout/vList2"/>
+  </dgm:cxnLst>
+  <dgm:bg/>
+  <dgm:whole/>
+  <dgm:extLst>
+    <a:ext uri="http://schemas.microsoft.com/office/drawing/2008/diagram">
+      <dsp:dataModelExt xmlns:dsp="http://schemas.microsoft.com/office/drawing/2008/diagram" relId="rId6" minVer="http://schemas.openxmlformats.org/drawingml/2006/diagram"/>
+    </a:ext>
+  </dgm:extLst>
+</dgm:dataModel>
+</file>
+
+<file path=ppt/diagrams/data5.xml><?xml version="1.0" encoding="utf-8"?>
+<dgm:dataModel xmlns:dgm="http://schemas.openxmlformats.org/drawingml/2006/diagram" xmlns:a="http://schemas.openxmlformats.org/drawingml/2006/main">
+  <dgm:ptLst>
+    <dgm:pt modelId="{AB845557-1596-41BE-AC83-2CFE41DB062F}" type="doc">
+      <dgm:prSet loTypeId="urn:microsoft.com/office/officeart/2005/8/layout/hierarchy3" loCatId="hierarchy" qsTypeId="urn:microsoft.com/office/officeart/2005/8/quickstyle/simple1" qsCatId="simple" csTypeId="urn:microsoft.com/office/officeart/2005/8/colors/colorful2" csCatId="colorful"/>
+      <dgm:spPr/>
+      <dgm:t>
+        <a:bodyPr/>
+        <a:lstStyle/>
+        <a:p>
+          <a:endParaRPr lang="en-US"/>
+        </a:p>
+      </dgm:t>
+    </dgm:pt>
+    <dgm:pt modelId="{4F4D606F-E414-44DF-B9EE-DA7748711977}">
+      <dgm:prSet/>
+      <dgm:spPr/>
+      <dgm:t>
+        <a:bodyPr/>
+        <a:lstStyle/>
+        <a:p>
+          <a:r>
+            <a:rPr lang="en-US"/>
+            <a:t>C++: var&amp; x</a:t>
+          </a:r>
+        </a:p>
+      </dgm:t>
+    </dgm:pt>
+    <dgm:pt modelId="{47C4218A-5073-4DD3-8096-26BD2476CD2B}" type="parTrans" cxnId="{98B1CF7F-27EB-4F30-AC17-8B96CF217619}">
+      <dgm:prSet/>
+      <dgm:spPr/>
+      <dgm:t>
+        <a:bodyPr/>
+        <a:lstStyle/>
+        <a:p>
+          <a:endParaRPr lang="en-US"/>
+        </a:p>
+      </dgm:t>
+    </dgm:pt>
+    <dgm:pt modelId="{E0B66550-F65F-406C-A092-8E621F140DF7}" type="sibTrans" cxnId="{98B1CF7F-27EB-4F30-AC17-8B96CF217619}">
+      <dgm:prSet/>
+      <dgm:spPr/>
+      <dgm:t>
+        <a:bodyPr/>
+        <a:lstStyle/>
+        <a:p>
+          <a:endParaRPr lang="en-US"/>
+        </a:p>
+      </dgm:t>
+    </dgm:pt>
+    <dgm:pt modelId="{8C671F94-67E9-4D0C-8D32-70B8FE81B121}">
+      <dgm:prSet/>
+      <dgm:spPr/>
+      <dgm:t>
+        <a:bodyPr/>
+        <a:lstStyle/>
+        <a:p>
+          <a:r>
+            <a:rPr lang="en-US"/>
+            <a:t>C#: ref var x</a:t>
+          </a:r>
+        </a:p>
+      </dgm:t>
+    </dgm:pt>
+    <dgm:pt modelId="{45A7DD96-87CB-4B77-B4B6-591FB0FC50B2}" type="parTrans" cxnId="{960DD08C-8CA7-4BEF-B550-A28C2D028433}">
+      <dgm:prSet/>
+      <dgm:spPr/>
+      <dgm:t>
+        <a:bodyPr/>
+        <a:lstStyle/>
+        <a:p>
+          <a:endParaRPr lang="en-US"/>
+        </a:p>
+      </dgm:t>
+    </dgm:pt>
+    <dgm:pt modelId="{1E03F395-8F30-451D-BE67-A8F22704A4D7}" type="sibTrans" cxnId="{960DD08C-8CA7-4BEF-B550-A28C2D028433}">
+      <dgm:prSet/>
+      <dgm:spPr/>
+      <dgm:t>
+        <a:bodyPr/>
+        <a:lstStyle/>
+        <a:p>
+          <a:endParaRPr lang="en-US"/>
+        </a:p>
+      </dgm:t>
+    </dgm:pt>
+    <dgm:pt modelId="{2F47D756-2006-424D-8915-19328988CBEB}">
+      <dgm:prSet/>
+      <dgm:spPr/>
+      <dgm:t>
+        <a:bodyPr/>
+        <a:lstStyle/>
+        <a:p>
+          <a:r>
+            <a:rPr lang="en-US"/>
+            <a:t>C#</a:t>
+          </a:r>
+          <a:r>
+            <a:rPr lang="ko-KR"/>
+            <a:t>에서는 입력과 출력 </a:t>
+          </a:r>
+          <a:r>
+            <a:rPr lang="en-US"/>
+            <a:t>reference</a:t>
+          </a:r>
+          <a:r>
+            <a:rPr lang="ko-KR"/>
+            <a:t>를 </a:t>
+          </a:r>
+          <a:r>
+            <a:rPr lang="en-US"/>
+            <a:t>in, out</a:t>
+          </a:r>
+          <a:r>
+            <a:rPr lang="ko-KR"/>
+            <a:t>으로 구분 가능함</a:t>
+          </a:r>
+          <a:endParaRPr lang="en-US"/>
+        </a:p>
+      </dgm:t>
+    </dgm:pt>
+    <dgm:pt modelId="{C65097C7-C224-45BD-85F0-62A6F08903F1}" type="parTrans" cxnId="{843BB5A7-C764-4780-BFFE-5E3C447E9E55}">
+      <dgm:prSet/>
+      <dgm:spPr/>
+      <dgm:t>
+        <a:bodyPr/>
+        <a:lstStyle/>
+        <a:p>
+          <a:endParaRPr lang="en-US"/>
+        </a:p>
+      </dgm:t>
+    </dgm:pt>
+    <dgm:pt modelId="{C079E292-A30C-4391-AD8F-A95BA0A7C3F5}" type="sibTrans" cxnId="{843BB5A7-C764-4780-BFFE-5E3C447E9E55}">
+      <dgm:prSet/>
+      <dgm:spPr/>
+      <dgm:t>
+        <a:bodyPr/>
+        <a:lstStyle/>
+        <a:p>
+          <a:endParaRPr lang="en-US"/>
+        </a:p>
+      </dgm:t>
+    </dgm:pt>
+    <dgm:pt modelId="{DD4637D2-A988-4F5F-AAD6-035FF10D3563}">
+      <dgm:prSet/>
+      <dgm:spPr/>
+      <dgm:t>
+        <a:bodyPr/>
+        <a:lstStyle/>
+        <a:p>
+          <a:r>
+            <a:rPr lang="en-US"/>
+            <a:t>in, out </a:t>
+          </a:r>
+          <a:r>
+            <a:rPr lang="ko-KR"/>
+            <a:t>대신 </a:t>
+          </a:r>
+          <a:r>
+            <a:rPr lang="en-US"/>
+            <a:t>ref</a:t>
+          </a:r>
+          <a:r>
+            <a:rPr lang="ko-KR"/>
+            <a:t>를 쓸 수 있지만</a:t>
+          </a:r>
+          <a:r>
+            <a:rPr lang="en-US"/>
+            <a:t>, ref</a:t>
+          </a:r>
+          <a:r>
+            <a:rPr lang="ko-KR"/>
+            <a:t>는 입출력에 모두 적용 가능하여 입출력이 구분되지 않음</a:t>
+          </a:r>
+          <a:endParaRPr lang="en-US"/>
+        </a:p>
+      </dgm:t>
+    </dgm:pt>
+    <dgm:pt modelId="{705468F0-1A24-477E-ADF3-BEEF4126919A}" type="parTrans" cxnId="{8ED4F205-B342-43C8-B67B-50254FE4C39C}">
+      <dgm:prSet/>
+      <dgm:spPr/>
+      <dgm:t>
+        <a:bodyPr/>
+        <a:lstStyle/>
+        <a:p>
+          <a:endParaRPr lang="en-US"/>
+        </a:p>
+      </dgm:t>
+    </dgm:pt>
+    <dgm:pt modelId="{C4CBE99A-656D-4C5D-96A8-C244C8D8966A}" type="sibTrans" cxnId="{8ED4F205-B342-43C8-B67B-50254FE4C39C}">
+      <dgm:prSet/>
+      <dgm:spPr/>
+      <dgm:t>
+        <a:bodyPr/>
+        <a:lstStyle/>
+        <a:p>
+          <a:endParaRPr lang="en-US"/>
+        </a:p>
+      </dgm:t>
+    </dgm:pt>
+    <dgm:pt modelId="{592D5809-AFF1-4441-900E-BCFE4B8BDCE3}" type="pres">
+      <dgm:prSet presAssocID="{AB845557-1596-41BE-AC83-2CFE41DB062F}" presName="diagram" presStyleCnt="0">
+        <dgm:presLayoutVars>
+          <dgm:chPref val="1"/>
+          <dgm:dir/>
+          <dgm:animOne val="branch"/>
+          <dgm:animLvl val="lvl"/>
+          <dgm:resizeHandles/>
+        </dgm:presLayoutVars>
+      </dgm:prSet>
+      <dgm:spPr/>
+    </dgm:pt>
+    <dgm:pt modelId="{47608F37-BEB5-4705-B550-EB7B6FA4AF51}" type="pres">
+      <dgm:prSet presAssocID="{4F4D606F-E414-44DF-B9EE-DA7748711977}" presName="root" presStyleCnt="0"/>
+      <dgm:spPr/>
+    </dgm:pt>
+    <dgm:pt modelId="{00B3EDBD-2E8D-46FF-8242-CA2D53DEA1C5}" type="pres">
+      <dgm:prSet presAssocID="{4F4D606F-E414-44DF-B9EE-DA7748711977}" presName="rootComposite" presStyleCnt="0"/>
+      <dgm:spPr/>
+    </dgm:pt>
+    <dgm:pt modelId="{D0A0B405-6ED1-498C-AFEC-D2E02FA1DB79}" type="pres">
+      <dgm:prSet presAssocID="{4F4D606F-E414-44DF-B9EE-DA7748711977}" presName="rootText" presStyleLbl="node1" presStyleIdx="0" presStyleCnt="3"/>
+      <dgm:spPr/>
+    </dgm:pt>
+    <dgm:pt modelId="{91AFB534-D7B6-4709-B30F-B8A5E7AE0402}" type="pres">
+      <dgm:prSet presAssocID="{4F4D606F-E414-44DF-B9EE-DA7748711977}" presName="rootConnector" presStyleLbl="node1" presStyleIdx="0" presStyleCnt="3"/>
+      <dgm:spPr/>
+    </dgm:pt>
+    <dgm:pt modelId="{45E21723-3B1B-4B7B-A31C-A65FDF559927}" type="pres">
+      <dgm:prSet presAssocID="{4F4D606F-E414-44DF-B9EE-DA7748711977}" presName="childShape" presStyleCnt="0"/>
+      <dgm:spPr/>
+    </dgm:pt>
+    <dgm:pt modelId="{817E9EEC-017C-4257-9C1A-8D4A4F525351}" type="pres">
+      <dgm:prSet presAssocID="{8C671F94-67E9-4D0C-8D32-70B8FE81B121}" presName="root" presStyleCnt="0"/>
+      <dgm:spPr/>
+    </dgm:pt>
+    <dgm:pt modelId="{3CA49401-107D-4EB0-8D07-C6FDD8FDE818}" type="pres">
+      <dgm:prSet presAssocID="{8C671F94-67E9-4D0C-8D32-70B8FE81B121}" presName="rootComposite" presStyleCnt="0"/>
+      <dgm:spPr/>
+    </dgm:pt>
+    <dgm:pt modelId="{9A67686C-1BD1-4CD0-B27C-10FD1BF40336}" type="pres">
+      <dgm:prSet presAssocID="{8C671F94-67E9-4D0C-8D32-70B8FE81B121}" presName="rootText" presStyleLbl="node1" presStyleIdx="1" presStyleCnt="3"/>
+      <dgm:spPr/>
+    </dgm:pt>
+    <dgm:pt modelId="{4903E3F3-3552-4A18-9191-D70045BAF06B}" type="pres">
+      <dgm:prSet presAssocID="{8C671F94-67E9-4D0C-8D32-70B8FE81B121}" presName="rootConnector" presStyleLbl="node1" presStyleIdx="1" presStyleCnt="3"/>
+      <dgm:spPr/>
+    </dgm:pt>
+    <dgm:pt modelId="{7308A0DB-D098-4BC1-98F9-F180567F7AA7}" type="pres">
+      <dgm:prSet presAssocID="{8C671F94-67E9-4D0C-8D32-70B8FE81B121}" presName="childShape" presStyleCnt="0"/>
+      <dgm:spPr/>
+    </dgm:pt>
+    <dgm:pt modelId="{2A7541BB-4ABB-4051-B63B-EE3643E81762}" type="pres">
+      <dgm:prSet presAssocID="{2F47D756-2006-424D-8915-19328988CBEB}" presName="root" presStyleCnt="0"/>
+      <dgm:spPr/>
+    </dgm:pt>
+    <dgm:pt modelId="{AB5685DA-DECC-4599-8E08-EA1A5418155C}" type="pres">
+      <dgm:prSet presAssocID="{2F47D756-2006-424D-8915-19328988CBEB}" presName="rootComposite" presStyleCnt="0"/>
+      <dgm:spPr/>
+    </dgm:pt>
+    <dgm:pt modelId="{F30730F3-2E91-4A1A-AE3B-1EF295110B61}" type="pres">
+      <dgm:prSet presAssocID="{2F47D756-2006-424D-8915-19328988CBEB}" presName="rootText" presStyleLbl="node1" presStyleIdx="2" presStyleCnt="3"/>
+      <dgm:spPr/>
+    </dgm:pt>
+    <dgm:pt modelId="{D7F483A0-4E11-4EFB-8C1A-2728BA64D545}" type="pres">
+      <dgm:prSet presAssocID="{2F47D756-2006-424D-8915-19328988CBEB}" presName="rootConnector" presStyleLbl="node1" presStyleIdx="2" presStyleCnt="3"/>
+      <dgm:spPr/>
+    </dgm:pt>
+    <dgm:pt modelId="{C4A8875C-6DE4-4142-8751-81A93D58620E}" type="pres">
+      <dgm:prSet presAssocID="{2F47D756-2006-424D-8915-19328988CBEB}" presName="childShape" presStyleCnt="0"/>
+      <dgm:spPr/>
+    </dgm:pt>
+    <dgm:pt modelId="{FE794705-6244-4BAF-8545-D97E143BF368}" type="pres">
+      <dgm:prSet presAssocID="{705468F0-1A24-477E-ADF3-BEEF4126919A}" presName="Name13" presStyleLbl="parChTrans1D2" presStyleIdx="0" presStyleCnt="1"/>
+      <dgm:spPr/>
+    </dgm:pt>
+    <dgm:pt modelId="{34BBCE51-5FB3-4A25-BDDF-5B5B4CA3DAF0}" type="pres">
+      <dgm:prSet presAssocID="{DD4637D2-A988-4F5F-AAD6-035FF10D3563}" presName="childText" presStyleLbl="bgAcc1" presStyleIdx="0" presStyleCnt="1">
+        <dgm:presLayoutVars>
+          <dgm:bulletEnabled val="1"/>
+        </dgm:presLayoutVars>
+      </dgm:prSet>
+      <dgm:spPr/>
+    </dgm:pt>
+  </dgm:ptLst>
+  <dgm:cxnLst>
+    <dgm:cxn modelId="{8ED4F205-B342-43C8-B67B-50254FE4C39C}" srcId="{2F47D756-2006-424D-8915-19328988CBEB}" destId="{DD4637D2-A988-4F5F-AAD6-035FF10D3563}" srcOrd="0" destOrd="0" parTransId="{705468F0-1A24-477E-ADF3-BEEF4126919A}" sibTransId="{C4CBE99A-656D-4C5D-96A8-C244C8D8966A}"/>
+    <dgm:cxn modelId="{E552030C-19C0-47B2-ABE5-C425879ED1F4}" type="presOf" srcId="{8C671F94-67E9-4D0C-8D32-70B8FE81B121}" destId="{4903E3F3-3552-4A18-9191-D70045BAF06B}" srcOrd="1" destOrd="0" presId="urn:microsoft.com/office/officeart/2005/8/layout/hierarchy3"/>
+    <dgm:cxn modelId="{41145436-CF23-4A62-A4FF-8FB6F58E0707}" type="presOf" srcId="{2F47D756-2006-424D-8915-19328988CBEB}" destId="{D7F483A0-4E11-4EFB-8C1A-2728BA64D545}" srcOrd="1" destOrd="0" presId="urn:microsoft.com/office/officeart/2005/8/layout/hierarchy3"/>
+    <dgm:cxn modelId="{E82D013A-325F-44A5-A5FB-473C4322D42B}" type="presOf" srcId="{4F4D606F-E414-44DF-B9EE-DA7748711977}" destId="{D0A0B405-6ED1-498C-AFEC-D2E02FA1DB79}" srcOrd="0" destOrd="0" presId="urn:microsoft.com/office/officeart/2005/8/layout/hierarchy3"/>
+    <dgm:cxn modelId="{85060267-6AD8-45E2-9BA5-5F27114BBE43}" type="presOf" srcId="{705468F0-1A24-477E-ADF3-BEEF4126919A}" destId="{FE794705-6244-4BAF-8545-D97E143BF368}" srcOrd="0" destOrd="0" presId="urn:microsoft.com/office/officeart/2005/8/layout/hierarchy3"/>
+    <dgm:cxn modelId="{2A5D7275-EDB1-4100-B4E4-4DB00EE1359E}" type="presOf" srcId="{AB845557-1596-41BE-AC83-2CFE41DB062F}" destId="{592D5809-AFF1-4441-900E-BCFE4B8BDCE3}" srcOrd="0" destOrd="0" presId="urn:microsoft.com/office/officeart/2005/8/layout/hierarchy3"/>
+    <dgm:cxn modelId="{98C99857-FB20-4162-BED0-89634CD6C5F5}" type="presOf" srcId="{4F4D606F-E414-44DF-B9EE-DA7748711977}" destId="{91AFB534-D7B6-4709-B30F-B8A5E7AE0402}" srcOrd="1" destOrd="0" presId="urn:microsoft.com/office/officeart/2005/8/layout/hierarchy3"/>
+    <dgm:cxn modelId="{98B1CF7F-27EB-4F30-AC17-8B96CF217619}" srcId="{AB845557-1596-41BE-AC83-2CFE41DB062F}" destId="{4F4D606F-E414-44DF-B9EE-DA7748711977}" srcOrd="0" destOrd="0" parTransId="{47C4218A-5073-4DD3-8096-26BD2476CD2B}" sibTransId="{E0B66550-F65F-406C-A092-8E621F140DF7}"/>
+    <dgm:cxn modelId="{960DD08C-8CA7-4BEF-B550-A28C2D028433}" srcId="{AB845557-1596-41BE-AC83-2CFE41DB062F}" destId="{8C671F94-67E9-4D0C-8D32-70B8FE81B121}" srcOrd="1" destOrd="0" parTransId="{45A7DD96-87CB-4B77-B4B6-591FB0FC50B2}" sibTransId="{1E03F395-8F30-451D-BE67-A8F22704A4D7}"/>
+    <dgm:cxn modelId="{843BB5A7-C764-4780-BFFE-5E3C447E9E55}" srcId="{AB845557-1596-41BE-AC83-2CFE41DB062F}" destId="{2F47D756-2006-424D-8915-19328988CBEB}" srcOrd="2" destOrd="0" parTransId="{C65097C7-C224-45BD-85F0-62A6F08903F1}" sibTransId="{C079E292-A30C-4391-AD8F-A95BA0A7C3F5}"/>
+    <dgm:cxn modelId="{67562DF0-B13C-4F19-AFC3-7C06D2469DEC}" type="presOf" srcId="{8C671F94-67E9-4D0C-8D32-70B8FE81B121}" destId="{9A67686C-1BD1-4CD0-B27C-10FD1BF40336}" srcOrd="0" destOrd="0" presId="urn:microsoft.com/office/officeart/2005/8/layout/hierarchy3"/>
+    <dgm:cxn modelId="{E91FCAF7-306B-4ED1-939D-41B709375AE4}" type="presOf" srcId="{DD4637D2-A988-4F5F-AAD6-035FF10D3563}" destId="{34BBCE51-5FB3-4A25-BDDF-5B5B4CA3DAF0}" srcOrd="0" destOrd="0" presId="urn:microsoft.com/office/officeart/2005/8/layout/hierarchy3"/>
+    <dgm:cxn modelId="{CB0BB9FC-2156-459D-AFF1-0E5517D814BD}" type="presOf" srcId="{2F47D756-2006-424D-8915-19328988CBEB}" destId="{F30730F3-2E91-4A1A-AE3B-1EF295110B61}" srcOrd="0" destOrd="0" presId="urn:microsoft.com/office/officeart/2005/8/layout/hierarchy3"/>
+    <dgm:cxn modelId="{23B07377-0376-41FB-B68A-8012E17DDFA1}" type="presParOf" srcId="{592D5809-AFF1-4441-900E-BCFE4B8BDCE3}" destId="{47608F37-BEB5-4705-B550-EB7B6FA4AF51}" srcOrd="0" destOrd="0" presId="urn:microsoft.com/office/officeart/2005/8/layout/hierarchy3"/>
+    <dgm:cxn modelId="{837E0981-008D-4C63-BADC-91EE88428C01}" type="presParOf" srcId="{47608F37-BEB5-4705-B550-EB7B6FA4AF51}" destId="{00B3EDBD-2E8D-46FF-8242-CA2D53DEA1C5}" srcOrd="0" destOrd="0" presId="urn:microsoft.com/office/officeart/2005/8/layout/hierarchy3"/>
+    <dgm:cxn modelId="{D91F0E3E-28BB-4C23-83B7-2548A99651C5}" type="presParOf" srcId="{00B3EDBD-2E8D-46FF-8242-CA2D53DEA1C5}" destId="{D0A0B405-6ED1-498C-AFEC-D2E02FA1DB79}" srcOrd="0" destOrd="0" presId="urn:microsoft.com/office/officeart/2005/8/layout/hierarchy3"/>
+    <dgm:cxn modelId="{06785007-C90C-4467-BA2B-D9DDECD1F855}" type="presParOf" srcId="{00B3EDBD-2E8D-46FF-8242-CA2D53DEA1C5}" destId="{91AFB534-D7B6-4709-B30F-B8A5E7AE0402}" srcOrd="1" destOrd="0" presId="urn:microsoft.com/office/officeart/2005/8/layout/hierarchy3"/>
+    <dgm:cxn modelId="{8246F7BA-E568-4C98-B8E7-1A8735085EAA}" type="presParOf" srcId="{47608F37-BEB5-4705-B550-EB7B6FA4AF51}" destId="{45E21723-3B1B-4B7B-A31C-A65FDF559927}" srcOrd="1" destOrd="0" presId="urn:microsoft.com/office/officeart/2005/8/layout/hierarchy3"/>
+    <dgm:cxn modelId="{AF1CFB48-F41F-4D01-95B4-383815D5CFFC}" type="presParOf" srcId="{592D5809-AFF1-4441-900E-BCFE4B8BDCE3}" destId="{817E9EEC-017C-4257-9C1A-8D4A4F525351}" srcOrd="1" destOrd="0" presId="urn:microsoft.com/office/officeart/2005/8/layout/hierarchy3"/>
+    <dgm:cxn modelId="{99AB9E01-37DB-411B-A35B-E8303FF61D91}" type="presParOf" srcId="{817E9EEC-017C-4257-9C1A-8D4A4F525351}" destId="{3CA49401-107D-4EB0-8D07-C6FDD8FDE818}" srcOrd="0" destOrd="0" presId="urn:microsoft.com/office/officeart/2005/8/layout/hierarchy3"/>
+    <dgm:cxn modelId="{54192D5E-C62D-403F-AA99-454CFEDA12E4}" type="presParOf" srcId="{3CA49401-107D-4EB0-8D07-C6FDD8FDE818}" destId="{9A67686C-1BD1-4CD0-B27C-10FD1BF40336}" srcOrd="0" destOrd="0" presId="urn:microsoft.com/office/officeart/2005/8/layout/hierarchy3"/>
+    <dgm:cxn modelId="{5C56B1DA-816E-4645-86B5-0D93EFBCA2E3}" type="presParOf" srcId="{3CA49401-107D-4EB0-8D07-C6FDD8FDE818}" destId="{4903E3F3-3552-4A18-9191-D70045BAF06B}" srcOrd="1" destOrd="0" presId="urn:microsoft.com/office/officeart/2005/8/layout/hierarchy3"/>
+    <dgm:cxn modelId="{1931CA8E-C61C-4C86-8FD2-8E59648910DA}" type="presParOf" srcId="{817E9EEC-017C-4257-9C1A-8D4A4F525351}" destId="{7308A0DB-D098-4BC1-98F9-F180567F7AA7}" srcOrd="1" destOrd="0" presId="urn:microsoft.com/office/officeart/2005/8/layout/hierarchy3"/>
+    <dgm:cxn modelId="{20F2FE6E-FF59-46A2-B8BC-F36DB28ED59E}" type="presParOf" srcId="{592D5809-AFF1-4441-900E-BCFE4B8BDCE3}" destId="{2A7541BB-4ABB-4051-B63B-EE3643E81762}" srcOrd="2" destOrd="0" presId="urn:microsoft.com/office/officeart/2005/8/layout/hierarchy3"/>
+    <dgm:cxn modelId="{CA05408A-3C3B-44E9-A796-7F607C23838E}" type="presParOf" srcId="{2A7541BB-4ABB-4051-B63B-EE3643E81762}" destId="{AB5685DA-DECC-4599-8E08-EA1A5418155C}" srcOrd="0" destOrd="0" presId="urn:microsoft.com/office/officeart/2005/8/layout/hierarchy3"/>
+    <dgm:cxn modelId="{10E986DF-F5C9-4CF0-A4D1-442AF025035F}" type="presParOf" srcId="{AB5685DA-DECC-4599-8E08-EA1A5418155C}" destId="{F30730F3-2E91-4A1A-AE3B-1EF295110B61}" srcOrd="0" destOrd="0" presId="urn:microsoft.com/office/officeart/2005/8/layout/hierarchy3"/>
+    <dgm:cxn modelId="{43789C64-E962-4DBA-9FED-8F52EDEBB0D2}" type="presParOf" srcId="{AB5685DA-DECC-4599-8E08-EA1A5418155C}" destId="{D7F483A0-4E11-4EFB-8C1A-2728BA64D545}" srcOrd="1" destOrd="0" presId="urn:microsoft.com/office/officeart/2005/8/layout/hierarchy3"/>
+    <dgm:cxn modelId="{AA0AC618-9108-4B00-9689-5F3417A02F53}" type="presParOf" srcId="{2A7541BB-4ABB-4051-B63B-EE3643E81762}" destId="{C4A8875C-6DE4-4142-8751-81A93D58620E}" srcOrd="1" destOrd="0" presId="urn:microsoft.com/office/officeart/2005/8/layout/hierarchy3"/>
+    <dgm:cxn modelId="{81E82C7F-FFDF-454C-90EA-6B0A1A205F06}" type="presParOf" srcId="{C4A8875C-6DE4-4142-8751-81A93D58620E}" destId="{FE794705-6244-4BAF-8545-D97E143BF368}" srcOrd="0" destOrd="0" presId="urn:microsoft.com/office/officeart/2005/8/layout/hierarchy3"/>
+    <dgm:cxn modelId="{087B38A8-AAA5-46FB-82FB-7EE39C877C1C}" type="presParOf" srcId="{C4A8875C-6DE4-4142-8751-81A93D58620E}" destId="{34BBCE51-5FB3-4A25-BDDF-5B5B4CA3DAF0}" srcOrd="1" destOrd="0" presId="urn:microsoft.com/office/officeart/2005/8/layout/hierarchy3"/>
   </dgm:cxnLst>
   <dgm:bg/>
   <dgm:whole/>
@@ -6461,6 +7572,437 @@
 </dsp:drawing>
 </file>
 
+<file path=ppt/diagrams/drawing5.xml><?xml version="1.0" encoding="utf-8"?>
+<dsp:drawing xmlns:dgm="http://schemas.openxmlformats.org/drawingml/2006/diagram" xmlns:dsp="http://schemas.microsoft.com/office/drawing/2008/diagram" xmlns:a="http://schemas.openxmlformats.org/drawingml/2006/main">
+  <dsp:spTree>
+    <dsp:nvGrpSpPr>
+      <dsp:cNvPr id="0" name=""/>
+      <dsp:cNvGrpSpPr/>
+    </dsp:nvGrpSpPr>
+    <dsp:grpSpPr/>
+    <dsp:sp modelId="{D0A0B405-6ED1-498C-AFEC-D2E02FA1DB79}">
+      <dsp:nvSpPr>
+        <dsp:cNvPr id="0" name=""/>
+        <dsp:cNvSpPr/>
+      </dsp:nvSpPr>
+      <dsp:spPr>
+        <a:xfrm>
+          <a:off x="1283" y="284843"/>
+          <a:ext cx="3003723" cy="1501861"/>
+        </a:xfrm>
+        <a:prstGeom prst="roundRect">
+          <a:avLst>
+            <a:gd name="adj" fmla="val 10000"/>
+          </a:avLst>
+        </a:prstGeom>
+        <a:solidFill>
+          <a:schemeClr val="accent2">
+            <a:hueOff val="0"/>
+            <a:satOff val="0"/>
+            <a:lumOff val="0"/>
+            <a:alphaOff val="0"/>
+          </a:schemeClr>
+        </a:solidFill>
+        <a:ln w="19050" cap="flat" cmpd="sng" algn="ctr">
+          <a:solidFill>
+            <a:schemeClr val="lt1">
+              <a:hueOff val="0"/>
+              <a:satOff val="0"/>
+              <a:lumOff val="0"/>
+              <a:alphaOff val="0"/>
+            </a:schemeClr>
+          </a:solidFill>
+          <a:prstDash val="solid"/>
+          <a:miter lim="800000"/>
+        </a:ln>
+        <a:effectLst/>
+      </dsp:spPr>
+      <dsp:style>
+        <a:lnRef idx="2">
+          <a:scrgbClr r="0" g="0" b="0"/>
+        </a:lnRef>
+        <a:fillRef idx="1">
+          <a:scrgbClr r="0" g="0" b="0"/>
+        </a:fillRef>
+        <a:effectRef idx="0">
+          <a:scrgbClr r="0" g="0" b="0"/>
+        </a:effectRef>
+        <a:fontRef idx="minor">
+          <a:schemeClr val="lt1"/>
+        </a:fontRef>
+      </dsp:style>
+      <dsp:txBody>
+        <a:bodyPr spcFirstLastPara="0" vert="horz" wrap="square" lIns="41910" tIns="27940" rIns="41910" bIns="27940" numCol="1" spcCol="1270" anchor="ctr" anchorCtr="0">
+          <a:noAutofit/>
+        </a:bodyPr>
+        <a:lstStyle/>
+        <a:p>
+          <a:pPr marL="0" lvl="0" indent="0" algn="ctr" defTabSz="977900">
+            <a:lnSpc>
+              <a:spcPct val="90000"/>
+            </a:lnSpc>
+            <a:spcBef>
+              <a:spcPct val="0"/>
+            </a:spcBef>
+            <a:spcAft>
+              <a:spcPct val="35000"/>
+            </a:spcAft>
+            <a:buNone/>
+          </a:pPr>
+          <a:r>
+            <a:rPr lang="en-US" sz="2200" kern="1200"/>
+            <a:t>C++: var&amp; x</a:t>
+          </a:r>
+        </a:p>
+      </dsp:txBody>
+      <dsp:txXfrm>
+        <a:off x="45271" y="328831"/>
+        <a:ext cx="2915747" cy="1413885"/>
+      </dsp:txXfrm>
+    </dsp:sp>
+    <dsp:sp modelId="{9A67686C-1BD1-4CD0-B27C-10FD1BF40336}">
+      <dsp:nvSpPr>
+        <dsp:cNvPr id="0" name=""/>
+        <dsp:cNvSpPr/>
+      </dsp:nvSpPr>
+      <dsp:spPr>
+        <a:xfrm>
+          <a:off x="3755938" y="284843"/>
+          <a:ext cx="3003723" cy="1501861"/>
+        </a:xfrm>
+        <a:prstGeom prst="roundRect">
+          <a:avLst>
+            <a:gd name="adj" fmla="val 10000"/>
+          </a:avLst>
+        </a:prstGeom>
+        <a:solidFill>
+          <a:schemeClr val="accent2">
+            <a:hueOff val="3221807"/>
+            <a:satOff val="-9246"/>
+            <a:lumOff val="-14805"/>
+            <a:alphaOff val="0"/>
+          </a:schemeClr>
+        </a:solidFill>
+        <a:ln w="19050" cap="flat" cmpd="sng" algn="ctr">
+          <a:solidFill>
+            <a:schemeClr val="lt1">
+              <a:hueOff val="0"/>
+              <a:satOff val="0"/>
+              <a:lumOff val="0"/>
+              <a:alphaOff val="0"/>
+            </a:schemeClr>
+          </a:solidFill>
+          <a:prstDash val="solid"/>
+          <a:miter lim="800000"/>
+        </a:ln>
+        <a:effectLst/>
+      </dsp:spPr>
+      <dsp:style>
+        <a:lnRef idx="2">
+          <a:scrgbClr r="0" g="0" b="0"/>
+        </a:lnRef>
+        <a:fillRef idx="1">
+          <a:scrgbClr r="0" g="0" b="0"/>
+        </a:fillRef>
+        <a:effectRef idx="0">
+          <a:scrgbClr r="0" g="0" b="0"/>
+        </a:effectRef>
+        <a:fontRef idx="minor">
+          <a:schemeClr val="lt1"/>
+        </a:fontRef>
+      </dsp:style>
+      <dsp:txBody>
+        <a:bodyPr spcFirstLastPara="0" vert="horz" wrap="square" lIns="41910" tIns="27940" rIns="41910" bIns="27940" numCol="1" spcCol="1270" anchor="ctr" anchorCtr="0">
+          <a:noAutofit/>
+        </a:bodyPr>
+        <a:lstStyle/>
+        <a:p>
+          <a:pPr marL="0" lvl="0" indent="0" algn="ctr" defTabSz="977900">
+            <a:lnSpc>
+              <a:spcPct val="90000"/>
+            </a:lnSpc>
+            <a:spcBef>
+              <a:spcPct val="0"/>
+            </a:spcBef>
+            <a:spcAft>
+              <a:spcPct val="35000"/>
+            </a:spcAft>
+            <a:buNone/>
+          </a:pPr>
+          <a:r>
+            <a:rPr lang="en-US" sz="2200" kern="1200"/>
+            <a:t>C#: ref var x</a:t>
+          </a:r>
+        </a:p>
+      </dsp:txBody>
+      <dsp:txXfrm>
+        <a:off x="3799926" y="328831"/>
+        <a:ext cx="2915747" cy="1413885"/>
+      </dsp:txXfrm>
+    </dsp:sp>
+    <dsp:sp modelId="{F30730F3-2E91-4A1A-AE3B-1EF295110B61}">
+      <dsp:nvSpPr>
+        <dsp:cNvPr id="0" name=""/>
+        <dsp:cNvSpPr/>
+      </dsp:nvSpPr>
+      <dsp:spPr>
+        <a:xfrm>
+          <a:off x="7510592" y="284843"/>
+          <a:ext cx="3003723" cy="1501861"/>
+        </a:xfrm>
+        <a:prstGeom prst="roundRect">
+          <a:avLst>
+            <a:gd name="adj" fmla="val 10000"/>
+          </a:avLst>
+        </a:prstGeom>
+        <a:solidFill>
+          <a:schemeClr val="accent2">
+            <a:hueOff val="6443614"/>
+            <a:satOff val="-18493"/>
+            <a:lumOff val="-29609"/>
+            <a:alphaOff val="0"/>
+          </a:schemeClr>
+        </a:solidFill>
+        <a:ln w="19050" cap="flat" cmpd="sng" algn="ctr">
+          <a:solidFill>
+            <a:schemeClr val="lt1">
+              <a:hueOff val="0"/>
+              <a:satOff val="0"/>
+              <a:lumOff val="0"/>
+              <a:alphaOff val="0"/>
+            </a:schemeClr>
+          </a:solidFill>
+          <a:prstDash val="solid"/>
+          <a:miter lim="800000"/>
+        </a:ln>
+        <a:effectLst/>
+      </dsp:spPr>
+      <dsp:style>
+        <a:lnRef idx="2">
+          <a:scrgbClr r="0" g="0" b="0"/>
+        </a:lnRef>
+        <a:fillRef idx="1">
+          <a:scrgbClr r="0" g="0" b="0"/>
+        </a:fillRef>
+        <a:effectRef idx="0">
+          <a:scrgbClr r="0" g="0" b="0"/>
+        </a:effectRef>
+        <a:fontRef idx="minor">
+          <a:schemeClr val="lt1"/>
+        </a:fontRef>
+      </dsp:style>
+      <dsp:txBody>
+        <a:bodyPr spcFirstLastPara="0" vert="horz" wrap="square" lIns="41910" tIns="27940" rIns="41910" bIns="27940" numCol="1" spcCol="1270" anchor="ctr" anchorCtr="0">
+          <a:noAutofit/>
+        </a:bodyPr>
+        <a:lstStyle/>
+        <a:p>
+          <a:pPr marL="0" lvl="0" indent="0" algn="ctr" defTabSz="977900">
+            <a:lnSpc>
+              <a:spcPct val="90000"/>
+            </a:lnSpc>
+            <a:spcBef>
+              <a:spcPct val="0"/>
+            </a:spcBef>
+            <a:spcAft>
+              <a:spcPct val="35000"/>
+            </a:spcAft>
+            <a:buNone/>
+          </a:pPr>
+          <a:r>
+            <a:rPr lang="en-US" sz="2200" kern="1200"/>
+            <a:t>C#</a:t>
+          </a:r>
+          <a:r>
+            <a:rPr lang="ko-KR" sz="2200" kern="1200"/>
+            <a:t>에서는 입력과 출력 </a:t>
+          </a:r>
+          <a:r>
+            <a:rPr lang="en-US" sz="2200" kern="1200"/>
+            <a:t>reference</a:t>
+          </a:r>
+          <a:r>
+            <a:rPr lang="ko-KR" sz="2200" kern="1200"/>
+            <a:t>를 </a:t>
+          </a:r>
+          <a:r>
+            <a:rPr lang="en-US" sz="2200" kern="1200"/>
+            <a:t>in, out</a:t>
+          </a:r>
+          <a:r>
+            <a:rPr lang="ko-KR" sz="2200" kern="1200"/>
+            <a:t>으로 구분 가능함</a:t>
+          </a:r>
+          <a:endParaRPr lang="en-US" sz="2200" kern="1200"/>
+        </a:p>
+      </dsp:txBody>
+      <dsp:txXfrm>
+        <a:off x="7554580" y="328831"/>
+        <a:ext cx="2915747" cy="1413885"/>
+      </dsp:txXfrm>
+    </dsp:sp>
+    <dsp:sp modelId="{FE794705-6244-4BAF-8545-D97E143BF368}">
+      <dsp:nvSpPr>
+        <dsp:cNvPr id="0" name=""/>
+        <dsp:cNvSpPr/>
+      </dsp:nvSpPr>
+      <dsp:spPr>
+        <a:xfrm>
+          <a:off x="7810965" y="1786705"/>
+          <a:ext cx="300372" cy="1126396"/>
+        </a:xfrm>
+        <a:custGeom>
+          <a:avLst/>
+          <a:gdLst/>
+          <a:ahLst/>
+          <a:cxnLst/>
+          <a:rect l="0" t="0" r="0" b="0"/>
+          <a:pathLst>
+            <a:path>
+              <a:moveTo>
+                <a:pt x="0" y="0"/>
+              </a:moveTo>
+              <a:lnTo>
+                <a:pt x="0" y="1126396"/>
+              </a:lnTo>
+              <a:lnTo>
+                <a:pt x="300372" y="1126396"/>
+              </a:lnTo>
+            </a:path>
+          </a:pathLst>
+        </a:custGeom>
+        <a:noFill/>
+        <a:ln w="19050" cap="flat" cmpd="sng" algn="ctr">
+          <a:solidFill>
+            <a:schemeClr val="accent3">
+              <a:hueOff val="0"/>
+              <a:satOff val="0"/>
+              <a:lumOff val="0"/>
+              <a:alphaOff val="0"/>
+            </a:schemeClr>
+          </a:solidFill>
+          <a:prstDash val="solid"/>
+          <a:miter lim="800000"/>
+        </a:ln>
+        <a:effectLst/>
+      </dsp:spPr>
+      <dsp:style>
+        <a:lnRef idx="2">
+          <a:scrgbClr r="0" g="0" b="0"/>
+        </a:lnRef>
+        <a:fillRef idx="0">
+          <a:scrgbClr r="0" g="0" b="0"/>
+        </a:fillRef>
+        <a:effectRef idx="0">
+          <a:scrgbClr r="0" g="0" b="0"/>
+        </a:effectRef>
+        <a:fontRef idx="minor"/>
+      </dsp:style>
+    </dsp:sp>
+    <dsp:sp modelId="{34BBCE51-5FB3-4A25-BDDF-5B5B4CA3DAF0}">
+      <dsp:nvSpPr>
+        <dsp:cNvPr id="0" name=""/>
+        <dsp:cNvSpPr/>
+      </dsp:nvSpPr>
+      <dsp:spPr>
+        <a:xfrm>
+          <a:off x="8111337" y="2162170"/>
+          <a:ext cx="2402978" cy="1501861"/>
+        </a:xfrm>
+        <a:prstGeom prst="roundRect">
+          <a:avLst>
+            <a:gd name="adj" fmla="val 10000"/>
+          </a:avLst>
+        </a:prstGeom>
+        <a:solidFill>
+          <a:schemeClr val="lt1">
+            <a:alpha val="90000"/>
+            <a:hueOff val="0"/>
+            <a:satOff val="0"/>
+            <a:lumOff val="0"/>
+            <a:alphaOff val="0"/>
+          </a:schemeClr>
+        </a:solidFill>
+        <a:ln w="19050" cap="flat" cmpd="sng" algn="ctr">
+          <a:solidFill>
+            <a:schemeClr val="accent2">
+              <a:hueOff val="0"/>
+              <a:satOff val="0"/>
+              <a:lumOff val="0"/>
+              <a:alphaOff val="0"/>
+            </a:schemeClr>
+          </a:solidFill>
+          <a:prstDash val="solid"/>
+          <a:miter lim="800000"/>
+        </a:ln>
+        <a:effectLst/>
+      </dsp:spPr>
+      <dsp:style>
+        <a:lnRef idx="2">
+          <a:scrgbClr r="0" g="0" b="0"/>
+        </a:lnRef>
+        <a:fillRef idx="1">
+          <a:scrgbClr r="0" g="0" b="0"/>
+        </a:fillRef>
+        <a:effectRef idx="0">
+          <a:scrgbClr r="0" g="0" b="0"/>
+        </a:effectRef>
+        <a:fontRef idx="minor"/>
+      </dsp:style>
+      <dsp:txBody>
+        <a:bodyPr spcFirstLastPara="0" vert="horz" wrap="square" lIns="30480" tIns="20320" rIns="30480" bIns="20320" numCol="1" spcCol="1270" anchor="ctr" anchorCtr="0">
+          <a:noAutofit/>
+        </a:bodyPr>
+        <a:lstStyle/>
+        <a:p>
+          <a:pPr marL="0" lvl="0" indent="0" algn="ctr" defTabSz="711200">
+            <a:lnSpc>
+              <a:spcPct val="90000"/>
+            </a:lnSpc>
+            <a:spcBef>
+              <a:spcPct val="0"/>
+            </a:spcBef>
+            <a:spcAft>
+              <a:spcPct val="35000"/>
+            </a:spcAft>
+            <a:buNone/>
+          </a:pPr>
+          <a:r>
+            <a:rPr lang="en-US" sz="1600" kern="1200"/>
+            <a:t>in, out </a:t>
+          </a:r>
+          <a:r>
+            <a:rPr lang="ko-KR" sz="1600" kern="1200"/>
+            <a:t>대신 </a:t>
+          </a:r>
+          <a:r>
+            <a:rPr lang="en-US" sz="1600" kern="1200"/>
+            <a:t>ref</a:t>
+          </a:r>
+          <a:r>
+            <a:rPr lang="ko-KR" sz="1600" kern="1200"/>
+            <a:t>를 쓸 수 있지만</a:t>
+          </a:r>
+          <a:r>
+            <a:rPr lang="en-US" sz="1600" kern="1200"/>
+            <a:t>, ref</a:t>
+          </a:r>
+          <a:r>
+            <a:rPr lang="ko-KR" sz="1600" kern="1200"/>
+            <a:t>는 입출력에 모두 적용 가능하여 입출력이 구분되지 않음</a:t>
+          </a:r>
+          <a:endParaRPr lang="en-US" sz="1600" kern="1200"/>
+        </a:p>
+      </dsp:txBody>
+      <dsp:txXfrm>
+        <a:off x="8155325" y="2206158"/>
+        <a:ext cx="2315002" cy="1413885"/>
+      </dsp:txXfrm>
+    </dsp:sp>
+  </dsp:spTree>
+</dsp:drawing>
+</file>
+
 <file path=ppt/diagrams/layout1.xml><?xml version="1.0" encoding="utf-8"?>
 <dgm:layoutDef xmlns:dgm="http://schemas.openxmlformats.org/drawingml/2006/diagram" xmlns:a="http://schemas.openxmlformats.org/drawingml/2006/main" uniqueId="urn:microsoft.com/office/officeart/2005/8/layout/vList2">
   <dgm:title val=""/>
@@ -7525,6 +9067,298 @@
 </dgm:layoutDef>
 </file>
 
+<file path=ppt/diagrams/layout5.xml><?xml version="1.0" encoding="utf-8"?>
+<dgm:layoutDef xmlns:dgm="http://schemas.openxmlformats.org/drawingml/2006/diagram" xmlns:a="http://schemas.openxmlformats.org/drawingml/2006/main" uniqueId="urn:microsoft.com/office/officeart/2005/8/layout/hierarchy3">
+  <dgm:title val=""/>
+  <dgm:desc val=""/>
+  <dgm:catLst>
+    <dgm:cat type="hierarchy" pri="7000"/>
+    <dgm:cat type="list" pri="23000"/>
+    <dgm:cat type="relationship" pri="15000"/>
+    <dgm:cat type="convert" pri="7000"/>
+  </dgm:catLst>
+  <dgm:sampData>
+    <dgm:dataModel>
+      <dgm:ptLst>
+        <dgm:pt modelId="0" type="doc"/>
+        <dgm:pt modelId="1">
+          <dgm:prSet phldr="1"/>
+        </dgm:pt>
+        <dgm:pt modelId="11">
+          <dgm:prSet phldr="1"/>
+        </dgm:pt>
+        <dgm:pt modelId="12">
+          <dgm:prSet phldr="1"/>
+        </dgm:pt>
+        <dgm:pt modelId="2">
+          <dgm:prSet phldr="1"/>
+        </dgm:pt>
+        <dgm:pt modelId="21">
+          <dgm:prSet phldr="1"/>
+        </dgm:pt>
+        <dgm:pt modelId="22">
+          <dgm:prSet phldr="1"/>
+        </dgm:pt>
+      </dgm:ptLst>
+      <dgm:cxnLst>
+        <dgm:cxn modelId="4" srcId="0" destId="1" srcOrd="0" destOrd="0"/>
+        <dgm:cxn modelId="5" srcId="1" destId="11" srcOrd="0" destOrd="0"/>
+        <dgm:cxn modelId="6" srcId="1" destId="12" srcOrd="1" destOrd="0"/>
+        <dgm:cxn modelId="7" srcId="0" destId="2" srcOrd="1" destOrd="0"/>
+        <dgm:cxn modelId="8" srcId="2" destId="21" srcOrd="0" destOrd="0"/>
+        <dgm:cxn modelId="9" srcId="2" destId="22" srcOrd="1" destOrd="0"/>
+      </dgm:cxnLst>
+      <dgm:bg/>
+      <dgm:whole/>
+    </dgm:dataModel>
+  </dgm:sampData>
+  <dgm:styleData>
+    <dgm:dataModel>
+      <dgm:ptLst>
+        <dgm:pt modelId="0" type="doc"/>
+        <dgm:pt modelId="1"/>
+        <dgm:pt modelId="11"/>
+        <dgm:pt modelId="2"/>
+        <dgm:pt modelId="21"/>
+      </dgm:ptLst>
+      <dgm:cxnLst>
+        <dgm:cxn modelId="4" srcId="0" destId="1" srcOrd="0" destOrd="0"/>
+        <dgm:cxn modelId="5" srcId="0" destId="2" srcOrd="1" destOrd="0"/>
+        <dgm:cxn modelId="13" srcId="1" destId="11" srcOrd="0" destOrd="0"/>
+        <dgm:cxn modelId="23" srcId="2" destId="21" srcOrd="0" destOrd="0"/>
+      </dgm:cxnLst>
+      <dgm:bg/>
+      <dgm:whole/>
+    </dgm:dataModel>
+  </dgm:styleData>
+  <dgm:clrData>
+    <dgm:dataModel>
+      <dgm:ptLst>
+        <dgm:pt modelId="0" type="doc"/>
+        <dgm:pt modelId="1"/>
+        <dgm:pt modelId="11"/>
+        <dgm:pt modelId="2"/>
+        <dgm:pt modelId="21"/>
+        <dgm:pt modelId="3"/>
+        <dgm:pt modelId="31"/>
+        <dgm:pt modelId="4"/>
+        <dgm:pt modelId="41"/>
+      </dgm:ptLst>
+      <dgm:cxnLst>
+        <dgm:cxn modelId="5" srcId="0" destId="1" srcOrd="0" destOrd="0"/>
+        <dgm:cxn modelId="6" srcId="0" destId="2" srcOrd="1" destOrd="0"/>
+        <dgm:cxn modelId="7" srcId="0" destId="3" srcOrd="2" destOrd="0"/>
+        <dgm:cxn modelId="8" srcId="0" destId="4" srcOrd="3" destOrd="0"/>
+        <dgm:cxn modelId="13" srcId="1" destId="11" srcOrd="0" destOrd="0"/>
+        <dgm:cxn modelId="23" srcId="2" destId="21" srcOrd="0" destOrd="0"/>
+        <dgm:cxn modelId="33" srcId="3" destId="31" srcOrd="0" destOrd="0"/>
+        <dgm:cxn modelId="43" srcId="4" destId="41" srcOrd="0" destOrd="0"/>
+      </dgm:cxnLst>
+      <dgm:bg/>
+      <dgm:whole/>
+    </dgm:dataModel>
+  </dgm:clrData>
+  <dgm:layoutNode name="diagram">
+    <dgm:varLst>
+      <dgm:chPref val="1"/>
+      <dgm:dir/>
+      <dgm:animOne val="branch"/>
+      <dgm:animLvl val="lvl"/>
+      <dgm:resizeHandles/>
+    </dgm:varLst>
+    <dgm:choose name="Name0">
+      <dgm:if name="Name1" func="var" arg="dir" op="equ" val="norm">
+        <dgm:alg type="hierChild">
+          <dgm:param type="linDir" val="fromL"/>
+        </dgm:alg>
+      </dgm:if>
+      <dgm:else name="Name2">
+        <dgm:alg type="hierChild">
+          <dgm:param type="linDir" val="fromR"/>
+        </dgm:alg>
+      </dgm:else>
+    </dgm:choose>
+    <dgm:shape xmlns:r="http://schemas.openxmlformats.org/officeDocument/2006/relationships" r:blip="">
+      <dgm:adjLst/>
+    </dgm:shape>
+    <dgm:presOf/>
+    <dgm:constrLst>
+      <dgm:constr type="primFontSz" for="des" forName="rootText" op="equ" val="65"/>
+      <dgm:constr type="primFontSz" for="des" forName="childText" op="equ" val="65"/>
+      <dgm:constr type="w" for="des" forName="rootComposite" refType="w"/>
+      <dgm:constr type="h" for="des" forName="rootComposite" refType="w" fact="0.5"/>
+      <dgm:constr type="w" for="des" forName="childText" refType="w" refFor="des" refForName="rootComposite" fact="0.8"/>
+      <dgm:constr type="h" for="des" forName="childText" refType="h" refFor="des" refForName="rootComposite"/>
+      <dgm:constr type="sibSp" refType="w" refFor="des" refForName="rootComposite" fact="0.25"/>
+      <dgm:constr type="sibSp" for="des" forName="childShape" refType="h" refFor="des" refForName="childText" fact="0.25"/>
+      <dgm:constr type="sp" for="des" forName="root" refType="h" refFor="des" refForName="childText" fact="0.25"/>
+    </dgm:constrLst>
+    <dgm:ruleLst/>
+    <dgm:forEach name="Name3" axis="ch">
+      <dgm:forEach name="Name4" axis="self" ptType="node" cnt="1">
+        <dgm:layoutNode name="root">
+          <dgm:choose name="Name5">
+            <dgm:if name="Name6" func="var" arg="dir" op="equ" val="norm">
+              <dgm:alg type="hierRoot">
+                <dgm:param type="hierAlign" val="tL"/>
+              </dgm:alg>
+            </dgm:if>
+            <dgm:else name="Name7">
+              <dgm:alg type="hierRoot">
+                <dgm:param type="hierAlign" val="tR"/>
+              </dgm:alg>
+            </dgm:else>
+          </dgm:choose>
+          <dgm:shape xmlns:r="http://schemas.openxmlformats.org/officeDocument/2006/relationships" r:blip="">
+            <dgm:adjLst/>
+          </dgm:shape>
+          <dgm:presOf/>
+          <dgm:constrLst>
+            <dgm:constr type="alignOff" val="0.2"/>
+          </dgm:constrLst>
+          <dgm:ruleLst/>
+          <dgm:layoutNode name="rootComposite">
+            <dgm:alg type="composite"/>
+            <dgm:shape xmlns:r="http://schemas.openxmlformats.org/officeDocument/2006/relationships" r:blip="">
+              <dgm:adjLst/>
+            </dgm:shape>
+            <dgm:presOf axis="self" ptType="node" cnt="1"/>
+            <dgm:choose name="Name8">
+              <dgm:if name="Name9" func="var" arg="dir" op="equ" val="norm">
+                <dgm:constrLst>
+                  <dgm:constr type="l" for="ch" forName="rootText"/>
+                  <dgm:constr type="t" for="ch" forName="rootText"/>
+                  <dgm:constr type="w" for="ch" forName="rootText" refType="w"/>
+                  <dgm:constr type="h" for="ch" forName="rootText" refType="h"/>
+                  <dgm:constr type="l" for="ch" forName="rootConnector"/>
+                  <dgm:constr type="t" for="ch" forName="rootConnector"/>
+                  <dgm:constr type="w" for="ch" forName="rootConnector" refType="w" refFor="ch" refForName="rootText" fact="0.2"/>
+                  <dgm:constr type="h" for="ch" forName="rootConnector" refType="h" refFor="ch" refForName="rootText"/>
+                </dgm:constrLst>
+              </dgm:if>
+              <dgm:else name="Name10">
+                <dgm:constrLst>
+                  <dgm:constr type="l" for="ch" forName="rootText"/>
+                  <dgm:constr type="t" for="ch" forName="rootText"/>
+                  <dgm:constr type="w" for="ch" forName="rootText" refType="w"/>
+                  <dgm:constr type="h" for="ch" forName="rootText" refType="h"/>
+                  <dgm:constr type="r" for="ch" forName="rootConnector" refType="w"/>
+                  <dgm:constr type="t" for="ch" forName="rootConnector"/>
+                  <dgm:constr type="w" for="ch" forName="rootConnector" refType="w" refFor="ch" refForName="rootText" fact="0.2"/>
+                  <dgm:constr type="h" for="ch" forName="rootConnector" refType="h" refFor="ch" refForName="rootText"/>
+                </dgm:constrLst>
+              </dgm:else>
+            </dgm:choose>
+            <dgm:ruleLst/>
+            <dgm:layoutNode name="rootText" styleLbl="node1">
+              <dgm:alg type="tx"/>
+              <dgm:shape xmlns:r="http://schemas.openxmlformats.org/officeDocument/2006/relationships" type="roundRect" r:blip="">
+                <dgm:adjLst>
+                  <dgm:adj idx="1" val="0.1"/>
+                </dgm:adjLst>
+              </dgm:shape>
+              <dgm:presOf axis="self" ptType="node" cnt="1"/>
+              <dgm:constrLst>
+                <dgm:constr type="tMarg" refType="primFontSz" fact="0.1"/>
+                <dgm:constr type="bMarg" refType="primFontSz" fact="0.1"/>
+                <dgm:constr type="lMarg" refType="primFontSz" fact="0.15"/>
+                <dgm:constr type="rMarg" refType="primFontSz" fact="0.15"/>
+              </dgm:constrLst>
+              <dgm:ruleLst>
+                <dgm:rule type="primFontSz" val="5" fact="NaN" max="NaN"/>
+              </dgm:ruleLst>
+            </dgm:layoutNode>
+            <dgm:layoutNode name="rootConnector" moveWith="rootText">
+              <dgm:alg type="sp"/>
+              <dgm:shape xmlns:r="http://schemas.openxmlformats.org/officeDocument/2006/relationships" type="roundRect" r:blip="" hideGeom="1">
+                <dgm:adjLst>
+                  <dgm:adj idx="1" val="0.1"/>
+                </dgm:adjLst>
+              </dgm:shape>
+              <dgm:presOf axis="self" ptType="node" cnt="1"/>
+              <dgm:constrLst/>
+              <dgm:ruleLst/>
+            </dgm:layoutNode>
+          </dgm:layoutNode>
+          <dgm:layoutNode name="childShape">
+            <dgm:alg type="hierChild">
+              <dgm:param type="chAlign" val="l"/>
+              <dgm:param type="linDir" val="fromT"/>
+            </dgm:alg>
+            <dgm:shape xmlns:r="http://schemas.openxmlformats.org/officeDocument/2006/relationships" r:blip="">
+              <dgm:adjLst/>
+            </dgm:shape>
+            <dgm:presOf/>
+            <dgm:constrLst/>
+            <dgm:ruleLst/>
+            <dgm:forEach name="Name11" axis="ch">
+              <dgm:forEach name="Name12" axis="self" ptType="parTrans" cnt="1">
+                <dgm:layoutNode name="Name13">
+                  <dgm:choose name="Name14">
+                    <dgm:if name="Name15" func="var" arg="dir" op="equ" val="norm">
+                      <dgm:alg type="conn">
+                        <dgm:param type="dim" val="1D"/>
+                        <dgm:param type="endSty" val="noArr"/>
+                        <dgm:param type="connRout" val="bend"/>
+                        <dgm:param type="srcNode" val="rootConnector"/>
+                        <dgm:param type="begPts" val="bCtr"/>
+                        <dgm:param type="endPts" val="midL"/>
+                      </dgm:alg>
+                    </dgm:if>
+                    <dgm:else name="Name16">
+                      <dgm:alg type="conn">
+                        <dgm:param type="dim" val="1D"/>
+                        <dgm:param type="endSty" val="noArr"/>
+                        <dgm:param type="connRout" val="bend"/>
+                        <dgm:param type="srcNode" val="rootConnector"/>
+                        <dgm:param type="begPts" val="bCtr"/>
+                        <dgm:param type="endPts" val="midR"/>
+                      </dgm:alg>
+                    </dgm:else>
+                  </dgm:choose>
+                  <dgm:shape xmlns:r="http://schemas.openxmlformats.org/officeDocument/2006/relationships" type="conn" r:blip="">
+                    <dgm:adjLst/>
+                  </dgm:shape>
+                  <dgm:presOf axis="self"/>
+                  <dgm:constrLst>
+                    <dgm:constr type="begPad"/>
+                    <dgm:constr type="endPad"/>
+                  </dgm:constrLst>
+                  <dgm:ruleLst/>
+                </dgm:layoutNode>
+              </dgm:forEach>
+              <dgm:forEach name="Name17" axis="self" ptType="node">
+                <dgm:layoutNode name="childText" styleLbl="bgAcc1">
+                  <dgm:varLst>
+                    <dgm:bulletEnabled val="1"/>
+                  </dgm:varLst>
+                  <dgm:alg type="tx"/>
+                  <dgm:shape xmlns:r="http://schemas.openxmlformats.org/officeDocument/2006/relationships" type="roundRect" r:blip="">
+                    <dgm:adjLst>
+                      <dgm:adj idx="1" val="0.1"/>
+                    </dgm:adjLst>
+                  </dgm:shape>
+                  <dgm:presOf axis="self desOrSelf" ptType="node node" st="1 1" cnt="1 0"/>
+                  <dgm:constrLst>
+                    <dgm:constr type="tMarg" refType="primFontSz" fact="0.1"/>
+                    <dgm:constr type="bMarg" refType="primFontSz" fact="0.1"/>
+                    <dgm:constr type="lMarg" refType="primFontSz" fact="0.15"/>
+                    <dgm:constr type="rMarg" refType="primFontSz" fact="0.15"/>
+                  </dgm:constrLst>
+                  <dgm:ruleLst>
+                    <dgm:rule type="primFontSz" val="5" fact="NaN" max="NaN"/>
+                  </dgm:ruleLst>
+                </dgm:layoutNode>
+              </dgm:forEach>
+            </dgm:forEach>
+          </dgm:layoutNode>
+        </dgm:layoutNode>
+      </dgm:forEach>
+    </dgm:forEach>
+  </dgm:layoutNode>
+</dgm:layoutDef>
+</file>
+
 <file path=ppt/diagrams/quickStyle1.xml><?xml version="1.0" encoding="utf-8"?>
 <dgm:styleDef xmlns:dgm="http://schemas.openxmlformats.org/drawingml/2006/diagram" xmlns:a="http://schemas.openxmlformats.org/drawingml/2006/main" uniqueId="urn:microsoft.com/office/officeart/2005/8/quickstyle/simple4">
   <dgm:title val=""/>
@@ -11633,6 +13467,1040 @@
         <a:scrgbClr r="0" g="0" b="0"/>
       </a:fillRef>
       <a:effectRef idx="2">
+        <a:scrgbClr r="0" g="0" b="0"/>
+      </a:effectRef>
+      <a:fontRef idx="minor"/>
+    </dgm:style>
+  </dgm:styleLbl>
+  <dgm:styleLbl name="revTx">
+    <dgm:scene3d>
+      <a:camera prst="orthographicFront"/>
+      <a:lightRig rig="threePt" dir="t"/>
+    </dgm:scene3d>
+    <dgm:sp3d/>
+    <dgm:txPr/>
+    <dgm:style>
+      <a:lnRef idx="0">
+        <a:scrgbClr r="0" g="0" b="0"/>
+      </a:lnRef>
+      <a:fillRef idx="0">
+        <a:scrgbClr r="0" g="0" b="0"/>
+      </a:fillRef>
+      <a:effectRef idx="0">
+        <a:scrgbClr r="0" g="0" b="0"/>
+      </a:effectRef>
+      <a:fontRef idx="minor"/>
+    </dgm:style>
+  </dgm:styleLbl>
+</dgm:styleDef>
+</file>
+
+<file path=ppt/diagrams/quickStyle5.xml><?xml version="1.0" encoding="utf-8"?>
+<dgm:styleDef xmlns:dgm="http://schemas.openxmlformats.org/drawingml/2006/diagram" xmlns:a="http://schemas.openxmlformats.org/drawingml/2006/main" uniqueId="urn:microsoft.com/office/officeart/2005/8/quickstyle/simple1">
+  <dgm:title val=""/>
+  <dgm:desc val=""/>
+  <dgm:catLst>
+    <dgm:cat type="simple" pri="10100"/>
+  </dgm:catLst>
+  <dgm:scene3d>
+    <a:camera prst="orthographicFront"/>
+    <a:lightRig rig="threePt" dir="t"/>
+  </dgm:scene3d>
+  <dgm:styleLbl name="node0">
+    <dgm:scene3d>
+      <a:camera prst="orthographicFront"/>
+      <a:lightRig rig="threePt" dir="t"/>
+    </dgm:scene3d>
+    <dgm:sp3d/>
+    <dgm:txPr/>
+    <dgm:style>
+      <a:lnRef idx="2">
+        <a:scrgbClr r="0" g="0" b="0"/>
+      </a:lnRef>
+      <a:fillRef idx="1">
+        <a:scrgbClr r="0" g="0" b="0"/>
+      </a:fillRef>
+      <a:effectRef idx="0">
+        <a:scrgbClr r="0" g="0" b="0"/>
+      </a:effectRef>
+      <a:fontRef idx="minor">
+        <a:schemeClr val="lt1"/>
+      </a:fontRef>
+    </dgm:style>
+  </dgm:styleLbl>
+  <dgm:styleLbl name="lnNode1">
+    <dgm:scene3d>
+      <a:camera prst="orthographicFront"/>
+      <a:lightRig rig="threePt" dir="t"/>
+    </dgm:scene3d>
+    <dgm:sp3d/>
+    <dgm:txPr/>
+    <dgm:style>
+      <a:lnRef idx="2">
+        <a:scrgbClr r="0" g="0" b="0"/>
+      </a:lnRef>
+      <a:fillRef idx="1">
+        <a:scrgbClr r="0" g="0" b="0"/>
+      </a:fillRef>
+      <a:effectRef idx="0">
+        <a:scrgbClr r="0" g="0" b="0"/>
+      </a:effectRef>
+      <a:fontRef idx="minor">
+        <a:schemeClr val="lt1"/>
+      </a:fontRef>
+    </dgm:style>
+  </dgm:styleLbl>
+  <dgm:styleLbl name="vennNode1">
+    <dgm:scene3d>
+      <a:camera prst="orthographicFront"/>
+      <a:lightRig rig="threePt" dir="t"/>
+    </dgm:scene3d>
+    <dgm:sp3d/>
+    <dgm:txPr/>
+    <dgm:style>
+      <a:lnRef idx="2">
+        <a:scrgbClr r="0" g="0" b="0"/>
+      </a:lnRef>
+      <a:fillRef idx="1">
+        <a:scrgbClr r="0" g="0" b="0"/>
+      </a:fillRef>
+      <a:effectRef idx="0">
+        <a:scrgbClr r="0" g="0" b="0"/>
+      </a:effectRef>
+      <a:fontRef idx="minor">
+        <a:schemeClr val="tx1"/>
+      </a:fontRef>
+    </dgm:style>
+  </dgm:styleLbl>
+  <dgm:styleLbl name="alignNode1">
+    <dgm:scene3d>
+      <a:camera prst="orthographicFront"/>
+      <a:lightRig rig="threePt" dir="t"/>
+    </dgm:scene3d>
+    <dgm:sp3d/>
+    <dgm:txPr/>
+    <dgm:style>
+      <a:lnRef idx="2">
+        <a:scrgbClr r="0" g="0" b="0"/>
+      </a:lnRef>
+      <a:fillRef idx="1">
+        <a:scrgbClr r="0" g="0" b="0"/>
+      </a:fillRef>
+      <a:effectRef idx="0">
+        <a:scrgbClr r="0" g="0" b="0"/>
+      </a:effectRef>
+      <a:fontRef idx="minor">
+        <a:schemeClr val="lt1"/>
+      </a:fontRef>
+    </dgm:style>
+  </dgm:styleLbl>
+  <dgm:styleLbl name="node1">
+    <dgm:scene3d>
+      <a:camera prst="orthographicFront"/>
+      <a:lightRig rig="threePt" dir="t"/>
+    </dgm:scene3d>
+    <dgm:sp3d/>
+    <dgm:txPr/>
+    <dgm:style>
+      <a:lnRef idx="2">
+        <a:scrgbClr r="0" g="0" b="0"/>
+      </a:lnRef>
+      <a:fillRef idx="1">
+        <a:scrgbClr r="0" g="0" b="0"/>
+      </a:fillRef>
+      <a:effectRef idx="0">
+        <a:scrgbClr r="0" g="0" b="0"/>
+      </a:effectRef>
+      <a:fontRef idx="minor">
+        <a:schemeClr val="lt1"/>
+      </a:fontRef>
+    </dgm:style>
+  </dgm:styleLbl>
+  <dgm:styleLbl name="node2">
+    <dgm:scene3d>
+      <a:camera prst="orthographicFront"/>
+      <a:lightRig rig="threePt" dir="t"/>
+    </dgm:scene3d>
+    <dgm:sp3d/>
+    <dgm:txPr/>
+    <dgm:style>
+      <a:lnRef idx="2">
+        <a:scrgbClr r="0" g="0" b="0"/>
+      </a:lnRef>
+      <a:fillRef idx="1">
+        <a:scrgbClr r="0" g="0" b="0"/>
+      </a:fillRef>
+      <a:effectRef idx="0">
+        <a:scrgbClr r="0" g="0" b="0"/>
+      </a:effectRef>
+      <a:fontRef idx="minor">
+        <a:schemeClr val="lt1"/>
+      </a:fontRef>
+    </dgm:style>
+  </dgm:styleLbl>
+  <dgm:styleLbl name="node3">
+    <dgm:scene3d>
+      <a:camera prst="orthographicFront"/>
+      <a:lightRig rig="threePt" dir="t"/>
+    </dgm:scene3d>
+    <dgm:sp3d/>
+    <dgm:txPr/>
+    <dgm:style>
+      <a:lnRef idx="2">
+        <a:scrgbClr r="0" g="0" b="0"/>
+      </a:lnRef>
+      <a:fillRef idx="1">
+        <a:scrgbClr r="0" g="0" b="0"/>
+      </a:fillRef>
+      <a:effectRef idx="0">
+        <a:scrgbClr r="0" g="0" b="0"/>
+      </a:effectRef>
+      <a:fontRef idx="minor">
+        <a:schemeClr val="lt1"/>
+      </a:fontRef>
+    </dgm:style>
+  </dgm:styleLbl>
+  <dgm:styleLbl name="node4">
+    <dgm:scene3d>
+      <a:camera prst="orthographicFront"/>
+      <a:lightRig rig="threePt" dir="t"/>
+    </dgm:scene3d>
+    <dgm:sp3d/>
+    <dgm:txPr/>
+    <dgm:style>
+      <a:lnRef idx="2">
+        <a:scrgbClr r="0" g="0" b="0"/>
+      </a:lnRef>
+      <a:fillRef idx="1">
+        <a:scrgbClr r="0" g="0" b="0"/>
+      </a:fillRef>
+      <a:effectRef idx="0">
+        <a:scrgbClr r="0" g="0" b="0"/>
+      </a:effectRef>
+      <a:fontRef idx="minor">
+        <a:schemeClr val="lt1"/>
+      </a:fontRef>
+    </dgm:style>
+  </dgm:styleLbl>
+  <dgm:styleLbl name="fgImgPlace1">
+    <dgm:scene3d>
+      <a:camera prst="orthographicFront"/>
+      <a:lightRig rig="threePt" dir="t"/>
+    </dgm:scene3d>
+    <dgm:sp3d/>
+    <dgm:txPr/>
+    <dgm:style>
+      <a:lnRef idx="2">
+        <a:scrgbClr r="0" g="0" b="0"/>
+      </a:lnRef>
+      <a:fillRef idx="1">
+        <a:scrgbClr r="0" g="0" b="0"/>
+      </a:fillRef>
+      <a:effectRef idx="0">
+        <a:scrgbClr r="0" g="0" b="0"/>
+      </a:effectRef>
+      <a:fontRef idx="minor"/>
+    </dgm:style>
+  </dgm:styleLbl>
+  <dgm:styleLbl name="alignImgPlace1">
+    <dgm:scene3d>
+      <a:camera prst="orthographicFront"/>
+      <a:lightRig rig="threePt" dir="t"/>
+    </dgm:scene3d>
+    <dgm:sp3d/>
+    <dgm:txPr/>
+    <dgm:style>
+      <a:lnRef idx="2">
+        <a:scrgbClr r="0" g="0" b="0"/>
+      </a:lnRef>
+      <a:fillRef idx="1">
+        <a:scrgbClr r="0" g="0" b="0"/>
+      </a:fillRef>
+      <a:effectRef idx="0">
+        <a:scrgbClr r="0" g="0" b="0"/>
+      </a:effectRef>
+      <a:fontRef idx="minor"/>
+    </dgm:style>
+  </dgm:styleLbl>
+  <dgm:styleLbl name="bgImgPlace1">
+    <dgm:scene3d>
+      <a:camera prst="orthographicFront"/>
+      <a:lightRig rig="threePt" dir="t"/>
+    </dgm:scene3d>
+    <dgm:sp3d/>
+    <dgm:txPr/>
+    <dgm:style>
+      <a:lnRef idx="2">
+        <a:scrgbClr r="0" g="0" b="0"/>
+      </a:lnRef>
+      <a:fillRef idx="1">
+        <a:scrgbClr r="0" g="0" b="0"/>
+      </a:fillRef>
+      <a:effectRef idx="0">
+        <a:scrgbClr r="0" g="0" b="0"/>
+      </a:effectRef>
+      <a:fontRef idx="minor"/>
+    </dgm:style>
+  </dgm:styleLbl>
+  <dgm:styleLbl name="sibTrans2D1">
+    <dgm:scene3d>
+      <a:camera prst="orthographicFront"/>
+      <a:lightRig rig="threePt" dir="t"/>
+    </dgm:scene3d>
+    <dgm:sp3d/>
+    <dgm:txPr/>
+    <dgm:style>
+      <a:lnRef idx="0">
+        <a:scrgbClr r="0" g="0" b="0"/>
+      </a:lnRef>
+      <a:fillRef idx="1">
+        <a:scrgbClr r="0" g="0" b="0"/>
+      </a:fillRef>
+      <a:effectRef idx="0">
+        <a:scrgbClr r="0" g="0" b="0"/>
+      </a:effectRef>
+      <a:fontRef idx="minor">
+        <a:schemeClr val="lt1"/>
+      </a:fontRef>
+    </dgm:style>
+  </dgm:styleLbl>
+  <dgm:styleLbl name="fgSibTrans2D1">
+    <dgm:scene3d>
+      <a:camera prst="orthographicFront"/>
+      <a:lightRig rig="threePt" dir="t"/>
+    </dgm:scene3d>
+    <dgm:sp3d/>
+    <dgm:txPr/>
+    <dgm:style>
+      <a:lnRef idx="0">
+        <a:scrgbClr r="0" g="0" b="0"/>
+      </a:lnRef>
+      <a:fillRef idx="1">
+        <a:scrgbClr r="0" g="0" b="0"/>
+      </a:fillRef>
+      <a:effectRef idx="0">
+        <a:scrgbClr r="0" g="0" b="0"/>
+      </a:effectRef>
+      <a:fontRef idx="minor">
+        <a:schemeClr val="lt1"/>
+      </a:fontRef>
+    </dgm:style>
+  </dgm:styleLbl>
+  <dgm:styleLbl name="bgSibTrans2D1">
+    <dgm:scene3d>
+      <a:camera prst="orthographicFront"/>
+      <a:lightRig rig="threePt" dir="t"/>
+    </dgm:scene3d>
+    <dgm:sp3d/>
+    <dgm:txPr/>
+    <dgm:style>
+      <a:lnRef idx="0">
+        <a:scrgbClr r="0" g="0" b="0"/>
+      </a:lnRef>
+      <a:fillRef idx="1">
+        <a:scrgbClr r="0" g="0" b="0"/>
+      </a:fillRef>
+      <a:effectRef idx="0">
+        <a:scrgbClr r="0" g="0" b="0"/>
+      </a:effectRef>
+      <a:fontRef idx="minor">
+        <a:schemeClr val="lt1"/>
+      </a:fontRef>
+    </dgm:style>
+  </dgm:styleLbl>
+  <dgm:styleLbl name="sibTrans1D1">
+    <dgm:scene3d>
+      <a:camera prst="orthographicFront"/>
+      <a:lightRig rig="threePt" dir="t"/>
+    </dgm:scene3d>
+    <dgm:sp3d/>
+    <dgm:txPr/>
+    <dgm:style>
+      <a:lnRef idx="1">
+        <a:scrgbClr r="0" g="0" b="0"/>
+      </a:lnRef>
+      <a:fillRef idx="0">
+        <a:scrgbClr r="0" g="0" b="0"/>
+      </a:fillRef>
+      <a:effectRef idx="0">
+        <a:scrgbClr r="0" g="0" b="0"/>
+      </a:effectRef>
+      <a:fontRef idx="minor"/>
+    </dgm:style>
+  </dgm:styleLbl>
+  <dgm:styleLbl name="callout">
+    <dgm:scene3d>
+      <a:camera prst="orthographicFront"/>
+      <a:lightRig rig="threePt" dir="t"/>
+    </dgm:scene3d>
+    <dgm:sp3d/>
+    <dgm:txPr/>
+    <dgm:style>
+      <a:lnRef idx="2">
+        <a:scrgbClr r="0" g="0" b="0"/>
+      </a:lnRef>
+      <a:fillRef idx="1">
+        <a:scrgbClr r="0" g="0" b="0"/>
+      </a:fillRef>
+      <a:effectRef idx="0">
+        <a:scrgbClr r="0" g="0" b="0"/>
+      </a:effectRef>
+      <a:fontRef idx="minor"/>
+    </dgm:style>
+  </dgm:styleLbl>
+  <dgm:styleLbl name="asst0">
+    <dgm:scene3d>
+      <a:camera prst="orthographicFront"/>
+      <a:lightRig rig="threePt" dir="t"/>
+    </dgm:scene3d>
+    <dgm:sp3d/>
+    <dgm:txPr/>
+    <dgm:style>
+      <a:lnRef idx="2">
+        <a:scrgbClr r="0" g="0" b="0"/>
+      </a:lnRef>
+      <a:fillRef idx="1">
+        <a:scrgbClr r="0" g="0" b="0"/>
+      </a:fillRef>
+      <a:effectRef idx="0">
+        <a:scrgbClr r="0" g="0" b="0"/>
+      </a:effectRef>
+      <a:fontRef idx="minor">
+        <a:schemeClr val="lt1"/>
+      </a:fontRef>
+    </dgm:style>
+  </dgm:styleLbl>
+  <dgm:styleLbl name="asst1">
+    <dgm:scene3d>
+      <a:camera prst="orthographicFront"/>
+      <a:lightRig rig="threePt" dir="t"/>
+    </dgm:scene3d>
+    <dgm:sp3d/>
+    <dgm:txPr/>
+    <dgm:style>
+      <a:lnRef idx="2">
+        <a:scrgbClr r="0" g="0" b="0"/>
+      </a:lnRef>
+      <a:fillRef idx="1">
+        <a:scrgbClr r="0" g="0" b="0"/>
+      </a:fillRef>
+      <a:effectRef idx="0">
+        <a:scrgbClr r="0" g="0" b="0"/>
+      </a:effectRef>
+      <a:fontRef idx="minor">
+        <a:schemeClr val="lt1"/>
+      </a:fontRef>
+    </dgm:style>
+  </dgm:styleLbl>
+  <dgm:styleLbl name="asst2">
+    <dgm:scene3d>
+      <a:camera prst="orthographicFront"/>
+      <a:lightRig rig="threePt" dir="t"/>
+    </dgm:scene3d>
+    <dgm:sp3d/>
+    <dgm:txPr/>
+    <dgm:style>
+      <a:lnRef idx="2">
+        <a:scrgbClr r="0" g="0" b="0"/>
+      </a:lnRef>
+      <a:fillRef idx="1">
+        <a:scrgbClr r="0" g="0" b="0"/>
+      </a:fillRef>
+      <a:effectRef idx="0">
+        <a:scrgbClr r="0" g="0" b="0"/>
+      </a:effectRef>
+      <a:fontRef idx="minor">
+        <a:schemeClr val="lt1"/>
+      </a:fontRef>
+    </dgm:style>
+  </dgm:styleLbl>
+  <dgm:styleLbl name="asst3">
+    <dgm:scene3d>
+      <a:camera prst="orthographicFront"/>
+      <a:lightRig rig="threePt" dir="t"/>
+    </dgm:scene3d>
+    <dgm:sp3d/>
+    <dgm:txPr/>
+    <dgm:style>
+      <a:lnRef idx="2">
+        <a:scrgbClr r="0" g="0" b="0"/>
+      </a:lnRef>
+      <a:fillRef idx="1">
+        <a:scrgbClr r="0" g="0" b="0"/>
+      </a:fillRef>
+      <a:effectRef idx="0">
+        <a:scrgbClr r="0" g="0" b="0"/>
+      </a:effectRef>
+      <a:fontRef idx="minor">
+        <a:schemeClr val="lt1"/>
+      </a:fontRef>
+    </dgm:style>
+  </dgm:styleLbl>
+  <dgm:styleLbl name="asst4">
+    <dgm:scene3d>
+      <a:camera prst="orthographicFront"/>
+      <a:lightRig rig="threePt" dir="t"/>
+    </dgm:scene3d>
+    <dgm:sp3d/>
+    <dgm:txPr/>
+    <dgm:style>
+      <a:lnRef idx="2">
+        <a:scrgbClr r="0" g="0" b="0"/>
+      </a:lnRef>
+      <a:fillRef idx="1">
+        <a:scrgbClr r="0" g="0" b="0"/>
+      </a:fillRef>
+      <a:effectRef idx="0">
+        <a:scrgbClr r="0" g="0" b="0"/>
+      </a:effectRef>
+      <a:fontRef idx="minor">
+        <a:schemeClr val="lt1"/>
+      </a:fontRef>
+    </dgm:style>
+  </dgm:styleLbl>
+  <dgm:styleLbl name="parChTrans2D1">
+    <dgm:scene3d>
+      <a:camera prst="orthographicFront"/>
+      <a:lightRig rig="threePt" dir="t"/>
+    </dgm:scene3d>
+    <dgm:sp3d/>
+    <dgm:txPr/>
+    <dgm:style>
+      <a:lnRef idx="2">
+        <a:scrgbClr r="0" g="0" b="0"/>
+      </a:lnRef>
+      <a:fillRef idx="1">
+        <a:scrgbClr r="0" g="0" b="0"/>
+      </a:fillRef>
+      <a:effectRef idx="0">
+        <a:scrgbClr r="0" g="0" b="0"/>
+      </a:effectRef>
+      <a:fontRef idx="minor">
+        <a:schemeClr val="lt1"/>
+      </a:fontRef>
+    </dgm:style>
+  </dgm:styleLbl>
+  <dgm:styleLbl name="parChTrans2D2">
+    <dgm:scene3d>
+      <a:camera prst="orthographicFront"/>
+      <a:lightRig rig="threePt" dir="t"/>
+    </dgm:scene3d>
+    <dgm:sp3d/>
+    <dgm:txPr/>
+    <dgm:style>
+      <a:lnRef idx="2">
+        <a:scrgbClr r="0" g="0" b="0"/>
+      </a:lnRef>
+      <a:fillRef idx="1">
+        <a:scrgbClr r="0" g="0" b="0"/>
+      </a:fillRef>
+      <a:effectRef idx="0">
+        <a:scrgbClr r="0" g="0" b="0"/>
+      </a:effectRef>
+      <a:fontRef idx="minor">
+        <a:schemeClr val="lt1"/>
+      </a:fontRef>
+    </dgm:style>
+  </dgm:styleLbl>
+  <dgm:styleLbl name="parChTrans2D3">
+    <dgm:scene3d>
+      <a:camera prst="orthographicFront"/>
+      <a:lightRig rig="threePt" dir="t"/>
+    </dgm:scene3d>
+    <dgm:sp3d/>
+    <dgm:txPr/>
+    <dgm:style>
+      <a:lnRef idx="2">
+        <a:scrgbClr r="0" g="0" b="0"/>
+      </a:lnRef>
+      <a:fillRef idx="1">
+        <a:scrgbClr r="0" g="0" b="0"/>
+      </a:fillRef>
+      <a:effectRef idx="0">
+        <a:scrgbClr r="0" g="0" b="0"/>
+      </a:effectRef>
+      <a:fontRef idx="minor">
+        <a:schemeClr val="lt1"/>
+      </a:fontRef>
+    </dgm:style>
+  </dgm:styleLbl>
+  <dgm:styleLbl name="parChTrans2D4">
+    <dgm:scene3d>
+      <a:camera prst="orthographicFront"/>
+      <a:lightRig rig="threePt" dir="t"/>
+    </dgm:scene3d>
+    <dgm:sp3d/>
+    <dgm:txPr/>
+    <dgm:style>
+      <a:lnRef idx="2">
+        <a:scrgbClr r="0" g="0" b="0"/>
+      </a:lnRef>
+      <a:fillRef idx="1">
+        <a:scrgbClr r="0" g="0" b="0"/>
+      </a:fillRef>
+      <a:effectRef idx="0">
+        <a:scrgbClr r="0" g="0" b="0"/>
+      </a:effectRef>
+      <a:fontRef idx="minor">
+        <a:schemeClr val="lt1"/>
+      </a:fontRef>
+    </dgm:style>
+  </dgm:styleLbl>
+  <dgm:styleLbl name="parChTrans1D1">
+    <dgm:scene3d>
+      <a:camera prst="orthographicFront"/>
+      <a:lightRig rig="threePt" dir="t"/>
+    </dgm:scene3d>
+    <dgm:sp3d/>
+    <dgm:txPr/>
+    <dgm:style>
+      <a:lnRef idx="2">
+        <a:scrgbClr r="0" g="0" b="0"/>
+      </a:lnRef>
+      <a:fillRef idx="0">
+        <a:scrgbClr r="0" g="0" b="0"/>
+      </a:fillRef>
+      <a:effectRef idx="0">
+        <a:scrgbClr r="0" g="0" b="0"/>
+      </a:effectRef>
+      <a:fontRef idx="minor"/>
+    </dgm:style>
+  </dgm:styleLbl>
+  <dgm:styleLbl name="parChTrans1D2">
+    <dgm:scene3d>
+      <a:camera prst="orthographicFront"/>
+      <a:lightRig rig="threePt" dir="t"/>
+    </dgm:scene3d>
+    <dgm:sp3d/>
+    <dgm:txPr/>
+    <dgm:style>
+      <a:lnRef idx="2">
+        <a:scrgbClr r="0" g="0" b="0"/>
+      </a:lnRef>
+      <a:fillRef idx="0">
+        <a:scrgbClr r="0" g="0" b="0"/>
+      </a:fillRef>
+      <a:effectRef idx="0">
+        <a:scrgbClr r="0" g="0" b="0"/>
+      </a:effectRef>
+      <a:fontRef idx="minor"/>
+    </dgm:style>
+  </dgm:styleLbl>
+  <dgm:styleLbl name="parChTrans1D3">
+    <dgm:scene3d>
+      <a:camera prst="orthographicFront"/>
+      <a:lightRig rig="threePt" dir="t"/>
+    </dgm:scene3d>
+    <dgm:sp3d/>
+    <dgm:txPr/>
+    <dgm:style>
+      <a:lnRef idx="2">
+        <a:scrgbClr r="0" g="0" b="0"/>
+      </a:lnRef>
+      <a:fillRef idx="0">
+        <a:scrgbClr r="0" g="0" b="0"/>
+      </a:fillRef>
+      <a:effectRef idx="0">
+        <a:scrgbClr r="0" g="0" b="0"/>
+      </a:effectRef>
+      <a:fontRef idx="minor"/>
+    </dgm:style>
+  </dgm:styleLbl>
+  <dgm:styleLbl name="parChTrans1D4">
+    <dgm:scene3d>
+      <a:camera prst="orthographicFront"/>
+      <a:lightRig rig="threePt" dir="t"/>
+    </dgm:scene3d>
+    <dgm:sp3d/>
+    <dgm:txPr/>
+    <dgm:style>
+      <a:lnRef idx="2">
+        <a:scrgbClr r="0" g="0" b="0"/>
+      </a:lnRef>
+      <a:fillRef idx="0">
+        <a:scrgbClr r="0" g="0" b="0"/>
+      </a:fillRef>
+      <a:effectRef idx="0">
+        <a:scrgbClr r="0" g="0" b="0"/>
+      </a:effectRef>
+      <a:fontRef idx="minor"/>
+    </dgm:style>
+  </dgm:styleLbl>
+  <dgm:styleLbl name="fgAcc1">
+    <dgm:scene3d>
+      <a:camera prst="orthographicFront"/>
+      <a:lightRig rig="threePt" dir="t"/>
+    </dgm:scene3d>
+    <dgm:sp3d/>
+    <dgm:txPr/>
+    <dgm:style>
+      <a:lnRef idx="2">
+        <a:scrgbClr r="0" g="0" b="0"/>
+      </a:lnRef>
+      <a:fillRef idx="1">
+        <a:scrgbClr r="0" g="0" b="0"/>
+      </a:fillRef>
+      <a:effectRef idx="0">
+        <a:scrgbClr r="0" g="0" b="0"/>
+      </a:effectRef>
+      <a:fontRef idx="minor"/>
+    </dgm:style>
+  </dgm:styleLbl>
+  <dgm:styleLbl name="conFgAcc1">
+    <dgm:scene3d>
+      <a:camera prst="orthographicFront"/>
+      <a:lightRig rig="threePt" dir="t"/>
+    </dgm:scene3d>
+    <dgm:sp3d/>
+    <dgm:txPr/>
+    <dgm:style>
+      <a:lnRef idx="2">
+        <a:scrgbClr r="0" g="0" b="0"/>
+      </a:lnRef>
+      <a:fillRef idx="1">
+        <a:scrgbClr r="0" g="0" b="0"/>
+      </a:fillRef>
+      <a:effectRef idx="0">
+        <a:scrgbClr r="0" g="0" b="0"/>
+      </a:effectRef>
+      <a:fontRef idx="minor"/>
+    </dgm:style>
+  </dgm:styleLbl>
+  <dgm:styleLbl name="alignAcc1">
+    <dgm:scene3d>
+      <a:camera prst="orthographicFront"/>
+      <a:lightRig rig="threePt" dir="t"/>
+    </dgm:scene3d>
+    <dgm:sp3d/>
+    <dgm:txPr/>
+    <dgm:style>
+      <a:lnRef idx="2">
+        <a:scrgbClr r="0" g="0" b="0"/>
+      </a:lnRef>
+      <a:fillRef idx="1">
+        <a:scrgbClr r="0" g="0" b="0"/>
+      </a:fillRef>
+      <a:effectRef idx="0">
+        <a:scrgbClr r="0" g="0" b="0"/>
+      </a:effectRef>
+      <a:fontRef idx="minor"/>
+    </dgm:style>
+  </dgm:styleLbl>
+  <dgm:styleLbl name="trAlignAcc1">
+    <dgm:scene3d>
+      <a:camera prst="orthographicFront"/>
+      <a:lightRig rig="threePt" dir="t"/>
+    </dgm:scene3d>
+    <dgm:sp3d/>
+    <dgm:txPr/>
+    <dgm:style>
+      <a:lnRef idx="1">
+        <a:scrgbClr r="0" g="0" b="0"/>
+      </a:lnRef>
+      <a:fillRef idx="1">
+        <a:scrgbClr r="0" g="0" b="0"/>
+      </a:fillRef>
+      <a:effectRef idx="0">
+        <a:scrgbClr r="0" g="0" b="0"/>
+      </a:effectRef>
+      <a:fontRef idx="minor"/>
+    </dgm:style>
+  </dgm:styleLbl>
+  <dgm:styleLbl name="bgAcc1">
+    <dgm:scene3d>
+      <a:camera prst="orthographicFront"/>
+      <a:lightRig rig="threePt" dir="t"/>
+    </dgm:scene3d>
+    <dgm:sp3d/>
+    <dgm:txPr/>
+    <dgm:style>
+      <a:lnRef idx="2">
+        <a:scrgbClr r="0" g="0" b="0"/>
+      </a:lnRef>
+      <a:fillRef idx="1">
+        <a:scrgbClr r="0" g="0" b="0"/>
+      </a:fillRef>
+      <a:effectRef idx="0">
+        <a:scrgbClr r="0" g="0" b="0"/>
+      </a:effectRef>
+      <a:fontRef idx="minor"/>
+    </dgm:style>
+  </dgm:styleLbl>
+  <dgm:styleLbl name="solidFgAcc1">
+    <dgm:scene3d>
+      <a:camera prst="orthographicFront"/>
+      <a:lightRig rig="threePt" dir="t"/>
+    </dgm:scene3d>
+    <dgm:sp3d/>
+    <dgm:txPr/>
+    <dgm:style>
+      <a:lnRef idx="2">
+        <a:scrgbClr r="0" g="0" b="0"/>
+      </a:lnRef>
+      <a:fillRef idx="1">
+        <a:scrgbClr r="0" g="0" b="0"/>
+      </a:fillRef>
+      <a:effectRef idx="0">
+        <a:scrgbClr r="0" g="0" b="0"/>
+      </a:effectRef>
+      <a:fontRef idx="minor"/>
+    </dgm:style>
+  </dgm:styleLbl>
+  <dgm:styleLbl name="solidAlignAcc1">
+    <dgm:scene3d>
+      <a:camera prst="orthographicFront"/>
+      <a:lightRig rig="threePt" dir="t"/>
+    </dgm:scene3d>
+    <dgm:sp3d/>
+    <dgm:txPr/>
+    <dgm:style>
+      <a:lnRef idx="2">
+        <a:scrgbClr r="0" g="0" b="0"/>
+      </a:lnRef>
+      <a:fillRef idx="1">
+        <a:scrgbClr r="0" g="0" b="0"/>
+      </a:fillRef>
+      <a:effectRef idx="0">
+        <a:scrgbClr r="0" g="0" b="0"/>
+      </a:effectRef>
+      <a:fontRef idx="minor"/>
+    </dgm:style>
+  </dgm:styleLbl>
+  <dgm:styleLbl name="solidBgAcc1">
+    <dgm:scene3d>
+      <a:camera prst="orthographicFront"/>
+      <a:lightRig rig="threePt" dir="t"/>
+    </dgm:scene3d>
+    <dgm:sp3d/>
+    <dgm:txPr/>
+    <dgm:style>
+      <a:lnRef idx="2">
+        <a:scrgbClr r="0" g="0" b="0"/>
+      </a:lnRef>
+      <a:fillRef idx="1">
+        <a:scrgbClr r="0" g="0" b="0"/>
+      </a:fillRef>
+      <a:effectRef idx="0">
+        <a:scrgbClr r="0" g="0" b="0"/>
+      </a:effectRef>
+      <a:fontRef idx="minor"/>
+    </dgm:style>
+  </dgm:styleLbl>
+  <dgm:styleLbl name="fgAccFollowNode1">
+    <dgm:scene3d>
+      <a:camera prst="orthographicFront"/>
+      <a:lightRig rig="threePt" dir="t"/>
+    </dgm:scene3d>
+    <dgm:sp3d/>
+    <dgm:txPr/>
+    <dgm:style>
+      <a:lnRef idx="2">
+        <a:scrgbClr r="0" g="0" b="0"/>
+      </a:lnRef>
+      <a:fillRef idx="1">
+        <a:scrgbClr r="0" g="0" b="0"/>
+      </a:fillRef>
+      <a:effectRef idx="0">
+        <a:scrgbClr r="0" g="0" b="0"/>
+      </a:effectRef>
+      <a:fontRef idx="minor"/>
+    </dgm:style>
+  </dgm:styleLbl>
+  <dgm:styleLbl name="alignAccFollowNode1">
+    <dgm:scene3d>
+      <a:camera prst="orthographicFront"/>
+      <a:lightRig rig="threePt" dir="t"/>
+    </dgm:scene3d>
+    <dgm:sp3d/>
+    <dgm:txPr/>
+    <dgm:style>
+      <a:lnRef idx="2">
+        <a:scrgbClr r="0" g="0" b="0"/>
+      </a:lnRef>
+      <a:fillRef idx="1">
+        <a:scrgbClr r="0" g="0" b="0"/>
+      </a:fillRef>
+      <a:effectRef idx="0">
+        <a:scrgbClr r="0" g="0" b="0"/>
+      </a:effectRef>
+      <a:fontRef idx="minor"/>
+    </dgm:style>
+  </dgm:styleLbl>
+  <dgm:styleLbl name="bgAccFollowNode1">
+    <dgm:scene3d>
+      <a:camera prst="orthographicFront"/>
+      <a:lightRig rig="threePt" dir="t"/>
+    </dgm:scene3d>
+    <dgm:sp3d/>
+    <dgm:txPr/>
+    <dgm:style>
+      <a:lnRef idx="2">
+        <a:scrgbClr r="0" g="0" b="0"/>
+      </a:lnRef>
+      <a:fillRef idx="1">
+        <a:scrgbClr r="0" g="0" b="0"/>
+      </a:fillRef>
+      <a:effectRef idx="0">
+        <a:scrgbClr r="0" g="0" b="0"/>
+      </a:effectRef>
+      <a:fontRef idx="minor"/>
+    </dgm:style>
+  </dgm:styleLbl>
+  <dgm:styleLbl name="fgAcc0">
+    <dgm:scene3d>
+      <a:camera prst="orthographicFront"/>
+      <a:lightRig rig="threePt" dir="t"/>
+    </dgm:scene3d>
+    <dgm:sp3d/>
+    <dgm:txPr/>
+    <dgm:style>
+      <a:lnRef idx="2">
+        <a:scrgbClr r="0" g="0" b="0"/>
+      </a:lnRef>
+      <a:fillRef idx="1">
+        <a:scrgbClr r="0" g="0" b="0"/>
+      </a:fillRef>
+      <a:effectRef idx="0">
+        <a:scrgbClr r="0" g="0" b="0"/>
+      </a:effectRef>
+      <a:fontRef idx="minor"/>
+    </dgm:style>
+  </dgm:styleLbl>
+  <dgm:styleLbl name="fgAcc2">
+    <dgm:scene3d>
+      <a:camera prst="orthographicFront"/>
+      <a:lightRig rig="threePt" dir="t"/>
+    </dgm:scene3d>
+    <dgm:sp3d/>
+    <dgm:txPr/>
+    <dgm:style>
+      <a:lnRef idx="2">
+        <a:scrgbClr r="0" g="0" b="0"/>
+      </a:lnRef>
+      <a:fillRef idx="1">
+        <a:scrgbClr r="0" g="0" b="0"/>
+      </a:fillRef>
+      <a:effectRef idx="0">
+        <a:scrgbClr r="0" g="0" b="0"/>
+      </a:effectRef>
+      <a:fontRef idx="minor"/>
+    </dgm:style>
+  </dgm:styleLbl>
+  <dgm:styleLbl name="fgAcc3">
+    <dgm:scene3d>
+      <a:camera prst="orthographicFront"/>
+      <a:lightRig rig="threePt" dir="t"/>
+    </dgm:scene3d>
+    <dgm:sp3d/>
+    <dgm:txPr/>
+    <dgm:style>
+      <a:lnRef idx="2">
+        <a:scrgbClr r="0" g="0" b="0"/>
+      </a:lnRef>
+      <a:fillRef idx="1">
+        <a:scrgbClr r="0" g="0" b="0"/>
+      </a:fillRef>
+      <a:effectRef idx="0">
+        <a:scrgbClr r="0" g="0" b="0"/>
+      </a:effectRef>
+      <a:fontRef idx="minor"/>
+    </dgm:style>
+  </dgm:styleLbl>
+  <dgm:styleLbl name="fgAcc4">
+    <dgm:scene3d>
+      <a:camera prst="orthographicFront"/>
+      <a:lightRig rig="threePt" dir="t"/>
+    </dgm:scene3d>
+    <dgm:sp3d/>
+    <dgm:txPr/>
+    <dgm:style>
+      <a:lnRef idx="2">
+        <a:scrgbClr r="0" g="0" b="0"/>
+      </a:lnRef>
+      <a:fillRef idx="1">
+        <a:scrgbClr r="0" g="0" b="0"/>
+      </a:fillRef>
+      <a:effectRef idx="0">
+        <a:scrgbClr r="0" g="0" b="0"/>
+      </a:effectRef>
+      <a:fontRef idx="minor"/>
+    </dgm:style>
+  </dgm:styleLbl>
+  <dgm:styleLbl name="bgShp">
+    <dgm:scene3d>
+      <a:camera prst="orthographicFront"/>
+      <a:lightRig rig="threePt" dir="t"/>
+    </dgm:scene3d>
+    <dgm:sp3d/>
+    <dgm:txPr/>
+    <dgm:style>
+      <a:lnRef idx="0">
+        <a:scrgbClr r="0" g="0" b="0"/>
+      </a:lnRef>
+      <a:fillRef idx="1">
+        <a:scrgbClr r="0" g="0" b="0"/>
+      </a:fillRef>
+      <a:effectRef idx="0">
+        <a:scrgbClr r="0" g="0" b="0"/>
+      </a:effectRef>
+      <a:fontRef idx="minor"/>
+    </dgm:style>
+  </dgm:styleLbl>
+  <dgm:styleLbl name="dkBgShp">
+    <dgm:scene3d>
+      <a:camera prst="orthographicFront"/>
+      <a:lightRig rig="threePt" dir="t"/>
+    </dgm:scene3d>
+    <dgm:sp3d/>
+    <dgm:txPr/>
+    <dgm:style>
+      <a:lnRef idx="0">
+        <a:scrgbClr r="0" g="0" b="0"/>
+      </a:lnRef>
+      <a:fillRef idx="1">
+        <a:scrgbClr r="0" g="0" b="0"/>
+      </a:fillRef>
+      <a:effectRef idx="0">
+        <a:scrgbClr r="0" g="0" b="0"/>
+      </a:effectRef>
+      <a:fontRef idx="minor"/>
+    </dgm:style>
+  </dgm:styleLbl>
+  <dgm:styleLbl name="trBgShp">
+    <dgm:scene3d>
+      <a:camera prst="orthographicFront"/>
+      <a:lightRig rig="threePt" dir="t"/>
+    </dgm:scene3d>
+    <dgm:sp3d/>
+    <dgm:txPr/>
+    <dgm:style>
+      <a:lnRef idx="0">
+        <a:scrgbClr r="0" g="0" b="0"/>
+      </a:lnRef>
+      <a:fillRef idx="1">
+        <a:scrgbClr r="0" g="0" b="0"/>
+      </a:fillRef>
+      <a:effectRef idx="0">
+        <a:scrgbClr r="0" g="0" b="0"/>
+      </a:effectRef>
+      <a:fontRef idx="minor"/>
+    </dgm:style>
+  </dgm:styleLbl>
+  <dgm:styleLbl name="fgShp">
+    <dgm:scene3d>
+      <a:camera prst="orthographicFront"/>
+      <a:lightRig rig="threePt" dir="t"/>
+    </dgm:scene3d>
+    <dgm:sp3d/>
+    <dgm:txPr/>
+    <dgm:style>
+      <a:lnRef idx="2">
+        <a:scrgbClr r="0" g="0" b="0"/>
+      </a:lnRef>
+      <a:fillRef idx="1">
+        <a:scrgbClr r="0" g="0" b="0"/>
+      </a:fillRef>
+      <a:effectRef idx="0">
         <a:scrgbClr r="0" g="0" b="0"/>
       </a:effectRef>
       <a:fontRef idx="minor"/>
@@ -16262,6 +19130,1237 @@
 </p:sld>
 </file>
 
+<file path=ppt/slides/slide11.xml><?xml version="1.0" encoding="utf-8"?>
+<p:sld xmlns:a="http://schemas.openxmlformats.org/drawingml/2006/main" xmlns:r="http://schemas.openxmlformats.org/officeDocument/2006/relationships" xmlns:p="http://schemas.openxmlformats.org/presentationml/2006/main">
+  <p:cSld>
+    <p:bg>
+      <p:bgPr>
+        <a:solidFill>
+          <a:schemeClr val="bg1"/>
+        </a:solidFill>
+        <a:effectLst/>
+      </p:bgPr>
+    </p:bg>
+    <p:spTree>
+      <p:nvGrpSpPr>
+        <p:cNvPr id="1" name=""/>
+        <p:cNvGrpSpPr/>
+        <p:nvPr/>
+      </p:nvGrpSpPr>
+      <p:grpSpPr>
+        <a:xfrm>
+          <a:off x="0" y="0"/>
+          <a:ext cx="0" cy="0"/>
+          <a:chOff x="0" y="0"/>
+          <a:chExt cx="0" cy="0"/>
+        </a:xfrm>
+      </p:grpSpPr>
+      <p:sp useBgFill="1">
+        <p:nvSpPr>
+          <p:cNvPr id="9" name="Rectangle 8">
+            <a:extLst>
+              <a:ext uri="{FF2B5EF4-FFF2-40B4-BE49-F238E27FC236}">
+                <a16:creationId xmlns:a16="http://schemas.microsoft.com/office/drawing/2014/main" id="{35DB3719-6FDC-4E5D-891D-FF40B7300F64}"/>
+              </a:ext>
+              <a:ext uri="{C183D7F6-B498-43B3-948B-1728B52AA6E4}">
+                <adec:decorative xmlns:adec="http://schemas.microsoft.com/office/drawing/2017/decorative" val="1"/>
+              </a:ext>
+            </a:extLst>
+          </p:cNvPr>
+          <p:cNvSpPr>
+            <a:spLocks noGrp="1" noRot="1" noChangeAspect="1" noMove="1" noResize="1" noEditPoints="1" noAdjustHandles="1" noChangeArrowheads="1" noChangeShapeType="1" noTextEdit="1"/>
+          </p:cNvSpPr>
+          <p:nvPr>
+            <p:extLst>
+              <p:ext uri="{386F3935-93C4-4BCD-93E2-E3B085C9AB24}">
+                <p16:designElem xmlns:p16="http://schemas.microsoft.com/office/powerpoint/2015/main" val="1"/>
+              </p:ext>
+            </p:extLst>
+          </p:nvPr>
+        </p:nvSpPr>
+        <p:spPr>
+          <a:xfrm>
+            <a:off x="0" y="0"/>
+            <a:ext cx="12188952" cy="6858000"/>
+          </a:xfrm>
+          <a:prstGeom prst="rect">
+            <a:avLst/>
+          </a:prstGeom>
+          <a:ln>
+            <a:noFill/>
+          </a:ln>
+        </p:spPr>
+        <p:style>
+          <a:lnRef idx="2">
+            <a:schemeClr val="accent1">
+              <a:shade val="50000"/>
+            </a:schemeClr>
+          </a:lnRef>
+          <a:fillRef idx="1">
+            <a:schemeClr val="accent1"/>
+          </a:fillRef>
+          <a:effectRef idx="0">
+            <a:schemeClr val="accent1"/>
+          </a:effectRef>
+          <a:fontRef idx="minor">
+            <a:schemeClr val="lt1"/>
+          </a:fontRef>
+        </p:style>
+        <p:txBody>
+          <a:bodyPr rtlCol="0" anchor="ctr"/>
+          <a:lstStyle/>
+          <a:p>
+            <a:pPr algn="ctr"/>
+            <a:endParaRPr lang="en-US"/>
+          </a:p>
+        </p:txBody>
+      </p:sp>
+      <p:sp>
+        <p:nvSpPr>
+          <p:cNvPr id="2" name="제목 1">
+            <a:extLst>
+              <a:ext uri="{FF2B5EF4-FFF2-40B4-BE49-F238E27FC236}">
+                <a16:creationId xmlns:a16="http://schemas.microsoft.com/office/drawing/2014/main" id="{40AEBBC4-21DF-FB5A-C67E-9A61BBF7BC38}"/>
+              </a:ext>
+            </a:extLst>
+          </p:cNvPr>
+          <p:cNvSpPr>
+            <a:spLocks noGrp="1"/>
+          </p:cNvSpPr>
+          <p:nvPr>
+            <p:ph type="title"/>
+          </p:nvPr>
+        </p:nvSpPr>
+        <p:spPr>
+          <a:xfrm>
+            <a:off x="838200" y="365125"/>
+            <a:ext cx="10515600" cy="1325563"/>
+          </a:xfrm>
+        </p:spPr>
+        <p:txBody>
+          <a:bodyPr>
+            <a:normAutofit/>
+          </a:bodyPr>
+          <a:lstStyle/>
+          <a:p>
+            <a:r>
+              <a:rPr lang="en-US" altLang="ko-KR" sz="5400"/>
+              <a:t>Reference</a:t>
+            </a:r>
+            <a:r>
+              <a:rPr lang="ko-KR" altLang="en-US" sz="5400"/>
+              <a:t>로 메소드 입력 전달</a:t>
+            </a:r>
+          </a:p>
+        </p:txBody>
+      </p:sp>
+      <p:sp>
+        <p:nvSpPr>
+          <p:cNvPr id="11" name="sketch line">
+            <a:extLst>
+              <a:ext uri="{FF2B5EF4-FFF2-40B4-BE49-F238E27FC236}">
+                <a16:creationId xmlns:a16="http://schemas.microsoft.com/office/drawing/2014/main" id="{E0CBAC23-2E3F-4A90-BA59-F8299F6A5439}"/>
+              </a:ext>
+              <a:ext uri="{C183D7F6-B498-43B3-948B-1728B52AA6E4}">
+                <adec:decorative xmlns:adec="http://schemas.microsoft.com/office/drawing/2017/decorative" val="1"/>
+              </a:ext>
+            </a:extLst>
+          </p:cNvPr>
+          <p:cNvSpPr>
+            <a:spLocks noGrp="1" noRot="1" noChangeAspect="1" noMove="1" noResize="1" noEditPoints="1" noAdjustHandles="1" noChangeArrowheads="1" noChangeShapeType="1" noTextEdit="1"/>
+          </p:cNvSpPr>
+          <p:nvPr>
+            <p:extLst>
+              <p:ext uri="{386F3935-93C4-4BCD-93E2-E3B085C9AB24}">
+                <p16:designElem xmlns:p16="http://schemas.microsoft.com/office/powerpoint/2015/main" val="1"/>
+              </p:ext>
+            </p:extLst>
+          </p:nvPr>
+        </p:nvSpPr>
+        <p:spPr>
+          <a:xfrm>
+            <a:off x="838200" y="1865313"/>
+            <a:ext cx="10424160" cy="18288"/>
+          </a:xfrm>
+          <a:custGeom>
+            <a:avLst/>
+            <a:gdLst>
+              <a:gd name="connsiteX0" fmla="*/ 0 w 10424160"/>
+              <a:gd name="connsiteY0" fmla="*/ 0 h 18288"/>
+              <a:gd name="connsiteX1" fmla="*/ 903427 w 10424160"/>
+              <a:gd name="connsiteY1" fmla="*/ 0 h 18288"/>
+              <a:gd name="connsiteX2" fmla="*/ 1389888 w 10424160"/>
+              <a:gd name="connsiteY2" fmla="*/ 0 h 18288"/>
+              <a:gd name="connsiteX3" fmla="*/ 2189074 w 10424160"/>
+              <a:gd name="connsiteY3" fmla="*/ 0 h 18288"/>
+              <a:gd name="connsiteX4" fmla="*/ 2675534 w 10424160"/>
+              <a:gd name="connsiteY4" fmla="*/ 0 h 18288"/>
+              <a:gd name="connsiteX5" fmla="*/ 3370478 w 10424160"/>
+              <a:gd name="connsiteY5" fmla="*/ 0 h 18288"/>
+              <a:gd name="connsiteX6" fmla="*/ 4169664 w 10424160"/>
+              <a:gd name="connsiteY6" fmla="*/ 0 h 18288"/>
+              <a:gd name="connsiteX7" fmla="*/ 4551883 w 10424160"/>
+              <a:gd name="connsiteY7" fmla="*/ 0 h 18288"/>
+              <a:gd name="connsiteX8" fmla="*/ 4934102 w 10424160"/>
+              <a:gd name="connsiteY8" fmla="*/ 0 h 18288"/>
+              <a:gd name="connsiteX9" fmla="*/ 5837530 w 10424160"/>
+              <a:gd name="connsiteY9" fmla="*/ 0 h 18288"/>
+              <a:gd name="connsiteX10" fmla="*/ 6532474 w 10424160"/>
+              <a:gd name="connsiteY10" fmla="*/ 0 h 18288"/>
+              <a:gd name="connsiteX11" fmla="*/ 6914693 w 10424160"/>
+              <a:gd name="connsiteY11" fmla="*/ 0 h 18288"/>
+              <a:gd name="connsiteX12" fmla="*/ 7609637 w 10424160"/>
+              <a:gd name="connsiteY12" fmla="*/ 0 h 18288"/>
+              <a:gd name="connsiteX13" fmla="*/ 8513064 w 10424160"/>
+              <a:gd name="connsiteY13" fmla="*/ 0 h 18288"/>
+              <a:gd name="connsiteX14" fmla="*/ 9103766 w 10424160"/>
+              <a:gd name="connsiteY14" fmla="*/ 0 h 18288"/>
+              <a:gd name="connsiteX15" fmla="*/ 9694469 w 10424160"/>
+              <a:gd name="connsiteY15" fmla="*/ 0 h 18288"/>
+              <a:gd name="connsiteX16" fmla="*/ 10424160 w 10424160"/>
+              <a:gd name="connsiteY16" fmla="*/ 0 h 18288"/>
+              <a:gd name="connsiteX17" fmla="*/ 10424160 w 10424160"/>
+              <a:gd name="connsiteY17" fmla="*/ 18288 h 18288"/>
+              <a:gd name="connsiteX18" fmla="*/ 9729216 w 10424160"/>
+              <a:gd name="connsiteY18" fmla="*/ 18288 h 18288"/>
+              <a:gd name="connsiteX19" fmla="*/ 8930030 w 10424160"/>
+              <a:gd name="connsiteY19" fmla="*/ 18288 h 18288"/>
+              <a:gd name="connsiteX20" fmla="*/ 8130845 w 10424160"/>
+              <a:gd name="connsiteY20" fmla="*/ 18288 h 18288"/>
+              <a:gd name="connsiteX21" fmla="*/ 7644384 w 10424160"/>
+              <a:gd name="connsiteY21" fmla="*/ 18288 h 18288"/>
+              <a:gd name="connsiteX22" fmla="*/ 6740957 w 10424160"/>
+              <a:gd name="connsiteY22" fmla="*/ 18288 h 18288"/>
+              <a:gd name="connsiteX23" fmla="*/ 6046013 w 10424160"/>
+              <a:gd name="connsiteY23" fmla="*/ 18288 h 18288"/>
+              <a:gd name="connsiteX24" fmla="*/ 5663794 w 10424160"/>
+              <a:gd name="connsiteY24" fmla="*/ 18288 h 18288"/>
+              <a:gd name="connsiteX25" fmla="*/ 4968850 w 10424160"/>
+              <a:gd name="connsiteY25" fmla="*/ 18288 h 18288"/>
+              <a:gd name="connsiteX26" fmla="*/ 4378147 w 10424160"/>
+              <a:gd name="connsiteY26" fmla="*/ 18288 h 18288"/>
+              <a:gd name="connsiteX27" fmla="*/ 3787445 w 10424160"/>
+              <a:gd name="connsiteY27" fmla="*/ 18288 h 18288"/>
+              <a:gd name="connsiteX28" fmla="*/ 3196742 w 10424160"/>
+              <a:gd name="connsiteY28" fmla="*/ 18288 h 18288"/>
+              <a:gd name="connsiteX29" fmla="*/ 2606040 w 10424160"/>
+              <a:gd name="connsiteY29" fmla="*/ 18288 h 18288"/>
+              <a:gd name="connsiteX30" fmla="*/ 1806854 w 10424160"/>
+              <a:gd name="connsiteY30" fmla="*/ 18288 h 18288"/>
+              <a:gd name="connsiteX31" fmla="*/ 1111910 w 10424160"/>
+              <a:gd name="connsiteY31" fmla="*/ 18288 h 18288"/>
+              <a:gd name="connsiteX32" fmla="*/ 729691 w 10424160"/>
+              <a:gd name="connsiteY32" fmla="*/ 18288 h 18288"/>
+              <a:gd name="connsiteX33" fmla="*/ 0 w 10424160"/>
+              <a:gd name="connsiteY33" fmla="*/ 18288 h 18288"/>
+              <a:gd name="connsiteX34" fmla="*/ 0 w 10424160"/>
+              <a:gd name="connsiteY34" fmla="*/ 0 h 18288"/>
+            </a:gdLst>
+            <a:ahLst/>
+            <a:cxnLst>
+              <a:cxn ang="0">
+                <a:pos x="connsiteX0" y="connsiteY0"/>
+              </a:cxn>
+              <a:cxn ang="0">
+                <a:pos x="connsiteX1" y="connsiteY1"/>
+              </a:cxn>
+              <a:cxn ang="0">
+                <a:pos x="connsiteX2" y="connsiteY2"/>
+              </a:cxn>
+              <a:cxn ang="0">
+                <a:pos x="connsiteX3" y="connsiteY3"/>
+              </a:cxn>
+              <a:cxn ang="0">
+                <a:pos x="connsiteX4" y="connsiteY4"/>
+              </a:cxn>
+              <a:cxn ang="0">
+                <a:pos x="connsiteX5" y="connsiteY5"/>
+              </a:cxn>
+              <a:cxn ang="0">
+                <a:pos x="connsiteX6" y="connsiteY6"/>
+              </a:cxn>
+              <a:cxn ang="0">
+                <a:pos x="connsiteX7" y="connsiteY7"/>
+              </a:cxn>
+              <a:cxn ang="0">
+                <a:pos x="connsiteX8" y="connsiteY8"/>
+              </a:cxn>
+              <a:cxn ang="0">
+                <a:pos x="connsiteX9" y="connsiteY9"/>
+              </a:cxn>
+              <a:cxn ang="0">
+                <a:pos x="connsiteX10" y="connsiteY10"/>
+              </a:cxn>
+              <a:cxn ang="0">
+                <a:pos x="connsiteX11" y="connsiteY11"/>
+              </a:cxn>
+              <a:cxn ang="0">
+                <a:pos x="connsiteX12" y="connsiteY12"/>
+              </a:cxn>
+              <a:cxn ang="0">
+                <a:pos x="connsiteX13" y="connsiteY13"/>
+              </a:cxn>
+              <a:cxn ang="0">
+                <a:pos x="connsiteX14" y="connsiteY14"/>
+              </a:cxn>
+              <a:cxn ang="0">
+                <a:pos x="connsiteX15" y="connsiteY15"/>
+              </a:cxn>
+              <a:cxn ang="0">
+                <a:pos x="connsiteX16" y="connsiteY16"/>
+              </a:cxn>
+              <a:cxn ang="0">
+                <a:pos x="connsiteX17" y="connsiteY17"/>
+              </a:cxn>
+              <a:cxn ang="0">
+                <a:pos x="connsiteX18" y="connsiteY18"/>
+              </a:cxn>
+              <a:cxn ang="0">
+                <a:pos x="connsiteX19" y="connsiteY19"/>
+              </a:cxn>
+              <a:cxn ang="0">
+                <a:pos x="connsiteX20" y="connsiteY20"/>
+              </a:cxn>
+              <a:cxn ang="0">
+                <a:pos x="connsiteX21" y="connsiteY21"/>
+              </a:cxn>
+              <a:cxn ang="0">
+                <a:pos x="connsiteX22" y="connsiteY22"/>
+              </a:cxn>
+              <a:cxn ang="0">
+                <a:pos x="connsiteX23" y="connsiteY23"/>
+              </a:cxn>
+              <a:cxn ang="0">
+                <a:pos x="connsiteX24" y="connsiteY24"/>
+              </a:cxn>
+              <a:cxn ang="0">
+                <a:pos x="connsiteX25" y="connsiteY25"/>
+              </a:cxn>
+              <a:cxn ang="0">
+                <a:pos x="connsiteX26" y="connsiteY26"/>
+              </a:cxn>
+              <a:cxn ang="0">
+                <a:pos x="connsiteX27" y="connsiteY27"/>
+              </a:cxn>
+              <a:cxn ang="0">
+                <a:pos x="connsiteX28" y="connsiteY28"/>
+              </a:cxn>
+              <a:cxn ang="0">
+                <a:pos x="connsiteX29" y="connsiteY29"/>
+              </a:cxn>
+              <a:cxn ang="0">
+                <a:pos x="connsiteX30" y="connsiteY30"/>
+              </a:cxn>
+              <a:cxn ang="0">
+                <a:pos x="connsiteX31" y="connsiteY31"/>
+              </a:cxn>
+              <a:cxn ang="0">
+                <a:pos x="connsiteX32" y="connsiteY32"/>
+              </a:cxn>
+              <a:cxn ang="0">
+                <a:pos x="connsiteX33" y="connsiteY33"/>
+              </a:cxn>
+              <a:cxn ang="0">
+                <a:pos x="connsiteX34" y="connsiteY34"/>
+              </a:cxn>
+            </a:cxnLst>
+            <a:rect l="l" t="t" r="r" b="b"/>
+            <a:pathLst>
+              <a:path w="10424160" h="18288" fill="none" extrusionOk="0">
+                <a:moveTo>
+                  <a:pt x="0" y="0"/>
+                </a:moveTo>
+                <a:cubicBezTo>
+                  <a:pt x="251416" y="-3874"/>
+                  <a:pt x="479411" y="-20508"/>
+                  <a:pt x="903427" y="0"/>
+                </a:cubicBezTo>
+                <a:cubicBezTo>
+                  <a:pt x="1327443" y="20508"/>
+                  <a:pt x="1177990" y="-7387"/>
+                  <a:pt x="1389888" y="0"/>
+                </a:cubicBezTo>
+                <a:cubicBezTo>
+                  <a:pt x="1601786" y="7387"/>
+                  <a:pt x="1928602" y="-6697"/>
+                  <a:pt x="2189074" y="0"/>
+                </a:cubicBezTo>
+                <a:cubicBezTo>
+                  <a:pt x="2449546" y="6697"/>
+                  <a:pt x="2440085" y="-21144"/>
+                  <a:pt x="2675534" y="0"/>
+                </a:cubicBezTo>
+                <a:cubicBezTo>
+                  <a:pt x="2910983" y="21144"/>
+                  <a:pt x="3026158" y="-11124"/>
+                  <a:pt x="3370478" y="0"/>
+                </a:cubicBezTo>
+                <a:cubicBezTo>
+                  <a:pt x="3714798" y="11124"/>
+                  <a:pt x="3864539" y="-10660"/>
+                  <a:pt x="4169664" y="0"/>
+                </a:cubicBezTo>
+                <a:cubicBezTo>
+                  <a:pt x="4474789" y="10660"/>
+                  <a:pt x="4471218" y="16488"/>
+                  <a:pt x="4551883" y="0"/>
+                </a:cubicBezTo>
+                <a:cubicBezTo>
+                  <a:pt x="4632548" y="-16488"/>
+                  <a:pt x="4786830" y="7986"/>
+                  <a:pt x="4934102" y="0"/>
+                </a:cubicBezTo>
+                <a:cubicBezTo>
+                  <a:pt x="5081374" y="-7986"/>
+                  <a:pt x="5575881" y="-33003"/>
+                  <a:pt x="5837530" y="0"/>
+                </a:cubicBezTo>
+                <a:cubicBezTo>
+                  <a:pt x="6099179" y="33003"/>
+                  <a:pt x="6305895" y="14170"/>
+                  <a:pt x="6532474" y="0"/>
+                </a:cubicBezTo>
+                <a:cubicBezTo>
+                  <a:pt x="6759053" y="-14170"/>
+                  <a:pt x="6726707" y="16121"/>
+                  <a:pt x="6914693" y="0"/>
+                </a:cubicBezTo>
+                <a:cubicBezTo>
+                  <a:pt x="7102679" y="-16121"/>
+                  <a:pt x="7397857" y="32594"/>
+                  <a:pt x="7609637" y="0"/>
+                </a:cubicBezTo>
+                <a:cubicBezTo>
+                  <a:pt x="7821417" y="-32594"/>
+                  <a:pt x="8141235" y="-3745"/>
+                  <a:pt x="8513064" y="0"/>
+                </a:cubicBezTo>
+                <a:cubicBezTo>
+                  <a:pt x="8884893" y="3745"/>
+                  <a:pt x="8877548" y="3359"/>
+                  <a:pt x="9103766" y="0"/>
+                </a:cubicBezTo>
+                <a:cubicBezTo>
+                  <a:pt x="9329984" y="-3359"/>
+                  <a:pt x="9545570" y="-17843"/>
+                  <a:pt x="9694469" y="0"/>
+                </a:cubicBezTo>
+                <a:cubicBezTo>
+                  <a:pt x="9843368" y="17843"/>
+                  <a:pt x="10162477" y="-1217"/>
+                  <a:pt x="10424160" y="0"/>
+                </a:cubicBezTo>
+                <a:cubicBezTo>
+                  <a:pt x="10424498" y="7640"/>
+                  <a:pt x="10423710" y="11289"/>
+                  <a:pt x="10424160" y="18288"/>
+                </a:cubicBezTo>
+                <a:cubicBezTo>
+                  <a:pt x="10184680" y="20716"/>
+                  <a:pt x="10034768" y="-9357"/>
+                  <a:pt x="9729216" y="18288"/>
+                </a:cubicBezTo>
+                <a:cubicBezTo>
+                  <a:pt x="9423664" y="45933"/>
+                  <a:pt x="9309220" y="36372"/>
+                  <a:pt x="8930030" y="18288"/>
+                </a:cubicBezTo>
+                <a:cubicBezTo>
+                  <a:pt x="8550840" y="204"/>
+                  <a:pt x="8513376" y="34707"/>
+                  <a:pt x="8130845" y="18288"/>
+                </a:cubicBezTo>
+                <a:cubicBezTo>
+                  <a:pt x="7748315" y="1869"/>
+                  <a:pt x="7864674" y="19659"/>
+                  <a:pt x="7644384" y="18288"/>
+                </a:cubicBezTo>
+                <a:cubicBezTo>
+                  <a:pt x="7424094" y="16917"/>
+                  <a:pt x="6947001" y="55680"/>
+                  <a:pt x="6740957" y="18288"/>
+                </a:cubicBezTo>
+                <a:cubicBezTo>
+                  <a:pt x="6534913" y="-19104"/>
+                  <a:pt x="6313809" y="33391"/>
+                  <a:pt x="6046013" y="18288"/>
+                </a:cubicBezTo>
+                <a:cubicBezTo>
+                  <a:pt x="5778217" y="3185"/>
+                  <a:pt x="5786775" y="1439"/>
+                  <a:pt x="5663794" y="18288"/>
+                </a:cubicBezTo>
+                <a:cubicBezTo>
+                  <a:pt x="5540813" y="35137"/>
+                  <a:pt x="5204724" y="25434"/>
+                  <a:pt x="4968850" y="18288"/>
+                </a:cubicBezTo>
+                <a:cubicBezTo>
+                  <a:pt x="4732976" y="11142"/>
+                  <a:pt x="4559928" y="34568"/>
+                  <a:pt x="4378147" y="18288"/>
+                </a:cubicBezTo>
+                <a:cubicBezTo>
+                  <a:pt x="4196366" y="2008"/>
+                  <a:pt x="3992200" y="35409"/>
+                  <a:pt x="3787445" y="18288"/>
+                </a:cubicBezTo>
+                <a:cubicBezTo>
+                  <a:pt x="3582690" y="1167"/>
+                  <a:pt x="3488876" y="-7583"/>
+                  <a:pt x="3196742" y="18288"/>
+                </a:cubicBezTo>
+                <a:cubicBezTo>
+                  <a:pt x="2904608" y="44159"/>
+                  <a:pt x="2729828" y="45906"/>
+                  <a:pt x="2606040" y="18288"/>
+                </a:cubicBezTo>
+                <a:cubicBezTo>
+                  <a:pt x="2482252" y="-9330"/>
+                  <a:pt x="2000672" y="-5498"/>
+                  <a:pt x="1806854" y="18288"/>
+                </a:cubicBezTo>
+                <a:cubicBezTo>
+                  <a:pt x="1613036" y="42074"/>
+                  <a:pt x="1310933" y="-4240"/>
+                  <a:pt x="1111910" y="18288"/>
+                </a:cubicBezTo>
+                <a:cubicBezTo>
+                  <a:pt x="912887" y="40816"/>
+                  <a:pt x="891560" y="1701"/>
+                  <a:pt x="729691" y="18288"/>
+                </a:cubicBezTo>
+                <a:cubicBezTo>
+                  <a:pt x="567822" y="34875"/>
+                  <a:pt x="203025" y="34462"/>
+                  <a:pt x="0" y="18288"/>
+                </a:cubicBezTo>
+                <a:cubicBezTo>
+                  <a:pt x="-82" y="11708"/>
+                  <a:pt x="-178" y="8956"/>
+                  <a:pt x="0" y="0"/>
+                </a:cubicBezTo>
+                <a:close/>
+              </a:path>
+              <a:path w="10424160" h="18288" stroke="0" extrusionOk="0">
+                <a:moveTo>
+                  <a:pt x="0" y="0"/>
+                </a:moveTo>
+                <a:cubicBezTo>
+                  <a:pt x="119910" y="17195"/>
+                  <a:pt x="345032" y="1652"/>
+                  <a:pt x="590702" y="0"/>
+                </a:cubicBezTo>
+                <a:cubicBezTo>
+                  <a:pt x="836372" y="-1652"/>
+                  <a:pt x="830717" y="-10944"/>
+                  <a:pt x="972922" y="0"/>
+                </a:cubicBezTo>
+                <a:cubicBezTo>
+                  <a:pt x="1115127" y="10944"/>
+                  <a:pt x="1638708" y="17269"/>
+                  <a:pt x="1876349" y="0"/>
+                </a:cubicBezTo>
+                <a:cubicBezTo>
+                  <a:pt x="2113990" y="-17269"/>
+                  <a:pt x="2263529" y="27642"/>
+                  <a:pt x="2467051" y="0"/>
+                </a:cubicBezTo>
+                <a:cubicBezTo>
+                  <a:pt x="2670573" y="-27642"/>
+                  <a:pt x="2867743" y="-1552"/>
+                  <a:pt x="3057754" y="0"/>
+                </a:cubicBezTo>
+                <a:cubicBezTo>
+                  <a:pt x="3247765" y="1552"/>
+                  <a:pt x="3729099" y="45169"/>
+                  <a:pt x="3961181" y="0"/>
+                </a:cubicBezTo>
+                <a:cubicBezTo>
+                  <a:pt x="4193263" y="-45169"/>
+                  <a:pt x="4313735" y="4067"/>
+                  <a:pt x="4447642" y="0"/>
+                </a:cubicBezTo>
+                <a:cubicBezTo>
+                  <a:pt x="4581549" y="-4067"/>
+                  <a:pt x="5123626" y="11867"/>
+                  <a:pt x="5351069" y="0"/>
+                </a:cubicBezTo>
+                <a:cubicBezTo>
+                  <a:pt x="5578512" y="-11867"/>
+                  <a:pt x="6044105" y="-19983"/>
+                  <a:pt x="6254496" y="0"/>
+                </a:cubicBezTo>
+                <a:cubicBezTo>
+                  <a:pt x="6464887" y="19983"/>
+                  <a:pt x="6664731" y="4232"/>
+                  <a:pt x="6949440" y="0"/>
+                </a:cubicBezTo>
+                <a:cubicBezTo>
+                  <a:pt x="7234149" y="-4232"/>
+                  <a:pt x="7497205" y="28731"/>
+                  <a:pt x="7852867" y="0"/>
+                </a:cubicBezTo>
+                <a:cubicBezTo>
+                  <a:pt x="8208529" y="-28731"/>
+                  <a:pt x="8287556" y="2616"/>
+                  <a:pt x="8443570" y="0"/>
+                </a:cubicBezTo>
+                <a:cubicBezTo>
+                  <a:pt x="8599584" y="-2616"/>
+                  <a:pt x="8871283" y="-14113"/>
+                  <a:pt x="9034272" y="0"/>
+                </a:cubicBezTo>
+                <a:cubicBezTo>
+                  <a:pt x="9197261" y="14113"/>
+                  <a:pt x="9604978" y="-35623"/>
+                  <a:pt x="9833458" y="0"/>
+                </a:cubicBezTo>
+                <a:cubicBezTo>
+                  <a:pt x="10061938" y="35623"/>
+                  <a:pt x="10231944" y="-8194"/>
+                  <a:pt x="10424160" y="0"/>
+                </a:cubicBezTo>
+                <a:cubicBezTo>
+                  <a:pt x="10424285" y="4395"/>
+                  <a:pt x="10424085" y="9776"/>
+                  <a:pt x="10424160" y="18288"/>
+                </a:cubicBezTo>
+                <a:cubicBezTo>
+                  <a:pt x="10058736" y="-5772"/>
+                  <a:pt x="9942989" y="-18764"/>
+                  <a:pt x="9624974" y="18288"/>
+                </a:cubicBezTo>
+                <a:cubicBezTo>
+                  <a:pt x="9306959" y="55340"/>
+                  <a:pt x="9229263" y="24995"/>
+                  <a:pt x="8930030" y="18288"/>
+                </a:cubicBezTo>
+                <a:cubicBezTo>
+                  <a:pt x="8630797" y="11581"/>
+                  <a:pt x="8647263" y="10931"/>
+                  <a:pt x="8547811" y="18288"/>
+                </a:cubicBezTo>
+                <a:cubicBezTo>
+                  <a:pt x="8448359" y="25645"/>
+                  <a:pt x="8173221" y="219"/>
+                  <a:pt x="8061350" y="18288"/>
+                </a:cubicBezTo>
+                <a:cubicBezTo>
+                  <a:pt x="7949479" y="36357"/>
+                  <a:pt x="7437002" y="17516"/>
+                  <a:pt x="7157923" y="18288"/>
+                </a:cubicBezTo>
+                <a:cubicBezTo>
+                  <a:pt x="6878844" y="19060"/>
+                  <a:pt x="6610241" y="8864"/>
+                  <a:pt x="6462979" y="18288"/>
+                </a:cubicBezTo>
+                <a:cubicBezTo>
+                  <a:pt x="6315717" y="27712"/>
+                  <a:pt x="6124879" y="4989"/>
+                  <a:pt x="5976518" y="18288"/>
+                </a:cubicBezTo>
+                <a:cubicBezTo>
+                  <a:pt x="5828157" y="31587"/>
+                  <a:pt x="5566880" y="7112"/>
+                  <a:pt x="5281574" y="18288"/>
+                </a:cubicBezTo>
+                <a:cubicBezTo>
+                  <a:pt x="4996268" y="29464"/>
+                  <a:pt x="5085614" y="20493"/>
+                  <a:pt x="4899355" y="18288"/>
+                </a:cubicBezTo>
+                <a:cubicBezTo>
+                  <a:pt x="4713096" y="16083"/>
+                  <a:pt x="4606138" y="34359"/>
+                  <a:pt x="4517136" y="18288"/>
+                </a:cubicBezTo>
+                <a:cubicBezTo>
+                  <a:pt x="4428134" y="2217"/>
+                  <a:pt x="4125335" y="52414"/>
+                  <a:pt x="3822192" y="18288"/>
+                </a:cubicBezTo>
+                <a:cubicBezTo>
+                  <a:pt x="3519049" y="-15838"/>
+                  <a:pt x="3453132" y="3859"/>
+                  <a:pt x="3335731" y="18288"/>
+                </a:cubicBezTo>
+                <a:cubicBezTo>
+                  <a:pt x="3218330" y="32717"/>
+                  <a:pt x="2718749" y="-13936"/>
+                  <a:pt x="2536546" y="18288"/>
+                </a:cubicBezTo>
+                <a:cubicBezTo>
+                  <a:pt x="2354343" y="50512"/>
+                  <a:pt x="2190669" y="3238"/>
+                  <a:pt x="2050085" y="18288"/>
+                </a:cubicBezTo>
+                <a:cubicBezTo>
+                  <a:pt x="1909501" y="33338"/>
+                  <a:pt x="1520975" y="3062"/>
+                  <a:pt x="1250899" y="18288"/>
+                </a:cubicBezTo>
+                <a:cubicBezTo>
+                  <a:pt x="980823" y="33514"/>
+                  <a:pt x="992936" y="28036"/>
+                  <a:pt x="868680" y="18288"/>
+                </a:cubicBezTo>
+                <a:cubicBezTo>
+                  <a:pt x="744424" y="8540"/>
+                  <a:pt x="230364" y="33365"/>
+                  <a:pt x="0" y="18288"/>
+                </a:cubicBezTo>
+                <a:cubicBezTo>
+                  <a:pt x="-504" y="12101"/>
+                  <a:pt x="-591" y="7719"/>
+                  <a:pt x="0" y="0"/>
+                </a:cubicBezTo>
+                <a:close/>
+              </a:path>
+            </a:pathLst>
+          </a:custGeom>
+          <a:solidFill>
+            <a:schemeClr val="accent2"/>
+          </a:solidFill>
+          <a:ln w="41275" cap="rnd">
+            <a:solidFill>
+              <a:schemeClr val="accent2"/>
+            </a:solidFill>
+            <a:round/>
+            <a:extLst>
+              <a:ext uri="{C807C97D-BFC1-408E-A445-0C87EB9F89A2}">
+                <ask:lineSketchStyleProps xmlns:ask="http://schemas.microsoft.com/office/drawing/2018/sketchyshapes" sd="1219033472">
+                  <a:prstGeom prst="rect">
+                    <a:avLst/>
+                  </a:prstGeom>
+                  <ask:type>
+                    <ask:lineSketchFreehand/>
+                  </ask:type>
+                </ask:lineSketchStyleProps>
+              </a:ext>
+            </a:extLst>
+          </a:ln>
+        </p:spPr>
+        <p:style>
+          <a:lnRef idx="2">
+            <a:schemeClr val="accent1">
+              <a:shade val="50000"/>
+            </a:schemeClr>
+          </a:lnRef>
+          <a:fillRef idx="1">
+            <a:schemeClr val="accent1"/>
+          </a:fillRef>
+          <a:effectRef idx="0">
+            <a:schemeClr val="accent1"/>
+          </a:effectRef>
+          <a:fontRef idx="minor">
+            <a:schemeClr val="lt1"/>
+          </a:fontRef>
+        </p:style>
+        <p:txBody>
+          <a:bodyPr rtlCol="0" anchor="ctr"/>
+          <a:lstStyle/>
+          <a:p>
+            <a:pPr algn="ctr"/>
+            <a:endParaRPr lang="en-US"/>
+          </a:p>
+        </p:txBody>
+      </p:sp>
+      <p:graphicFrame>
+        <p:nvGraphicFramePr>
+          <p:cNvPr id="5" name="내용 개체 틀 2">
+            <a:extLst>
+              <a:ext uri="{FF2B5EF4-FFF2-40B4-BE49-F238E27FC236}">
+                <a16:creationId xmlns:a16="http://schemas.microsoft.com/office/drawing/2014/main" id="{24915554-AF00-B52F-BB12-2CD515852636}"/>
+              </a:ext>
+            </a:extLst>
+          </p:cNvPr>
+          <p:cNvGraphicFramePr>
+            <a:graphicFrameLocks noGrp="1"/>
+          </p:cNvGraphicFramePr>
+          <p:nvPr>
+            <p:ph idx="1"/>
+            <p:extLst>
+              <p:ext uri="{D42A27DB-BD31-4B8C-83A1-F6EECF244321}">
+                <p14:modId xmlns:p14="http://schemas.microsoft.com/office/powerpoint/2010/main" val="3840860735"/>
+              </p:ext>
+            </p:extLst>
+          </p:nvPr>
+        </p:nvGraphicFramePr>
+        <p:xfrm>
+          <a:off x="838200" y="2228087"/>
+          <a:ext cx="10515600" cy="3948876"/>
+        </p:xfrm>
+        <a:graphic>
+          <a:graphicData uri="http://schemas.openxmlformats.org/drawingml/2006/diagram">
+            <dgm:relIds xmlns:dgm="http://schemas.openxmlformats.org/drawingml/2006/diagram" xmlns:r="http://schemas.openxmlformats.org/officeDocument/2006/relationships" r:dm="rId2" r:lo="rId3" r:qs="rId4" r:cs="rId5"/>
+          </a:graphicData>
+        </a:graphic>
+      </p:graphicFrame>
+    </p:spTree>
+    <p:extLst>
+      <p:ext uri="{BB962C8B-B14F-4D97-AF65-F5344CB8AC3E}">
+        <p14:creationId xmlns:p14="http://schemas.microsoft.com/office/powerpoint/2010/main" val="3455267612"/>
+      </p:ext>
+    </p:extLst>
+  </p:cSld>
+  <p:clrMapOvr>
+    <a:masterClrMapping/>
+  </p:clrMapOvr>
+</p:sld>
+</file>
+
+<file path=ppt/slides/slide12.xml><?xml version="1.0" encoding="utf-8"?>
+<p:sld xmlns:a="http://schemas.openxmlformats.org/drawingml/2006/main" xmlns:r="http://schemas.openxmlformats.org/officeDocument/2006/relationships" xmlns:p="http://schemas.openxmlformats.org/presentationml/2006/main">
+  <p:cSld>
+    <p:bg>
+      <p:bgPr>
+        <a:solidFill>
+          <a:schemeClr val="bg1"/>
+        </a:solidFill>
+        <a:effectLst/>
+      </p:bgPr>
+    </p:bg>
+    <p:spTree>
+      <p:nvGrpSpPr>
+        <p:cNvPr id="1" name=""/>
+        <p:cNvGrpSpPr/>
+        <p:nvPr/>
+      </p:nvGrpSpPr>
+      <p:grpSpPr>
+        <a:xfrm>
+          <a:off x="0" y="0"/>
+          <a:ext cx="0" cy="0"/>
+          <a:chOff x="0" y="0"/>
+          <a:chExt cx="0" cy="0"/>
+        </a:xfrm>
+      </p:grpSpPr>
+      <p:sp>
+        <p:nvSpPr>
+          <p:cNvPr id="9" name="Rectangle 8">
+            <a:extLst>
+              <a:ext uri="{FF2B5EF4-FFF2-40B4-BE49-F238E27FC236}">
+                <a16:creationId xmlns:a16="http://schemas.microsoft.com/office/drawing/2014/main" id="{A4AC5506-6312-4701-8D3C-40187889A947}"/>
+              </a:ext>
+              <a:ext uri="{C183D7F6-B498-43B3-948B-1728B52AA6E4}">
+                <adec:decorative xmlns:adec="http://schemas.microsoft.com/office/drawing/2017/decorative" val="1"/>
+              </a:ext>
+            </a:extLst>
+          </p:cNvPr>
+          <p:cNvSpPr>
+            <a:spLocks noGrp="1" noRot="1" noChangeAspect="1" noMove="1" noResize="1" noEditPoints="1" noAdjustHandles="1" noChangeArrowheads="1" noChangeShapeType="1" noTextEdit="1"/>
+          </p:cNvSpPr>
+          <p:nvPr>
+            <p:extLst>
+              <p:ext uri="{386F3935-93C4-4BCD-93E2-E3B085C9AB24}">
+                <p16:designElem xmlns:p16="http://schemas.microsoft.com/office/powerpoint/2015/main" val="1"/>
+              </p:ext>
+            </p:extLst>
+          </p:nvPr>
+        </p:nvSpPr>
+        <p:spPr>
+          <a:xfrm>
+            <a:off x="0" y="651752"/>
+            <a:ext cx="12192000" cy="736551"/>
+          </a:xfrm>
+          <a:prstGeom prst="rect">
+            <a:avLst/>
+          </a:prstGeom>
+          <a:solidFill>
+            <a:schemeClr val="tx1"/>
+          </a:solidFill>
+          <a:ln>
+            <a:noFill/>
+          </a:ln>
+        </p:spPr>
+        <p:style>
+          <a:lnRef idx="2">
+            <a:schemeClr val="accent1">
+              <a:shade val="50000"/>
+            </a:schemeClr>
+          </a:lnRef>
+          <a:fillRef idx="1">
+            <a:schemeClr val="accent1"/>
+          </a:fillRef>
+          <a:effectRef idx="0">
+            <a:schemeClr val="accent1"/>
+          </a:effectRef>
+          <a:fontRef idx="minor">
+            <a:schemeClr val="lt1"/>
+          </a:fontRef>
+        </p:style>
+        <p:txBody>
+          <a:bodyPr rtlCol="0" anchor="ctr"/>
+          <a:lstStyle/>
+          <a:p>
+            <a:pPr algn="ctr"/>
+            <a:endParaRPr lang="en-US"/>
+          </a:p>
+        </p:txBody>
+      </p:sp>
+      <p:sp>
+        <p:nvSpPr>
+          <p:cNvPr id="2" name="제목 1">
+            <a:extLst>
+              <a:ext uri="{FF2B5EF4-FFF2-40B4-BE49-F238E27FC236}">
+                <a16:creationId xmlns:a16="http://schemas.microsoft.com/office/drawing/2014/main" id="{63B3DF3C-68E3-A1AB-8F7A-CB017650FCF8}"/>
+              </a:ext>
+            </a:extLst>
+          </p:cNvPr>
+          <p:cNvSpPr>
+            <a:spLocks noGrp="1"/>
+          </p:cNvSpPr>
+          <p:nvPr>
+            <p:ph type="title"/>
+          </p:nvPr>
+        </p:nvSpPr>
+        <p:spPr>
+          <a:xfrm>
+            <a:off x="556532" y="643467"/>
+            <a:ext cx="11210925" cy="744836"/>
+          </a:xfrm>
+        </p:spPr>
+        <p:txBody>
+          <a:bodyPr vert="horz" lIns="91440" tIns="45720" rIns="91440" bIns="45720" rtlCol="0" anchor="ctr">
+            <a:normAutofit/>
+          </a:bodyPr>
+          <a:lstStyle/>
+          <a:p>
+            <a:pPr algn="ctr" latinLnBrk="0"/>
+            <a:r>
+              <a:rPr lang="ko-KR" altLang="en-US" sz="3200" kern="1200" dirty="0">
+                <a:solidFill>
+                  <a:schemeClr val="bg1"/>
+                </a:solidFill>
+                <a:latin typeface="+mj-lt"/>
+                <a:ea typeface="+mj-ea"/>
+                <a:cs typeface="+mj-cs"/>
+              </a:rPr>
+              <a:t>상수 정의</a:t>
+            </a:r>
+            <a:r>
+              <a:rPr lang="en-US" altLang="ko-KR" sz="3200" kern="1200" dirty="0">
+                <a:solidFill>
+                  <a:schemeClr val="bg1"/>
+                </a:solidFill>
+                <a:latin typeface="+mj-lt"/>
+                <a:ea typeface="+mj-ea"/>
+                <a:cs typeface="+mj-cs"/>
+              </a:rPr>
+              <a:t>: const, </a:t>
+            </a:r>
+            <a:r>
+              <a:rPr lang="en-US" altLang="ko-KR" sz="3200" kern="1200" dirty="0" err="1">
+                <a:solidFill>
+                  <a:schemeClr val="bg1"/>
+                </a:solidFill>
+                <a:latin typeface="+mj-lt"/>
+                <a:ea typeface="+mj-ea"/>
+                <a:cs typeface="+mj-cs"/>
+              </a:rPr>
+              <a:t>readonly</a:t>
+            </a:r>
+            <a:endParaRPr lang="en-US" altLang="ko-KR" sz="3200" kern="1200" dirty="0">
+              <a:solidFill>
+                <a:schemeClr val="bg1"/>
+              </a:solidFill>
+              <a:latin typeface="+mj-lt"/>
+              <a:ea typeface="+mj-ea"/>
+              <a:cs typeface="+mj-cs"/>
+            </a:endParaRPr>
+          </a:p>
+        </p:txBody>
+      </p:sp>
+      <p:graphicFrame>
+        <p:nvGraphicFramePr>
+          <p:cNvPr id="4" name="표 3">
+            <a:extLst>
+              <a:ext uri="{FF2B5EF4-FFF2-40B4-BE49-F238E27FC236}">
+                <a16:creationId xmlns:a16="http://schemas.microsoft.com/office/drawing/2014/main" id="{4BEEE269-4F8B-74C8-0536-74D68E9B125E}"/>
+              </a:ext>
+            </a:extLst>
+          </p:cNvPr>
+          <p:cNvGraphicFramePr>
+            <a:graphicFrameLocks noGrp="1"/>
+          </p:cNvGraphicFramePr>
+          <p:nvPr>
+            <p:extLst>
+              <p:ext uri="{D42A27DB-BD31-4B8C-83A1-F6EECF244321}">
+                <p14:modId xmlns:p14="http://schemas.microsoft.com/office/powerpoint/2010/main" val="1868849682"/>
+              </p:ext>
+            </p:extLst>
+          </p:nvPr>
+        </p:nvGraphicFramePr>
+        <p:xfrm>
+          <a:off x="643467" y="2034791"/>
+          <a:ext cx="10905067" cy="3675073"/>
+        </p:xfrm>
+        <a:graphic>
+          <a:graphicData uri="http://schemas.openxmlformats.org/drawingml/2006/table">
+            <a:tbl>
+              <a:tblPr firstRow="1" bandRow="1">
+                <a:tableStyleId>{5C22544A-7EE6-4342-B048-85BDC9FD1C3A}</a:tableStyleId>
+              </a:tblPr>
+              <a:tblGrid>
+                <a:gridCol w="1947526">
+                  <a:extLst>
+                    <a:ext uri="{9D8B030D-6E8A-4147-A177-3AD203B41FA5}">
+                      <a16:colId xmlns:a16="http://schemas.microsoft.com/office/drawing/2014/main" val="3765811720"/>
+                    </a:ext>
+                  </a:extLst>
+                </a:gridCol>
+                <a:gridCol w="3734189">
+                  <a:extLst>
+                    <a:ext uri="{9D8B030D-6E8A-4147-A177-3AD203B41FA5}">
+                      <a16:colId xmlns:a16="http://schemas.microsoft.com/office/drawing/2014/main" val="3950916864"/>
+                    </a:ext>
+                  </a:extLst>
+                </a:gridCol>
+                <a:gridCol w="5223352">
+                  <a:extLst>
+                    <a:ext uri="{9D8B030D-6E8A-4147-A177-3AD203B41FA5}">
+                      <a16:colId xmlns:a16="http://schemas.microsoft.com/office/drawing/2014/main" val="2572552780"/>
+                    </a:ext>
+                  </a:extLst>
+                </a:gridCol>
+              </a:tblGrid>
+              <a:tr h="628774">
+                <a:tc>
+                  <a:txBody>
+                    <a:bodyPr/>
+                    <a:lstStyle/>
+                    <a:p>
+                      <a:pPr latinLnBrk="1"/>
+                      <a:r>
+                        <a:rPr lang="ko-KR" altLang="en-US" sz="2900"/>
+                        <a:t>속성</a:t>
+                      </a:r>
+                    </a:p>
+                  </a:txBody>
+                  <a:tcPr marL="149063" marR="149063" marT="74531" marB="74531"/>
+                </a:tc>
+                <a:tc>
+                  <a:txBody>
+                    <a:bodyPr/>
+                    <a:lstStyle/>
+                    <a:p>
+                      <a:pPr latinLnBrk="1"/>
+                      <a:r>
+                        <a:rPr lang="en-US" altLang="ko-KR" sz="2900"/>
+                        <a:t>C++</a:t>
+                      </a:r>
+                      <a:endParaRPr lang="ko-KR" altLang="en-US" sz="2900"/>
+                    </a:p>
+                  </a:txBody>
+                  <a:tcPr marL="149063" marR="149063" marT="74531" marB="74531"/>
+                </a:tc>
+                <a:tc>
+                  <a:txBody>
+                    <a:bodyPr/>
+                    <a:lstStyle/>
+                    <a:p>
+                      <a:pPr latinLnBrk="1"/>
+                      <a:r>
+                        <a:rPr lang="en-US" altLang="ko-KR" sz="2900"/>
+                        <a:t>C#</a:t>
+                      </a:r>
+                      <a:endParaRPr lang="ko-KR" altLang="en-US" sz="2900"/>
+                    </a:p>
+                  </a:txBody>
+                  <a:tcPr marL="149063" marR="149063" marT="74531" marB="74531"/>
+                </a:tc>
+                <a:extLst>
+                  <a:ext uri="{0D108BD9-81ED-4DB2-BD59-A6C34878D82A}">
+                    <a16:rowId xmlns:a16="http://schemas.microsoft.com/office/drawing/2014/main" val="2546241973"/>
+                  </a:ext>
+                </a:extLst>
+              </a:tr>
+              <a:tr h="1075962">
+                <a:tc>
+                  <a:txBody>
+                    <a:bodyPr/>
+                    <a:lstStyle/>
+                    <a:p>
+                      <a:pPr latinLnBrk="1"/>
+                      <a:r>
+                        <a:rPr lang="en-US" altLang="ko-KR" sz="2900"/>
+                        <a:t>const</a:t>
+                      </a:r>
+                      <a:endParaRPr lang="ko-KR" altLang="en-US" sz="2900"/>
+                    </a:p>
+                  </a:txBody>
+                  <a:tcPr marL="149063" marR="149063" marT="74531" marB="74531"/>
+                </a:tc>
+                <a:tc>
+                  <a:txBody>
+                    <a:bodyPr/>
+                    <a:lstStyle/>
+                    <a:p>
+                      <a:pPr latinLnBrk="1"/>
+                      <a:r>
+                        <a:rPr lang="ko-KR" altLang="en-US" sz="2900"/>
+                        <a:t>변수를 상수로 변경</a:t>
+                      </a:r>
+                    </a:p>
+                  </a:txBody>
+                  <a:tcPr marL="149063" marR="149063" marT="74531" marB="74531"/>
+                </a:tc>
+                <a:tc>
+                  <a:txBody>
+                    <a:bodyPr/>
+                    <a:lstStyle/>
+                    <a:p>
+                      <a:pPr latinLnBrk="1"/>
+                      <a:r>
+                        <a:rPr lang="ko-KR" altLang="en-US" sz="2900"/>
+                        <a:t>상수이면서 </a:t>
+                      </a:r>
+                      <a:r>
+                        <a:rPr lang="en-US" altLang="ko-KR" sz="2900"/>
+                        <a:t>static </a:t>
+                      </a:r>
+                      <a:r>
+                        <a:rPr lang="ko-KR" altLang="en-US" sz="2900"/>
+                        <a:t>성질까지 포함</a:t>
+                      </a:r>
+                      <a:r>
+                        <a:rPr lang="en-US" altLang="ko-KR" sz="2900"/>
+                        <a:t>; static</a:t>
+                      </a:r>
+                      <a:r>
+                        <a:rPr lang="ko-KR" altLang="en-US" sz="2900"/>
+                        <a:t>과 함께 </a:t>
+                      </a:r>
+                      <a:r>
+                        <a:rPr lang="en-US" altLang="ko-KR" sz="2900"/>
+                        <a:t>X</a:t>
+                      </a:r>
+                      <a:endParaRPr lang="ko-KR" altLang="en-US" sz="2900"/>
+                    </a:p>
+                  </a:txBody>
+                  <a:tcPr marL="149063" marR="149063" marT="74531" marB="74531"/>
+                </a:tc>
+                <a:extLst>
+                  <a:ext uri="{0D108BD9-81ED-4DB2-BD59-A6C34878D82A}">
+                    <a16:rowId xmlns:a16="http://schemas.microsoft.com/office/drawing/2014/main" val="2341514354"/>
+                  </a:ext>
+                </a:extLst>
+              </a:tr>
+              <a:tr h="1970337">
+                <a:tc>
+                  <a:txBody>
+                    <a:bodyPr/>
+                    <a:lstStyle/>
+                    <a:p>
+                      <a:pPr latinLnBrk="1"/>
+                      <a:r>
+                        <a:rPr lang="en-US" altLang="ko-KR" sz="2900"/>
+                        <a:t>readonly</a:t>
+                      </a:r>
+                      <a:endParaRPr lang="ko-KR" altLang="en-US" sz="2900"/>
+                    </a:p>
+                  </a:txBody>
+                  <a:tcPr marL="149063" marR="149063" marT="74531" marB="74531"/>
+                </a:tc>
+                <a:tc>
+                  <a:txBody>
+                    <a:bodyPr/>
+                    <a:lstStyle/>
+                    <a:p>
+                      <a:pPr latinLnBrk="1"/>
+                      <a:r>
+                        <a:rPr lang="en-US" altLang="ko-KR" sz="2900"/>
+                        <a:t>-</a:t>
+                      </a:r>
+                      <a:endParaRPr lang="ko-KR" altLang="en-US" sz="2900"/>
+                    </a:p>
+                  </a:txBody>
+                  <a:tcPr marL="149063" marR="149063" marT="74531" marB="74531"/>
+                </a:tc>
+                <a:tc>
+                  <a:txBody>
+                    <a:bodyPr/>
+                    <a:lstStyle/>
+                    <a:p>
+                      <a:pPr marL="457200" indent="-457200" latinLnBrk="1">
+                        <a:buFont typeface="Arial" panose="020B0604020202020204" pitchFamily="34" charset="0"/>
+                        <a:buChar char="•"/>
+                      </a:pPr>
+                      <a:r>
+                        <a:rPr lang="en-US" altLang="ko-KR" sz="2900" dirty="0"/>
+                        <a:t>C++</a:t>
+                      </a:r>
+                      <a:r>
+                        <a:rPr lang="ko-KR" altLang="en-US" sz="2900" dirty="0"/>
+                        <a:t>의 </a:t>
+                      </a:r>
+                      <a:r>
+                        <a:rPr lang="en-US" altLang="ko-KR" sz="2900" dirty="0"/>
+                        <a:t>const</a:t>
+                      </a:r>
+                      <a:r>
+                        <a:rPr lang="ko-KR" altLang="en-US" sz="2900" dirty="0"/>
+                        <a:t>와 비슷하지만 생성자에서 초기화 필요</a:t>
+                      </a:r>
+                      <a:endParaRPr lang="en-US" altLang="ko-KR" sz="2900" dirty="0"/>
+                    </a:p>
+                    <a:p>
+                      <a:pPr marL="457200" indent="-457200" latinLnBrk="1">
+                        <a:buFont typeface="Arial" panose="020B0604020202020204" pitchFamily="34" charset="0"/>
+                        <a:buChar char="•"/>
+                      </a:pPr>
+                      <a:r>
+                        <a:rPr lang="en-US" altLang="ko-KR" sz="2900" dirty="0"/>
+                        <a:t>static </a:t>
+                      </a:r>
+                      <a:r>
+                        <a:rPr lang="en-US" altLang="ko-KR" sz="2900" dirty="0" err="1"/>
+                        <a:t>readonly</a:t>
+                      </a:r>
+                      <a:r>
+                        <a:rPr lang="en-US" altLang="ko-KR" sz="2900" dirty="0"/>
+                        <a:t> </a:t>
+                      </a:r>
+                      <a:r>
+                        <a:rPr lang="ko-KR" altLang="en-US" sz="2900" dirty="0"/>
+                        <a:t>가능</a:t>
+                      </a:r>
+                      <a:r>
+                        <a:rPr lang="en-US" altLang="ko-KR" sz="2900" dirty="0"/>
+                        <a:t>: static </a:t>
+                      </a:r>
+                      <a:r>
+                        <a:rPr lang="ko-KR" altLang="en-US" sz="2900" dirty="0"/>
+                        <a:t>생성자에서 초기화</a:t>
+                      </a:r>
+                    </a:p>
+                  </a:txBody>
+                  <a:tcPr marL="149063" marR="149063" marT="74531" marB="74531"/>
+                </a:tc>
+                <a:extLst>
+                  <a:ext uri="{0D108BD9-81ED-4DB2-BD59-A6C34878D82A}">
+                    <a16:rowId xmlns:a16="http://schemas.microsoft.com/office/drawing/2014/main" val="3577942020"/>
+                  </a:ext>
+                </a:extLst>
+              </a:tr>
+            </a:tbl>
+          </a:graphicData>
+        </a:graphic>
+      </p:graphicFrame>
+    </p:spTree>
+    <p:extLst>
+      <p:ext uri="{BB962C8B-B14F-4D97-AF65-F5344CB8AC3E}">
+        <p14:creationId xmlns:p14="http://schemas.microsoft.com/office/powerpoint/2010/main" val="3152712553"/>
+      </p:ext>
+    </p:extLst>
+  </p:cSld>
+  <p:clrMapOvr>
+    <a:masterClrMapping/>
+  </p:clrMapOvr>
+</p:sld>
+</file>
+
 <file path=ppt/slides/slide2.xml><?xml version="1.0" encoding="utf-8"?>
 <p:sld xmlns:a="http://schemas.openxmlformats.org/drawingml/2006/main" xmlns:r="http://schemas.openxmlformats.org/officeDocument/2006/relationships" xmlns:p="http://schemas.openxmlformats.org/presentationml/2006/main">
   <p:cSld>
@@ -18743,7 +22842,7 @@
           <a:p>
             <a:pPr algn="ctr" latinLnBrk="0"/>
             <a:r>
-              <a:rPr lang="ko-KR" altLang="en-US" sz="6600" kern="1200">
+              <a:rPr lang="ko-KR" altLang="en-US" sz="6600" kern="1200" dirty="0">
                 <a:solidFill>
                   <a:schemeClr val="tx1"/>
                 </a:solidFill>
@@ -18754,7 +22853,7 @@
               <a:t>구조체</a:t>
             </a:r>
             <a:r>
-              <a:rPr lang="en-US" altLang="ko-KR" sz="6600" kern="1200">
+              <a:rPr lang="en-US" altLang="ko-KR" sz="6600" kern="1200" dirty="0">
                 <a:solidFill>
                   <a:schemeClr val="tx1"/>
                 </a:solidFill>

--- a/C# 문법.pptx
+++ b/C# 문법.pptx
@@ -14676,7 +14676,7 @@
           <a:p>
             <a:fld id="{80606649-8C48-4DEB-9F5F-3AE3C52C94A0}" type="datetimeFigureOut">
               <a:rPr lang="ko-KR" altLang="en-US" smtClean="0"/>
-              <a:t>2025-10-28</a:t>
+              <a:t>2025-11-03</a:t>
             </a:fld>
             <a:endParaRPr lang="ko-KR" altLang="en-US"/>
           </a:p>
@@ -14874,7 +14874,7 @@
           <a:p>
             <a:fld id="{80606649-8C48-4DEB-9F5F-3AE3C52C94A0}" type="datetimeFigureOut">
               <a:rPr lang="ko-KR" altLang="en-US" smtClean="0"/>
-              <a:t>2025-10-28</a:t>
+              <a:t>2025-11-03</a:t>
             </a:fld>
             <a:endParaRPr lang="ko-KR" altLang="en-US"/>
           </a:p>
@@ -15082,7 +15082,7 @@
           <a:p>
             <a:fld id="{80606649-8C48-4DEB-9F5F-3AE3C52C94A0}" type="datetimeFigureOut">
               <a:rPr lang="ko-KR" altLang="en-US" smtClean="0"/>
-              <a:t>2025-10-28</a:t>
+              <a:t>2025-11-03</a:t>
             </a:fld>
             <a:endParaRPr lang="ko-KR" altLang="en-US"/>
           </a:p>
@@ -15280,7 +15280,7 @@
           <a:p>
             <a:fld id="{80606649-8C48-4DEB-9F5F-3AE3C52C94A0}" type="datetimeFigureOut">
               <a:rPr lang="ko-KR" altLang="en-US" smtClean="0"/>
-              <a:t>2025-10-28</a:t>
+              <a:t>2025-11-03</a:t>
             </a:fld>
             <a:endParaRPr lang="ko-KR" altLang="en-US"/>
           </a:p>
@@ -15555,7 +15555,7 @@
           <a:p>
             <a:fld id="{80606649-8C48-4DEB-9F5F-3AE3C52C94A0}" type="datetimeFigureOut">
               <a:rPr lang="ko-KR" altLang="en-US" smtClean="0"/>
-              <a:t>2025-10-28</a:t>
+              <a:t>2025-11-03</a:t>
             </a:fld>
             <a:endParaRPr lang="ko-KR" altLang="en-US"/>
           </a:p>
@@ -15820,7 +15820,7 @@
           <a:p>
             <a:fld id="{80606649-8C48-4DEB-9F5F-3AE3C52C94A0}" type="datetimeFigureOut">
               <a:rPr lang="ko-KR" altLang="en-US" smtClean="0"/>
-              <a:t>2025-10-28</a:t>
+              <a:t>2025-11-03</a:t>
             </a:fld>
             <a:endParaRPr lang="ko-KR" altLang="en-US"/>
           </a:p>
@@ -16232,7 +16232,7 @@
           <a:p>
             <a:fld id="{80606649-8C48-4DEB-9F5F-3AE3C52C94A0}" type="datetimeFigureOut">
               <a:rPr lang="ko-KR" altLang="en-US" smtClean="0"/>
-              <a:t>2025-10-28</a:t>
+              <a:t>2025-11-03</a:t>
             </a:fld>
             <a:endParaRPr lang="ko-KR" altLang="en-US"/>
           </a:p>
@@ -16373,7 +16373,7 @@
           <a:p>
             <a:fld id="{80606649-8C48-4DEB-9F5F-3AE3C52C94A0}" type="datetimeFigureOut">
               <a:rPr lang="ko-KR" altLang="en-US" smtClean="0"/>
-              <a:t>2025-10-28</a:t>
+              <a:t>2025-11-03</a:t>
             </a:fld>
             <a:endParaRPr lang="ko-KR" altLang="en-US"/>
           </a:p>
@@ -16486,7 +16486,7 @@
           <a:p>
             <a:fld id="{80606649-8C48-4DEB-9F5F-3AE3C52C94A0}" type="datetimeFigureOut">
               <a:rPr lang="ko-KR" altLang="en-US" smtClean="0"/>
-              <a:t>2025-10-28</a:t>
+              <a:t>2025-11-03</a:t>
             </a:fld>
             <a:endParaRPr lang="ko-KR" altLang="en-US"/>
           </a:p>
@@ -16797,7 +16797,7 @@
           <a:p>
             <a:fld id="{80606649-8C48-4DEB-9F5F-3AE3C52C94A0}" type="datetimeFigureOut">
               <a:rPr lang="ko-KR" altLang="en-US" smtClean="0"/>
-              <a:t>2025-10-28</a:t>
+              <a:t>2025-11-03</a:t>
             </a:fld>
             <a:endParaRPr lang="ko-KR" altLang="en-US"/>
           </a:p>
@@ -17085,7 +17085,7 @@
           <a:p>
             <a:fld id="{80606649-8C48-4DEB-9F5F-3AE3C52C94A0}" type="datetimeFigureOut">
               <a:rPr lang="ko-KR" altLang="en-US" smtClean="0"/>
-              <a:t>2025-10-28</a:t>
+              <a:t>2025-11-03</a:t>
             </a:fld>
             <a:endParaRPr lang="ko-KR" altLang="en-US"/>
           </a:p>
@@ -17326,7 +17326,7 @@
           <a:p>
             <a:fld id="{80606649-8C48-4DEB-9F5F-3AE3C52C94A0}" type="datetimeFigureOut">
               <a:rPr lang="ko-KR" altLang="en-US" smtClean="0"/>
-              <a:t>2025-10-28</a:t>
+              <a:t>2025-11-03</a:t>
             </a:fld>
             <a:endParaRPr lang="ko-KR" altLang="en-US"/>
           </a:p>
@@ -19895,6 +19895,182 @@
         <a:graphic>
           <a:graphicData uri="http://schemas.openxmlformats.org/drawingml/2006/diagram">
             <dgm:relIds xmlns:dgm="http://schemas.openxmlformats.org/drawingml/2006/diagram" xmlns:r="http://schemas.openxmlformats.org/officeDocument/2006/relationships" r:dm="rId2" r:lo="rId3" r:qs="rId4" r:cs="rId5"/>
+          </a:graphicData>
+        </a:graphic>
+      </p:graphicFrame>
+      <p:graphicFrame>
+        <p:nvGraphicFramePr>
+          <p:cNvPr id="3" name="표 2">
+            <a:extLst>
+              <a:ext uri="{FF2B5EF4-FFF2-40B4-BE49-F238E27FC236}">
+                <a16:creationId xmlns:a16="http://schemas.microsoft.com/office/drawing/2014/main" id="{A6144B01-8F7E-C93F-4A0E-712770F22324}"/>
+              </a:ext>
+            </a:extLst>
+          </p:cNvPr>
+          <p:cNvGraphicFramePr>
+            <a:graphicFrameLocks noGrp="1"/>
+          </p:cNvGraphicFramePr>
+          <p:nvPr>
+            <p:extLst>
+              <p:ext uri="{D42A27DB-BD31-4B8C-83A1-F6EECF244321}">
+                <p14:modId xmlns:p14="http://schemas.microsoft.com/office/powerpoint/2010/main" val="649681134"/>
+              </p:ext>
+            </p:extLst>
+          </p:nvPr>
+        </p:nvGraphicFramePr>
+        <p:xfrm>
+          <a:off x="1684867" y="4288327"/>
+          <a:ext cx="5141383" cy="2215026"/>
+        </p:xfrm>
+        <a:graphic>
+          <a:graphicData uri="http://schemas.openxmlformats.org/drawingml/2006/table">
+            <a:tbl>
+              <a:tblPr firstRow="1" bandRow="1">
+                <a:tableStyleId>{5C22544A-7EE6-4342-B048-85BDC9FD1C3A}</a:tableStyleId>
+              </a:tblPr>
+              <a:tblGrid>
+                <a:gridCol w="2461683">
+                  <a:extLst>
+                    <a:ext uri="{9D8B030D-6E8A-4147-A177-3AD203B41FA5}">
+                      <a16:colId xmlns:a16="http://schemas.microsoft.com/office/drawing/2014/main" val="3950916864"/>
+                    </a:ext>
+                  </a:extLst>
+                </a:gridCol>
+                <a:gridCol w="2679700">
+                  <a:extLst>
+                    <a:ext uri="{9D8B030D-6E8A-4147-A177-3AD203B41FA5}">
+                      <a16:colId xmlns:a16="http://schemas.microsoft.com/office/drawing/2014/main" val="2572552780"/>
+                    </a:ext>
+                  </a:extLst>
+                </a:gridCol>
+              </a:tblGrid>
+              <a:tr h="0">
+                <a:tc>
+                  <a:txBody>
+                    <a:bodyPr/>
+                    <a:lstStyle/>
+                    <a:p>
+                      <a:pPr latinLnBrk="1"/>
+                      <a:r>
+                        <a:rPr lang="en-US" altLang="ko-KR" sz="2900"/>
+                        <a:t>C++</a:t>
+                      </a:r>
+                      <a:endParaRPr lang="ko-KR" altLang="en-US" sz="2900"/>
+                    </a:p>
+                  </a:txBody>
+                  <a:tcPr marL="149063" marR="149063" marT="74531" marB="74531"/>
+                </a:tc>
+                <a:tc>
+                  <a:txBody>
+                    <a:bodyPr/>
+                    <a:lstStyle/>
+                    <a:p>
+                      <a:pPr latinLnBrk="1"/>
+                      <a:r>
+                        <a:rPr lang="en-US" altLang="ko-KR" sz="2900"/>
+                        <a:t>C#</a:t>
+                      </a:r>
+                      <a:endParaRPr lang="ko-KR" altLang="en-US" sz="2900"/>
+                    </a:p>
+                  </a:txBody>
+                  <a:tcPr marL="149063" marR="149063" marT="74531" marB="74531"/>
+                </a:tc>
+                <a:extLst>
+                  <a:ext uri="{0D108BD9-81ED-4DB2-BD59-A6C34878D82A}">
+                    <a16:rowId xmlns:a16="http://schemas.microsoft.com/office/drawing/2014/main" val="2546241973"/>
+                  </a:ext>
+                </a:extLst>
+              </a:tr>
+              <a:tr h="0">
+                <a:tc>
+                  <a:txBody>
+                    <a:bodyPr/>
+                    <a:lstStyle/>
+                    <a:p>
+                      <a:pPr latinLnBrk="1"/>
+                      <a:r>
+                        <a:rPr lang="en-US" altLang="ko-KR" sz="2900" dirty="0"/>
+                        <a:t>var&amp; x</a:t>
+                      </a:r>
+                      <a:endParaRPr lang="ko-KR" altLang="en-US" sz="2900" dirty="0"/>
+                    </a:p>
+                  </a:txBody>
+                  <a:tcPr marL="149063" marR="149063" marT="74531" marB="74531"/>
+                </a:tc>
+                <a:tc>
+                  <a:txBody>
+                    <a:bodyPr/>
+                    <a:lstStyle/>
+                    <a:p>
+                      <a:pPr marL="457200" indent="-457200" latinLnBrk="1">
+                        <a:buFont typeface="Arial" panose="020B0604020202020204" pitchFamily="34" charset="0"/>
+                        <a:buChar char="•"/>
+                      </a:pPr>
+                      <a:r>
+                        <a:rPr lang="en-US" altLang="ko-KR" sz="2900" dirty="0"/>
+                        <a:t>ref var x</a:t>
+                      </a:r>
+                    </a:p>
+                    <a:p>
+                      <a:pPr marL="457200" indent="-457200" latinLnBrk="1">
+                        <a:buFont typeface="Arial" panose="020B0604020202020204" pitchFamily="34" charset="0"/>
+                        <a:buChar char="•"/>
+                      </a:pPr>
+                      <a:r>
+                        <a:rPr lang="en-US" altLang="ko-KR" sz="2900" dirty="0"/>
+                        <a:t>out var x</a:t>
+                      </a:r>
+                    </a:p>
+                  </a:txBody>
+                  <a:tcPr marL="149063" marR="149063" marT="74531" marB="74531"/>
+                </a:tc>
+                <a:extLst>
+                  <a:ext uri="{0D108BD9-81ED-4DB2-BD59-A6C34878D82A}">
+                    <a16:rowId xmlns:a16="http://schemas.microsoft.com/office/drawing/2014/main" val="2341514354"/>
+                  </a:ext>
+                </a:extLst>
+              </a:tr>
+              <a:tr h="0">
+                <a:tc>
+                  <a:txBody>
+                    <a:bodyPr/>
+                    <a:lstStyle/>
+                    <a:p>
+                      <a:pPr latinLnBrk="1"/>
+                      <a:r>
+                        <a:rPr lang="en-US" altLang="ko-KR" sz="2900" dirty="0"/>
+                        <a:t>const var&amp; x</a:t>
+                      </a:r>
+                      <a:endParaRPr lang="ko-KR" altLang="en-US" sz="2900" dirty="0"/>
+                    </a:p>
+                  </a:txBody>
+                  <a:tcPr marL="149063" marR="149063" marT="74531" marB="74531"/>
+                </a:tc>
+                <a:tc>
+                  <a:txBody>
+                    <a:bodyPr/>
+                    <a:lstStyle/>
+                    <a:p>
+                      <a:pPr marL="0" indent="0" latinLnBrk="1">
+                        <a:buFontTx/>
+                        <a:buNone/>
+                      </a:pPr>
+                      <a:r>
+                        <a:rPr lang="en-US" altLang="ko-KR" sz="2900" dirty="0"/>
+                        <a:t>in var x</a:t>
+                      </a:r>
+                      <a:endParaRPr lang="ko-KR" altLang="en-US" sz="2900" dirty="0"/>
+                    </a:p>
+                  </a:txBody>
+                  <a:tcPr marL="149063" marR="149063" marT="74531" marB="74531"/>
+                </a:tc>
+                <a:extLst>
+                  <a:ext uri="{0D108BD9-81ED-4DB2-BD59-A6C34878D82A}">
+                    <a16:rowId xmlns:a16="http://schemas.microsoft.com/office/drawing/2014/main" val="3577942020"/>
+                  </a:ext>
+                </a:extLst>
+              </a:tr>
+            </a:tbl>
           </a:graphicData>
         </a:graphic>
       </p:graphicFrame>

--- a/C# 문법.pptx
+++ b/C# 문법.pptx
@@ -17,6 +17,9 @@
     <p:sldId id="266" r:id="rId11"/>
     <p:sldId id="267" r:id="rId12"/>
     <p:sldId id="268" r:id="rId13"/>
+    <p:sldId id="269" r:id="rId14"/>
+    <p:sldId id="271" r:id="rId15"/>
+    <p:sldId id="270" r:id="rId16"/>
   </p:sldIdLst>
   <p:sldSz cx="12192000" cy="6858000"/>
   <p:notesSz cx="6858000" cy="9144000"/>
@@ -3252,6 +3255,1707 @@
 </file>
 
 <file path=ppt/diagrams/colors5.xml><?xml version="1.0" encoding="utf-8"?>
+<dgm:colorsDef xmlns:dgm="http://schemas.openxmlformats.org/drawingml/2006/diagram" xmlns:a="http://schemas.openxmlformats.org/drawingml/2006/main" uniqueId="urn:microsoft.com/office/officeart/2005/8/colors/colorful2">
+  <dgm:title val=""/>
+  <dgm:desc val=""/>
+  <dgm:catLst>
+    <dgm:cat type="colorful" pri="10200"/>
+  </dgm:catLst>
+  <dgm:styleLbl name="node0">
+    <dgm:fillClrLst meth="repeat">
+      <a:schemeClr val="accent1"/>
+    </dgm:fillClrLst>
+    <dgm:linClrLst meth="repeat">
+      <a:schemeClr val="lt1"/>
+    </dgm:linClrLst>
+    <dgm:effectClrLst/>
+    <dgm:txLinClrLst/>
+    <dgm:txFillClrLst/>
+    <dgm:txEffectClrLst/>
+  </dgm:styleLbl>
+  <dgm:styleLbl name="node1">
+    <dgm:fillClrLst>
+      <a:schemeClr val="accent2"/>
+      <a:schemeClr val="accent3"/>
+    </dgm:fillClrLst>
+    <dgm:linClrLst meth="repeat">
+      <a:schemeClr val="lt1"/>
+    </dgm:linClrLst>
+    <dgm:effectClrLst/>
+    <dgm:txLinClrLst/>
+    <dgm:txFillClrLst/>
+    <dgm:txEffectClrLst/>
+  </dgm:styleLbl>
+  <dgm:styleLbl name="alignNode1">
+    <dgm:fillClrLst>
+      <a:schemeClr val="accent2"/>
+      <a:schemeClr val="accent3"/>
+    </dgm:fillClrLst>
+    <dgm:linClrLst>
+      <a:schemeClr val="accent2"/>
+      <a:schemeClr val="accent3"/>
+    </dgm:linClrLst>
+    <dgm:effectClrLst/>
+    <dgm:txLinClrLst/>
+    <dgm:txFillClrLst/>
+    <dgm:txEffectClrLst/>
+  </dgm:styleLbl>
+  <dgm:styleLbl name="lnNode1">
+    <dgm:fillClrLst>
+      <a:schemeClr val="accent2"/>
+      <a:schemeClr val="accent3"/>
+    </dgm:fillClrLst>
+    <dgm:linClrLst meth="repeat">
+      <a:schemeClr val="lt1"/>
+    </dgm:linClrLst>
+    <dgm:effectClrLst/>
+    <dgm:txLinClrLst/>
+    <dgm:txFillClrLst/>
+    <dgm:txEffectClrLst/>
+  </dgm:styleLbl>
+  <dgm:styleLbl name="vennNode1">
+    <dgm:fillClrLst>
+      <a:schemeClr val="accent2">
+        <a:alpha val="50000"/>
+      </a:schemeClr>
+      <a:schemeClr val="accent3">
+        <a:alpha val="50000"/>
+      </a:schemeClr>
+    </dgm:fillClrLst>
+    <dgm:linClrLst meth="repeat">
+      <a:schemeClr val="lt1"/>
+    </dgm:linClrLst>
+    <dgm:effectClrLst/>
+    <dgm:txLinClrLst/>
+    <dgm:txFillClrLst/>
+    <dgm:txEffectClrLst/>
+  </dgm:styleLbl>
+  <dgm:styleLbl name="node2">
+    <dgm:fillClrLst>
+      <a:schemeClr val="accent3"/>
+    </dgm:fillClrLst>
+    <dgm:linClrLst meth="repeat">
+      <a:schemeClr val="lt1"/>
+    </dgm:linClrLst>
+    <dgm:effectClrLst/>
+    <dgm:txLinClrLst/>
+    <dgm:txFillClrLst/>
+    <dgm:txEffectClrLst/>
+  </dgm:styleLbl>
+  <dgm:styleLbl name="node3">
+    <dgm:fillClrLst>
+      <a:schemeClr val="accent4"/>
+    </dgm:fillClrLst>
+    <dgm:linClrLst meth="repeat">
+      <a:schemeClr val="lt1"/>
+    </dgm:linClrLst>
+    <dgm:effectClrLst/>
+    <dgm:txLinClrLst/>
+    <dgm:txFillClrLst/>
+    <dgm:txEffectClrLst/>
+  </dgm:styleLbl>
+  <dgm:styleLbl name="node4">
+    <dgm:fillClrLst>
+      <a:schemeClr val="accent5"/>
+    </dgm:fillClrLst>
+    <dgm:linClrLst meth="repeat">
+      <a:schemeClr val="lt1"/>
+    </dgm:linClrLst>
+    <dgm:effectClrLst/>
+    <dgm:txLinClrLst/>
+    <dgm:txFillClrLst/>
+    <dgm:txEffectClrLst/>
+  </dgm:styleLbl>
+  <dgm:styleLbl name="fgImgPlace1">
+    <dgm:fillClrLst>
+      <a:schemeClr val="accent2">
+        <a:tint val="50000"/>
+      </a:schemeClr>
+      <a:schemeClr val="accent3">
+        <a:tint val="50000"/>
+      </a:schemeClr>
+    </dgm:fillClrLst>
+    <dgm:linClrLst meth="repeat">
+      <a:schemeClr val="lt1"/>
+    </dgm:linClrLst>
+    <dgm:effectClrLst/>
+    <dgm:txLinClrLst/>
+    <dgm:txFillClrLst meth="repeat">
+      <a:schemeClr val="lt1"/>
+    </dgm:txFillClrLst>
+    <dgm:txEffectClrLst/>
+  </dgm:styleLbl>
+  <dgm:styleLbl name="alignImgPlace1">
+    <dgm:fillClrLst>
+      <a:schemeClr val="accent2">
+        <a:tint val="50000"/>
+      </a:schemeClr>
+      <a:schemeClr val="accent3">
+        <a:tint val="20000"/>
+      </a:schemeClr>
+    </dgm:fillClrLst>
+    <dgm:linClrLst meth="repeat">
+      <a:schemeClr val="lt1"/>
+    </dgm:linClrLst>
+    <dgm:effectClrLst/>
+    <dgm:txLinClrLst/>
+    <dgm:txFillClrLst meth="repeat">
+      <a:schemeClr val="lt1"/>
+    </dgm:txFillClrLst>
+    <dgm:txEffectClrLst/>
+  </dgm:styleLbl>
+  <dgm:styleLbl name="bgImgPlace1">
+    <dgm:fillClrLst>
+      <a:schemeClr val="accent2">
+        <a:tint val="50000"/>
+      </a:schemeClr>
+      <a:schemeClr val="accent3">
+        <a:tint val="20000"/>
+      </a:schemeClr>
+    </dgm:fillClrLst>
+    <dgm:linClrLst meth="repeat">
+      <a:schemeClr val="lt1"/>
+    </dgm:linClrLst>
+    <dgm:effectClrLst/>
+    <dgm:txLinClrLst/>
+    <dgm:txFillClrLst meth="repeat">
+      <a:schemeClr val="lt1"/>
+    </dgm:txFillClrLst>
+    <dgm:txEffectClrLst/>
+  </dgm:styleLbl>
+  <dgm:styleLbl name="sibTrans2D1">
+    <dgm:fillClrLst>
+      <a:schemeClr val="accent2"/>
+      <a:schemeClr val="accent3"/>
+    </dgm:fillClrLst>
+    <dgm:linClrLst meth="repeat">
+      <a:schemeClr val="lt1"/>
+    </dgm:linClrLst>
+    <dgm:effectClrLst/>
+    <dgm:txLinClrLst/>
+    <dgm:txFillClrLst/>
+    <dgm:txEffectClrLst/>
+  </dgm:styleLbl>
+  <dgm:styleLbl name="fgSibTrans2D1">
+    <dgm:fillClrLst>
+      <a:schemeClr val="accent2"/>
+      <a:schemeClr val="accent3"/>
+    </dgm:fillClrLst>
+    <dgm:linClrLst meth="repeat">
+      <a:schemeClr val="lt1"/>
+    </dgm:linClrLst>
+    <dgm:effectClrLst/>
+    <dgm:txLinClrLst/>
+    <dgm:txFillClrLst meth="repeat">
+      <a:schemeClr val="lt1"/>
+    </dgm:txFillClrLst>
+    <dgm:txEffectClrLst/>
+  </dgm:styleLbl>
+  <dgm:styleLbl name="bgSibTrans2D1">
+    <dgm:fillClrLst>
+      <a:schemeClr val="accent2"/>
+      <a:schemeClr val="accent3"/>
+    </dgm:fillClrLst>
+    <dgm:linClrLst meth="repeat">
+      <a:schemeClr val="lt1"/>
+    </dgm:linClrLst>
+    <dgm:effectClrLst/>
+    <dgm:txLinClrLst/>
+    <dgm:txFillClrLst meth="repeat">
+      <a:schemeClr val="lt1"/>
+    </dgm:txFillClrLst>
+    <dgm:txEffectClrLst/>
+  </dgm:styleLbl>
+  <dgm:styleLbl name="sibTrans1D1">
+    <dgm:fillClrLst/>
+    <dgm:linClrLst>
+      <a:schemeClr val="accent2"/>
+      <a:schemeClr val="accent3"/>
+    </dgm:linClrLst>
+    <dgm:effectClrLst/>
+    <dgm:txLinClrLst/>
+    <dgm:txFillClrLst meth="repeat">
+      <a:schemeClr val="tx1"/>
+    </dgm:txFillClrLst>
+    <dgm:txEffectClrLst/>
+  </dgm:styleLbl>
+  <dgm:styleLbl name="callout">
+    <dgm:fillClrLst meth="repeat">
+      <a:schemeClr val="accent2"/>
+    </dgm:fillClrLst>
+    <dgm:linClrLst meth="repeat">
+      <a:schemeClr val="accent2">
+        <a:tint val="50000"/>
+      </a:schemeClr>
+    </dgm:linClrLst>
+    <dgm:effectClrLst/>
+    <dgm:txLinClrLst/>
+    <dgm:txFillClrLst meth="repeat">
+      <a:schemeClr val="tx1"/>
+    </dgm:txFillClrLst>
+    <dgm:txEffectClrLst/>
+  </dgm:styleLbl>
+  <dgm:styleLbl name="asst0">
+    <dgm:fillClrLst meth="repeat">
+      <a:schemeClr val="accent2"/>
+    </dgm:fillClrLst>
+    <dgm:linClrLst meth="repeat">
+      <a:schemeClr val="lt1">
+        <a:shade val="80000"/>
+      </a:schemeClr>
+    </dgm:linClrLst>
+    <dgm:effectClrLst/>
+    <dgm:txLinClrLst/>
+    <dgm:txFillClrLst/>
+    <dgm:txEffectClrLst/>
+  </dgm:styleLbl>
+  <dgm:styleLbl name="asst1">
+    <dgm:fillClrLst meth="repeat">
+      <a:schemeClr val="accent3"/>
+    </dgm:fillClrLst>
+    <dgm:linClrLst meth="repeat">
+      <a:schemeClr val="lt1">
+        <a:shade val="80000"/>
+      </a:schemeClr>
+    </dgm:linClrLst>
+    <dgm:effectClrLst/>
+    <dgm:txLinClrLst/>
+    <dgm:txFillClrLst/>
+    <dgm:txEffectClrLst/>
+  </dgm:styleLbl>
+  <dgm:styleLbl name="asst2">
+    <dgm:fillClrLst>
+      <a:schemeClr val="accent4"/>
+    </dgm:fillClrLst>
+    <dgm:linClrLst meth="repeat">
+      <a:schemeClr val="lt1"/>
+    </dgm:linClrLst>
+    <dgm:effectClrLst/>
+    <dgm:txLinClrLst/>
+    <dgm:txFillClrLst/>
+    <dgm:txEffectClrLst/>
+  </dgm:styleLbl>
+  <dgm:styleLbl name="asst3">
+    <dgm:fillClrLst>
+      <a:schemeClr val="accent5"/>
+    </dgm:fillClrLst>
+    <dgm:linClrLst meth="repeat">
+      <a:schemeClr val="lt1"/>
+    </dgm:linClrLst>
+    <dgm:effectClrLst/>
+    <dgm:txLinClrLst/>
+    <dgm:txFillClrLst/>
+    <dgm:txEffectClrLst/>
+  </dgm:styleLbl>
+  <dgm:styleLbl name="asst4">
+    <dgm:fillClrLst>
+      <a:schemeClr val="accent6"/>
+    </dgm:fillClrLst>
+    <dgm:linClrLst meth="repeat">
+      <a:schemeClr val="lt1"/>
+    </dgm:linClrLst>
+    <dgm:effectClrLst/>
+    <dgm:txLinClrLst/>
+    <dgm:txFillClrLst/>
+    <dgm:txEffectClrLst/>
+  </dgm:styleLbl>
+  <dgm:styleLbl name="parChTrans2D1">
+    <dgm:fillClrLst meth="repeat">
+      <a:schemeClr val="accent2"/>
+    </dgm:fillClrLst>
+    <dgm:linClrLst meth="repeat">
+      <a:schemeClr val="lt1"/>
+    </dgm:linClrLst>
+    <dgm:effectClrLst/>
+    <dgm:txLinClrLst/>
+    <dgm:txFillClrLst meth="repeat">
+      <a:schemeClr val="lt1"/>
+    </dgm:txFillClrLst>
+    <dgm:txEffectClrLst/>
+  </dgm:styleLbl>
+  <dgm:styleLbl name="parChTrans2D2">
+    <dgm:fillClrLst meth="repeat">
+      <a:schemeClr val="accent3"/>
+    </dgm:fillClrLst>
+    <dgm:linClrLst meth="repeat">
+      <a:schemeClr val="lt1"/>
+    </dgm:linClrLst>
+    <dgm:effectClrLst/>
+    <dgm:txLinClrLst/>
+    <dgm:txFillClrLst/>
+    <dgm:txEffectClrLst/>
+  </dgm:styleLbl>
+  <dgm:styleLbl name="parChTrans2D3">
+    <dgm:fillClrLst meth="repeat">
+      <a:schemeClr val="accent4"/>
+    </dgm:fillClrLst>
+    <dgm:linClrLst meth="repeat">
+      <a:schemeClr val="lt1"/>
+    </dgm:linClrLst>
+    <dgm:effectClrLst/>
+    <dgm:txLinClrLst/>
+    <dgm:txFillClrLst/>
+    <dgm:txEffectClrLst/>
+  </dgm:styleLbl>
+  <dgm:styleLbl name="parChTrans2D4">
+    <dgm:fillClrLst meth="repeat">
+      <a:schemeClr val="accent5"/>
+    </dgm:fillClrLst>
+    <dgm:linClrLst meth="repeat">
+      <a:schemeClr val="lt1"/>
+    </dgm:linClrLst>
+    <dgm:effectClrLst/>
+    <dgm:txLinClrLst/>
+    <dgm:txFillClrLst meth="repeat">
+      <a:schemeClr val="lt1"/>
+    </dgm:txFillClrLst>
+    <dgm:txEffectClrLst/>
+  </dgm:styleLbl>
+  <dgm:styleLbl name="parChTrans1D1">
+    <dgm:fillClrLst meth="repeat">
+      <a:schemeClr val="accent2"/>
+    </dgm:fillClrLst>
+    <dgm:linClrLst meth="repeat">
+      <a:schemeClr val="accent2"/>
+    </dgm:linClrLst>
+    <dgm:effectClrLst/>
+    <dgm:txLinClrLst/>
+    <dgm:txFillClrLst meth="repeat">
+      <a:schemeClr val="tx1"/>
+    </dgm:txFillClrLst>
+    <dgm:txEffectClrLst/>
+  </dgm:styleLbl>
+  <dgm:styleLbl name="parChTrans1D2">
+    <dgm:fillClrLst meth="repeat">
+      <a:schemeClr val="accent2">
+        <a:tint val="90000"/>
+      </a:schemeClr>
+    </dgm:fillClrLst>
+    <dgm:linClrLst meth="repeat">
+      <a:schemeClr val="accent3"/>
+    </dgm:linClrLst>
+    <dgm:effectClrLst/>
+    <dgm:txLinClrLst/>
+    <dgm:txFillClrLst meth="repeat">
+      <a:schemeClr val="tx1"/>
+    </dgm:txFillClrLst>
+    <dgm:txEffectClrLst/>
+  </dgm:styleLbl>
+  <dgm:styleLbl name="parChTrans1D3">
+    <dgm:fillClrLst meth="repeat">
+      <a:schemeClr val="accent2">
+        <a:tint val="70000"/>
+      </a:schemeClr>
+    </dgm:fillClrLst>
+    <dgm:linClrLst meth="repeat">
+      <a:schemeClr val="accent4"/>
+    </dgm:linClrLst>
+    <dgm:effectClrLst/>
+    <dgm:txLinClrLst/>
+    <dgm:txFillClrLst meth="repeat">
+      <a:schemeClr val="tx1"/>
+    </dgm:txFillClrLst>
+    <dgm:txEffectClrLst/>
+  </dgm:styleLbl>
+  <dgm:styleLbl name="parChTrans1D4">
+    <dgm:fillClrLst meth="repeat">
+      <a:schemeClr val="accent2">
+        <a:tint val="50000"/>
+      </a:schemeClr>
+    </dgm:fillClrLst>
+    <dgm:linClrLst meth="repeat">
+      <a:schemeClr val="accent5"/>
+    </dgm:linClrLst>
+    <dgm:effectClrLst/>
+    <dgm:txLinClrLst/>
+    <dgm:txFillClrLst meth="repeat">
+      <a:schemeClr val="tx1"/>
+    </dgm:txFillClrLst>
+    <dgm:txEffectClrLst/>
+  </dgm:styleLbl>
+  <dgm:styleLbl name="fgAcc1">
+    <dgm:fillClrLst meth="repeat">
+      <a:schemeClr val="lt1">
+        <a:alpha val="90000"/>
+      </a:schemeClr>
+    </dgm:fillClrLst>
+    <dgm:linClrLst>
+      <a:schemeClr val="accent2"/>
+      <a:schemeClr val="accent3"/>
+    </dgm:linClrLst>
+    <dgm:effectClrLst/>
+    <dgm:txLinClrLst/>
+    <dgm:txFillClrLst meth="repeat">
+      <a:schemeClr val="dk1"/>
+    </dgm:txFillClrLst>
+    <dgm:txEffectClrLst/>
+  </dgm:styleLbl>
+  <dgm:styleLbl name="conFgAcc1">
+    <dgm:fillClrLst meth="repeat">
+      <a:schemeClr val="lt1">
+        <a:alpha val="90000"/>
+      </a:schemeClr>
+    </dgm:fillClrLst>
+    <dgm:linClrLst>
+      <a:schemeClr val="accent2"/>
+      <a:schemeClr val="accent3"/>
+    </dgm:linClrLst>
+    <dgm:effectClrLst/>
+    <dgm:txLinClrLst/>
+    <dgm:txFillClrLst meth="repeat">
+      <a:schemeClr val="dk1"/>
+    </dgm:txFillClrLst>
+    <dgm:txEffectClrLst/>
+  </dgm:styleLbl>
+  <dgm:styleLbl name="alignAcc1">
+    <dgm:fillClrLst meth="repeat">
+      <a:schemeClr val="lt1">
+        <a:alpha val="90000"/>
+      </a:schemeClr>
+    </dgm:fillClrLst>
+    <dgm:linClrLst>
+      <a:schemeClr val="accent2"/>
+      <a:schemeClr val="accent3"/>
+    </dgm:linClrLst>
+    <dgm:effectClrLst/>
+    <dgm:txLinClrLst/>
+    <dgm:txFillClrLst meth="repeat">
+      <a:schemeClr val="dk1"/>
+    </dgm:txFillClrLst>
+    <dgm:txEffectClrLst/>
+  </dgm:styleLbl>
+  <dgm:styleLbl name="trAlignAcc1">
+    <dgm:fillClrLst meth="repeat">
+      <a:schemeClr val="lt1">
+        <a:alpha val="40000"/>
+      </a:schemeClr>
+    </dgm:fillClrLst>
+    <dgm:linClrLst meth="repeat">
+      <a:schemeClr val="accent2"/>
+    </dgm:linClrLst>
+    <dgm:effectClrLst/>
+    <dgm:txLinClrLst/>
+    <dgm:txFillClrLst meth="repeat">
+      <a:schemeClr val="dk1"/>
+    </dgm:txFillClrLst>
+    <dgm:txEffectClrLst/>
+  </dgm:styleLbl>
+  <dgm:styleLbl name="bgAcc1">
+    <dgm:fillClrLst meth="repeat">
+      <a:schemeClr val="lt1">
+        <a:alpha val="90000"/>
+      </a:schemeClr>
+    </dgm:fillClrLst>
+    <dgm:linClrLst>
+      <a:schemeClr val="accent2"/>
+      <a:schemeClr val="accent3"/>
+    </dgm:linClrLst>
+    <dgm:effectClrLst/>
+    <dgm:txLinClrLst/>
+    <dgm:txFillClrLst meth="repeat">
+      <a:schemeClr val="dk1"/>
+    </dgm:txFillClrLst>
+    <dgm:txEffectClrLst/>
+  </dgm:styleLbl>
+  <dgm:styleLbl name="solidFgAcc1">
+    <dgm:fillClrLst meth="repeat">
+      <a:schemeClr val="lt1"/>
+    </dgm:fillClrLst>
+    <dgm:linClrLst>
+      <a:schemeClr val="accent2"/>
+      <a:schemeClr val="accent3"/>
+    </dgm:linClrLst>
+    <dgm:effectClrLst/>
+    <dgm:txLinClrLst/>
+    <dgm:txFillClrLst meth="repeat">
+      <a:schemeClr val="dk1"/>
+    </dgm:txFillClrLst>
+    <dgm:txEffectClrLst/>
+  </dgm:styleLbl>
+  <dgm:styleLbl name="solidAlignAcc1">
+    <dgm:fillClrLst meth="repeat">
+      <a:schemeClr val="lt1"/>
+    </dgm:fillClrLst>
+    <dgm:linClrLst>
+      <a:schemeClr val="accent2"/>
+      <a:schemeClr val="accent3"/>
+    </dgm:linClrLst>
+    <dgm:effectClrLst/>
+    <dgm:txLinClrLst/>
+    <dgm:txFillClrLst meth="repeat">
+      <a:schemeClr val="dk1"/>
+    </dgm:txFillClrLst>
+    <dgm:txEffectClrLst/>
+  </dgm:styleLbl>
+  <dgm:styleLbl name="solidBgAcc1">
+    <dgm:fillClrLst meth="repeat">
+      <a:schemeClr val="lt1"/>
+    </dgm:fillClrLst>
+    <dgm:linClrLst>
+      <a:schemeClr val="accent2"/>
+      <a:schemeClr val="accent3"/>
+    </dgm:linClrLst>
+    <dgm:effectClrLst/>
+    <dgm:txLinClrLst/>
+    <dgm:txFillClrLst meth="repeat">
+      <a:schemeClr val="dk1"/>
+    </dgm:txFillClrLst>
+    <dgm:txEffectClrLst/>
+  </dgm:styleLbl>
+  <dgm:styleLbl name="fgAccFollowNode1">
+    <dgm:fillClrLst>
+      <a:schemeClr val="accent2">
+        <a:tint val="40000"/>
+        <a:alpha val="90000"/>
+      </a:schemeClr>
+      <a:schemeClr val="accent3">
+        <a:tint val="40000"/>
+        <a:alpha val="90000"/>
+      </a:schemeClr>
+    </dgm:fillClrLst>
+    <dgm:linClrLst>
+      <a:schemeClr val="accent2">
+        <a:tint val="40000"/>
+        <a:alpha val="90000"/>
+      </a:schemeClr>
+      <a:schemeClr val="accent3">
+        <a:tint val="40000"/>
+        <a:alpha val="90000"/>
+      </a:schemeClr>
+    </dgm:linClrLst>
+    <dgm:effectClrLst/>
+    <dgm:txLinClrLst/>
+    <dgm:txFillClrLst meth="repeat">
+      <a:schemeClr val="dk1"/>
+    </dgm:txFillClrLst>
+    <dgm:txEffectClrLst/>
+  </dgm:styleLbl>
+  <dgm:styleLbl name="alignAccFollowNode1">
+    <dgm:fillClrLst>
+      <a:schemeClr val="accent2">
+        <a:tint val="40000"/>
+        <a:alpha val="90000"/>
+      </a:schemeClr>
+      <a:schemeClr val="accent3">
+        <a:tint val="40000"/>
+        <a:alpha val="90000"/>
+      </a:schemeClr>
+    </dgm:fillClrLst>
+    <dgm:linClrLst>
+      <a:schemeClr val="accent2">
+        <a:tint val="40000"/>
+        <a:alpha val="90000"/>
+      </a:schemeClr>
+      <a:schemeClr val="accent3">
+        <a:tint val="40000"/>
+        <a:alpha val="90000"/>
+      </a:schemeClr>
+    </dgm:linClrLst>
+    <dgm:effectClrLst/>
+    <dgm:txLinClrLst/>
+    <dgm:txFillClrLst meth="repeat">
+      <a:schemeClr val="dk1"/>
+    </dgm:txFillClrLst>
+    <dgm:txEffectClrLst/>
+  </dgm:styleLbl>
+  <dgm:styleLbl name="bgAccFollowNode1">
+    <dgm:fillClrLst>
+      <a:schemeClr val="accent2">
+        <a:tint val="40000"/>
+        <a:alpha val="90000"/>
+      </a:schemeClr>
+      <a:schemeClr val="accent3">
+        <a:tint val="40000"/>
+        <a:alpha val="90000"/>
+      </a:schemeClr>
+    </dgm:fillClrLst>
+    <dgm:linClrLst>
+      <a:schemeClr val="accent2">
+        <a:tint val="40000"/>
+        <a:alpha val="90000"/>
+      </a:schemeClr>
+      <a:schemeClr val="accent3">
+        <a:tint val="40000"/>
+        <a:alpha val="90000"/>
+      </a:schemeClr>
+    </dgm:linClrLst>
+    <dgm:effectClrLst/>
+    <dgm:txLinClrLst/>
+    <dgm:txFillClrLst meth="repeat">
+      <a:schemeClr val="dk1"/>
+    </dgm:txFillClrLst>
+    <dgm:txEffectClrLst/>
+  </dgm:styleLbl>
+  <dgm:styleLbl name="fgAcc0">
+    <dgm:fillClrLst meth="repeat">
+      <a:schemeClr val="lt1">
+        <a:alpha val="90000"/>
+      </a:schemeClr>
+    </dgm:fillClrLst>
+    <dgm:linClrLst>
+      <a:schemeClr val="accent1"/>
+    </dgm:linClrLst>
+    <dgm:effectClrLst/>
+    <dgm:txLinClrLst/>
+    <dgm:txFillClrLst meth="repeat">
+      <a:schemeClr val="dk1"/>
+    </dgm:txFillClrLst>
+    <dgm:txEffectClrLst/>
+  </dgm:styleLbl>
+  <dgm:styleLbl name="fgAcc2">
+    <dgm:fillClrLst meth="repeat">
+      <a:schemeClr val="lt1">
+        <a:alpha val="90000"/>
+      </a:schemeClr>
+    </dgm:fillClrLst>
+    <dgm:linClrLst>
+      <a:schemeClr val="accent3"/>
+    </dgm:linClrLst>
+    <dgm:effectClrLst/>
+    <dgm:txLinClrLst/>
+    <dgm:txFillClrLst meth="repeat">
+      <a:schemeClr val="dk1"/>
+    </dgm:txFillClrLst>
+    <dgm:txEffectClrLst/>
+  </dgm:styleLbl>
+  <dgm:styleLbl name="fgAcc3">
+    <dgm:fillClrLst meth="repeat">
+      <a:schemeClr val="lt1">
+        <a:alpha val="90000"/>
+      </a:schemeClr>
+    </dgm:fillClrLst>
+    <dgm:linClrLst>
+      <a:schemeClr val="accent4"/>
+    </dgm:linClrLst>
+    <dgm:effectClrLst/>
+    <dgm:txLinClrLst/>
+    <dgm:txFillClrLst meth="repeat">
+      <a:schemeClr val="dk1"/>
+    </dgm:txFillClrLst>
+    <dgm:txEffectClrLst/>
+  </dgm:styleLbl>
+  <dgm:styleLbl name="fgAcc4">
+    <dgm:fillClrLst meth="repeat">
+      <a:schemeClr val="lt1">
+        <a:alpha val="90000"/>
+      </a:schemeClr>
+    </dgm:fillClrLst>
+    <dgm:linClrLst>
+      <a:schemeClr val="accent5"/>
+    </dgm:linClrLst>
+    <dgm:effectClrLst/>
+    <dgm:txLinClrLst/>
+    <dgm:txFillClrLst meth="repeat">
+      <a:schemeClr val="dk1"/>
+    </dgm:txFillClrLst>
+    <dgm:txEffectClrLst/>
+  </dgm:styleLbl>
+  <dgm:styleLbl name="bgShp">
+    <dgm:fillClrLst meth="repeat">
+      <a:schemeClr val="accent2">
+        <a:tint val="40000"/>
+      </a:schemeClr>
+    </dgm:fillClrLst>
+    <dgm:linClrLst meth="repeat">
+      <a:schemeClr val="dk1"/>
+    </dgm:linClrLst>
+    <dgm:effectClrLst/>
+    <dgm:txLinClrLst/>
+    <dgm:txFillClrLst meth="repeat">
+      <a:schemeClr val="dk1"/>
+    </dgm:txFillClrLst>
+    <dgm:txEffectClrLst/>
+  </dgm:styleLbl>
+  <dgm:styleLbl name="dkBgShp">
+    <dgm:fillClrLst meth="repeat">
+      <a:schemeClr val="accent2">
+        <a:shade val="90000"/>
+      </a:schemeClr>
+    </dgm:fillClrLst>
+    <dgm:linClrLst meth="repeat">
+      <a:schemeClr val="dk1"/>
+    </dgm:linClrLst>
+    <dgm:effectClrLst/>
+    <dgm:txLinClrLst/>
+    <dgm:txFillClrLst meth="repeat">
+      <a:schemeClr val="lt1"/>
+    </dgm:txFillClrLst>
+    <dgm:txEffectClrLst/>
+  </dgm:styleLbl>
+  <dgm:styleLbl name="trBgShp">
+    <dgm:fillClrLst meth="repeat">
+      <a:schemeClr val="accent2">
+        <a:tint val="50000"/>
+        <a:alpha val="40000"/>
+      </a:schemeClr>
+    </dgm:fillClrLst>
+    <dgm:linClrLst meth="repeat">
+      <a:schemeClr val="accent2"/>
+    </dgm:linClrLst>
+    <dgm:effectClrLst/>
+    <dgm:txLinClrLst/>
+    <dgm:txFillClrLst meth="repeat">
+      <a:schemeClr val="lt1"/>
+    </dgm:txFillClrLst>
+    <dgm:txEffectClrLst/>
+  </dgm:styleLbl>
+  <dgm:styleLbl name="fgShp">
+    <dgm:fillClrLst meth="repeat">
+      <a:schemeClr val="accent2">
+        <a:tint val="40000"/>
+      </a:schemeClr>
+    </dgm:fillClrLst>
+    <dgm:linClrLst meth="repeat">
+      <a:schemeClr val="lt1"/>
+    </dgm:linClrLst>
+    <dgm:effectClrLst/>
+    <dgm:txLinClrLst/>
+    <dgm:txFillClrLst meth="repeat">
+      <a:schemeClr val="dk1"/>
+    </dgm:txFillClrLst>
+    <dgm:txEffectClrLst/>
+  </dgm:styleLbl>
+  <dgm:styleLbl name="revTx">
+    <dgm:fillClrLst meth="repeat">
+      <a:schemeClr val="lt1">
+        <a:alpha val="0"/>
+      </a:schemeClr>
+    </dgm:fillClrLst>
+    <dgm:linClrLst meth="repeat">
+      <a:schemeClr val="dk1">
+        <a:alpha val="0"/>
+      </a:schemeClr>
+    </dgm:linClrLst>
+    <dgm:effectClrLst/>
+    <dgm:txLinClrLst/>
+    <dgm:txFillClrLst meth="repeat">
+      <a:schemeClr val="tx1"/>
+    </dgm:txFillClrLst>
+    <dgm:txEffectClrLst/>
+  </dgm:styleLbl>
+</dgm:colorsDef>
+</file>
+
+<file path=ppt/diagrams/colors6.xml><?xml version="1.0" encoding="utf-8"?>
+<dgm:colorsDef xmlns:dgm="http://schemas.openxmlformats.org/drawingml/2006/diagram" xmlns:a="http://schemas.openxmlformats.org/drawingml/2006/main" uniqueId="urn:microsoft.com/office/officeart/2005/8/colors/colorful1">
+  <dgm:title val=""/>
+  <dgm:desc val=""/>
+  <dgm:catLst>
+    <dgm:cat type="colorful" pri="10100"/>
+  </dgm:catLst>
+  <dgm:styleLbl name="node0">
+    <dgm:fillClrLst meth="repeat">
+      <a:schemeClr val="accent1"/>
+    </dgm:fillClrLst>
+    <dgm:linClrLst meth="repeat">
+      <a:schemeClr val="lt1"/>
+    </dgm:linClrLst>
+    <dgm:effectClrLst/>
+    <dgm:txLinClrLst/>
+    <dgm:txFillClrLst/>
+    <dgm:txEffectClrLst/>
+  </dgm:styleLbl>
+  <dgm:styleLbl name="node1">
+    <dgm:fillClrLst meth="repeat">
+      <a:schemeClr val="accent2"/>
+      <a:schemeClr val="accent3"/>
+      <a:schemeClr val="accent4"/>
+      <a:schemeClr val="accent5"/>
+      <a:schemeClr val="accent6"/>
+    </dgm:fillClrLst>
+    <dgm:linClrLst meth="repeat">
+      <a:schemeClr val="lt1"/>
+    </dgm:linClrLst>
+    <dgm:effectClrLst/>
+    <dgm:txLinClrLst/>
+    <dgm:txFillClrLst/>
+    <dgm:txEffectClrLst/>
+  </dgm:styleLbl>
+  <dgm:styleLbl name="alignNode1">
+    <dgm:fillClrLst meth="repeat">
+      <a:schemeClr val="accent2"/>
+      <a:schemeClr val="accent3"/>
+      <a:schemeClr val="accent4"/>
+      <a:schemeClr val="accent5"/>
+      <a:schemeClr val="accent6"/>
+    </dgm:fillClrLst>
+    <dgm:linClrLst meth="repeat">
+      <a:schemeClr val="accent2"/>
+      <a:schemeClr val="accent3"/>
+      <a:schemeClr val="accent4"/>
+      <a:schemeClr val="accent5"/>
+      <a:schemeClr val="accent6"/>
+    </dgm:linClrLst>
+    <dgm:effectClrLst/>
+    <dgm:txLinClrLst/>
+    <dgm:txFillClrLst/>
+    <dgm:txEffectClrLst/>
+  </dgm:styleLbl>
+  <dgm:styleLbl name="lnNode1">
+    <dgm:fillClrLst meth="repeat">
+      <a:schemeClr val="accent2"/>
+      <a:schemeClr val="accent3"/>
+      <a:schemeClr val="accent4"/>
+      <a:schemeClr val="accent5"/>
+      <a:schemeClr val="accent6"/>
+    </dgm:fillClrLst>
+    <dgm:linClrLst meth="repeat">
+      <a:schemeClr val="lt1"/>
+    </dgm:linClrLst>
+    <dgm:effectClrLst/>
+    <dgm:txLinClrLst/>
+    <dgm:txFillClrLst/>
+    <dgm:txEffectClrLst/>
+  </dgm:styleLbl>
+  <dgm:styleLbl name="vennNode1">
+    <dgm:fillClrLst meth="repeat">
+      <a:schemeClr val="accent2">
+        <a:alpha val="50000"/>
+      </a:schemeClr>
+      <a:schemeClr val="accent3">
+        <a:alpha val="50000"/>
+      </a:schemeClr>
+      <a:schemeClr val="accent4">
+        <a:alpha val="50000"/>
+      </a:schemeClr>
+      <a:schemeClr val="accent5">
+        <a:alpha val="50000"/>
+      </a:schemeClr>
+      <a:schemeClr val="accent6">
+        <a:alpha val="50000"/>
+      </a:schemeClr>
+    </dgm:fillClrLst>
+    <dgm:linClrLst meth="repeat">
+      <a:schemeClr val="lt1"/>
+    </dgm:linClrLst>
+    <dgm:effectClrLst/>
+    <dgm:txLinClrLst/>
+    <dgm:txFillClrLst/>
+    <dgm:txEffectClrLst/>
+  </dgm:styleLbl>
+  <dgm:styleLbl name="node2">
+    <dgm:fillClrLst>
+      <a:schemeClr val="accent2"/>
+    </dgm:fillClrLst>
+    <dgm:linClrLst meth="repeat">
+      <a:schemeClr val="lt1"/>
+    </dgm:linClrLst>
+    <dgm:effectClrLst/>
+    <dgm:txLinClrLst/>
+    <dgm:txFillClrLst/>
+    <dgm:txEffectClrLst/>
+  </dgm:styleLbl>
+  <dgm:styleLbl name="node3">
+    <dgm:fillClrLst>
+      <a:schemeClr val="accent3"/>
+    </dgm:fillClrLst>
+    <dgm:linClrLst meth="repeat">
+      <a:schemeClr val="lt1"/>
+    </dgm:linClrLst>
+    <dgm:effectClrLst/>
+    <dgm:txLinClrLst/>
+    <dgm:txFillClrLst/>
+    <dgm:txEffectClrLst/>
+  </dgm:styleLbl>
+  <dgm:styleLbl name="node4">
+    <dgm:fillClrLst>
+      <a:schemeClr val="accent4"/>
+    </dgm:fillClrLst>
+    <dgm:linClrLst meth="repeat">
+      <a:schemeClr val="lt1"/>
+    </dgm:linClrLst>
+    <dgm:effectClrLst/>
+    <dgm:txLinClrLst/>
+    <dgm:txFillClrLst/>
+    <dgm:txEffectClrLst/>
+  </dgm:styleLbl>
+  <dgm:styleLbl name="fgImgPlace1">
+    <dgm:fillClrLst meth="repeat">
+      <a:schemeClr val="accent2">
+        <a:tint val="50000"/>
+      </a:schemeClr>
+      <a:schemeClr val="accent3">
+        <a:tint val="50000"/>
+      </a:schemeClr>
+      <a:schemeClr val="accent4">
+        <a:tint val="50000"/>
+      </a:schemeClr>
+      <a:schemeClr val="accent5">
+        <a:tint val="50000"/>
+      </a:schemeClr>
+      <a:schemeClr val="accent6">
+        <a:tint val="50000"/>
+      </a:schemeClr>
+    </dgm:fillClrLst>
+    <dgm:linClrLst meth="repeat">
+      <a:schemeClr val="lt1"/>
+    </dgm:linClrLst>
+    <dgm:effectClrLst/>
+    <dgm:txLinClrLst/>
+    <dgm:txFillClrLst meth="repeat">
+      <a:schemeClr val="lt1"/>
+    </dgm:txFillClrLst>
+    <dgm:txEffectClrLst/>
+  </dgm:styleLbl>
+  <dgm:styleLbl name="alignImgPlace1">
+    <dgm:fillClrLst>
+      <a:schemeClr val="accent1">
+        <a:tint val="50000"/>
+      </a:schemeClr>
+      <a:schemeClr val="accent2">
+        <a:tint val="20000"/>
+      </a:schemeClr>
+    </dgm:fillClrLst>
+    <dgm:linClrLst meth="repeat">
+      <a:schemeClr val="lt1"/>
+    </dgm:linClrLst>
+    <dgm:effectClrLst/>
+    <dgm:txLinClrLst/>
+    <dgm:txFillClrLst meth="repeat">
+      <a:schemeClr val="lt1"/>
+    </dgm:txFillClrLst>
+    <dgm:txEffectClrLst/>
+  </dgm:styleLbl>
+  <dgm:styleLbl name="bgImgPlace1">
+    <dgm:fillClrLst>
+      <a:schemeClr val="accent1">
+        <a:tint val="50000"/>
+      </a:schemeClr>
+      <a:schemeClr val="accent2">
+        <a:tint val="20000"/>
+      </a:schemeClr>
+    </dgm:fillClrLst>
+    <dgm:linClrLst meth="repeat">
+      <a:schemeClr val="lt1"/>
+    </dgm:linClrLst>
+    <dgm:effectClrLst/>
+    <dgm:txLinClrLst/>
+    <dgm:txFillClrLst meth="repeat">
+      <a:schemeClr val="lt1"/>
+    </dgm:txFillClrLst>
+    <dgm:txEffectClrLst/>
+  </dgm:styleLbl>
+  <dgm:styleLbl name="sibTrans2D1">
+    <dgm:fillClrLst meth="repeat">
+      <a:schemeClr val="accent2"/>
+      <a:schemeClr val="accent3"/>
+      <a:schemeClr val="accent4"/>
+      <a:schemeClr val="accent5"/>
+      <a:schemeClr val="accent6"/>
+    </dgm:fillClrLst>
+    <dgm:linClrLst meth="cycle">
+      <a:schemeClr val="lt1"/>
+    </dgm:linClrLst>
+    <dgm:effectClrLst/>
+    <dgm:txLinClrLst/>
+    <dgm:txFillClrLst/>
+    <dgm:txEffectClrLst/>
+  </dgm:styleLbl>
+  <dgm:styleLbl name="fgSibTrans2D1">
+    <dgm:fillClrLst meth="repeat">
+      <a:schemeClr val="accent2"/>
+      <a:schemeClr val="accent3"/>
+      <a:schemeClr val="accent4"/>
+      <a:schemeClr val="accent5"/>
+      <a:schemeClr val="accent6"/>
+    </dgm:fillClrLst>
+    <dgm:linClrLst meth="cycle">
+      <a:schemeClr val="lt1"/>
+    </dgm:linClrLst>
+    <dgm:effectClrLst/>
+    <dgm:txLinClrLst/>
+    <dgm:txFillClrLst meth="repeat">
+      <a:schemeClr val="lt1"/>
+    </dgm:txFillClrLst>
+    <dgm:txEffectClrLst/>
+  </dgm:styleLbl>
+  <dgm:styleLbl name="bgSibTrans2D1">
+    <dgm:fillClrLst meth="repeat">
+      <a:schemeClr val="accent2"/>
+      <a:schemeClr val="accent3"/>
+      <a:schemeClr val="accent4"/>
+      <a:schemeClr val="accent5"/>
+      <a:schemeClr val="accent6"/>
+    </dgm:fillClrLst>
+    <dgm:linClrLst meth="cycle">
+      <a:schemeClr val="lt1"/>
+    </dgm:linClrLst>
+    <dgm:effectClrLst/>
+    <dgm:txLinClrLst/>
+    <dgm:txFillClrLst meth="repeat">
+      <a:schemeClr val="lt1"/>
+    </dgm:txFillClrLst>
+    <dgm:txEffectClrLst/>
+  </dgm:styleLbl>
+  <dgm:styleLbl name="sibTrans1D1">
+    <dgm:fillClrLst meth="repeat">
+      <a:schemeClr val="accent2"/>
+      <a:schemeClr val="accent3"/>
+      <a:schemeClr val="accent4"/>
+      <a:schemeClr val="accent5"/>
+      <a:schemeClr val="accent6"/>
+    </dgm:fillClrLst>
+    <dgm:linClrLst meth="repeat">
+      <a:schemeClr val="accent2"/>
+      <a:schemeClr val="accent3"/>
+      <a:schemeClr val="accent4"/>
+      <a:schemeClr val="accent5"/>
+      <a:schemeClr val="accent6"/>
+    </dgm:linClrLst>
+    <dgm:effectClrLst/>
+    <dgm:txLinClrLst/>
+    <dgm:txFillClrLst meth="repeat">
+      <a:schemeClr val="tx1"/>
+    </dgm:txFillClrLst>
+    <dgm:txEffectClrLst/>
+  </dgm:styleLbl>
+  <dgm:styleLbl name="callout">
+    <dgm:fillClrLst meth="repeat">
+      <a:schemeClr val="accent2"/>
+    </dgm:fillClrLst>
+    <dgm:linClrLst meth="repeat">
+      <a:schemeClr val="accent2">
+        <a:tint val="50000"/>
+      </a:schemeClr>
+    </dgm:linClrLst>
+    <dgm:effectClrLst/>
+    <dgm:txLinClrLst/>
+    <dgm:txFillClrLst meth="repeat">
+      <a:schemeClr val="tx1"/>
+    </dgm:txFillClrLst>
+    <dgm:txEffectClrLst/>
+  </dgm:styleLbl>
+  <dgm:styleLbl name="asst0">
+    <dgm:fillClrLst meth="repeat">
+      <a:schemeClr val="accent1"/>
+    </dgm:fillClrLst>
+    <dgm:linClrLst meth="repeat">
+      <a:schemeClr val="lt1"/>
+    </dgm:linClrLst>
+    <dgm:effectClrLst/>
+    <dgm:txLinClrLst/>
+    <dgm:txFillClrLst/>
+    <dgm:txEffectClrLst/>
+  </dgm:styleLbl>
+  <dgm:styleLbl name="asst1">
+    <dgm:fillClrLst meth="repeat">
+      <a:schemeClr val="accent2"/>
+    </dgm:fillClrLst>
+    <dgm:linClrLst meth="repeat">
+      <a:schemeClr val="lt1"/>
+    </dgm:linClrLst>
+    <dgm:effectClrLst/>
+    <dgm:txLinClrLst/>
+    <dgm:txFillClrLst/>
+    <dgm:txEffectClrLst/>
+  </dgm:styleLbl>
+  <dgm:styleLbl name="asst2">
+    <dgm:fillClrLst>
+      <a:schemeClr val="accent3"/>
+    </dgm:fillClrLst>
+    <dgm:linClrLst meth="repeat">
+      <a:schemeClr val="lt1"/>
+    </dgm:linClrLst>
+    <dgm:effectClrLst/>
+    <dgm:txLinClrLst/>
+    <dgm:txFillClrLst/>
+    <dgm:txEffectClrLst/>
+  </dgm:styleLbl>
+  <dgm:styleLbl name="asst3">
+    <dgm:fillClrLst>
+      <a:schemeClr val="accent4"/>
+    </dgm:fillClrLst>
+    <dgm:linClrLst meth="repeat">
+      <a:schemeClr val="lt1"/>
+    </dgm:linClrLst>
+    <dgm:effectClrLst/>
+    <dgm:txLinClrLst/>
+    <dgm:txFillClrLst/>
+    <dgm:txEffectClrLst/>
+  </dgm:styleLbl>
+  <dgm:styleLbl name="asst4">
+    <dgm:fillClrLst>
+      <a:schemeClr val="accent5"/>
+    </dgm:fillClrLst>
+    <dgm:linClrLst meth="repeat">
+      <a:schemeClr val="lt1"/>
+    </dgm:linClrLst>
+    <dgm:effectClrLst/>
+    <dgm:txLinClrLst/>
+    <dgm:txFillClrLst/>
+    <dgm:txEffectClrLst/>
+  </dgm:styleLbl>
+  <dgm:styleLbl name="parChTrans2D1">
+    <dgm:fillClrLst meth="repeat">
+      <a:schemeClr val="accent2"/>
+    </dgm:fillClrLst>
+    <dgm:linClrLst meth="repeat">
+      <a:schemeClr val="lt1"/>
+    </dgm:linClrLst>
+    <dgm:effectClrLst/>
+    <dgm:txLinClrLst/>
+    <dgm:txFillClrLst meth="repeat">
+      <a:schemeClr val="lt1"/>
+    </dgm:txFillClrLst>
+    <dgm:txEffectClrLst/>
+  </dgm:styleLbl>
+  <dgm:styleLbl name="parChTrans2D2">
+    <dgm:fillClrLst meth="repeat">
+      <a:schemeClr val="accent3"/>
+    </dgm:fillClrLst>
+    <dgm:linClrLst meth="repeat">
+      <a:schemeClr val="lt1"/>
+    </dgm:linClrLst>
+    <dgm:effectClrLst/>
+    <dgm:txLinClrLst/>
+    <dgm:txFillClrLst/>
+    <dgm:txEffectClrLst/>
+  </dgm:styleLbl>
+  <dgm:styleLbl name="parChTrans2D3">
+    <dgm:fillClrLst meth="repeat">
+      <a:schemeClr val="accent4"/>
+    </dgm:fillClrLst>
+    <dgm:linClrLst meth="repeat">
+      <a:schemeClr val="lt1"/>
+    </dgm:linClrLst>
+    <dgm:effectClrLst/>
+    <dgm:txLinClrLst/>
+    <dgm:txFillClrLst/>
+    <dgm:txEffectClrLst/>
+  </dgm:styleLbl>
+  <dgm:styleLbl name="parChTrans2D4">
+    <dgm:fillClrLst meth="repeat">
+      <a:schemeClr val="accent5"/>
+    </dgm:fillClrLst>
+    <dgm:linClrLst meth="repeat">
+      <a:schemeClr val="lt1"/>
+    </dgm:linClrLst>
+    <dgm:effectClrLst/>
+    <dgm:txLinClrLst/>
+    <dgm:txFillClrLst meth="repeat">
+      <a:schemeClr val="lt1"/>
+    </dgm:txFillClrLst>
+    <dgm:txEffectClrLst/>
+  </dgm:styleLbl>
+  <dgm:styleLbl name="parChTrans1D1">
+    <dgm:fillClrLst meth="repeat">
+      <a:schemeClr val="accent2"/>
+    </dgm:fillClrLst>
+    <dgm:linClrLst meth="repeat">
+      <a:schemeClr val="accent1"/>
+    </dgm:linClrLst>
+    <dgm:effectClrLst/>
+    <dgm:txLinClrLst/>
+    <dgm:txFillClrLst meth="repeat">
+      <a:schemeClr val="tx1"/>
+    </dgm:txFillClrLst>
+    <dgm:txEffectClrLst/>
+  </dgm:styleLbl>
+  <dgm:styleLbl name="parChTrans1D2">
+    <dgm:fillClrLst meth="repeat">
+      <a:schemeClr val="accent3">
+        <a:tint val="90000"/>
+      </a:schemeClr>
+    </dgm:fillClrLst>
+    <dgm:linClrLst meth="repeat">
+      <a:schemeClr val="accent2"/>
+    </dgm:linClrLst>
+    <dgm:effectClrLst/>
+    <dgm:txLinClrLst/>
+    <dgm:txFillClrLst meth="repeat">
+      <a:schemeClr val="tx1"/>
+    </dgm:txFillClrLst>
+    <dgm:txEffectClrLst/>
+  </dgm:styleLbl>
+  <dgm:styleLbl name="parChTrans1D3">
+    <dgm:fillClrLst meth="repeat">
+      <a:schemeClr val="accent4">
+        <a:tint val="70000"/>
+      </a:schemeClr>
+    </dgm:fillClrLst>
+    <dgm:linClrLst meth="repeat">
+      <a:schemeClr val="accent3"/>
+    </dgm:linClrLst>
+    <dgm:effectClrLst/>
+    <dgm:txLinClrLst/>
+    <dgm:txFillClrLst meth="repeat">
+      <a:schemeClr val="tx1"/>
+    </dgm:txFillClrLst>
+    <dgm:txEffectClrLst/>
+  </dgm:styleLbl>
+  <dgm:styleLbl name="parChTrans1D4">
+    <dgm:fillClrLst meth="repeat">
+      <a:schemeClr val="accent5">
+        <a:tint val="50000"/>
+      </a:schemeClr>
+    </dgm:fillClrLst>
+    <dgm:linClrLst meth="repeat">
+      <a:schemeClr val="accent4"/>
+    </dgm:linClrLst>
+    <dgm:effectClrLst/>
+    <dgm:txLinClrLst/>
+    <dgm:txFillClrLst meth="repeat">
+      <a:schemeClr val="tx1"/>
+    </dgm:txFillClrLst>
+    <dgm:txEffectClrLst/>
+  </dgm:styleLbl>
+  <dgm:styleLbl name="fgAcc1">
+    <dgm:fillClrLst meth="repeat">
+      <a:schemeClr val="lt1">
+        <a:alpha val="90000"/>
+      </a:schemeClr>
+    </dgm:fillClrLst>
+    <dgm:linClrLst meth="repeat">
+      <a:schemeClr val="accent2"/>
+      <a:schemeClr val="accent3"/>
+      <a:schemeClr val="accent4"/>
+      <a:schemeClr val="accent5"/>
+      <a:schemeClr val="accent6"/>
+    </dgm:linClrLst>
+    <dgm:effectClrLst/>
+    <dgm:txLinClrLst/>
+    <dgm:txFillClrLst meth="repeat">
+      <a:schemeClr val="dk1"/>
+    </dgm:txFillClrLst>
+    <dgm:txEffectClrLst/>
+  </dgm:styleLbl>
+  <dgm:styleLbl name="conFgAcc1">
+    <dgm:fillClrLst meth="repeat">
+      <a:schemeClr val="lt1">
+        <a:alpha val="90000"/>
+      </a:schemeClr>
+    </dgm:fillClrLst>
+    <dgm:linClrLst meth="repeat">
+      <a:schemeClr val="accent2"/>
+      <a:schemeClr val="accent3"/>
+      <a:schemeClr val="accent4"/>
+      <a:schemeClr val="accent5"/>
+      <a:schemeClr val="accent6"/>
+    </dgm:linClrLst>
+    <dgm:effectClrLst/>
+    <dgm:txLinClrLst/>
+    <dgm:txFillClrLst meth="repeat">
+      <a:schemeClr val="dk1"/>
+    </dgm:txFillClrLst>
+    <dgm:txEffectClrLst/>
+  </dgm:styleLbl>
+  <dgm:styleLbl name="alignAcc1">
+    <dgm:fillClrLst meth="repeat">
+      <a:schemeClr val="lt1">
+        <a:alpha val="90000"/>
+      </a:schemeClr>
+    </dgm:fillClrLst>
+    <dgm:linClrLst meth="repeat">
+      <a:schemeClr val="accent2"/>
+      <a:schemeClr val="accent3"/>
+      <a:schemeClr val="accent4"/>
+      <a:schemeClr val="accent5"/>
+      <a:schemeClr val="accent6"/>
+    </dgm:linClrLst>
+    <dgm:effectClrLst/>
+    <dgm:txLinClrLst/>
+    <dgm:txFillClrLst meth="repeat">
+      <a:schemeClr val="dk1"/>
+    </dgm:txFillClrLst>
+    <dgm:txEffectClrLst/>
+  </dgm:styleLbl>
+  <dgm:styleLbl name="trAlignAcc1">
+    <dgm:fillClrLst meth="repeat">
+      <a:schemeClr val="lt1">
+        <a:alpha val="40000"/>
+      </a:schemeClr>
+    </dgm:fillClrLst>
+    <dgm:linClrLst meth="repeat">
+      <a:schemeClr val="accent1"/>
+    </dgm:linClrLst>
+    <dgm:effectClrLst/>
+    <dgm:txLinClrLst/>
+    <dgm:txFillClrLst meth="repeat">
+      <a:schemeClr val="dk1"/>
+    </dgm:txFillClrLst>
+    <dgm:txEffectClrLst/>
+  </dgm:styleLbl>
+  <dgm:styleLbl name="bgAcc1">
+    <dgm:fillClrLst meth="repeat">
+      <a:schemeClr val="lt1">
+        <a:alpha val="90000"/>
+      </a:schemeClr>
+    </dgm:fillClrLst>
+    <dgm:linClrLst meth="repeat">
+      <a:schemeClr val="accent2"/>
+      <a:schemeClr val="accent3"/>
+      <a:schemeClr val="accent4"/>
+      <a:schemeClr val="accent5"/>
+      <a:schemeClr val="accent6"/>
+    </dgm:linClrLst>
+    <dgm:effectClrLst/>
+    <dgm:txLinClrLst/>
+    <dgm:txFillClrLst meth="repeat">
+      <a:schemeClr val="dk1"/>
+    </dgm:txFillClrLst>
+    <dgm:txEffectClrLst/>
+  </dgm:styleLbl>
+  <dgm:styleLbl name="solidFgAcc1">
+    <dgm:fillClrLst meth="repeat">
+      <a:schemeClr val="lt1"/>
+    </dgm:fillClrLst>
+    <dgm:linClrLst meth="repeat">
+      <a:schemeClr val="accent2"/>
+      <a:schemeClr val="accent3"/>
+      <a:schemeClr val="accent4"/>
+      <a:schemeClr val="accent5"/>
+      <a:schemeClr val="accent6"/>
+    </dgm:linClrLst>
+    <dgm:effectClrLst/>
+    <dgm:txLinClrLst/>
+    <dgm:txFillClrLst meth="repeat">
+      <a:schemeClr val="dk1"/>
+    </dgm:txFillClrLst>
+    <dgm:txEffectClrLst/>
+  </dgm:styleLbl>
+  <dgm:styleLbl name="solidAlignAcc1">
+    <dgm:fillClrLst meth="repeat">
+      <a:schemeClr val="lt1"/>
+    </dgm:fillClrLst>
+    <dgm:linClrLst meth="repeat">
+      <a:schemeClr val="accent2"/>
+      <a:schemeClr val="accent3"/>
+      <a:schemeClr val="accent4"/>
+      <a:schemeClr val="accent5"/>
+      <a:schemeClr val="accent6"/>
+    </dgm:linClrLst>
+    <dgm:effectClrLst/>
+    <dgm:txLinClrLst/>
+    <dgm:txFillClrLst meth="repeat">
+      <a:schemeClr val="dk1"/>
+    </dgm:txFillClrLst>
+    <dgm:txEffectClrLst/>
+  </dgm:styleLbl>
+  <dgm:styleLbl name="solidBgAcc1">
+    <dgm:fillClrLst meth="repeat">
+      <a:schemeClr val="lt1"/>
+    </dgm:fillClrLst>
+    <dgm:linClrLst meth="repeat">
+      <a:schemeClr val="accent2"/>
+      <a:schemeClr val="accent3"/>
+      <a:schemeClr val="accent4"/>
+      <a:schemeClr val="accent5"/>
+      <a:schemeClr val="accent6"/>
+    </dgm:linClrLst>
+    <dgm:effectClrLst/>
+    <dgm:txLinClrLst/>
+    <dgm:txFillClrLst meth="repeat">
+      <a:schemeClr val="dk1"/>
+    </dgm:txFillClrLst>
+    <dgm:txEffectClrLst/>
+  </dgm:styleLbl>
+  <dgm:styleLbl name="fgAccFollowNode1">
+    <dgm:fillClrLst meth="repeat">
+      <a:schemeClr val="accent2">
+        <a:tint val="40000"/>
+        <a:alpha val="90000"/>
+      </a:schemeClr>
+      <a:schemeClr val="accent3">
+        <a:tint val="40000"/>
+        <a:alpha val="90000"/>
+      </a:schemeClr>
+      <a:schemeClr val="accent4">
+        <a:tint val="40000"/>
+        <a:alpha val="90000"/>
+      </a:schemeClr>
+      <a:schemeClr val="accent5">
+        <a:tint val="40000"/>
+        <a:alpha val="90000"/>
+      </a:schemeClr>
+      <a:schemeClr val="accent6">
+        <a:tint val="40000"/>
+        <a:alpha val="90000"/>
+      </a:schemeClr>
+    </dgm:fillClrLst>
+    <dgm:linClrLst meth="repeat">
+      <a:schemeClr val="accent2">
+        <a:tint val="40000"/>
+        <a:alpha val="90000"/>
+      </a:schemeClr>
+      <a:schemeClr val="accent3">
+        <a:tint val="40000"/>
+        <a:alpha val="90000"/>
+      </a:schemeClr>
+      <a:schemeClr val="accent4">
+        <a:tint val="40000"/>
+        <a:alpha val="90000"/>
+      </a:schemeClr>
+      <a:schemeClr val="accent5">
+        <a:tint val="40000"/>
+        <a:alpha val="90000"/>
+      </a:schemeClr>
+      <a:schemeClr val="accent6">
+        <a:tint val="40000"/>
+        <a:alpha val="90000"/>
+      </a:schemeClr>
+    </dgm:linClrLst>
+    <dgm:effectClrLst/>
+    <dgm:txLinClrLst/>
+    <dgm:txFillClrLst meth="repeat">
+      <a:schemeClr val="dk1"/>
+    </dgm:txFillClrLst>
+    <dgm:txEffectClrLst/>
+  </dgm:styleLbl>
+  <dgm:styleLbl name="alignAccFollowNode1">
+    <dgm:fillClrLst meth="repeat">
+      <a:schemeClr val="accent2">
+        <a:tint val="40000"/>
+        <a:alpha val="90000"/>
+      </a:schemeClr>
+      <a:schemeClr val="accent3">
+        <a:tint val="40000"/>
+        <a:alpha val="90000"/>
+      </a:schemeClr>
+      <a:schemeClr val="accent4">
+        <a:tint val="40000"/>
+        <a:alpha val="90000"/>
+      </a:schemeClr>
+      <a:schemeClr val="accent5">
+        <a:tint val="40000"/>
+        <a:alpha val="90000"/>
+      </a:schemeClr>
+      <a:schemeClr val="accent6">
+        <a:tint val="40000"/>
+        <a:alpha val="90000"/>
+      </a:schemeClr>
+    </dgm:fillClrLst>
+    <dgm:linClrLst meth="repeat">
+      <a:schemeClr val="accent2">
+        <a:tint val="40000"/>
+        <a:alpha val="90000"/>
+      </a:schemeClr>
+      <a:schemeClr val="accent3">
+        <a:tint val="40000"/>
+        <a:alpha val="90000"/>
+      </a:schemeClr>
+      <a:schemeClr val="accent4">
+        <a:tint val="40000"/>
+        <a:alpha val="90000"/>
+      </a:schemeClr>
+      <a:schemeClr val="accent5">
+        <a:tint val="40000"/>
+        <a:alpha val="90000"/>
+      </a:schemeClr>
+      <a:schemeClr val="accent6">
+        <a:tint val="40000"/>
+        <a:alpha val="90000"/>
+      </a:schemeClr>
+    </dgm:linClrLst>
+    <dgm:effectClrLst/>
+    <dgm:txLinClrLst/>
+    <dgm:txFillClrLst meth="repeat">
+      <a:schemeClr val="dk1"/>
+    </dgm:txFillClrLst>
+    <dgm:txEffectClrLst/>
+  </dgm:styleLbl>
+  <dgm:styleLbl name="bgAccFollowNode1">
+    <dgm:fillClrLst meth="repeat">
+      <a:schemeClr val="accent2">
+        <a:tint val="40000"/>
+        <a:alpha val="90000"/>
+      </a:schemeClr>
+      <a:schemeClr val="accent3">
+        <a:tint val="40000"/>
+        <a:alpha val="90000"/>
+      </a:schemeClr>
+      <a:schemeClr val="accent4">
+        <a:tint val="40000"/>
+        <a:alpha val="90000"/>
+      </a:schemeClr>
+      <a:schemeClr val="accent5">
+        <a:tint val="40000"/>
+        <a:alpha val="90000"/>
+      </a:schemeClr>
+      <a:schemeClr val="accent6">
+        <a:tint val="40000"/>
+        <a:alpha val="90000"/>
+      </a:schemeClr>
+    </dgm:fillClrLst>
+    <dgm:linClrLst meth="repeat">
+      <a:schemeClr val="accent2">
+        <a:tint val="40000"/>
+        <a:alpha val="90000"/>
+      </a:schemeClr>
+      <a:schemeClr val="accent3">
+        <a:tint val="40000"/>
+        <a:alpha val="90000"/>
+      </a:schemeClr>
+      <a:schemeClr val="accent4">
+        <a:tint val="40000"/>
+        <a:alpha val="90000"/>
+      </a:schemeClr>
+      <a:schemeClr val="accent5">
+        <a:tint val="40000"/>
+        <a:alpha val="90000"/>
+      </a:schemeClr>
+      <a:schemeClr val="accent6">
+        <a:tint val="40000"/>
+        <a:alpha val="90000"/>
+      </a:schemeClr>
+    </dgm:linClrLst>
+    <dgm:effectClrLst/>
+    <dgm:txLinClrLst/>
+    <dgm:txFillClrLst meth="repeat">
+      <a:schemeClr val="dk1"/>
+    </dgm:txFillClrLst>
+    <dgm:txEffectClrLst/>
+  </dgm:styleLbl>
+  <dgm:styleLbl name="fgAcc0">
+    <dgm:fillClrLst meth="repeat">
+      <a:schemeClr val="lt1">
+        <a:alpha val="90000"/>
+      </a:schemeClr>
+    </dgm:fillClrLst>
+    <dgm:linClrLst>
+      <a:schemeClr val="accent1"/>
+    </dgm:linClrLst>
+    <dgm:effectClrLst/>
+    <dgm:txLinClrLst/>
+    <dgm:txFillClrLst meth="repeat">
+      <a:schemeClr val="dk1"/>
+    </dgm:txFillClrLst>
+    <dgm:txEffectClrLst/>
+  </dgm:styleLbl>
+  <dgm:styleLbl name="fgAcc2">
+    <dgm:fillClrLst meth="repeat">
+      <a:schemeClr val="lt1">
+        <a:alpha val="90000"/>
+      </a:schemeClr>
+    </dgm:fillClrLst>
+    <dgm:linClrLst>
+      <a:schemeClr val="accent2"/>
+    </dgm:linClrLst>
+    <dgm:effectClrLst/>
+    <dgm:txLinClrLst/>
+    <dgm:txFillClrLst meth="repeat">
+      <a:schemeClr val="dk1"/>
+    </dgm:txFillClrLst>
+    <dgm:txEffectClrLst/>
+  </dgm:styleLbl>
+  <dgm:styleLbl name="fgAcc3">
+    <dgm:fillClrLst meth="repeat">
+      <a:schemeClr val="lt1">
+        <a:alpha val="90000"/>
+      </a:schemeClr>
+    </dgm:fillClrLst>
+    <dgm:linClrLst>
+      <a:schemeClr val="accent3"/>
+    </dgm:linClrLst>
+    <dgm:effectClrLst/>
+    <dgm:txLinClrLst/>
+    <dgm:txFillClrLst meth="repeat">
+      <a:schemeClr val="dk1"/>
+    </dgm:txFillClrLst>
+    <dgm:txEffectClrLst/>
+  </dgm:styleLbl>
+  <dgm:styleLbl name="fgAcc4">
+    <dgm:fillClrLst meth="repeat">
+      <a:schemeClr val="lt1">
+        <a:alpha val="90000"/>
+      </a:schemeClr>
+    </dgm:fillClrLst>
+    <dgm:linClrLst>
+      <a:schemeClr val="accent4"/>
+    </dgm:linClrLst>
+    <dgm:effectClrLst/>
+    <dgm:txLinClrLst/>
+    <dgm:txFillClrLst meth="repeat">
+      <a:schemeClr val="dk1"/>
+    </dgm:txFillClrLst>
+    <dgm:txEffectClrLst/>
+  </dgm:styleLbl>
+  <dgm:styleLbl name="bgShp">
+    <dgm:fillClrLst meth="repeat">
+      <a:schemeClr val="accent2">
+        <a:tint val="40000"/>
+      </a:schemeClr>
+    </dgm:fillClrLst>
+    <dgm:linClrLst meth="repeat">
+      <a:schemeClr val="dk1"/>
+    </dgm:linClrLst>
+    <dgm:effectClrLst/>
+    <dgm:txLinClrLst/>
+    <dgm:txFillClrLst meth="repeat">
+      <a:schemeClr val="dk1"/>
+    </dgm:txFillClrLst>
+    <dgm:txEffectClrLst/>
+  </dgm:styleLbl>
+  <dgm:styleLbl name="dkBgShp">
+    <dgm:fillClrLst meth="repeat">
+      <a:schemeClr val="accent2">
+        <a:shade val="90000"/>
+      </a:schemeClr>
+    </dgm:fillClrLst>
+    <dgm:linClrLst meth="repeat">
+      <a:schemeClr val="dk1"/>
+    </dgm:linClrLst>
+    <dgm:effectClrLst/>
+    <dgm:txLinClrLst/>
+    <dgm:txFillClrLst meth="repeat">
+      <a:schemeClr val="lt1"/>
+    </dgm:txFillClrLst>
+    <dgm:txEffectClrLst/>
+  </dgm:styleLbl>
+  <dgm:styleLbl name="trBgShp">
+    <dgm:fillClrLst meth="repeat">
+      <a:schemeClr val="accent1">
+        <a:tint val="50000"/>
+        <a:alpha val="40000"/>
+      </a:schemeClr>
+    </dgm:fillClrLst>
+    <dgm:linClrLst meth="repeat">
+      <a:schemeClr val="accent2"/>
+    </dgm:linClrLst>
+    <dgm:effectClrLst/>
+    <dgm:txLinClrLst/>
+    <dgm:txFillClrLst meth="repeat">
+      <a:schemeClr val="lt1"/>
+    </dgm:txFillClrLst>
+    <dgm:txEffectClrLst/>
+  </dgm:styleLbl>
+  <dgm:styleLbl name="fgShp">
+    <dgm:fillClrLst meth="repeat">
+      <a:schemeClr val="accent2">
+        <a:tint val="40000"/>
+      </a:schemeClr>
+    </dgm:fillClrLst>
+    <dgm:linClrLst meth="repeat">
+      <a:schemeClr val="lt1"/>
+    </dgm:linClrLst>
+    <dgm:effectClrLst/>
+    <dgm:txLinClrLst/>
+    <dgm:txFillClrLst meth="repeat">
+      <a:schemeClr val="dk1"/>
+    </dgm:txFillClrLst>
+    <dgm:txEffectClrLst/>
+  </dgm:styleLbl>
+  <dgm:styleLbl name="revTx">
+    <dgm:fillClrLst meth="repeat">
+      <a:schemeClr val="lt1">
+        <a:alpha val="0"/>
+      </a:schemeClr>
+    </dgm:fillClrLst>
+    <dgm:linClrLst meth="repeat">
+      <a:schemeClr val="dk1">
+        <a:alpha val="0"/>
+      </a:schemeClr>
+    </dgm:linClrLst>
+    <dgm:effectClrLst/>
+    <dgm:txLinClrLst/>
+    <dgm:txFillClrLst meth="repeat">
+      <a:schemeClr val="tx1"/>
+    </dgm:txFillClrLst>
+    <dgm:txEffectClrLst/>
+  </dgm:styleLbl>
+</dgm:colorsDef>
+</file>
+
+<file path=ppt/diagrams/colors7.xml><?xml version="1.0" encoding="utf-8"?>
 <dgm:colorsDef xmlns:dgm="http://schemas.openxmlformats.org/drawingml/2006/diagram" xmlns:a="http://schemas.openxmlformats.org/drawingml/2006/main" uniqueId="urn:microsoft.com/office/officeart/2005/8/colors/colorful2">
   <dgm:title val=""/>
   <dgm:desc val=""/>
@@ -5628,6 +7332,609 @@
     <dgm:cxn modelId="{AA0AC618-9108-4B00-9689-5F3417A02F53}" type="presParOf" srcId="{2A7541BB-4ABB-4051-B63B-EE3643E81762}" destId="{C4A8875C-6DE4-4142-8751-81A93D58620E}" srcOrd="1" destOrd="0" presId="urn:microsoft.com/office/officeart/2005/8/layout/hierarchy3"/>
     <dgm:cxn modelId="{81E82C7F-FFDF-454C-90EA-6B0A1A205F06}" type="presParOf" srcId="{C4A8875C-6DE4-4142-8751-81A93D58620E}" destId="{FE794705-6244-4BAF-8545-D97E143BF368}" srcOrd="0" destOrd="0" presId="urn:microsoft.com/office/officeart/2005/8/layout/hierarchy3"/>
     <dgm:cxn modelId="{087B38A8-AAA5-46FB-82FB-7EE39C877C1C}" type="presParOf" srcId="{C4A8875C-6DE4-4142-8751-81A93D58620E}" destId="{34BBCE51-5FB3-4A25-BDDF-5B5B4CA3DAF0}" srcOrd="1" destOrd="0" presId="urn:microsoft.com/office/officeart/2005/8/layout/hierarchy3"/>
+  </dgm:cxnLst>
+  <dgm:bg/>
+  <dgm:whole/>
+  <dgm:extLst>
+    <a:ext uri="http://schemas.microsoft.com/office/drawing/2008/diagram">
+      <dsp:dataModelExt xmlns:dsp="http://schemas.microsoft.com/office/drawing/2008/diagram" relId="rId6" minVer="http://schemas.openxmlformats.org/drawingml/2006/diagram"/>
+    </a:ext>
+  </dgm:extLst>
+</dgm:dataModel>
+</file>
+
+<file path=ppt/diagrams/data6.xml><?xml version="1.0" encoding="utf-8"?>
+<dgm:dataModel xmlns:dgm="http://schemas.openxmlformats.org/drawingml/2006/diagram" xmlns:a="http://schemas.openxmlformats.org/drawingml/2006/main">
+  <dgm:ptLst>
+    <dgm:pt modelId="{5965542E-801E-4CAB-ACA9-F2BDD863855D}" type="doc">
+      <dgm:prSet loTypeId="urn:microsoft.com/office/officeart/2005/8/layout/chevron2" loCatId="process" qsTypeId="urn:microsoft.com/office/officeart/2005/8/quickstyle/simple1" qsCatId="simple" csTypeId="urn:microsoft.com/office/officeart/2005/8/colors/colorful1" csCatId="colorful" phldr="1"/>
+      <dgm:spPr/>
+      <dgm:t>
+        <a:bodyPr/>
+        <a:lstStyle/>
+        <a:p>
+          <a:endParaRPr lang="en-US"/>
+        </a:p>
+      </dgm:t>
+    </dgm:pt>
+    <dgm:pt modelId="{7BB74005-0681-4C88-92B3-032D02581B49}">
+      <dgm:prSet/>
+      <dgm:spPr/>
+      <dgm:t>
+        <a:bodyPr/>
+        <a:lstStyle/>
+        <a:p>
+          <a:r>
+            <a:rPr lang="ko-KR"/>
+            <a:t>상속 받은 </a:t>
+          </a:r>
+          <a:r>
+            <a:rPr lang="en-US"/>
+            <a:t>class</a:t>
+          </a:r>
+          <a:r>
+            <a:rPr lang="ko-KR"/>
+            <a:t>에서 특정 메소드를 반드시 구현하도록 강제하는 </a:t>
+          </a:r>
+          <a:r>
+            <a:rPr lang="en-US"/>
+            <a:t>class</a:t>
+          </a:r>
+        </a:p>
+      </dgm:t>
+    </dgm:pt>
+    <dgm:pt modelId="{ECD8D345-2F43-402A-98F7-C7D5ADE00931}" type="parTrans" cxnId="{93D20DBD-04BE-4BCB-9316-8BF7CEC571EC}">
+      <dgm:prSet/>
+      <dgm:spPr/>
+      <dgm:t>
+        <a:bodyPr/>
+        <a:lstStyle/>
+        <a:p>
+          <a:endParaRPr lang="en-US"/>
+        </a:p>
+      </dgm:t>
+    </dgm:pt>
+    <dgm:pt modelId="{564070F3-0567-4365-9017-73F8F2E8CC31}" type="sibTrans" cxnId="{93D20DBD-04BE-4BCB-9316-8BF7CEC571EC}">
+      <dgm:prSet/>
+      <dgm:spPr/>
+      <dgm:t>
+        <a:bodyPr/>
+        <a:lstStyle/>
+        <a:p>
+          <a:endParaRPr lang="en-US"/>
+        </a:p>
+      </dgm:t>
+    </dgm:pt>
+    <dgm:pt modelId="{EEC0E4B9-5A4A-4D4D-9B78-050E0C02E633}">
+      <dgm:prSet/>
+      <dgm:spPr/>
+      <dgm:t>
+        <a:bodyPr/>
+        <a:lstStyle/>
+        <a:p>
+          <a:r>
+            <a:rPr lang="ko-KR"/>
+            <a:t>부모 </a:t>
+          </a:r>
+          <a:r>
+            <a:rPr lang="en-US"/>
+            <a:t>class: </a:t>
+          </a:r>
+          <a:r>
+            <a:rPr lang="ko-KR"/>
+            <a:t>강제할 메소드에 </a:t>
+          </a:r>
+          <a:r>
+            <a:rPr lang="en-US"/>
+            <a:t>abstract</a:t>
+          </a:r>
+          <a:r>
+            <a:rPr lang="ko-KR"/>
+            <a:t>로 표시</a:t>
+          </a:r>
+          <a:endParaRPr lang="en-US"/>
+        </a:p>
+      </dgm:t>
+    </dgm:pt>
+    <dgm:pt modelId="{CCBA2F9D-7A37-411F-9C36-BDDCB4F7D2AF}" type="parTrans" cxnId="{14634DF6-EAA4-4BA7-A9B6-468BADF87CDC}">
+      <dgm:prSet/>
+      <dgm:spPr/>
+      <dgm:t>
+        <a:bodyPr/>
+        <a:lstStyle/>
+        <a:p>
+          <a:endParaRPr lang="en-US"/>
+        </a:p>
+      </dgm:t>
+    </dgm:pt>
+    <dgm:pt modelId="{C3DD6601-B902-4477-8F6D-866227661A20}" type="sibTrans" cxnId="{14634DF6-EAA4-4BA7-A9B6-468BADF87CDC}">
+      <dgm:prSet/>
+      <dgm:spPr/>
+      <dgm:t>
+        <a:bodyPr/>
+        <a:lstStyle/>
+        <a:p>
+          <a:endParaRPr lang="en-US"/>
+        </a:p>
+      </dgm:t>
+    </dgm:pt>
+    <dgm:pt modelId="{EDD0DD8B-F128-4DCE-BA06-7DB3DE339C5D}">
+      <dgm:prSet/>
+      <dgm:spPr/>
+      <dgm:t>
+        <a:bodyPr/>
+        <a:lstStyle/>
+        <a:p>
+          <a:r>
+            <a:rPr lang="ko-KR"/>
+            <a:t>자식 </a:t>
+          </a:r>
+          <a:r>
+            <a:rPr lang="en-US"/>
+            <a:t>class: </a:t>
+          </a:r>
+          <a:r>
+            <a:rPr lang="ko-KR"/>
+            <a:t>구현할 메소드에 </a:t>
+          </a:r>
+          <a:r>
+            <a:rPr lang="en-US"/>
+            <a:t>override</a:t>
+          </a:r>
+          <a:r>
+            <a:rPr lang="ko-KR"/>
+            <a:t>로 표시</a:t>
+          </a:r>
+          <a:r>
+            <a:rPr lang="en-US"/>
+            <a:t>; </a:t>
+          </a:r>
+          <a:r>
+            <a:rPr lang="ko-KR"/>
+            <a:t>자식의 자식으로 구현을 넘길 때는 </a:t>
+          </a:r>
+          <a:r>
+            <a:rPr lang="en-US"/>
+            <a:t>abstract</a:t>
+          </a:r>
+          <a:r>
+            <a:rPr lang="ko-KR"/>
+            <a:t>를 다시 표시</a:t>
+          </a:r>
+          <a:endParaRPr lang="en-US"/>
+        </a:p>
+      </dgm:t>
+    </dgm:pt>
+    <dgm:pt modelId="{2AEA93C7-BBCE-4F85-9075-ED4370C67A19}" type="parTrans" cxnId="{D2E16B3D-9464-4D0A-AEAD-8C16F63E285C}">
+      <dgm:prSet/>
+      <dgm:spPr/>
+      <dgm:t>
+        <a:bodyPr/>
+        <a:lstStyle/>
+        <a:p>
+          <a:endParaRPr lang="en-US"/>
+        </a:p>
+      </dgm:t>
+    </dgm:pt>
+    <dgm:pt modelId="{FD89A0BB-CF19-4317-8C8D-CBD891AC42F4}" type="sibTrans" cxnId="{D2E16B3D-9464-4D0A-AEAD-8C16F63E285C}">
+      <dgm:prSet/>
+      <dgm:spPr/>
+      <dgm:t>
+        <a:bodyPr/>
+        <a:lstStyle/>
+        <a:p>
+          <a:endParaRPr lang="en-US"/>
+        </a:p>
+      </dgm:t>
+    </dgm:pt>
+    <dgm:pt modelId="{2F855435-CA88-4E6F-9DAA-FD0C20038DC7}">
+      <dgm:prSet/>
+      <dgm:spPr/>
+      <dgm:t>
+        <a:bodyPr/>
+        <a:lstStyle/>
+        <a:p>
+          <a:r>
+            <a:rPr lang="ko-KR" dirty="0"/>
+            <a:t>나머지는 일반적인 </a:t>
+          </a:r>
+          <a:r>
+            <a:rPr lang="en-US" dirty="0"/>
+            <a:t>class</a:t>
+          </a:r>
+          <a:r>
+            <a:rPr lang="ko-KR" dirty="0"/>
+            <a:t>와 동일</a:t>
+          </a:r>
+          <a:endParaRPr lang="en-US" dirty="0"/>
+        </a:p>
+      </dgm:t>
+    </dgm:pt>
+    <dgm:pt modelId="{C02B98EC-3AED-4945-8F32-5D0B413B9419}" type="parTrans" cxnId="{017DEE8F-BCBB-46AD-9B2B-FDBA155B1492}">
+      <dgm:prSet/>
+      <dgm:spPr/>
+      <dgm:t>
+        <a:bodyPr/>
+        <a:lstStyle/>
+        <a:p>
+          <a:endParaRPr lang="en-US"/>
+        </a:p>
+      </dgm:t>
+    </dgm:pt>
+    <dgm:pt modelId="{CAD64579-479C-477A-9DCA-6D9E0C75A7D1}" type="sibTrans" cxnId="{017DEE8F-BCBB-46AD-9B2B-FDBA155B1492}">
+      <dgm:prSet/>
+      <dgm:spPr/>
+      <dgm:t>
+        <a:bodyPr/>
+        <a:lstStyle/>
+        <a:p>
+          <a:endParaRPr lang="en-US"/>
+        </a:p>
+      </dgm:t>
+    </dgm:pt>
+    <dgm:pt modelId="{1EA003DB-7870-4188-9CA5-8615E62BF658}">
+      <dgm:prSet/>
+      <dgm:spPr/>
+      <dgm:t>
+        <a:bodyPr/>
+        <a:lstStyle/>
+        <a:p>
+          <a:r>
+            <a:rPr lang="ko-KR" altLang="en-US" dirty="0"/>
+            <a:t>일반 메소드와 필드를 모두 가질 수 있음</a:t>
+          </a:r>
+          <a:endParaRPr lang="en-US" dirty="0"/>
+        </a:p>
+      </dgm:t>
+    </dgm:pt>
+    <dgm:pt modelId="{A7A913F3-CE3D-4F55-9615-54469ACA1F46}" type="parTrans" cxnId="{19C51910-4C46-4266-8819-34AFFECF2692}">
+      <dgm:prSet/>
+      <dgm:spPr/>
+      <dgm:t>
+        <a:bodyPr/>
+        <a:lstStyle/>
+        <a:p>
+          <a:pPr latinLnBrk="1"/>
+          <a:endParaRPr lang="ko-KR" altLang="en-US"/>
+        </a:p>
+      </dgm:t>
+    </dgm:pt>
+    <dgm:pt modelId="{C53152EC-211E-4829-8CE5-FB300C07D008}" type="sibTrans" cxnId="{19C51910-4C46-4266-8819-34AFFECF2692}">
+      <dgm:prSet/>
+      <dgm:spPr/>
+      <dgm:t>
+        <a:bodyPr/>
+        <a:lstStyle/>
+        <a:p>
+          <a:pPr latinLnBrk="1"/>
+          <a:endParaRPr lang="ko-KR" altLang="en-US"/>
+        </a:p>
+      </dgm:t>
+    </dgm:pt>
+    <dgm:pt modelId="{708192D2-A83C-4909-AEB3-DE38092395F1}">
+      <dgm:prSet/>
+      <dgm:spPr/>
+      <dgm:t>
+        <a:bodyPr/>
+        <a:lstStyle/>
+        <a:p>
+          <a:r>
+            <a:rPr lang="en-US" dirty="0"/>
+            <a:t>Abstract class</a:t>
+          </a:r>
+          <a:r>
+            <a:rPr lang="ko-KR" altLang="en-US" dirty="0"/>
+            <a:t>는 인스턴스를 가질 수 없음</a:t>
+          </a:r>
+          <a:endParaRPr lang="en-US" dirty="0"/>
+        </a:p>
+      </dgm:t>
+    </dgm:pt>
+    <dgm:pt modelId="{6092827D-812D-4799-94EF-A6010333117D}" type="parTrans" cxnId="{6E7A95DF-C9DB-4456-8410-3160540DD556}">
+      <dgm:prSet/>
+      <dgm:spPr/>
+      <dgm:t>
+        <a:bodyPr/>
+        <a:lstStyle/>
+        <a:p>
+          <a:pPr latinLnBrk="1"/>
+          <a:endParaRPr lang="ko-KR" altLang="en-US"/>
+        </a:p>
+      </dgm:t>
+    </dgm:pt>
+    <dgm:pt modelId="{F96D4A6A-9485-4276-8278-2C9ABC6811EB}" type="sibTrans" cxnId="{6E7A95DF-C9DB-4456-8410-3160540DD556}">
+      <dgm:prSet/>
+      <dgm:spPr/>
+      <dgm:t>
+        <a:bodyPr/>
+        <a:lstStyle/>
+        <a:p>
+          <a:pPr latinLnBrk="1"/>
+          <a:endParaRPr lang="ko-KR" altLang="en-US"/>
+        </a:p>
+      </dgm:t>
+    </dgm:pt>
+    <dgm:pt modelId="{20518A64-A06B-44A6-9604-D265F896E011}" type="pres">
+      <dgm:prSet presAssocID="{5965542E-801E-4CAB-ACA9-F2BDD863855D}" presName="linearFlow" presStyleCnt="0">
+        <dgm:presLayoutVars>
+          <dgm:dir/>
+          <dgm:animLvl val="lvl"/>
+          <dgm:resizeHandles val="exact"/>
+        </dgm:presLayoutVars>
+      </dgm:prSet>
+      <dgm:spPr/>
+    </dgm:pt>
+    <dgm:pt modelId="{2B846E34-7B58-4BAC-AB99-FC2188E66DC8}" type="pres">
+      <dgm:prSet presAssocID="{7BB74005-0681-4C88-92B3-032D02581B49}" presName="composite" presStyleCnt="0"/>
+      <dgm:spPr/>
+    </dgm:pt>
+    <dgm:pt modelId="{0495717E-A47B-463A-AA08-8226041569A1}" type="pres">
+      <dgm:prSet presAssocID="{7BB74005-0681-4C88-92B3-032D02581B49}" presName="parentText" presStyleLbl="alignNode1" presStyleIdx="0" presStyleCnt="2">
+        <dgm:presLayoutVars>
+          <dgm:chMax val="1"/>
+          <dgm:bulletEnabled val="1"/>
+        </dgm:presLayoutVars>
+      </dgm:prSet>
+      <dgm:spPr/>
+    </dgm:pt>
+    <dgm:pt modelId="{800A16A8-BD14-422D-A55A-A33196A8B5DF}" type="pres">
+      <dgm:prSet presAssocID="{7BB74005-0681-4C88-92B3-032D02581B49}" presName="descendantText" presStyleLbl="alignAcc1" presStyleIdx="0" presStyleCnt="2">
+        <dgm:presLayoutVars>
+          <dgm:bulletEnabled val="1"/>
+        </dgm:presLayoutVars>
+      </dgm:prSet>
+      <dgm:spPr/>
+    </dgm:pt>
+    <dgm:pt modelId="{F1A019C4-1C99-4C70-A705-190B2C9FEADA}" type="pres">
+      <dgm:prSet presAssocID="{564070F3-0567-4365-9017-73F8F2E8CC31}" presName="sp" presStyleCnt="0"/>
+      <dgm:spPr/>
+    </dgm:pt>
+    <dgm:pt modelId="{49B67237-68CF-430F-A824-B1071C387A5A}" type="pres">
+      <dgm:prSet presAssocID="{2F855435-CA88-4E6F-9DAA-FD0C20038DC7}" presName="composite" presStyleCnt="0"/>
+      <dgm:spPr/>
+    </dgm:pt>
+    <dgm:pt modelId="{3BF40106-E5F9-428D-BE1E-24403AEA8B68}" type="pres">
+      <dgm:prSet presAssocID="{2F855435-CA88-4E6F-9DAA-FD0C20038DC7}" presName="parentText" presStyleLbl="alignNode1" presStyleIdx="1" presStyleCnt="2">
+        <dgm:presLayoutVars>
+          <dgm:chMax val="1"/>
+          <dgm:bulletEnabled val="1"/>
+        </dgm:presLayoutVars>
+      </dgm:prSet>
+      <dgm:spPr/>
+    </dgm:pt>
+    <dgm:pt modelId="{F8EB865C-B551-4257-9AB2-AFF02415CA89}" type="pres">
+      <dgm:prSet presAssocID="{2F855435-CA88-4E6F-9DAA-FD0C20038DC7}" presName="descendantText" presStyleLbl="alignAcc1" presStyleIdx="1" presStyleCnt="2">
+        <dgm:presLayoutVars>
+          <dgm:bulletEnabled val="1"/>
+        </dgm:presLayoutVars>
+      </dgm:prSet>
+      <dgm:spPr/>
+    </dgm:pt>
+  </dgm:ptLst>
+  <dgm:cxnLst>
+    <dgm:cxn modelId="{19C51910-4C46-4266-8819-34AFFECF2692}" srcId="{2F855435-CA88-4E6F-9DAA-FD0C20038DC7}" destId="{1EA003DB-7870-4188-9CA5-8615E62BF658}" srcOrd="0" destOrd="0" parTransId="{A7A913F3-CE3D-4F55-9615-54469ACA1F46}" sibTransId="{C53152EC-211E-4829-8CE5-FB300C07D008}"/>
+    <dgm:cxn modelId="{A97A0A1D-FAC8-4D60-A6EB-C7CEBDC5B2D4}" type="presOf" srcId="{5965542E-801E-4CAB-ACA9-F2BDD863855D}" destId="{20518A64-A06B-44A6-9604-D265F896E011}" srcOrd="0" destOrd="0" presId="urn:microsoft.com/office/officeart/2005/8/layout/chevron2"/>
+    <dgm:cxn modelId="{D2E16B3D-9464-4D0A-AEAD-8C16F63E285C}" srcId="{7BB74005-0681-4C88-92B3-032D02581B49}" destId="{EDD0DD8B-F128-4DCE-BA06-7DB3DE339C5D}" srcOrd="1" destOrd="0" parTransId="{2AEA93C7-BBCE-4F85-9075-ED4370C67A19}" sibTransId="{FD89A0BB-CF19-4317-8C8D-CBD891AC42F4}"/>
+    <dgm:cxn modelId="{017DEE8F-BCBB-46AD-9B2B-FDBA155B1492}" srcId="{5965542E-801E-4CAB-ACA9-F2BDD863855D}" destId="{2F855435-CA88-4E6F-9DAA-FD0C20038DC7}" srcOrd="1" destOrd="0" parTransId="{C02B98EC-3AED-4945-8F32-5D0B413B9419}" sibTransId="{CAD64579-479C-477A-9DCA-6D9E0C75A7D1}"/>
+    <dgm:cxn modelId="{2BA1BDA2-1C9A-4DCB-8E9C-A5C40204B14C}" type="presOf" srcId="{2F855435-CA88-4E6F-9DAA-FD0C20038DC7}" destId="{3BF40106-E5F9-428D-BE1E-24403AEA8B68}" srcOrd="0" destOrd="0" presId="urn:microsoft.com/office/officeart/2005/8/layout/chevron2"/>
+    <dgm:cxn modelId="{C9BE79B9-6513-40F7-A329-C5C24E4A1D48}" type="presOf" srcId="{EDD0DD8B-F128-4DCE-BA06-7DB3DE339C5D}" destId="{800A16A8-BD14-422D-A55A-A33196A8B5DF}" srcOrd="0" destOrd="1" presId="urn:microsoft.com/office/officeart/2005/8/layout/chevron2"/>
+    <dgm:cxn modelId="{93D20DBD-04BE-4BCB-9316-8BF7CEC571EC}" srcId="{5965542E-801E-4CAB-ACA9-F2BDD863855D}" destId="{7BB74005-0681-4C88-92B3-032D02581B49}" srcOrd="0" destOrd="0" parTransId="{ECD8D345-2F43-402A-98F7-C7D5ADE00931}" sibTransId="{564070F3-0567-4365-9017-73F8F2E8CC31}"/>
+    <dgm:cxn modelId="{803A82BE-19FE-4E63-B737-DE5F0C104794}" type="presOf" srcId="{EEC0E4B9-5A4A-4D4D-9B78-050E0C02E633}" destId="{800A16A8-BD14-422D-A55A-A33196A8B5DF}" srcOrd="0" destOrd="0" presId="urn:microsoft.com/office/officeart/2005/8/layout/chevron2"/>
+    <dgm:cxn modelId="{6E7A95DF-C9DB-4456-8410-3160540DD556}" srcId="{2F855435-CA88-4E6F-9DAA-FD0C20038DC7}" destId="{708192D2-A83C-4909-AEB3-DE38092395F1}" srcOrd="1" destOrd="0" parTransId="{6092827D-812D-4799-94EF-A6010333117D}" sibTransId="{F96D4A6A-9485-4276-8278-2C9ABC6811EB}"/>
+    <dgm:cxn modelId="{F12AF2E7-4525-4195-9A68-668D8A128C25}" type="presOf" srcId="{1EA003DB-7870-4188-9CA5-8615E62BF658}" destId="{F8EB865C-B551-4257-9AB2-AFF02415CA89}" srcOrd="0" destOrd="0" presId="urn:microsoft.com/office/officeart/2005/8/layout/chevron2"/>
+    <dgm:cxn modelId="{AD84C6E8-D052-43D8-A5FA-A333DAB8B6F2}" type="presOf" srcId="{708192D2-A83C-4909-AEB3-DE38092395F1}" destId="{F8EB865C-B551-4257-9AB2-AFF02415CA89}" srcOrd="0" destOrd="1" presId="urn:microsoft.com/office/officeart/2005/8/layout/chevron2"/>
+    <dgm:cxn modelId="{14634DF6-EAA4-4BA7-A9B6-468BADF87CDC}" srcId="{7BB74005-0681-4C88-92B3-032D02581B49}" destId="{EEC0E4B9-5A4A-4D4D-9B78-050E0C02E633}" srcOrd="0" destOrd="0" parTransId="{CCBA2F9D-7A37-411F-9C36-BDDCB4F7D2AF}" sibTransId="{C3DD6601-B902-4477-8F6D-866227661A20}"/>
+    <dgm:cxn modelId="{02D40EFA-E879-44A5-835F-4B18219A7EED}" type="presOf" srcId="{7BB74005-0681-4C88-92B3-032D02581B49}" destId="{0495717E-A47B-463A-AA08-8226041569A1}" srcOrd="0" destOrd="0" presId="urn:microsoft.com/office/officeart/2005/8/layout/chevron2"/>
+    <dgm:cxn modelId="{9C8F91DB-A1FD-4DD0-82A7-21F25EEB25AD}" type="presParOf" srcId="{20518A64-A06B-44A6-9604-D265F896E011}" destId="{2B846E34-7B58-4BAC-AB99-FC2188E66DC8}" srcOrd="0" destOrd="0" presId="urn:microsoft.com/office/officeart/2005/8/layout/chevron2"/>
+    <dgm:cxn modelId="{9FA414B0-F284-43D9-A3E1-1CAAD5126851}" type="presParOf" srcId="{2B846E34-7B58-4BAC-AB99-FC2188E66DC8}" destId="{0495717E-A47B-463A-AA08-8226041569A1}" srcOrd="0" destOrd="0" presId="urn:microsoft.com/office/officeart/2005/8/layout/chevron2"/>
+    <dgm:cxn modelId="{D1531126-B216-4E92-9CBF-B6AC8F7163FE}" type="presParOf" srcId="{2B846E34-7B58-4BAC-AB99-FC2188E66DC8}" destId="{800A16A8-BD14-422D-A55A-A33196A8B5DF}" srcOrd="1" destOrd="0" presId="urn:microsoft.com/office/officeart/2005/8/layout/chevron2"/>
+    <dgm:cxn modelId="{3B9AC2A7-B0DE-4D29-9D62-73D98615DEFC}" type="presParOf" srcId="{20518A64-A06B-44A6-9604-D265F896E011}" destId="{F1A019C4-1C99-4C70-A705-190B2C9FEADA}" srcOrd="1" destOrd="0" presId="urn:microsoft.com/office/officeart/2005/8/layout/chevron2"/>
+    <dgm:cxn modelId="{F8288739-66CF-4000-B644-AE7BC0579095}" type="presParOf" srcId="{20518A64-A06B-44A6-9604-D265F896E011}" destId="{49B67237-68CF-430F-A824-B1071C387A5A}" srcOrd="2" destOrd="0" presId="urn:microsoft.com/office/officeart/2005/8/layout/chevron2"/>
+    <dgm:cxn modelId="{DB5DE1EF-7225-47AA-B6BE-9711BBBDE045}" type="presParOf" srcId="{49B67237-68CF-430F-A824-B1071C387A5A}" destId="{3BF40106-E5F9-428D-BE1E-24403AEA8B68}" srcOrd="0" destOrd="0" presId="urn:microsoft.com/office/officeart/2005/8/layout/chevron2"/>
+    <dgm:cxn modelId="{48DDCFDE-C2C0-4CFE-BDAF-DC8E1BC7A30F}" type="presParOf" srcId="{49B67237-68CF-430F-A824-B1071C387A5A}" destId="{F8EB865C-B551-4257-9AB2-AFF02415CA89}" srcOrd="1" destOrd="0" presId="urn:microsoft.com/office/officeart/2005/8/layout/chevron2"/>
+  </dgm:cxnLst>
+  <dgm:bg/>
+  <dgm:whole/>
+  <dgm:extLst>
+    <a:ext uri="http://schemas.microsoft.com/office/drawing/2008/diagram">
+      <dsp:dataModelExt xmlns:dsp="http://schemas.microsoft.com/office/drawing/2008/diagram" relId="rId6" minVer="http://schemas.openxmlformats.org/drawingml/2006/diagram"/>
+    </a:ext>
+  </dgm:extLst>
+</dgm:dataModel>
+</file>
+
+<file path=ppt/diagrams/data7.xml><?xml version="1.0" encoding="utf-8"?>
+<dgm:dataModel xmlns:dgm="http://schemas.openxmlformats.org/drawingml/2006/diagram" xmlns:a="http://schemas.openxmlformats.org/drawingml/2006/main">
+  <dgm:ptLst>
+    <dgm:pt modelId="{73BD5CC5-013C-4C4C-AEBE-FBF2B5B3CD8C}" type="doc">
+      <dgm:prSet loTypeId="urn:microsoft.com/office/officeart/2005/8/layout/hierarchy1" loCatId="hierarchy" qsTypeId="urn:microsoft.com/office/officeart/2005/8/quickstyle/simple1" qsCatId="simple" csTypeId="urn:microsoft.com/office/officeart/2005/8/colors/colorful2" csCatId="colorful"/>
+      <dgm:spPr/>
+      <dgm:t>
+        <a:bodyPr/>
+        <a:lstStyle/>
+        <a:p>
+          <a:endParaRPr lang="en-US"/>
+        </a:p>
+      </dgm:t>
+    </dgm:pt>
+    <dgm:pt modelId="{AE893863-9C1C-4141-97A0-1DA9AD4DB6E3}">
+      <dgm:prSet/>
+      <dgm:spPr/>
+      <dgm:t>
+        <a:bodyPr/>
+        <a:lstStyle/>
+        <a:p>
+          <a:r>
+            <a:rPr lang="en-US"/>
+            <a:t>sealed: </a:t>
+          </a:r>
+          <a:r>
+            <a:rPr lang="ko-KR"/>
+            <a:t>상속 받을 수 없는 </a:t>
+          </a:r>
+          <a:r>
+            <a:rPr lang="en-US"/>
+            <a:t>class</a:t>
+          </a:r>
+        </a:p>
+      </dgm:t>
+    </dgm:pt>
+    <dgm:pt modelId="{C11811AF-AEC1-4A3B-8442-6F49776AE415}" type="parTrans" cxnId="{3F6CB5EE-5693-4036-AA22-71B55DCE91A0}">
+      <dgm:prSet/>
+      <dgm:spPr/>
+      <dgm:t>
+        <a:bodyPr/>
+        <a:lstStyle/>
+        <a:p>
+          <a:endParaRPr lang="en-US"/>
+        </a:p>
+      </dgm:t>
+    </dgm:pt>
+    <dgm:pt modelId="{0E7E04AA-27DC-418F-BCED-240B942DA5BA}" type="sibTrans" cxnId="{3F6CB5EE-5693-4036-AA22-71B55DCE91A0}">
+      <dgm:prSet/>
+      <dgm:spPr/>
+      <dgm:t>
+        <a:bodyPr/>
+        <a:lstStyle/>
+        <a:p>
+          <a:endParaRPr lang="en-US"/>
+        </a:p>
+      </dgm:t>
+    </dgm:pt>
+    <dgm:pt modelId="{E4F04650-F6E3-4323-B877-6E6BAB6CA365}">
+      <dgm:prSet/>
+      <dgm:spPr/>
+      <dgm:t>
+        <a:bodyPr/>
+        <a:lstStyle/>
+        <a:p>
+          <a:r>
+            <a:rPr lang="en-US"/>
+            <a:t>partial:</a:t>
+          </a:r>
+          <a:r>
+            <a:rPr lang="ko-KR"/>
+            <a:t> </a:t>
+          </a:r>
+          <a:r>
+            <a:rPr lang="en-US"/>
+            <a:t>class</a:t>
+          </a:r>
+          <a:r>
+            <a:rPr lang="ko-KR"/>
+            <a:t> 정의가 여러 파일에 분리됨</a:t>
+          </a:r>
+          <a:r>
+            <a:rPr lang="en-US"/>
+            <a:t>; namespace</a:t>
+          </a:r>
+          <a:r>
+            <a:rPr lang="ko-KR"/>
+            <a:t>는 같아야 함</a:t>
+          </a:r>
+          <a:endParaRPr lang="en-US"/>
+        </a:p>
+      </dgm:t>
+    </dgm:pt>
+    <dgm:pt modelId="{0C45956C-64C2-486B-B664-82C030056C26}" type="parTrans" cxnId="{7324E053-66A7-463B-BB32-C6AF94D94199}">
+      <dgm:prSet/>
+      <dgm:spPr/>
+      <dgm:t>
+        <a:bodyPr/>
+        <a:lstStyle/>
+        <a:p>
+          <a:endParaRPr lang="en-US"/>
+        </a:p>
+      </dgm:t>
+    </dgm:pt>
+    <dgm:pt modelId="{CBEB5C5D-BAD9-4E9B-8090-0C7B732FDBDC}" type="sibTrans" cxnId="{7324E053-66A7-463B-BB32-C6AF94D94199}">
+      <dgm:prSet/>
+      <dgm:spPr/>
+      <dgm:t>
+        <a:bodyPr/>
+        <a:lstStyle/>
+        <a:p>
+          <a:endParaRPr lang="en-US"/>
+        </a:p>
+      </dgm:t>
+    </dgm:pt>
+    <dgm:pt modelId="{0D00A2D7-79A7-4D9A-8EE7-16F11B8FD793}" type="pres">
+      <dgm:prSet presAssocID="{73BD5CC5-013C-4C4C-AEBE-FBF2B5B3CD8C}" presName="hierChild1" presStyleCnt="0">
+        <dgm:presLayoutVars>
+          <dgm:chPref val="1"/>
+          <dgm:dir/>
+          <dgm:animOne val="branch"/>
+          <dgm:animLvl val="lvl"/>
+          <dgm:resizeHandles/>
+        </dgm:presLayoutVars>
+      </dgm:prSet>
+      <dgm:spPr/>
+    </dgm:pt>
+    <dgm:pt modelId="{CC5001F7-FD50-42AE-93CD-009978C11314}" type="pres">
+      <dgm:prSet presAssocID="{AE893863-9C1C-4141-97A0-1DA9AD4DB6E3}" presName="hierRoot1" presStyleCnt="0"/>
+      <dgm:spPr/>
+    </dgm:pt>
+    <dgm:pt modelId="{199C6AF8-E0B0-4F6F-A613-763B8B6CA62F}" type="pres">
+      <dgm:prSet presAssocID="{AE893863-9C1C-4141-97A0-1DA9AD4DB6E3}" presName="composite" presStyleCnt="0"/>
+      <dgm:spPr/>
+    </dgm:pt>
+    <dgm:pt modelId="{665BDDEB-6F27-497C-93E8-8B00AFF8E887}" type="pres">
+      <dgm:prSet presAssocID="{AE893863-9C1C-4141-97A0-1DA9AD4DB6E3}" presName="background" presStyleLbl="node0" presStyleIdx="0" presStyleCnt="2"/>
+      <dgm:spPr/>
+    </dgm:pt>
+    <dgm:pt modelId="{958E14A7-BC0C-4F5C-B45E-D6C34E696801}" type="pres">
+      <dgm:prSet presAssocID="{AE893863-9C1C-4141-97A0-1DA9AD4DB6E3}" presName="text" presStyleLbl="fgAcc0" presStyleIdx="0" presStyleCnt="2">
+        <dgm:presLayoutVars>
+          <dgm:chPref val="3"/>
+        </dgm:presLayoutVars>
+      </dgm:prSet>
+      <dgm:spPr/>
+    </dgm:pt>
+    <dgm:pt modelId="{4BEA3BB9-8EC5-4E78-9BA2-95AFBC396FE3}" type="pres">
+      <dgm:prSet presAssocID="{AE893863-9C1C-4141-97A0-1DA9AD4DB6E3}" presName="hierChild2" presStyleCnt="0"/>
+      <dgm:spPr/>
+    </dgm:pt>
+    <dgm:pt modelId="{7810F94E-E36B-4FC1-8098-83FD3CD0F61B}" type="pres">
+      <dgm:prSet presAssocID="{E4F04650-F6E3-4323-B877-6E6BAB6CA365}" presName="hierRoot1" presStyleCnt="0"/>
+      <dgm:spPr/>
+    </dgm:pt>
+    <dgm:pt modelId="{EF6D4358-E2F3-4D43-9BB3-87FA4E1E9902}" type="pres">
+      <dgm:prSet presAssocID="{E4F04650-F6E3-4323-B877-6E6BAB6CA365}" presName="composite" presStyleCnt="0"/>
+      <dgm:spPr/>
+    </dgm:pt>
+    <dgm:pt modelId="{9717371E-2EDA-4364-A2DC-6FAA83AC32AA}" type="pres">
+      <dgm:prSet presAssocID="{E4F04650-F6E3-4323-B877-6E6BAB6CA365}" presName="background" presStyleLbl="node0" presStyleIdx="1" presStyleCnt="2"/>
+      <dgm:spPr/>
+    </dgm:pt>
+    <dgm:pt modelId="{2EE0088A-CEE4-44BD-9871-937B14FCF0AB}" type="pres">
+      <dgm:prSet presAssocID="{E4F04650-F6E3-4323-B877-6E6BAB6CA365}" presName="text" presStyleLbl="fgAcc0" presStyleIdx="1" presStyleCnt="2">
+        <dgm:presLayoutVars>
+          <dgm:chPref val="3"/>
+        </dgm:presLayoutVars>
+      </dgm:prSet>
+      <dgm:spPr/>
+    </dgm:pt>
+    <dgm:pt modelId="{DEDC047B-6A3B-4A57-BFB4-FE8D78945A9D}" type="pres">
+      <dgm:prSet presAssocID="{E4F04650-F6E3-4323-B877-6E6BAB6CA365}" presName="hierChild2" presStyleCnt="0"/>
+      <dgm:spPr/>
+    </dgm:pt>
+  </dgm:ptLst>
+  <dgm:cxnLst>
+    <dgm:cxn modelId="{E074AA46-0A16-4559-9ECC-15B93DDAD02C}" type="presOf" srcId="{E4F04650-F6E3-4323-B877-6E6BAB6CA365}" destId="{2EE0088A-CEE4-44BD-9871-937B14FCF0AB}" srcOrd="0" destOrd="0" presId="urn:microsoft.com/office/officeart/2005/8/layout/hierarchy1"/>
+    <dgm:cxn modelId="{7324E053-66A7-463B-BB32-C6AF94D94199}" srcId="{73BD5CC5-013C-4C4C-AEBE-FBF2B5B3CD8C}" destId="{E4F04650-F6E3-4323-B877-6E6BAB6CA365}" srcOrd="1" destOrd="0" parTransId="{0C45956C-64C2-486B-B664-82C030056C26}" sibTransId="{CBEB5C5D-BAD9-4E9B-8090-0C7B732FDBDC}"/>
+    <dgm:cxn modelId="{E644F2AD-CA93-4931-AA73-FC56177638B0}" type="presOf" srcId="{AE893863-9C1C-4141-97A0-1DA9AD4DB6E3}" destId="{958E14A7-BC0C-4F5C-B45E-D6C34E696801}" srcOrd="0" destOrd="0" presId="urn:microsoft.com/office/officeart/2005/8/layout/hierarchy1"/>
+    <dgm:cxn modelId="{BDC064BC-2E07-426F-9BAB-77C8F05B3357}" type="presOf" srcId="{73BD5CC5-013C-4C4C-AEBE-FBF2B5B3CD8C}" destId="{0D00A2D7-79A7-4D9A-8EE7-16F11B8FD793}" srcOrd="0" destOrd="0" presId="urn:microsoft.com/office/officeart/2005/8/layout/hierarchy1"/>
+    <dgm:cxn modelId="{3F6CB5EE-5693-4036-AA22-71B55DCE91A0}" srcId="{73BD5CC5-013C-4C4C-AEBE-FBF2B5B3CD8C}" destId="{AE893863-9C1C-4141-97A0-1DA9AD4DB6E3}" srcOrd="0" destOrd="0" parTransId="{C11811AF-AEC1-4A3B-8442-6F49776AE415}" sibTransId="{0E7E04AA-27DC-418F-BCED-240B942DA5BA}"/>
+    <dgm:cxn modelId="{509EED92-3206-447B-AF29-6CACCE2680AB}" type="presParOf" srcId="{0D00A2D7-79A7-4D9A-8EE7-16F11B8FD793}" destId="{CC5001F7-FD50-42AE-93CD-009978C11314}" srcOrd="0" destOrd="0" presId="urn:microsoft.com/office/officeart/2005/8/layout/hierarchy1"/>
+    <dgm:cxn modelId="{5EFA789D-23A5-4D5C-8B65-E95D100E620D}" type="presParOf" srcId="{CC5001F7-FD50-42AE-93CD-009978C11314}" destId="{199C6AF8-E0B0-4F6F-A613-763B8B6CA62F}" srcOrd="0" destOrd="0" presId="urn:microsoft.com/office/officeart/2005/8/layout/hierarchy1"/>
+    <dgm:cxn modelId="{2A7A79A2-092A-478A-9B89-107C96E66649}" type="presParOf" srcId="{199C6AF8-E0B0-4F6F-A613-763B8B6CA62F}" destId="{665BDDEB-6F27-497C-93E8-8B00AFF8E887}" srcOrd="0" destOrd="0" presId="urn:microsoft.com/office/officeart/2005/8/layout/hierarchy1"/>
+    <dgm:cxn modelId="{15BB01CF-20C7-410F-984D-E849443C6245}" type="presParOf" srcId="{199C6AF8-E0B0-4F6F-A613-763B8B6CA62F}" destId="{958E14A7-BC0C-4F5C-B45E-D6C34E696801}" srcOrd="1" destOrd="0" presId="urn:microsoft.com/office/officeart/2005/8/layout/hierarchy1"/>
+    <dgm:cxn modelId="{0CCCE8BA-662B-48FB-BFB2-5C5E8AAE1225}" type="presParOf" srcId="{CC5001F7-FD50-42AE-93CD-009978C11314}" destId="{4BEA3BB9-8EC5-4E78-9BA2-95AFBC396FE3}" srcOrd="1" destOrd="0" presId="urn:microsoft.com/office/officeart/2005/8/layout/hierarchy1"/>
+    <dgm:cxn modelId="{0C9D11E9-67BF-40C5-A5A4-A88BB79AE35F}" type="presParOf" srcId="{0D00A2D7-79A7-4D9A-8EE7-16F11B8FD793}" destId="{7810F94E-E36B-4FC1-8098-83FD3CD0F61B}" srcOrd="1" destOrd="0" presId="urn:microsoft.com/office/officeart/2005/8/layout/hierarchy1"/>
+    <dgm:cxn modelId="{5A28A4B3-4A9C-4F65-9AC3-0AA0222A58AA}" type="presParOf" srcId="{7810F94E-E36B-4FC1-8098-83FD3CD0F61B}" destId="{EF6D4358-E2F3-4D43-9BB3-87FA4E1E9902}" srcOrd="0" destOrd="0" presId="urn:microsoft.com/office/officeart/2005/8/layout/hierarchy1"/>
+    <dgm:cxn modelId="{41ADF53E-564C-4D7E-BFB6-49EC04C6D126}" type="presParOf" srcId="{EF6D4358-E2F3-4D43-9BB3-87FA4E1E9902}" destId="{9717371E-2EDA-4364-A2DC-6FAA83AC32AA}" srcOrd="0" destOrd="0" presId="urn:microsoft.com/office/officeart/2005/8/layout/hierarchy1"/>
+    <dgm:cxn modelId="{1F67326B-31F5-4A2C-8084-C4F49D2C6D26}" type="presParOf" srcId="{EF6D4358-E2F3-4D43-9BB3-87FA4E1E9902}" destId="{2EE0088A-CEE4-44BD-9871-937B14FCF0AB}" srcOrd="1" destOrd="0" presId="urn:microsoft.com/office/officeart/2005/8/layout/hierarchy1"/>
+    <dgm:cxn modelId="{5A9D5E89-8A91-4505-82F8-2E3C23A7C118}" type="presParOf" srcId="{7810F94E-E36B-4FC1-8098-83FD3CD0F61B}" destId="{DEDC047B-6A3B-4A57-BFB4-FE8D78945A9D}" srcOrd="1" destOrd="0" presId="urn:microsoft.com/office/officeart/2005/8/layout/hierarchy1"/>
   </dgm:cxnLst>
   <dgm:bg/>
   <dgm:whole/>
@@ -8003,6 +10310,744 @@
 </dsp:drawing>
 </file>
 
+<file path=ppt/diagrams/drawing6.xml><?xml version="1.0" encoding="utf-8"?>
+<dsp:drawing xmlns:dgm="http://schemas.openxmlformats.org/drawingml/2006/diagram" xmlns:dsp="http://schemas.microsoft.com/office/drawing/2008/diagram" xmlns:a="http://schemas.openxmlformats.org/drawingml/2006/main">
+  <dsp:spTree>
+    <dsp:nvGrpSpPr>
+      <dsp:cNvPr id="0" name=""/>
+      <dsp:cNvGrpSpPr/>
+    </dsp:nvGrpSpPr>
+    <dsp:grpSpPr/>
+    <dsp:sp modelId="{0495717E-A47B-463A-AA08-8226041569A1}">
+      <dsp:nvSpPr>
+        <dsp:cNvPr id="0" name=""/>
+        <dsp:cNvSpPr/>
+      </dsp:nvSpPr>
+      <dsp:spPr>
+        <a:xfrm rot="5400000">
+          <a:off x="-446660" y="448491"/>
+          <a:ext cx="2977737" cy="2084416"/>
+        </a:xfrm>
+        <a:prstGeom prst="chevron">
+          <a:avLst/>
+        </a:prstGeom>
+        <a:solidFill>
+          <a:schemeClr val="accent2">
+            <a:hueOff val="0"/>
+            <a:satOff val="0"/>
+            <a:lumOff val="0"/>
+            <a:alphaOff val="0"/>
+          </a:schemeClr>
+        </a:solidFill>
+        <a:ln w="19050" cap="flat" cmpd="sng" algn="ctr">
+          <a:solidFill>
+            <a:schemeClr val="accent2">
+              <a:hueOff val="0"/>
+              <a:satOff val="0"/>
+              <a:lumOff val="0"/>
+              <a:alphaOff val="0"/>
+            </a:schemeClr>
+          </a:solidFill>
+          <a:prstDash val="solid"/>
+          <a:miter lim="800000"/>
+        </a:ln>
+        <a:effectLst/>
+      </dsp:spPr>
+      <dsp:style>
+        <a:lnRef idx="2">
+          <a:scrgbClr r="0" g="0" b="0"/>
+        </a:lnRef>
+        <a:fillRef idx="1">
+          <a:scrgbClr r="0" g="0" b="0"/>
+        </a:fillRef>
+        <a:effectRef idx="0">
+          <a:scrgbClr r="0" g="0" b="0"/>
+        </a:effectRef>
+        <a:fontRef idx="minor">
+          <a:schemeClr val="lt1"/>
+        </a:fontRef>
+      </dsp:style>
+      <dsp:txBody>
+        <a:bodyPr spcFirstLastPara="0" vert="horz" wrap="square" lIns="8255" tIns="8255" rIns="8255" bIns="8255" numCol="1" spcCol="1270" anchor="ctr" anchorCtr="0">
+          <a:noAutofit/>
+        </a:bodyPr>
+        <a:lstStyle/>
+        <a:p>
+          <a:pPr marL="0" lvl="0" indent="0" algn="ctr" defTabSz="577850">
+            <a:lnSpc>
+              <a:spcPct val="90000"/>
+            </a:lnSpc>
+            <a:spcBef>
+              <a:spcPct val="0"/>
+            </a:spcBef>
+            <a:spcAft>
+              <a:spcPct val="35000"/>
+            </a:spcAft>
+            <a:buNone/>
+          </a:pPr>
+          <a:r>
+            <a:rPr lang="ko-KR" sz="1300" kern="1200"/>
+            <a:t>상속 받은 </a:t>
+          </a:r>
+          <a:r>
+            <a:rPr lang="en-US" sz="1300" kern="1200"/>
+            <a:t>class</a:t>
+          </a:r>
+          <a:r>
+            <a:rPr lang="ko-KR" sz="1300" kern="1200"/>
+            <a:t>에서 특정 메소드를 반드시 구현하도록 강제하는 </a:t>
+          </a:r>
+          <a:r>
+            <a:rPr lang="en-US" sz="1300" kern="1200"/>
+            <a:t>class</a:t>
+          </a:r>
+        </a:p>
+      </dsp:txBody>
+      <dsp:txXfrm rot="-5400000">
+        <a:off x="1" y="1044038"/>
+        <a:ext cx="2084416" cy="893321"/>
+      </dsp:txXfrm>
+    </dsp:sp>
+    <dsp:sp modelId="{800A16A8-BD14-422D-A55A-A33196A8B5DF}">
+      <dsp:nvSpPr>
+        <dsp:cNvPr id="0" name=""/>
+        <dsp:cNvSpPr/>
+      </dsp:nvSpPr>
+      <dsp:spPr>
+        <a:xfrm rot="5400000">
+          <a:off x="2980007" y="-893760"/>
+          <a:ext cx="1935529" cy="3726711"/>
+        </a:xfrm>
+        <a:prstGeom prst="round2SameRect">
+          <a:avLst/>
+        </a:prstGeom>
+        <a:solidFill>
+          <a:schemeClr val="lt1">
+            <a:alpha val="90000"/>
+            <a:hueOff val="0"/>
+            <a:satOff val="0"/>
+            <a:lumOff val="0"/>
+            <a:alphaOff val="0"/>
+          </a:schemeClr>
+        </a:solidFill>
+        <a:ln w="19050" cap="flat" cmpd="sng" algn="ctr">
+          <a:solidFill>
+            <a:schemeClr val="accent2">
+              <a:hueOff val="0"/>
+              <a:satOff val="0"/>
+              <a:lumOff val="0"/>
+              <a:alphaOff val="0"/>
+            </a:schemeClr>
+          </a:solidFill>
+          <a:prstDash val="solid"/>
+          <a:miter lim="800000"/>
+        </a:ln>
+        <a:effectLst/>
+      </dsp:spPr>
+      <dsp:style>
+        <a:lnRef idx="2">
+          <a:scrgbClr r="0" g="0" b="0"/>
+        </a:lnRef>
+        <a:fillRef idx="1">
+          <a:scrgbClr r="0" g="0" b="0"/>
+        </a:fillRef>
+        <a:effectRef idx="0">
+          <a:scrgbClr r="0" g="0" b="0"/>
+        </a:effectRef>
+        <a:fontRef idx="minor"/>
+      </dsp:style>
+      <dsp:txBody>
+        <a:bodyPr spcFirstLastPara="0" vert="horz" wrap="square" lIns="106680" tIns="9525" rIns="9525" bIns="9525" numCol="1" spcCol="1270" anchor="ctr" anchorCtr="0">
+          <a:noAutofit/>
+        </a:bodyPr>
+        <a:lstStyle/>
+        <a:p>
+          <a:pPr marL="114300" lvl="1" indent="-114300" algn="l" defTabSz="666750">
+            <a:lnSpc>
+              <a:spcPct val="90000"/>
+            </a:lnSpc>
+            <a:spcBef>
+              <a:spcPct val="0"/>
+            </a:spcBef>
+            <a:spcAft>
+              <a:spcPct val="15000"/>
+            </a:spcAft>
+            <a:buChar char="•"/>
+          </a:pPr>
+          <a:r>
+            <a:rPr lang="ko-KR" sz="1500" kern="1200"/>
+            <a:t>부모 </a:t>
+          </a:r>
+          <a:r>
+            <a:rPr lang="en-US" sz="1500" kern="1200"/>
+            <a:t>class: </a:t>
+          </a:r>
+          <a:r>
+            <a:rPr lang="ko-KR" sz="1500" kern="1200"/>
+            <a:t>강제할 메소드에 </a:t>
+          </a:r>
+          <a:r>
+            <a:rPr lang="en-US" sz="1500" kern="1200"/>
+            <a:t>abstract</a:t>
+          </a:r>
+          <a:r>
+            <a:rPr lang="ko-KR" sz="1500" kern="1200"/>
+            <a:t>로 표시</a:t>
+          </a:r>
+          <a:endParaRPr lang="en-US" sz="1500" kern="1200"/>
+        </a:p>
+        <a:p>
+          <a:pPr marL="114300" lvl="1" indent="-114300" algn="l" defTabSz="666750">
+            <a:lnSpc>
+              <a:spcPct val="90000"/>
+            </a:lnSpc>
+            <a:spcBef>
+              <a:spcPct val="0"/>
+            </a:spcBef>
+            <a:spcAft>
+              <a:spcPct val="15000"/>
+            </a:spcAft>
+            <a:buChar char="•"/>
+          </a:pPr>
+          <a:r>
+            <a:rPr lang="ko-KR" sz="1500" kern="1200"/>
+            <a:t>자식 </a:t>
+          </a:r>
+          <a:r>
+            <a:rPr lang="en-US" sz="1500" kern="1200"/>
+            <a:t>class: </a:t>
+          </a:r>
+          <a:r>
+            <a:rPr lang="ko-KR" sz="1500" kern="1200"/>
+            <a:t>구현할 메소드에 </a:t>
+          </a:r>
+          <a:r>
+            <a:rPr lang="en-US" sz="1500" kern="1200"/>
+            <a:t>override</a:t>
+          </a:r>
+          <a:r>
+            <a:rPr lang="ko-KR" sz="1500" kern="1200"/>
+            <a:t>로 표시</a:t>
+          </a:r>
+          <a:r>
+            <a:rPr lang="en-US" sz="1500" kern="1200"/>
+            <a:t>; </a:t>
+          </a:r>
+          <a:r>
+            <a:rPr lang="ko-KR" sz="1500" kern="1200"/>
+            <a:t>자식의 자식으로 구현을 넘길 때는 </a:t>
+          </a:r>
+          <a:r>
+            <a:rPr lang="en-US" sz="1500" kern="1200"/>
+            <a:t>abstract</a:t>
+          </a:r>
+          <a:r>
+            <a:rPr lang="ko-KR" sz="1500" kern="1200"/>
+            <a:t>를 다시 표시</a:t>
+          </a:r>
+          <a:endParaRPr lang="en-US" sz="1500" kern="1200"/>
+        </a:p>
+      </dsp:txBody>
+      <dsp:txXfrm rot="-5400000">
+        <a:off x="2084417" y="96315"/>
+        <a:ext cx="3632226" cy="1746559"/>
+      </dsp:txXfrm>
+    </dsp:sp>
+    <dsp:sp modelId="{3BF40106-E5F9-428D-BE1E-24403AEA8B68}">
+      <dsp:nvSpPr>
+        <dsp:cNvPr id="0" name=""/>
+        <dsp:cNvSpPr/>
+      </dsp:nvSpPr>
+      <dsp:spPr>
+        <a:xfrm rot="5400000">
+          <a:off x="-446660" y="3145311"/>
+          <a:ext cx="2977737" cy="2084416"/>
+        </a:xfrm>
+        <a:prstGeom prst="chevron">
+          <a:avLst/>
+        </a:prstGeom>
+        <a:solidFill>
+          <a:schemeClr val="accent3">
+            <a:hueOff val="0"/>
+            <a:satOff val="0"/>
+            <a:lumOff val="0"/>
+            <a:alphaOff val="0"/>
+          </a:schemeClr>
+        </a:solidFill>
+        <a:ln w="19050" cap="flat" cmpd="sng" algn="ctr">
+          <a:solidFill>
+            <a:schemeClr val="accent3">
+              <a:hueOff val="0"/>
+              <a:satOff val="0"/>
+              <a:lumOff val="0"/>
+              <a:alphaOff val="0"/>
+            </a:schemeClr>
+          </a:solidFill>
+          <a:prstDash val="solid"/>
+          <a:miter lim="800000"/>
+        </a:ln>
+        <a:effectLst/>
+      </dsp:spPr>
+      <dsp:style>
+        <a:lnRef idx="2">
+          <a:scrgbClr r="0" g="0" b="0"/>
+        </a:lnRef>
+        <a:fillRef idx="1">
+          <a:scrgbClr r="0" g="0" b="0"/>
+        </a:fillRef>
+        <a:effectRef idx="0">
+          <a:scrgbClr r="0" g="0" b="0"/>
+        </a:effectRef>
+        <a:fontRef idx="minor">
+          <a:schemeClr val="lt1"/>
+        </a:fontRef>
+      </dsp:style>
+      <dsp:txBody>
+        <a:bodyPr spcFirstLastPara="0" vert="horz" wrap="square" lIns="8255" tIns="8255" rIns="8255" bIns="8255" numCol="1" spcCol="1270" anchor="ctr" anchorCtr="0">
+          <a:noAutofit/>
+        </a:bodyPr>
+        <a:lstStyle/>
+        <a:p>
+          <a:pPr marL="0" lvl="0" indent="0" algn="ctr" defTabSz="577850">
+            <a:lnSpc>
+              <a:spcPct val="90000"/>
+            </a:lnSpc>
+            <a:spcBef>
+              <a:spcPct val="0"/>
+            </a:spcBef>
+            <a:spcAft>
+              <a:spcPct val="35000"/>
+            </a:spcAft>
+            <a:buNone/>
+          </a:pPr>
+          <a:r>
+            <a:rPr lang="ko-KR" sz="1300" kern="1200" dirty="0"/>
+            <a:t>나머지는 일반적인 </a:t>
+          </a:r>
+          <a:r>
+            <a:rPr lang="en-US" sz="1300" kern="1200" dirty="0"/>
+            <a:t>class</a:t>
+          </a:r>
+          <a:r>
+            <a:rPr lang="ko-KR" sz="1300" kern="1200" dirty="0"/>
+            <a:t>와 동일</a:t>
+          </a:r>
+          <a:endParaRPr lang="en-US" sz="1300" kern="1200" dirty="0"/>
+        </a:p>
+      </dsp:txBody>
+      <dsp:txXfrm rot="-5400000">
+        <a:off x="1" y="3740858"/>
+        <a:ext cx="2084416" cy="893321"/>
+      </dsp:txXfrm>
+    </dsp:sp>
+    <dsp:sp modelId="{F8EB865C-B551-4257-9AB2-AFF02415CA89}">
+      <dsp:nvSpPr>
+        <dsp:cNvPr id="0" name=""/>
+        <dsp:cNvSpPr/>
+      </dsp:nvSpPr>
+      <dsp:spPr>
+        <a:xfrm rot="5400000">
+          <a:off x="2980007" y="1803059"/>
+          <a:ext cx="1935529" cy="3726711"/>
+        </a:xfrm>
+        <a:prstGeom prst="round2SameRect">
+          <a:avLst/>
+        </a:prstGeom>
+        <a:solidFill>
+          <a:schemeClr val="lt1">
+            <a:alpha val="90000"/>
+            <a:hueOff val="0"/>
+            <a:satOff val="0"/>
+            <a:lumOff val="0"/>
+            <a:alphaOff val="0"/>
+          </a:schemeClr>
+        </a:solidFill>
+        <a:ln w="19050" cap="flat" cmpd="sng" algn="ctr">
+          <a:solidFill>
+            <a:schemeClr val="accent3">
+              <a:hueOff val="0"/>
+              <a:satOff val="0"/>
+              <a:lumOff val="0"/>
+              <a:alphaOff val="0"/>
+            </a:schemeClr>
+          </a:solidFill>
+          <a:prstDash val="solid"/>
+          <a:miter lim="800000"/>
+        </a:ln>
+        <a:effectLst/>
+      </dsp:spPr>
+      <dsp:style>
+        <a:lnRef idx="2">
+          <a:scrgbClr r="0" g="0" b="0"/>
+        </a:lnRef>
+        <a:fillRef idx="1">
+          <a:scrgbClr r="0" g="0" b="0"/>
+        </a:fillRef>
+        <a:effectRef idx="0">
+          <a:scrgbClr r="0" g="0" b="0"/>
+        </a:effectRef>
+        <a:fontRef idx="minor"/>
+      </dsp:style>
+      <dsp:txBody>
+        <a:bodyPr spcFirstLastPara="0" vert="horz" wrap="square" lIns="106680" tIns="9525" rIns="9525" bIns="9525" numCol="1" spcCol="1270" anchor="ctr" anchorCtr="0">
+          <a:noAutofit/>
+        </a:bodyPr>
+        <a:lstStyle/>
+        <a:p>
+          <a:pPr marL="114300" lvl="1" indent="-114300" algn="l" defTabSz="666750">
+            <a:lnSpc>
+              <a:spcPct val="90000"/>
+            </a:lnSpc>
+            <a:spcBef>
+              <a:spcPct val="0"/>
+            </a:spcBef>
+            <a:spcAft>
+              <a:spcPct val="15000"/>
+            </a:spcAft>
+            <a:buChar char="•"/>
+          </a:pPr>
+          <a:r>
+            <a:rPr lang="ko-KR" altLang="en-US" sz="1500" kern="1200" dirty="0"/>
+            <a:t>일반 메소드와 필드를 모두 가질 수 있음</a:t>
+          </a:r>
+          <a:endParaRPr lang="en-US" sz="1500" kern="1200" dirty="0"/>
+        </a:p>
+        <a:p>
+          <a:pPr marL="114300" lvl="1" indent="-114300" algn="l" defTabSz="666750">
+            <a:lnSpc>
+              <a:spcPct val="90000"/>
+            </a:lnSpc>
+            <a:spcBef>
+              <a:spcPct val="0"/>
+            </a:spcBef>
+            <a:spcAft>
+              <a:spcPct val="15000"/>
+            </a:spcAft>
+            <a:buChar char="•"/>
+          </a:pPr>
+          <a:r>
+            <a:rPr lang="en-US" sz="1500" kern="1200" dirty="0"/>
+            <a:t>Abstract class</a:t>
+          </a:r>
+          <a:r>
+            <a:rPr lang="ko-KR" altLang="en-US" sz="1500" kern="1200" dirty="0"/>
+            <a:t>는 인스턴스를 가질 수 없음</a:t>
+          </a:r>
+          <a:endParaRPr lang="en-US" sz="1500" kern="1200" dirty="0"/>
+        </a:p>
+      </dsp:txBody>
+      <dsp:txXfrm rot="-5400000">
+        <a:off x="2084417" y="2793135"/>
+        <a:ext cx="3632226" cy="1746559"/>
+      </dsp:txXfrm>
+    </dsp:sp>
+  </dsp:spTree>
+</dsp:drawing>
+</file>
+
+<file path=ppt/diagrams/drawing7.xml><?xml version="1.0" encoding="utf-8"?>
+<dsp:drawing xmlns:dgm="http://schemas.openxmlformats.org/drawingml/2006/diagram" xmlns:dsp="http://schemas.microsoft.com/office/drawing/2008/diagram" xmlns:a="http://schemas.openxmlformats.org/drawingml/2006/main">
+  <dsp:spTree>
+    <dsp:nvGrpSpPr>
+      <dsp:cNvPr id="0" name=""/>
+      <dsp:cNvGrpSpPr/>
+    </dsp:nvGrpSpPr>
+    <dsp:grpSpPr/>
+    <dsp:sp modelId="{665BDDEB-6F27-497C-93E8-8B00AFF8E887}">
+      <dsp:nvSpPr>
+        <dsp:cNvPr id="0" name=""/>
+        <dsp:cNvSpPr/>
+      </dsp:nvSpPr>
+      <dsp:spPr>
+        <a:xfrm>
+          <a:off x="1333" y="110983"/>
+          <a:ext cx="4682211" cy="2973204"/>
+        </a:xfrm>
+        <a:prstGeom prst="roundRect">
+          <a:avLst>
+            <a:gd name="adj" fmla="val 10000"/>
+          </a:avLst>
+        </a:prstGeom>
+        <a:solidFill>
+          <a:schemeClr val="accent1">
+            <a:hueOff val="0"/>
+            <a:satOff val="0"/>
+            <a:lumOff val="0"/>
+            <a:alphaOff val="0"/>
+          </a:schemeClr>
+        </a:solidFill>
+        <a:ln w="19050" cap="flat" cmpd="sng" algn="ctr">
+          <a:solidFill>
+            <a:schemeClr val="lt1">
+              <a:hueOff val="0"/>
+              <a:satOff val="0"/>
+              <a:lumOff val="0"/>
+              <a:alphaOff val="0"/>
+            </a:schemeClr>
+          </a:solidFill>
+          <a:prstDash val="solid"/>
+          <a:miter lim="800000"/>
+        </a:ln>
+        <a:effectLst/>
+      </dsp:spPr>
+      <dsp:style>
+        <a:lnRef idx="2">
+          <a:scrgbClr r="0" g="0" b="0"/>
+        </a:lnRef>
+        <a:fillRef idx="1">
+          <a:scrgbClr r="0" g="0" b="0"/>
+        </a:fillRef>
+        <a:effectRef idx="0">
+          <a:scrgbClr r="0" g="0" b="0"/>
+        </a:effectRef>
+        <a:fontRef idx="minor">
+          <a:schemeClr val="lt1"/>
+        </a:fontRef>
+      </dsp:style>
+    </dsp:sp>
+    <dsp:sp modelId="{958E14A7-BC0C-4F5C-B45E-D6C34E696801}">
+      <dsp:nvSpPr>
+        <dsp:cNvPr id="0" name=""/>
+        <dsp:cNvSpPr/>
+      </dsp:nvSpPr>
+      <dsp:spPr>
+        <a:xfrm>
+          <a:off x="521579" y="605216"/>
+          <a:ext cx="4682211" cy="2973204"/>
+        </a:xfrm>
+        <a:prstGeom prst="roundRect">
+          <a:avLst>
+            <a:gd name="adj" fmla="val 10000"/>
+          </a:avLst>
+        </a:prstGeom>
+        <a:solidFill>
+          <a:schemeClr val="lt1">
+            <a:alpha val="90000"/>
+            <a:hueOff val="0"/>
+            <a:satOff val="0"/>
+            <a:lumOff val="0"/>
+            <a:alphaOff val="0"/>
+          </a:schemeClr>
+        </a:solidFill>
+        <a:ln w="19050" cap="flat" cmpd="sng" algn="ctr">
+          <a:solidFill>
+            <a:schemeClr val="accent1">
+              <a:hueOff val="0"/>
+              <a:satOff val="0"/>
+              <a:lumOff val="0"/>
+              <a:alphaOff val="0"/>
+            </a:schemeClr>
+          </a:solidFill>
+          <a:prstDash val="solid"/>
+          <a:miter lim="800000"/>
+        </a:ln>
+        <a:effectLst/>
+      </dsp:spPr>
+      <dsp:style>
+        <a:lnRef idx="2">
+          <a:scrgbClr r="0" g="0" b="0"/>
+        </a:lnRef>
+        <a:fillRef idx="1">
+          <a:scrgbClr r="0" g="0" b="0"/>
+        </a:fillRef>
+        <a:effectRef idx="0">
+          <a:scrgbClr r="0" g="0" b="0"/>
+        </a:effectRef>
+        <a:fontRef idx="minor"/>
+      </dsp:style>
+      <dsp:txBody>
+        <a:bodyPr spcFirstLastPara="0" vert="horz" wrap="square" lIns="121920" tIns="121920" rIns="121920" bIns="121920" numCol="1" spcCol="1270" anchor="ctr" anchorCtr="0">
+          <a:noAutofit/>
+        </a:bodyPr>
+        <a:lstStyle/>
+        <a:p>
+          <a:pPr marL="0" lvl="0" indent="0" algn="ctr" defTabSz="1422400">
+            <a:lnSpc>
+              <a:spcPct val="90000"/>
+            </a:lnSpc>
+            <a:spcBef>
+              <a:spcPct val="0"/>
+            </a:spcBef>
+            <a:spcAft>
+              <a:spcPct val="35000"/>
+            </a:spcAft>
+            <a:buNone/>
+          </a:pPr>
+          <a:r>
+            <a:rPr lang="en-US" sz="3200" kern="1200"/>
+            <a:t>sealed: </a:t>
+          </a:r>
+          <a:r>
+            <a:rPr lang="ko-KR" sz="3200" kern="1200"/>
+            <a:t>상속 받을 수 없는 </a:t>
+          </a:r>
+          <a:r>
+            <a:rPr lang="en-US" sz="3200" kern="1200"/>
+            <a:t>class</a:t>
+          </a:r>
+        </a:p>
+      </dsp:txBody>
+      <dsp:txXfrm>
+        <a:off x="608661" y="692298"/>
+        <a:ext cx="4508047" cy="2799040"/>
+      </dsp:txXfrm>
+    </dsp:sp>
+    <dsp:sp modelId="{9717371E-2EDA-4364-A2DC-6FAA83AC32AA}">
+      <dsp:nvSpPr>
+        <dsp:cNvPr id="0" name=""/>
+        <dsp:cNvSpPr/>
+      </dsp:nvSpPr>
+      <dsp:spPr>
+        <a:xfrm>
+          <a:off x="5724037" y="110983"/>
+          <a:ext cx="4682211" cy="2973204"/>
+        </a:xfrm>
+        <a:prstGeom prst="roundRect">
+          <a:avLst>
+            <a:gd name="adj" fmla="val 10000"/>
+          </a:avLst>
+        </a:prstGeom>
+        <a:solidFill>
+          <a:schemeClr val="accent1">
+            <a:hueOff val="0"/>
+            <a:satOff val="0"/>
+            <a:lumOff val="0"/>
+            <a:alphaOff val="0"/>
+          </a:schemeClr>
+        </a:solidFill>
+        <a:ln w="19050" cap="flat" cmpd="sng" algn="ctr">
+          <a:solidFill>
+            <a:schemeClr val="lt1">
+              <a:hueOff val="0"/>
+              <a:satOff val="0"/>
+              <a:lumOff val="0"/>
+              <a:alphaOff val="0"/>
+            </a:schemeClr>
+          </a:solidFill>
+          <a:prstDash val="solid"/>
+          <a:miter lim="800000"/>
+        </a:ln>
+        <a:effectLst/>
+      </dsp:spPr>
+      <dsp:style>
+        <a:lnRef idx="2">
+          <a:scrgbClr r="0" g="0" b="0"/>
+        </a:lnRef>
+        <a:fillRef idx="1">
+          <a:scrgbClr r="0" g="0" b="0"/>
+        </a:fillRef>
+        <a:effectRef idx="0">
+          <a:scrgbClr r="0" g="0" b="0"/>
+        </a:effectRef>
+        <a:fontRef idx="minor">
+          <a:schemeClr val="lt1"/>
+        </a:fontRef>
+      </dsp:style>
+    </dsp:sp>
+    <dsp:sp modelId="{2EE0088A-CEE4-44BD-9871-937B14FCF0AB}">
+      <dsp:nvSpPr>
+        <dsp:cNvPr id="0" name=""/>
+        <dsp:cNvSpPr/>
+      </dsp:nvSpPr>
+      <dsp:spPr>
+        <a:xfrm>
+          <a:off x="6244283" y="605216"/>
+          <a:ext cx="4682211" cy="2973204"/>
+        </a:xfrm>
+        <a:prstGeom prst="roundRect">
+          <a:avLst>
+            <a:gd name="adj" fmla="val 10000"/>
+          </a:avLst>
+        </a:prstGeom>
+        <a:solidFill>
+          <a:schemeClr val="lt1">
+            <a:alpha val="90000"/>
+            <a:hueOff val="0"/>
+            <a:satOff val="0"/>
+            <a:lumOff val="0"/>
+            <a:alphaOff val="0"/>
+          </a:schemeClr>
+        </a:solidFill>
+        <a:ln w="19050" cap="flat" cmpd="sng" algn="ctr">
+          <a:solidFill>
+            <a:schemeClr val="accent1">
+              <a:hueOff val="0"/>
+              <a:satOff val="0"/>
+              <a:lumOff val="0"/>
+              <a:alphaOff val="0"/>
+            </a:schemeClr>
+          </a:solidFill>
+          <a:prstDash val="solid"/>
+          <a:miter lim="800000"/>
+        </a:ln>
+        <a:effectLst/>
+      </dsp:spPr>
+      <dsp:style>
+        <a:lnRef idx="2">
+          <a:scrgbClr r="0" g="0" b="0"/>
+        </a:lnRef>
+        <a:fillRef idx="1">
+          <a:scrgbClr r="0" g="0" b="0"/>
+        </a:fillRef>
+        <a:effectRef idx="0">
+          <a:scrgbClr r="0" g="0" b="0"/>
+        </a:effectRef>
+        <a:fontRef idx="minor"/>
+      </dsp:style>
+      <dsp:txBody>
+        <a:bodyPr spcFirstLastPara="0" vert="horz" wrap="square" lIns="121920" tIns="121920" rIns="121920" bIns="121920" numCol="1" spcCol="1270" anchor="ctr" anchorCtr="0">
+          <a:noAutofit/>
+        </a:bodyPr>
+        <a:lstStyle/>
+        <a:p>
+          <a:pPr marL="0" lvl="0" indent="0" algn="ctr" defTabSz="1422400">
+            <a:lnSpc>
+              <a:spcPct val="90000"/>
+            </a:lnSpc>
+            <a:spcBef>
+              <a:spcPct val="0"/>
+            </a:spcBef>
+            <a:spcAft>
+              <a:spcPct val="35000"/>
+            </a:spcAft>
+            <a:buNone/>
+          </a:pPr>
+          <a:r>
+            <a:rPr lang="en-US" sz="3200" kern="1200"/>
+            <a:t>partial:</a:t>
+          </a:r>
+          <a:r>
+            <a:rPr lang="ko-KR" sz="3200" kern="1200"/>
+            <a:t> </a:t>
+          </a:r>
+          <a:r>
+            <a:rPr lang="en-US" sz="3200" kern="1200"/>
+            <a:t>class</a:t>
+          </a:r>
+          <a:r>
+            <a:rPr lang="ko-KR" sz="3200" kern="1200"/>
+            <a:t> 정의가 여러 파일에 분리됨</a:t>
+          </a:r>
+          <a:r>
+            <a:rPr lang="en-US" sz="3200" kern="1200"/>
+            <a:t>; namespace</a:t>
+          </a:r>
+          <a:r>
+            <a:rPr lang="ko-KR" sz="3200" kern="1200"/>
+            <a:t>는 같아야 함</a:t>
+          </a:r>
+          <a:endParaRPr lang="en-US" sz="3200" kern="1200"/>
+        </a:p>
+      </dsp:txBody>
+      <dsp:txXfrm>
+        <a:off x="6331365" y="692298"/>
+        <a:ext cx="4508047" cy="2799040"/>
+      </dsp:txXfrm>
+    </dsp:sp>
+  </dsp:spTree>
+</dsp:drawing>
+</file>
+
 <file path=ppt/diagrams/layout1.xml><?xml version="1.0" encoding="utf-8"?>
 <dgm:layoutDef xmlns:dgm="http://schemas.openxmlformats.org/drawingml/2006/diagram" xmlns:a="http://schemas.openxmlformats.org/drawingml/2006/main" uniqueId="urn:microsoft.com/office/officeart/2005/8/layout/vList2">
   <dgm:title val=""/>
@@ -9359,6 +12404,825 @@
 </dgm:layoutDef>
 </file>
 
+<file path=ppt/diagrams/layout6.xml><?xml version="1.0" encoding="utf-8"?>
+<dgm:layoutDef xmlns:dgm="http://schemas.openxmlformats.org/drawingml/2006/diagram" xmlns:a="http://schemas.openxmlformats.org/drawingml/2006/main" uniqueId="urn:microsoft.com/office/officeart/2005/8/layout/chevron2">
+  <dgm:title val=""/>
+  <dgm:desc val=""/>
+  <dgm:catLst>
+    <dgm:cat type="process" pri="12000"/>
+    <dgm:cat type="list" pri="16000"/>
+    <dgm:cat type="convert" pri="11000"/>
+  </dgm:catLst>
+  <dgm:sampData>
+    <dgm:dataModel>
+      <dgm:ptLst>
+        <dgm:pt modelId="0" type="doc"/>
+        <dgm:pt modelId="1">
+          <dgm:prSet phldr="1"/>
+        </dgm:pt>
+        <dgm:pt modelId="11">
+          <dgm:prSet phldr="1"/>
+        </dgm:pt>
+        <dgm:pt modelId="12">
+          <dgm:prSet phldr="1"/>
+        </dgm:pt>
+        <dgm:pt modelId="2">
+          <dgm:prSet phldr="1"/>
+        </dgm:pt>
+        <dgm:pt modelId="21">
+          <dgm:prSet phldr="1"/>
+        </dgm:pt>
+        <dgm:pt modelId="22">
+          <dgm:prSet phldr="1"/>
+        </dgm:pt>
+        <dgm:pt modelId="3">
+          <dgm:prSet phldr="1"/>
+        </dgm:pt>
+        <dgm:pt modelId="31">
+          <dgm:prSet phldr="1"/>
+        </dgm:pt>
+        <dgm:pt modelId="32">
+          <dgm:prSet phldr="1"/>
+        </dgm:pt>
+      </dgm:ptLst>
+      <dgm:cxnLst>
+        <dgm:cxn modelId="4" srcId="0" destId="1" srcOrd="0" destOrd="0"/>
+        <dgm:cxn modelId="5" srcId="0" destId="2" srcOrd="1" destOrd="0"/>
+        <dgm:cxn modelId="6" srcId="0" destId="3" srcOrd="2" destOrd="0"/>
+        <dgm:cxn modelId="13" srcId="1" destId="11" srcOrd="0" destOrd="0"/>
+        <dgm:cxn modelId="14" srcId="1" destId="12" srcOrd="1" destOrd="0"/>
+        <dgm:cxn modelId="23" srcId="2" destId="21" srcOrd="0" destOrd="0"/>
+        <dgm:cxn modelId="24" srcId="2" destId="22" srcOrd="1" destOrd="0"/>
+        <dgm:cxn modelId="33" srcId="3" destId="31" srcOrd="0" destOrd="0"/>
+        <dgm:cxn modelId="34" srcId="3" destId="32" srcOrd="1" destOrd="0"/>
+      </dgm:cxnLst>
+      <dgm:bg/>
+      <dgm:whole/>
+    </dgm:dataModel>
+  </dgm:sampData>
+  <dgm:styleData>
+    <dgm:dataModel>
+      <dgm:ptLst>
+        <dgm:pt modelId="0" type="doc"/>
+        <dgm:pt modelId="1"/>
+      </dgm:ptLst>
+      <dgm:cxnLst>
+        <dgm:cxn modelId="4" srcId="0" destId="1" srcOrd="0" destOrd="0"/>
+      </dgm:cxnLst>
+      <dgm:bg/>
+      <dgm:whole/>
+    </dgm:dataModel>
+  </dgm:styleData>
+  <dgm:clrData>
+    <dgm:dataModel>
+      <dgm:ptLst>
+        <dgm:pt modelId="0" type="doc"/>
+        <dgm:pt modelId="1"/>
+        <dgm:pt modelId="11"/>
+        <dgm:pt modelId="2"/>
+        <dgm:pt modelId="21"/>
+        <dgm:pt modelId="3"/>
+        <dgm:pt modelId="31"/>
+        <dgm:pt modelId="4"/>
+        <dgm:pt modelId="41"/>
+      </dgm:ptLst>
+      <dgm:cxnLst>
+        <dgm:cxn modelId="5" srcId="0" destId="1" srcOrd="0" destOrd="0"/>
+        <dgm:cxn modelId="6" srcId="0" destId="2" srcOrd="1" destOrd="0"/>
+        <dgm:cxn modelId="7" srcId="0" destId="3" srcOrd="2" destOrd="0"/>
+        <dgm:cxn modelId="8" srcId="0" destId="4" srcOrd="3" destOrd="0"/>
+        <dgm:cxn modelId="13" srcId="1" destId="11" srcOrd="0" destOrd="0"/>
+        <dgm:cxn modelId="23" srcId="2" destId="21" srcOrd="0" destOrd="0"/>
+        <dgm:cxn modelId="33" srcId="3" destId="31" srcOrd="0" destOrd="0"/>
+        <dgm:cxn modelId="43" srcId="4" destId="41" srcOrd="0" destOrd="0"/>
+      </dgm:cxnLst>
+      <dgm:bg/>
+      <dgm:whole/>
+    </dgm:dataModel>
+  </dgm:clrData>
+  <dgm:layoutNode name="linearFlow">
+    <dgm:varLst>
+      <dgm:dir/>
+      <dgm:animLvl val="lvl"/>
+      <dgm:resizeHandles val="exact"/>
+    </dgm:varLst>
+    <dgm:alg type="lin">
+      <dgm:param type="linDir" val="fromT"/>
+      <dgm:param type="nodeHorzAlign" val="l"/>
+    </dgm:alg>
+    <dgm:shape xmlns:r="http://schemas.openxmlformats.org/officeDocument/2006/relationships" r:blip="">
+      <dgm:adjLst/>
+    </dgm:shape>
+    <dgm:presOf/>
+    <dgm:constrLst>
+      <dgm:constr type="h" for="ch" forName="composite" refType="h"/>
+      <dgm:constr type="w" for="ch" forName="composite" refType="w"/>
+      <dgm:constr type="h" for="des" forName="parentText" op="equ"/>
+      <dgm:constr type="h" for="ch" forName="sp" val="-14.88"/>
+      <dgm:constr type="h" for="ch" forName="sp" refType="w" refFor="des" refForName="parentText" op="gte" fact="-0.3"/>
+      <dgm:constr type="primFontSz" for="des" forName="parentText" op="equ" val="65"/>
+      <dgm:constr type="primFontSz" for="des" forName="descendantText" op="equ" val="65"/>
+    </dgm:constrLst>
+    <dgm:ruleLst/>
+    <dgm:forEach name="Name0" axis="ch" ptType="node">
+      <dgm:layoutNode name="composite">
+        <dgm:alg type="composite"/>
+        <dgm:shape xmlns:r="http://schemas.openxmlformats.org/officeDocument/2006/relationships" r:blip="">
+          <dgm:adjLst/>
+        </dgm:shape>
+        <dgm:presOf/>
+        <dgm:choose name="Name1">
+          <dgm:if name="Name2" func="var" arg="dir" op="equ" val="norm">
+            <dgm:constrLst>
+              <dgm:constr type="t" for="ch" forName="parentText"/>
+              <dgm:constr type="l" for="ch" forName="parentText"/>
+              <dgm:constr type="w" for="ch" forName="parentText" refType="w" fact="0.4"/>
+              <dgm:constr type="h" for="ch" forName="parentText" refType="h"/>
+              <dgm:constr type="w" for="ch" forName="parentText" refType="w" op="lte" fact="0.5"/>
+              <dgm:constr type="w" for="ch" forName="parentText" refType="h" refFor="ch" refForName="parentText" op="lte" fact="0.7"/>
+              <dgm:constr type="h" for="ch" forName="parentText" refType="w" refFor="ch" refForName="parentText" op="lte" fact="3"/>
+              <dgm:constr type="l" for="ch" forName="descendantText" refType="w" refFor="ch" refForName="parentText"/>
+              <dgm:constr type="w" for="ch" forName="descendantText" refType="w"/>
+              <dgm:constr type="wOff" for="ch" forName="descendantText" refType="w" refFor="ch" refForName="parentText" fact="-1"/>
+              <dgm:constr type="t" for="ch" forName="descendantText"/>
+              <dgm:constr type="b" for="ch" forName="descendantText" refType="h" refFor="ch" refForName="parentText"/>
+              <dgm:constr type="bOff" for="ch" forName="descendantText" refType="w" refFor="ch" refForName="parentText" fact="-0.5"/>
+            </dgm:constrLst>
+          </dgm:if>
+          <dgm:else name="Name3">
+            <dgm:constrLst>
+              <dgm:constr type="t" for="ch" forName="parentText"/>
+              <dgm:constr type="r" for="ch" forName="parentText" refType="w"/>
+              <dgm:constr type="w" for="ch" forName="parentText" refType="w" fact="0.4"/>
+              <dgm:constr type="h" for="ch" forName="parentText" refType="h"/>
+              <dgm:constr type="w" for="ch" forName="parentText" refType="w" op="lte" fact="0.5"/>
+              <dgm:constr type="w" for="ch" forName="parentText" refType="h" refFor="ch" refForName="parentText" op="lte" fact="0.7"/>
+              <dgm:constr type="h" for="ch" forName="parentText" refType="w" refFor="ch" refForName="parentText" op="lte" fact="3"/>
+              <dgm:constr type="l" for="ch" forName="descendantText"/>
+              <dgm:constr type="w" for="ch" forName="descendantText" refType="w"/>
+              <dgm:constr type="wOff" for="ch" forName="descendantText" refType="w" refFor="ch" refForName="parentText" fact="-1"/>
+              <dgm:constr type="t" for="ch" forName="descendantText"/>
+              <dgm:constr type="b" for="ch" forName="descendantText" refType="h" refFor="ch" refForName="parentText"/>
+              <dgm:constr type="bOff" for="ch" forName="descendantText" refType="w" refFor="ch" refForName="parentText" fact="-0.5"/>
+            </dgm:constrLst>
+          </dgm:else>
+        </dgm:choose>
+        <dgm:ruleLst/>
+        <dgm:layoutNode name="parentText" styleLbl="alignNode1">
+          <dgm:varLst>
+            <dgm:chMax val="1"/>
+            <dgm:bulletEnabled val="1"/>
+          </dgm:varLst>
+          <dgm:alg type="tx"/>
+          <dgm:shape xmlns:r="http://schemas.openxmlformats.org/officeDocument/2006/relationships" rot="90" type="chevron" r:blip="">
+            <dgm:adjLst/>
+          </dgm:shape>
+          <dgm:presOf axis="self" ptType="node"/>
+          <dgm:constrLst>
+            <dgm:constr type="lMarg" refType="primFontSz" fact="0.05"/>
+            <dgm:constr type="rMarg" refType="primFontSz" fact="0.05"/>
+            <dgm:constr type="tMarg" refType="primFontSz" fact="0.05"/>
+            <dgm:constr type="bMarg" refType="primFontSz" fact="0.05"/>
+          </dgm:constrLst>
+          <dgm:ruleLst>
+            <dgm:rule type="h" val="100" fact="NaN" max="NaN"/>
+            <dgm:rule type="primFontSz" val="24" fact="NaN" max="NaN"/>
+            <dgm:rule type="h" val="110" fact="NaN" max="NaN"/>
+            <dgm:rule type="primFontSz" val="18" fact="NaN" max="NaN"/>
+            <dgm:rule type="h" val="INF" fact="NaN" max="NaN"/>
+            <dgm:rule type="primFontSz" val="5" fact="NaN" max="NaN"/>
+          </dgm:ruleLst>
+        </dgm:layoutNode>
+        <dgm:layoutNode name="descendantText" styleLbl="alignAcc1">
+          <dgm:varLst>
+            <dgm:bulletEnabled val="1"/>
+          </dgm:varLst>
+          <dgm:choose name="Name4">
+            <dgm:if name="Name5" func="var" arg="dir" op="equ" val="norm">
+              <dgm:alg type="tx">
+                <dgm:param type="stBulletLvl" val="1"/>
+                <dgm:param type="txAnchorVertCh" val="mid"/>
+              </dgm:alg>
+              <dgm:shape xmlns:r="http://schemas.openxmlformats.org/officeDocument/2006/relationships" rot="90" type="round2SameRect" r:blip="">
+                <dgm:adjLst/>
+              </dgm:shape>
+            </dgm:if>
+            <dgm:else name="Name6">
+              <dgm:alg type="tx">
+                <dgm:param type="stBulletLvl" val="1"/>
+                <dgm:param type="txAnchorVertCh" val="mid"/>
+              </dgm:alg>
+              <dgm:shape xmlns:r="http://schemas.openxmlformats.org/officeDocument/2006/relationships" rot="-90" type="round2SameRect" r:blip="">
+                <dgm:adjLst/>
+              </dgm:shape>
+            </dgm:else>
+          </dgm:choose>
+          <dgm:presOf axis="des" ptType="node"/>
+          <dgm:choose name="Name7">
+            <dgm:if name="Name8" func="var" arg="dir" op="equ" val="norm">
+              <dgm:constrLst>
+                <dgm:constr type="secFontSz" refType="primFontSz"/>
+                <dgm:constr type="tMarg" refType="primFontSz" fact="0.05"/>
+                <dgm:constr type="bMarg" refType="primFontSz" fact="0.05"/>
+                <dgm:constr type="rMarg" refType="primFontSz" fact="0.05"/>
+              </dgm:constrLst>
+            </dgm:if>
+            <dgm:else name="Name9">
+              <dgm:constrLst>
+                <dgm:constr type="secFontSz" refType="primFontSz"/>
+                <dgm:constr type="tMarg" refType="primFontSz" fact="0.05"/>
+                <dgm:constr type="bMarg" refType="primFontSz" fact="0.05"/>
+                <dgm:constr type="lMarg" refType="primFontSz" fact="0.05"/>
+              </dgm:constrLst>
+            </dgm:else>
+          </dgm:choose>
+          <dgm:ruleLst>
+            <dgm:rule type="primFontSz" val="5" fact="NaN" max="NaN"/>
+          </dgm:ruleLst>
+        </dgm:layoutNode>
+      </dgm:layoutNode>
+      <dgm:forEach name="Name10" axis="followSib" ptType="sibTrans" cnt="1">
+        <dgm:layoutNode name="sp">
+          <dgm:alg type="sp"/>
+          <dgm:shape xmlns:r="http://schemas.openxmlformats.org/officeDocument/2006/relationships" r:blip="">
+            <dgm:adjLst/>
+          </dgm:shape>
+          <dgm:presOf axis="self"/>
+          <dgm:constrLst>
+            <dgm:constr type="w" val="1"/>
+            <dgm:constr type="h" val="37.5"/>
+          </dgm:constrLst>
+          <dgm:ruleLst/>
+        </dgm:layoutNode>
+      </dgm:forEach>
+    </dgm:forEach>
+  </dgm:layoutNode>
+</dgm:layoutDef>
+</file>
+
+<file path=ppt/diagrams/layout7.xml><?xml version="1.0" encoding="utf-8"?>
+<dgm:layoutDef xmlns:dgm="http://schemas.openxmlformats.org/drawingml/2006/diagram" xmlns:a="http://schemas.openxmlformats.org/drawingml/2006/main" uniqueId="urn:microsoft.com/office/officeart/2005/8/layout/hierarchy1">
+  <dgm:title val=""/>
+  <dgm:desc val=""/>
+  <dgm:catLst>
+    <dgm:cat type="hierarchy" pri="2000"/>
+  </dgm:catLst>
+  <dgm:sampData>
+    <dgm:dataModel>
+      <dgm:ptLst>
+        <dgm:pt modelId="0" type="doc"/>
+        <dgm:pt modelId="1">
+          <dgm:prSet phldr="1"/>
+        </dgm:pt>
+        <dgm:pt modelId="2">
+          <dgm:prSet phldr="1"/>
+        </dgm:pt>
+        <dgm:pt modelId="21">
+          <dgm:prSet phldr="1"/>
+        </dgm:pt>
+        <dgm:pt modelId="22">
+          <dgm:prSet phldr="1"/>
+        </dgm:pt>
+        <dgm:pt modelId="3">
+          <dgm:prSet phldr="1"/>
+        </dgm:pt>
+        <dgm:pt modelId="31">
+          <dgm:prSet phldr="1"/>
+        </dgm:pt>
+      </dgm:ptLst>
+      <dgm:cxnLst>
+        <dgm:cxn modelId="4" srcId="0" destId="1" srcOrd="0" destOrd="0"/>
+        <dgm:cxn modelId="5" srcId="1" destId="2" srcOrd="0" destOrd="0"/>
+        <dgm:cxn modelId="6" srcId="1" destId="3" srcOrd="1" destOrd="0"/>
+        <dgm:cxn modelId="23" srcId="2" destId="21" srcOrd="0" destOrd="0"/>
+        <dgm:cxn modelId="24" srcId="2" destId="22" srcOrd="1" destOrd="0"/>
+        <dgm:cxn modelId="33" srcId="3" destId="31" srcOrd="0" destOrd="0"/>
+      </dgm:cxnLst>
+      <dgm:bg/>
+      <dgm:whole/>
+    </dgm:dataModel>
+  </dgm:sampData>
+  <dgm:styleData>
+    <dgm:dataModel>
+      <dgm:ptLst>
+        <dgm:pt modelId="0" type="doc"/>
+        <dgm:pt modelId="1"/>
+        <dgm:pt modelId="11"/>
+        <dgm:pt modelId="12"/>
+      </dgm:ptLst>
+      <dgm:cxnLst>
+        <dgm:cxn modelId="2" srcId="0" destId="1" srcOrd="0" destOrd="0"/>
+        <dgm:cxn modelId="13" srcId="1" destId="11" srcOrd="0" destOrd="0"/>
+        <dgm:cxn modelId="14" srcId="1" destId="12" srcOrd="1" destOrd="0"/>
+      </dgm:cxnLst>
+      <dgm:bg/>
+      <dgm:whole/>
+    </dgm:dataModel>
+  </dgm:styleData>
+  <dgm:clrData>
+    <dgm:dataModel>
+      <dgm:ptLst>
+        <dgm:pt modelId="0" type="doc"/>
+        <dgm:pt modelId="1"/>
+        <dgm:pt modelId="2"/>
+        <dgm:pt modelId="21"/>
+        <dgm:pt modelId="211"/>
+        <dgm:pt modelId="3"/>
+        <dgm:pt modelId="31"/>
+        <dgm:pt modelId="311"/>
+      </dgm:ptLst>
+      <dgm:cxnLst>
+        <dgm:cxn modelId="4" srcId="0" destId="1" srcOrd="0" destOrd="0"/>
+        <dgm:cxn modelId="5" srcId="1" destId="2" srcOrd="0" destOrd="0"/>
+        <dgm:cxn modelId="6" srcId="1" destId="3" srcOrd="1" destOrd="0"/>
+        <dgm:cxn modelId="23" srcId="2" destId="21" srcOrd="0" destOrd="0"/>
+        <dgm:cxn modelId="24" srcId="21" destId="211" srcOrd="0" destOrd="0"/>
+        <dgm:cxn modelId="33" srcId="3" destId="31" srcOrd="0" destOrd="0"/>
+        <dgm:cxn modelId="34" srcId="31" destId="311" srcOrd="0" destOrd="0"/>
+      </dgm:cxnLst>
+      <dgm:bg/>
+      <dgm:whole/>
+    </dgm:dataModel>
+  </dgm:clrData>
+  <dgm:layoutNode name="hierChild1">
+    <dgm:varLst>
+      <dgm:chPref val="1"/>
+      <dgm:dir/>
+      <dgm:animOne val="branch"/>
+      <dgm:animLvl val="lvl"/>
+      <dgm:resizeHandles/>
+    </dgm:varLst>
+    <dgm:choose name="Name0">
+      <dgm:if name="Name1" func="var" arg="dir" op="equ" val="norm">
+        <dgm:alg type="hierChild">
+          <dgm:param type="linDir" val="fromL"/>
+        </dgm:alg>
+      </dgm:if>
+      <dgm:else name="Name2">
+        <dgm:alg type="hierChild">
+          <dgm:param type="linDir" val="fromR"/>
+        </dgm:alg>
+      </dgm:else>
+    </dgm:choose>
+    <dgm:shape xmlns:r="http://schemas.openxmlformats.org/officeDocument/2006/relationships" r:blip="">
+      <dgm:adjLst/>
+    </dgm:shape>
+    <dgm:presOf/>
+    <dgm:constrLst>
+      <dgm:constr type="primFontSz" for="des" ptType="node" op="equ" val="65"/>
+      <dgm:constr type="w" for="des" forName="composite" refType="w"/>
+      <dgm:constr type="h" for="des" forName="composite" refType="w" refFor="des" refForName="composite" fact="0.667"/>
+      <dgm:constr type="w" for="des" forName="composite2" refType="w" refFor="des" refForName="composite"/>
+      <dgm:constr type="h" for="des" forName="composite2" refType="h" refFor="des" refForName="composite"/>
+      <dgm:constr type="w" for="des" forName="composite3" refType="w" refFor="des" refForName="composite"/>
+      <dgm:constr type="h" for="des" forName="composite3" refType="h" refFor="des" refForName="composite"/>
+      <dgm:constr type="w" for="des" forName="composite4" refType="w" refFor="des" refForName="composite"/>
+      <dgm:constr type="h" for="des" forName="composite4" refType="h" refFor="des" refForName="composite"/>
+      <dgm:constr type="w" for="des" forName="composite5" refType="w" refFor="des" refForName="composite"/>
+      <dgm:constr type="h" for="des" forName="composite5" refType="h" refFor="des" refForName="composite"/>
+      <dgm:constr type="sibSp" refType="w" refFor="des" refForName="composite" fact="0.1"/>
+      <dgm:constr type="sibSp" for="des" forName="hierChild2" refType="sibSp"/>
+      <dgm:constr type="sibSp" for="des" forName="hierChild3" refType="sibSp"/>
+      <dgm:constr type="sibSp" for="des" forName="hierChild4" refType="sibSp"/>
+      <dgm:constr type="sibSp" for="des" forName="hierChild5" refType="sibSp"/>
+      <dgm:constr type="sibSp" for="des" forName="hierChild6" refType="sibSp"/>
+      <dgm:constr type="sp" for="des" forName="hierRoot1" refType="h" refFor="des" refForName="composite" fact="0.25"/>
+      <dgm:constr type="sp" for="des" forName="hierRoot2" refType="sp" refFor="des" refForName="hierRoot1"/>
+      <dgm:constr type="sp" for="des" forName="hierRoot3" refType="sp" refFor="des" refForName="hierRoot1"/>
+      <dgm:constr type="sp" for="des" forName="hierRoot4" refType="sp" refFor="des" refForName="hierRoot1"/>
+      <dgm:constr type="sp" for="des" forName="hierRoot5" refType="sp" refFor="des" refForName="hierRoot1"/>
+    </dgm:constrLst>
+    <dgm:ruleLst/>
+    <dgm:forEach name="Name3" axis="ch">
+      <dgm:forEach name="Name4" axis="self" ptType="node">
+        <dgm:layoutNode name="hierRoot1">
+          <dgm:alg type="hierRoot"/>
+          <dgm:shape xmlns:r="http://schemas.openxmlformats.org/officeDocument/2006/relationships" r:blip="">
+            <dgm:adjLst/>
+          </dgm:shape>
+          <dgm:presOf/>
+          <dgm:constrLst>
+            <dgm:constr type="bendDist" for="des" ptType="parTrans" refType="sp" fact="0.5"/>
+          </dgm:constrLst>
+          <dgm:ruleLst/>
+          <dgm:layoutNode name="composite">
+            <dgm:alg type="composite"/>
+            <dgm:shape xmlns:r="http://schemas.openxmlformats.org/officeDocument/2006/relationships" r:blip="">
+              <dgm:adjLst/>
+            </dgm:shape>
+            <dgm:presOf/>
+            <dgm:constrLst>
+              <dgm:constr type="w" for="ch" forName="background" refType="w" fact="0.9"/>
+              <dgm:constr type="h" for="ch" forName="background" refType="w" refFor="ch" refForName="background" fact="0.635"/>
+              <dgm:constr type="t" for="ch" forName="background"/>
+              <dgm:constr type="l" for="ch" forName="background"/>
+              <dgm:constr type="w" for="ch" forName="text" refType="w" fact="0.9"/>
+              <dgm:constr type="h" for="ch" forName="text" refType="w" refFor="ch" refForName="text" fact="0.635"/>
+              <dgm:constr type="t" for="ch" forName="text" refType="w" fact="0.095"/>
+              <dgm:constr type="l" for="ch" forName="text" refType="w" fact="0.1"/>
+            </dgm:constrLst>
+            <dgm:ruleLst/>
+            <dgm:layoutNode name="background" styleLbl="node0" moveWith="text">
+              <dgm:alg type="sp"/>
+              <dgm:shape xmlns:r="http://schemas.openxmlformats.org/officeDocument/2006/relationships" type="roundRect" r:blip="">
+                <dgm:adjLst>
+                  <dgm:adj idx="1" val="0.1"/>
+                </dgm:adjLst>
+              </dgm:shape>
+              <dgm:presOf/>
+              <dgm:constrLst/>
+              <dgm:ruleLst/>
+            </dgm:layoutNode>
+            <dgm:layoutNode name="text" styleLbl="fgAcc0">
+              <dgm:varLst>
+                <dgm:chPref val="3"/>
+              </dgm:varLst>
+              <dgm:alg type="tx"/>
+              <dgm:shape xmlns:r="http://schemas.openxmlformats.org/officeDocument/2006/relationships" type="roundRect" r:blip="">
+                <dgm:adjLst>
+                  <dgm:adj idx="1" val="0.1"/>
+                </dgm:adjLst>
+              </dgm:shape>
+              <dgm:presOf axis="self"/>
+              <dgm:constrLst>
+                <dgm:constr type="tMarg" refType="primFontSz" fact="0.3"/>
+                <dgm:constr type="bMarg" refType="primFontSz" fact="0.3"/>
+                <dgm:constr type="lMarg" refType="primFontSz" fact="0.3"/>
+                <dgm:constr type="rMarg" refType="primFontSz" fact="0.3"/>
+              </dgm:constrLst>
+              <dgm:ruleLst>
+                <dgm:rule type="primFontSz" val="5" fact="NaN" max="NaN"/>
+              </dgm:ruleLst>
+            </dgm:layoutNode>
+          </dgm:layoutNode>
+          <dgm:layoutNode name="hierChild2">
+            <dgm:choose name="Name5">
+              <dgm:if name="Name6" func="var" arg="dir" op="equ" val="norm">
+                <dgm:alg type="hierChild">
+                  <dgm:param type="linDir" val="fromL"/>
+                </dgm:alg>
+              </dgm:if>
+              <dgm:else name="Name7">
+                <dgm:alg type="hierChild">
+                  <dgm:param type="linDir" val="fromR"/>
+                </dgm:alg>
+              </dgm:else>
+            </dgm:choose>
+            <dgm:shape xmlns:r="http://schemas.openxmlformats.org/officeDocument/2006/relationships" r:blip="">
+              <dgm:adjLst/>
+            </dgm:shape>
+            <dgm:presOf/>
+            <dgm:constrLst/>
+            <dgm:ruleLst/>
+            <dgm:forEach name="Name8" axis="ch">
+              <dgm:forEach name="Name9" axis="self" ptType="parTrans" cnt="1">
+                <dgm:layoutNode name="Name10">
+                  <dgm:alg type="conn">
+                    <dgm:param type="dim" val="1D"/>
+                    <dgm:param type="endSty" val="noArr"/>
+                    <dgm:param type="connRout" val="bend"/>
+                    <dgm:param type="bendPt" val="end"/>
+                    <dgm:param type="begPts" val="bCtr"/>
+                    <dgm:param type="endPts" val="tCtr"/>
+                    <dgm:param type="srcNode" val="background"/>
+                    <dgm:param type="dstNode" val="background2"/>
+                  </dgm:alg>
+                  <dgm:shape xmlns:r="http://schemas.openxmlformats.org/officeDocument/2006/relationships" type="conn" r:blip="" zOrderOff="-999">
+                    <dgm:adjLst/>
+                  </dgm:shape>
+                  <dgm:presOf axis="self"/>
+                  <dgm:constrLst>
+                    <dgm:constr type="begPad"/>
+                    <dgm:constr type="endPad"/>
+                  </dgm:constrLst>
+                  <dgm:ruleLst/>
+                </dgm:layoutNode>
+              </dgm:forEach>
+              <dgm:forEach name="Name11" axis="self" ptType="node">
+                <dgm:layoutNode name="hierRoot2">
+                  <dgm:alg type="hierRoot"/>
+                  <dgm:shape xmlns:r="http://schemas.openxmlformats.org/officeDocument/2006/relationships" r:blip="">
+                    <dgm:adjLst/>
+                  </dgm:shape>
+                  <dgm:presOf/>
+                  <dgm:constrLst>
+                    <dgm:constr type="bendDist" for="des" ptType="parTrans" refType="sp" fact="0.5"/>
+                  </dgm:constrLst>
+                  <dgm:ruleLst/>
+                  <dgm:layoutNode name="composite2">
+                    <dgm:alg type="composite"/>
+                    <dgm:shape xmlns:r="http://schemas.openxmlformats.org/officeDocument/2006/relationships" r:blip="">
+                      <dgm:adjLst/>
+                    </dgm:shape>
+                    <dgm:presOf/>
+                    <dgm:constrLst>
+                      <dgm:constr type="w" for="ch" forName="background2" refType="w" fact="0.9"/>
+                      <dgm:constr type="h" for="ch" forName="background2" refType="w" refFor="ch" refForName="background2" fact="0.635"/>
+                      <dgm:constr type="t" for="ch" forName="background2"/>
+                      <dgm:constr type="l" for="ch" forName="background2"/>
+                      <dgm:constr type="w" for="ch" forName="text2" refType="w" fact="0.9"/>
+                      <dgm:constr type="h" for="ch" forName="text2" refType="w" refFor="ch" refForName="text2" fact="0.635"/>
+                      <dgm:constr type="t" for="ch" forName="text2" refType="w" fact="0.095"/>
+                      <dgm:constr type="l" for="ch" forName="text2" refType="w" fact="0.1"/>
+                    </dgm:constrLst>
+                    <dgm:ruleLst/>
+                    <dgm:layoutNode name="background2" moveWith="text2">
+                      <dgm:alg type="sp"/>
+                      <dgm:shape xmlns:r="http://schemas.openxmlformats.org/officeDocument/2006/relationships" type="roundRect" r:blip="">
+                        <dgm:adjLst>
+                          <dgm:adj idx="1" val="0.1"/>
+                        </dgm:adjLst>
+                      </dgm:shape>
+                      <dgm:presOf/>
+                      <dgm:constrLst/>
+                      <dgm:ruleLst/>
+                    </dgm:layoutNode>
+                    <dgm:layoutNode name="text2" styleLbl="fgAcc2">
+                      <dgm:varLst>
+                        <dgm:chPref val="3"/>
+                      </dgm:varLst>
+                      <dgm:alg type="tx"/>
+                      <dgm:shape xmlns:r="http://schemas.openxmlformats.org/officeDocument/2006/relationships" type="roundRect" r:blip="">
+                        <dgm:adjLst>
+                          <dgm:adj idx="1" val="0.1"/>
+                        </dgm:adjLst>
+                      </dgm:shape>
+                      <dgm:presOf axis="self"/>
+                      <dgm:constrLst>
+                        <dgm:constr type="tMarg" refType="primFontSz" fact="0.3"/>
+                        <dgm:constr type="bMarg" refType="primFontSz" fact="0.3"/>
+                        <dgm:constr type="lMarg" refType="primFontSz" fact="0.3"/>
+                        <dgm:constr type="rMarg" refType="primFontSz" fact="0.3"/>
+                      </dgm:constrLst>
+                      <dgm:ruleLst>
+                        <dgm:rule type="primFontSz" val="5" fact="NaN" max="NaN"/>
+                      </dgm:ruleLst>
+                    </dgm:layoutNode>
+                  </dgm:layoutNode>
+                  <dgm:layoutNode name="hierChild3">
+                    <dgm:choose name="Name12">
+                      <dgm:if name="Name13" func="var" arg="dir" op="equ" val="norm">
+                        <dgm:alg type="hierChild">
+                          <dgm:param type="linDir" val="fromL"/>
+                        </dgm:alg>
+                      </dgm:if>
+                      <dgm:else name="Name14">
+                        <dgm:alg type="hierChild">
+                          <dgm:param type="linDir" val="fromR"/>
+                        </dgm:alg>
+                      </dgm:else>
+                    </dgm:choose>
+                    <dgm:shape xmlns:r="http://schemas.openxmlformats.org/officeDocument/2006/relationships" r:blip="">
+                      <dgm:adjLst/>
+                    </dgm:shape>
+                    <dgm:presOf/>
+                    <dgm:constrLst/>
+                    <dgm:ruleLst/>
+                    <dgm:forEach name="Name15" axis="ch">
+                      <dgm:forEach name="Name16" axis="self" ptType="parTrans" cnt="1">
+                        <dgm:layoutNode name="Name17">
+                          <dgm:alg type="conn">
+                            <dgm:param type="dim" val="1D"/>
+                            <dgm:param type="endSty" val="noArr"/>
+                            <dgm:param type="connRout" val="bend"/>
+                            <dgm:param type="bendPt" val="end"/>
+                            <dgm:param type="begPts" val="bCtr"/>
+                            <dgm:param type="endPts" val="tCtr"/>
+                            <dgm:param type="srcNode" val="background2"/>
+                            <dgm:param type="dstNode" val="background3"/>
+                          </dgm:alg>
+                          <dgm:shape xmlns:r="http://schemas.openxmlformats.org/officeDocument/2006/relationships" type="conn" r:blip="" zOrderOff="-999">
+                            <dgm:adjLst/>
+                          </dgm:shape>
+                          <dgm:presOf axis="self"/>
+                          <dgm:constrLst>
+                            <dgm:constr type="begPad"/>
+                            <dgm:constr type="endPad"/>
+                          </dgm:constrLst>
+                          <dgm:ruleLst/>
+                        </dgm:layoutNode>
+                      </dgm:forEach>
+                      <dgm:forEach name="Name18" axis="self" ptType="node">
+                        <dgm:layoutNode name="hierRoot3">
+                          <dgm:alg type="hierRoot"/>
+                          <dgm:shape xmlns:r="http://schemas.openxmlformats.org/officeDocument/2006/relationships" r:blip="">
+                            <dgm:adjLst/>
+                          </dgm:shape>
+                          <dgm:presOf/>
+                          <dgm:constrLst>
+                            <dgm:constr type="bendDist" for="des" ptType="parTrans" refType="sp" fact="0.5"/>
+                          </dgm:constrLst>
+                          <dgm:ruleLst/>
+                          <dgm:layoutNode name="composite3">
+                            <dgm:alg type="composite"/>
+                            <dgm:shape xmlns:r="http://schemas.openxmlformats.org/officeDocument/2006/relationships" r:blip="">
+                              <dgm:adjLst/>
+                            </dgm:shape>
+                            <dgm:presOf/>
+                            <dgm:constrLst>
+                              <dgm:constr type="w" for="ch" forName="background3" refType="w" fact="0.9"/>
+                              <dgm:constr type="h" for="ch" forName="background3" refType="w" refFor="ch" refForName="background3" fact="0.635"/>
+                              <dgm:constr type="t" for="ch" forName="background3"/>
+                              <dgm:constr type="l" for="ch" forName="background3"/>
+                              <dgm:constr type="w" for="ch" forName="text3" refType="w" fact="0.9"/>
+                              <dgm:constr type="h" for="ch" forName="text3" refType="w" refFor="ch" refForName="text3" fact="0.635"/>
+                              <dgm:constr type="t" for="ch" forName="text3" refType="w" fact="0.095"/>
+                              <dgm:constr type="l" for="ch" forName="text3" refType="w" fact="0.1"/>
+                            </dgm:constrLst>
+                            <dgm:ruleLst/>
+                            <dgm:layoutNode name="background3" moveWith="text3">
+                              <dgm:alg type="sp"/>
+                              <dgm:shape xmlns:r="http://schemas.openxmlformats.org/officeDocument/2006/relationships" type="roundRect" r:blip="">
+                                <dgm:adjLst>
+                                  <dgm:adj idx="1" val="0.1"/>
+                                </dgm:adjLst>
+                              </dgm:shape>
+                              <dgm:presOf/>
+                              <dgm:constrLst/>
+                              <dgm:ruleLst/>
+                            </dgm:layoutNode>
+                            <dgm:layoutNode name="text3" styleLbl="fgAcc3">
+                              <dgm:varLst>
+                                <dgm:chPref val="3"/>
+                              </dgm:varLst>
+                              <dgm:alg type="tx"/>
+                              <dgm:shape xmlns:r="http://schemas.openxmlformats.org/officeDocument/2006/relationships" type="roundRect" r:blip="">
+                                <dgm:adjLst>
+                                  <dgm:adj idx="1" val="0.1"/>
+                                </dgm:adjLst>
+                              </dgm:shape>
+                              <dgm:presOf axis="self"/>
+                              <dgm:constrLst>
+                                <dgm:constr type="tMarg" refType="primFontSz" fact="0.3"/>
+                                <dgm:constr type="bMarg" refType="primFontSz" fact="0.3"/>
+                                <dgm:constr type="lMarg" refType="primFontSz" fact="0.3"/>
+                                <dgm:constr type="rMarg" refType="primFontSz" fact="0.3"/>
+                              </dgm:constrLst>
+                              <dgm:ruleLst>
+                                <dgm:rule type="primFontSz" val="5" fact="NaN" max="NaN"/>
+                              </dgm:ruleLst>
+                            </dgm:layoutNode>
+                          </dgm:layoutNode>
+                          <dgm:layoutNode name="hierChild4">
+                            <dgm:choose name="Name19">
+                              <dgm:if name="Name20" func="var" arg="dir" op="equ" val="norm">
+                                <dgm:alg type="hierChild">
+                                  <dgm:param type="linDir" val="fromL"/>
+                                </dgm:alg>
+                              </dgm:if>
+                              <dgm:else name="Name21">
+                                <dgm:alg type="hierChild">
+                                  <dgm:param type="linDir" val="fromR"/>
+                                </dgm:alg>
+                              </dgm:else>
+                            </dgm:choose>
+                            <dgm:shape xmlns:r="http://schemas.openxmlformats.org/officeDocument/2006/relationships" r:blip="">
+                              <dgm:adjLst/>
+                            </dgm:shape>
+                            <dgm:presOf/>
+                            <dgm:constrLst/>
+                            <dgm:ruleLst/>
+                            <dgm:forEach name="repeat" axis="ch">
+                              <dgm:forEach name="Name22" axis="self" ptType="parTrans" cnt="1">
+                                <dgm:layoutNode name="Name23">
+                                  <dgm:choose name="Name24">
+                                    <dgm:if name="Name25" axis="self" func="depth" op="lte" val="4">
+                                      <dgm:alg type="conn">
+                                        <dgm:param type="dim" val="1D"/>
+                                        <dgm:param type="endSty" val="noArr"/>
+                                        <dgm:param type="connRout" val="bend"/>
+                                        <dgm:param type="bendPt" val="end"/>
+                                        <dgm:param type="begPts" val="bCtr"/>
+                                        <dgm:param type="endPts" val="tCtr"/>
+                                        <dgm:param type="srcNode" val="background3"/>
+                                        <dgm:param type="dstNode" val="background4"/>
+                                      </dgm:alg>
+                                    </dgm:if>
+                                    <dgm:else name="Name26">
+                                      <dgm:alg type="conn">
+                                        <dgm:param type="dim" val="1D"/>
+                                        <dgm:param type="endSty" val="noArr"/>
+                                        <dgm:param type="connRout" val="bend"/>
+                                        <dgm:param type="bendPt" val="end"/>
+                                        <dgm:param type="begPts" val="bCtr"/>
+                                        <dgm:param type="endPts" val="tCtr"/>
+                                        <dgm:param type="srcNode" val="background4"/>
+                                        <dgm:param type="dstNode" val="background4"/>
+                                      </dgm:alg>
+                                    </dgm:else>
+                                  </dgm:choose>
+                                  <dgm:shape xmlns:r="http://schemas.openxmlformats.org/officeDocument/2006/relationships" type="conn" r:blip="" zOrderOff="-999">
+                                    <dgm:adjLst/>
+                                  </dgm:shape>
+                                  <dgm:presOf axis="self"/>
+                                  <dgm:constrLst>
+                                    <dgm:constr type="begPad"/>
+                                    <dgm:constr type="endPad"/>
+                                  </dgm:constrLst>
+                                  <dgm:ruleLst/>
+                                </dgm:layoutNode>
+                              </dgm:forEach>
+                              <dgm:forEach name="Name27" axis="self" ptType="node">
+                                <dgm:layoutNode name="hierRoot4">
+                                  <dgm:alg type="hierRoot"/>
+                                  <dgm:shape xmlns:r="http://schemas.openxmlformats.org/officeDocument/2006/relationships" r:blip="">
+                                    <dgm:adjLst/>
+                                  </dgm:shape>
+                                  <dgm:presOf/>
+                                  <dgm:constrLst>
+                                    <dgm:constr type="bendDist" for="des" ptType="parTrans" refType="sp" fact="0.5"/>
+                                  </dgm:constrLst>
+                                  <dgm:ruleLst/>
+                                  <dgm:layoutNode name="composite4">
+                                    <dgm:alg type="composite"/>
+                                    <dgm:shape xmlns:r="http://schemas.openxmlformats.org/officeDocument/2006/relationships" r:blip="">
+                                      <dgm:adjLst/>
+                                    </dgm:shape>
+                                    <dgm:presOf/>
+                                    <dgm:constrLst>
+                                      <dgm:constr type="w" for="ch" forName="background4" refType="w" fact="0.9"/>
+                                      <dgm:constr type="h" for="ch" forName="background4" refType="w" refFor="ch" refForName="background4" fact="0.635"/>
+                                      <dgm:constr type="t" for="ch" forName="background4"/>
+                                      <dgm:constr type="l" for="ch" forName="background4"/>
+                                      <dgm:constr type="w" for="ch" forName="text4" refType="w" fact="0.9"/>
+                                      <dgm:constr type="h" for="ch" forName="text4" refType="w" refFor="ch" refForName="text4" fact="0.635"/>
+                                      <dgm:constr type="t" for="ch" forName="text4" refType="w" fact="0.095"/>
+                                      <dgm:constr type="l" for="ch" forName="text4" refType="w" fact="0.1"/>
+                                    </dgm:constrLst>
+                                    <dgm:ruleLst/>
+                                    <dgm:layoutNode name="background4" moveWith="text4">
+                                      <dgm:alg type="sp"/>
+                                      <dgm:shape xmlns:r="http://schemas.openxmlformats.org/officeDocument/2006/relationships" type="roundRect" r:blip="">
+                                        <dgm:adjLst>
+                                          <dgm:adj idx="1" val="0.1"/>
+                                        </dgm:adjLst>
+                                      </dgm:shape>
+                                      <dgm:presOf/>
+                                      <dgm:constrLst/>
+                                      <dgm:ruleLst/>
+                                    </dgm:layoutNode>
+                                    <dgm:layoutNode name="text4" styleLbl="fgAcc4">
+                                      <dgm:varLst>
+                                        <dgm:chPref val="3"/>
+                                      </dgm:varLst>
+                                      <dgm:alg type="tx"/>
+                                      <dgm:shape xmlns:r="http://schemas.openxmlformats.org/officeDocument/2006/relationships" type="roundRect" r:blip="">
+                                        <dgm:adjLst>
+                                          <dgm:adj idx="1" val="0.1"/>
+                                        </dgm:adjLst>
+                                      </dgm:shape>
+                                      <dgm:presOf axis="self"/>
+                                      <dgm:constrLst>
+                                        <dgm:constr type="tMarg" refType="primFontSz" fact="0.3"/>
+                                        <dgm:constr type="bMarg" refType="primFontSz" fact="0.3"/>
+                                        <dgm:constr type="lMarg" refType="primFontSz" fact="0.3"/>
+                                        <dgm:constr type="rMarg" refType="primFontSz" fact="0.3"/>
+                                      </dgm:constrLst>
+                                      <dgm:ruleLst>
+                                        <dgm:rule type="primFontSz" val="5" fact="NaN" max="NaN"/>
+                                      </dgm:ruleLst>
+                                    </dgm:layoutNode>
+                                  </dgm:layoutNode>
+                                  <dgm:layoutNode name="hierChild5">
+                                    <dgm:choose name="Name28">
+                                      <dgm:if name="Name29" func="var" arg="dir" op="equ" val="norm">
+                                        <dgm:alg type="hierChild">
+                                          <dgm:param type="linDir" val="fromL"/>
+                                        </dgm:alg>
+                                      </dgm:if>
+                                      <dgm:else name="Name30">
+                                        <dgm:alg type="hierChild">
+                                          <dgm:param type="linDir" val="fromR"/>
+                                        </dgm:alg>
+                                      </dgm:else>
+                                    </dgm:choose>
+                                    <dgm:shape xmlns:r="http://schemas.openxmlformats.org/officeDocument/2006/relationships" r:blip="">
+                                      <dgm:adjLst/>
+                                    </dgm:shape>
+                                    <dgm:presOf/>
+                                    <dgm:constrLst/>
+                                    <dgm:ruleLst/>
+                                    <dgm:forEach name="Name31" ref="repeat"/>
+                                  </dgm:layoutNode>
+                                </dgm:layoutNode>
+                              </dgm:forEach>
+                            </dgm:forEach>
+                          </dgm:layoutNode>
+                        </dgm:layoutNode>
+                      </dgm:forEach>
+                    </dgm:forEach>
+                  </dgm:layoutNode>
+                </dgm:layoutNode>
+              </dgm:forEach>
+            </dgm:forEach>
+          </dgm:layoutNode>
+        </dgm:layoutNode>
+      </dgm:forEach>
+    </dgm:forEach>
+  </dgm:layoutNode>
+</dgm:layoutDef>
+</file>
+
 <file path=ppt/diagrams/quickStyle1.xml><?xml version="1.0" encoding="utf-8"?>
 <dgm:styleDef xmlns:dgm="http://schemas.openxmlformats.org/drawingml/2006/diagram" xmlns:a="http://schemas.openxmlformats.org/drawingml/2006/main" uniqueId="urn:microsoft.com/office/officeart/2005/8/quickstyle/simple4">
   <dgm:title val=""/>
@@ -13496,6 +17360,2074 @@
 </file>
 
 <file path=ppt/diagrams/quickStyle5.xml><?xml version="1.0" encoding="utf-8"?>
+<dgm:styleDef xmlns:dgm="http://schemas.openxmlformats.org/drawingml/2006/diagram" xmlns:a="http://schemas.openxmlformats.org/drawingml/2006/main" uniqueId="urn:microsoft.com/office/officeart/2005/8/quickstyle/simple1">
+  <dgm:title val=""/>
+  <dgm:desc val=""/>
+  <dgm:catLst>
+    <dgm:cat type="simple" pri="10100"/>
+  </dgm:catLst>
+  <dgm:scene3d>
+    <a:camera prst="orthographicFront"/>
+    <a:lightRig rig="threePt" dir="t"/>
+  </dgm:scene3d>
+  <dgm:styleLbl name="node0">
+    <dgm:scene3d>
+      <a:camera prst="orthographicFront"/>
+      <a:lightRig rig="threePt" dir="t"/>
+    </dgm:scene3d>
+    <dgm:sp3d/>
+    <dgm:txPr/>
+    <dgm:style>
+      <a:lnRef idx="2">
+        <a:scrgbClr r="0" g="0" b="0"/>
+      </a:lnRef>
+      <a:fillRef idx="1">
+        <a:scrgbClr r="0" g="0" b="0"/>
+      </a:fillRef>
+      <a:effectRef idx="0">
+        <a:scrgbClr r="0" g="0" b="0"/>
+      </a:effectRef>
+      <a:fontRef idx="minor">
+        <a:schemeClr val="lt1"/>
+      </a:fontRef>
+    </dgm:style>
+  </dgm:styleLbl>
+  <dgm:styleLbl name="lnNode1">
+    <dgm:scene3d>
+      <a:camera prst="orthographicFront"/>
+      <a:lightRig rig="threePt" dir="t"/>
+    </dgm:scene3d>
+    <dgm:sp3d/>
+    <dgm:txPr/>
+    <dgm:style>
+      <a:lnRef idx="2">
+        <a:scrgbClr r="0" g="0" b="0"/>
+      </a:lnRef>
+      <a:fillRef idx="1">
+        <a:scrgbClr r="0" g="0" b="0"/>
+      </a:fillRef>
+      <a:effectRef idx="0">
+        <a:scrgbClr r="0" g="0" b="0"/>
+      </a:effectRef>
+      <a:fontRef idx="minor">
+        <a:schemeClr val="lt1"/>
+      </a:fontRef>
+    </dgm:style>
+  </dgm:styleLbl>
+  <dgm:styleLbl name="vennNode1">
+    <dgm:scene3d>
+      <a:camera prst="orthographicFront"/>
+      <a:lightRig rig="threePt" dir="t"/>
+    </dgm:scene3d>
+    <dgm:sp3d/>
+    <dgm:txPr/>
+    <dgm:style>
+      <a:lnRef idx="2">
+        <a:scrgbClr r="0" g="0" b="0"/>
+      </a:lnRef>
+      <a:fillRef idx="1">
+        <a:scrgbClr r="0" g="0" b="0"/>
+      </a:fillRef>
+      <a:effectRef idx="0">
+        <a:scrgbClr r="0" g="0" b="0"/>
+      </a:effectRef>
+      <a:fontRef idx="minor">
+        <a:schemeClr val="tx1"/>
+      </a:fontRef>
+    </dgm:style>
+  </dgm:styleLbl>
+  <dgm:styleLbl name="alignNode1">
+    <dgm:scene3d>
+      <a:camera prst="orthographicFront"/>
+      <a:lightRig rig="threePt" dir="t"/>
+    </dgm:scene3d>
+    <dgm:sp3d/>
+    <dgm:txPr/>
+    <dgm:style>
+      <a:lnRef idx="2">
+        <a:scrgbClr r="0" g="0" b="0"/>
+      </a:lnRef>
+      <a:fillRef idx="1">
+        <a:scrgbClr r="0" g="0" b="0"/>
+      </a:fillRef>
+      <a:effectRef idx="0">
+        <a:scrgbClr r="0" g="0" b="0"/>
+      </a:effectRef>
+      <a:fontRef idx="minor">
+        <a:schemeClr val="lt1"/>
+      </a:fontRef>
+    </dgm:style>
+  </dgm:styleLbl>
+  <dgm:styleLbl name="node1">
+    <dgm:scene3d>
+      <a:camera prst="orthographicFront"/>
+      <a:lightRig rig="threePt" dir="t"/>
+    </dgm:scene3d>
+    <dgm:sp3d/>
+    <dgm:txPr/>
+    <dgm:style>
+      <a:lnRef idx="2">
+        <a:scrgbClr r="0" g="0" b="0"/>
+      </a:lnRef>
+      <a:fillRef idx="1">
+        <a:scrgbClr r="0" g="0" b="0"/>
+      </a:fillRef>
+      <a:effectRef idx="0">
+        <a:scrgbClr r="0" g="0" b="0"/>
+      </a:effectRef>
+      <a:fontRef idx="minor">
+        <a:schemeClr val="lt1"/>
+      </a:fontRef>
+    </dgm:style>
+  </dgm:styleLbl>
+  <dgm:styleLbl name="node2">
+    <dgm:scene3d>
+      <a:camera prst="orthographicFront"/>
+      <a:lightRig rig="threePt" dir="t"/>
+    </dgm:scene3d>
+    <dgm:sp3d/>
+    <dgm:txPr/>
+    <dgm:style>
+      <a:lnRef idx="2">
+        <a:scrgbClr r="0" g="0" b="0"/>
+      </a:lnRef>
+      <a:fillRef idx="1">
+        <a:scrgbClr r="0" g="0" b="0"/>
+      </a:fillRef>
+      <a:effectRef idx="0">
+        <a:scrgbClr r="0" g="0" b="0"/>
+      </a:effectRef>
+      <a:fontRef idx="minor">
+        <a:schemeClr val="lt1"/>
+      </a:fontRef>
+    </dgm:style>
+  </dgm:styleLbl>
+  <dgm:styleLbl name="node3">
+    <dgm:scene3d>
+      <a:camera prst="orthographicFront"/>
+      <a:lightRig rig="threePt" dir="t"/>
+    </dgm:scene3d>
+    <dgm:sp3d/>
+    <dgm:txPr/>
+    <dgm:style>
+      <a:lnRef idx="2">
+        <a:scrgbClr r="0" g="0" b="0"/>
+      </a:lnRef>
+      <a:fillRef idx="1">
+        <a:scrgbClr r="0" g="0" b="0"/>
+      </a:fillRef>
+      <a:effectRef idx="0">
+        <a:scrgbClr r="0" g="0" b="0"/>
+      </a:effectRef>
+      <a:fontRef idx="minor">
+        <a:schemeClr val="lt1"/>
+      </a:fontRef>
+    </dgm:style>
+  </dgm:styleLbl>
+  <dgm:styleLbl name="node4">
+    <dgm:scene3d>
+      <a:camera prst="orthographicFront"/>
+      <a:lightRig rig="threePt" dir="t"/>
+    </dgm:scene3d>
+    <dgm:sp3d/>
+    <dgm:txPr/>
+    <dgm:style>
+      <a:lnRef idx="2">
+        <a:scrgbClr r="0" g="0" b="0"/>
+      </a:lnRef>
+      <a:fillRef idx="1">
+        <a:scrgbClr r="0" g="0" b="0"/>
+      </a:fillRef>
+      <a:effectRef idx="0">
+        <a:scrgbClr r="0" g="0" b="0"/>
+      </a:effectRef>
+      <a:fontRef idx="minor">
+        <a:schemeClr val="lt1"/>
+      </a:fontRef>
+    </dgm:style>
+  </dgm:styleLbl>
+  <dgm:styleLbl name="fgImgPlace1">
+    <dgm:scene3d>
+      <a:camera prst="orthographicFront"/>
+      <a:lightRig rig="threePt" dir="t"/>
+    </dgm:scene3d>
+    <dgm:sp3d/>
+    <dgm:txPr/>
+    <dgm:style>
+      <a:lnRef idx="2">
+        <a:scrgbClr r="0" g="0" b="0"/>
+      </a:lnRef>
+      <a:fillRef idx="1">
+        <a:scrgbClr r="0" g="0" b="0"/>
+      </a:fillRef>
+      <a:effectRef idx="0">
+        <a:scrgbClr r="0" g="0" b="0"/>
+      </a:effectRef>
+      <a:fontRef idx="minor"/>
+    </dgm:style>
+  </dgm:styleLbl>
+  <dgm:styleLbl name="alignImgPlace1">
+    <dgm:scene3d>
+      <a:camera prst="orthographicFront"/>
+      <a:lightRig rig="threePt" dir="t"/>
+    </dgm:scene3d>
+    <dgm:sp3d/>
+    <dgm:txPr/>
+    <dgm:style>
+      <a:lnRef idx="2">
+        <a:scrgbClr r="0" g="0" b="0"/>
+      </a:lnRef>
+      <a:fillRef idx="1">
+        <a:scrgbClr r="0" g="0" b="0"/>
+      </a:fillRef>
+      <a:effectRef idx="0">
+        <a:scrgbClr r="0" g="0" b="0"/>
+      </a:effectRef>
+      <a:fontRef idx="minor"/>
+    </dgm:style>
+  </dgm:styleLbl>
+  <dgm:styleLbl name="bgImgPlace1">
+    <dgm:scene3d>
+      <a:camera prst="orthographicFront"/>
+      <a:lightRig rig="threePt" dir="t"/>
+    </dgm:scene3d>
+    <dgm:sp3d/>
+    <dgm:txPr/>
+    <dgm:style>
+      <a:lnRef idx="2">
+        <a:scrgbClr r="0" g="0" b="0"/>
+      </a:lnRef>
+      <a:fillRef idx="1">
+        <a:scrgbClr r="0" g="0" b="0"/>
+      </a:fillRef>
+      <a:effectRef idx="0">
+        <a:scrgbClr r="0" g="0" b="0"/>
+      </a:effectRef>
+      <a:fontRef idx="minor"/>
+    </dgm:style>
+  </dgm:styleLbl>
+  <dgm:styleLbl name="sibTrans2D1">
+    <dgm:scene3d>
+      <a:camera prst="orthographicFront"/>
+      <a:lightRig rig="threePt" dir="t"/>
+    </dgm:scene3d>
+    <dgm:sp3d/>
+    <dgm:txPr/>
+    <dgm:style>
+      <a:lnRef idx="0">
+        <a:scrgbClr r="0" g="0" b="0"/>
+      </a:lnRef>
+      <a:fillRef idx="1">
+        <a:scrgbClr r="0" g="0" b="0"/>
+      </a:fillRef>
+      <a:effectRef idx="0">
+        <a:scrgbClr r="0" g="0" b="0"/>
+      </a:effectRef>
+      <a:fontRef idx="minor">
+        <a:schemeClr val="lt1"/>
+      </a:fontRef>
+    </dgm:style>
+  </dgm:styleLbl>
+  <dgm:styleLbl name="fgSibTrans2D1">
+    <dgm:scene3d>
+      <a:camera prst="orthographicFront"/>
+      <a:lightRig rig="threePt" dir="t"/>
+    </dgm:scene3d>
+    <dgm:sp3d/>
+    <dgm:txPr/>
+    <dgm:style>
+      <a:lnRef idx="0">
+        <a:scrgbClr r="0" g="0" b="0"/>
+      </a:lnRef>
+      <a:fillRef idx="1">
+        <a:scrgbClr r="0" g="0" b="0"/>
+      </a:fillRef>
+      <a:effectRef idx="0">
+        <a:scrgbClr r="0" g="0" b="0"/>
+      </a:effectRef>
+      <a:fontRef idx="minor">
+        <a:schemeClr val="lt1"/>
+      </a:fontRef>
+    </dgm:style>
+  </dgm:styleLbl>
+  <dgm:styleLbl name="bgSibTrans2D1">
+    <dgm:scene3d>
+      <a:camera prst="orthographicFront"/>
+      <a:lightRig rig="threePt" dir="t"/>
+    </dgm:scene3d>
+    <dgm:sp3d/>
+    <dgm:txPr/>
+    <dgm:style>
+      <a:lnRef idx="0">
+        <a:scrgbClr r="0" g="0" b="0"/>
+      </a:lnRef>
+      <a:fillRef idx="1">
+        <a:scrgbClr r="0" g="0" b="0"/>
+      </a:fillRef>
+      <a:effectRef idx="0">
+        <a:scrgbClr r="0" g="0" b="0"/>
+      </a:effectRef>
+      <a:fontRef idx="minor">
+        <a:schemeClr val="lt1"/>
+      </a:fontRef>
+    </dgm:style>
+  </dgm:styleLbl>
+  <dgm:styleLbl name="sibTrans1D1">
+    <dgm:scene3d>
+      <a:camera prst="orthographicFront"/>
+      <a:lightRig rig="threePt" dir="t"/>
+    </dgm:scene3d>
+    <dgm:sp3d/>
+    <dgm:txPr/>
+    <dgm:style>
+      <a:lnRef idx="1">
+        <a:scrgbClr r="0" g="0" b="0"/>
+      </a:lnRef>
+      <a:fillRef idx="0">
+        <a:scrgbClr r="0" g="0" b="0"/>
+      </a:fillRef>
+      <a:effectRef idx="0">
+        <a:scrgbClr r="0" g="0" b="0"/>
+      </a:effectRef>
+      <a:fontRef idx="minor"/>
+    </dgm:style>
+  </dgm:styleLbl>
+  <dgm:styleLbl name="callout">
+    <dgm:scene3d>
+      <a:camera prst="orthographicFront"/>
+      <a:lightRig rig="threePt" dir="t"/>
+    </dgm:scene3d>
+    <dgm:sp3d/>
+    <dgm:txPr/>
+    <dgm:style>
+      <a:lnRef idx="2">
+        <a:scrgbClr r="0" g="0" b="0"/>
+      </a:lnRef>
+      <a:fillRef idx="1">
+        <a:scrgbClr r="0" g="0" b="0"/>
+      </a:fillRef>
+      <a:effectRef idx="0">
+        <a:scrgbClr r="0" g="0" b="0"/>
+      </a:effectRef>
+      <a:fontRef idx="minor"/>
+    </dgm:style>
+  </dgm:styleLbl>
+  <dgm:styleLbl name="asst0">
+    <dgm:scene3d>
+      <a:camera prst="orthographicFront"/>
+      <a:lightRig rig="threePt" dir="t"/>
+    </dgm:scene3d>
+    <dgm:sp3d/>
+    <dgm:txPr/>
+    <dgm:style>
+      <a:lnRef idx="2">
+        <a:scrgbClr r="0" g="0" b="0"/>
+      </a:lnRef>
+      <a:fillRef idx="1">
+        <a:scrgbClr r="0" g="0" b="0"/>
+      </a:fillRef>
+      <a:effectRef idx="0">
+        <a:scrgbClr r="0" g="0" b="0"/>
+      </a:effectRef>
+      <a:fontRef idx="minor">
+        <a:schemeClr val="lt1"/>
+      </a:fontRef>
+    </dgm:style>
+  </dgm:styleLbl>
+  <dgm:styleLbl name="asst1">
+    <dgm:scene3d>
+      <a:camera prst="orthographicFront"/>
+      <a:lightRig rig="threePt" dir="t"/>
+    </dgm:scene3d>
+    <dgm:sp3d/>
+    <dgm:txPr/>
+    <dgm:style>
+      <a:lnRef idx="2">
+        <a:scrgbClr r="0" g="0" b="0"/>
+      </a:lnRef>
+      <a:fillRef idx="1">
+        <a:scrgbClr r="0" g="0" b="0"/>
+      </a:fillRef>
+      <a:effectRef idx="0">
+        <a:scrgbClr r="0" g="0" b="0"/>
+      </a:effectRef>
+      <a:fontRef idx="minor">
+        <a:schemeClr val="lt1"/>
+      </a:fontRef>
+    </dgm:style>
+  </dgm:styleLbl>
+  <dgm:styleLbl name="asst2">
+    <dgm:scene3d>
+      <a:camera prst="orthographicFront"/>
+      <a:lightRig rig="threePt" dir="t"/>
+    </dgm:scene3d>
+    <dgm:sp3d/>
+    <dgm:txPr/>
+    <dgm:style>
+      <a:lnRef idx="2">
+        <a:scrgbClr r="0" g="0" b="0"/>
+      </a:lnRef>
+      <a:fillRef idx="1">
+        <a:scrgbClr r="0" g="0" b="0"/>
+      </a:fillRef>
+      <a:effectRef idx="0">
+        <a:scrgbClr r="0" g="0" b="0"/>
+      </a:effectRef>
+      <a:fontRef idx="minor">
+        <a:schemeClr val="lt1"/>
+      </a:fontRef>
+    </dgm:style>
+  </dgm:styleLbl>
+  <dgm:styleLbl name="asst3">
+    <dgm:scene3d>
+      <a:camera prst="orthographicFront"/>
+      <a:lightRig rig="threePt" dir="t"/>
+    </dgm:scene3d>
+    <dgm:sp3d/>
+    <dgm:txPr/>
+    <dgm:style>
+      <a:lnRef idx="2">
+        <a:scrgbClr r="0" g="0" b="0"/>
+      </a:lnRef>
+      <a:fillRef idx="1">
+        <a:scrgbClr r="0" g="0" b="0"/>
+      </a:fillRef>
+      <a:effectRef idx="0">
+        <a:scrgbClr r="0" g="0" b="0"/>
+      </a:effectRef>
+      <a:fontRef idx="minor">
+        <a:schemeClr val="lt1"/>
+      </a:fontRef>
+    </dgm:style>
+  </dgm:styleLbl>
+  <dgm:styleLbl name="asst4">
+    <dgm:scene3d>
+      <a:camera prst="orthographicFront"/>
+      <a:lightRig rig="threePt" dir="t"/>
+    </dgm:scene3d>
+    <dgm:sp3d/>
+    <dgm:txPr/>
+    <dgm:style>
+      <a:lnRef idx="2">
+        <a:scrgbClr r="0" g="0" b="0"/>
+      </a:lnRef>
+      <a:fillRef idx="1">
+        <a:scrgbClr r="0" g="0" b="0"/>
+      </a:fillRef>
+      <a:effectRef idx="0">
+        <a:scrgbClr r="0" g="0" b="0"/>
+      </a:effectRef>
+      <a:fontRef idx="minor">
+        <a:schemeClr val="lt1"/>
+      </a:fontRef>
+    </dgm:style>
+  </dgm:styleLbl>
+  <dgm:styleLbl name="parChTrans2D1">
+    <dgm:scene3d>
+      <a:camera prst="orthographicFront"/>
+      <a:lightRig rig="threePt" dir="t"/>
+    </dgm:scene3d>
+    <dgm:sp3d/>
+    <dgm:txPr/>
+    <dgm:style>
+      <a:lnRef idx="2">
+        <a:scrgbClr r="0" g="0" b="0"/>
+      </a:lnRef>
+      <a:fillRef idx="1">
+        <a:scrgbClr r="0" g="0" b="0"/>
+      </a:fillRef>
+      <a:effectRef idx="0">
+        <a:scrgbClr r="0" g="0" b="0"/>
+      </a:effectRef>
+      <a:fontRef idx="minor">
+        <a:schemeClr val="lt1"/>
+      </a:fontRef>
+    </dgm:style>
+  </dgm:styleLbl>
+  <dgm:styleLbl name="parChTrans2D2">
+    <dgm:scene3d>
+      <a:camera prst="orthographicFront"/>
+      <a:lightRig rig="threePt" dir="t"/>
+    </dgm:scene3d>
+    <dgm:sp3d/>
+    <dgm:txPr/>
+    <dgm:style>
+      <a:lnRef idx="2">
+        <a:scrgbClr r="0" g="0" b="0"/>
+      </a:lnRef>
+      <a:fillRef idx="1">
+        <a:scrgbClr r="0" g="0" b="0"/>
+      </a:fillRef>
+      <a:effectRef idx="0">
+        <a:scrgbClr r="0" g="0" b="0"/>
+      </a:effectRef>
+      <a:fontRef idx="minor">
+        <a:schemeClr val="lt1"/>
+      </a:fontRef>
+    </dgm:style>
+  </dgm:styleLbl>
+  <dgm:styleLbl name="parChTrans2D3">
+    <dgm:scene3d>
+      <a:camera prst="orthographicFront"/>
+      <a:lightRig rig="threePt" dir="t"/>
+    </dgm:scene3d>
+    <dgm:sp3d/>
+    <dgm:txPr/>
+    <dgm:style>
+      <a:lnRef idx="2">
+        <a:scrgbClr r="0" g="0" b="0"/>
+      </a:lnRef>
+      <a:fillRef idx="1">
+        <a:scrgbClr r="0" g="0" b="0"/>
+      </a:fillRef>
+      <a:effectRef idx="0">
+        <a:scrgbClr r="0" g="0" b="0"/>
+      </a:effectRef>
+      <a:fontRef idx="minor">
+        <a:schemeClr val="lt1"/>
+      </a:fontRef>
+    </dgm:style>
+  </dgm:styleLbl>
+  <dgm:styleLbl name="parChTrans2D4">
+    <dgm:scene3d>
+      <a:camera prst="orthographicFront"/>
+      <a:lightRig rig="threePt" dir="t"/>
+    </dgm:scene3d>
+    <dgm:sp3d/>
+    <dgm:txPr/>
+    <dgm:style>
+      <a:lnRef idx="2">
+        <a:scrgbClr r="0" g="0" b="0"/>
+      </a:lnRef>
+      <a:fillRef idx="1">
+        <a:scrgbClr r="0" g="0" b="0"/>
+      </a:fillRef>
+      <a:effectRef idx="0">
+        <a:scrgbClr r="0" g="0" b="0"/>
+      </a:effectRef>
+      <a:fontRef idx="minor">
+        <a:schemeClr val="lt1"/>
+      </a:fontRef>
+    </dgm:style>
+  </dgm:styleLbl>
+  <dgm:styleLbl name="parChTrans1D1">
+    <dgm:scene3d>
+      <a:camera prst="orthographicFront"/>
+      <a:lightRig rig="threePt" dir="t"/>
+    </dgm:scene3d>
+    <dgm:sp3d/>
+    <dgm:txPr/>
+    <dgm:style>
+      <a:lnRef idx="2">
+        <a:scrgbClr r="0" g="0" b="0"/>
+      </a:lnRef>
+      <a:fillRef idx="0">
+        <a:scrgbClr r="0" g="0" b="0"/>
+      </a:fillRef>
+      <a:effectRef idx="0">
+        <a:scrgbClr r="0" g="0" b="0"/>
+      </a:effectRef>
+      <a:fontRef idx="minor"/>
+    </dgm:style>
+  </dgm:styleLbl>
+  <dgm:styleLbl name="parChTrans1D2">
+    <dgm:scene3d>
+      <a:camera prst="orthographicFront"/>
+      <a:lightRig rig="threePt" dir="t"/>
+    </dgm:scene3d>
+    <dgm:sp3d/>
+    <dgm:txPr/>
+    <dgm:style>
+      <a:lnRef idx="2">
+        <a:scrgbClr r="0" g="0" b="0"/>
+      </a:lnRef>
+      <a:fillRef idx="0">
+        <a:scrgbClr r="0" g="0" b="0"/>
+      </a:fillRef>
+      <a:effectRef idx="0">
+        <a:scrgbClr r="0" g="0" b="0"/>
+      </a:effectRef>
+      <a:fontRef idx="minor"/>
+    </dgm:style>
+  </dgm:styleLbl>
+  <dgm:styleLbl name="parChTrans1D3">
+    <dgm:scene3d>
+      <a:camera prst="orthographicFront"/>
+      <a:lightRig rig="threePt" dir="t"/>
+    </dgm:scene3d>
+    <dgm:sp3d/>
+    <dgm:txPr/>
+    <dgm:style>
+      <a:lnRef idx="2">
+        <a:scrgbClr r="0" g="0" b="0"/>
+      </a:lnRef>
+      <a:fillRef idx="0">
+        <a:scrgbClr r="0" g="0" b="0"/>
+      </a:fillRef>
+      <a:effectRef idx="0">
+        <a:scrgbClr r="0" g="0" b="0"/>
+      </a:effectRef>
+      <a:fontRef idx="minor"/>
+    </dgm:style>
+  </dgm:styleLbl>
+  <dgm:styleLbl name="parChTrans1D4">
+    <dgm:scene3d>
+      <a:camera prst="orthographicFront"/>
+      <a:lightRig rig="threePt" dir="t"/>
+    </dgm:scene3d>
+    <dgm:sp3d/>
+    <dgm:txPr/>
+    <dgm:style>
+      <a:lnRef idx="2">
+        <a:scrgbClr r="0" g="0" b="0"/>
+      </a:lnRef>
+      <a:fillRef idx="0">
+        <a:scrgbClr r="0" g="0" b="0"/>
+      </a:fillRef>
+      <a:effectRef idx="0">
+        <a:scrgbClr r="0" g="0" b="0"/>
+      </a:effectRef>
+      <a:fontRef idx="minor"/>
+    </dgm:style>
+  </dgm:styleLbl>
+  <dgm:styleLbl name="fgAcc1">
+    <dgm:scene3d>
+      <a:camera prst="orthographicFront"/>
+      <a:lightRig rig="threePt" dir="t"/>
+    </dgm:scene3d>
+    <dgm:sp3d/>
+    <dgm:txPr/>
+    <dgm:style>
+      <a:lnRef idx="2">
+        <a:scrgbClr r="0" g="0" b="0"/>
+      </a:lnRef>
+      <a:fillRef idx="1">
+        <a:scrgbClr r="0" g="0" b="0"/>
+      </a:fillRef>
+      <a:effectRef idx="0">
+        <a:scrgbClr r="0" g="0" b="0"/>
+      </a:effectRef>
+      <a:fontRef idx="minor"/>
+    </dgm:style>
+  </dgm:styleLbl>
+  <dgm:styleLbl name="conFgAcc1">
+    <dgm:scene3d>
+      <a:camera prst="orthographicFront"/>
+      <a:lightRig rig="threePt" dir="t"/>
+    </dgm:scene3d>
+    <dgm:sp3d/>
+    <dgm:txPr/>
+    <dgm:style>
+      <a:lnRef idx="2">
+        <a:scrgbClr r="0" g="0" b="0"/>
+      </a:lnRef>
+      <a:fillRef idx="1">
+        <a:scrgbClr r="0" g="0" b="0"/>
+      </a:fillRef>
+      <a:effectRef idx="0">
+        <a:scrgbClr r="0" g="0" b="0"/>
+      </a:effectRef>
+      <a:fontRef idx="minor"/>
+    </dgm:style>
+  </dgm:styleLbl>
+  <dgm:styleLbl name="alignAcc1">
+    <dgm:scene3d>
+      <a:camera prst="orthographicFront"/>
+      <a:lightRig rig="threePt" dir="t"/>
+    </dgm:scene3d>
+    <dgm:sp3d/>
+    <dgm:txPr/>
+    <dgm:style>
+      <a:lnRef idx="2">
+        <a:scrgbClr r="0" g="0" b="0"/>
+      </a:lnRef>
+      <a:fillRef idx="1">
+        <a:scrgbClr r="0" g="0" b="0"/>
+      </a:fillRef>
+      <a:effectRef idx="0">
+        <a:scrgbClr r="0" g="0" b="0"/>
+      </a:effectRef>
+      <a:fontRef idx="minor"/>
+    </dgm:style>
+  </dgm:styleLbl>
+  <dgm:styleLbl name="trAlignAcc1">
+    <dgm:scene3d>
+      <a:camera prst="orthographicFront"/>
+      <a:lightRig rig="threePt" dir="t"/>
+    </dgm:scene3d>
+    <dgm:sp3d/>
+    <dgm:txPr/>
+    <dgm:style>
+      <a:lnRef idx="1">
+        <a:scrgbClr r="0" g="0" b="0"/>
+      </a:lnRef>
+      <a:fillRef idx="1">
+        <a:scrgbClr r="0" g="0" b="0"/>
+      </a:fillRef>
+      <a:effectRef idx="0">
+        <a:scrgbClr r="0" g="0" b="0"/>
+      </a:effectRef>
+      <a:fontRef idx="minor"/>
+    </dgm:style>
+  </dgm:styleLbl>
+  <dgm:styleLbl name="bgAcc1">
+    <dgm:scene3d>
+      <a:camera prst="orthographicFront"/>
+      <a:lightRig rig="threePt" dir="t"/>
+    </dgm:scene3d>
+    <dgm:sp3d/>
+    <dgm:txPr/>
+    <dgm:style>
+      <a:lnRef idx="2">
+        <a:scrgbClr r="0" g="0" b="0"/>
+      </a:lnRef>
+      <a:fillRef idx="1">
+        <a:scrgbClr r="0" g="0" b="0"/>
+      </a:fillRef>
+      <a:effectRef idx="0">
+        <a:scrgbClr r="0" g="0" b="0"/>
+      </a:effectRef>
+      <a:fontRef idx="minor"/>
+    </dgm:style>
+  </dgm:styleLbl>
+  <dgm:styleLbl name="solidFgAcc1">
+    <dgm:scene3d>
+      <a:camera prst="orthographicFront"/>
+      <a:lightRig rig="threePt" dir="t"/>
+    </dgm:scene3d>
+    <dgm:sp3d/>
+    <dgm:txPr/>
+    <dgm:style>
+      <a:lnRef idx="2">
+        <a:scrgbClr r="0" g="0" b="0"/>
+      </a:lnRef>
+      <a:fillRef idx="1">
+        <a:scrgbClr r="0" g="0" b="0"/>
+      </a:fillRef>
+      <a:effectRef idx="0">
+        <a:scrgbClr r="0" g="0" b="0"/>
+      </a:effectRef>
+      <a:fontRef idx="minor"/>
+    </dgm:style>
+  </dgm:styleLbl>
+  <dgm:styleLbl name="solidAlignAcc1">
+    <dgm:scene3d>
+      <a:camera prst="orthographicFront"/>
+      <a:lightRig rig="threePt" dir="t"/>
+    </dgm:scene3d>
+    <dgm:sp3d/>
+    <dgm:txPr/>
+    <dgm:style>
+      <a:lnRef idx="2">
+        <a:scrgbClr r="0" g="0" b="0"/>
+      </a:lnRef>
+      <a:fillRef idx="1">
+        <a:scrgbClr r="0" g="0" b="0"/>
+      </a:fillRef>
+      <a:effectRef idx="0">
+        <a:scrgbClr r="0" g="0" b="0"/>
+      </a:effectRef>
+      <a:fontRef idx="minor"/>
+    </dgm:style>
+  </dgm:styleLbl>
+  <dgm:styleLbl name="solidBgAcc1">
+    <dgm:scene3d>
+      <a:camera prst="orthographicFront"/>
+      <a:lightRig rig="threePt" dir="t"/>
+    </dgm:scene3d>
+    <dgm:sp3d/>
+    <dgm:txPr/>
+    <dgm:style>
+      <a:lnRef idx="2">
+        <a:scrgbClr r="0" g="0" b="0"/>
+      </a:lnRef>
+      <a:fillRef idx="1">
+        <a:scrgbClr r="0" g="0" b="0"/>
+      </a:fillRef>
+      <a:effectRef idx="0">
+        <a:scrgbClr r="0" g="0" b="0"/>
+      </a:effectRef>
+      <a:fontRef idx="minor"/>
+    </dgm:style>
+  </dgm:styleLbl>
+  <dgm:styleLbl name="fgAccFollowNode1">
+    <dgm:scene3d>
+      <a:camera prst="orthographicFront"/>
+      <a:lightRig rig="threePt" dir="t"/>
+    </dgm:scene3d>
+    <dgm:sp3d/>
+    <dgm:txPr/>
+    <dgm:style>
+      <a:lnRef idx="2">
+        <a:scrgbClr r="0" g="0" b="0"/>
+      </a:lnRef>
+      <a:fillRef idx="1">
+        <a:scrgbClr r="0" g="0" b="0"/>
+      </a:fillRef>
+      <a:effectRef idx="0">
+        <a:scrgbClr r="0" g="0" b="0"/>
+      </a:effectRef>
+      <a:fontRef idx="minor"/>
+    </dgm:style>
+  </dgm:styleLbl>
+  <dgm:styleLbl name="alignAccFollowNode1">
+    <dgm:scene3d>
+      <a:camera prst="orthographicFront"/>
+      <a:lightRig rig="threePt" dir="t"/>
+    </dgm:scene3d>
+    <dgm:sp3d/>
+    <dgm:txPr/>
+    <dgm:style>
+      <a:lnRef idx="2">
+        <a:scrgbClr r="0" g="0" b="0"/>
+      </a:lnRef>
+      <a:fillRef idx="1">
+        <a:scrgbClr r="0" g="0" b="0"/>
+      </a:fillRef>
+      <a:effectRef idx="0">
+        <a:scrgbClr r="0" g="0" b="0"/>
+      </a:effectRef>
+      <a:fontRef idx="minor"/>
+    </dgm:style>
+  </dgm:styleLbl>
+  <dgm:styleLbl name="bgAccFollowNode1">
+    <dgm:scene3d>
+      <a:camera prst="orthographicFront"/>
+      <a:lightRig rig="threePt" dir="t"/>
+    </dgm:scene3d>
+    <dgm:sp3d/>
+    <dgm:txPr/>
+    <dgm:style>
+      <a:lnRef idx="2">
+        <a:scrgbClr r="0" g="0" b="0"/>
+      </a:lnRef>
+      <a:fillRef idx="1">
+        <a:scrgbClr r="0" g="0" b="0"/>
+      </a:fillRef>
+      <a:effectRef idx="0">
+        <a:scrgbClr r="0" g="0" b="0"/>
+      </a:effectRef>
+      <a:fontRef idx="minor"/>
+    </dgm:style>
+  </dgm:styleLbl>
+  <dgm:styleLbl name="fgAcc0">
+    <dgm:scene3d>
+      <a:camera prst="orthographicFront"/>
+      <a:lightRig rig="threePt" dir="t"/>
+    </dgm:scene3d>
+    <dgm:sp3d/>
+    <dgm:txPr/>
+    <dgm:style>
+      <a:lnRef idx="2">
+        <a:scrgbClr r="0" g="0" b="0"/>
+      </a:lnRef>
+      <a:fillRef idx="1">
+        <a:scrgbClr r="0" g="0" b="0"/>
+      </a:fillRef>
+      <a:effectRef idx="0">
+        <a:scrgbClr r="0" g="0" b="0"/>
+      </a:effectRef>
+      <a:fontRef idx="minor"/>
+    </dgm:style>
+  </dgm:styleLbl>
+  <dgm:styleLbl name="fgAcc2">
+    <dgm:scene3d>
+      <a:camera prst="orthographicFront"/>
+      <a:lightRig rig="threePt" dir="t"/>
+    </dgm:scene3d>
+    <dgm:sp3d/>
+    <dgm:txPr/>
+    <dgm:style>
+      <a:lnRef idx="2">
+        <a:scrgbClr r="0" g="0" b="0"/>
+      </a:lnRef>
+      <a:fillRef idx="1">
+        <a:scrgbClr r="0" g="0" b="0"/>
+      </a:fillRef>
+      <a:effectRef idx="0">
+        <a:scrgbClr r="0" g="0" b="0"/>
+      </a:effectRef>
+      <a:fontRef idx="minor"/>
+    </dgm:style>
+  </dgm:styleLbl>
+  <dgm:styleLbl name="fgAcc3">
+    <dgm:scene3d>
+      <a:camera prst="orthographicFront"/>
+      <a:lightRig rig="threePt" dir="t"/>
+    </dgm:scene3d>
+    <dgm:sp3d/>
+    <dgm:txPr/>
+    <dgm:style>
+      <a:lnRef idx="2">
+        <a:scrgbClr r="0" g="0" b="0"/>
+      </a:lnRef>
+      <a:fillRef idx="1">
+        <a:scrgbClr r="0" g="0" b="0"/>
+      </a:fillRef>
+      <a:effectRef idx="0">
+        <a:scrgbClr r="0" g="0" b="0"/>
+      </a:effectRef>
+      <a:fontRef idx="minor"/>
+    </dgm:style>
+  </dgm:styleLbl>
+  <dgm:styleLbl name="fgAcc4">
+    <dgm:scene3d>
+      <a:camera prst="orthographicFront"/>
+      <a:lightRig rig="threePt" dir="t"/>
+    </dgm:scene3d>
+    <dgm:sp3d/>
+    <dgm:txPr/>
+    <dgm:style>
+      <a:lnRef idx="2">
+        <a:scrgbClr r="0" g="0" b="0"/>
+      </a:lnRef>
+      <a:fillRef idx="1">
+        <a:scrgbClr r="0" g="0" b="0"/>
+      </a:fillRef>
+      <a:effectRef idx="0">
+        <a:scrgbClr r="0" g="0" b="0"/>
+      </a:effectRef>
+      <a:fontRef idx="minor"/>
+    </dgm:style>
+  </dgm:styleLbl>
+  <dgm:styleLbl name="bgShp">
+    <dgm:scene3d>
+      <a:camera prst="orthographicFront"/>
+      <a:lightRig rig="threePt" dir="t"/>
+    </dgm:scene3d>
+    <dgm:sp3d/>
+    <dgm:txPr/>
+    <dgm:style>
+      <a:lnRef idx="0">
+        <a:scrgbClr r="0" g="0" b="0"/>
+      </a:lnRef>
+      <a:fillRef idx="1">
+        <a:scrgbClr r="0" g="0" b="0"/>
+      </a:fillRef>
+      <a:effectRef idx="0">
+        <a:scrgbClr r="0" g="0" b="0"/>
+      </a:effectRef>
+      <a:fontRef idx="minor"/>
+    </dgm:style>
+  </dgm:styleLbl>
+  <dgm:styleLbl name="dkBgShp">
+    <dgm:scene3d>
+      <a:camera prst="orthographicFront"/>
+      <a:lightRig rig="threePt" dir="t"/>
+    </dgm:scene3d>
+    <dgm:sp3d/>
+    <dgm:txPr/>
+    <dgm:style>
+      <a:lnRef idx="0">
+        <a:scrgbClr r="0" g="0" b="0"/>
+      </a:lnRef>
+      <a:fillRef idx="1">
+        <a:scrgbClr r="0" g="0" b="0"/>
+      </a:fillRef>
+      <a:effectRef idx="0">
+        <a:scrgbClr r="0" g="0" b="0"/>
+      </a:effectRef>
+      <a:fontRef idx="minor"/>
+    </dgm:style>
+  </dgm:styleLbl>
+  <dgm:styleLbl name="trBgShp">
+    <dgm:scene3d>
+      <a:camera prst="orthographicFront"/>
+      <a:lightRig rig="threePt" dir="t"/>
+    </dgm:scene3d>
+    <dgm:sp3d/>
+    <dgm:txPr/>
+    <dgm:style>
+      <a:lnRef idx="0">
+        <a:scrgbClr r="0" g="0" b="0"/>
+      </a:lnRef>
+      <a:fillRef idx="1">
+        <a:scrgbClr r="0" g="0" b="0"/>
+      </a:fillRef>
+      <a:effectRef idx="0">
+        <a:scrgbClr r="0" g="0" b="0"/>
+      </a:effectRef>
+      <a:fontRef idx="minor"/>
+    </dgm:style>
+  </dgm:styleLbl>
+  <dgm:styleLbl name="fgShp">
+    <dgm:scene3d>
+      <a:camera prst="orthographicFront"/>
+      <a:lightRig rig="threePt" dir="t"/>
+    </dgm:scene3d>
+    <dgm:sp3d/>
+    <dgm:txPr/>
+    <dgm:style>
+      <a:lnRef idx="2">
+        <a:scrgbClr r="0" g="0" b="0"/>
+      </a:lnRef>
+      <a:fillRef idx="1">
+        <a:scrgbClr r="0" g="0" b="0"/>
+      </a:fillRef>
+      <a:effectRef idx="0">
+        <a:scrgbClr r="0" g="0" b="0"/>
+      </a:effectRef>
+      <a:fontRef idx="minor"/>
+    </dgm:style>
+  </dgm:styleLbl>
+  <dgm:styleLbl name="revTx">
+    <dgm:scene3d>
+      <a:camera prst="orthographicFront"/>
+      <a:lightRig rig="threePt" dir="t"/>
+    </dgm:scene3d>
+    <dgm:sp3d/>
+    <dgm:txPr/>
+    <dgm:style>
+      <a:lnRef idx="0">
+        <a:scrgbClr r="0" g="0" b="0"/>
+      </a:lnRef>
+      <a:fillRef idx="0">
+        <a:scrgbClr r="0" g="0" b="0"/>
+      </a:fillRef>
+      <a:effectRef idx="0">
+        <a:scrgbClr r="0" g="0" b="0"/>
+      </a:effectRef>
+      <a:fontRef idx="minor"/>
+    </dgm:style>
+  </dgm:styleLbl>
+</dgm:styleDef>
+</file>
+
+<file path=ppt/diagrams/quickStyle6.xml><?xml version="1.0" encoding="utf-8"?>
+<dgm:styleDef xmlns:dgm="http://schemas.openxmlformats.org/drawingml/2006/diagram" xmlns:a="http://schemas.openxmlformats.org/drawingml/2006/main" uniqueId="urn:microsoft.com/office/officeart/2005/8/quickstyle/simple1">
+  <dgm:title val=""/>
+  <dgm:desc val=""/>
+  <dgm:catLst>
+    <dgm:cat type="simple" pri="10100"/>
+  </dgm:catLst>
+  <dgm:scene3d>
+    <a:camera prst="orthographicFront"/>
+    <a:lightRig rig="threePt" dir="t"/>
+  </dgm:scene3d>
+  <dgm:styleLbl name="node0">
+    <dgm:scene3d>
+      <a:camera prst="orthographicFront"/>
+      <a:lightRig rig="threePt" dir="t"/>
+    </dgm:scene3d>
+    <dgm:sp3d/>
+    <dgm:txPr/>
+    <dgm:style>
+      <a:lnRef idx="2">
+        <a:scrgbClr r="0" g="0" b="0"/>
+      </a:lnRef>
+      <a:fillRef idx="1">
+        <a:scrgbClr r="0" g="0" b="0"/>
+      </a:fillRef>
+      <a:effectRef idx="0">
+        <a:scrgbClr r="0" g="0" b="0"/>
+      </a:effectRef>
+      <a:fontRef idx="minor">
+        <a:schemeClr val="lt1"/>
+      </a:fontRef>
+    </dgm:style>
+  </dgm:styleLbl>
+  <dgm:styleLbl name="lnNode1">
+    <dgm:scene3d>
+      <a:camera prst="orthographicFront"/>
+      <a:lightRig rig="threePt" dir="t"/>
+    </dgm:scene3d>
+    <dgm:sp3d/>
+    <dgm:txPr/>
+    <dgm:style>
+      <a:lnRef idx="2">
+        <a:scrgbClr r="0" g="0" b="0"/>
+      </a:lnRef>
+      <a:fillRef idx="1">
+        <a:scrgbClr r="0" g="0" b="0"/>
+      </a:fillRef>
+      <a:effectRef idx="0">
+        <a:scrgbClr r="0" g="0" b="0"/>
+      </a:effectRef>
+      <a:fontRef idx="minor">
+        <a:schemeClr val="lt1"/>
+      </a:fontRef>
+    </dgm:style>
+  </dgm:styleLbl>
+  <dgm:styleLbl name="vennNode1">
+    <dgm:scene3d>
+      <a:camera prst="orthographicFront"/>
+      <a:lightRig rig="threePt" dir="t"/>
+    </dgm:scene3d>
+    <dgm:sp3d/>
+    <dgm:txPr/>
+    <dgm:style>
+      <a:lnRef idx="2">
+        <a:scrgbClr r="0" g="0" b="0"/>
+      </a:lnRef>
+      <a:fillRef idx="1">
+        <a:scrgbClr r="0" g="0" b="0"/>
+      </a:fillRef>
+      <a:effectRef idx="0">
+        <a:scrgbClr r="0" g="0" b="0"/>
+      </a:effectRef>
+      <a:fontRef idx="minor">
+        <a:schemeClr val="tx1"/>
+      </a:fontRef>
+    </dgm:style>
+  </dgm:styleLbl>
+  <dgm:styleLbl name="alignNode1">
+    <dgm:scene3d>
+      <a:camera prst="orthographicFront"/>
+      <a:lightRig rig="threePt" dir="t"/>
+    </dgm:scene3d>
+    <dgm:sp3d/>
+    <dgm:txPr/>
+    <dgm:style>
+      <a:lnRef idx="2">
+        <a:scrgbClr r="0" g="0" b="0"/>
+      </a:lnRef>
+      <a:fillRef idx="1">
+        <a:scrgbClr r="0" g="0" b="0"/>
+      </a:fillRef>
+      <a:effectRef idx="0">
+        <a:scrgbClr r="0" g="0" b="0"/>
+      </a:effectRef>
+      <a:fontRef idx="minor">
+        <a:schemeClr val="lt1"/>
+      </a:fontRef>
+    </dgm:style>
+  </dgm:styleLbl>
+  <dgm:styleLbl name="node1">
+    <dgm:scene3d>
+      <a:camera prst="orthographicFront"/>
+      <a:lightRig rig="threePt" dir="t"/>
+    </dgm:scene3d>
+    <dgm:sp3d/>
+    <dgm:txPr/>
+    <dgm:style>
+      <a:lnRef idx="2">
+        <a:scrgbClr r="0" g="0" b="0"/>
+      </a:lnRef>
+      <a:fillRef idx="1">
+        <a:scrgbClr r="0" g="0" b="0"/>
+      </a:fillRef>
+      <a:effectRef idx="0">
+        <a:scrgbClr r="0" g="0" b="0"/>
+      </a:effectRef>
+      <a:fontRef idx="minor">
+        <a:schemeClr val="lt1"/>
+      </a:fontRef>
+    </dgm:style>
+  </dgm:styleLbl>
+  <dgm:styleLbl name="node2">
+    <dgm:scene3d>
+      <a:camera prst="orthographicFront"/>
+      <a:lightRig rig="threePt" dir="t"/>
+    </dgm:scene3d>
+    <dgm:sp3d/>
+    <dgm:txPr/>
+    <dgm:style>
+      <a:lnRef idx="2">
+        <a:scrgbClr r="0" g="0" b="0"/>
+      </a:lnRef>
+      <a:fillRef idx="1">
+        <a:scrgbClr r="0" g="0" b="0"/>
+      </a:fillRef>
+      <a:effectRef idx="0">
+        <a:scrgbClr r="0" g="0" b="0"/>
+      </a:effectRef>
+      <a:fontRef idx="minor">
+        <a:schemeClr val="lt1"/>
+      </a:fontRef>
+    </dgm:style>
+  </dgm:styleLbl>
+  <dgm:styleLbl name="node3">
+    <dgm:scene3d>
+      <a:camera prst="orthographicFront"/>
+      <a:lightRig rig="threePt" dir="t"/>
+    </dgm:scene3d>
+    <dgm:sp3d/>
+    <dgm:txPr/>
+    <dgm:style>
+      <a:lnRef idx="2">
+        <a:scrgbClr r="0" g="0" b="0"/>
+      </a:lnRef>
+      <a:fillRef idx="1">
+        <a:scrgbClr r="0" g="0" b="0"/>
+      </a:fillRef>
+      <a:effectRef idx="0">
+        <a:scrgbClr r="0" g="0" b="0"/>
+      </a:effectRef>
+      <a:fontRef idx="minor">
+        <a:schemeClr val="lt1"/>
+      </a:fontRef>
+    </dgm:style>
+  </dgm:styleLbl>
+  <dgm:styleLbl name="node4">
+    <dgm:scene3d>
+      <a:camera prst="orthographicFront"/>
+      <a:lightRig rig="threePt" dir="t"/>
+    </dgm:scene3d>
+    <dgm:sp3d/>
+    <dgm:txPr/>
+    <dgm:style>
+      <a:lnRef idx="2">
+        <a:scrgbClr r="0" g="0" b="0"/>
+      </a:lnRef>
+      <a:fillRef idx="1">
+        <a:scrgbClr r="0" g="0" b="0"/>
+      </a:fillRef>
+      <a:effectRef idx="0">
+        <a:scrgbClr r="0" g="0" b="0"/>
+      </a:effectRef>
+      <a:fontRef idx="minor">
+        <a:schemeClr val="lt1"/>
+      </a:fontRef>
+    </dgm:style>
+  </dgm:styleLbl>
+  <dgm:styleLbl name="fgImgPlace1">
+    <dgm:scene3d>
+      <a:camera prst="orthographicFront"/>
+      <a:lightRig rig="threePt" dir="t"/>
+    </dgm:scene3d>
+    <dgm:sp3d/>
+    <dgm:txPr/>
+    <dgm:style>
+      <a:lnRef idx="2">
+        <a:scrgbClr r="0" g="0" b="0"/>
+      </a:lnRef>
+      <a:fillRef idx="1">
+        <a:scrgbClr r="0" g="0" b="0"/>
+      </a:fillRef>
+      <a:effectRef idx="0">
+        <a:scrgbClr r="0" g="0" b="0"/>
+      </a:effectRef>
+      <a:fontRef idx="minor"/>
+    </dgm:style>
+  </dgm:styleLbl>
+  <dgm:styleLbl name="alignImgPlace1">
+    <dgm:scene3d>
+      <a:camera prst="orthographicFront"/>
+      <a:lightRig rig="threePt" dir="t"/>
+    </dgm:scene3d>
+    <dgm:sp3d/>
+    <dgm:txPr/>
+    <dgm:style>
+      <a:lnRef idx="2">
+        <a:scrgbClr r="0" g="0" b="0"/>
+      </a:lnRef>
+      <a:fillRef idx="1">
+        <a:scrgbClr r="0" g="0" b="0"/>
+      </a:fillRef>
+      <a:effectRef idx="0">
+        <a:scrgbClr r="0" g="0" b="0"/>
+      </a:effectRef>
+      <a:fontRef idx="minor"/>
+    </dgm:style>
+  </dgm:styleLbl>
+  <dgm:styleLbl name="bgImgPlace1">
+    <dgm:scene3d>
+      <a:camera prst="orthographicFront"/>
+      <a:lightRig rig="threePt" dir="t"/>
+    </dgm:scene3d>
+    <dgm:sp3d/>
+    <dgm:txPr/>
+    <dgm:style>
+      <a:lnRef idx="2">
+        <a:scrgbClr r="0" g="0" b="0"/>
+      </a:lnRef>
+      <a:fillRef idx="1">
+        <a:scrgbClr r="0" g="0" b="0"/>
+      </a:fillRef>
+      <a:effectRef idx="0">
+        <a:scrgbClr r="0" g="0" b="0"/>
+      </a:effectRef>
+      <a:fontRef idx="minor"/>
+    </dgm:style>
+  </dgm:styleLbl>
+  <dgm:styleLbl name="sibTrans2D1">
+    <dgm:scene3d>
+      <a:camera prst="orthographicFront"/>
+      <a:lightRig rig="threePt" dir="t"/>
+    </dgm:scene3d>
+    <dgm:sp3d/>
+    <dgm:txPr/>
+    <dgm:style>
+      <a:lnRef idx="0">
+        <a:scrgbClr r="0" g="0" b="0"/>
+      </a:lnRef>
+      <a:fillRef idx="1">
+        <a:scrgbClr r="0" g="0" b="0"/>
+      </a:fillRef>
+      <a:effectRef idx="0">
+        <a:scrgbClr r="0" g="0" b="0"/>
+      </a:effectRef>
+      <a:fontRef idx="minor">
+        <a:schemeClr val="lt1"/>
+      </a:fontRef>
+    </dgm:style>
+  </dgm:styleLbl>
+  <dgm:styleLbl name="fgSibTrans2D1">
+    <dgm:scene3d>
+      <a:camera prst="orthographicFront"/>
+      <a:lightRig rig="threePt" dir="t"/>
+    </dgm:scene3d>
+    <dgm:sp3d/>
+    <dgm:txPr/>
+    <dgm:style>
+      <a:lnRef idx="0">
+        <a:scrgbClr r="0" g="0" b="0"/>
+      </a:lnRef>
+      <a:fillRef idx="1">
+        <a:scrgbClr r="0" g="0" b="0"/>
+      </a:fillRef>
+      <a:effectRef idx="0">
+        <a:scrgbClr r="0" g="0" b="0"/>
+      </a:effectRef>
+      <a:fontRef idx="minor">
+        <a:schemeClr val="lt1"/>
+      </a:fontRef>
+    </dgm:style>
+  </dgm:styleLbl>
+  <dgm:styleLbl name="bgSibTrans2D1">
+    <dgm:scene3d>
+      <a:camera prst="orthographicFront"/>
+      <a:lightRig rig="threePt" dir="t"/>
+    </dgm:scene3d>
+    <dgm:sp3d/>
+    <dgm:txPr/>
+    <dgm:style>
+      <a:lnRef idx="0">
+        <a:scrgbClr r="0" g="0" b="0"/>
+      </a:lnRef>
+      <a:fillRef idx="1">
+        <a:scrgbClr r="0" g="0" b="0"/>
+      </a:fillRef>
+      <a:effectRef idx="0">
+        <a:scrgbClr r="0" g="0" b="0"/>
+      </a:effectRef>
+      <a:fontRef idx="minor">
+        <a:schemeClr val="lt1"/>
+      </a:fontRef>
+    </dgm:style>
+  </dgm:styleLbl>
+  <dgm:styleLbl name="sibTrans1D1">
+    <dgm:scene3d>
+      <a:camera prst="orthographicFront"/>
+      <a:lightRig rig="threePt" dir="t"/>
+    </dgm:scene3d>
+    <dgm:sp3d/>
+    <dgm:txPr/>
+    <dgm:style>
+      <a:lnRef idx="1">
+        <a:scrgbClr r="0" g="0" b="0"/>
+      </a:lnRef>
+      <a:fillRef idx="0">
+        <a:scrgbClr r="0" g="0" b="0"/>
+      </a:fillRef>
+      <a:effectRef idx="0">
+        <a:scrgbClr r="0" g="0" b="0"/>
+      </a:effectRef>
+      <a:fontRef idx="minor"/>
+    </dgm:style>
+  </dgm:styleLbl>
+  <dgm:styleLbl name="callout">
+    <dgm:scene3d>
+      <a:camera prst="orthographicFront"/>
+      <a:lightRig rig="threePt" dir="t"/>
+    </dgm:scene3d>
+    <dgm:sp3d/>
+    <dgm:txPr/>
+    <dgm:style>
+      <a:lnRef idx="2">
+        <a:scrgbClr r="0" g="0" b="0"/>
+      </a:lnRef>
+      <a:fillRef idx="1">
+        <a:scrgbClr r="0" g="0" b="0"/>
+      </a:fillRef>
+      <a:effectRef idx="0">
+        <a:scrgbClr r="0" g="0" b="0"/>
+      </a:effectRef>
+      <a:fontRef idx="minor"/>
+    </dgm:style>
+  </dgm:styleLbl>
+  <dgm:styleLbl name="asst0">
+    <dgm:scene3d>
+      <a:camera prst="orthographicFront"/>
+      <a:lightRig rig="threePt" dir="t"/>
+    </dgm:scene3d>
+    <dgm:sp3d/>
+    <dgm:txPr/>
+    <dgm:style>
+      <a:lnRef idx="2">
+        <a:scrgbClr r="0" g="0" b="0"/>
+      </a:lnRef>
+      <a:fillRef idx="1">
+        <a:scrgbClr r="0" g="0" b="0"/>
+      </a:fillRef>
+      <a:effectRef idx="0">
+        <a:scrgbClr r="0" g="0" b="0"/>
+      </a:effectRef>
+      <a:fontRef idx="minor">
+        <a:schemeClr val="lt1"/>
+      </a:fontRef>
+    </dgm:style>
+  </dgm:styleLbl>
+  <dgm:styleLbl name="asst1">
+    <dgm:scene3d>
+      <a:camera prst="orthographicFront"/>
+      <a:lightRig rig="threePt" dir="t"/>
+    </dgm:scene3d>
+    <dgm:sp3d/>
+    <dgm:txPr/>
+    <dgm:style>
+      <a:lnRef idx="2">
+        <a:scrgbClr r="0" g="0" b="0"/>
+      </a:lnRef>
+      <a:fillRef idx="1">
+        <a:scrgbClr r="0" g="0" b="0"/>
+      </a:fillRef>
+      <a:effectRef idx="0">
+        <a:scrgbClr r="0" g="0" b="0"/>
+      </a:effectRef>
+      <a:fontRef idx="minor">
+        <a:schemeClr val="lt1"/>
+      </a:fontRef>
+    </dgm:style>
+  </dgm:styleLbl>
+  <dgm:styleLbl name="asst2">
+    <dgm:scene3d>
+      <a:camera prst="orthographicFront"/>
+      <a:lightRig rig="threePt" dir="t"/>
+    </dgm:scene3d>
+    <dgm:sp3d/>
+    <dgm:txPr/>
+    <dgm:style>
+      <a:lnRef idx="2">
+        <a:scrgbClr r="0" g="0" b="0"/>
+      </a:lnRef>
+      <a:fillRef idx="1">
+        <a:scrgbClr r="0" g="0" b="0"/>
+      </a:fillRef>
+      <a:effectRef idx="0">
+        <a:scrgbClr r="0" g="0" b="0"/>
+      </a:effectRef>
+      <a:fontRef idx="minor">
+        <a:schemeClr val="lt1"/>
+      </a:fontRef>
+    </dgm:style>
+  </dgm:styleLbl>
+  <dgm:styleLbl name="asst3">
+    <dgm:scene3d>
+      <a:camera prst="orthographicFront"/>
+      <a:lightRig rig="threePt" dir="t"/>
+    </dgm:scene3d>
+    <dgm:sp3d/>
+    <dgm:txPr/>
+    <dgm:style>
+      <a:lnRef idx="2">
+        <a:scrgbClr r="0" g="0" b="0"/>
+      </a:lnRef>
+      <a:fillRef idx="1">
+        <a:scrgbClr r="0" g="0" b="0"/>
+      </a:fillRef>
+      <a:effectRef idx="0">
+        <a:scrgbClr r="0" g="0" b="0"/>
+      </a:effectRef>
+      <a:fontRef idx="minor">
+        <a:schemeClr val="lt1"/>
+      </a:fontRef>
+    </dgm:style>
+  </dgm:styleLbl>
+  <dgm:styleLbl name="asst4">
+    <dgm:scene3d>
+      <a:camera prst="orthographicFront"/>
+      <a:lightRig rig="threePt" dir="t"/>
+    </dgm:scene3d>
+    <dgm:sp3d/>
+    <dgm:txPr/>
+    <dgm:style>
+      <a:lnRef idx="2">
+        <a:scrgbClr r="0" g="0" b="0"/>
+      </a:lnRef>
+      <a:fillRef idx="1">
+        <a:scrgbClr r="0" g="0" b="0"/>
+      </a:fillRef>
+      <a:effectRef idx="0">
+        <a:scrgbClr r="0" g="0" b="0"/>
+      </a:effectRef>
+      <a:fontRef idx="minor">
+        <a:schemeClr val="lt1"/>
+      </a:fontRef>
+    </dgm:style>
+  </dgm:styleLbl>
+  <dgm:styleLbl name="parChTrans2D1">
+    <dgm:scene3d>
+      <a:camera prst="orthographicFront"/>
+      <a:lightRig rig="threePt" dir="t"/>
+    </dgm:scene3d>
+    <dgm:sp3d/>
+    <dgm:txPr/>
+    <dgm:style>
+      <a:lnRef idx="2">
+        <a:scrgbClr r="0" g="0" b="0"/>
+      </a:lnRef>
+      <a:fillRef idx="1">
+        <a:scrgbClr r="0" g="0" b="0"/>
+      </a:fillRef>
+      <a:effectRef idx="0">
+        <a:scrgbClr r="0" g="0" b="0"/>
+      </a:effectRef>
+      <a:fontRef idx="minor">
+        <a:schemeClr val="lt1"/>
+      </a:fontRef>
+    </dgm:style>
+  </dgm:styleLbl>
+  <dgm:styleLbl name="parChTrans2D2">
+    <dgm:scene3d>
+      <a:camera prst="orthographicFront"/>
+      <a:lightRig rig="threePt" dir="t"/>
+    </dgm:scene3d>
+    <dgm:sp3d/>
+    <dgm:txPr/>
+    <dgm:style>
+      <a:lnRef idx="2">
+        <a:scrgbClr r="0" g="0" b="0"/>
+      </a:lnRef>
+      <a:fillRef idx="1">
+        <a:scrgbClr r="0" g="0" b="0"/>
+      </a:fillRef>
+      <a:effectRef idx="0">
+        <a:scrgbClr r="0" g="0" b="0"/>
+      </a:effectRef>
+      <a:fontRef idx="minor">
+        <a:schemeClr val="lt1"/>
+      </a:fontRef>
+    </dgm:style>
+  </dgm:styleLbl>
+  <dgm:styleLbl name="parChTrans2D3">
+    <dgm:scene3d>
+      <a:camera prst="orthographicFront"/>
+      <a:lightRig rig="threePt" dir="t"/>
+    </dgm:scene3d>
+    <dgm:sp3d/>
+    <dgm:txPr/>
+    <dgm:style>
+      <a:lnRef idx="2">
+        <a:scrgbClr r="0" g="0" b="0"/>
+      </a:lnRef>
+      <a:fillRef idx="1">
+        <a:scrgbClr r="0" g="0" b="0"/>
+      </a:fillRef>
+      <a:effectRef idx="0">
+        <a:scrgbClr r="0" g="0" b="0"/>
+      </a:effectRef>
+      <a:fontRef idx="minor">
+        <a:schemeClr val="lt1"/>
+      </a:fontRef>
+    </dgm:style>
+  </dgm:styleLbl>
+  <dgm:styleLbl name="parChTrans2D4">
+    <dgm:scene3d>
+      <a:camera prst="orthographicFront"/>
+      <a:lightRig rig="threePt" dir="t"/>
+    </dgm:scene3d>
+    <dgm:sp3d/>
+    <dgm:txPr/>
+    <dgm:style>
+      <a:lnRef idx="2">
+        <a:scrgbClr r="0" g="0" b="0"/>
+      </a:lnRef>
+      <a:fillRef idx="1">
+        <a:scrgbClr r="0" g="0" b="0"/>
+      </a:fillRef>
+      <a:effectRef idx="0">
+        <a:scrgbClr r="0" g="0" b="0"/>
+      </a:effectRef>
+      <a:fontRef idx="minor">
+        <a:schemeClr val="lt1"/>
+      </a:fontRef>
+    </dgm:style>
+  </dgm:styleLbl>
+  <dgm:styleLbl name="parChTrans1D1">
+    <dgm:scene3d>
+      <a:camera prst="orthographicFront"/>
+      <a:lightRig rig="threePt" dir="t"/>
+    </dgm:scene3d>
+    <dgm:sp3d/>
+    <dgm:txPr/>
+    <dgm:style>
+      <a:lnRef idx="2">
+        <a:scrgbClr r="0" g="0" b="0"/>
+      </a:lnRef>
+      <a:fillRef idx="0">
+        <a:scrgbClr r="0" g="0" b="0"/>
+      </a:fillRef>
+      <a:effectRef idx="0">
+        <a:scrgbClr r="0" g="0" b="0"/>
+      </a:effectRef>
+      <a:fontRef idx="minor"/>
+    </dgm:style>
+  </dgm:styleLbl>
+  <dgm:styleLbl name="parChTrans1D2">
+    <dgm:scene3d>
+      <a:camera prst="orthographicFront"/>
+      <a:lightRig rig="threePt" dir="t"/>
+    </dgm:scene3d>
+    <dgm:sp3d/>
+    <dgm:txPr/>
+    <dgm:style>
+      <a:lnRef idx="2">
+        <a:scrgbClr r="0" g="0" b="0"/>
+      </a:lnRef>
+      <a:fillRef idx="0">
+        <a:scrgbClr r="0" g="0" b="0"/>
+      </a:fillRef>
+      <a:effectRef idx="0">
+        <a:scrgbClr r="0" g="0" b="0"/>
+      </a:effectRef>
+      <a:fontRef idx="minor"/>
+    </dgm:style>
+  </dgm:styleLbl>
+  <dgm:styleLbl name="parChTrans1D3">
+    <dgm:scene3d>
+      <a:camera prst="orthographicFront"/>
+      <a:lightRig rig="threePt" dir="t"/>
+    </dgm:scene3d>
+    <dgm:sp3d/>
+    <dgm:txPr/>
+    <dgm:style>
+      <a:lnRef idx="2">
+        <a:scrgbClr r="0" g="0" b="0"/>
+      </a:lnRef>
+      <a:fillRef idx="0">
+        <a:scrgbClr r="0" g="0" b="0"/>
+      </a:fillRef>
+      <a:effectRef idx="0">
+        <a:scrgbClr r="0" g="0" b="0"/>
+      </a:effectRef>
+      <a:fontRef idx="minor"/>
+    </dgm:style>
+  </dgm:styleLbl>
+  <dgm:styleLbl name="parChTrans1D4">
+    <dgm:scene3d>
+      <a:camera prst="orthographicFront"/>
+      <a:lightRig rig="threePt" dir="t"/>
+    </dgm:scene3d>
+    <dgm:sp3d/>
+    <dgm:txPr/>
+    <dgm:style>
+      <a:lnRef idx="2">
+        <a:scrgbClr r="0" g="0" b="0"/>
+      </a:lnRef>
+      <a:fillRef idx="0">
+        <a:scrgbClr r="0" g="0" b="0"/>
+      </a:fillRef>
+      <a:effectRef idx="0">
+        <a:scrgbClr r="0" g="0" b="0"/>
+      </a:effectRef>
+      <a:fontRef idx="minor"/>
+    </dgm:style>
+  </dgm:styleLbl>
+  <dgm:styleLbl name="fgAcc1">
+    <dgm:scene3d>
+      <a:camera prst="orthographicFront"/>
+      <a:lightRig rig="threePt" dir="t"/>
+    </dgm:scene3d>
+    <dgm:sp3d/>
+    <dgm:txPr/>
+    <dgm:style>
+      <a:lnRef idx="2">
+        <a:scrgbClr r="0" g="0" b="0"/>
+      </a:lnRef>
+      <a:fillRef idx="1">
+        <a:scrgbClr r="0" g="0" b="0"/>
+      </a:fillRef>
+      <a:effectRef idx="0">
+        <a:scrgbClr r="0" g="0" b="0"/>
+      </a:effectRef>
+      <a:fontRef idx="minor"/>
+    </dgm:style>
+  </dgm:styleLbl>
+  <dgm:styleLbl name="conFgAcc1">
+    <dgm:scene3d>
+      <a:camera prst="orthographicFront"/>
+      <a:lightRig rig="threePt" dir="t"/>
+    </dgm:scene3d>
+    <dgm:sp3d/>
+    <dgm:txPr/>
+    <dgm:style>
+      <a:lnRef idx="2">
+        <a:scrgbClr r="0" g="0" b="0"/>
+      </a:lnRef>
+      <a:fillRef idx="1">
+        <a:scrgbClr r="0" g="0" b="0"/>
+      </a:fillRef>
+      <a:effectRef idx="0">
+        <a:scrgbClr r="0" g="0" b="0"/>
+      </a:effectRef>
+      <a:fontRef idx="minor"/>
+    </dgm:style>
+  </dgm:styleLbl>
+  <dgm:styleLbl name="alignAcc1">
+    <dgm:scene3d>
+      <a:camera prst="orthographicFront"/>
+      <a:lightRig rig="threePt" dir="t"/>
+    </dgm:scene3d>
+    <dgm:sp3d/>
+    <dgm:txPr/>
+    <dgm:style>
+      <a:lnRef idx="2">
+        <a:scrgbClr r="0" g="0" b="0"/>
+      </a:lnRef>
+      <a:fillRef idx="1">
+        <a:scrgbClr r="0" g="0" b="0"/>
+      </a:fillRef>
+      <a:effectRef idx="0">
+        <a:scrgbClr r="0" g="0" b="0"/>
+      </a:effectRef>
+      <a:fontRef idx="minor"/>
+    </dgm:style>
+  </dgm:styleLbl>
+  <dgm:styleLbl name="trAlignAcc1">
+    <dgm:scene3d>
+      <a:camera prst="orthographicFront"/>
+      <a:lightRig rig="threePt" dir="t"/>
+    </dgm:scene3d>
+    <dgm:sp3d/>
+    <dgm:txPr/>
+    <dgm:style>
+      <a:lnRef idx="1">
+        <a:scrgbClr r="0" g="0" b="0"/>
+      </a:lnRef>
+      <a:fillRef idx="1">
+        <a:scrgbClr r="0" g="0" b="0"/>
+      </a:fillRef>
+      <a:effectRef idx="0">
+        <a:scrgbClr r="0" g="0" b="0"/>
+      </a:effectRef>
+      <a:fontRef idx="minor"/>
+    </dgm:style>
+  </dgm:styleLbl>
+  <dgm:styleLbl name="bgAcc1">
+    <dgm:scene3d>
+      <a:camera prst="orthographicFront"/>
+      <a:lightRig rig="threePt" dir="t"/>
+    </dgm:scene3d>
+    <dgm:sp3d/>
+    <dgm:txPr/>
+    <dgm:style>
+      <a:lnRef idx="2">
+        <a:scrgbClr r="0" g="0" b="0"/>
+      </a:lnRef>
+      <a:fillRef idx="1">
+        <a:scrgbClr r="0" g="0" b="0"/>
+      </a:fillRef>
+      <a:effectRef idx="0">
+        <a:scrgbClr r="0" g="0" b="0"/>
+      </a:effectRef>
+      <a:fontRef idx="minor"/>
+    </dgm:style>
+  </dgm:styleLbl>
+  <dgm:styleLbl name="solidFgAcc1">
+    <dgm:scene3d>
+      <a:camera prst="orthographicFront"/>
+      <a:lightRig rig="threePt" dir="t"/>
+    </dgm:scene3d>
+    <dgm:sp3d/>
+    <dgm:txPr/>
+    <dgm:style>
+      <a:lnRef idx="2">
+        <a:scrgbClr r="0" g="0" b="0"/>
+      </a:lnRef>
+      <a:fillRef idx="1">
+        <a:scrgbClr r="0" g="0" b="0"/>
+      </a:fillRef>
+      <a:effectRef idx="0">
+        <a:scrgbClr r="0" g="0" b="0"/>
+      </a:effectRef>
+      <a:fontRef idx="minor"/>
+    </dgm:style>
+  </dgm:styleLbl>
+  <dgm:styleLbl name="solidAlignAcc1">
+    <dgm:scene3d>
+      <a:camera prst="orthographicFront"/>
+      <a:lightRig rig="threePt" dir="t"/>
+    </dgm:scene3d>
+    <dgm:sp3d/>
+    <dgm:txPr/>
+    <dgm:style>
+      <a:lnRef idx="2">
+        <a:scrgbClr r="0" g="0" b="0"/>
+      </a:lnRef>
+      <a:fillRef idx="1">
+        <a:scrgbClr r="0" g="0" b="0"/>
+      </a:fillRef>
+      <a:effectRef idx="0">
+        <a:scrgbClr r="0" g="0" b="0"/>
+      </a:effectRef>
+      <a:fontRef idx="minor"/>
+    </dgm:style>
+  </dgm:styleLbl>
+  <dgm:styleLbl name="solidBgAcc1">
+    <dgm:scene3d>
+      <a:camera prst="orthographicFront"/>
+      <a:lightRig rig="threePt" dir="t"/>
+    </dgm:scene3d>
+    <dgm:sp3d/>
+    <dgm:txPr/>
+    <dgm:style>
+      <a:lnRef idx="2">
+        <a:scrgbClr r="0" g="0" b="0"/>
+      </a:lnRef>
+      <a:fillRef idx="1">
+        <a:scrgbClr r="0" g="0" b="0"/>
+      </a:fillRef>
+      <a:effectRef idx="0">
+        <a:scrgbClr r="0" g="0" b="0"/>
+      </a:effectRef>
+      <a:fontRef idx="minor"/>
+    </dgm:style>
+  </dgm:styleLbl>
+  <dgm:styleLbl name="fgAccFollowNode1">
+    <dgm:scene3d>
+      <a:camera prst="orthographicFront"/>
+      <a:lightRig rig="threePt" dir="t"/>
+    </dgm:scene3d>
+    <dgm:sp3d/>
+    <dgm:txPr/>
+    <dgm:style>
+      <a:lnRef idx="2">
+        <a:scrgbClr r="0" g="0" b="0"/>
+      </a:lnRef>
+      <a:fillRef idx="1">
+        <a:scrgbClr r="0" g="0" b="0"/>
+      </a:fillRef>
+      <a:effectRef idx="0">
+        <a:scrgbClr r="0" g="0" b="0"/>
+      </a:effectRef>
+      <a:fontRef idx="minor"/>
+    </dgm:style>
+  </dgm:styleLbl>
+  <dgm:styleLbl name="alignAccFollowNode1">
+    <dgm:scene3d>
+      <a:camera prst="orthographicFront"/>
+      <a:lightRig rig="threePt" dir="t"/>
+    </dgm:scene3d>
+    <dgm:sp3d/>
+    <dgm:txPr/>
+    <dgm:style>
+      <a:lnRef idx="2">
+        <a:scrgbClr r="0" g="0" b="0"/>
+      </a:lnRef>
+      <a:fillRef idx="1">
+        <a:scrgbClr r="0" g="0" b="0"/>
+      </a:fillRef>
+      <a:effectRef idx="0">
+        <a:scrgbClr r="0" g="0" b="0"/>
+      </a:effectRef>
+      <a:fontRef idx="minor"/>
+    </dgm:style>
+  </dgm:styleLbl>
+  <dgm:styleLbl name="bgAccFollowNode1">
+    <dgm:scene3d>
+      <a:camera prst="orthographicFront"/>
+      <a:lightRig rig="threePt" dir="t"/>
+    </dgm:scene3d>
+    <dgm:sp3d/>
+    <dgm:txPr/>
+    <dgm:style>
+      <a:lnRef idx="2">
+        <a:scrgbClr r="0" g="0" b="0"/>
+      </a:lnRef>
+      <a:fillRef idx="1">
+        <a:scrgbClr r="0" g="0" b="0"/>
+      </a:fillRef>
+      <a:effectRef idx="0">
+        <a:scrgbClr r="0" g="0" b="0"/>
+      </a:effectRef>
+      <a:fontRef idx="minor"/>
+    </dgm:style>
+  </dgm:styleLbl>
+  <dgm:styleLbl name="fgAcc0">
+    <dgm:scene3d>
+      <a:camera prst="orthographicFront"/>
+      <a:lightRig rig="threePt" dir="t"/>
+    </dgm:scene3d>
+    <dgm:sp3d/>
+    <dgm:txPr/>
+    <dgm:style>
+      <a:lnRef idx="2">
+        <a:scrgbClr r="0" g="0" b="0"/>
+      </a:lnRef>
+      <a:fillRef idx="1">
+        <a:scrgbClr r="0" g="0" b="0"/>
+      </a:fillRef>
+      <a:effectRef idx="0">
+        <a:scrgbClr r="0" g="0" b="0"/>
+      </a:effectRef>
+      <a:fontRef idx="minor"/>
+    </dgm:style>
+  </dgm:styleLbl>
+  <dgm:styleLbl name="fgAcc2">
+    <dgm:scene3d>
+      <a:camera prst="orthographicFront"/>
+      <a:lightRig rig="threePt" dir="t"/>
+    </dgm:scene3d>
+    <dgm:sp3d/>
+    <dgm:txPr/>
+    <dgm:style>
+      <a:lnRef idx="2">
+        <a:scrgbClr r="0" g="0" b="0"/>
+      </a:lnRef>
+      <a:fillRef idx="1">
+        <a:scrgbClr r="0" g="0" b="0"/>
+      </a:fillRef>
+      <a:effectRef idx="0">
+        <a:scrgbClr r="0" g="0" b="0"/>
+      </a:effectRef>
+      <a:fontRef idx="minor"/>
+    </dgm:style>
+  </dgm:styleLbl>
+  <dgm:styleLbl name="fgAcc3">
+    <dgm:scene3d>
+      <a:camera prst="orthographicFront"/>
+      <a:lightRig rig="threePt" dir="t"/>
+    </dgm:scene3d>
+    <dgm:sp3d/>
+    <dgm:txPr/>
+    <dgm:style>
+      <a:lnRef idx="2">
+        <a:scrgbClr r="0" g="0" b="0"/>
+      </a:lnRef>
+      <a:fillRef idx="1">
+        <a:scrgbClr r="0" g="0" b="0"/>
+      </a:fillRef>
+      <a:effectRef idx="0">
+        <a:scrgbClr r="0" g="0" b="0"/>
+      </a:effectRef>
+      <a:fontRef idx="minor"/>
+    </dgm:style>
+  </dgm:styleLbl>
+  <dgm:styleLbl name="fgAcc4">
+    <dgm:scene3d>
+      <a:camera prst="orthographicFront"/>
+      <a:lightRig rig="threePt" dir="t"/>
+    </dgm:scene3d>
+    <dgm:sp3d/>
+    <dgm:txPr/>
+    <dgm:style>
+      <a:lnRef idx="2">
+        <a:scrgbClr r="0" g="0" b="0"/>
+      </a:lnRef>
+      <a:fillRef idx="1">
+        <a:scrgbClr r="0" g="0" b="0"/>
+      </a:fillRef>
+      <a:effectRef idx="0">
+        <a:scrgbClr r="0" g="0" b="0"/>
+      </a:effectRef>
+      <a:fontRef idx="minor"/>
+    </dgm:style>
+  </dgm:styleLbl>
+  <dgm:styleLbl name="bgShp">
+    <dgm:scene3d>
+      <a:camera prst="orthographicFront"/>
+      <a:lightRig rig="threePt" dir="t"/>
+    </dgm:scene3d>
+    <dgm:sp3d/>
+    <dgm:txPr/>
+    <dgm:style>
+      <a:lnRef idx="0">
+        <a:scrgbClr r="0" g="0" b="0"/>
+      </a:lnRef>
+      <a:fillRef idx="1">
+        <a:scrgbClr r="0" g="0" b="0"/>
+      </a:fillRef>
+      <a:effectRef idx="0">
+        <a:scrgbClr r="0" g="0" b="0"/>
+      </a:effectRef>
+      <a:fontRef idx="minor"/>
+    </dgm:style>
+  </dgm:styleLbl>
+  <dgm:styleLbl name="dkBgShp">
+    <dgm:scene3d>
+      <a:camera prst="orthographicFront"/>
+      <a:lightRig rig="threePt" dir="t"/>
+    </dgm:scene3d>
+    <dgm:sp3d/>
+    <dgm:txPr/>
+    <dgm:style>
+      <a:lnRef idx="0">
+        <a:scrgbClr r="0" g="0" b="0"/>
+      </a:lnRef>
+      <a:fillRef idx="1">
+        <a:scrgbClr r="0" g="0" b="0"/>
+      </a:fillRef>
+      <a:effectRef idx="0">
+        <a:scrgbClr r="0" g="0" b="0"/>
+      </a:effectRef>
+      <a:fontRef idx="minor"/>
+    </dgm:style>
+  </dgm:styleLbl>
+  <dgm:styleLbl name="trBgShp">
+    <dgm:scene3d>
+      <a:camera prst="orthographicFront"/>
+      <a:lightRig rig="threePt" dir="t"/>
+    </dgm:scene3d>
+    <dgm:sp3d/>
+    <dgm:txPr/>
+    <dgm:style>
+      <a:lnRef idx="0">
+        <a:scrgbClr r="0" g="0" b="0"/>
+      </a:lnRef>
+      <a:fillRef idx="1">
+        <a:scrgbClr r="0" g="0" b="0"/>
+      </a:fillRef>
+      <a:effectRef idx="0">
+        <a:scrgbClr r="0" g="0" b="0"/>
+      </a:effectRef>
+      <a:fontRef idx="minor"/>
+    </dgm:style>
+  </dgm:styleLbl>
+  <dgm:styleLbl name="fgShp">
+    <dgm:scene3d>
+      <a:camera prst="orthographicFront"/>
+      <a:lightRig rig="threePt" dir="t"/>
+    </dgm:scene3d>
+    <dgm:sp3d/>
+    <dgm:txPr/>
+    <dgm:style>
+      <a:lnRef idx="2">
+        <a:scrgbClr r="0" g="0" b="0"/>
+      </a:lnRef>
+      <a:fillRef idx="1">
+        <a:scrgbClr r="0" g="0" b="0"/>
+      </a:fillRef>
+      <a:effectRef idx="0">
+        <a:scrgbClr r="0" g="0" b="0"/>
+      </a:effectRef>
+      <a:fontRef idx="minor"/>
+    </dgm:style>
+  </dgm:styleLbl>
+  <dgm:styleLbl name="revTx">
+    <dgm:scene3d>
+      <a:camera prst="orthographicFront"/>
+      <a:lightRig rig="threePt" dir="t"/>
+    </dgm:scene3d>
+    <dgm:sp3d/>
+    <dgm:txPr/>
+    <dgm:style>
+      <a:lnRef idx="0">
+        <a:scrgbClr r="0" g="0" b="0"/>
+      </a:lnRef>
+      <a:fillRef idx="0">
+        <a:scrgbClr r="0" g="0" b="0"/>
+      </a:fillRef>
+      <a:effectRef idx="0">
+        <a:scrgbClr r="0" g="0" b="0"/>
+      </a:effectRef>
+      <a:fontRef idx="minor"/>
+    </dgm:style>
+  </dgm:styleLbl>
+</dgm:styleDef>
+</file>
+
+<file path=ppt/diagrams/quickStyle7.xml><?xml version="1.0" encoding="utf-8"?>
 <dgm:styleDef xmlns:dgm="http://schemas.openxmlformats.org/drawingml/2006/diagram" xmlns:a="http://schemas.openxmlformats.org/drawingml/2006/main" uniqueId="urn:microsoft.com/office/officeart/2005/8/quickstyle/simple1">
   <dgm:title val=""/>
   <dgm:desc val=""/>
@@ -20309,7 +26241,7 @@
                     <a:p>
                       <a:pPr latinLnBrk="1"/>
                       <a:r>
-                        <a:rPr lang="ko-KR" altLang="en-US" sz="2900"/>
+                        <a:rPr lang="ko-KR" altLang="en-US" sz="2900" dirty="0"/>
                         <a:t>속성</a:t>
                       </a:r>
                     </a:p>
@@ -20528,6 +26460,1825 @@
     <p:extLst>
       <p:ext uri="{BB962C8B-B14F-4D97-AF65-F5344CB8AC3E}">
         <p14:creationId xmlns:p14="http://schemas.microsoft.com/office/powerpoint/2010/main" val="3152712553"/>
+      </p:ext>
+    </p:extLst>
+  </p:cSld>
+  <p:clrMapOvr>
+    <a:masterClrMapping/>
+  </p:clrMapOvr>
+</p:sld>
+</file>
+
+<file path=ppt/slides/slide13.xml><?xml version="1.0" encoding="utf-8"?>
+<p:sld xmlns:a="http://schemas.openxmlformats.org/drawingml/2006/main" xmlns:r="http://schemas.openxmlformats.org/officeDocument/2006/relationships" xmlns:p="http://schemas.openxmlformats.org/presentationml/2006/main">
+  <p:cSld>
+    <p:bg>
+      <p:bgPr>
+        <a:solidFill>
+          <a:schemeClr val="bg1"/>
+        </a:solidFill>
+        <a:effectLst/>
+      </p:bgPr>
+    </p:bg>
+    <p:spTree>
+      <p:nvGrpSpPr>
+        <p:cNvPr id="1" name=""/>
+        <p:cNvGrpSpPr/>
+        <p:nvPr/>
+      </p:nvGrpSpPr>
+      <p:grpSpPr>
+        <a:xfrm>
+          <a:off x="0" y="0"/>
+          <a:ext cx="0" cy="0"/>
+          <a:chOff x="0" y="0"/>
+          <a:chExt cx="0" cy="0"/>
+        </a:xfrm>
+      </p:grpSpPr>
+      <p:sp useBgFill="1">
+        <p:nvSpPr>
+          <p:cNvPr id="11" name="Rectangle 10">
+            <a:extLst>
+              <a:ext uri="{FF2B5EF4-FFF2-40B4-BE49-F238E27FC236}">
+                <a16:creationId xmlns:a16="http://schemas.microsoft.com/office/drawing/2014/main" id="{BCED4D40-4B67-4331-AC48-79B82B4A47D8}"/>
+              </a:ext>
+              <a:ext uri="{C183D7F6-B498-43B3-948B-1728B52AA6E4}">
+                <adec:decorative xmlns:adec="http://schemas.microsoft.com/office/drawing/2017/decorative" val="1"/>
+              </a:ext>
+            </a:extLst>
+          </p:cNvPr>
+          <p:cNvSpPr>
+            <a:spLocks noGrp="1" noRot="1" noChangeAspect="1" noMove="1" noResize="1" noEditPoints="1" noAdjustHandles="1" noChangeArrowheads="1" noChangeShapeType="1" noTextEdit="1"/>
+          </p:cNvSpPr>
+          <p:nvPr>
+            <p:extLst>
+              <p:ext uri="{386F3935-93C4-4BCD-93E2-E3B085C9AB24}">
+                <p16:designElem xmlns:p16="http://schemas.microsoft.com/office/powerpoint/2015/main" val="1"/>
+              </p:ext>
+            </p:extLst>
+          </p:nvPr>
+        </p:nvSpPr>
+        <p:spPr>
+          <a:xfrm>
+            <a:off x="0" y="0"/>
+            <a:ext cx="12192000" cy="6858000"/>
+          </a:xfrm>
+          <a:prstGeom prst="rect">
+            <a:avLst/>
+          </a:prstGeom>
+          <a:ln>
+            <a:noFill/>
+          </a:ln>
+        </p:spPr>
+        <p:style>
+          <a:lnRef idx="2">
+            <a:schemeClr val="accent1">
+              <a:shade val="50000"/>
+            </a:schemeClr>
+          </a:lnRef>
+          <a:fillRef idx="1">
+            <a:schemeClr val="accent1"/>
+          </a:fillRef>
+          <a:effectRef idx="0">
+            <a:schemeClr val="accent1"/>
+          </a:effectRef>
+          <a:fontRef idx="minor">
+            <a:schemeClr val="lt1"/>
+          </a:fontRef>
+        </p:style>
+        <p:txBody>
+          <a:bodyPr rtlCol="0" anchor="ctr"/>
+          <a:lstStyle/>
+          <a:p>
+            <a:pPr algn="ctr"/>
+            <a:endParaRPr lang="en-US"/>
+          </a:p>
+        </p:txBody>
+      </p:sp>
+      <p:sp>
+        <p:nvSpPr>
+          <p:cNvPr id="2" name="제목 1">
+            <a:extLst>
+              <a:ext uri="{FF2B5EF4-FFF2-40B4-BE49-F238E27FC236}">
+                <a16:creationId xmlns:a16="http://schemas.microsoft.com/office/drawing/2014/main" id="{089EA877-CA4B-9FE6-7F07-0D61EC574120}"/>
+              </a:ext>
+            </a:extLst>
+          </p:cNvPr>
+          <p:cNvSpPr>
+            <a:spLocks noGrp="1"/>
+          </p:cNvSpPr>
+          <p:nvPr>
+            <p:ph type="title"/>
+          </p:nvPr>
+        </p:nvSpPr>
+        <p:spPr>
+          <a:xfrm>
+            <a:off x="638881" y="417576"/>
+            <a:ext cx="10909640" cy="1249394"/>
+          </a:xfrm>
+        </p:spPr>
+        <p:txBody>
+          <a:bodyPr vert="horz" lIns="91440" tIns="45720" rIns="91440" bIns="45720" rtlCol="0" anchor="ctr">
+            <a:normAutofit/>
+          </a:bodyPr>
+          <a:lstStyle/>
+          <a:p>
+            <a:pPr algn="ctr" latinLnBrk="0"/>
+            <a:r>
+              <a:rPr lang="en-US" altLang="ko-KR" sz="4600" kern="1200">
+                <a:solidFill>
+                  <a:schemeClr val="tx1"/>
+                </a:solidFill>
+                <a:latin typeface="+mj-lt"/>
+                <a:ea typeface="+mj-ea"/>
+                <a:cs typeface="+mj-cs"/>
+              </a:rPr>
+              <a:t>Override(</a:t>
+            </a:r>
+            <a:r>
+              <a:rPr lang="ko-KR" altLang="en-US" sz="4600" kern="1200">
+                <a:solidFill>
+                  <a:schemeClr val="tx1"/>
+                </a:solidFill>
+                <a:latin typeface="+mj-lt"/>
+                <a:ea typeface="+mj-ea"/>
+                <a:cs typeface="+mj-cs"/>
+              </a:rPr>
+              <a:t>번복</a:t>
+            </a:r>
+            <a:r>
+              <a:rPr lang="en-US" altLang="ko-KR" sz="4600" kern="1200">
+                <a:solidFill>
+                  <a:schemeClr val="tx1"/>
+                </a:solidFill>
+                <a:latin typeface="+mj-lt"/>
+                <a:ea typeface="+mj-ea"/>
+                <a:cs typeface="+mj-cs"/>
+              </a:rPr>
+              <a:t>) vs Upcasting(</a:t>
+            </a:r>
+            <a:r>
+              <a:rPr lang="ko-KR" altLang="en-US" sz="4600" kern="1200">
+                <a:solidFill>
+                  <a:schemeClr val="tx1"/>
+                </a:solidFill>
+                <a:latin typeface="+mj-lt"/>
+                <a:ea typeface="+mj-ea"/>
+                <a:cs typeface="+mj-cs"/>
+              </a:rPr>
+              <a:t>상향 선정</a:t>
+            </a:r>
+            <a:r>
+              <a:rPr lang="en-US" altLang="ko-KR" sz="4600" kern="1200">
+                <a:solidFill>
+                  <a:schemeClr val="tx1"/>
+                </a:solidFill>
+                <a:latin typeface="+mj-lt"/>
+                <a:ea typeface="+mj-ea"/>
+                <a:cs typeface="+mj-cs"/>
+              </a:rPr>
+              <a:t>)</a:t>
+            </a:r>
+          </a:p>
+        </p:txBody>
+      </p:sp>
+      <p:sp>
+        <p:nvSpPr>
+          <p:cNvPr id="13" name="sketch line">
+            <a:extLst>
+              <a:ext uri="{FF2B5EF4-FFF2-40B4-BE49-F238E27FC236}">
+                <a16:creationId xmlns:a16="http://schemas.microsoft.com/office/drawing/2014/main" id="{670CEDEF-4F34-412E-84EE-329C1E936AF5}"/>
+              </a:ext>
+              <a:ext uri="{C183D7F6-B498-43B3-948B-1728B52AA6E4}">
+                <adec:decorative xmlns:adec="http://schemas.microsoft.com/office/drawing/2017/decorative" val="1"/>
+              </a:ext>
+            </a:extLst>
+          </p:cNvPr>
+          <p:cNvSpPr>
+            <a:spLocks noGrp="1" noRot="1" noChangeAspect="1" noMove="1" noResize="1" noEditPoints="1" noAdjustHandles="1" noChangeArrowheads="1" noChangeShapeType="1" noTextEdit="1"/>
+          </p:cNvSpPr>
+          <p:nvPr>
+            <p:extLst>
+              <p:ext uri="{386F3935-93C4-4BCD-93E2-E3B085C9AB24}">
+                <p16:designElem xmlns:p16="http://schemas.microsoft.com/office/powerpoint/2015/main" val="1"/>
+              </p:ext>
+            </p:extLst>
+          </p:nvPr>
+        </p:nvSpPr>
+        <p:spPr>
+          <a:xfrm>
+            <a:off x="3807702" y="1733454"/>
+            <a:ext cx="4572000" cy="18288"/>
+          </a:xfrm>
+          <a:custGeom>
+            <a:avLst/>
+            <a:gdLst>
+              <a:gd name="connsiteX0" fmla="*/ 0 w 4572000"/>
+              <a:gd name="connsiteY0" fmla="*/ 0 h 18288"/>
+              <a:gd name="connsiteX1" fmla="*/ 515983 w 4572000"/>
+              <a:gd name="connsiteY1" fmla="*/ 0 h 18288"/>
+              <a:gd name="connsiteX2" fmla="*/ 1031966 w 4572000"/>
+              <a:gd name="connsiteY2" fmla="*/ 0 h 18288"/>
+              <a:gd name="connsiteX3" fmla="*/ 1639389 w 4572000"/>
+              <a:gd name="connsiteY3" fmla="*/ 0 h 18288"/>
+              <a:gd name="connsiteX4" fmla="*/ 2383971 w 4572000"/>
+              <a:gd name="connsiteY4" fmla="*/ 0 h 18288"/>
+              <a:gd name="connsiteX5" fmla="*/ 2945674 w 4572000"/>
+              <a:gd name="connsiteY5" fmla="*/ 0 h 18288"/>
+              <a:gd name="connsiteX6" fmla="*/ 3507377 w 4572000"/>
+              <a:gd name="connsiteY6" fmla="*/ 0 h 18288"/>
+              <a:gd name="connsiteX7" fmla="*/ 4572000 w 4572000"/>
+              <a:gd name="connsiteY7" fmla="*/ 0 h 18288"/>
+              <a:gd name="connsiteX8" fmla="*/ 4572000 w 4572000"/>
+              <a:gd name="connsiteY8" fmla="*/ 18288 h 18288"/>
+              <a:gd name="connsiteX9" fmla="*/ 3873137 w 4572000"/>
+              <a:gd name="connsiteY9" fmla="*/ 18288 h 18288"/>
+              <a:gd name="connsiteX10" fmla="*/ 3311434 w 4572000"/>
+              <a:gd name="connsiteY10" fmla="*/ 18288 h 18288"/>
+              <a:gd name="connsiteX11" fmla="*/ 2749731 w 4572000"/>
+              <a:gd name="connsiteY11" fmla="*/ 18288 h 18288"/>
+              <a:gd name="connsiteX12" fmla="*/ 2050869 w 4572000"/>
+              <a:gd name="connsiteY12" fmla="*/ 18288 h 18288"/>
+              <a:gd name="connsiteX13" fmla="*/ 1306286 w 4572000"/>
+              <a:gd name="connsiteY13" fmla="*/ 18288 h 18288"/>
+              <a:gd name="connsiteX14" fmla="*/ 790303 w 4572000"/>
+              <a:gd name="connsiteY14" fmla="*/ 18288 h 18288"/>
+              <a:gd name="connsiteX15" fmla="*/ 0 w 4572000"/>
+              <a:gd name="connsiteY15" fmla="*/ 18288 h 18288"/>
+              <a:gd name="connsiteX16" fmla="*/ 0 w 4572000"/>
+              <a:gd name="connsiteY16" fmla="*/ 0 h 18288"/>
+            </a:gdLst>
+            <a:ahLst/>
+            <a:cxnLst>
+              <a:cxn ang="0">
+                <a:pos x="connsiteX0" y="connsiteY0"/>
+              </a:cxn>
+              <a:cxn ang="0">
+                <a:pos x="connsiteX1" y="connsiteY1"/>
+              </a:cxn>
+              <a:cxn ang="0">
+                <a:pos x="connsiteX2" y="connsiteY2"/>
+              </a:cxn>
+              <a:cxn ang="0">
+                <a:pos x="connsiteX3" y="connsiteY3"/>
+              </a:cxn>
+              <a:cxn ang="0">
+                <a:pos x="connsiteX4" y="connsiteY4"/>
+              </a:cxn>
+              <a:cxn ang="0">
+                <a:pos x="connsiteX5" y="connsiteY5"/>
+              </a:cxn>
+              <a:cxn ang="0">
+                <a:pos x="connsiteX6" y="connsiteY6"/>
+              </a:cxn>
+              <a:cxn ang="0">
+                <a:pos x="connsiteX7" y="connsiteY7"/>
+              </a:cxn>
+              <a:cxn ang="0">
+                <a:pos x="connsiteX8" y="connsiteY8"/>
+              </a:cxn>
+              <a:cxn ang="0">
+                <a:pos x="connsiteX9" y="connsiteY9"/>
+              </a:cxn>
+              <a:cxn ang="0">
+                <a:pos x="connsiteX10" y="connsiteY10"/>
+              </a:cxn>
+              <a:cxn ang="0">
+                <a:pos x="connsiteX11" y="connsiteY11"/>
+              </a:cxn>
+              <a:cxn ang="0">
+                <a:pos x="connsiteX12" y="connsiteY12"/>
+              </a:cxn>
+              <a:cxn ang="0">
+                <a:pos x="connsiteX13" y="connsiteY13"/>
+              </a:cxn>
+              <a:cxn ang="0">
+                <a:pos x="connsiteX14" y="connsiteY14"/>
+              </a:cxn>
+              <a:cxn ang="0">
+                <a:pos x="connsiteX15" y="connsiteY15"/>
+              </a:cxn>
+              <a:cxn ang="0">
+                <a:pos x="connsiteX16" y="connsiteY16"/>
+              </a:cxn>
+            </a:cxnLst>
+            <a:rect l="l" t="t" r="r" b="b"/>
+            <a:pathLst>
+              <a:path w="4572000" h="18288" fill="none" extrusionOk="0">
+                <a:moveTo>
+                  <a:pt x="0" y="0"/>
+                </a:moveTo>
+                <a:cubicBezTo>
+                  <a:pt x="105156" y="-20963"/>
+                  <a:pt x="340432" y="822"/>
+                  <a:pt x="515983" y="0"/>
+                </a:cubicBezTo>
+                <a:cubicBezTo>
+                  <a:pt x="691534" y="-822"/>
+                  <a:pt x="850679" y="16479"/>
+                  <a:pt x="1031966" y="0"/>
+                </a:cubicBezTo>
+                <a:cubicBezTo>
+                  <a:pt x="1213253" y="-16479"/>
+                  <a:pt x="1443646" y="-18730"/>
+                  <a:pt x="1639389" y="0"/>
+                </a:cubicBezTo>
+                <a:cubicBezTo>
+                  <a:pt x="1835132" y="18730"/>
+                  <a:pt x="2159975" y="18531"/>
+                  <a:pt x="2383971" y="0"/>
+                </a:cubicBezTo>
+                <a:cubicBezTo>
+                  <a:pt x="2607967" y="-18531"/>
+                  <a:pt x="2719096" y="-12030"/>
+                  <a:pt x="2945674" y="0"/>
+                </a:cubicBezTo>
+                <a:cubicBezTo>
+                  <a:pt x="3172252" y="12030"/>
+                  <a:pt x="3269167" y="27666"/>
+                  <a:pt x="3507377" y="0"/>
+                </a:cubicBezTo>
+                <a:cubicBezTo>
+                  <a:pt x="3745587" y="-27666"/>
+                  <a:pt x="4116741" y="18705"/>
+                  <a:pt x="4572000" y="0"/>
+                </a:cubicBezTo>
+                <a:cubicBezTo>
+                  <a:pt x="4572895" y="8974"/>
+                  <a:pt x="4571454" y="9359"/>
+                  <a:pt x="4572000" y="18288"/>
+                </a:cubicBezTo>
+                <a:cubicBezTo>
+                  <a:pt x="4374698" y="3942"/>
+                  <a:pt x="4098874" y="-11042"/>
+                  <a:pt x="3873137" y="18288"/>
+                </a:cubicBezTo>
+                <a:cubicBezTo>
+                  <a:pt x="3647400" y="47618"/>
+                  <a:pt x="3517055" y="5421"/>
+                  <a:pt x="3311434" y="18288"/>
+                </a:cubicBezTo>
+                <a:cubicBezTo>
+                  <a:pt x="3105813" y="31155"/>
+                  <a:pt x="3025168" y="17856"/>
+                  <a:pt x="2749731" y="18288"/>
+                </a:cubicBezTo>
+                <a:cubicBezTo>
+                  <a:pt x="2474294" y="18720"/>
+                  <a:pt x="2291766" y="-14168"/>
+                  <a:pt x="2050869" y="18288"/>
+                </a:cubicBezTo>
+                <a:cubicBezTo>
+                  <a:pt x="1809972" y="50744"/>
+                  <a:pt x="1540276" y="46798"/>
+                  <a:pt x="1306286" y="18288"/>
+                </a:cubicBezTo>
+                <a:cubicBezTo>
+                  <a:pt x="1072296" y="-10222"/>
+                  <a:pt x="972445" y="19645"/>
+                  <a:pt x="790303" y="18288"/>
+                </a:cubicBezTo>
+                <a:cubicBezTo>
+                  <a:pt x="608161" y="16931"/>
+                  <a:pt x="200981" y="8241"/>
+                  <a:pt x="0" y="18288"/>
+                </a:cubicBezTo>
+                <a:cubicBezTo>
+                  <a:pt x="-229" y="14222"/>
+                  <a:pt x="509" y="5816"/>
+                  <a:pt x="0" y="0"/>
+                </a:cubicBezTo>
+                <a:close/>
+              </a:path>
+              <a:path w="4572000" h="18288" stroke="0" extrusionOk="0">
+                <a:moveTo>
+                  <a:pt x="0" y="0"/>
+                </a:moveTo>
+                <a:cubicBezTo>
+                  <a:pt x="143285" y="-9565"/>
+                  <a:pt x="327959" y="-11498"/>
+                  <a:pt x="561703" y="0"/>
+                </a:cubicBezTo>
+                <a:cubicBezTo>
+                  <a:pt x="795447" y="11498"/>
+                  <a:pt x="838260" y="18255"/>
+                  <a:pt x="1077686" y="0"/>
+                </a:cubicBezTo>
+                <a:cubicBezTo>
+                  <a:pt x="1317112" y="-18255"/>
+                  <a:pt x="1437472" y="23514"/>
+                  <a:pt x="1639389" y="0"/>
+                </a:cubicBezTo>
+                <a:cubicBezTo>
+                  <a:pt x="1841306" y="-23514"/>
+                  <a:pt x="2037142" y="-12551"/>
+                  <a:pt x="2292531" y="0"/>
+                </a:cubicBezTo>
+                <a:cubicBezTo>
+                  <a:pt x="2547920" y="12551"/>
+                  <a:pt x="2810436" y="-20352"/>
+                  <a:pt x="2991394" y="0"/>
+                </a:cubicBezTo>
+                <a:cubicBezTo>
+                  <a:pt x="3172352" y="20352"/>
+                  <a:pt x="3530025" y="-13347"/>
+                  <a:pt x="3735977" y="0"/>
+                </a:cubicBezTo>
+                <a:cubicBezTo>
+                  <a:pt x="3941929" y="13347"/>
+                  <a:pt x="4161497" y="34086"/>
+                  <a:pt x="4572000" y="0"/>
+                </a:cubicBezTo>
+                <a:cubicBezTo>
+                  <a:pt x="4571545" y="6162"/>
+                  <a:pt x="4571903" y="11775"/>
+                  <a:pt x="4572000" y="18288"/>
+                </a:cubicBezTo>
+                <a:cubicBezTo>
+                  <a:pt x="4228040" y="36490"/>
+                  <a:pt x="4199736" y="42557"/>
+                  <a:pt x="3873137" y="18288"/>
+                </a:cubicBezTo>
+                <a:cubicBezTo>
+                  <a:pt x="3546538" y="-5981"/>
+                  <a:pt x="3472124" y="16809"/>
+                  <a:pt x="3128554" y="18288"/>
+                </a:cubicBezTo>
+                <a:cubicBezTo>
+                  <a:pt x="2784984" y="19767"/>
+                  <a:pt x="2735896" y="-17781"/>
+                  <a:pt x="2383971" y="18288"/>
+                </a:cubicBezTo>
+                <a:cubicBezTo>
+                  <a:pt x="2032046" y="54357"/>
+                  <a:pt x="2019324" y="2920"/>
+                  <a:pt x="1867989" y="18288"/>
+                </a:cubicBezTo>
+                <a:cubicBezTo>
+                  <a:pt x="1716654" y="33656"/>
+                  <a:pt x="1418675" y="32575"/>
+                  <a:pt x="1169126" y="18288"/>
+                </a:cubicBezTo>
+                <a:cubicBezTo>
+                  <a:pt x="919577" y="4001"/>
+                  <a:pt x="798537" y="16165"/>
+                  <a:pt x="561703" y="18288"/>
+                </a:cubicBezTo>
+                <a:cubicBezTo>
+                  <a:pt x="324869" y="20411"/>
+                  <a:pt x="221395" y="-912"/>
+                  <a:pt x="0" y="18288"/>
+                </a:cubicBezTo>
+                <a:cubicBezTo>
+                  <a:pt x="766" y="10800"/>
+                  <a:pt x="-457" y="8180"/>
+                  <a:pt x="0" y="0"/>
+                </a:cubicBezTo>
+                <a:close/>
+              </a:path>
+            </a:pathLst>
+          </a:custGeom>
+          <a:solidFill>
+            <a:schemeClr val="accent2"/>
+          </a:solidFill>
+          <a:ln w="41275" cap="rnd">
+            <a:solidFill>
+              <a:schemeClr val="accent2"/>
+            </a:solidFill>
+            <a:round/>
+            <a:extLst>
+              <a:ext uri="{C807C97D-BFC1-408E-A445-0C87EB9F89A2}">
+                <ask:lineSketchStyleProps xmlns:ask="http://schemas.microsoft.com/office/drawing/2018/sketchyshapes" sd="2727557108">
+                  <a:prstGeom prst="rect">
+                    <a:avLst/>
+                  </a:prstGeom>
+                  <ask:type>
+                    <ask:lineSketchFreehand/>
+                  </ask:type>
+                </ask:lineSketchStyleProps>
+              </a:ext>
+            </a:extLst>
+          </a:ln>
+        </p:spPr>
+        <p:style>
+          <a:lnRef idx="2">
+            <a:schemeClr val="accent1">
+              <a:shade val="50000"/>
+            </a:schemeClr>
+          </a:lnRef>
+          <a:fillRef idx="1">
+            <a:schemeClr val="accent1"/>
+          </a:fillRef>
+          <a:effectRef idx="0">
+            <a:schemeClr val="accent1"/>
+          </a:effectRef>
+          <a:fontRef idx="minor">
+            <a:schemeClr val="lt1"/>
+          </a:fontRef>
+        </p:style>
+        <p:txBody>
+          <a:bodyPr rtlCol="0" anchor="ctr"/>
+          <a:lstStyle/>
+          <a:p>
+            <a:pPr algn="ctr"/>
+            <a:endParaRPr lang="en-US"/>
+          </a:p>
+        </p:txBody>
+      </p:sp>
+      <p:graphicFrame>
+        <p:nvGraphicFramePr>
+          <p:cNvPr id="6" name="표 5">
+            <a:extLst>
+              <a:ext uri="{FF2B5EF4-FFF2-40B4-BE49-F238E27FC236}">
+                <a16:creationId xmlns:a16="http://schemas.microsoft.com/office/drawing/2014/main" id="{EF2587CC-AFAB-A450-976D-A9D2BFDE579C}"/>
+              </a:ext>
+            </a:extLst>
+          </p:cNvPr>
+          <p:cNvGraphicFramePr>
+            <a:graphicFrameLocks noGrp="1"/>
+          </p:cNvGraphicFramePr>
+          <p:nvPr>
+            <p:extLst>
+              <p:ext uri="{D42A27DB-BD31-4B8C-83A1-F6EECF244321}">
+                <p14:modId xmlns:p14="http://schemas.microsoft.com/office/powerpoint/2010/main" val="1721953267"/>
+              </p:ext>
+            </p:extLst>
+          </p:nvPr>
+        </p:nvGraphicFramePr>
+        <p:xfrm>
+          <a:off x="406400" y="2633473"/>
+          <a:ext cx="11331787" cy="2572914"/>
+        </p:xfrm>
+        <a:graphic>
+          <a:graphicData uri="http://schemas.openxmlformats.org/drawingml/2006/table">
+            <a:tbl>
+              <a:tblPr firstRow="1" bandRow="1">
+                <a:tableStyleId>{5C22544A-7EE6-4342-B048-85BDC9FD1C3A}</a:tableStyleId>
+              </a:tblPr>
+              <a:tblGrid>
+                <a:gridCol w="2460440">
+                  <a:extLst>
+                    <a:ext uri="{9D8B030D-6E8A-4147-A177-3AD203B41FA5}">
+                      <a16:colId xmlns:a16="http://schemas.microsoft.com/office/drawing/2014/main" val="3765811720"/>
+                    </a:ext>
+                  </a:extLst>
+                </a:gridCol>
+                <a:gridCol w="4008093">
+                  <a:extLst>
+                    <a:ext uri="{9D8B030D-6E8A-4147-A177-3AD203B41FA5}">
+                      <a16:colId xmlns:a16="http://schemas.microsoft.com/office/drawing/2014/main" val="3950916864"/>
+                    </a:ext>
+                  </a:extLst>
+                </a:gridCol>
+                <a:gridCol w="4863254">
+                  <a:extLst>
+                    <a:ext uri="{9D8B030D-6E8A-4147-A177-3AD203B41FA5}">
+                      <a16:colId xmlns:a16="http://schemas.microsoft.com/office/drawing/2014/main" val="2572552780"/>
+                    </a:ext>
+                  </a:extLst>
+                </a:gridCol>
+              </a:tblGrid>
+              <a:tr h="0">
+                <a:tc>
+                  <a:txBody>
+                    <a:bodyPr/>
+                    <a:lstStyle/>
+                    <a:p>
+                      <a:pPr latinLnBrk="1"/>
+                      <a:r>
+                        <a:rPr lang="ko-KR" altLang="en-US" sz="2800"/>
+                        <a:t>속성</a:t>
+                      </a:r>
+                    </a:p>
+                  </a:txBody>
+                  <a:tcPr marL="146438" marR="146438" marT="73219" marB="73219"/>
+                </a:tc>
+                <a:tc>
+                  <a:txBody>
+                    <a:bodyPr/>
+                    <a:lstStyle/>
+                    <a:p>
+                      <a:pPr latinLnBrk="1"/>
+                      <a:r>
+                        <a:rPr lang="en-US" altLang="ko-KR" sz="2800"/>
+                        <a:t>C++</a:t>
+                      </a:r>
+                      <a:endParaRPr lang="ko-KR" altLang="en-US" sz="2800"/>
+                    </a:p>
+                  </a:txBody>
+                  <a:tcPr marL="146438" marR="146438" marT="73219" marB="73219"/>
+                </a:tc>
+                <a:tc>
+                  <a:txBody>
+                    <a:bodyPr/>
+                    <a:lstStyle/>
+                    <a:p>
+                      <a:pPr latinLnBrk="1"/>
+                      <a:r>
+                        <a:rPr lang="en-US" altLang="ko-KR" sz="2800"/>
+                        <a:t>C#</a:t>
+                      </a:r>
+                      <a:endParaRPr lang="ko-KR" altLang="en-US" sz="2800"/>
+                    </a:p>
+                  </a:txBody>
+                  <a:tcPr marL="146438" marR="146438" marT="73219" marB="73219"/>
+                </a:tc>
+                <a:extLst>
+                  <a:ext uri="{0D108BD9-81ED-4DB2-BD59-A6C34878D82A}">
+                    <a16:rowId xmlns:a16="http://schemas.microsoft.com/office/drawing/2014/main" val="2546241973"/>
+                  </a:ext>
+                </a:extLst>
+              </a:tr>
+              <a:tr h="0">
+                <a:tc>
+                  <a:txBody>
+                    <a:bodyPr/>
+                    <a:lstStyle/>
+                    <a:p>
+                      <a:pPr latinLnBrk="1"/>
+                      <a:r>
+                        <a:rPr lang="en-US" altLang="ko-KR" sz="2800"/>
+                        <a:t>override</a:t>
+                      </a:r>
+                      <a:endParaRPr lang="ko-KR" altLang="en-US" sz="2800"/>
+                    </a:p>
+                  </a:txBody>
+                  <a:tcPr marL="146438" marR="146438" marT="73219" marB="73219"/>
+                </a:tc>
+                <a:tc>
+                  <a:txBody>
+                    <a:bodyPr/>
+                    <a:lstStyle/>
+                    <a:p>
+                      <a:pPr latinLnBrk="1"/>
+                      <a:r>
+                        <a:rPr lang="en-US" altLang="ko-KR" sz="2800"/>
+                        <a:t>-</a:t>
+                      </a:r>
+                      <a:endParaRPr lang="ko-KR" altLang="en-US" sz="2800"/>
+                    </a:p>
+                  </a:txBody>
+                  <a:tcPr marL="146438" marR="146438" marT="73219" marB="73219"/>
+                </a:tc>
+                <a:tc>
+                  <a:txBody>
+                    <a:bodyPr/>
+                    <a:lstStyle/>
+                    <a:p>
+                      <a:pPr marL="457200" indent="-457200" latinLnBrk="1">
+                        <a:buFont typeface="Arial" panose="020B0604020202020204" pitchFamily="34" charset="0"/>
+                        <a:buChar char="•"/>
+                      </a:pPr>
+                      <a:r>
+                        <a:rPr lang="ko-KR" altLang="en-US" sz="2800"/>
+                        <a:t>부모 메소드</a:t>
+                      </a:r>
+                      <a:r>
+                        <a:rPr lang="en-US" altLang="ko-KR" sz="2800"/>
+                        <a:t>: X</a:t>
+                      </a:r>
+                    </a:p>
+                    <a:p>
+                      <a:pPr marL="457200" indent="-457200" latinLnBrk="1">
+                        <a:buFont typeface="Arial" panose="020B0604020202020204" pitchFamily="34" charset="0"/>
+                        <a:buChar char="•"/>
+                      </a:pPr>
+                      <a:r>
+                        <a:rPr lang="ko-KR" altLang="en-US" sz="2800"/>
+                        <a:t>자식 메소드</a:t>
+                      </a:r>
+                      <a:r>
+                        <a:rPr lang="en-US" altLang="ko-KR" sz="2800"/>
+                        <a:t>: new</a:t>
+                      </a:r>
+                      <a:endParaRPr lang="ko-KR" altLang="en-US" sz="2800"/>
+                    </a:p>
+                  </a:txBody>
+                  <a:tcPr marL="146438" marR="146438" marT="73219" marB="73219"/>
+                </a:tc>
+                <a:extLst>
+                  <a:ext uri="{0D108BD9-81ED-4DB2-BD59-A6C34878D82A}">
+                    <a16:rowId xmlns:a16="http://schemas.microsoft.com/office/drawing/2014/main" val="2341514354"/>
+                  </a:ext>
+                </a:extLst>
+              </a:tr>
+              <a:tr h="0">
+                <a:tc>
+                  <a:txBody>
+                    <a:bodyPr/>
+                    <a:lstStyle/>
+                    <a:p>
+                      <a:pPr latinLnBrk="1"/>
+                      <a:r>
+                        <a:rPr lang="en-US" altLang="ko-KR" sz="2800"/>
+                        <a:t>upcasting</a:t>
+                      </a:r>
+                      <a:endParaRPr lang="ko-KR" altLang="en-US" sz="2800"/>
+                    </a:p>
+                  </a:txBody>
+                  <a:tcPr marL="146438" marR="146438" marT="73219" marB="73219"/>
+                </a:tc>
+                <a:tc>
+                  <a:txBody>
+                    <a:bodyPr/>
+                    <a:lstStyle/>
+                    <a:p>
+                      <a:pPr marL="457200" indent="-457200" latinLnBrk="1">
+                        <a:buFont typeface="Arial" panose="020B0604020202020204" pitchFamily="34" charset="0"/>
+                        <a:buChar char="•"/>
+                      </a:pPr>
+                      <a:r>
+                        <a:rPr lang="ko-KR" altLang="en-US" sz="2800"/>
+                        <a:t>부모 메소드</a:t>
+                      </a:r>
+                      <a:r>
+                        <a:rPr lang="en-US" altLang="ko-KR" sz="2800"/>
+                        <a:t>: virtual</a:t>
+                      </a:r>
+                    </a:p>
+                    <a:p>
+                      <a:pPr marL="457200" indent="-457200" latinLnBrk="1">
+                        <a:buFont typeface="Arial" panose="020B0604020202020204" pitchFamily="34" charset="0"/>
+                        <a:buChar char="•"/>
+                      </a:pPr>
+                      <a:r>
+                        <a:rPr lang="ko-KR" altLang="en-US" sz="2800"/>
+                        <a:t>자식 메소드</a:t>
+                      </a:r>
+                      <a:r>
+                        <a:rPr lang="en-US" altLang="ko-KR" sz="2800"/>
+                        <a:t>: virtual</a:t>
+                      </a:r>
+                      <a:endParaRPr lang="ko-KR" altLang="en-US" sz="2800"/>
+                    </a:p>
+                  </a:txBody>
+                  <a:tcPr marL="146438" marR="146438" marT="73219" marB="73219"/>
+                </a:tc>
+                <a:tc>
+                  <a:txBody>
+                    <a:bodyPr/>
+                    <a:lstStyle/>
+                    <a:p>
+                      <a:pPr marL="457200" indent="-457200" latinLnBrk="1">
+                        <a:buFont typeface="Arial" panose="020B0604020202020204" pitchFamily="34" charset="0"/>
+                        <a:buChar char="•"/>
+                      </a:pPr>
+                      <a:r>
+                        <a:rPr lang="ko-KR" altLang="en-US" sz="2800" dirty="0"/>
+                        <a:t>부모 메소드</a:t>
+                      </a:r>
+                      <a:r>
+                        <a:rPr lang="en-US" altLang="ko-KR" sz="2800" dirty="0"/>
+                        <a:t>: virtual</a:t>
+                      </a:r>
+                    </a:p>
+                    <a:p>
+                      <a:pPr marL="457200" indent="-457200" latinLnBrk="1">
+                        <a:buFont typeface="Arial" panose="020B0604020202020204" pitchFamily="34" charset="0"/>
+                        <a:buChar char="•"/>
+                      </a:pPr>
+                      <a:r>
+                        <a:rPr lang="ko-KR" altLang="en-US" sz="2800" dirty="0"/>
+                        <a:t>자식 메소드</a:t>
+                      </a:r>
+                      <a:r>
+                        <a:rPr lang="en-US" altLang="ko-KR" sz="2800" dirty="0"/>
+                        <a:t>: override</a:t>
+                      </a:r>
+                      <a:endParaRPr lang="ko-KR" altLang="en-US" sz="2800" dirty="0"/>
+                    </a:p>
+                  </a:txBody>
+                  <a:tcPr marL="146438" marR="146438" marT="73219" marB="73219"/>
+                </a:tc>
+                <a:extLst>
+                  <a:ext uri="{0D108BD9-81ED-4DB2-BD59-A6C34878D82A}">
+                    <a16:rowId xmlns:a16="http://schemas.microsoft.com/office/drawing/2014/main" val="3577942020"/>
+                  </a:ext>
+                </a:extLst>
+              </a:tr>
+            </a:tbl>
+          </a:graphicData>
+        </a:graphic>
+      </p:graphicFrame>
+    </p:spTree>
+    <p:extLst>
+      <p:ext uri="{BB962C8B-B14F-4D97-AF65-F5344CB8AC3E}">
+        <p14:creationId xmlns:p14="http://schemas.microsoft.com/office/powerpoint/2010/main" val="2600783507"/>
+      </p:ext>
+    </p:extLst>
+  </p:cSld>
+  <p:clrMapOvr>
+    <a:masterClrMapping/>
+  </p:clrMapOvr>
+</p:sld>
+</file>
+
+<file path=ppt/slides/slide14.xml><?xml version="1.0" encoding="utf-8"?>
+<p:sld xmlns:a="http://schemas.openxmlformats.org/drawingml/2006/main" xmlns:r="http://schemas.openxmlformats.org/officeDocument/2006/relationships" xmlns:p="http://schemas.openxmlformats.org/presentationml/2006/main">
+  <p:cSld>
+    <p:bg>
+      <p:bgPr>
+        <a:solidFill>
+          <a:schemeClr val="bg1"/>
+        </a:solidFill>
+        <a:effectLst/>
+      </p:bgPr>
+    </p:bg>
+    <p:spTree>
+      <p:nvGrpSpPr>
+        <p:cNvPr id="1" name=""/>
+        <p:cNvGrpSpPr/>
+        <p:nvPr/>
+      </p:nvGrpSpPr>
+      <p:grpSpPr>
+        <a:xfrm>
+          <a:off x="0" y="0"/>
+          <a:ext cx="0" cy="0"/>
+          <a:chOff x="0" y="0"/>
+          <a:chExt cx="0" cy="0"/>
+        </a:xfrm>
+      </p:grpSpPr>
+      <p:sp useBgFill="1">
+        <p:nvSpPr>
+          <p:cNvPr id="9" name="Rectangle 8">
+            <a:extLst>
+              <a:ext uri="{FF2B5EF4-FFF2-40B4-BE49-F238E27FC236}">
+                <a16:creationId xmlns:a16="http://schemas.microsoft.com/office/drawing/2014/main" id="{C05CBC3C-2E5A-4839-8B9B-2E5A6ADF0F58}"/>
+              </a:ext>
+              <a:ext uri="{C183D7F6-B498-43B3-948B-1728B52AA6E4}">
+                <adec:decorative xmlns:adec="http://schemas.microsoft.com/office/drawing/2017/decorative" val="1"/>
+              </a:ext>
+            </a:extLst>
+          </p:cNvPr>
+          <p:cNvSpPr>
+            <a:spLocks noGrp="1" noRot="1" noChangeAspect="1" noMove="1" noResize="1" noEditPoints="1" noAdjustHandles="1" noChangeArrowheads="1" noChangeShapeType="1" noTextEdit="1"/>
+          </p:cNvSpPr>
+          <p:nvPr>
+            <p:extLst>
+              <p:ext uri="{386F3935-93C4-4BCD-93E2-E3B085C9AB24}">
+                <p16:designElem xmlns:p16="http://schemas.microsoft.com/office/powerpoint/2015/main" val="1"/>
+              </p:ext>
+            </p:extLst>
+          </p:nvPr>
+        </p:nvSpPr>
+        <p:spPr>
+          <a:xfrm>
+            <a:off x="0" y="0"/>
+            <a:ext cx="12188952" cy="6858000"/>
+          </a:xfrm>
+          <a:prstGeom prst="rect">
+            <a:avLst/>
+          </a:prstGeom>
+          <a:ln>
+            <a:noFill/>
+          </a:ln>
+        </p:spPr>
+        <p:style>
+          <a:lnRef idx="2">
+            <a:schemeClr val="accent1">
+              <a:shade val="50000"/>
+            </a:schemeClr>
+          </a:lnRef>
+          <a:fillRef idx="1">
+            <a:schemeClr val="accent1"/>
+          </a:fillRef>
+          <a:effectRef idx="0">
+            <a:schemeClr val="accent1"/>
+          </a:effectRef>
+          <a:fontRef idx="minor">
+            <a:schemeClr val="lt1"/>
+          </a:fontRef>
+        </p:style>
+        <p:txBody>
+          <a:bodyPr rtlCol="0" anchor="ctr"/>
+          <a:lstStyle/>
+          <a:p>
+            <a:pPr algn="ctr"/>
+            <a:endParaRPr lang="en-US"/>
+          </a:p>
+        </p:txBody>
+      </p:sp>
+      <p:sp>
+        <p:nvSpPr>
+          <p:cNvPr id="11" name="Freeform: Shape 10">
+            <a:extLst>
+              <a:ext uri="{FF2B5EF4-FFF2-40B4-BE49-F238E27FC236}">
+                <a16:creationId xmlns:a16="http://schemas.microsoft.com/office/drawing/2014/main" id="{DB5B423A-57CC-4C58-AA26-8E2E862B03A0}"/>
+              </a:ext>
+              <a:ext uri="{C183D7F6-B498-43B3-948B-1728B52AA6E4}">
+                <adec:decorative xmlns:adec="http://schemas.microsoft.com/office/drawing/2017/decorative" val="1"/>
+              </a:ext>
+            </a:extLst>
+          </p:cNvPr>
+          <p:cNvSpPr>
+            <a:spLocks noGrp="1" noRot="1" noChangeAspect="1" noMove="1" noResize="1" noEditPoints="1" noAdjustHandles="1" noChangeArrowheads="1" noChangeShapeType="1" noTextEdit="1"/>
+          </p:cNvSpPr>
+          <p:nvPr>
+            <p:extLst>
+              <p:ext uri="{386F3935-93C4-4BCD-93E2-E3B085C9AB24}">
+                <p16:designElem xmlns:p16="http://schemas.microsoft.com/office/powerpoint/2015/main" val="1"/>
+              </p:ext>
+            </p:extLst>
+          </p:nvPr>
+        </p:nvSpPr>
+        <p:spPr>
+          <a:xfrm>
+            <a:off x="1" y="1"/>
+            <a:ext cx="5217023" cy="3994777"/>
+          </a:xfrm>
+          <a:custGeom>
+            <a:avLst/>
+            <a:gdLst>
+              <a:gd name="connsiteX0" fmla="*/ 1945461 w 5217023"/>
+              <a:gd name="connsiteY0" fmla="*/ 3787398 h 3994777"/>
+              <a:gd name="connsiteX1" fmla="*/ 1942113 w 5217023"/>
+              <a:gd name="connsiteY1" fmla="*/ 3790053 h 3994777"/>
+              <a:gd name="connsiteX2" fmla="*/ 1946982 w 5217023"/>
+              <a:gd name="connsiteY2" fmla="*/ 3787990 h 3994777"/>
+              <a:gd name="connsiteX3" fmla="*/ 1945461 w 5217023"/>
+              <a:gd name="connsiteY3" fmla="*/ 3787398 h 3994777"/>
+              <a:gd name="connsiteX4" fmla="*/ 0 w 5217023"/>
+              <a:gd name="connsiteY4" fmla="*/ 0 h 3994777"/>
+              <a:gd name="connsiteX5" fmla="*/ 5030958 w 5217023"/>
+              <a:gd name="connsiteY5" fmla="*/ 0 h 3994777"/>
+              <a:gd name="connsiteX6" fmla="*/ 5046198 w 5217023"/>
+              <a:gd name="connsiteY6" fmla="*/ 153449 h 3994777"/>
+              <a:gd name="connsiteX7" fmla="*/ 5055729 w 5217023"/>
+              <a:gd name="connsiteY7" fmla="*/ 415828 h 3994777"/>
+              <a:gd name="connsiteX8" fmla="*/ 4735242 w 5217023"/>
+              <a:gd name="connsiteY8" fmla="*/ 1867130 h 3994777"/>
+              <a:gd name="connsiteX9" fmla="*/ 3907395 w 5217023"/>
+              <a:gd name="connsiteY9" fmla="*/ 2938441 h 3994777"/>
+              <a:gd name="connsiteX10" fmla="*/ 3946497 w 5217023"/>
+              <a:gd name="connsiteY10" fmla="*/ 2908567 h 3994777"/>
+              <a:gd name="connsiteX11" fmla="*/ 4585421 w 5217023"/>
+              <a:gd name="connsiteY11" fmla="*/ 2188401 h 3994777"/>
+              <a:gd name="connsiteX12" fmla="*/ 5142585 w 5217023"/>
+              <a:gd name="connsiteY12" fmla="*/ 276891 h 3994777"/>
+              <a:gd name="connsiteX13" fmla="*/ 5121833 w 5217023"/>
+              <a:gd name="connsiteY13" fmla="*/ 30208 h 3994777"/>
+              <a:gd name="connsiteX14" fmla="*/ 5116229 w 5217023"/>
+              <a:gd name="connsiteY14" fmla="*/ 0 h 3994777"/>
+              <a:gd name="connsiteX15" fmla="*/ 5184724 w 5217023"/>
+              <a:gd name="connsiteY15" fmla="*/ 0 h 3994777"/>
+              <a:gd name="connsiteX16" fmla="*/ 5196265 w 5217023"/>
+              <a:gd name="connsiteY16" fmla="*/ 66113 h 3994777"/>
+              <a:gd name="connsiteX17" fmla="*/ 5058603 w 5217023"/>
+              <a:gd name="connsiteY17" fmla="*/ 1368242 h 3994777"/>
+              <a:gd name="connsiteX18" fmla="*/ 4096624 w 5217023"/>
+              <a:gd name="connsiteY18" fmla="*/ 2870829 h 3994777"/>
+              <a:gd name="connsiteX19" fmla="*/ 3833203 w 5217023"/>
+              <a:gd name="connsiteY19" fmla="*/ 3092190 h 3994777"/>
+              <a:gd name="connsiteX20" fmla="*/ 3536509 w 5217023"/>
+              <a:gd name="connsiteY20" fmla="*/ 3297128 h 3994777"/>
+              <a:gd name="connsiteX21" fmla="*/ 3148966 w 5217023"/>
+              <a:gd name="connsiteY21" fmla="*/ 3485478 h 3994777"/>
+              <a:gd name="connsiteX22" fmla="*/ 1860557 w 5217023"/>
+              <a:gd name="connsiteY22" fmla="*/ 3880910 h 3994777"/>
+              <a:gd name="connsiteX23" fmla="*/ 573715 w 5217023"/>
+              <a:gd name="connsiteY23" fmla="*/ 3983764 h 3994777"/>
+              <a:gd name="connsiteX24" fmla="*/ 108410 w 5217023"/>
+              <a:gd name="connsiteY24" fmla="*/ 3908816 h 3994777"/>
+              <a:gd name="connsiteX25" fmla="*/ 0 w 5217023"/>
+              <a:gd name="connsiteY25" fmla="*/ 3876793 h 3994777"/>
+              <a:gd name="connsiteX26" fmla="*/ 0 w 5217023"/>
+              <a:gd name="connsiteY26" fmla="*/ 3802912 h 3994777"/>
+              <a:gd name="connsiteX27" fmla="*/ 36975 w 5217023"/>
+              <a:gd name="connsiteY27" fmla="*/ 3815954 h 3994777"/>
+              <a:gd name="connsiteX28" fmla="*/ 561628 w 5217023"/>
+              <a:gd name="connsiteY28" fmla="*/ 3912655 h 3994777"/>
+              <a:gd name="connsiteX29" fmla="*/ 1683086 w 5217023"/>
+              <a:gd name="connsiteY29" fmla="*/ 3844334 h 3994777"/>
+              <a:gd name="connsiteX30" fmla="*/ 1806023 w 5217023"/>
+              <a:gd name="connsiteY30" fmla="*/ 3820992 h 3994777"/>
+              <a:gd name="connsiteX31" fmla="*/ 1921817 w 5217023"/>
+              <a:gd name="connsiteY31" fmla="*/ 3795747 h 3994777"/>
+              <a:gd name="connsiteX32" fmla="*/ 1243689 w 5217023"/>
+              <a:gd name="connsiteY32" fmla="*/ 3846539 h 3994777"/>
+              <a:gd name="connsiteX33" fmla="*/ 62875 w 5217023"/>
+              <a:gd name="connsiteY33" fmla="*/ 3668143 h 3994777"/>
+              <a:gd name="connsiteX34" fmla="*/ 0 w 5217023"/>
+              <a:gd name="connsiteY34" fmla="*/ 3644185 h 3994777"/>
+            </a:gdLst>
+            <a:ahLst/>
+            <a:cxnLst>
+              <a:cxn ang="0">
+                <a:pos x="connsiteX0" y="connsiteY0"/>
+              </a:cxn>
+              <a:cxn ang="0">
+                <a:pos x="connsiteX1" y="connsiteY1"/>
+              </a:cxn>
+              <a:cxn ang="0">
+                <a:pos x="connsiteX2" y="connsiteY2"/>
+              </a:cxn>
+              <a:cxn ang="0">
+                <a:pos x="connsiteX3" y="connsiteY3"/>
+              </a:cxn>
+              <a:cxn ang="0">
+                <a:pos x="connsiteX4" y="connsiteY4"/>
+              </a:cxn>
+              <a:cxn ang="0">
+                <a:pos x="connsiteX5" y="connsiteY5"/>
+              </a:cxn>
+              <a:cxn ang="0">
+                <a:pos x="connsiteX6" y="connsiteY6"/>
+              </a:cxn>
+              <a:cxn ang="0">
+                <a:pos x="connsiteX7" y="connsiteY7"/>
+              </a:cxn>
+              <a:cxn ang="0">
+                <a:pos x="connsiteX8" y="connsiteY8"/>
+              </a:cxn>
+              <a:cxn ang="0">
+                <a:pos x="connsiteX9" y="connsiteY9"/>
+              </a:cxn>
+              <a:cxn ang="0">
+                <a:pos x="connsiteX10" y="connsiteY10"/>
+              </a:cxn>
+              <a:cxn ang="0">
+                <a:pos x="connsiteX11" y="connsiteY11"/>
+              </a:cxn>
+              <a:cxn ang="0">
+                <a:pos x="connsiteX12" y="connsiteY12"/>
+              </a:cxn>
+              <a:cxn ang="0">
+                <a:pos x="connsiteX13" y="connsiteY13"/>
+              </a:cxn>
+              <a:cxn ang="0">
+                <a:pos x="connsiteX14" y="connsiteY14"/>
+              </a:cxn>
+              <a:cxn ang="0">
+                <a:pos x="connsiteX15" y="connsiteY15"/>
+              </a:cxn>
+              <a:cxn ang="0">
+                <a:pos x="connsiteX16" y="connsiteY16"/>
+              </a:cxn>
+              <a:cxn ang="0">
+                <a:pos x="connsiteX17" y="connsiteY17"/>
+              </a:cxn>
+              <a:cxn ang="0">
+                <a:pos x="connsiteX18" y="connsiteY18"/>
+              </a:cxn>
+              <a:cxn ang="0">
+                <a:pos x="connsiteX19" y="connsiteY19"/>
+              </a:cxn>
+              <a:cxn ang="0">
+                <a:pos x="connsiteX20" y="connsiteY20"/>
+              </a:cxn>
+              <a:cxn ang="0">
+                <a:pos x="connsiteX21" y="connsiteY21"/>
+              </a:cxn>
+              <a:cxn ang="0">
+                <a:pos x="connsiteX22" y="connsiteY22"/>
+              </a:cxn>
+              <a:cxn ang="0">
+                <a:pos x="connsiteX23" y="connsiteY23"/>
+              </a:cxn>
+              <a:cxn ang="0">
+                <a:pos x="connsiteX24" y="connsiteY24"/>
+              </a:cxn>
+              <a:cxn ang="0">
+                <a:pos x="connsiteX25" y="connsiteY25"/>
+              </a:cxn>
+              <a:cxn ang="0">
+                <a:pos x="connsiteX26" y="connsiteY26"/>
+              </a:cxn>
+              <a:cxn ang="0">
+                <a:pos x="connsiteX27" y="connsiteY27"/>
+              </a:cxn>
+              <a:cxn ang="0">
+                <a:pos x="connsiteX28" y="connsiteY28"/>
+              </a:cxn>
+              <a:cxn ang="0">
+                <a:pos x="connsiteX29" y="connsiteY29"/>
+              </a:cxn>
+              <a:cxn ang="0">
+                <a:pos x="connsiteX30" y="connsiteY30"/>
+              </a:cxn>
+              <a:cxn ang="0">
+                <a:pos x="connsiteX31" y="connsiteY31"/>
+              </a:cxn>
+              <a:cxn ang="0">
+                <a:pos x="connsiteX32" y="connsiteY32"/>
+              </a:cxn>
+              <a:cxn ang="0">
+                <a:pos x="connsiteX33" y="connsiteY33"/>
+              </a:cxn>
+              <a:cxn ang="0">
+                <a:pos x="connsiteX34" y="connsiteY34"/>
+              </a:cxn>
+            </a:cxnLst>
+            <a:rect l="l" t="t" r="r" b="b"/>
+            <a:pathLst>
+              <a:path w="5217023" h="3994777">
+                <a:moveTo>
+                  <a:pt x="1945461" y="3787398"/>
+                </a:moveTo>
+                <a:lnTo>
+                  <a:pt x="1942113" y="3790053"/>
+                </a:lnTo>
+                <a:lnTo>
+                  <a:pt x="1946982" y="3787990"/>
+                </a:lnTo>
+                <a:cubicBezTo>
+                  <a:pt x="1946982" y="3787990"/>
+                  <a:pt x="1946379" y="3787019"/>
+                  <a:pt x="1945461" y="3787398"/>
+                </a:cubicBezTo>
+                <a:close/>
+                <a:moveTo>
+                  <a:pt x="0" y="0"/>
+                </a:moveTo>
+                <a:lnTo>
+                  <a:pt x="5030958" y="0"/>
+                </a:lnTo>
+                <a:lnTo>
+                  <a:pt x="5046198" y="153449"/>
+                </a:lnTo>
+                <a:cubicBezTo>
+                  <a:pt x="5052189" y="240558"/>
+                  <a:pt x="5055458" y="328007"/>
+                  <a:pt x="5055729" y="415828"/>
+                </a:cubicBezTo>
+                <a:cubicBezTo>
+                  <a:pt x="5057604" y="923672"/>
+                  <a:pt x="4959210" y="1409054"/>
+                  <a:pt x="4735242" y="1867130"/>
+                </a:cubicBezTo>
+                <a:cubicBezTo>
+                  <a:pt x="4533284" y="2280198"/>
+                  <a:pt x="4248921" y="2629330"/>
+                  <a:pt x="3907395" y="2938441"/>
+                </a:cubicBezTo>
+                <a:cubicBezTo>
+                  <a:pt x="3922498" y="2931535"/>
+                  <a:pt x="3935859" y="2921330"/>
+                  <a:pt x="3946497" y="2908567"/>
+                </a:cubicBezTo>
+                <a:cubicBezTo>
+                  <a:pt x="4193494" y="2700987"/>
+                  <a:pt x="4408756" y="2458364"/>
+                  <a:pt x="4585421" y="2188401"/>
+                </a:cubicBezTo>
+                <a:cubicBezTo>
+                  <a:pt x="4967641" y="1608533"/>
+                  <a:pt x="5169304" y="975361"/>
+                  <a:pt x="5142585" y="276891"/>
+                </a:cubicBezTo>
+                <a:cubicBezTo>
+                  <a:pt x="5139764" y="194215"/>
+                  <a:pt x="5132824" y="111888"/>
+                  <a:pt x="5121833" y="30208"/>
+                </a:cubicBezTo>
+                <a:lnTo>
+                  <a:pt x="5116229" y="0"/>
+                </a:lnTo>
+                <a:lnTo>
+                  <a:pt x="5184724" y="0"/>
+                </a:lnTo>
+                <a:lnTo>
+                  <a:pt x="5196265" y="66113"/>
+                </a:lnTo>
+                <a:cubicBezTo>
+                  <a:pt x="5249921" y="496647"/>
+                  <a:pt x="5197997" y="931171"/>
+                  <a:pt x="5058603" y="1368242"/>
+                </a:cubicBezTo>
+                <a:cubicBezTo>
+                  <a:pt x="4872414" y="1953929"/>
+                  <a:pt x="4544298" y="2451351"/>
+                  <a:pt x="4096624" y="2870829"/>
+                </a:cubicBezTo>
+                <a:cubicBezTo>
+                  <a:pt x="4012832" y="2949426"/>
+                  <a:pt x="3924415" y="3022439"/>
+                  <a:pt x="3833203" y="3092190"/>
+                </a:cubicBezTo>
+                <a:cubicBezTo>
+                  <a:pt x="3741992" y="3161943"/>
+                  <a:pt x="3648667" y="3225510"/>
+                  <a:pt x="3536509" y="3297128"/>
+                </a:cubicBezTo>
+                <a:cubicBezTo>
+                  <a:pt x="3427215" y="3372735"/>
+                  <a:pt x="3288598" y="3430233"/>
+                  <a:pt x="3148966" y="3485478"/>
+                </a:cubicBezTo>
+                <a:cubicBezTo>
+                  <a:pt x="2729930" y="3651299"/>
+                  <a:pt x="2302194" y="3788890"/>
+                  <a:pt x="1860557" y="3880910"/>
+                </a:cubicBezTo>
+                <a:cubicBezTo>
+                  <a:pt x="1435974" y="3969444"/>
+                  <a:pt x="1008052" y="4017957"/>
+                  <a:pt x="573715" y="3983764"/>
+                </a:cubicBezTo>
+                <a:cubicBezTo>
+                  <a:pt x="415134" y="3971300"/>
+                  <a:pt x="259585" y="3947743"/>
+                  <a:pt x="108410" y="3908816"/>
+                </a:cubicBezTo>
+                <a:lnTo>
+                  <a:pt x="0" y="3876793"/>
+                </a:lnTo>
+                <a:lnTo>
+                  <a:pt x="0" y="3802912"/>
+                </a:lnTo>
+                <a:lnTo>
+                  <a:pt x="36975" y="3815954"/>
+                </a:lnTo>
+                <a:cubicBezTo>
+                  <a:pt x="206404" y="3867475"/>
+                  <a:pt x="382020" y="3897326"/>
+                  <a:pt x="561628" y="3912655"/>
+                </a:cubicBezTo>
+                <a:cubicBezTo>
+                  <a:pt x="938583" y="3944832"/>
+                  <a:pt x="1311814" y="3910697"/>
+                  <a:pt x="1683086" y="3844334"/>
+                </a:cubicBezTo>
+                <a:cubicBezTo>
+                  <a:pt x="1724123" y="3837151"/>
+                  <a:pt x="1765097" y="3829374"/>
+                  <a:pt x="1806023" y="3820992"/>
+                </a:cubicBezTo>
+                <a:cubicBezTo>
+                  <a:pt x="1844740" y="3813079"/>
+                  <a:pt x="1883218" y="3804161"/>
+                  <a:pt x="1921817" y="3795747"/>
+                </a:cubicBezTo>
+                <a:cubicBezTo>
+                  <a:pt x="1697011" y="3826435"/>
+                  <a:pt x="1470551" y="3843387"/>
+                  <a:pt x="1243689" y="3846539"/>
+                </a:cubicBezTo>
+                <a:cubicBezTo>
+                  <a:pt x="839058" y="3849054"/>
+                  <a:pt x="443424" y="3800206"/>
+                  <a:pt x="62875" y="3668143"/>
+                </a:cubicBezTo>
+                <a:lnTo>
+                  <a:pt x="0" y="3644185"/>
+                </a:lnTo>
+                <a:close/>
+              </a:path>
+            </a:pathLst>
+          </a:custGeom>
+          <a:solidFill>
+            <a:schemeClr val="accent2"/>
+          </a:solidFill>
+          <a:ln>
+            <a:noFill/>
+          </a:ln>
+        </p:spPr>
+        <p:style>
+          <a:lnRef idx="2">
+            <a:schemeClr val="accent1">
+              <a:shade val="50000"/>
+            </a:schemeClr>
+          </a:lnRef>
+          <a:fillRef idx="1">
+            <a:schemeClr val="accent1"/>
+          </a:fillRef>
+          <a:effectRef idx="0">
+            <a:schemeClr val="accent1"/>
+          </a:effectRef>
+          <a:fontRef idx="minor">
+            <a:schemeClr val="lt1"/>
+          </a:fontRef>
+        </p:style>
+        <p:txBody>
+          <a:bodyPr wrap="square" rtlCol="0" anchor="ctr">
+            <a:noAutofit/>
+          </a:bodyPr>
+          <a:lstStyle/>
+          <a:p>
+            <a:pPr algn="ctr"/>
+            <a:endParaRPr lang="en-US"/>
+          </a:p>
+        </p:txBody>
+      </p:sp>
+      <p:sp>
+        <p:nvSpPr>
+          <p:cNvPr id="2" name="제목 1">
+            <a:extLst>
+              <a:ext uri="{FF2B5EF4-FFF2-40B4-BE49-F238E27FC236}">
+                <a16:creationId xmlns:a16="http://schemas.microsoft.com/office/drawing/2014/main" id="{ED13C5C3-ED29-E6F4-37AC-4E83F2821930}"/>
+              </a:ext>
+            </a:extLst>
+          </p:cNvPr>
+          <p:cNvSpPr>
+            <a:spLocks noGrp="1"/>
+          </p:cNvSpPr>
+          <p:nvPr>
+            <p:ph type="title"/>
+          </p:nvPr>
+        </p:nvSpPr>
+        <p:spPr>
+          <a:xfrm>
+            <a:off x="74703" y="638175"/>
+            <a:ext cx="5393267" cy="2027227"/>
+          </a:xfrm>
+        </p:spPr>
+        <p:txBody>
+          <a:bodyPr anchor="t">
+            <a:normAutofit/>
+          </a:bodyPr>
+          <a:lstStyle/>
+          <a:p>
+            <a:r>
+              <a:rPr lang="en-US" altLang="ko-KR" sz="5400" dirty="0">
+                <a:solidFill>
+                  <a:srgbClr val="FFFFFF"/>
+                </a:solidFill>
+              </a:rPr>
+              <a:t>Abstract Class</a:t>
+            </a:r>
+            <a:br>
+              <a:rPr lang="en-US" altLang="ko-KR" sz="5400" dirty="0">
+                <a:solidFill>
+                  <a:srgbClr val="FFFFFF"/>
+                </a:solidFill>
+              </a:rPr>
+            </a:br>
+            <a:r>
+              <a:rPr lang="en-US" altLang="ko-KR" sz="5400" dirty="0">
+                <a:solidFill>
+                  <a:srgbClr val="FFFFFF"/>
+                </a:solidFill>
+              </a:rPr>
+              <a:t>(</a:t>
+            </a:r>
+            <a:r>
+              <a:rPr lang="ko-KR" altLang="en-US" sz="5400" dirty="0">
+                <a:solidFill>
+                  <a:srgbClr val="FFFFFF"/>
+                </a:solidFill>
+              </a:rPr>
+              <a:t>추상 클래스</a:t>
+            </a:r>
+            <a:r>
+              <a:rPr lang="en-US" altLang="ko-KR" sz="5400" dirty="0">
+                <a:solidFill>
+                  <a:srgbClr val="FFFFFF"/>
+                </a:solidFill>
+              </a:rPr>
+              <a:t>)</a:t>
+            </a:r>
+            <a:endParaRPr lang="ko-KR" altLang="en-US" sz="5400" dirty="0">
+              <a:solidFill>
+                <a:srgbClr val="FFFFFF"/>
+              </a:solidFill>
+            </a:endParaRPr>
+          </a:p>
+        </p:txBody>
+      </p:sp>
+      <p:graphicFrame>
+        <p:nvGraphicFramePr>
+          <p:cNvPr id="5" name="내용 개체 틀 2">
+            <a:extLst>
+              <a:ext uri="{FF2B5EF4-FFF2-40B4-BE49-F238E27FC236}">
+                <a16:creationId xmlns:a16="http://schemas.microsoft.com/office/drawing/2014/main" id="{D365457A-60EA-E783-4E95-A47556481D98}"/>
+              </a:ext>
+            </a:extLst>
+          </p:cNvPr>
+          <p:cNvGraphicFramePr>
+            <a:graphicFrameLocks noGrp="1"/>
+          </p:cNvGraphicFramePr>
+          <p:nvPr>
+            <p:ph idx="1"/>
+            <p:extLst>
+              <p:ext uri="{D42A27DB-BD31-4B8C-83A1-F6EECF244321}">
+                <p14:modId xmlns:p14="http://schemas.microsoft.com/office/powerpoint/2010/main" val="1994942791"/>
+              </p:ext>
+            </p:extLst>
+          </p:nvPr>
+        </p:nvGraphicFramePr>
+        <p:xfrm>
+          <a:off x="5542672" y="541606"/>
+          <a:ext cx="5811128" cy="5678219"/>
+        </p:xfrm>
+        <a:graphic>
+          <a:graphicData uri="http://schemas.openxmlformats.org/drawingml/2006/diagram">
+            <dgm:relIds xmlns:dgm="http://schemas.openxmlformats.org/drawingml/2006/diagram" xmlns:r="http://schemas.openxmlformats.org/officeDocument/2006/relationships" r:dm="rId2" r:lo="rId3" r:qs="rId4" r:cs="rId5"/>
+          </a:graphicData>
+        </a:graphic>
+      </p:graphicFrame>
+    </p:spTree>
+    <p:extLst>
+      <p:ext uri="{BB962C8B-B14F-4D97-AF65-F5344CB8AC3E}">
+        <p14:creationId xmlns:p14="http://schemas.microsoft.com/office/powerpoint/2010/main" val="2326641706"/>
+      </p:ext>
+    </p:extLst>
+  </p:cSld>
+  <p:clrMapOvr>
+    <a:masterClrMapping/>
+  </p:clrMapOvr>
+</p:sld>
+</file>
+
+<file path=ppt/slides/slide15.xml><?xml version="1.0" encoding="utf-8"?>
+<p:sld xmlns:a="http://schemas.openxmlformats.org/drawingml/2006/main" xmlns:r="http://schemas.openxmlformats.org/officeDocument/2006/relationships" xmlns:p="http://schemas.openxmlformats.org/presentationml/2006/main">
+  <p:cSld>
+    <p:bg>
+      <p:bgPr>
+        <a:solidFill>
+          <a:schemeClr val="bg1"/>
+        </a:solidFill>
+        <a:effectLst/>
+      </p:bgPr>
+    </p:bg>
+    <p:spTree>
+      <p:nvGrpSpPr>
+        <p:cNvPr id="1" name=""/>
+        <p:cNvGrpSpPr/>
+        <p:nvPr/>
+      </p:nvGrpSpPr>
+      <p:grpSpPr>
+        <a:xfrm>
+          <a:off x="0" y="0"/>
+          <a:ext cx="0" cy="0"/>
+          <a:chOff x="0" y="0"/>
+          <a:chExt cx="0" cy="0"/>
+        </a:xfrm>
+      </p:grpSpPr>
+      <p:sp useBgFill="1">
+        <p:nvSpPr>
+          <p:cNvPr id="9" name="Rectangle 8">
+            <a:extLst>
+              <a:ext uri="{FF2B5EF4-FFF2-40B4-BE49-F238E27FC236}">
+                <a16:creationId xmlns:a16="http://schemas.microsoft.com/office/drawing/2014/main" id="{BACC6370-2D7E-4714-9D71-7542949D7D5D}"/>
+              </a:ext>
+              <a:ext uri="{C183D7F6-B498-43B3-948B-1728B52AA6E4}">
+                <adec:decorative xmlns:adec="http://schemas.microsoft.com/office/drawing/2017/decorative" val="1"/>
+              </a:ext>
+            </a:extLst>
+          </p:cNvPr>
+          <p:cNvSpPr>
+            <a:spLocks noGrp="1" noRot="1" noChangeAspect="1" noMove="1" noResize="1" noEditPoints="1" noAdjustHandles="1" noChangeArrowheads="1" noChangeShapeType="1" noTextEdit="1"/>
+          </p:cNvSpPr>
+          <p:nvPr>
+            <p:extLst>
+              <p:ext uri="{386F3935-93C4-4BCD-93E2-E3B085C9AB24}">
+                <p16:designElem xmlns:p16="http://schemas.microsoft.com/office/powerpoint/2015/main" val="1"/>
+              </p:ext>
+            </p:extLst>
+          </p:nvPr>
+        </p:nvSpPr>
+        <p:spPr>
+          <a:xfrm>
+            <a:off x="0" y="0"/>
+            <a:ext cx="12192000" cy="6858000"/>
+          </a:xfrm>
+          <a:prstGeom prst="rect">
+            <a:avLst/>
+          </a:prstGeom>
+          <a:ln w="12700" cap="flat" cmpd="sng" algn="ctr">
+            <a:noFill/>
+            <a:prstDash val="solid"/>
+            <a:miter lim="800000"/>
+          </a:ln>
+          <a:effectLst/>
+          <a:extLst>
+            <a:ext uri="{91240B29-F687-4F45-9708-019B960494DF}">
+              <a14:hiddenLine xmlns:a14="http://schemas.microsoft.com/office/drawing/2010/main" w="12700" cap="flat" cmpd="sng" algn="ctr">
+                <a:solidFill>
+                  <a:schemeClr val="accent1">
+                    <a:shade val="50000"/>
+                  </a:schemeClr>
+                </a:solidFill>
+                <a:prstDash val="solid"/>
+                <a:miter lim="800000"/>
+              </a14:hiddenLine>
+            </a:ext>
+          </a:extLst>
+        </p:spPr>
+        <p:style>
+          <a:lnRef idx="2">
+            <a:schemeClr val="accent1">
+              <a:shade val="50000"/>
+            </a:schemeClr>
+          </a:lnRef>
+          <a:fillRef idx="1">
+            <a:schemeClr val="accent1"/>
+          </a:fillRef>
+          <a:effectRef idx="0">
+            <a:schemeClr val="accent1"/>
+          </a:effectRef>
+          <a:fontRef idx="minor">
+            <a:schemeClr val="lt1"/>
+          </a:fontRef>
+        </p:style>
+        <p:txBody>
+          <a:bodyPr rtlCol="0" anchor="ctr"/>
+          <a:lstStyle/>
+          <a:p>
+            <a:pPr algn="ctr"/>
+            <a:endParaRPr lang="en-US"/>
+          </a:p>
+        </p:txBody>
+      </p:sp>
+      <p:sp>
+        <p:nvSpPr>
+          <p:cNvPr id="11" name="Rectangle 10">
+            <a:extLst>
+              <a:ext uri="{FF2B5EF4-FFF2-40B4-BE49-F238E27FC236}">
+                <a16:creationId xmlns:a16="http://schemas.microsoft.com/office/drawing/2014/main" id="{F68B3F68-107C-434F-AA38-110D5EA91B85}"/>
+              </a:ext>
+              <a:ext uri="{C183D7F6-B498-43B3-948B-1728B52AA6E4}">
+                <adec:decorative xmlns:adec="http://schemas.microsoft.com/office/drawing/2017/decorative" val="1"/>
+              </a:ext>
+            </a:extLst>
+          </p:cNvPr>
+          <p:cNvSpPr>
+            <a:spLocks noGrp="1" noRot="1" noChangeAspect="1" noMove="1" noResize="1" noEditPoints="1" noAdjustHandles="1" noChangeArrowheads="1" noChangeShapeType="1" noTextEdit="1"/>
+          </p:cNvSpPr>
+          <p:nvPr>
+            <p:extLst>
+              <p:ext uri="{386F3935-93C4-4BCD-93E2-E3B085C9AB24}">
+                <p16:designElem xmlns:p16="http://schemas.microsoft.com/office/powerpoint/2015/main" val="1"/>
+              </p:ext>
+            </p:extLst>
+          </p:nvPr>
+        </p:nvSpPr>
+        <p:spPr>
+          <a:xfrm flipH="1">
+            <a:off x="2" y="0"/>
+            <a:ext cx="12191998" cy="2170031"/>
+          </a:xfrm>
+          <a:prstGeom prst="rect">
+            <a:avLst/>
+          </a:prstGeom>
+          <a:gradFill>
+            <a:gsLst>
+              <a:gs pos="0">
+                <a:srgbClr val="000000">
+                  <a:alpha val="96000"/>
+                </a:srgbClr>
+              </a:gs>
+              <a:gs pos="100000">
+                <a:schemeClr val="accent1">
+                  <a:lumMod val="75000"/>
+                </a:schemeClr>
+              </a:gs>
+            </a:gsLst>
+            <a:lin ang="19800000" scaled="0"/>
+          </a:gradFill>
+          <a:ln>
+            <a:noFill/>
+          </a:ln>
+        </p:spPr>
+        <p:style>
+          <a:lnRef idx="2">
+            <a:schemeClr val="accent1">
+              <a:shade val="50000"/>
+            </a:schemeClr>
+          </a:lnRef>
+          <a:fillRef idx="1">
+            <a:schemeClr val="accent1"/>
+          </a:fillRef>
+          <a:effectRef idx="0">
+            <a:schemeClr val="accent1"/>
+          </a:effectRef>
+          <a:fontRef idx="minor">
+            <a:schemeClr val="lt1"/>
+          </a:fontRef>
+        </p:style>
+        <p:txBody>
+          <a:bodyPr rtlCol="0" anchor="ctr"/>
+          <a:lstStyle/>
+          <a:p>
+            <a:pPr algn="ctr"/>
+            <a:endParaRPr lang="en-US"/>
+          </a:p>
+        </p:txBody>
+      </p:sp>
+      <p:sp>
+        <p:nvSpPr>
+          <p:cNvPr id="13" name="Rectangle 12">
+            <a:extLst>
+              <a:ext uri="{FF2B5EF4-FFF2-40B4-BE49-F238E27FC236}">
+                <a16:creationId xmlns:a16="http://schemas.microsoft.com/office/drawing/2014/main" id="{AAD0DBB9-1A4B-4391-81D4-CB19F9AB918A}"/>
+              </a:ext>
+              <a:ext uri="{C183D7F6-B498-43B3-948B-1728B52AA6E4}">
+                <adec:decorative xmlns:adec="http://schemas.microsoft.com/office/drawing/2017/decorative" val="1"/>
+              </a:ext>
+            </a:extLst>
+          </p:cNvPr>
+          <p:cNvSpPr>
+            <a:spLocks noGrp="1" noRot="1" noChangeAspect="1" noMove="1" noResize="1" noEditPoints="1" noAdjustHandles="1" noChangeArrowheads="1" noChangeShapeType="1" noTextEdit="1"/>
+          </p:cNvSpPr>
+          <p:nvPr>
+            <p:extLst>
+              <p:ext uri="{386F3935-93C4-4BCD-93E2-E3B085C9AB24}">
+                <p16:designElem xmlns:p16="http://schemas.microsoft.com/office/powerpoint/2015/main" val="1"/>
+              </p:ext>
+            </p:extLst>
+          </p:nvPr>
+        </p:nvSpPr>
+        <p:spPr>
+          <a:xfrm flipH="1">
+            <a:off x="8082819" y="0"/>
+            <a:ext cx="4097211" cy="2170661"/>
+          </a:xfrm>
+          <a:prstGeom prst="rect">
+            <a:avLst/>
+          </a:prstGeom>
+          <a:gradFill>
+            <a:gsLst>
+              <a:gs pos="19000">
+                <a:schemeClr val="accent1">
+                  <a:lumMod val="50000"/>
+                  <a:alpha val="68000"/>
+                </a:schemeClr>
+              </a:gs>
+              <a:gs pos="100000">
+                <a:schemeClr val="accent1">
+                  <a:alpha val="48000"/>
+                </a:schemeClr>
+              </a:gs>
+            </a:gsLst>
+            <a:lin ang="19200000" scaled="0"/>
+          </a:gradFill>
+          <a:ln>
+            <a:noFill/>
+          </a:ln>
+        </p:spPr>
+        <p:style>
+          <a:lnRef idx="2">
+            <a:schemeClr val="accent1">
+              <a:shade val="50000"/>
+            </a:schemeClr>
+          </a:lnRef>
+          <a:fillRef idx="1">
+            <a:schemeClr val="accent1"/>
+          </a:fillRef>
+          <a:effectRef idx="0">
+            <a:schemeClr val="accent1"/>
+          </a:effectRef>
+          <a:fontRef idx="minor">
+            <a:schemeClr val="lt1"/>
+          </a:fontRef>
+        </p:style>
+        <p:txBody>
+          <a:bodyPr rtlCol="0" anchor="ctr"/>
+          <a:lstStyle/>
+          <a:p>
+            <a:pPr algn="ctr"/>
+            <a:endParaRPr lang="en-US"/>
+          </a:p>
+        </p:txBody>
+      </p:sp>
+      <p:sp>
+        <p:nvSpPr>
+          <p:cNvPr id="15" name="Rectangle 14">
+            <a:extLst>
+              <a:ext uri="{FF2B5EF4-FFF2-40B4-BE49-F238E27FC236}">
+                <a16:creationId xmlns:a16="http://schemas.microsoft.com/office/drawing/2014/main" id="{063BBA22-50EA-4C4D-BE05-F1CE4E63AA56}"/>
+              </a:ext>
+              <a:ext uri="{C183D7F6-B498-43B3-948B-1728B52AA6E4}">
+                <adec:decorative xmlns:adec="http://schemas.microsoft.com/office/drawing/2017/decorative" val="1"/>
+              </a:ext>
+            </a:extLst>
+          </p:cNvPr>
+          <p:cNvSpPr>
+            <a:spLocks noGrp="1" noRot="1" noChangeAspect="1" noMove="1" noResize="1" noEditPoints="1" noAdjustHandles="1" noChangeArrowheads="1" noChangeShapeType="1" noTextEdit="1"/>
+          </p:cNvSpPr>
+          <p:nvPr>
+            <p:extLst>
+              <p:ext uri="{386F3935-93C4-4BCD-93E2-E3B085C9AB24}">
+                <p16:designElem xmlns:p16="http://schemas.microsoft.com/office/powerpoint/2015/main" val="1"/>
+              </p:ext>
+            </p:extLst>
+          </p:nvPr>
+        </p:nvSpPr>
+        <p:spPr>
+          <a:xfrm rot="16200000" flipH="1">
+            <a:off x="5010646" y="-5010043"/>
+            <a:ext cx="2170709" cy="12192000"/>
+          </a:xfrm>
+          <a:prstGeom prst="rect">
+            <a:avLst/>
+          </a:prstGeom>
+          <a:gradFill>
+            <a:gsLst>
+              <a:gs pos="23000">
+                <a:schemeClr val="accent1">
+                  <a:lumMod val="75000"/>
+                  <a:alpha val="16000"/>
+                </a:schemeClr>
+              </a:gs>
+              <a:gs pos="99000">
+                <a:srgbClr val="000000">
+                  <a:alpha val="45000"/>
+                </a:srgbClr>
+              </a:gs>
+            </a:gsLst>
+            <a:lin ang="21000000" scaled="0"/>
+          </a:gradFill>
+          <a:ln>
+            <a:noFill/>
+          </a:ln>
+        </p:spPr>
+        <p:style>
+          <a:lnRef idx="2">
+            <a:schemeClr val="accent1">
+              <a:shade val="50000"/>
+            </a:schemeClr>
+          </a:lnRef>
+          <a:fillRef idx="1">
+            <a:schemeClr val="accent1"/>
+          </a:fillRef>
+          <a:effectRef idx="0">
+            <a:schemeClr val="accent1"/>
+          </a:effectRef>
+          <a:fontRef idx="minor">
+            <a:schemeClr val="lt1"/>
+          </a:fontRef>
+        </p:style>
+        <p:txBody>
+          <a:bodyPr rtlCol="0" anchor="ctr"/>
+          <a:lstStyle/>
+          <a:p>
+            <a:pPr algn="ctr"/>
+            <a:endParaRPr lang="en-US" dirty="0"/>
+          </a:p>
+        </p:txBody>
+      </p:sp>
+      <p:sp>
+        <p:nvSpPr>
+          <p:cNvPr id="2" name="제목 1">
+            <a:extLst>
+              <a:ext uri="{FF2B5EF4-FFF2-40B4-BE49-F238E27FC236}">
+                <a16:creationId xmlns:a16="http://schemas.microsoft.com/office/drawing/2014/main" id="{046020F7-59D1-CCFE-9A38-B293BD1C536B}"/>
+              </a:ext>
+            </a:extLst>
+          </p:cNvPr>
+          <p:cNvSpPr>
+            <a:spLocks noGrp="1"/>
+          </p:cNvSpPr>
+          <p:nvPr>
+            <p:ph type="title"/>
+          </p:nvPr>
+        </p:nvSpPr>
+        <p:spPr>
+          <a:xfrm>
+            <a:off x="1383564" y="348865"/>
+            <a:ext cx="9718111" cy="1576446"/>
+          </a:xfrm>
+        </p:spPr>
+        <p:txBody>
+          <a:bodyPr anchor="ctr">
+            <a:normAutofit/>
+          </a:bodyPr>
+          <a:lstStyle/>
+          <a:p>
+            <a:r>
+              <a:rPr lang="ko-KR" altLang="en-US" sz="4000" dirty="0">
+                <a:solidFill>
+                  <a:srgbClr val="FFFFFF"/>
+                </a:solidFill>
+              </a:rPr>
+              <a:t>다양한 상속 종류</a:t>
+            </a:r>
+          </a:p>
+        </p:txBody>
+      </p:sp>
+      <p:graphicFrame>
+        <p:nvGraphicFramePr>
+          <p:cNvPr id="5" name="내용 개체 틀 2">
+            <a:extLst>
+              <a:ext uri="{FF2B5EF4-FFF2-40B4-BE49-F238E27FC236}">
+                <a16:creationId xmlns:a16="http://schemas.microsoft.com/office/drawing/2014/main" id="{33B13869-31F1-71AD-2E84-5AA0D0D6C430}"/>
+              </a:ext>
+            </a:extLst>
+          </p:cNvPr>
+          <p:cNvGraphicFramePr>
+            <a:graphicFrameLocks noGrp="1"/>
+          </p:cNvGraphicFramePr>
+          <p:nvPr>
+            <p:ph idx="1"/>
+            <p:extLst>
+              <p:ext uri="{D42A27DB-BD31-4B8C-83A1-F6EECF244321}">
+                <p14:modId xmlns:p14="http://schemas.microsoft.com/office/powerpoint/2010/main" val="2862501819"/>
+              </p:ext>
+            </p:extLst>
+          </p:nvPr>
+        </p:nvGraphicFramePr>
+        <p:xfrm>
+          <a:off x="644056" y="2615979"/>
+          <a:ext cx="10927829" cy="3689405"/>
+        </p:xfrm>
+        <a:graphic>
+          <a:graphicData uri="http://schemas.openxmlformats.org/drawingml/2006/diagram">
+            <dgm:relIds xmlns:dgm="http://schemas.openxmlformats.org/drawingml/2006/diagram" xmlns:r="http://schemas.openxmlformats.org/officeDocument/2006/relationships" r:dm="rId2" r:lo="rId3" r:qs="rId4" r:cs="rId5"/>
+          </a:graphicData>
+        </a:graphic>
+      </p:graphicFrame>
+    </p:spTree>
+    <p:extLst>
+      <p:ext uri="{BB962C8B-B14F-4D97-AF65-F5344CB8AC3E}">
+        <p14:creationId xmlns:p14="http://schemas.microsoft.com/office/powerpoint/2010/main" val="237097772"/>
       </p:ext>
     </p:extLst>
   </p:cSld>

--- a/C# 문법.pptx
+++ b/C# 문법.pptx
@@ -16,10 +16,11 @@
     <p:sldId id="265" r:id="rId10"/>
     <p:sldId id="266" r:id="rId11"/>
     <p:sldId id="267" r:id="rId12"/>
-    <p:sldId id="268" r:id="rId13"/>
-    <p:sldId id="269" r:id="rId14"/>
-    <p:sldId id="271" r:id="rId15"/>
-    <p:sldId id="270" r:id="rId16"/>
+    <p:sldId id="272" r:id="rId13"/>
+    <p:sldId id="268" r:id="rId14"/>
+    <p:sldId id="269" r:id="rId15"/>
+    <p:sldId id="271" r:id="rId16"/>
+    <p:sldId id="270" r:id="rId17"/>
   </p:sldIdLst>
   <p:sldSz cx="12192000" cy="6858000"/>
   <p:notesSz cx="6858000" cy="9144000"/>
@@ -20608,7 +20609,7 @@
           <a:p>
             <a:fld id="{80606649-8C48-4DEB-9F5F-3AE3C52C94A0}" type="datetimeFigureOut">
               <a:rPr lang="ko-KR" altLang="en-US" smtClean="0"/>
-              <a:t>2025-11-03</a:t>
+              <a:t>2025-11-04</a:t>
             </a:fld>
             <a:endParaRPr lang="ko-KR" altLang="en-US"/>
           </a:p>
@@ -20806,7 +20807,7 @@
           <a:p>
             <a:fld id="{80606649-8C48-4DEB-9F5F-3AE3C52C94A0}" type="datetimeFigureOut">
               <a:rPr lang="ko-KR" altLang="en-US" smtClean="0"/>
-              <a:t>2025-11-03</a:t>
+              <a:t>2025-11-04</a:t>
             </a:fld>
             <a:endParaRPr lang="ko-KR" altLang="en-US"/>
           </a:p>
@@ -21014,7 +21015,7 @@
           <a:p>
             <a:fld id="{80606649-8C48-4DEB-9F5F-3AE3C52C94A0}" type="datetimeFigureOut">
               <a:rPr lang="ko-KR" altLang="en-US" smtClean="0"/>
-              <a:t>2025-11-03</a:t>
+              <a:t>2025-11-04</a:t>
             </a:fld>
             <a:endParaRPr lang="ko-KR" altLang="en-US"/>
           </a:p>
@@ -21212,7 +21213,7 @@
           <a:p>
             <a:fld id="{80606649-8C48-4DEB-9F5F-3AE3C52C94A0}" type="datetimeFigureOut">
               <a:rPr lang="ko-KR" altLang="en-US" smtClean="0"/>
-              <a:t>2025-11-03</a:t>
+              <a:t>2025-11-04</a:t>
             </a:fld>
             <a:endParaRPr lang="ko-KR" altLang="en-US"/>
           </a:p>
@@ -21487,7 +21488,7 @@
           <a:p>
             <a:fld id="{80606649-8C48-4DEB-9F5F-3AE3C52C94A0}" type="datetimeFigureOut">
               <a:rPr lang="ko-KR" altLang="en-US" smtClean="0"/>
-              <a:t>2025-11-03</a:t>
+              <a:t>2025-11-04</a:t>
             </a:fld>
             <a:endParaRPr lang="ko-KR" altLang="en-US"/>
           </a:p>
@@ -21752,7 +21753,7 @@
           <a:p>
             <a:fld id="{80606649-8C48-4DEB-9F5F-3AE3C52C94A0}" type="datetimeFigureOut">
               <a:rPr lang="ko-KR" altLang="en-US" smtClean="0"/>
-              <a:t>2025-11-03</a:t>
+              <a:t>2025-11-04</a:t>
             </a:fld>
             <a:endParaRPr lang="ko-KR" altLang="en-US"/>
           </a:p>
@@ -22164,7 +22165,7 @@
           <a:p>
             <a:fld id="{80606649-8C48-4DEB-9F5F-3AE3C52C94A0}" type="datetimeFigureOut">
               <a:rPr lang="ko-KR" altLang="en-US" smtClean="0"/>
-              <a:t>2025-11-03</a:t>
+              <a:t>2025-11-04</a:t>
             </a:fld>
             <a:endParaRPr lang="ko-KR" altLang="en-US"/>
           </a:p>
@@ -22305,7 +22306,7 @@
           <a:p>
             <a:fld id="{80606649-8C48-4DEB-9F5F-3AE3C52C94A0}" type="datetimeFigureOut">
               <a:rPr lang="ko-KR" altLang="en-US" smtClean="0"/>
-              <a:t>2025-11-03</a:t>
+              <a:t>2025-11-04</a:t>
             </a:fld>
             <a:endParaRPr lang="ko-KR" altLang="en-US"/>
           </a:p>
@@ -22418,7 +22419,7 @@
           <a:p>
             <a:fld id="{80606649-8C48-4DEB-9F5F-3AE3C52C94A0}" type="datetimeFigureOut">
               <a:rPr lang="ko-KR" altLang="en-US" smtClean="0"/>
-              <a:t>2025-11-03</a:t>
+              <a:t>2025-11-04</a:t>
             </a:fld>
             <a:endParaRPr lang="ko-KR" altLang="en-US"/>
           </a:p>
@@ -22729,7 +22730,7 @@
           <a:p>
             <a:fld id="{80606649-8C48-4DEB-9F5F-3AE3C52C94A0}" type="datetimeFigureOut">
               <a:rPr lang="ko-KR" altLang="en-US" smtClean="0"/>
-              <a:t>2025-11-03</a:t>
+              <a:t>2025-11-04</a:t>
             </a:fld>
             <a:endParaRPr lang="ko-KR" altLang="en-US"/>
           </a:p>
@@ -23017,7 +23018,7 @@
           <a:p>
             <a:fld id="{80606649-8C48-4DEB-9F5F-3AE3C52C94A0}" type="datetimeFigureOut">
               <a:rPr lang="ko-KR" altLang="en-US" smtClean="0"/>
-              <a:t>2025-11-03</a:t>
+              <a:t>2025-11-04</a:t>
             </a:fld>
             <a:endParaRPr lang="ko-KR" altLang="en-US"/>
           </a:p>
@@ -23258,7 +23259,7 @@
           <a:p>
             <a:fld id="{80606649-8C48-4DEB-9F5F-3AE3C52C94A0}" type="datetimeFigureOut">
               <a:rPr lang="ko-KR" altLang="en-US" smtClean="0"/>
-              <a:t>2025-11-03</a:t>
+              <a:t>2025-11-04</a:t>
             </a:fld>
             <a:endParaRPr lang="ko-KR" altLang="en-US"/>
           </a:p>
@@ -26044,6 +26045,1171 @@
           <a:chExt cx="0" cy="0"/>
         </a:xfrm>
       </p:grpSpPr>
+      <p:sp useBgFill="1">
+        <p:nvSpPr>
+          <p:cNvPr id="9" name="Rectangle 8">
+            <a:extLst>
+              <a:ext uri="{FF2B5EF4-FFF2-40B4-BE49-F238E27FC236}">
+                <a16:creationId xmlns:a16="http://schemas.microsoft.com/office/drawing/2014/main" id="{A8384FB5-9ADC-4DDC-881B-597D56F5B15D}"/>
+              </a:ext>
+              <a:ext uri="{C183D7F6-B498-43B3-948B-1728B52AA6E4}">
+                <adec:decorative xmlns:adec="http://schemas.microsoft.com/office/drawing/2017/decorative" val="1"/>
+              </a:ext>
+            </a:extLst>
+          </p:cNvPr>
+          <p:cNvSpPr>
+            <a:spLocks noGrp="1" noRot="1" noChangeAspect="1" noMove="1" noResize="1" noEditPoints="1" noAdjustHandles="1" noChangeArrowheads="1" noChangeShapeType="1" noTextEdit="1"/>
+          </p:cNvSpPr>
+          <p:nvPr>
+            <p:extLst>
+              <p:ext uri="{386F3935-93C4-4BCD-93E2-E3B085C9AB24}">
+                <p16:designElem xmlns:p16="http://schemas.microsoft.com/office/powerpoint/2015/main" val="1"/>
+              </p:ext>
+            </p:extLst>
+          </p:nvPr>
+        </p:nvSpPr>
+        <p:spPr>
+          <a:xfrm>
+            <a:off x="0" y="0"/>
+            <a:ext cx="12192000" cy="6858000"/>
+          </a:xfrm>
+          <a:prstGeom prst="rect">
+            <a:avLst/>
+          </a:prstGeom>
+          <a:ln w="12700" cap="flat" cmpd="sng" algn="ctr">
+            <a:noFill/>
+            <a:prstDash val="solid"/>
+            <a:miter lim="800000"/>
+          </a:ln>
+          <a:effectLst/>
+          <a:extLst>
+            <a:ext uri="{91240B29-F687-4F45-9708-019B960494DF}">
+              <a14:hiddenLine xmlns:a14="http://schemas.microsoft.com/office/drawing/2010/main" w="12700" cap="flat" cmpd="sng" algn="ctr">
+                <a:solidFill>
+                  <a:schemeClr val="accent1">
+                    <a:shade val="50000"/>
+                  </a:schemeClr>
+                </a:solidFill>
+                <a:prstDash val="solid"/>
+                <a:miter lim="800000"/>
+              </a14:hiddenLine>
+            </a:ext>
+          </a:extLst>
+        </p:spPr>
+        <p:style>
+          <a:lnRef idx="2">
+            <a:schemeClr val="accent1">
+              <a:shade val="50000"/>
+            </a:schemeClr>
+          </a:lnRef>
+          <a:fillRef idx="1">
+            <a:schemeClr val="accent1"/>
+          </a:fillRef>
+          <a:effectRef idx="0">
+            <a:schemeClr val="accent1"/>
+          </a:effectRef>
+          <a:fontRef idx="minor">
+            <a:schemeClr val="lt1"/>
+          </a:fontRef>
+        </p:style>
+        <p:txBody>
+          <a:bodyPr rtlCol="0" anchor="ctr"/>
+          <a:lstStyle/>
+          <a:p>
+            <a:pPr algn="ctr"/>
+            <a:endParaRPr lang="en-US"/>
+          </a:p>
+        </p:txBody>
+      </p:sp>
+      <p:sp>
+        <p:nvSpPr>
+          <p:cNvPr id="11" name="Rectangle 10">
+            <a:extLst>
+              <a:ext uri="{FF2B5EF4-FFF2-40B4-BE49-F238E27FC236}">
+                <a16:creationId xmlns:a16="http://schemas.microsoft.com/office/drawing/2014/main" id="{1199E1B1-A8C0-4FE8-A5A8-1CB41D69F857}"/>
+              </a:ext>
+              <a:ext uri="{C183D7F6-B498-43B3-948B-1728B52AA6E4}">
+                <adec:decorative xmlns:adec="http://schemas.microsoft.com/office/drawing/2017/decorative" val="1"/>
+              </a:ext>
+            </a:extLst>
+          </p:cNvPr>
+          <p:cNvSpPr>
+            <a:spLocks noGrp="1" noRot="1" noChangeAspect="1" noMove="1" noResize="1" noEditPoints="1" noAdjustHandles="1" noChangeArrowheads="1" noChangeShapeType="1" noTextEdit="1"/>
+          </p:cNvSpPr>
+          <p:nvPr>
+            <p:extLst>
+              <p:ext uri="{386F3935-93C4-4BCD-93E2-E3B085C9AB24}">
+                <p16:designElem xmlns:p16="http://schemas.microsoft.com/office/powerpoint/2015/main" val="1"/>
+              </p:ext>
+            </p:extLst>
+          </p:nvPr>
+        </p:nvSpPr>
+        <p:spPr>
+          <a:xfrm rot="10800000" flipH="1">
+            <a:off x="2" y="0"/>
+            <a:ext cx="12191998" cy="1575955"/>
+          </a:xfrm>
+          <a:prstGeom prst="rect">
+            <a:avLst/>
+          </a:prstGeom>
+          <a:gradFill>
+            <a:gsLst>
+              <a:gs pos="0">
+                <a:srgbClr val="000000">
+                  <a:alpha val="96000"/>
+                </a:srgbClr>
+              </a:gs>
+              <a:gs pos="100000">
+                <a:schemeClr val="accent1">
+                  <a:lumMod val="75000"/>
+                </a:schemeClr>
+              </a:gs>
+            </a:gsLst>
+            <a:lin ang="6000000" scaled="0"/>
+          </a:gradFill>
+          <a:ln>
+            <a:noFill/>
+          </a:ln>
+        </p:spPr>
+        <p:style>
+          <a:lnRef idx="2">
+            <a:schemeClr val="accent1">
+              <a:shade val="50000"/>
+            </a:schemeClr>
+          </a:lnRef>
+          <a:fillRef idx="1">
+            <a:schemeClr val="accent1"/>
+          </a:fillRef>
+          <a:effectRef idx="0">
+            <a:schemeClr val="accent1"/>
+          </a:effectRef>
+          <a:fontRef idx="minor">
+            <a:schemeClr val="lt1"/>
+          </a:fontRef>
+        </p:style>
+        <p:txBody>
+          <a:bodyPr rtlCol="0" anchor="ctr"/>
+          <a:lstStyle/>
+          <a:p>
+            <a:pPr algn="ctr"/>
+            <a:endParaRPr lang="en-US"/>
+          </a:p>
+        </p:txBody>
+      </p:sp>
+      <p:sp>
+        <p:nvSpPr>
+          <p:cNvPr id="13" name="Rectangle 12">
+            <a:extLst>
+              <a:ext uri="{FF2B5EF4-FFF2-40B4-BE49-F238E27FC236}">
+                <a16:creationId xmlns:a16="http://schemas.microsoft.com/office/drawing/2014/main" id="{84A8DE83-DE75-4B41-9DB4-A7EC0B0DEC0B}"/>
+              </a:ext>
+              <a:ext uri="{C183D7F6-B498-43B3-948B-1728B52AA6E4}">
+                <adec:decorative xmlns:adec="http://schemas.microsoft.com/office/drawing/2017/decorative" val="1"/>
+              </a:ext>
+            </a:extLst>
+          </p:cNvPr>
+          <p:cNvSpPr>
+            <a:spLocks noGrp="1" noRot="1" noChangeAspect="1" noMove="1" noResize="1" noEditPoints="1" noAdjustHandles="1" noChangeArrowheads="1" noChangeShapeType="1" noTextEdit="1"/>
+          </p:cNvSpPr>
+          <p:nvPr>
+            <p:extLst>
+              <p:ext uri="{386F3935-93C4-4BCD-93E2-E3B085C9AB24}">
+                <p16:designElem xmlns:p16="http://schemas.microsoft.com/office/powerpoint/2015/main" val="1"/>
+              </p:ext>
+            </p:extLst>
+          </p:nvPr>
+        </p:nvSpPr>
+        <p:spPr>
+          <a:xfrm>
+            <a:off x="0" y="0"/>
+            <a:ext cx="8128856" cy="1575461"/>
+          </a:xfrm>
+          <a:prstGeom prst="rect">
+            <a:avLst/>
+          </a:prstGeom>
+          <a:gradFill>
+            <a:gsLst>
+              <a:gs pos="0">
+                <a:schemeClr val="accent1">
+                  <a:alpha val="41000"/>
+                </a:schemeClr>
+              </a:gs>
+              <a:gs pos="74000">
+                <a:schemeClr val="accent1">
+                  <a:lumMod val="60000"/>
+                  <a:lumOff val="40000"/>
+                  <a:alpha val="0"/>
+                </a:schemeClr>
+              </a:gs>
+            </a:gsLst>
+            <a:lin ang="8400000" scaled="0"/>
+          </a:gradFill>
+          <a:ln>
+            <a:noFill/>
+          </a:ln>
+        </p:spPr>
+        <p:style>
+          <a:lnRef idx="2">
+            <a:schemeClr val="accent1">
+              <a:shade val="50000"/>
+            </a:schemeClr>
+          </a:lnRef>
+          <a:fillRef idx="1">
+            <a:schemeClr val="accent1"/>
+          </a:fillRef>
+          <a:effectRef idx="0">
+            <a:schemeClr val="accent1"/>
+          </a:effectRef>
+          <a:fontRef idx="minor">
+            <a:schemeClr val="lt1"/>
+          </a:fontRef>
+        </p:style>
+        <p:txBody>
+          <a:bodyPr rtlCol="0" anchor="ctr"/>
+          <a:lstStyle/>
+          <a:p>
+            <a:pPr algn="ctr"/>
+            <a:endParaRPr lang="en-US"/>
+          </a:p>
+        </p:txBody>
+      </p:sp>
+      <p:sp>
+        <p:nvSpPr>
+          <p:cNvPr id="15" name="Rectangle 14">
+            <a:extLst>
+              <a:ext uri="{FF2B5EF4-FFF2-40B4-BE49-F238E27FC236}">
+                <a16:creationId xmlns:a16="http://schemas.microsoft.com/office/drawing/2014/main" id="{A7009A0A-BEF5-4EAC-AF15-E4F9F002E239}"/>
+              </a:ext>
+              <a:ext uri="{C183D7F6-B498-43B3-948B-1728B52AA6E4}">
+                <adec:decorative xmlns:adec="http://schemas.microsoft.com/office/drawing/2017/decorative" val="1"/>
+              </a:ext>
+            </a:extLst>
+          </p:cNvPr>
+          <p:cNvSpPr>
+            <a:spLocks noGrp="1" noRot="1" noChangeAspect="1" noMove="1" noResize="1" noEditPoints="1" noAdjustHandles="1" noChangeArrowheads="1" noChangeShapeType="1" noTextEdit="1"/>
+          </p:cNvSpPr>
+          <p:nvPr>
+            <p:extLst>
+              <p:ext uri="{386F3935-93C4-4BCD-93E2-E3B085C9AB24}">
+                <p16:designElem xmlns:p16="http://schemas.microsoft.com/office/powerpoint/2015/main" val="1"/>
+              </p:ext>
+            </p:extLst>
+          </p:nvPr>
+        </p:nvSpPr>
+        <p:spPr>
+          <a:xfrm flipH="1">
+            <a:off x="-3" y="-1"/>
+            <a:ext cx="12192002" cy="1574311"/>
+          </a:xfrm>
+          <a:prstGeom prst="rect">
+            <a:avLst/>
+          </a:prstGeom>
+          <a:gradFill>
+            <a:gsLst>
+              <a:gs pos="0">
+                <a:srgbClr val="000000">
+                  <a:alpha val="63000"/>
+                </a:srgbClr>
+              </a:gs>
+              <a:gs pos="78000">
+                <a:schemeClr val="accent1">
+                  <a:alpha val="15000"/>
+                </a:schemeClr>
+              </a:gs>
+            </a:gsLst>
+            <a:lin ang="15600000" scaled="0"/>
+          </a:gradFill>
+          <a:ln>
+            <a:noFill/>
+          </a:ln>
+        </p:spPr>
+        <p:style>
+          <a:lnRef idx="2">
+            <a:schemeClr val="accent1">
+              <a:shade val="50000"/>
+            </a:schemeClr>
+          </a:lnRef>
+          <a:fillRef idx="1">
+            <a:schemeClr val="accent1"/>
+          </a:fillRef>
+          <a:effectRef idx="0">
+            <a:schemeClr val="accent1"/>
+          </a:effectRef>
+          <a:fontRef idx="minor">
+            <a:schemeClr val="lt1"/>
+          </a:fontRef>
+        </p:style>
+        <p:txBody>
+          <a:bodyPr rtlCol="0" anchor="ctr"/>
+          <a:lstStyle/>
+          <a:p>
+            <a:pPr algn="ctr"/>
+            <a:endParaRPr lang="en-US"/>
+          </a:p>
+        </p:txBody>
+      </p:sp>
+      <p:sp>
+        <p:nvSpPr>
+          <p:cNvPr id="2" name="제목 1">
+            <a:extLst>
+              <a:ext uri="{FF2B5EF4-FFF2-40B4-BE49-F238E27FC236}">
+                <a16:creationId xmlns:a16="http://schemas.microsoft.com/office/drawing/2014/main" id="{C4A70738-2C6E-BA9F-480E-4A35C08313D7}"/>
+              </a:ext>
+            </a:extLst>
+          </p:cNvPr>
+          <p:cNvSpPr>
+            <a:spLocks noGrp="1"/>
+          </p:cNvSpPr>
+          <p:nvPr>
+            <p:ph type="title"/>
+          </p:nvPr>
+        </p:nvSpPr>
+        <p:spPr>
+          <a:xfrm>
+            <a:off x="699713" y="248038"/>
+            <a:ext cx="7063721" cy="1159200"/>
+          </a:xfrm>
+        </p:spPr>
+        <p:txBody>
+          <a:bodyPr vert="horz" lIns="91440" tIns="45720" rIns="91440" bIns="45720" rtlCol="0" anchor="ctr">
+            <a:normAutofit/>
+          </a:bodyPr>
+          <a:lstStyle/>
+          <a:p>
+            <a:pPr latinLnBrk="0"/>
+            <a:r>
+              <a:rPr lang="ko-KR" altLang="en-US" sz="4000" kern="1200">
+                <a:solidFill>
+                  <a:srgbClr val="FFFFFF"/>
+                </a:solidFill>
+                <a:latin typeface="+mj-lt"/>
+                <a:ea typeface="+mj-ea"/>
+                <a:cs typeface="+mj-cs"/>
+              </a:rPr>
+              <a:t>멤버 접근</a:t>
+            </a:r>
+          </a:p>
+        </p:txBody>
+      </p:sp>
+      <p:graphicFrame>
+        <p:nvGraphicFramePr>
+          <p:cNvPr id="4" name="표 3">
+            <a:extLst>
+              <a:ext uri="{FF2B5EF4-FFF2-40B4-BE49-F238E27FC236}">
+                <a16:creationId xmlns:a16="http://schemas.microsoft.com/office/drawing/2014/main" id="{5D9CCD8A-C58B-DCA4-5987-D5424A316257}"/>
+              </a:ext>
+            </a:extLst>
+          </p:cNvPr>
+          <p:cNvGraphicFramePr>
+            <a:graphicFrameLocks noGrp="1"/>
+          </p:cNvGraphicFramePr>
+          <p:nvPr>
+            <p:extLst>
+              <p:ext uri="{D42A27DB-BD31-4B8C-83A1-F6EECF244321}">
+                <p14:modId xmlns:p14="http://schemas.microsoft.com/office/powerpoint/2010/main" val="3787593421"/>
+              </p:ext>
+            </p:extLst>
+          </p:nvPr>
+        </p:nvGraphicFramePr>
+        <p:xfrm>
+          <a:off x="898053" y="1966293"/>
+          <a:ext cx="10395895" cy="4452160"/>
+        </p:xfrm>
+        <a:graphic>
+          <a:graphicData uri="http://schemas.openxmlformats.org/drawingml/2006/table">
+            <a:tbl>
+              <a:tblPr firstRow="1" bandRow="1">
+                <a:noFill/>
+                <a:tableStyleId>{5C22544A-7EE6-4342-B048-85BDC9FD1C3A}</a:tableStyleId>
+              </a:tblPr>
+              <a:tblGrid>
+                <a:gridCol w="3091567">
+                  <a:extLst>
+                    <a:ext uri="{9D8B030D-6E8A-4147-A177-3AD203B41FA5}">
+                      <a16:colId xmlns:a16="http://schemas.microsoft.com/office/drawing/2014/main" val="3765811720"/>
+                    </a:ext>
+                  </a:extLst>
+                </a:gridCol>
+                <a:gridCol w="3709498">
+                  <a:extLst>
+                    <a:ext uri="{9D8B030D-6E8A-4147-A177-3AD203B41FA5}">
+                      <a16:colId xmlns:a16="http://schemas.microsoft.com/office/drawing/2014/main" val="3950916864"/>
+                    </a:ext>
+                  </a:extLst>
+                </a:gridCol>
+                <a:gridCol w="3594830">
+                  <a:extLst>
+                    <a:ext uri="{9D8B030D-6E8A-4147-A177-3AD203B41FA5}">
+                      <a16:colId xmlns:a16="http://schemas.microsoft.com/office/drawing/2014/main" val="2572552780"/>
+                    </a:ext>
+                  </a:extLst>
+                </a:gridCol>
+              </a:tblGrid>
+              <a:tr h="1113040">
+                <a:tc>
+                  <a:txBody>
+                    <a:bodyPr/>
+                    <a:lstStyle/>
+                    <a:p>
+                      <a:pPr latinLnBrk="1"/>
+                      <a:r>
+                        <a:rPr lang="ko-KR" altLang="en-US" sz="3200" b="1">
+                          <a:solidFill>
+                            <a:srgbClr val="FFFFFF"/>
+                          </a:solidFill>
+                        </a:rPr>
+                        <a:t>항목</a:t>
+                      </a:r>
+                    </a:p>
+                  </a:txBody>
+                  <a:tcPr marL="458670" marR="275202" marT="275202" marB="275202">
+                    <a:lnL w="38100" cap="flat" cmpd="sng" algn="ctr">
+                      <a:noFill/>
+                      <a:prstDash val="solid"/>
+                    </a:lnL>
+                    <a:lnR w="38100" cap="flat" cmpd="sng" algn="ctr">
+                      <a:solidFill>
+                        <a:srgbClr val="FFFFFF"/>
+                      </a:solidFill>
+                      <a:prstDash val="solid"/>
+                    </a:lnR>
+                    <a:lnT w="38100" cap="flat" cmpd="sng" algn="ctr">
+                      <a:noFill/>
+                      <a:prstDash val="solid"/>
+                    </a:lnT>
+                    <a:lnB w="38100" cap="flat" cmpd="sng" algn="ctr">
+                      <a:solidFill>
+                        <a:srgbClr val="FFFFFF"/>
+                      </a:solidFill>
+                      <a:prstDash val="solid"/>
+                    </a:lnB>
+                    <a:solidFill>
+                      <a:srgbClr val="636B68">
+                        <a:alpha val="69804"/>
+                      </a:srgbClr>
+                    </a:solidFill>
+                  </a:tcPr>
+                </a:tc>
+                <a:tc>
+                  <a:txBody>
+                    <a:bodyPr/>
+                    <a:lstStyle/>
+                    <a:p>
+                      <a:pPr latinLnBrk="1"/>
+                      <a:r>
+                        <a:rPr lang="en-US" altLang="ko-KR" sz="3200" b="1">
+                          <a:solidFill>
+                            <a:srgbClr val="FFFFFF"/>
+                          </a:solidFill>
+                        </a:rPr>
+                        <a:t>C++</a:t>
+                      </a:r>
+                      <a:endParaRPr lang="ko-KR" altLang="en-US" sz="3200" b="1">
+                        <a:solidFill>
+                          <a:srgbClr val="FFFFFF"/>
+                        </a:solidFill>
+                      </a:endParaRPr>
+                    </a:p>
+                  </a:txBody>
+                  <a:tcPr marL="458670" marR="275202" marT="275202" marB="275202">
+                    <a:lnL w="38100" cap="flat" cmpd="sng" algn="ctr">
+                      <a:solidFill>
+                        <a:srgbClr val="FFFFFF"/>
+                      </a:solidFill>
+                      <a:prstDash val="solid"/>
+                    </a:lnL>
+                    <a:lnR w="38100" cap="flat" cmpd="sng" algn="ctr">
+                      <a:solidFill>
+                        <a:srgbClr val="FFFFFF"/>
+                      </a:solidFill>
+                      <a:prstDash val="solid"/>
+                    </a:lnR>
+                    <a:lnT w="38100" cap="flat" cmpd="sng" algn="ctr">
+                      <a:noFill/>
+                      <a:prstDash val="solid"/>
+                    </a:lnT>
+                    <a:lnB w="38100" cap="flat" cmpd="sng" algn="ctr">
+                      <a:solidFill>
+                        <a:srgbClr val="FFFFFF"/>
+                      </a:solidFill>
+                      <a:prstDash val="solid"/>
+                    </a:lnB>
+                    <a:solidFill>
+                      <a:srgbClr val="636B68">
+                        <a:alpha val="69804"/>
+                      </a:srgbClr>
+                    </a:solidFill>
+                  </a:tcPr>
+                </a:tc>
+                <a:tc>
+                  <a:txBody>
+                    <a:bodyPr/>
+                    <a:lstStyle/>
+                    <a:p>
+                      <a:pPr latinLnBrk="1"/>
+                      <a:r>
+                        <a:rPr lang="en-US" altLang="ko-KR" sz="3200" b="1">
+                          <a:solidFill>
+                            <a:srgbClr val="FFFFFF"/>
+                          </a:solidFill>
+                        </a:rPr>
+                        <a:t>C#</a:t>
+                      </a:r>
+                      <a:endParaRPr lang="ko-KR" altLang="en-US" sz="3200" b="1">
+                        <a:solidFill>
+                          <a:srgbClr val="FFFFFF"/>
+                        </a:solidFill>
+                      </a:endParaRPr>
+                    </a:p>
+                  </a:txBody>
+                  <a:tcPr marL="458670" marR="275202" marT="275202" marB="275202">
+                    <a:lnL w="38100" cap="flat" cmpd="sng" algn="ctr">
+                      <a:solidFill>
+                        <a:srgbClr val="FFFFFF"/>
+                      </a:solidFill>
+                      <a:prstDash val="solid"/>
+                    </a:lnL>
+                    <a:lnR w="38100" cap="flat" cmpd="sng" algn="ctr">
+                      <a:noFill/>
+                      <a:prstDash val="solid"/>
+                    </a:lnR>
+                    <a:lnT w="38100" cap="flat" cmpd="sng" algn="ctr">
+                      <a:noFill/>
+                      <a:prstDash val="solid"/>
+                    </a:lnT>
+                    <a:lnB w="38100" cap="flat" cmpd="sng" algn="ctr">
+                      <a:solidFill>
+                        <a:srgbClr val="FFFFFF"/>
+                      </a:solidFill>
+                      <a:prstDash val="solid"/>
+                    </a:lnB>
+                    <a:solidFill>
+                      <a:srgbClr val="636B68">
+                        <a:alpha val="69804"/>
+                      </a:srgbClr>
+                    </a:solidFill>
+                  </a:tcPr>
+                </a:tc>
+                <a:extLst>
+                  <a:ext uri="{0D108BD9-81ED-4DB2-BD59-A6C34878D82A}">
+                    <a16:rowId xmlns:a16="http://schemas.microsoft.com/office/drawing/2014/main" val="2546241973"/>
+                  </a:ext>
+                </a:extLst>
+              </a:tr>
+              <a:tr h="1113040">
+                <a:tc>
+                  <a:txBody>
+                    <a:bodyPr/>
+                    <a:lstStyle/>
+                    <a:p>
+                      <a:pPr latinLnBrk="1"/>
+                      <a:r>
+                        <a:rPr lang="en-US" altLang="ko-KR" sz="3200">
+                          <a:solidFill>
+                            <a:schemeClr val="tx1">
+                              <a:lumMod val="85000"/>
+                              <a:lumOff val="15000"/>
+                            </a:schemeClr>
+                          </a:solidFill>
+                        </a:rPr>
+                        <a:t>instance</a:t>
+                      </a:r>
+                      <a:endParaRPr lang="ko-KR" altLang="en-US" sz="3200">
+                        <a:solidFill>
+                          <a:schemeClr val="tx1">
+                            <a:lumMod val="85000"/>
+                            <a:lumOff val="15000"/>
+                          </a:schemeClr>
+                        </a:solidFill>
+                      </a:endParaRPr>
+                    </a:p>
+                  </a:txBody>
+                  <a:tcPr marL="458670" marR="275202" marT="275202" marB="275202">
+                    <a:lnL w="38100" cap="flat" cmpd="sng" algn="ctr">
+                      <a:noFill/>
+                      <a:prstDash val="solid"/>
+                    </a:lnL>
+                    <a:lnR w="38100" cap="flat" cmpd="sng" algn="ctr">
+                      <a:solidFill>
+                        <a:srgbClr val="FFFFFF"/>
+                      </a:solidFill>
+                      <a:prstDash val="solid"/>
+                    </a:lnR>
+                    <a:lnT w="38100" cap="flat" cmpd="sng" algn="ctr">
+                      <a:solidFill>
+                        <a:srgbClr val="FFFFFF"/>
+                      </a:solidFill>
+                      <a:prstDash val="solid"/>
+                    </a:lnT>
+                    <a:lnB w="38100" cap="flat" cmpd="sng" algn="ctr">
+                      <a:solidFill>
+                        <a:srgbClr val="FFFFFF"/>
+                      </a:solidFill>
+                      <a:prstDash val="solid"/>
+                    </a:lnB>
+                    <a:solidFill>
+                      <a:srgbClr val="878E8B">
+                        <a:alpha val="14902"/>
+                      </a:srgbClr>
+                    </a:solidFill>
+                  </a:tcPr>
+                </a:tc>
+                <a:tc>
+                  <a:txBody>
+                    <a:bodyPr/>
+                    <a:lstStyle/>
+                    <a:p>
+                      <a:pPr latinLnBrk="1"/>
+                      <a:r>
+                        <a:rPr lang="en-US" altLang="ko-KR" sz="3200" err="1">
+                          <a:solidFill>
+                            <a:schemeClr val="tx1">
+                              <a:lumMod val="85000"/>
+                              <a:lumOff val="15000"/>
+                            </a:schemeClr>
+                          </a:solidFill>
+                        </a:rPr>
+                        <a:t>inst.member</a:t>
+                      </a:r>
+                      <a:endParaRPr lang="ko-KR" altLang="en-US" sz="3200">
+                        <a:solidFill>
+                          <a:schemeClr val="tx1">
+                            <a:lumMod val="85000"/>
+                            <a:lumOff val="15000"/>
+                          </a:schemeClr>
+                        </a:solidFill>
+                      </a:endParaRPr>
+                    </a:p>
+                  </a:txBody>
+                  <a:tcPr marL="458670" marR="275202" marT="275202" marB="275202">
+                    <a:lnL w="38100" cap="flat" cmpd="sng" algn="ctr">
+                      <a:solidFill>
+                        <a:srgbClr val="FFFFFF"/>
+                      </a:solidFill>
+                      <a:prstDash val="solid"/>
+                    </a:lnL>
+                    <a:lnR w="38100" cap="flat" cmpd="sng" algn="ctr">
+                      <a:solidFill>
+                        <a:srgbClr val="FFFFFF"/>
+                      </a:solidFill>
+                      <a:prstDash val="solid"/>
+                    </a:lnR>
+                    <a:lnT w="38100" cap="flat" cmpd="sng" algn="ctr">
+                      <a:solidFill>
+                        <a:srgbClr val="FFFFFF"/>
+                      </a:solidFill>
+                      <a:prstDash val="solid"/>
+                    </a:lnT>
+                    <a:lnB w="38100" cap="flat" cmpd="sng" algn="ctr">
+                      <a:solidFill>
+                        <a:srgbClr val="FFFFFF"/>
+                      </a:solidFill>
+                      <a:prstDash val="solid"/>
+                    </a:lnB>
+                    <a:solidFill>
+                      <a:srgbClr val="878E8B">
+                        <a:alpha val="14902"/>
+                      </a:srgbClr>
+                    </a:solidFill>
+                  </a:tcPr>
+                </a:tc>
+                <a:tc>
+                  <a:txBody>
+                    <a:bodyPr/>
+                    <a:lstStyle/>
+                    <a:p>
+                      <a:pPr marL="0" marR="0" lvl="0" indent="0" algn="l" defTabSz="914400" rtl="0" eaLnBrk="1" fontAlgn="auto" latinLnBrk="1" hangingPunct="1">
+                        <a:lnSpc>
+                          <a:spcPct val="100000"/>
+                        </a:lnSpc>
+                        <a:spcBef>
+                          <a:spcPts val="0"/>
+                        </a:spcBef>
+                        <a:spcAft>
+                          <a:spcPts val="0"/>
+                        </a:spcAft>
+                        <a:buClrTx/>
+                        <a:buSzTx/>
+                        <a:buFontTx/>
+                        <a:buNone/>
+                        <a:tabLst/>
+                        <a:defRPr/>
+                      </a:pPr>
+                      <a:r>
+                        <a:rPr lang="en-US" altLang="ko-KR" sz="3200" err="1">
+                          <a:solidFill>
+                            <a:schemeClr val="tx1">
+                              <a:lumMod val="85000"/>
+                              <a:lumOff val="15000"/>
+                            </a:schemeClr>
+                          </a:solidFill>
+                        </a:rPr>
+                        <a:t>inst.member</a:t>
+                      </a:r>
+                      <a:endParaRPr lang="ko-KR" altLang="en-US" sz="3200">
+                        <a:solidFill>
+                          <a:schemeClr val="tx1">
+                            <a:lumMod val="85000"/>
+                            <a:lumOff val="15000"/>
+                          </a:schemeClr>
+                        </a:solidFill>
+                      </a:endParaRPr>
+                    </a:p>
+                  </a:txBody>
+                  <a:tcPr marL="458670" marR="275202" marT="275202" marB="275202">
+                    <a:lnL w="38100" cap="flat" cmpd="sng" algn="ctr">
+                      <a:solidFill>
+                        <a:srgbClr val="FFFFFF"/>
+                      </a:solidFill>
+                      <a:prstDash val="solid"/>
+                    </a:lnL>
+                    <a:lnR w="38100" cap="flat" cmpd="sng" algn="ctr">
+                      <a:noFill/>
+                      <a:prstDash val="solid"/>
+                    </a:lnR>
+                    <a:lnT w="38100" cap="flat" cmpd="sng" algn="ctr">
+                      <a:solidFill>
+                        <a:srgbClr val="FFFFFF"/>
+                      </a:solidFill>
+                      <a:prstDash val="solid"/>
+                    </a:lnT>
+                    <a:lnB w="38100" cap="flat" cmpd="sng" algn="ctr">
+                      <a:solidFill>
+                        <a:srgbClr val="FFFFFF"/>
+                      </a:solidFill>
+                      <a:prstDash val="solid"/>
+                    </a:lnB>
+                    <a:solidFill>
+                      <a:srgbClr val="878E8B">
+                        <a:alpha val="14902"/>
+                      </a:srgbClr>
+                    </a:solidFill>
+                  </a:tcPr>
+                </a:tc>
+                <a:extLst>
+                  <a:ext uri="{0D108BD9-81ED-4DB2-BD59-A6C34878D82A}">
+                    <a16:rowId xmlns:a16="http://schemas.microsoft.com/office/drawing/2014/main" val="2341514354"/>
+                  </a:ext>
+                </a:extLst>
+              </a:tr>
+              <a:tr h="1113040">
+                <a:tc>
+                  <a:txBody>
+                    <a:bodyPr/>
+                    <a:lstStyle/>
+                    <a:p>
+                      <a:pPr latinLnBrk="1"/>
+                      <a:r>
+                        <a:rPr lang="en-US" altLang="ko-KR" sz="3200">
+                          <a:solidFill>
+                            <a:schemeClr val="tx1">
+                              <a:lumMod val="85000"/>
+                              <a:lumOff val="15000"/>
+                            </a:schemeClr>
+                          </a:solidFill>
+                        </a:rPr>
+                        <a:t>class</a:t>
+                      </a:r>
+                      <a:endParaRPr lang="ko-KR" altLang="en-US" sz="3200">
+                        <a:solidFill>
+                          <a:schemeClr val="tx1">
+                            <a:lumMod val="85000"/>
+                            <a:lumOff val="15000"/>
+                          </a:schemeClr>
+                        </a:solidFill>
+                      </a:endParaRPr>
+                    </a:p>
+                  </a:txBody>
+                  <a:tcPr marL="458670" marR="275202" marT="275202" marB="275202">
+                    <a:lnL w="12700" cmpd="sng">
+                      <a:noFill/>
+                      <a:prstDash val="solid"/>
+                    </a:lnL>
+                    <a:lnR w="38100" cap="flat" cmpd="sng" algn="ctr">
+                      <a:solidFill>
+                        <a:srgbClr val="FFFFFF"/>
+                      </a:solidFill>
+                      <a:prstDash val="solid"/>
+                    </a:lnR>
+                    <a:lnT w="38100" cap="flat" cmpd="sng" algn="ctr">
+                      <a:solidFill>
+                        <a:srgbClr val="FFFFFF"/>
+                      </a:solidFill>
+                      <a:prstDash val="solid"/>
+                    </a:lnT>
+                    <a:lnB w="38100" cap="flat" cmpd="sng" algn="ctr">
+                      <a:solidFill>
+                        <a:srgbClr val="FFFFFF"/>
+                      </a:solidFill>
+                      <a:prstDash val="solid"/>
+                    </a:lnB>
+                    <a:solidFill>
+                      <a:srgbClr val="878E8B">
+                        <a:alpha val="30196"/>
+                      </a:srgbClr>
+                    </a:solidFill>
+                  </a:tcPr>
+                </a:tc>
+                <a:tc>
+                  <a:txBody>
+                    <a:bodyPr/>
+                    <a:lstStyle/>
+                    <a:p>
+                      <a:pPr latinLnBrk="1"/>
+                      <a:r>
+                        <a:rPr lang="en-US" altLang="ko-KR" sz="3200" err="1">
+                          <a:solidFill>
+                            <a:schemeClr val="tx1">
+                              <a:lumMod val="85000"/>
+                              <a:lumOff val="15000"/>
+                            </a:schemeClr>
+                          </a:solidFill>
+                        </a:rPr>
+                        <a:t>cls</a:t>
+                      </a:r>
+                      <a:r>
+                        <a:rPr lang="en-US" altLang="ko-KR" sz="3200">
+                          <a:solidFill>
+                            <a:schemeClr val="tx1">
+                              <a:lumMod val="85000"/>
+                              <a:lumOff val="15000"/>
+                            </a:schemeClr>
+                          </a:solidFill>
+                        </a:rPr>
+                        <a:t>::member</a:t>
+                      </a:r>
+                      <a:endParaRPr lang="ko-KR" altLang="en-US" sz="3200">
+                        <a:solidFill>
+                          <a:schemeClr val="tx1">
+                            <a:lumMod val="85000"/>
+                            <a:lumOff val="15000"/>
+                          </a:schemeClr>
+                        </a:solidFill>
+                      </a:endParaRPr>
+                    </a:p>
+                  </a:txBody>
+                  <a:tcPr marL="458670" marR="275202" marT="275202" marB="275202">
+                    <a:lnL w="38100" cap="flat" cmpd="sng" algn="ctr">
+                      <a:solidFill>
+                        <a:srgbClr val="FFFFFF"/>
+                      </a:solidFill>
+                      <a:prstDash val="solid"/>
+                    </a:lnL>
+                    <a:lnR w="38100" cap="flat" cmpd="sng" algn="ctr">
+                      <a:solidFill>
+                        <a:srgbClr val="FFFFFF"/>
+                      </a:solidFill>
+                      <a:prstDash val="solid"/>
+                    </a:lnR>
+                    <a:lnT w="38100" cap="flat" cmpd="sng" algn="ctr">
+                      <a:solidFill>
+                        <a:srgbClr val="FFFFFF"/>
+                      </a:solidFill>
+                      <a:prstDash val="solid"/>
+                    </a:lnT>
+                    <a:lnB w="38100" cap="flat" cmpd="sng" algn="ctr">
+                      <a:solidFill>
+                        <a:srgbClr val="FFFFFF"/>
+                      </a:solidFill>
+                      <a:prstDash val="solid"/>
+                    </a:lnB>
+                    <a:solidFill>
+                      <a:srgbClr val="878E8B">
+                        <a:alpha val="30196"/>
+                      </a:srgbClr>
+                    </a:solidFill>
+                  </a:tcPr>
+                </a:tc>
+                <a:tc>
+                  <a:txBody>
+                    <a:bodyPr/>
+                    <a:lstStyle/>
+                    <a:p>
+                      <a:pPr latinLnBrk="1"/>
+                      <a:r>
+                        <a:rPr lang="en-US" altLang="ko-KR" sz="3200" err="1">
+                          <a:solidFill>
+                            <a:schemeClr val="tx1">
+                              <a:lumMod val="85000"/>
+                              <a:lumOff val="15000"/>
+                            </a:schemeClr>
+                          </a:solidFill>
+                        </a:rPr>
+                        <a:t>cls.member</a:t>
+                      </a:r>
+                      <a:endParaRPr lang="ko-KR" altLang="en-US" sz="3200">
+                        <a:solidFill>
+                          <a:schemeClr val="tx1">
+                            <a:lumMod val="85000"/>
+                            <a:lumOff val="15000"/>
+                          </a:schemeClr>
+                        </a:solidFill>
+                      </a:endParaRPr>
+                    </a:p>
+                  </a:txBody>
+                  <a:tcPr marL="458670" marR="275202" marT="275202" marB="275202">
+                    <a:lnL w="38100" cap="flat" cmpd="sng" algn="ctr">
+                      <a:solidFill>
+                        <a:srgbClr val="FFFFFF"/>
+                      </a:solidFill>
+                      <a:prstDash val="solid"/>
+                    </a:lnL>
+                    <a:lnR w="12700" cmpd="sng">
+                      <a:noFill/>
+                      <a:prstDash val="solid"/>
+                    </a:lnR>
+                    <a:lnT w="38100" cap="flat" cmpd="sng" algn="ctr">
+                      <a:solidFill>
+                        <a:srgbClr val="FFFFFF"/>
+                      </a:solidFill>
+                      <a:prstDash val="solid"/>
+                    </a:lnT>
+                    <a:lnB w="38100" cap="flat" cmpd="sng" algn="ctr">
+                      <a:solidFill>
+                        <a:srgbClr val="FFFFFF"/>
+                      </a:solidFill>
+                      <a:prstDash val="solid"/>
+                    </a:lnB>
+                    <a:solidFill>
+                      <a:srgbClr val="878E8B">
+                        <a:alpha val="30196"/>
+                      </a:srgbClr>
+                    </a:solidFill>
+                  </a:tcPr>
+                </a:tc>
+                <a:extLst>
+                  <a:ext uri="{0D108BD9-81ED-4DB2-BD59-A6C34878D82A}">
+                    <a16:rowId xmlns:a16="http://schemas.microsoft.com/office/drawing/2014/main" val="3577942020"/>
+                  </a:ext>
+                </a:extLst>
+              </a:tr>
+              <a:tr h="1113040">
+                <a:tc>
+                  <a:txBody>
+                    <a:bodyPr/>
+                    <a:lstStyle/>
+                    <a:p>
+                      <a:pPr latinLnBrk="1"/>
+                      <a:r>
+                        <a:rPr lang="en-US" altLang="ko-KR" sz="3200">
+                          <a:solidFill>
+                            <a:schemeClr val="tx1">
+                              <a:lumMod val="85000"/>
+                              <a:lumOff val="15000"/>
+                            </a:schemeClr>
+                          </a:solidFill>
+                        </a:rPr>
+                        <a:t>namespace</a:t>
+                      </a:r>
+                      <a:endParaRPr lang="ko-KR" altLang="en-US" sz="3200">
+                        <a:solidFill>
+                          <a:schemeClr val="tx1">
+                            <a:lumMod val="85000"/>
+                            <a:lumOff val="15000"/>
+                          </a:schemeClr>
+                        </a:solidFill>
+                      </a:endParaRPr>
+                    </a:p>
+                  </a:txBody>
+                  <a:tcPr marL="458670" marR="275202" marT="275202" marB="275202">
+                    <a:lnL w="38100" cap="flat" cmpd="sng" algn="ctr">
+                      <a:noFill/>
+                      <a:prstDash val="solid"/>
+                    </a:lnL>
+                    <a:lnR w="38100" cap="flat" cmpd="sng" algn="ctr">
+                      <a:solidFill>
+                        <a:srgbClr val="FFFFFF"/>
+                      </a:solidFill>
+                      <a:prstDash val="solid"/>
+                    </a:lnR>
+                    <a:lnT w="38100" cap="flat" cmpd="sng" algn="ctr">
+                      <a:solidFill>
+                        <a:srgbClr val="FFFFFF"/>
+                      </a:solidFill>
+                      <a:prstDash val="solid"/>
+                    </a:lnT>
+                    <a:lnB w="12700" cmpd="sng">
+                      <a:noFill/>
+                      <a:prstDash val="solid"/>
+                    </a:lnB>
+                    <a:solidFill>
+                      <a:srgbClr val="878E8B">
+                        <a:alpha val="14902"/>
+                      </a:srgbClr>
+                    </a:solidFill>
+                  </a:tcPr>
+                </a:tc>
+                <a:tc>
+                  <a:txBody>
+                    <a:bodyPr/>
+                    <a:lstStyle/>
+                    <a:p>
+                      <a:pPr latinLnBrk="1"/>
+                      <a:r>
+                        <a:rPr lang="en-US" altLang="ko-KR" sz="3200" err="1">
+                          <a:solidFill>
+                            <a:schemeClr val="tx1">
+                              <a:lumMod val="85000"/>
+                              <a:lumOff val="15000"/>
+                            </a:schemeClr>
+                          </a:solidFill>
+                        </a:rPr>
+                        <a:t>nmsp</a:t>
+                      </a:r>
+                      <a:r>
+                        <a:rPr lang="en-US" altLang="ko-KR" sz="3200">
+                          <a:solidFill>
+                            <a:schemeClr val="tx1">
+                              <a:lumMod val="85000"/>
+                              <a:lumOff val="15000"/>
+                            </a:schemeClr>
+                          </a:solidFill>
+                        </a:rPr>
+                        <a:t>::member</a:t>
+                      </a:r>
+                      <a:endParaRPr lang="ko-KR" altLang="en-US" sz="3200">
+                        <a:solidFill>
+                          <a:schemeClr val="tx1">
+                            <a:lumMod val="85000"/>
+                            <a:lumOff val="15000"/>
+                          </a:schemeClr>
+                        </a:solidFill>
+                      </a:endParaRPr>
+                    </a:p>
+                  </a:txBody>
+                  <a:tcPr marL="458670" marR="275202" marT="275202" marB="275202">
+                    <a:lnL w="38100" cap="flat" cmpd="sng" algn="ctr">
+                      <a:solidFill>
+                        <a:srgbClr val="FFFFFF"/>
+                      </a:solidFill>
+                      <a:prstDash val="solid"/>
+                    </a:lnL>
+                    <a:lnR w="38100" cap="flat" cmpd="sng" algn="ctr">
+                      <a:solidFill>
+                        <a:srgbClr val="FFFFFF"/>
+                      </a:solidFill>
+                      <a:prstDash val="solid"/>
+                    </a:lnR>
+                    <a:lnT w="38100" cap="flat" cmpd="sng" algn="ctr">
+                      <a:solidFill>
+                        <a:srgbClr val="FFFFFF"/>
+                      </a:solidFill>
+                      <a:prstDash val="solid"/>
+                    </a:lnT>
+                    <a:lnB w="12700" cmpd="sng">
+                      <a:noFill/>
+                      <a:prstDash val="solid"/>
+                    </a:lnB>
+                    <a:solidFill>
+                      <a:srgbClr val="878E8B">
+                        <a:alpha val="14902"/>
+                      </a:srgbClr>
+                    </a:solidFill>
+                  </a:tcPr>
+                </a:tc>
+                <a:tc>
+                  <a:txBody>
+                    <a:bodyPr/>
+                    <a:lstStyle/>
+                    <a:p>
+                      <a:pPr latinLnBrk="1"/>
+                      <a:r>
+                        <a:rPr lang="en-US" altLang="ko-KR" sz="3200" err="1">
+                          <a:solidFill>
+                            <a:schemeClr val="tx1">
+                              <a:lumMod val="85000"/>
+                              <a:lumOff val="15000"/>
+                            </a:schemeClr>
+                          </a:solidFill>
+                        </a:rPr>
+                        <a:t>nmsp.member</a:t>
+                      </a:r>
+                      <a:endParaRPr lang="ko-KR" altLang="en-US" sz="3200">
+                        <a:solidFill>
+                          <a:schemeClr val="tx1">
+                            <a:lumMod val="85000"/>
+                            <a:lumOff val="15000"/>
+                          </a:schemeClr>
+                        </a:solidFill>
+                      </a:endParaRPr>
+                    </a:p>
+                  </a:txBody>
+                  <a:tcPr marL="458670" marR="275202" marT="275202" marB="275202">
+                    <a:lnL w="38100" cap="flat" cmpd="sng" algn="ctr">
+                      <a:solidFill>
+                        <a:srgbClr val="FFFFFF"/>
+                      </a:solidFill>
+                      <a:prstDash val="solid"/>
+                    </a:lnL>
+                    <a:lnR w="38100" cap="flat" cmpd="sng" algn="ctr">
+                      <a:noFill/>
+                      <a:prstDash val="solid"/>
+                    </a:lnR>
+                    <a:lnT w="38100" cap="flat" cmpd="sng" algn="ctr">
+                      <a:solidFill>
+                        <a:srgbClr val="FFFFFF"/>
+                      </a:solidFill>
+                      <a:prstDash val="solid"/>
+                    </a:lnT>
+                    <a:lnB w="12700" cmpd="sng">
+                      <a:noFill/>
+                      <a:prstDash val="solid"/>
+                    </a:lnB>
+                    <a:solidFill>
+                      <a:srgbClr val="878E8B">
+                        <a:alpha val="14902"/>
+                      </a:srgbClr>
+                    </a:solidFill>
+                  </a:tcPr>
+                </a:tc>
+                <a:extLst>
+                  <a:ext uri="{0D108BD9-81ED-4DB2-BD59-A6C34878D82A}">
+                    <a16:rowId xmlns:a16="http://schemas.microsoft.com/office/drawing/2014/main" val="2363653880"/>
+                  </a:ext>
+                </a:extLst>
+              </a:tr>
+            </a:tbl>
+          </a:graphicData>
+        </a:graphic>
+      </p:graphicFrame>
+    </p:spTree>
+    <p:extLst>
+      <p:ext uri="{BB962C8B-B14F-4D97-AF65-F5344CB8AC3E}">
+        <p14:creationId xmlns:p14="http://schemas.microsoft.com/office/powerpoint/2010/main" val="3851917625"/>
+      </p:ext>
+    </p:extLst>
+  </p:cSld>
+  <p:clrMapOvr>
+    <a:masterClrMapping/>
+  </p:clrMapOvr>
+</p:sld>
+</file>
+
+<file path=ppt/slides/slide13.xml><?xml version="1.0" encoding="utf-8"?>
+<p:sld xmlns:a="http://schemas.openxmlformats.org/drawingml/2006/main" xmlns:r="http://schemas.openxmlformats.org/officeDocument/2006/relationships" xmlns:p="http://schemas.openxmlformats.org/presentationml/2006/main">
+  <p:cSld>
+    <p:bg>
+      <p:bgPr>
+        <a:solidFill>
+          <a:schemeClr val="bg1"/>
+        </a:solidFill>
+        <a:effectLst/>
+      </p:bgPr>
+    </p:bg>
+    <p:spTree>
+      <p:nvGrpSpPr>
+        <p:cNvPr id="1" name=""/>
+        <p:cNvGrpSpPr/>
+        <p:nvPr/>
+      </p:nvGrpSpPr>
+      <p:grpSpPr>
+        <a:xfrm>
+          <a:off x="0" y="0"/>
+          <a:ext cx="0" cy="0"/>
+          <a:chOff x="0" y="0"/>
+          <a:chExt cx="0" cy="0"/>
+        </a:xfrm>
+      </p:grpSpPr>
       <p:sp>
         <p:nvSpPr>
           <p:cNvPr id="9" name="Rectangle 8">
@@ -26195,14 +27361,14 @@
           <p:nvPr>
             <p:extLst>
               <p:ext uri="{D42A27DB-BD31-4B8C-83A1-F6EECF244321}">
-                <p14:modId xmlns:p14="http://schemas.microsoft.com/office/powerpoint/2010/main" val="1868849682"/>
+                <p14:modId xmlns:p14="http://schemas.microsoft.com/office/powerpoint/2010/main" val="3609031943"/>
               </p:ext>
             </p:extLst>
           </p:nvPr>
         </p:nvGraphicFramePr>
         <p:xfrm>
-          <a:off x="643467" y="2034791"/>
-          <a:ext cx="10905067" cy="3675073"/>
+          <a:off x="249383" y="2034791"/>
+          <a:ext cx="11605009" cy="4516013"/>
         </p:xfrm>
         <a:graphic>
           <a:graphicData uri="http://schemas.openxmlformats.org/drawingml/2006/table">
@@ -26211,21 +27377,21 @@
                 <a:tableStyleId>{5C22544A-7EE6-4342-B048-85BDC9FD1C3A}</a:tableStyleId>
               </a:tblPr>
               <a:tblGrid>
-                <a:gridCol w="1947526">
+                <a:gridCol w="2072528">
                   <a:extLst>
                     <a:ext uri="{9D8B030D-6E8A-4147-A177-3AD203B41FA5}">
                       <a16:colId xmlns:a16="http://schemas.microsoft.com/office/drawing/2014/main" val="3765811720"/>
                     </a:ext>
                   </a:extLst>
                 </a:gridCol>
-                <a:gridCol w="3734189">
+                <a:gridCol w="3626307">
                   <a:extLst>
                     <a:ext uri="{9D8B030D-6E8A-4147-A177-3AD203B41FA5}">
                       <a16:colId xmlns:a16="http://schemas.microsoft.com/office/drawing/2014/main" val="3950916864"/>
                     </a:ext>
                   </a:extLst>
                 </a:gridCol>
-                <a:gridCol w="5223352">
+                <a:gridCol w="5906174">
                   <a:extLst>
                     <a:ext uri="{9D8B030D-6E8A-4147-A177-3AD203B41FA5}">
                       <a16:colId xmlns:a16="http://schemas.microsoft.com/office/drawing/2014/main" val="2572552780"/>
@@ -26319,32 +27485,93 @@
                     <a:bodyPr/>
                     <a:lstStyle/>
                     <a:p>
-                      <a:pPr latinLnBrk="1"/>
+                      <a:pPr marL="457200" indent="-457200" latinLnBrk="1">
+                        <a:buFont typeface="Arial" panose="020B0604020202020204" pitchFamily="34" charset="0"/>
+                        <a:buChar char="•"/>
+                      </a:pPr>
                       <a:r>
-                        <a:rPr lang="ko-KR" altLang="en-US" sz="2900"/>
+                        <a:rPr lang="ko-KR" altLang="en-US" sz="2900" dirty="0"/>
                         <a:t>상수이면서 </a:t>
                       </a:r>
                       <a:r>
-                        <a:rPr lang="en-US" altLang="ko-KR" sz="2900"/>
+                        <a:rPr lang="en-US" altLang="ko-KR" sz="2900" dirty="0"/>
                         <a:t>static </a:t>
                       </a:r>
                       <a:r>
-                        <a:rPr lang="ko-KR" altLang="en-US" sz="2900"/>
+                        <a:rPr lang="ko-KR" altLang="en-US" sz="2900" dirty="0"/>
                         <a:t>성질까지 포함</a:t>
                       </a:r>
                       <a:r>
-                        <a:rPr lang="en-US" altLang="ko-KR" sz="2900"/>
+                        <a:rPr lang="en-US" altLang="ko-KR" sz="2900" dirty="0"/>
                         <a:t>; static</a:t>
                       </a:r>
                       <a:r>
-                        <a:rPr lang="ko-KR" altLang="en-US" sz="2900"/>
+                        <a:rPr lang="ko-KR" altLang="en-US" sz="2900" dirty="0"/>
                         <a:t>과 함께 </a:t>
                       </a:r>
                       <a:r>
-                        <a:rPr lang="en-US" altLang="ko-KR" sz="2900"/>
+                        <a:rPr lang="en-US" altLang="ko-KR" sz="2900" dirty="0"/>
                         <a:t>X</a:t>
                       </a:r>
-                      <a:endParaRPr lang="ko-KR" altLang="en-US" sz="2900"/>
+                    </a:p>
+                    <a:p>
+                      <a:pPr marL="457200" indent="-457200" latinLnBrk="1">
+                        <a:buFont typeface="Arial" panose="020B0604020202020204" pitchFamily="34" charset="0"/>
+                        <a:buChar char="•"/>
+                      </a:pPr>
+                      <a:r>
+                        <a:rPr lang="ko-KR" altLang="en-US" sz="2900" dirty="0"/>
+                        <a:t>선언에서 초기화</a:t>
+                      </a:r>
+                      <a:endParaRPr lang="en-US" altLang="ko-KR" sz="2900" dirty="0"/>
+                    </a:p>
+                    <a:p>
+                      <a:pPr marL="457200" indent="-457200" latinLnBrk="1">
+                        <a:buFont typeface="Arial" panose="020B0604020202020204" pitchFamily="34" charset="0"/>
+                        <a:buChar char="•"/>
+                      </a:pPr>
+                      <a:r>
+                        <a:rPr lang="en-US" altLang="ko-KR" sz="2900" dirty="0"/>
+                        <a:t>const (</a:t>
+                      </a:r>
+                      <a:r>
+                        <a:rPr lang="en-US" altLang="ko-KR" sz="2900" kern="1200" dirty="0">
+                          <a:solidFill>
+                            <a:schemeClr val="dk1"/>
+                          </a:solidFill>
+                          <a:latin typeface="+mn-lt"/>
+                          <a:ea typeface="+mn-ea"/>
+                          <a:cs typeface="+mn-cs"/>
+                        </a:rPr>
+                        <a:t>C#) </a:t>
+                      </a:r>
+                      <a:r>
+                        <a:rPr lang="ko-KR" altLang="en-US" sz="2900" kern="1200" dirty="0">
+                          <a:solidFill>
+                            <a:schemeClr val="dk1"/>
+                          </a:solidFill>
+                          <a:latin typeface="+mn-lt"/>
+                          <a:ea typeface="+mn-ea"/>
+                          <a:cs typeface="+mn-cs"/>
+                        </a:rPr>
+                        <a:t>≈</a:t>
+                      </a:r>
+                      <a:r>
+                        <a:rPr lang="en-US" altLang="ko-KR" sz="2900" kern="1200" dirty="0">
+                          <a:solidFill>
+                            <a:schemeClr val="dk1"/>
+                          </a:solidFill>
+                          <a:latin typeface="+mn-lt"/>
+                          <a:ea typeface="+mn-ea"/>
+                          <a:cs typeface="+mn-cs"/>
+                        </a:rPr>
+                        <a:t> static </a:t>
+                      </a:r>
+                      <a:r>
+                        <a:rPr lang="en-US" altLang="ko-KR" sz="2900" dirty="0"/>
+                        <a:t>const (C++)</a:t>
+                      </a:r>
+                      <a:endParaRPr lang="ko-KR" altLang="en-US" sz="2900" dirty="0"/>
                     </a:p>
                   </a:txBody>
                   <a:tcPr marL="149063" marR="149063" marT="74531" marB="74531"/>
@@ -26409,7 +27636,19 @@
                       </a:r>
                       <a:r>
                         <a:rPr lang="ko-KR" altLang="en-US" sz="2900" dirty="0"/>
-                        <a:t>와 비슷하지만 생성자에서 초기화 필요</a:t>
+                        <a:t>와 </a:t>
+                      </a:r>
+                      <a:r>
+                        <a:rPr lang="ko-KR" altLang="en-US" sz="2900" dirty="0" err="1"/>
+                        <a:t>비슷</a:t>
+                      </a:r>
+                      <a:r>
+                        <a:rPr lang="en-US" altLang="ko-KR" sz="2900" dirty="0"/>
+                        <a:t>;</a:t>
+                      </a:r>
+                      <a:r>
+                        <a:rPr lang="ko-KR" altLang="en-US" sz="2900" dirty="0"/>
+                        <a:t> 선언이나 생성자에서 초기화 가능</a:t>
                       </a:r>
                       <a:endParaRPr lang="en-US" altLang="ko-KR" sz="2900" dirty="0"/>
                     </a:p>
@@ -26469,7 +27708,7 @@
 </p:sld>
 </file>
 
-<file path=ppt/slides/slide13.xml><?xml version="1.0" encoding="utf-8"?>
+<file path=ppt/slides/slide14.xml><?xml version="1.0" encoding="utf-8"?>
 <p:sld xmlns:a="http://schemas.openxmlformats.org/drawingml/2006/main" xmlns:r="http://schemas.openxmlformats.org/officeDocument/2006/relationships" xmlns:p="http://schemas.openxmlformats.org/presentationml/2006/main">
   <p:cSld>
     <p:bg>
@@ -27272,7 +28511,7 @@
 </p:sld>
 </file>
 
-<file path=ppt/slides/slide14.xml><?xml version="1.0" encoding="utf-8"?>
+<file path=ppt/slides/slide15.xml><?xml version="1.0" encoding="utf-8"?>
 <p:sld xmlns:a="http://schemas.openxmlformats.org/drawingml/2006/main" xmlns:r="http://schemas.openxmlformats.org/officeDocument/2006/relationships" xmlns:p="http://schemas.openxmlformats.org/presentationml/2006/main">
   <p:cSld>
     <p:bg>
@@ -27877,7 +29116,7 @@
 </p:sld>
 </file>
 
-<file path=ppt/slides/slide15.xml><?xml version="1.0" encoding="utf-8"?>
+<file path=ppt/slides/slide16.xml><?xml version="1.0" encoding="utf-8"?>
 <p:sld xmlns:a="http://schemas.openxmlformats.org/drawingml/2006/main" xmlns:r="http://schemas.openxmlformats.org/officeDocument/2006/relationships" xmlns:p="http://schemas.openxmlformats.org/presentationml/2006/main">
   <p:cSld>
     <p:bg>

--- a/C# 문법.pptx
+++ b/C# 문법.pptx
@@ -16,11 +16,13 @@
     <p:sldId id="265" r:id="rId10"/>
     <p:sldId id="266" r:id="rId11"/>
     <p:sldId id="267" r:id="rId12"/>
-    <p:sldId id="272" r:id="rId13"/>
-    <p:sldId id="268" r:id="rId14"/>
-    <p:sldId id="269" r:id="rId15"/>
-    <p:sldId id="271" r:id="rId16"/>
-    <p:sldId id="270" r:id="rId17"/>
+    <p:sldId id="273" r:id="rId13"/>
+    <p:sldId id="272" r:id="rId14"/>
+    <p:sldId id="268" r:id="rId15"/>
+    <p:sldId id="269" r:id="rId16"/>
+    <p:sldId id="271" r:id="rId17"/>
+    <p:sldId id="270" r:id="rId18"/>
+    <p:sldId id="274" r:id="rId19"/>
   </p:sldIdLst>
   <p:sldSz cx="12192000" cy="6858000"/>
   <p:notesSz cx="6858000" cy="9144000"/>
@@ -20609,7 +20611,7 @@
           <a:p>
             <a:fld id="{80606649-8C48-4DEB-9F5F-3AE3C52C94A0}" type="datetimeFigureOut">
               <a:rPr lang="ko-KR" altLang="en-US" smtClean="0"/>
-              <a:t>2025-11-04</a:t>
+              <a:t>2025-11-18</a:t>
             </a:fld>
             <a:endParaRPr lang="ko-KR" altLang="en-US"/>
           </a:p>
@@ -20807,7 +20809,7 @@
           <a:p>
             <a:fld id="{80606649-8C48-4DEB-9F5F-3AE3C52C94A0}" type="datetimeFigureOut">
               <a:rPr lang="ko-KR" altLang="en-US" smtClean="0"/>
-              <a:t>2025-11-04</a:t>
+              <a:t>2025-11-18</a:t>
             </a:fld>
             <a:endParaRPr lang="ko-KR" altLang="en-US"/>
           </a:p>
@@ -21015,7 +21017,7 @@
           <a:p>
             <a:fld id="{80606649-8C48-4DEB-9F5F-3AE3C52C94A0}" type="datetimeFigureOut">
               <a:rPr lang="ko-KR" altLang="en-US" smtClean="0"/>
-              <a:t>2025-11-04</a:t>
+              <a:t>2025-11-18</a:t>
             </a:fld>
             <a:endParaRPr lang="ko-KR" altLang="en-US"/>
           </a:p>
@@ -21213,7 +21215,7 @@
           <a:p>
             <a:fld id="{80606649-8C48-4DEB-9F5F-3AE3C52C94A0}" type="datetimeFigureOut">
               <a:rPr lang="ko-KR" altLang="en-US" smtClean="0"/>
-              <a:t>2025-11-04</a:t>
+              <a:t>2025-11-18</a:t>
             </a:fld>
             <a:endParaRPr lang="ko-KR" altLang="en-US"/>
           </a:p>
@@ -21488,7 +21490,7 @@
           <a:p>
             <a:fld id="{80606649-8C48-4DEB-9F5F-3AE3C52C94A0}" type="datetimeFigureOut">
               <a:rPr lang="ko-KR" altLang="en-US" smtClean="0"/>
-              <a:t>2025-11-04</a:t>
+              <a:t>2025-11-18</a:t>
             </a:fld>
             <a:endParaRPr lang="ko-KR" altLang="en-US"/>
           </a:p>
@@ -21753,7 +21755,7 @@
           <a:p>
             <a:fld id="{80606649-8C48-4DEB-9F5F-3AE3C52C94A0}" type="datetimeFigureOut">
               <a:rPr lang="ko-KR" altLang="en-US" smtClean="0"/>
-              <a:t>2025-11-04</a:t>
+              <a:t>2025-11-18</a:t>
             </a:fld>
             <a:endParaRPr lang="ko-KR" altLang="en-US"/>
           </a:p>
@@ -22165,7 +22167,7 @@
           <a:p>
             <a:fld id="{80606649-8C48-4DEB-9F5F-3AE3C52C94A0}" type="datetimeFigureOut">
               <a:rPr lang="ko-KR" altLang="en-US" smtClean="0"/>
-              <a:t>2025-11-04</a:t>
+              <a:t>2025-11-18</a:t>
             </a:fld>
             <a:endParaRPr lang="ko-KR" altLang="en-US"/>
           </a:p>
@@ -22306,7 +22308,7 @@
           <a:p>
             <a:fld id="{80606649-8C48-4DEB-9F5F-3AE3C52C94A0}" type="datetimeFigureOut">
               <a:rPr lang="ko-KR" altLang="en-US" smtClean="0"/>
-              <a:t>2025-11-04</a:t>
+              <a:t>2025-11-18</a:t>
             </a:fld>
             <a:endParaRPr lang="ko-KR" altLang="en-US"/>
           </a:p>
@@ -22419,7 +22421,7 @@
           <a:p>
             <a:fld id="{80606649-8C48-4DEB-9F5F-3AE3C52C94A0}" type="datetimeFigureOut">
               <a:rPr lang="ko-KR" altLang="en-US" smtClean="0"/>
-              <a:t>2025-11-04</a:t>
+              <a:t>2025-11-18</a:t>
             </a:fld>
             <a:endParaRPr lang="ko-KR" altLang="en-US"/>
           </a:p>
@@ -22730,7 +22732,7 @@
           <a:p>
             <a:fld id="{80606649-8C48-4DEB-9F5F-3AE3C52C94A0}" type="datetimeFigureOut">
               <a:rPr lang="ko-KR" altLang="en-US" smtClean="0"/>
-              <a:t>2025-11-04</a:t>
+              <a:t>2025-11-18</a:t>
             </a:fld>
             <a:endParaRPr lang="ko-KR" altLang="en-US"/>
           </a:p>
@@ -23018,7 +23020,7 @@
           <a:p>
             <a:fld id="{80606649-8C48-4DEB-9F5F-3AE3C52C94A0}" type="datetimeFigureOut">
               <a:rPr lang="ko-KR" altLang="en-US" smtClean="0"/>
-              <a:t>2025-11-04</a:t>
+              <a:t>2025-11-18</a:t>
             </a:fld>
             <a:endParaRPr lang="ko-KR" altLang="en-US"/>
           </a:p>
@@ -23259,7 +23261,7 @@
           <a:p>
             <a:fld id="{80606649-8C48-4DEB-9F5F-3AE3C52C94A0}" type="datetimeFigureOut">
               <a:rPr lang="ko-KR" altLang="en-US" smtClean="0"/>
-              <a:t>2025-11-04</a:t>
+              <a:t>2025-11-18</a:t>
             </a:fld>
             <a:endParaRPr lang="ko-KR" altLang="en-US"/>
           </a:p>
@@ -26047,6 +26049,536 @@
       </p:grpSpPr>
       <p:sp useBgFill="1">
         <p:nvSpPr>
+          <p:cNvPr id="1031" name="Rectangle 1030">
+            <a:extLst>
+              <a:ext uri="{FF2B5EF4-FFF2-40B4-BE49-F238E27FC236}">
+                <a16:creationId xmlns:a16="http://schemas.microsoft.com/office/drawing/2014/main" id="{BCED4D40-4B67-4331-AC48-79B82B4A47D8}"/>
+              </a:ext>
+              <a:ext uri="{C183D7F6-B498-43B3-948B-1728B52AA6E4}">
+                <adec:decorative xmlns:adec="http://schemas.microsoft.com/office/drawing/2017/decorative" val="1"/>
+              </a:ext>
+            </a:extLst>
+          </p:cNvPr>
+          <p:cNvSpPr>
+            <a:spLocks noGrp="1" noRot="1" noChangeAspect="1" noMove="1" noResize="1" noEditPoints="1" noAdjustHandles="1" noChangeArrowheads="1" noChangeShapeType="1" noTextEdit="1"/>
+          </p:cNvSpPr>
+          <p:nvPr>
+            <p:extLst>
+              <p:ext uri="{386F3935-93C4-4BCD-93E2-E3B085C9AB24}">
+                <p16:designElem xmlns:p16="http://schemas.microsoft.com/office/powerpoint/2015/main" val="1"/>
+              </p:ext>
+            </p:extLst>
+          </p:nvPr>
+        </p:nvSpPr>
+        <p:spPr>
+          <a:xfrm>
+            <a:off x="0" y="0"/>
+            <a:ext cx="12192000" cy="6858000"/>
+          </a:xfrm>
+          <a:prstGeom prst="rect">
+            <a:avLst/>
+          </a:prstGeom>
+          <a:ln>
+            <a:noFill/>
+          </a:ln>
+        </p:spPr>
+        <p:style>
+          <a:lnRef idx="2">
+            <a:schemeClr val="accent1">
+              <a:shade val="50000"/>
+            </a:schemeClr>
+          </a:lnRef>
+          <a:fillRef idx="1">
+            <a:schemeClr val="accent1"/>
+          </a:fillRef>
+          <a:effectRef idx="0">
+            <a:schemeClr val="accent1"/>
+          </a:effectRef>
+          <a:fontRef idx="minor">
+            <a:schemeClr val="lt1"/>
+          </a:fontRef>
+        </p:style>
+        <p:txBody>
+          <a:bodyPr rtlCol="0" anchor="ctr"/>
+          <a:lstStyle/>
+          <a:p>
+            <a:pPr algn="ctr"/>
+            <a:endParaRPr lang="en-US"/>
+          </a:p>
+        </p:txBody>
+      </p:sp>
+      <p:sp>
+        <p:nvSpPr>
+          <p:cNvPr id="2" name="제목 1">
+            <a:extLst>
+              <a:ext uri="{FF2B5EF4-FFF2-40B4-BE49-F238E27FC236}">
+                <a16:creationId xmlns:a16="http://schemas.microsoft.com/office/drawing/2014/main" id="{2377B2DF-44D4-75AA-E2FE-9EBCD5A7D627}"/>
+              </a:ext>
+            </a:extLst>
+          </p:cNvPr>
+          <p:cNvSpPr>
+            <a:spLocks noGrp="1"/>
+          </p:cNvSpPr>
+          <p:nvPr>
+            <p:ph type="title"/>
+          </p:nvPr>
+        </p:nvSpPr>
+        <p:spPr>
+          <a:xfrm>
+            <a:off x="638881" y="417576"/>
+            <a:ext cx="10909640" cy="1249394"/>
+          </a:xfrm>
+        </p:spPr>
+        <p:txBody>
+          <a:bodyPr vert="horz" lIns="91440" tIns="45720" rIns="91440" bIns="45720" rtlCol="0" anchor="ctr">
+            <a:normAutofit/>
+          </a:bodyPr>
+          <a:lstStyle/>
+          <a:p>
+            <a:pPr algn="ctr" latinLnBrk="0"/>
+            <a:r>
+              <a:rPr lang="ko-KR" altLang="en-US" sz="6600" kern="1200">
+                <a:solidFill>
+                  <a:schemeClr val="tx1"/>
+                </a:solidFill>
+                <a:latin typeface="+mj-lt"/>
+                <a:ea typeface="+mj-ea"/>
+                <a:cs typeface="+mj-cs"/>
+              </a:rPr>
+              <a:t>접근 한정자</a:t>
+            </a:r>
+          </a:p>
+        </p:txBody>
+      </p:sp>
+      <p:sp>
+        <p:nvSpPr>
+          <p:cNvPr id="1033" name="sketch line">
+            <a:extLst>
+              <a:ext uri="{FF2B5EF4-FFF2-40B4-BE49-F238E27FC236}">
+                <a16:creationId xmlns:a16="http://schemas.microsoft.com/office/drawing/2014/main" id="{670CEDEF-4F34-412E-84EE-329C1E936AF5}"/>
+              </a:ext>
+              <a:ext uri="{C183D7F6-B498-43B3-948B-1728B52AA6E4}">
+                <adec:decorative xmlns:adec="http://schemas.microsoft.com/office/drawing/2017/decorative" val="1"/>
+              </a:ext>
+            </a:extLst>
+          </p:cNvPr>
+          <p:cNvSpPr>
+            <a:spLocks noGrp="1" noRot="1" noChangeAspect="1" noMove="1" noResize="1" noEditPoints="1" noAdjustHandles="1" noChangeArrowheads="1" noChangeShapeType="1" noTextEdit="1"/>
+          </p:cNvSpPr>
+          <p:nvPr>
+            <p:extLst>
+              <p:ext uri="{386F3935-93C4-4BCD-93E2-E3B085C9AB24}">
+                <p16:designElem xmlns:p16="http://schemas.microsoft.com/office/powerpoint/2015/main" val="1"/>
+              </p:ext>
+            </p:extLst>
+          </p:nvPr>
+        </p:nvSpPr>
+        <p:spPr>
+          <a:xfrm>
+            <a:off x="3807702" y="1733454"/>
+            <a:ext cx="4572000" cy="18288"/>
+          </a:xfrm>
+          <a:custGeom>
+            <a:avLst/>
+            <a:gdLst>
+              <a:gd name="connsiteX0" fmla="*/ 0 w 4572000"/>
+              <a:gd name="connsiteY0" fmla="*/ 0 h 18288"/>
+              <a:gd name="connsiteX1" fmla="*/ 515983 w 4572000"/>
+              <a:gd name="connsiteY1" fmla="*/ 0 h 18288"/>
+              <a:gd name="connsiteX2" fmla="*/ 1031966 w 4572000"/>
+              <a:gd name="connsiteY2" fmla="*/ 0 h 18288"/>
+              <a:gd name="connsiteX3" fmla="*/ 1639389 w 4572000"/>
+              <a:gd name="connsiteY3" fmla="*/ 0 h 18288"/>
+              <a:gd name="connsiteX4" fmla="*/ 2383971 w 4572000"/>
+              <a:gd name="connsiteY4" fmla="*/ 0 h 18288"/>
+              <a:gd name="connsiteX5" fmla="*/ 2945674 w 4572000"/>
+              <a:gd name="connsiteY5" fmla="*/ 0 h 18288"/>
+              <a:gd name="connsiteX6" fmla="*/ 3507377 w 4572000"/>
+              <a:gd name="connsiteY6" fmla="*/ 0 h 18288"/>
+              <a:gd name="connsiteX7" fmla="*/ 4572000 w 4572000"/>
+              <a:gd name="connsiteY7" fmla="*/ 0 h 18288"/>
+              <a:gd name="connsiteX8" fmla="*/ 4572000 w 4572000"/>
+              <a:gd name="connsiteY8" fmla="*/ 18288 h 18288"/>
+              <a:gd name="connsiteX9" fmla="*/ 3873137 w 4572000"/>
+              <a:gd name="connsiteY9" fmla="*/ 18288 h 18288"/>
+              <a:gd name="connsiteX10" fmla="*/ 3311434 w 4572000"/>
+              <a:gd name="connsiteY10" fmla="*/ 18288 h 18288"/>
+              <a:gd name="connsiteX11" fmla="*/ 2749731 w 4572000"/>
+              <a:gd name="connsiteY11" fmla="*/ 18288 h 18288"/>
+              <a:gd name="connsiteX12" fmla="*/ 2050869 w 4572000"/>
+              <a:gd name="connsiteY12" fmla="*/ 18288 h 18288"/>
+              <a:gd name="connsiteX13" fmla="*/ 1306286 w 4572000"/>
+              <a:gd name="connsiteY13" fmla="*/ 18288 h 18288"/>
+              <a:gd name="connsiteX14" fmla="*/ 790303 w 4572000"/>
+              <a:gd name="connsiteY14" fmla="*/ 18288 h 18288"/>
+              <a:gd name="connsiteX15" fmla="*/ 0 w 4572000"/>
+              <a:gd name="connsiteY15" fmla="*/ 18288 h 18288"/>
+              <a:gd name="connsiteX16" fmla="*/ 0 w 4572000"/>
+              <a:gd name="connsiteY16" fmla="*/ 0 h 18288"/>
+            </a:gdLst>
+            <a:ahLst/>
+            <a:cxnLst>
+              <a:cxn ang="0">
+                <a:pos x="connsiteX0" y="connsiteY0"/>
+              </a:cxn>
+              <a:cxn ang="0">
+                <a:pos x="connsiteX1" y="connsiteY1"/>
+              </a:cxn>
+              <a:cxn ang="0">
+                <a:pos x="connsiteX2" y="connsiteY2"/>
+              </a:cxn>
+              <a:cxn ang="0">
+                <a:pos x="connsiteX3" y="connsiteY3"/>
+              </a:cxn>
+              <a:cxn ang="0">
+                <a:pos x="connsiteX4" y="connsiteY4"/>
+              </a:cxn>
+              <a:cxn ang="0">
+                <a:pos x="connsiteX5" y="connsiteY5"/>
+              </a:cxn>
+              <a:cxn ang="0">
+                <a:pos x="connsiteX6" y="connsiteY6"/>
+              </a:cxn>
+              <a:cxn ang="0">
+                <a:pos x="connsiteX7" y="connsiteY7"/>
+              </a:cxn>
+              <a:cxn ang="0">
+                <a:pos x="connsiteX8" y="connsiteY8"/>
+              </a:cxn>
+              <a:cxn ang="0">
+                <a:pos x="connsiteX9" y="connsiteY9"/>
+              </a:cxn>
+              <a:cxn ang="0">
+                <a:pos x="connsiteX10" y="connsiteY10"/>
+              </a:cxn>
+              <a:cxn ang="0">
+                <a:pos x="connsiteX11" y="connsiteY11"/>
+              </a:cxn>
+              <a:cxn ang="0">
+                <a:pos x="connsiteX12" y="connsiteY12"/>
+              </a:cxn>
+              <a:cxn ang="0">
+                <a:pos x="connsiteX13" y="connsiteY13"/>
+              </a:cxn>
+              <a:cxn ang="0">
+                <a:pos x="connsiteX14" y="connsiteY14"/>
+              </a:cxn>
+              <a:cxn ang="0">
+                <a:pos x="connsiteX15" y="connsiteY15"/>
+              </a:cxn>
+              <a:cxn ang="0">
+                <a:pos x="connsiteX16" y="connsiteY16"/>
+              </a:cxn>
+            </a:cxnLst>
+            <a:rect l="l" t="t" r="r" b="b"/>
+            <a:pathLst>
+              <a:path w="4572000" h="18288" fill="none" extrusionOk="0">
+                <a:moveTo>
+                  <a:pt x="0" y="0"/>
+                </a:moveTo>
+                <a:cubicBezTo>
+                  <a:pt x="105156" y="-20963"/>
+                  <a:pt x="340432" y="822"/>
+                  <a:pt x="515983" y="0"/>
+                </a:cubicBezTo>
+                <a:cubicBezTo>
+                  <a:pt x="691534" y="-822"/>
+                  <a:pt x="850679" y="16479"/>
+                  <a:pt x="1031966" y="0"/>
+                </a:cubicBezTo>
+                <a:cubicBezTo>
+                  <a:pt x="1213253" y="-16479"/>
+                  <a:pt x="1443646" y="-18730"/>
+                  <a:pt x="1639389" y="0"/>
+                </a:cubicBezTo>
+                <a:cubicBezTo>
+                  <a:pt x="1835132" y="18730"/>
+                  <a:pt x="2159975" y="18531"/>
+                  <a:pt x="2383971" y="0"/>
+                </a:cubicBezTo>
+                <a:cubicBezTo>
+                  <a:pt x="2607967" y="-18531"/>
+                  <a:pt x="2719096" y="-12030"/>
+                  <a:pt x="2945674" y="0"/>
+                </a:cubicBezTo>
+                <a:cubicBezTo>
+                  <a:pt x="3172252" y="12030"/>
+                  <a:pt x="3269167" y="27666"/>
+                  <a:pt x="3507377" y="0"/>
+                </a:cubicBezTo>
+                <a:cubicBezTo>
+                  <a:pt x="3745587" y="-27666"/>
+                  <a:pt x="4116741" y="18705"/>
+                  <a:pt x="4572000" y="0"/>
+                </a:cubicBezTo>
+                <a:cubicBezTo>
+                  <a:pt x="4572895" y="8974"/>
+                  <a:pt x="4571454" y="9359"/>
+                  <a:pt x="4572000" y="18288"/>
+                </a:cubicBezTo>
+                <a:cubicBezTo>
+                  <a:pt x="4374698" y="3942"/>
+                  <a:pt x="4098874" y="-11042"/>
+                  <a:pt x="3873137" y="18288"/>
+                </a:cubicBezTo>
+                <a:cubicBezTo>
+                  <a:pt x="3647400" y="47618"/>
+                  <a:pt x="3517055" y="5421"/>
+                  <a:pt x="3311434" y="18288"/>
+                </a:cubicBezTo>
+                <a:cubicBezTo>
+                  <a:pt x="3105813" y="31155"/>
+                  <a:pt x="3025168" y="17856"/>
+                  <a:pt x="2749731" y="18288"/>
+                </a:cubicBezTo>
+                <a:cubicBezTo>
+                  <a:pt x="2474294" y="18720"/>
+                  <a:pt x="2291766" y="-14168"/>
+                  <a:pt x="2050869" y="18288"/>
+                </a:cubicBezTo>
+                <a:cubicBezTo>
+                  <a:pt x="1809972" y="50744"/>
+                  <a:pt x="1540276" y="46798"/>
+                  <a:pt x="1306286" y="18288"/>
+                </a:cubicBezTo>
+                <a:cubicBezTo>
+                  <a:pt x="1072296" y="-10222"/>
+                  <a:pt x="972445" y="19645"/>
+                  <a:pt x="790303" y="18288"/>
+                </a:cubicBezTo>
+                <a:cubicBezTo>
+                  <a:pt x="608161" y="16931"/>
+                  <a:pt x="200981" y="8241"/>
+                  <a:pt x="0" y="18288"/>
+                </a:cubicBezTo>
+                <a:cubicBezTo>
+                  <a:pt x="-229" y="14222"/>
+                  <a:pt x="509" y="5816"/>
+                  <a:pt x="0" y="0"/>
+                </a:cubicBezTo>
+                <a:close/>
+              </a:path>
+              <a:path w="4572000" h="18288" stroke="0" extrusionOk="0">
+                <a:moveTo>
+                  <a:pt x="0" y="0"/>
+                </a:moveTo>
+                <a:cubicBezTo>
+                  <a:pt x="143285" y="-9565"/>
+                  <a:pt x="327959" y="-11498"/>
+                  <a:pt x="561703" y="0"/>
+                </a:cubicBezTo>
+                <a:cubicBezTo>
+                  <a:pt x="795447" y="11498"/>
+                  <a:pt x="838260" y="18255"/>
+                  <a:pt x="1077686" y="0"/>
+                </a:cubicBezTo>
+                <a:cubicBezTo>
+                  <a:pt x="1317112" y="-18255"/>
+                  <a:pt x="1437472" y="23514"/>
+                  <a:pt x="1639389" y="0"/>
+                </a:cubicBezTo>
+                <a:cubicBezTo>
+                  <a:pt x="1841306" y="-23514"/>
+                  <a:pt x="2037142" y="-12551"/>
+                  <a:pt x="2292531" y="0"/>
+                </a:cubicBezTo>
+                <a:cubicBezTo>
+                  <a:pt x="2547920" y="12551"/>
+                  <a:pt x="2810436" y="-20352"/>
+                  <a:pt x="2991394" y="0"/>
+                </a:cubicBezTo>
+                <a:cubicBezTo>
+                  <a:pt x="3172352" y="20352"/>
+                  <a:pt x="3530025" y="-13347"/>
+                  <a:pt x="3735977" y="0"/>
+                </a:cubicBezTo>
+                <a:cubicBezTo>
+                  <a:pt x="3941929" y="13347"/>
+                  <a:pt x="4161497" y="34086"/>
+                  <a:pt x="4572000" y="0"/>
+                </a:cubicBezTo>
+                <a:cubicBezTo>
+                  <a:pt x="4571545" y="6162"/>
+                  <a:pt x="4571903" y="11775"/>
+                  <a:pt x="4572000" y="18288"/>
+                </a:cubicBezTo>
+                <a:cubicBezTo>
+                  <a:pt x="4228040" y="36490"/>
+                  <a:pt x="4199736" y="42557"/>
+                  <a:pt x="3873137" y="18288"/>
+                </a:cubicBezTo>
+                <a:cubicBezTo>
+                  <a:pt x="3546538" y="-5981"/>
+                  <a:pt x="3472124" y="16809"/>
+                  <a:pt x="3128554" y="18288"/>
+                </a:cubicBezTo>
+                <a:cubicBezTo>
+                  <a:pt x="2784984" y="19767"/>
+                  <a:pt x="2735896" y="-17781"/>
+                  <a:pt x="2383971" y="18288"/>
+                </a:cubicBezTo>
+                <a:cubicBezTo>
+                  <a:pt x="2032046" y="54357"/>
+                  <a:pt x="2019324" y="2920"/>
+                  <a:pt x="1867989" y="18288"/>
+                </a:cubicBezTo>
+                <a:cubicBezTo>
+                  <a:pt x="1716654" y="33656"/>
+                  <a:pt x="1418675" y="32575"/>
+                  <a:pt x="1169126" y="18288"/>
+                </a:cubicBezTo>
+                <a:cubicBezTo>
+                  <a:pt x="919577" y="4001"/>
+                  <a:pt x="798537" y="16165"/>
+                  <a:pt x="561703" y="18288"/>
+                </a:cubicBezTo>
+                <a:cubicBezTo>
+                  <a:pt x="324869" y="20411"/>
+                  <a:pt x="221395" y="-912"/>
+                  <a:pt x="0" y="18288"/>
+                </a:cubicBezTo>
+                <a:cubicBezTo>
+                  <a:pt x="766" y="10800"/>
+                  <a:pt x="-457" y="8180"/>
+                  <a:pt x="0" y="0"/>
+                </a:cubicBezTo>
+                <a:close/>
+              </a:path>
+            </a:pathLst>
+          </a:custGeom>
+          <a:solidFill>
+            <a:schemeClr val="accent2"/>
+          </a:solidFill>
+          <a:ln w="41275" cap="rnd">
+            <a:solidFill>
+              <a:schemeClr val="accent2"/>
+            </a:solidFill>
+            <a:round/>
+            <a:extLst>
+              <a:ext uri="{C807C97D-BFC1-408E-A445-0C87EB9F89A2}">
+                <ask:lineSketchStyleProps xmlns:ask="http://schemas.microsoft.com/office/drawing/2018/sketchyshapes" sd="2727557108">
+                  <a:prstGeom prst="rect">
+                    <a:avLst/>
+                  </a:prstGeom>
+                  <ask:type>
+                    <ask:lineSketchFreehand/>
+                  </ask:type>
+                </ask:lineSketchStyleProps>
+              </a:ext>
+            </a:extLst>
+          </a:ln>
+        </p:spPr>
+        <p:style>
+          <a:lnRef idx="2">
+            <a:schemeClr val="accent1">
+              <a:shade val="50000"/>
+            </a:schemeClr>
+          </a:lnRef>
+          <a:fillRef idx="1">
+            <a:schemeClr val="accent1"/>
+          </a:fillRef>
+          <a:effectRef idx="0">
+            <a:schemeClr val="accent1"/>
+          </a:effectRef>
+          <a:fontRef idx="minor">
+            <a:schemeClr val="lt1"/>
+          </a:fontRef>
+        </p:style>
+        <p:txBody>
+          <a:bodyPr rtlCol="0" anchor="ctr"/>
+          <a:lstStyle/>
+          <a:p>
+            <a:pPr algn="ctr"/>
+            <a:endParaRPr lang="en-US"/>
+          </a:p>
+        </p:txBody>
+      </p:sp>
+      <p:pic>
+        <p:nvPicPr>
+          <p:cNvPr id="1026" name="Picture 2">
+            <a:extLst>
+              <a:ext uri="{FF2B5EF4-FFF2-40B4-BE49-F238E27FC236}">
+                <a16:creationId xmlns:a16="http://schemas.microsoft.com/office/drawing/2014/main" id="{878772A7-A40C-60F9-47E9-21CF21ECBCB6}"/>
+              </a:ext>
+            </a:extLst>
+          </p:cNvPr>
+          <p:cNvPicPr>
+            <a:picLocks noChangeAspect="1" noChangeArrowheads="1"/>
+          </p:cNvPicPr>
+          <p:nvPr/>
+        </p:nvPicPr>
+        <p:blipFill>
+          <a:blip r:embed="rId2">
+            <a:extLst>
+              <a:ext uri="{28A0092B-C50C-407E-A947-70E740481C1C}">
+                <a14:useLocalDpi xmlns:a14="http://schemas.microsoft.com/office/drawing/2010/main" val="0"/>
+              </a:ext>
+            </a:extLst>
+          </a:blip>
+          <a:stretch>
+            <a:fillRect/>
+          </a:stretch>
+        </p:blipFill>
+        <p:spPr bwMode="auto">
+          <a:xfrm>
+            <a:off x="1132665" y="2066258"/>
+            <a:ext cx="9926669" cy="4640719"/>
+          </a:xfrm>
+          <a:prstGeom prst="rect">
+            <a:avLst/>
+          </a:prstGeom>
+          <a:noFill/>
+          <a:extLst>
+            <a:ext uri="{909E8E84-426E-40DD-AFC4-6F175D3DCCD1}">
+              <a14:hiddenFill xmlns:a14="http://schemas.microsoft.com/office/drawing/2010/main">
+                <a:solidFill>
+                  <a:srgbClr val="FFFFFF"/>
+                </a:solidFill>
+              </a14:hiddenFill>
+            </a:ext>
+          </a:extLst>
+        </p:spPr>
+      </p:pic>
+    </p:spTree>
+    <p:extLst>
+      <p:ext uri="{BB962C8B-B14F-4D97-AF65-F5344CB8AC3E}">
+        <p14:creationId xmlns:p14="http://schemas.microsoft.com/office/powerpoint/2010/main" val="2091732334"/>
+      </p:ext>
+    </p:extLst>
+  </p:cSld>
+  <p:clrMapOvr>
+    <a:masterClrMapping/>
+  </p:clrMapOvr>
+</p:sld>
+</file>
+
+<file path=ppt/slides/slide13.xml><?xml version="1.0" encoding="utf-8"?>
+<p:sld xmlns:a="http://schemas.openxmlformats.org/drawingml/2006/main" xmlns:r="http://schemas.openxmlformats.org/officeDocument/2006/relationships" xmlns:p="http://schemas.openxmlformats.org/presentationml/2006/main">
+  <p:cSld>
+    <p:bg>
+      <p:bgPr>
+        <a:solidFill>
+          <a:schemeClr val="bg1"/>
+        </a:solidFill>
+        <a:effectLst/>
+      </p:bgPr>
+    </p:bg>
+    <p:spTree>
+      <p:nvGrpSpPr>
+        <p:cNvPr id="1" name=""/>
+        <p:cNvGrpSpPr/>
+        <p:nvPr/>
+      </p:nvGrpSpPr>
+      <p:grpSpPr>
+        <a:xfrm>
+          <a:off x="0" y="0"/>
+          <a:ext cx="0" cy="0"/>
+          <a:chOff x="0" y="0"/>
+          <a:chExt cx="0" cy="0"/>
+        </a:xfrm>
+      </p:grpSpPr>
+      <p:sp useBgFill="1">
+        <p:nvSpPr>
           <p:cNvPr id="9" name="Rectangle 8">
             <a:extLst>
               <a:ext uri="{FF2B5EF4-FFF2-40B4-BE49-F238E27FC236}">
@@ -27185,7 +27717,7 @@
 </p:sld>
 </file>
 
-<file path=ppt/slides/slide13.xml><?xml version="1.0" encoding="utf-8"?>
+<file path=ppt/slides/slide14.xml><?xml version="1.0" encoding="utf-8"?>
 <p:sld xmlns:a="http://schemas.openxmlformats.org/drawingml/2006/main" xmlns:r="http://schemas.openxmlformats.org/officeDocument/2006/relationships" xmlns:p="http://schemas.openxmlformats.org/presentationml/2006/main">
   <p:cSld>
     <p:bg>
@@ -27708,7 +28240,7 @@
 </p:sld>
 </file>
 
-<file path=ppt/slides/slide14.xml><?xml version="1.0" encoding="utf-8"?>
+<file path=ppt/slides/slide15.xml><?xml version="1.0" encoding="utf-8"?>
 <p:sld xmlns:a="http://schemas.openxmlformats.org/drawingml/2006/main" xmlns:r="http://schemas.openxmlformats.org/officeDocument/2006/relationships" xmlns:p="http://schemas.openxmlformats.org/presentationml/2006/main">
   <p:cSld>
     <p:bg>
@@ -28511,7 +29043,7 @@
 </p:sld>
 </file>
 
-<file path=ppt/slides/slide15.xml><?xml version="1.0" encoding="utf-8"?>
+<file path=ppt/slides/slide16.xml><?xml version="1.0" encoding="utf-8"?>
 <p:sld xmlns:a="http://schemas.openxmlformats.org/drawingml/2006/main" xmlns:r="http://schemas.openxmlformats.org/officeDocument/2006/relationships" xmlns:p="http://schemas.openxmlformats.org/presentationml/2006/main">
   <p:cSld>
     <p:bg>
@@ -29116,7 +29648,7 @@
 </p:sld>
 </file>
 
-<file path=ppt/slides/slide16.xml><?xml version="1.0" encoding="utf-8"?>
+<file path=ppt/slides/slide17.xml><?xml version="1.0" encoding="utf-8"?>
 <p:sld xmlns:a="http://schemas.openxmlformats.org/drawingml/2006/main" xmlns:r="http://schemas.openxmlformats.org/officeDocument/2006/relationships" xmlns:p="http://schemas.openxmlformats.org/presentationml/2006/main">
   <p:cSld>
     <p:bg>
@@ -29518,6 +30050,1238 @@
     <p:extLst>
       <p:ext uri="{BB962C8B-B14F-4D97-AF65-F5344CB8AC3E}">
         <p14:creationId xmlns:p14="http://schemas.microsoft.com/office/powerpoint/2010/main" val="237097772"/>
+      </p:ext>
+    </p:extLst>
+  </p:cSld>
+  <p:clrMapOvr>
+    <a:masterClrMapping/>
+  </p:clrMapOvr>
+</p:sld>
+</file>
+
+<file path=ppt/slides/slide18.xml><?xml version="1.0" encoding="utf-8"?>
+<p:sld xmlns:a="http://schemas.openxmlformats.org/drawingml/2006/main" xmlns:r="http://schemas.openxmlformats.org/officeDocument/2006/relationships" xmlns:p="http://schemas.openxmlformats.org/presentationml/2006/main">
+  <p:cSld>
+    <p:bg>
+      <p:bgPr>
+        <a:solidFill>
+          <a:schemeClr val="bg1"/>
+        </a:solidFill>
+        <a:effectLst/>
+      </p:bgPr>
+    </p:bg>
+    <p:spTree>
+      <p:nvGrpSpPr>
+        <p:cNvPr id="1" name="">
+          <a:extLst>
+            <a:ext uri="{FF2B5EF4-FFF2-40B4-BE49-F238E27FC236}">
+              <a16:creationId xmlns:a16="http://schemas.microsoft.com/office/drawing/2014/main" id="{887311CA-E01E-2872-365D-1B2F9091382A}"/>
+            </a:ext>
+          </a:extLst>
+        </p:cNvPr>
+        <p:cNvGrpSpPr/>
+        <p:nvPr/>
+      </p:nvGrpSpPr>
+      <p:grpSpPr>
+        <a:xfrm>
+          <a:off x="0" y="0"/>
+          <a:ext cx="0" cy="0"/>
+          <a:chOff x="0" y="0"/>
+          <a:chExt cx="0" cy="0"/>
+        </a:xfrm>
+      </p:grpSpPr>
+      <p:sp useBgFill="1">
+        <p:nvSpPr>
+          <p:cNvPr id="11" name="Rectangle 10">
+            <a:extLst>
+              <a:ext uri="{FF2B5EF4-FFF2-40B4-BE49-F238E27FC236}">
+                <a16:creationId xmlns:a16="http://schemas.microsoft.com/office/drawing/2014/main" id="{BCED4D40-4B67-4331-AC48-79B82B4A47D8}"/>
+              </a:ext>
+              <a:ext uri="{C183D7F6-B498-43B3-948B-1728B52AA6E4}">
+                <adec:decorative xmlns:adec="http://schemas.microsoft.com/office/drawing/2017/decorative" val="1"/>
+              </a:ext>
+            </a:extLst>
+          </p:cNvPr>
+          <p:cNvSpPr>
+            <a:spLocks noGrp="1" noRot="1" noChangeAspect="1" noMove="1" noResize="1" noEditPoints="1" noAdjustHandles="1" noChangeArrowheads="1" noChangeShapeType="1" noTextEdit="1"/>
+          </p:cNvSpPr>
+          <p:nvPr>
+            <p:extLst>
+              <p:ext uri="{386F3935-93C4-4BCD-93E2-E3B085C9AB24}">
+                <p16:designElem xmlns:p16="http://schemas.microsoft.com/office/powerpoint/2015/main" val="1"/>
+              </p:ext>
+            </p:extLst>
+          </p:nvPr>
+        </p:nvSpPr>
+        <p:spPr>
+          <a:xfrm>
+            <a:off x="0" y="0"/>
+            <a:ext cx="12192000" cy="6858000"/>
+          </a:xfrm>
+          <a:prstGeom prst="rect">
+            <a:avLst/>
+          </a:prstGeom>
+          <a:ln>
+            <a:noFill/>
+          </a:ln>
+        </p:spPr>
+        <p:style>
+          <a:lnRef idx="2">
+            <a:schemeClr val="accent1">
+              <a:shade val="50000"/>
+            </a:schemeClr>
+          </a:lnRef>
+          <a:fillRef idx="1">
+            <a:schemeClr val="accent1"/>
+          </a:fillRef>
+          <a:effectRef idx="0">
+            <a:schemeClr val="accent1"/>
+          </a:effectRef>
+          <a:fontRef idx="minor">
+            <a:schemeClr val="lt1"/>
+          </a:fontRef>
+        </p:style>
+        <p:txBody>
+          <a:bodyPr rtlCol="0" anchor="ctr"/>
+          <a:lstStyle/>
+          <a:p>
+            <a:pPr algn="ctr"/>
+            <a:endParaRPr lang="en-US"/>
+          </a:p>
+        </p:txBody>
+      </p:sp>
+      <p:sp>
+        <p:nvSpPr>
+          <p:cNvPr id="2" name="제목 1">
+            <a:extLst>
+              <a:ext uri="{FF2B5EF4-FFF2-40B4-BE49-F238E27FC236}">
+                <a16:creationId xmlns:a16="http://schemas.microsoft.com/office/drawing/2014/main" id="{44EF8A0E-50EB-C561-DBEA-7BA9C5EA9D5D}"/>
+              </a:ext>
+            </a:extLst>
+          </p:cNvPr>
+          <p:cNvSpPr>
+            <a:spLocks noGrp="1"/>
+          </p:cNvSpPr>
+          <p:nvPr>
+            <p:ph type="title"/>
+          </p:nvPr>
+        </p:nvSpPr>
+        <p:spPr>
+          <a:xfrm>
+            <a:off x="638881" y="417576"/>
+            <a:ext cx="10909640" cy="1249394"/>
+          </a:xfrm>
+        </p:spPr>
+        <p:txBody>
+          <a:bodyPr vert="horz" lIns="91440" tIns="45720" rIns="91440" bIns="45720" rtlCol="0" anchor="ctr">
+            <a:normAutofit/>
+          </a:bodyPr>
+          <a:lstStyle/>
+          <a:p>
+            <a:pPr algn="ctr" latinLnBrk="0"/>
+            <a:r>
+              <a:rPr lang="ko-KR" altLang="en-US" sz="6600" kern="1200" dirty="0">
+                <a:solidFill>
+                  <a:schemeClr val="tx1"/>
+                </a:solidFill>
+                <a:latin typeface="+mj-lt"/>
+                <a:ea typeface="+mj-ea"/>
+                <a:cs typeface="+mj-cs"/>
+              </a:rPr>
+              <a:t>다양한 </a:t>
+            </a:r>
+            <a:r>
+              <a:rPr lang="en-US" altLang="ko-KR" sz="6600" kern="1200" dirty="0">
+                <a:solidFill>
+                  <a:schemeClr val="tx1"/>
+                </a:solidFill>
+                <a:latin typeface="+mj-lt"/>
+                <a:ea typeface="+mj-ea"/>
+                <a:cs typeface="+mj-cs"/>
+              </a:rPr>
+              <a:t>class </a:t>
+            </a:r>
+            <a:r>
+              <a:rPr lang="ko-KR" altLang="en-US" sz="6600" kern="1200" dirty="0">
+                <a:solidFill>
+                  <a:schemeClr val="tx1"/>
+                </a:solidFill>
+                <a:latin typeface="+mj-lt"/>
+                <a:ea typeface="+mj-ea"/>
+                <a:cs typeface="+mj-cs"/>
+              </a:rPr>
+              <a:t>종류</a:t>
+            </a:r>
+            <a:endParaRPr lang="en-US" altLang="ko-KR" sz="6600" kern="1200" dirty="0">
+              <a:solidFill>
+                <a:schemeClr val="tx1"/>
+              </a:solidFill>
+              <a:latin typeface="+mj-lt"/>
+              <a:ea typeface="+mj-ea"/>
+              <a:cs typeface="+mj-cs"/>
+            </a:endParaRPr>
+          </a:p>
+        </p:txBody>
+      </p:sp>
+      <p:sp>
+        <p:nvSpPr>
+          <p:cNvPr id="13" name="sketch line">
+            <a:extLst>
+              <a:ext uri="{FF2B5EF4-FFF2-40B4-BE49-F238E27FC236}">
+                <a16:creationId xmlns:a16="http://schemas.microsoft.com/office/drawing/2014/main" id="{670CEDEF-4F34-412E-84EE-329C1E936AF5}"/>
+              </a:ext>
+              <a:ext uri="{C183D7F6-B498-43B3-948B-1728B52AA6E4}">
+                <adec:decorative xmlns:adec="http://schemas.microsoft.com/office/drawing/2017/decorative" val="1"/>
+              </a:ext>
+            </a:extLst>
+          </p:cNvPr>
+          <p:cNvSpPr>
+            <a:spLocks noGrp="1" noRot="1" noChangeAspect="1" noMove="1" noResize="1" noEditPoints="1" noAdjustHandles="1" noChangeArrowheads="1" noChangeShapeType="1" noTextEdit="1"/>
+          </p:cNvSpPr>
+          <p:nvPr>
+            <p:extLst>
+              <p:ext uri="{386F3935-93C4-4BCD-93E2-E3B085C9AB24}">
+                <p16:designElem xmlns:p16="http://schemas.microsoft.com/office/powerpoint/2015/main" val="1"/>
+              </p:ext>
+            </p:extLst>
+          </p:nvPr>
+        </p:nvSpPr>
+        <p:spPr>
+          <a:xfrm>
+            <a:off x="3807702" y="1733454"/>
+            <a:ext cx="4572000" cy="18288"/>
+          </a:xfrm>
+          <a:custGeom>
+            <a:avLst/>
+            <a:gdLst>
+              <a:gd name="connsiteX0" fmla="*/ 0 w 4572000"/>
+              <a:gd name="connsiteY0" fmla="*/ 0 h 18288"/>
+              <a:gd name="connsiteX1" fmla="*/ 515983 w 4572000"/>
+              <a:gd name="connsiteY1" fmla="*/ 0 h 18288"/>
+              <a:gd name="connsiteX2" fmla="*/ 1031966 w 4572000"/>
+              <a:gd name="connsiteY2" fmla="*/ 0 h 18288"/>
+              <a:gd name="connsiteX3" fmla="*/ 1639389 w 4572000"/>
+              <a:gd name="connsiteY3" fmla="*/ 0 h 18288"/>
+              <a:gd name="connsiteX4" fmla="*/ 2383971 w 4572000"/>
+              <a:gd name="connsiteY4" fmla="*/ 0 h 18288"/>
+              <a:gd name="connsiteX5" fmla="*/ 2945674 w 4572000"/>
+              <a:gd name="connsiteY5" fmla="*/ 0 h 18288"/>
+              <a:gd name="connsiteX6" fmla="*/ 3507377 w 4572000"/>
+              <a:gd name="connsiteY6" fmla="*/ 0 h 18288"/>
+              <a:gd name="connsiteX7" fmla="*/ 4572000 w 4572000"/>
+              <a:gd name="connsiteY7" fmla="*/ 0 h 18288"/>
+              <a:gd name="connsiteX8" fmla="*/ 4572000 w 4572000"/>
+              <a:gd name="connsiteY8" fmla="*/ 18288 h 18288"/>
+              <a:gd name="connsiteX9" fmla="*/ 3873137 w 4572000"/>
+              <a:gd name="connsiteY9" fmla="*/ 18288 h 18288"/>
+              <a:gd name="connsiteX10" fmla="*/ 3311434 w 4572000"/>
+              <a:gd name="connsiteY10" fmla="*/ 18288 h 18288"/>
+              <a:gd name="connsiteX11" fmla="*/ 2749731 w 4572000"/>
+              <a:gd name="connsiteY11" fmla="*/ 18288 h 18288"/>
+              <a:gd name="connsiteX12" fmla="*/ 2050869 w 4572000"/>
+              <a:gd name="connsiteY12" fmla="*/ 18288 h 18288"/>
+              <a:gd name="connsiteX13" fmla="*/ 1306286 w 4572000"/>
+              <a:gd name="connsiteY13" fmla="*/ 18288 h 18288"/>
+              <a:gd name="connsiteX14" fmla="*/ 790303 w 4572000"/>
+              <a:gd name="connsiteY14" fmla="*/ 18288 h 18288"/>
+              <a:gd name="connsiteX15" fmla="*/ 0 w 4572000"/>
+              <a:gd name="connsiteY15" fmla="*/ 18288 h 18288"/>
+              <a:gd name="connsiteX16" fmla="*/ 0 w 4572000"/>
+              <a:gd name="connsiteY16" fmla="*/ 0 h 18288"/>
+            </a:gdLst>
+            <a:ahLst/>
+            <a:cxnLst>
+              <a:cxn ang="0">
+                <a:pos x="connsiteX0" y="connsiteY0"/>
+              </a:cxn>
+              <a:cxn ang="0">
+                <a:pos x="connsiteX1" y="connsiteY1"/>
+              </a:cxn>
+              <a:cxn ang="0">
+                <a:pos x="connsiteX2" y="connsiteY2"/>
+              </a:cxn>
+              <a:cxn ang="0">
+                <a:pos x="connsiteX3" y="connsiteY3"/>
+              </a:cxn>
+              <a:cxn ang="0">
+                <a:pos x="connsiteX4" y="connsiteY4"/>
+              </a:cxn>
+              <a:cxn ang="0">
+                <a:pos x="connsiteX5" y="connsiteY5"/>
+              </a:cxn>
+              <a:cxn ang="0">
+                <a:pos x="connsiteX6" y="connsiteY6"/>
+              </a:cxn>
+              <a:cxn ang="0">
+                <a:pos x="connsiteX7" y="connsiteY7"/>
+              </a:cxn>
+              <a:cxn ang="0">
+                <a:pos x="connsiteX8" y="connsiteY8"/>
+              </a:cxn>
+              <a:cxn ang="0">
+                <a:pos x="connsiteX9" y="connsiteY9"/>
+              </a:cxn>
+              <a:cxn ang="0">
+                <a:pos x="connsiteX10" y="connsiteY10"/>
+              </a:cxn>
+              <a:cxn ang="0">
+                <a:pos x="connsiteX11" y="connsiteY11"/>
+              </a:cxn>
+              <a:cxn ang="0">
+                <a:pos x="connsiteX12" y="connsiteY12"/>
+              </a:cxn>
+              <a:cxn ang="0">
+                <a:pos x="connsiteX13" y="connsiteY13"/>
+              </a:cxn>
+              <a:cxn ang="0">
+                <a:pos x="connsiteX14" y="connsiteY14"/>
+              </a:cxn>
+              <a:cxn ang="0">
+                <a:pos x="connsiteX15" y="connsiteY15"/>
+              </a:cxn>
+              <a:cxn ang="0">
+                <a:pos x="connsiteX16" y="connsiteY16"/>
+              </a:cxn>
+            </a:cxnLst>
+            <a:rect l="l" t="t" r="r" b="b"/>
+            <a:pathLst>
+              <a:path w="4572000" h="18288" fill="none" extrusionOk="0">
+                <a:moveTo>
+                  <a:pt x="0" y="0"/>
+                </a:moveTo>
+                <a:cubicBezTo>
+                  <a:pt x="105156" y="-20963"/>
+                  <a:pt x="340432" y="822"/>
+                  <a:pt x="515983" y="0"/>
+                </a:cubicBezTo>
+                <a:cubicBezTo>
+                  <a:pt x="691534" y="-822"/>
+                  <a:pt x="850679" y="16479"/>
+                  <a:pt x="1031966" y="0"/>
+                </a:cubicBezTo>
+                <a:cubicBezTo>
+                  <a:pt x="1213253" y="-16479"/>
+                  <a:pt x="1443646" y="-18730"/>
+                  <a:pt x="1639389" y="0"/>
+                </a:cubicBezTo>
+                <a:cubicBezTo>
+                  <a:pt x="1835132" y="18730"/>
+                  <a:pt x="2159975" y="18531"/>
+                  <a:pt x="2383971" y="0"/>
+                </a:cubicBezTo>
+                <a:cubicBezTo>
+                  <a:pt x="2607967" y="-18531"/>
+                  <a:pt x="2719096" y="-12030"/>
+                  <a:pt x="2945674" y="0"/>
+                </a:cubicBezTo>
+                <a:cubicBezTo>
+                  <a:pt x="3172252" y="12030"/>
+                  <a:pt x="3269167" y="27666"/>
+                  <a:pt x="3507377" y="0"/>
+                </a:cubicBezTo>
+                <a:cubicBezTo>
+                  <a:pt x="3745587" y="-27666"/>
+                  <a:pt x="4116741" y="18705"/>
+                  <a:pt x="4572000" y="0"/>
+                </a:cubicBezTo>
+                <a:cubicBezTo>
+                  <a:pt x="4572895" y="8974"/>
+                  <a:pt x="4571454" y="9359"/>
+                  <a:pt x="4572000" y="18288"/>
+                </a:cubicBezTo>
+                <a:cubicBezTo>
+                  <a:pt x="4374698" y="3942"/>
+                  <a:pt x="4098874" y="-11042"/>
+                  <a:pt x="3873137" y="18288"/>
+                </a:cubicBezTo>
+                <a:cubicBezTo>
+                  <a:pt x="3647400" y="47618"/>
+                  <a:pt x="3517055" y="5421"/>
+                  <a:pt x="3311434" y="18288"/>
+                </a:cubicBezTo>
+                <a:cubicBezTo>
+                  <a:pt x="3105813" y="31155"/>
+                  <a:pt x="3025168" y="17856"/>
+                  <a:pt x="2749731" y="18288"/>
+                </a:cubicBezTo>
+                <a:cubicBezTo>
+                  <a:pt x="2474294" y="18720"/>
+                  <a:pt x="2291766" y="-14168"/>
+                  <a:pt x="2050869" y="18288"/>
+                </a:cubicBezTo>
+                <a:cubicBezTo>
+                  <a:pt x="1809972" y="50744"/>
+                  <a:pt x="1540276" y="46798"/>
+                  <a:pt x="1306286" y="18288"/>
+                </a:cubicBezTo>
+                <a:cubicBezTo>
+                  <a:pt x="1072296" y="-10222"/>
+                  <a:pt x="972445" y="19645"/>
+                  <a:pt x="790303" y="18288"/>
+                </a:cubicBezTo>
+                <a:cubicBezTo>
+                  <a:pt x="608161" y="16931"/>
+                  <a:pt x="200981" y="8241"/>
+                  <a:pt x="0" y="18288"/>
+                </a:cubicBezTo>
+                <a:cubicBezTo>
+                  <a:pt x="-229" y="14222"/>
+                  <a:pt x="509" y="5816"/>
+                  <a:pt x="0" y="0"/>
+                </a:cubicBezTo>
+                <a:close/>
+              </a:path>
+              <a:path w="4572000" h="18288" stroke="0" extrusionOk="0">
+                <a:moveTo>
+                  <a:pt x="0" y="0"/>
+                </a:moveTo>
+                <a:cubicBezTo>
+                  <a:pt x="143285" y="-9565"/>
+                  <a:pt x="327959" y="-11498"/>
+                  <a:pt x="561703" y="0"/>
+                </a:cubicBezTo>
+                <a:cubicBezTo>
+                  <a:pt x="795447" y="11498"/>
+                  <a:pt x="838260" y="18255"/>
+                  <a:pt x="1077686" y="0"/>
+                </a:cubicBezTo>
+                <a:cubicBezTo>
+                  <a:pt x="1317112" y="-18255"/>
+                  <a:pt x="1437472" y="23514"/>
+                  <a:pt x="1639389" y="0"/>
+                </a:cubicBezTo>
+                <a:cubicBezTo>
+                  <a:pt x="1841306" y="-23514"/>
+                  <a:pt x="2037142" y="-12551"/>
+                  <a:pt x="2292531" y="0"/>
+                </a:cubicBezTo>
+                <a:cubicBezTo>
+                  <a:pt x="2547920" y="12551"/>
+                  <a:pt x="2810436" y="-20352"/>
+                  <a:pt x="2991394" y="0"/>
+                </a:cubicBezTo>
+                <a:cubicBezTo>
+                  <a:pt x="3172352" y="20352"/>
+                  <a:pt x="3530025" y="-13347"/>
+                  <a:pt x="3735977" y="0"/>
+                </a:cubicBezTo>
+                <a:cubicBezTo>
+                  <a:pt x="3941929" y="13347"/>
+                  <a:pt x="4161497" y="34086"/>
+                  <a:pt x="4572000" y="0"/>
+                </a:cubicBezTo>
+                <a:cubicBezTo>
+                  <a:pt x="4571545" y="6162"/>
+                  <a:pt x="4571903" y="11775"/>
+                  <a:pt x="4572000" y="18288"/>
+                </a:cubicBezTo>
+                <a:cubicBezTo>
+                  <a:pt x="4228040" y="36490"/>
+                  <a:pt x="4199736" y="42557"/>
+                  <a:pt x="3873137" y="18288"/>
+                </a:cubicBezTo>
+                <a:cubicBezTo>
+                  <a:pt x="3546538" y="-5981"/>
+                  <a:pt x="3472124" y="16809"/>
+                  <a:pt x="3128554" y="18288"/>
+                </a:cubicBezTo>
+                <a:cubicBezTo>
+                  <a:pt x="2784984" y="19767"/>
+                  <a:pt x="2735896" y="-17781"/>
+                  <a:pt x="2383971" y="18288"/>
+                </a:cubicBezTo>
+                <a:cubicBezTo>
+                  <a:pt x="2032046" y="54357"/>
+                  <a:pt x="2019324" y="2920"/>
+                  <a:pt x="1867989" y="18288"/>
+                </a:cubicBezTo>
+                <a:cubicBezTo>
+                  <a:pt x="1716654" y="33656"/>
+                  <a:pt x="1418675" y="32575"/>
+                  <a:pt x="1169126" y="18288"/>
+                </a:cubicBezTo>
+                <a:cubicBezTo>
+                  <a:pt x="919577" y="4001"/>
+                  <a:pt x="798537" y="16165"/>
+                  <a:pt x="561703" y="18288"/>
+                </a:cubicBezTo>
+                <a:cubicBezTo>
+                  <a:pt x="324869" y="20411"/>
+                  <a:pt x="221395" y="-912"/>
+                  <a:pt x="0" y="18288"/>
+                </a:cubicBezTo>
+                <a:cubicBezTo>
+                  <a:pt x="766" y="10800"/>
+                  <a:pt x="-457" y="8180"/>
+                  <a:pt x="0" y="0"/>
+                </a:cubicBezTo>
+                <a:close/>
+              </a:path>
+            </a:pathLst>
+          </a:custGeom>
+          <a:solidFill>
+            <a:schemeClr val="accent2"/>
+          </a:solidFill>
+          <a:ln w="41275" cap="rnd">
+            <a:solidFill>
+              <a:schemeClr val="accent2"/>
+            </a:solidFill>
+            <a:round/>
+            <a:extLst>
+              <a:ext uri="{C807C97D-BFC1-408E-A445-0C87EB9F89A2}">
+                <ask:lineSketchStyleProps xmlns:ask="http://schemas.microsoft.com/office/drawing/2018/sketchyshapes" sd="2727557108">
+                  <a:prstGeom prst="rect">
+                    <a:avLst/>
+                  </a:prstGeom>
+                  <ask:type>
+                    <ask:lineSketchFreehand/>
+                  </ask:type>
+                </ask:lineSketchStyleProps>
+              </a:ext>
+            </a:extLst>
+          </a:ln>
+        </p:spPr>
+        <p:style>
+          <a:lnRef idx="2">
+            <a:schemeClr val="accent1">
+              <a:shade val="50000"/>
+            </a:schemeClr>
+          </a:lnRef>
+          <a:fillRef idx="1">
+            <a:schemeClr val="accent1"/>
+          </a:fillRef>
+          <a:effectRef idx="0">
+            <a:schemeClr val="accent1"/>
+          </a:effectRef>
+          <a:fontRef idx="minor">
+            <a:schemeClr val="lt1"/>
+          </a:fontRef>
+        </p:style>
+        <p:txBody>
+          <a:bodyPr rtlCol="0" anchor="ctr"/>
+          <a:lstStyle/>
+          <a:p>
+            <a:pPr algn="ctr"/>
+            <a:endParaRPr lang="en-US"/>
+          </a:p>
+        </p:txBody>
+      </p:sp>
+      <p:graphicFrame>
+        <p:nvGraphicFramePr>
+          <p:cNvPr id="6" name="표 5">
+            <a:extLst>
+              <a:ext uri="{FF2B5EF4-FFF2-40B4-BE49-F238E27FC236}">
+                <a16:creationId xmlns:a16="http://schemas.microsoft.com/office/drawing/2014/main" id="{24D4CFB8-7385-FF18-B98C-57DA3D385347}"/>
+              </a:ext>
+            </a:extLst>
+          </p:cNvPr>
+          <p:cNvGraphicFramePr>
+            <a:graphicFrameLocks noGrp="1"/>
+          </p:cNvGraphicFramePr>
+          <p:nvPr>
+            <p:extLst>
+              <p:ext uri="{D42A27DB-BD31-4B8C-83A1-F6EECF244321}">
+                <p14:modId xmlns:p14="http://schemas.microsoft.com/office/powerpoint/2010/main" val="907530159"/>
+              </p:ext>
+            </p:extLst>
+          </p:nvPr>
+        </p:nvGraphicFramePr>
+        <p:xfrm>
+          <a:off x="0" y="1980880"/>
+          <a:ext cx="12192002" cy="4347894"/>
+        </p:xfrm>
+        <a:graphic>
+          <a:graphicData uri="http://schemas.openxmlformats.org/drawingml/2006/table">
+            <a:tbl>
+              <a:tblPr firstRow="1" bandRow="1">
+                <a:tableStyleId>{5C22544A-7EE6-4342-B048-85BDC9FD1C3A}</a:tableStyleId>
+              </a:tblPr>
+              <a:tblGrid>
+                <a:gridCol w="2264495">
+                  <a:extLst>
+                    <a:ext uri="{9D8B030D-6E8A-4147-A177-3AD203B41FA5}">
+                      <a16:colId xmlns:a16="http://schemas.microsoft.com/office/drawing/2014/main" val="3765811720"/>
+                    </a:ext>
+                  </a:extLst>
+                </a:gridCol>
+                <a:gridCol w="3309169">
+                  <a:extLst>
+                    <a:ext uri="{9D8B030D-6E8A-4147-A177-3AD203B41FA5}">
+                      <a16:colId xmlns:a16="http://schemas.microsoft.com/office/drawing/2014/main" val="3950916864"/>
+                    </a:ext>
+                  </a:extLst>
+                </a:gridCol>
+                <a:gridCol w="3309169">
+                  <a:extLst>
+                    <a:ext uri="{9D8B030D-6E8A-4147-A177-3AD203B41FA5}">
+                      <a16:colId xmlns:a16="http://schemas.microsoft.com/office/drawing/2014/main" val="2572552780"/>
+                    </a:ext>
+                  </a:extLst>
+                </a:gridCol>
+                <a:gridCol w="3309169">
+                  <a:extLst>
+                    <a:ext uri="{9D8B030D-6E8A-4147-A177-3AD203B41FA5}">
+                      <a16:colId xmlns:a16="http://schemas.microsoft.com/office/drawing/2014/main" val="1651916683"/>
+                    </a:ext>
+                  </a:extLst>
+                </a:gridCol>
+              </a:tblGrid>
+              <a:tr h="706814">
+                <a:tc>
+                  <a:txBody>
+                    <a:bodyPr/>
+                    <a:lstStyle/>
+                    <a:p>
+                      <a:pPr latinLnBrk="1"/>
+                      <a:r>
+                        <a:rPr lang="ko-KR" altLang="en-US" sz="2700"/>
+                        <a:t>항목</a:t>
+                      </a:r>
+                    </a:p>
+                  </a:txBody>
+                  <a:tcPr marL="143001" marR="143001" marT="71500" marB="71500"/>
+                </a:tc>
+                <a:tc>
+                  <a:txBody>
+                    <a:bodyPr/>
+                    <a:lstStyle/>
+                    <a:p>
+                      <a:pPr latinLnBrk="1"/>
+                      <a:r>
+                        <a:rPr lang="en-US" altLang="ko-KR" sz="2700" dirty="0"/>
+                        <a:t>class</a:t>
+                      </a:r>
+                      <a:endParaRPr lang="ko-KR" altLang="en-US" sz="2700" dirty="0"/>
+                    </a:p>
+                  </a:txBody>
+                  <a:tcPr marL="143001" marR="143001" marT="71500" marB="71500"/>
+                </a:tc>
+                <a:tc>
+                  <a:txBody>
+                    <a:bodyPr/>
+                    <a:lstStyle/>
+                    <a:p>
+                      <a:pPr latinLnBrk="1"/>
+                      <a:r>
+                        <a:rPr lang="en-US" altLang="ko-KR" sz="2700"/>
+                        <a:t>abstract class</a:t>
+                      </a:r>
+                      <a:endParaRPr lang="ko-KR" altLang="en-US" sz="2700"/>
+                    </a:p>
+                  </a:txBody>
+                  <a:tcPr marL="143001" marR="143001" marT="71500" marB="71500"/>
+                </a:tc>
+                <a:tc>
+                  <a:txBody>
+                    <a:bodyPr/>
+                    <a:lstStyle/>
+                    <a:p>
+                      <a:pPr latinLnBrk="1"/>
+                      <a:r>
+                        <a:rPr lang="en-US" altLang="ko-KR" sz="2700"/>
+                        <a:t>interface</a:t>
+                      </a:r>
+                      <a:endParaRPr lang="ko-KR" altLang="en-US" sz="2700"/>
+                    </a:p>
+                  </a:txBody>
+                  <a:tcPr marL="143001" marR="143001" marT="71500" marB="71500"/>
+                </a:tc>
+                <a:extLst>
+                  <a:ext uri="{0D108BD9-81ED-4DB2-BD59-A6C34878D82A}">
+                    <a16:rowId xmlns:a16="http://schemas.microsoft.com/office/drawing/2014/main" val="2546241973"/>
+                  </a:ext>
+                </a:extLst>
+              </a:tr>
+              <a:tr h="545033">
+                <a:tc>
+                  <a:txBody>
+                    <a:bodyPr/>
+                    <a:lstStyle/>
+                    <a:p>
+                      <a:pPr latinLnBrk="1"/>
+                      <a:r>
+                        <a:rPr lang="ko-KR" altLang="en-US" sz="2500" dirty="0"/>
+                        <a:t>멤버 기본 접근</a:t>
+                      </a:r>
+                    </a:p>
+                  </a:txBody>
+                  <a:tcPr marL="143001" marR="143001" marT="71500" marB="71500"/>
+                </a:tc>
+                <a:tc>
+                  <a:txBody>
+                    <a:bodyPr/>
+                    <a:lstStyle/>
+                    <a:p>
+                      <a:pPr latinLnBrk="1"/>
+                      <a:r>
+                        <a:rPr lang="en-US" altLang="ko-KR" sz="2300" dirty="0"/>
+                        <a:t>private</a:t>
+                      </a:r>
+                      <a:endParaRPr lang="ko-KR" altLang="en-US" sz="2300" dirty="0"/>
+                    </a:p>
+                  </a:txBody>
+                  <a:tcPr marL="143001" marR="143001" marT="71500" marB="71500"/>
+                </a:tc>
+                <a:tc>
+                  <a:txBody>
+                    <a:bodyPr/>
+                    <a:lstStyle/>
+                    <a:p>
+                      <a:pPr marL="0" indent="0" latinLnBrk="1">
+                        <a:buFontTx/>
+                        <a:buNone/>
+                      </a:pPr>
+                      <a:r>
+                        <a:rPr lang="en-US" altLang="ko-KR" sz="2300" dirty="0"/>
+                        <a:t>private</a:t>
+                      </a:r>
+                      <a:endParaRPr lang="ko-KR" altLang="en-US" sz="2300" dirty="0"/>
+                    </a:p>
+                  </a:txBody>
+                  <a:tcPr marL="143001" marR="143001" marT="71500" marB="71500"/>
+                </a:tc>
+                <a:tc>
+                  <a:txBody>
+                    <a:bodyPr/>
+                    <a:lstStyle/>
+                    <a:p>
+                      <a:pPr marL="0" indent="0" latinLnBrk="1">
+                        <a:buFont typeface="Arial" panose="020B0604020202020204" pitchFamily="34" charset="0"/>
+                        <a:buNone/>
+                      </a:pPr>
+                      <a:r>
+                        <a:rPr lang="en-US" altLang="ko-KR" sz="2300" dirty="0"/>
+                        <a:t>public</a:t>
+                      </a:r>
+                      <a:endParaRPr lang="ko-KR" altLang="en-US" sz="2300" dirty="0"/>
+                    </a:p>
+                  </a:txBody>
+                  <a:tcPr marL="143001" marR="143001" marT="71500" marB="71500"/>
+                </a:tc>
+                <a:extLst>
+                  <a:ext uri="{0D108BD9-81ED-4DB2-BD59-A6C34878D82A}">
+                    <a16:rowId xmlns:a16="http://schemas.microsoft.com/office/drawing/2014/main" val="2341514354"/>
+                  </a:ext>
+                </a:extLst>
+              </a:tr>
+              <a:tr h="374806">
+                <a:tc>
+                  <a:txBody>
+                    <a:bodyPr/>
+                    <a:lstStyle/>
+                    <a:p>
+                      <a:pPr latinLnBrk="1"/>
+                      <a:r>
+                        <a:rPr lang="ko-KR" altLang="en-US" sz="2500"/>
+                        <a:t>필드</a:t>
+                      </a:r>
+                    </a:p>
+                  </a:txBody>
+                  <a:tcPr marL="143001" marR="143001" marT="71500" marB="71500"/>
+                </a:tc>
+                <a:tc>
+                  <a:txBody>
+                    <a:bodyPr/>
+                    <a:lstStyle/>
+                    <a:p>
+                      <a:pPr marL="0" indent="0" latinLnBrk="1">
+                        <a:buFont typeface="Arial" panose="020B0604020202020204" pitchFamily="34" charset="0"/>
+                        <a:buNone/>
+                      </a:pPr>
+                      <a:r>
+                        <a:rPr lang="ko-KR" altLang="en-US" sz="2300" dirty="0"/>
+                        <a:t>일반</a:t>
+                      </a:r>
+                      <a:r>
+                        <a:rPr lang="en-US" altLang="ko-KR" sz="2300" dirty="0"/>
+                        <a:t>/static</a:t>
+                      </a:r>
+                      <a:r>
+                        <a:rPr lang="ko-KR" altLang="en-US" sz="2300" dirty="0"/>
+                        <a:t> 필드</a:t>
+                      </a:r>
+                      <a:r>
+                        <a:rPr lang="en-US" altLang="ko-KR" sz="2300" dirty="0"/>
+                        <a:t>, </a:t>
+                      </a:r>
+                      <a:r>
+                        <a:rPr lang="ko-KR" altLang="en-US" sz="2300" dirty="0"/>
+                        <a:t>일반</a:t>
+                      </a:r>
+                      <a:r>
+                        <a:rPr lang="en-US" altLang="ko-KR" sz="2300" dirty="0"/>
+                        <a:t>/static</a:t>
+                      </a:r>
+                      <a:r>
+                        <a:rPr lang="ko-KR" altLang="en-US" sz="2300" dirty="0"/>
+                        <a:t> 상수</a:t>
+                      </a:r>
+                    </a:p>
+                  </a:txBody>
+                  <a:tcPr marL="143001" marR="143001" marT="71500" marB="71500"/>
+                </a:tc>
+                <a:tc>
+                  <a:txBody>
+                    <a:bodyPr/>
+                    <a:lstStyle/>
+                    <a:p>
+                      <a:pPr marL="0" marR="0" lvl="0" indent="0" algn="l" defTabSz="914400" rtl="0" eaLnBrk="1" fontAlgn="auto" latinLnBrk="1" hangingPunct="1">
+                        <a:lnSpc>
+                          <a:spcPct val="100000"/>
+                        </a:lnSpc>
+                        <a:spcBef>
+                          <a:spcPts val="0"/>
+                        </a:spcBef>
+                        <a:spcAft>
+                          <a:spcPts val="0"/>
+                        </a:spcAft>
+                        <a:buClrTx/>
+                        <a:buSzTx/>
+                        <a:buFont typeface="Arial" panose="020B0604020202020204" pitchFamily="34" charset="0"/>
+                        <a:buNone/>
+                        <a:tabLst/>
+                        <a:defRPr/>
+                      </a:pPr>
+                      <a:r>
+                        <a:rPr lang="ko-KR" altLang="en-US" sz="2300" dirty="0"/>
+                        <a:t>일반</a:t>
+                      </a:r>
+                      <a:r>
+                        <a:rPr lang="en-US" altLang="ko-KR" sz="2300" dirty="0"/>
+                        <a:t>/static</a:t>
+                      </a:r>
+                      <a:r>
+                        <a:rPr lang="ko-KR" altLang="en-US" sz="2300" dirty="0"/>
+                        <a:t> 필드</a:t>
+                      </a:r>
+                      <a:r>
+                        <a:rPr lang="en-US" altLang="ko-KR" sz="2300" dirty="0"/>
+                        <a:t>, </a:t>
+                      </a:r>
+                      <a:r>
+                        <a:rPr lang="ko-KR" altLang="en-US" sz="2300" dirty="0"/>
+                        <a:t>일반</a:t>
+                      </a:r>
+                      <a:r>
+                        <a:rPr lang="en-US" altLang="ko-KR" sz="2300" dirty="0"/>
+                        <a:t>/static</a:t>
+                      </a:r>
+                      <a:r>
+                        <a:rPr lang="ko-KR" altLang="en-US" sz="2300" dirty="0"/>
+                        <a:t> 상수</a:t>
+                      </a:r>
+                    </a:p>
+                  </a:txBody>
+                  <a:tcPr marL="143001" marR="143001" marT="71500" marB="71500"/>
+                </a:tc>
+                <a:tc>
+                  <a:txBody>
+                    <a:bodyPr/>
+                    <a:lstStyle/>
+                    <a:p>
+                      <a:pPr marL="0" marR="0" lvl="0" indent="0" algn="l" defTabSz="914400" rtl="0" eaLnBrk="1" fontAlgn="auto" latinLnBrk="1" hangingPunct="1">
+                        <a:lnSpc>
+                          <a:spcPct val="100000"/>
+                        </a:lnSpc>
+                        <a:spcBef>
+                          <a:spcPts val="0"/>
+                        </a:spcBef>
+                        <a:spcAft>
+                          <a:spcPts val="0"/>
+                        </a:spcAft>
+                        <a:buClrTx/>
+                        <a:buSzTx/>
+                        <a:buFont typeface="Arial" panose="020B0604020202020204" pitchFamily="34" charset="0"/>
+                        <a:buNone/>
+                        <a:tabLst/>
+                        <a:defRPr/>
+                      </a:pPr>
+                      <a:r>
+                        <a:rPr lang="en-US" altLang="ko-KR" sz="2300" dirty="0"/>
+                        <a:t>static</a:t>
+                      </a:r>
+                      <a:r>
+                        <a:rPr lang="ko-KR" altLang="en-US" sz="2300" dirty="0"/>
+                        <a:t> 필드</a:t>
+                      </a:r>
+                      <a:r>
+                        <a:rPr lang="en-US" altLang="ko-KR" sz="2300" dirty="0"/>
+                        <a:t>, static</a:t>
+                      </a:r>
+                      <a:r>
+                        <a:rPr lang="ko-KR" altLang="en-US" sz="2300" dirty="0"/>
+                        <a:t> 상수</a:t>
+                      </a:r>
+                    </a:p>
+                  </a:txBody>
+                  <a:tcPr marL="143001" marR="143001" marT="71500" marB="71500"/>
+                </a:tc>
+                <a:extLst>
+                  <a:ext uri="{0D108BD9-81ED-4DB2-BD59-A6C34878D82A}">
+                    <a16:rowId xmlns:a16="http://schemas.microsoft.com/office/drawing/2014/main" val="3577942020"/>
+                  </a:ext>
+                </a:extLst>
+              </a:tr>
+              <a:tr h="0">
+                <a:tc>
+                  <a:txBody>
+                    <a:bodyPr/>
+                    <a:lstStyle/>
+                    <a:p>
+                      <a:pPr latinLnBrk="1"/>
+                      <a:r>
+                        <a:rPr lang="ko-KR" altLang="en-US" sz="2500" dirty="0"/>
+                        <a:t>메소드</a:t>
+                      </a:r>
+                    </a:p>
+                  </a:txBody>
+                  <a:tcPr marL="143001" marR="143001" marT="71500" marB="71500"/>
+                </a:tc>
+                <a:tc>
+                  <a:txBody>
+                    <a:bodyPr/>
+                    <a:lstStyle/>
+                    <a:p>
+                      <a:pPr marL="0" indent="0" latinLnBrk="1">
+                        <a:buFont typeface="Arial" panose="020B0604020202020204" pitchFamily="34" charset="0"/>
+                        <a:buNone/>
+                      </a:pPr>
+                      <a:r>
+                        <a:rPr lang="ko-KR" altLang="en-US" sz="2300" dirty="0"/>
+                        <a:t>일반</a:t>
+                      </a:r>
+                      <a:r>
+                        <a:rPr lang="en-US" altLang="ko-KR" sz="2300" dirty="0"/>
+                        <a:t>/static </a:t>
+                      </a:r>
+                      <a:r>
+                        <a:rPr lang="ko-KR" altLang="en-US" sz="2300" dirty="0"/>
+                        <a:t>메소드</a:t>
+                      </a:r>
+                    </a:p>
+                  </a:txBody>
+                  <a:tcPr marL="143001" marR="143001" marT="71500" marB="71500"/>
+                </a:tc>
+                <a:tc>
+                  <a:txBody>
+                    <a:bodyPr/>
+                    <a:lstStyle/>
+                    <a:p>
+                      <a:pPr marL="0" marR="0" lvl="0" indent="0" algn="l" defTabSz="914400" rtl="0" eaLnBrk="1" fontAlgn="auto" latinLnBrk="1" hangingPunct="1">
+                        <a:lnSpc>
+                          <a:spcPct val="100000"/>
+                        </a:lnSpc>
+                        <a:spcBef>
+                          <a:spcPts val="0"/>
+                        </a:spcBef>
+                        <a:spcAft>
+                          <a:spcPts val="0"/>
+                        </a:spcAft>
+                        <a:buClrTx/>
+                        <a:buSzTx/>
+                        <a:buFont typeface="Arial" panose="020B0604020202020204" pitchFamily="34" charset="0"/>
+                        <a:buNone/>
+                        <a:tabLst/>
+                        <a:defRPr/>
+                      </a:pPr>
+                      <a:r>
+                        <a:rPr lang="ko-KR" altLang="en-US" sz="2300" dirty="0"/>
+                        <a:t>일반</a:t>
+                      </a:r>
+                      <a:r>
+                        <a:rPr lang="en-US" altLang="ko-KR" sz="2300" dirty="0"/>
+                        <a:t>/static/</a:t>
+                      </a:r>
+                      <a:r>
+                        <a:rPr lang="ko-KR" altLang="en-US" sz="2300" dirty="0"/>
+                        <a:t>추상</a:t>
+                      </a:r>
+                      <a:r>
+                        <a:rPr lang="en-US" altLang="ko-KR" sz="2300" dirty="0"/>
+                        <a:t> </a:t>
+                      </a:r>
+                      <a:r>
+                        <a:rPr lang="ko-KR" altLang="en-US" sz="2300" dirty="0"/>
+                        <a:t>메소드</a:t>
+                      </a:r>
+                      <a:r>
+                        <a:rPr lang="en-US" altLang="ko-KR" sz="2300" dirty="0"/>
+                        <a:t>(abstract </a:t>
+                      </a:r>
+                      <a:r>
+                        <a:rPr lang="ko-KR" altLang="en-US" sz="2300" dirty="0"/>
+                        <a:t>필요</a:t>
+                      </a:r>
+                      <a:r>
+                        <a:rPr lang="en-US" altLang="ko-KR" sz="2300" dirty="0"/>
+                        <a:t>)</a:t>
+                      </a:r>
+                      <a:endParaRPr lang="ko-KR" altLang="en-US" sz="2300" dirty="0"/>
+                    </a:p>
+                  </a:txBody>
+                  <a:tcPr marL="143001" marR="143001" marT="71500" marB="71500"/>
+                </a:tc>
+                <a:tc>
+                  <a:txBody>
+                    <a:bodyPr/>
+                    <a:lstStyle/>
+                    <a:p>
+                      <a:pPr marL="0" marR="0" lvl="0" indent="0" algn="l" defTabSz="914400" rtl="0" eaLnBrk="1" fontAlgn="auto" latinLnBrk="1" hangingPunct="1">
+                        <a:lnSpc>
+                          <a:spcPct val="100000"/>
+                        </a:lnSpc>
+                        <a:spcBef>
+                          <a:spcPts val="0"/>
+                        </a:spcBef>
+                        <a:spcAft>
+                          <a:spcPts val="0"/>
+                        </a:spcAft>
+                        <a:buClrTx/>
+                        <a:buSzTx/>
+                        <a:buFont typeface="Arial" panose="020B0604020202020204" pitchFamily="34" charset="0"/>
+                        <a:buNone/>
+                        <a:tabLst/>
+                        <a:defRPr/>
+                      </a:pPr>
+                      <a:r>
+                        <a:rPr lang="ko-KR" altLang="en-US" sz="2300" dirty="0"/>
+                        <a:t>일반</a:t>
+                      </a:r>
+                      <a:r>
+                        <a:rPr lang="en-US" altLang="ko-KR" sz="2300" dirty="0"/>
+                        <a:t>/static/</a:t>
+                      </a:r>
+                      <a:r>
+                        <a:rPr lang="ko-KR" altLang="en-US" sz="2300" dirty="0"/>
+                        <a:t>추상 메소드</a:t>
+                      </a:r>
+                      <a:r>
+                        <a:rPr lang="en-US" altLang="ko-KR" sz="2300" dirty="0"/>
+                        <a:t>(abstract </a:t>
+                      </a:r>
+                      <a:r>
+                        <a:rPr lang="ko-KR" altLang="en-US" sz="2300" dirty="0"/>
+                        <a:t>불필요</a:t>
+                      </a:r>
+                      <a:r>
+                        <a:rPr lang="en-US" altLang="ko-KR" sz="2300" dirty="0"/>
+                        <a:t>)</a:t>
+                      </a:r>
+                      <a:endParaRPr lang="ko-KR" altLang="en-US" sz="2300" dirty="0"/>
+                    </a:p>
+                  </a:txBody>
+                  <a:tcPr marL="143001" marR="143001" marT="71500" marB="71500"/>
+                </a:tc>
+                <a:extLst>
+                  <a:ext uri="{0D108BD9-81ED-4DB2-BD59-A6C34878D82A}">
+                    <a16:rowId xmlns:a16="http://schemas.microsoft.com/office/drawing/2014/main" val="221831153"/>
+                  </a:ext>
+                </a:extLst>
+              </a:tr>
+              <a:tr h="0">
+                <a:tc>
+                  <a:txBody>
+                    <a:bodyPr/>
+                    <a:lstStyle/>
+                    <a:p>
+                      <a:pPr latinLnBrk="1"/>
+                      <a:r>
+                        <a:rPr lang="ko-KR" altLang="en-US" sz="2500" dirty="0"/>
+                        <a:t>생성자</a:t>
+                      </a:r>
+                    </a:p>
+                  </a:txBody>
+                  <a:tcPr marL="143001" marR="143001" marT="71500" marB="71500"/>
+                </a:tc>
+                <a:tc>
+                  <a:txBody>
+                    <a:bodyPr/>
+                    <a:lstStyle/>
+                    <a:p>
+                      <a:pPr marL="0" indent="0" latinLnBrk="1">
+                        <a:buFont typeface="Arial" panose="020B0604020202020204" pitchFamily="34" charset="0"/>
+                        <a:buNone/>
+                      </a:pPr>
+                      <a:r>
+                        <a:rPr lang="ko-KR" altLang="en-US" sz="2300" dirty="0"/>
+                        <a:t>가능</a:t>
+                      </a:r>
+                    </a:p>
+                  </a:txBody>
+                  <a:tcPr marL="143001" marR="143001" marT="71500" marB="71500"/>
+                </a:tc>
+                <a:tc>
+                  <a:txBody>
+                    <a:bodyPr/>
+                    <a:lstStyle/>
+                    <a:p>
+                      <a:pPr marL="0" marR="0" lvl="0" indent="0" algn="l" defTabSz="914400" rtl="0" eaLnBrk="1" fontAlgn="auto" latinLnBrk="1" hangingPunct="1">
+                        <a:lnSpc>
+                          <a:spcPct val="100000"/>
+                        </a:lnSpc>
+                        <a:spcBef>
+                          <a:spcPts val="0"/>
+                        </a:spcBef>
+                        <a:spcAft>
+                          <a:spcPts val="0"/>
+                        </a:spcAft>
+                        <a:buClrTx/>
+                        <a:buSzTx/>
+                        <a:buFont typeface="Arial" panose="020B0604020202020204" pitchFamily="34" charset="0"/>
+                        <a:buNone/>
+                        <a:tabLst/>
+                        <a:defRPr/>
+                      </a:pPr>
+                      <a:r>
+                        <a:rPr lang="ko-KR" altLang="en-US" sz="2300" dirty="0"/>
+                        <a:t>가능</a:t>
+                      </a:r>
+                    </a:p>
+                  </a:txBody>
+                  <a:tcPr marL="143001" marR="143001" marT="71500" marB="71500"/>
+                </a:tc>
+                <a:tc>
+                  <a:txBody>
+                    <a:bodyPr/>
+                    <a:lstStyle/>
+                    <a:p>
+                      <a:pPr marL="0" marR="0" lvl="0" indent="0" algn="l" defTabSz="914400" rtl="0" eaLnBrk="1" fontAlgn="auto" latinLnBrk="1" hangingPunct="1">
+                        <a:lnSpc>
+                          <a:spcPct val="100000"/>
+                        </a:lnSpc>
+                        <a:spcBef>
+                          <a:spcPts val="0"/>
+                        </a:spcBef>
+                        <a:spcAft>
+                          <a:spcPts val="0"/>
+                        </a:spcAft>
+                        <a:buClrTx/>
+                        <a:buSzTx/>
+                        <a:buFont typeface="Arial" panose="020B0604020202020204" pitchFamily="34" charset="0"/>
+                        <a:buNone/>
+                        <a:tabLst/>
+                        <a:defRPr/>
+                      </a:pPr>
+                      <a:r>
+                        <a:rPr lang="ko-KR" altLang="en-US" sz="2300" dirty="0"/>
+                        <a:t>불가능</a:t>
+                      </a:r>
+                    </a:p>
+                  </a:txBody>
+                  <a:tcPr marL="143001" marR="143001" marT="71500" marB="71500"/>
+                </a:tc>
+                <a:extLst>
+                  <a:ext uri="{0D108BD9-81ED-4DB2-BD59-A6C34878D82A}">
+                    <a16:rowId xmlns:a16="http://schemas.microsoft.com/office/drawing/2014/main" val="1845546096"/>
+                  </a:ext>
+                </a:extLst>
+              </a:tr>
+              <a:tr h="0">
+                <a:tc>
+                  <a:txBody>
+                    <a:bodyPr/>
+                    <a:lstStyle/>
+                    <a:p>
+                      <a:pPr latinLnBrk="1"/>
+                      <a:r>
+                        <a:rPr lang="ko-KR" altLang="en-US" sz="2500" dirty="0"/>
+                        <a:t>인스턴스</a:t>
+                      </a:r>
+                    </a:p>
+                  </a:txBody>
+                  <a:tcPr marL="143001" marR="143001" marT="71500" marB="71500"/>
+                </a:tc>
+                <a:tc>
+                  <a:txBody>
+                    <a:bodyPr/>
+                    <a:lstStyle/>
+                    <a:p>
+                      <a:pPr marL="0" indent="0" latinLnBrk="1">
+                        <a:buFont typeface="Arial" panose="020B0604020202020204" pitchFamily="34" charset="0"/>
+                        <a:buNone/>
+                      </a:pPr>
+                      <a:r>
+                        <a:rPr lang="ko-KR" altLang="en-US" sz="2300" dirty="0"/>
+                        <a:t>가능</a:t>
+                      </a:r>
+                    </a:p>
+                  </a:txBody>
+                  <a:tcPr marL="143001" marR="143001" marT="71500" marB="71500"/>
+                </a:tc>
+                <a:tc>
+                  <a:txBody>
+                    <a:bodyPr/>
+                    <a:lstStyle/>
+                    <a:p>
+                      <a:pPr marL="0" marR="0" lvl="0" indent="0" algn="l" defTabSz="914400" rtl="0" eaLnBrk="1" fontAlgn="auto" latinLnBrk="1" hangingPunct="1">
+                        <a:lnSpc>
+                          <a:spcPct val="100000"/>
+                        </a:lnSpc>
+                        <a:spcBef>
+                          <a:spcPts val="0"/>
+                        </a:spcBef>
+                        <a:spcAft>
+                          <a:spcPts val="0"/>
+                        </a:spcAft>
+                        <a:buClrTx/>
+                        <a:buSzTx/>
+                        <a:buFont typeface="Arial" panose="020B0604020202020204" pitchFamily="34" charset="0"/>
+                        <a:buNone/>
+                        <a:tabLst/>
+                        <a:defRPr/>
+                      </a:pPr>
+                      <a:r>
+                        <a:rPr lang="ko-KR" altLang="en-US" sz="2300" dirty="0"/>
+                        <a:t>불가능</a:t>
+                      </a:r>
+                    </a:p>
+                  </a:txBody>
+                  <a:tcPr marL="143001" marR="143001" marT="71500" marB="71500"/>
+                </a:tc>
+                <a:tc>
+                  <a:txBody>
+                    <a:bodyPr/>
+                    <a:lstStyle/>
+                    <a:p>
+                      <a:pPr marL="0" marR="0" lvl="0" indent="0" algn="l" defTabSz="914400" rtl="0" eaLnBrk="1" fontAlgn="auto" latinLnBrk="1" hangingPunct="1">
+                        <a:lnSpc>
+                          <a:spcPct val="100000"/>
+                        </a:lnSpc>
+                        <a:spcBef>
+                          <a:spcPts val="0"/>
+                        </a:spcBef>
+                        <a:spcAft>
+                          <a:spcPts val="0"/>
+                        </a:spcAft>
+                        <a:buClrTx/>
+                        <a:buSzTx/>
+                        <a:buFont typeface="Arial" panose="020B0604020202020204" pitchFamily="34" charset="0"/>
+                        <a:buNone/>
+                        <a:tabLst/>
+                        <a:defRPr/>
+                      </a:pPr>
+                      <a:r>
+                        <a:rPr lang="ko-KR" altLang="en-US" sz="2300" dirty="0"/>
+                        <a:t>불가능</a:t>
+                      </a:r>
+                    </a:p>
+                  </a:txBody>
+                  <a:tcPr marL="143001" marR="143001" marT="71500" marB="71500"/>
+                </a:tc>
+                <a:extLst>
+                  <a:ext uri="{0D108BD9-81ED-4DB2-BD59-A6C34878D82A}">
+                    <a16:rowId xmlns:a16="http://schemas.microsoft.com/office/drawing/2014/main" val="493447110"/>
+                  </a:ext>
+                </a:extLst>
+              </a:tr>
+            </a:tbl>
+          </a:graphicData>
+        </a:graphic>
+      </p:graphicFrame>
+    </p:spTree>
+    <p:extLst>
+      <p:ext uri="{BB962C8B-B14F-4D97-AF65-F5344CB8AC3E}">
+        <p14:creationId xmlns:p14="http://schemas.microsoft.com/office/powerpoint/2010/main" val="2170153467"/>
       </p:ext>
     </p:extLst>
   </p:cSld>
@@ -32468,14 +34232,14 @@
           <p:nvPr>
             <p:extLst>
               <p:ext uri="{D42A27DB-BD31-4B8C-83A1-F6EECF244321}">
-                <p14:modId xmlns:p14="http://schemas.microsoft.com/office/powerpoint/2010/main" val="2153809950"/>
+                <p14:modId xmlns:p14="http://schemas.microsoft.com/office/powerpoint/2010/main" val="362966788"/>
               </p:ext>
             </p:extLst>
           </p:nvPr>
         </p:nvGraphicFramePr>
         <p:xfrm>
-          <a:off x="498764" y="2817304"/>
-          <a:ext cx="11443854" cy="3218688"/>
+          <a:off x="96253" y="2417065"/>
+          <a:ext cx="12002704" cy="4297770"/>
         </p:xfrm>
         <a:graphic>
           <a:graphicData uri="http://schemas.openxmlformats.org/drawingml/2006/table">
@@ -32484,21 +34248,21 @@
                 <a:tableStyleId>{5C22544A-7EE6-4342-B048-85BDC9FD1C3A}</a:tableStyleId>
               </a:tblPr>
               <a:tblGrid>
-                <a:gridCol w="1700121">
+                <a:gridCol w="2634977">
                   <a:extLst>
                     <a:ext uri="{9D8B030D-6E8A-4147-A177-3AD203B41FA5}">
                       <a16:colId xmlns:a16="http://schemas.microsoft.com/office/drawing/2014/main" val="3765811720"/>
                     </a:ext>
                   </a:extLst>
                 </a:gridCol>
-                <a:gridCol w="2199321">
+                <a:gridCol w="2654351">
                   <a:extLst>
                     <a:ext uri="{9D8B030D-6E8A-4147-A177-3AD203B41FA5}">
                       <a16:colId xmlns:a16="http://schemas.microsoft.com/office/drawing/2014/main" val="3950916864"/>
                     </a:ext>
                   </a:extLst>
                 </a:gridCol>
-                <a:gridCol w="7544412">
+                <a:gridCol w="6713376">
                   <a:extLst>
                     <a:ext uri="{9D8B030D-6E8A-4147-A177-3AD203B41FA5}">
                       <a16:colId xmlns:a16="http://schemas.microsoft.com/office/drawing/2014/main" val="2572552780"/>
@@ -32506,7 +34270,7 @@
                   </a:extLst>
                 </a:gridCol>
               </a:tblGrid>
-              <a:tr h="737616">
+              <a:tr h="675364">
                 <a:tc>
                   <a:txBody>
                     <a:bodyPr/>
@@ -32514,7 +34278,7 @@
                     <a:p>
                       <a:pPr latinLnBrk="1"/>
                       <a:r>
-                        <a:rPr lang="ko-KR" altLang="en-US" sz="3300"/>
+                        <a:rPr lang="ko-KR" altLang="en-US" sz="3300" dirty="0"/>
                         <a:t>속성</a:t>
                       </a:r>
                     </a:p>
@@ -32528,10 +34292,10 @@
                     <a:p>
                       <a:pPr latinLnBrk="1"/>
                       <a:r>
-                        <a:rPr lang="en-US" altLang="ko-KR" sz="3300"/>
+                        <a:rPr lang="en-US" altLang="ko-KR" sz="3300" dirty="0"/>
                         <a:t>struct</a:t>
                       </a:r>
-                      <a:endParaRPr lang="ko-KR" altLang="en-US" sz="3300"/>
+                      <a:endParaRPr lang="ko-KR" altLang="en-US" sz="3300" dirty="0"/>
                     </a:p>
                   </a:txBody>
                   <a:tcPr marL="167640" marR="167640" marT="83820" marB="83820"/>
@@ -32543,10 +34307,10 @@
                     <a:p>
                       <a:pPr latinLnBrk="1"/>
                       <a:r>
-                        <a:rPr lang="en-US" altLang="ko-KR" sz="3300"/>
+                        <a:rPr lang="en-US" altLang="ko-KR" sz="3300" dirty="0"/>
                         <a:t>class</a:t>
                       </a:r>
-                      <a:endParaRPr lang="ko-KR" altLang="en-US" sz="3300"/>
+                      <a:endParaRPr lang="ko-KR" altLang="en-US" sz="3300" dirty="0"/>
                     </a:p>
                   </a:txBody>
                   <a:tcPr marL="167640" marR="167640" marT="83820" marB="83820"/>
@@ -32557,7 +34321,7 @@
                   </a:ext>
                 </a:extLst>
               </a:tr>
-              <a:tr h="737616">
+              <a:tr h="675364">
                 <a:tc>
                   <a:txBody>
                     <a:bodyPr/>
@@ -32565,7 +34329,109 @@
                     <a:p>
                       <a:pPr latinLnBrk="1"/>
                       <a:r>
-                        <a:rPr lang="ko-KR" altLang="en-US" sz="3300"/>
+                        <a:rPr lang="ko-KR" altLang="en-US" sz="2600" dirty="0"/>
+                        <a:t>멤버 기본 접근</a:t>
+                      </a:r>
+                    </a:p>
+                  </a:txBody>
+                  <a:tcPr marL="167640" marR="167640" marT="83820" marB="83820"/>
+                </a:tc>
+                <a:tc>
+                  <a:txBody>
+                    <a:bodyPr/>
+                    <a:lstStyle/>
+                    <a:p>
+                      <a:pPr latinLnBrk="1"/>
+                      <a:r>
+                        <a:rPr lang="en-US" altLang="ko-KR" sz="3300" dirty="0"/>
+                        <a:t>private</a:t>
+                      </a:r>
+                      <a:endParaRPr lang="ko-KR" altLang="en-US" sz="3300" dirty="0"/>
+                    </a:p>
+                  </a:txBody>
+                  <a:tcPr marL="167640" marR="167640" marT="83820" marB="83820"/>
+                </a:tc>
+                <a:tc>
+                  <a:txBody>
+                    <a:bodyPr/>
+                    <a:lstStyle/>
+                    <a:p>
+                      <a:pPr latinLnBrk="1"/>
+                      <a:r>
+                        <a:rPr lang="en-US" altLang="ko-KR" sz="3300" dirty="0"/>
+                        <a:t>private</a:t>
+                      </a:r>
+                      <a:endParaRPr lang="ko-KR" altLang="en-US" sz="3300" dirty="0"/>
+                    </a:p>
+                  </a:txBody>
+                  <a:tcPr marL="167640" marR="167640" marT="83820" marB="83820"/>
+                </a:tc>
+                <a:extLst>
+                  <a:ext uri="{0D108BD9-81ED-4DB2-BD59-A6C34878D82A}">
+                    <a16:rowId xmlns:a16="http://schemas.microsoft.com/office/drawing/2014/main" val="567827054"/>
+                  </a:ext>
+                </a:extLst>
+              </a:tr>
+              <a:tr h="675364">
+                <a:tc>
+                  <a:txBody>
+                    <a:bodyPr/>
+                    <a:lstStyle/>
+                    <a:p>
+                      <a:pPr latinLnBrk="1"/>
+                      <a:r>
+                        <a:rPr lang="ko-KR" altLang="en-US" sz="2600" dirty="0"/>
+                        <a:t>객체 기본 접근</a:t>
+                      </a:r>
+                    </a:p>
+                  </a:txBody>
+                  <a:tcPr marL="167640" marR="167640" marT="83820" marB="83820"/>
+                </a:tc>
+                <a:tc>
+                  <a:txBody>
+                    <a:bodyPr/>
+                    <a:lstStyle/>
+                    <a:p>
+                      <a:pPr latinLnBrk="1"/>
+                      <a:r>
+                        <a:rPr lang="en-US" altLang="ko-KR" sz="3300" dirty="0"/>
+                        <a:t>internal</a:t>
+                      </a:r>
+                      <a:endParaRPr lang="ko-KR" altLang="en-US" sz="3300" dirty="0"/>
+                    </a:p>
+                  </a:txBody>
+                  <a:tcPr marL="167640" marR="167640" marT="83820" marB="83820"/>
+                </a:tc>
+                <a:tc>
+                  <a:txBody>
+                    <a:bodyPr/>
+                    <a:lstStyle/>
+                    <a:p>
+                      <a:pPr latinLnBrk="1"/>
+                      <a:r>
+                        <a:rPr lang="en-US" altLang="ko-KR" sz="3300" dirty="0"/>
+                        <a:t>internal</a:t>
+                      </a:r>
+                      <a:endParaRPr lang="ko-KR" altLang="en-US" sz="3300" dirty="0"/>
+                    </a:p>
+                  </a:txBody>
+                  <a:tcPr marL="167640" marR="167640" marT="83820" marB="83820"/>
+                </a:tc>
+                <a:extLst>
+                  <a:ext uri="{0D108BD9-81ED-4DB2-BD59-A6C34878D82A}">
+                    <a16:rowId xmlns:a16="http://schemas.microsoft.com/office/drawing/2014/main" val="3793880659"/>
+                  </a:ext>
+                </a:extLst>
+              </a:tr>
+              <a:tr h="675364">
+                <a:tc>
+                  <a:txBody>
+                    <a:bodyPr/>
+                    <a:lstStyle/>
+                    <a:p>
+                      <a:pPr latinLnBrk="1"/>
+                      <a:r>
+                        <a:rPr lang="ko-KR" altLang="en-US" sz="3300" dirty="0"/>
                         <a:t>할당</a:t>
                       </a:r>
                     </a:p>
@@ -32579,10 +34445,10 @@
                     <a:p>
                       <a:pPr latinLnBrk="1"/>
                       <a:r>
-                        <a:rPr lang="en-US" altLang="ko-KR" sz="3300"/>
+                        <a:rPr lang="en-US" altLang="ko-KR" sz="3300" dirty="0"/>
                         <a:t>value</a:t>
                       </a:r>
-                      <a:endParaRPr lang="ko-KR" altLang="en-US" sz="3300"/>
+                      <a:endParaRPr lang="ko-KR" altLang="en-US" sz="3300" dirty="0"/>
                     </a:p>
                   </a:txBody>
                   <a:tcPr marL="167640" marR="167640" marT="83820" marB="83820"/>
@@ -32608,7 +34474,7 @@
                   </a:ext>
                 </a:extLst>
               </a:tr>
-              <a:tr h="1743456">
+              <a:tr h="1596314">
                 <a:tc>
                   <a:txBody>
                     <a:bodyPr/>
@@ -32616,7 +34482,7 @@
                     <a:p>
                       <a:pPr latinLnBrk="1"/>
                       <a:r>
-                        <a:rPr lang="ko-KR" altLang="en-US" sz="3300"/>
+                        <a:rPr lang="ko-KR" altLang="en-US" sz="3300" dirty="0"/>
                         <a:t>상속</a:t>
                       </a:r>
                     </a:p>
@@ -32647,18 +34513,18 @@
                         <a:buChar char="•"/>
                       </a:pPr>
                       <a:r>
-                        <a:rPr lang="ko-KR" altLang="en-US" sz="3300" dirty="0"/>
+                        <a:rPr lang="ko-KR" altLang="en-US" sz="2800" dirty="0"/>
                         <a:t>자식</a:t>
                       </a:r>
                       <a:r>
-                        <a:rPr lang="en-US" altLang="ko-KR" sz="3300" dirty="0"/>
+                        <a:rPr lang="en-US" altLang="ko-KR" sz="2800" dirty="0"/>
                         <a:t>, </a:t>
                       </a:r>
                       <a:r>
-                        <a:rPr lang="ko-KR" altLang="en-US" sz="3300" dirty="0"/>
+                        <a:rPr lang="ko-KR" altLang="en-US" sz="2800" dirty="0"/>
                         <a:t>손자 등등 지속적인 상속 가능</a:t>
                       </a:r>
-                      <a:endParaRPr lang="en-US" altLang="ko-KR" sz="3300" dirty="0"/>
+                      <a:endParaRPr lang="en-US" altLang="ko-KR" sz="2800" dirty="0"/>
                     </a:p>
                     <a:p>
                       <a:pPr marL="457200" indent="-457200" latinLnBrk="1">
@@ -32666,27 +34532,27 @@
                         <a:buChar char="•"/>
                       </a:pPr>
                       <a:r>
-                        <a:rPr lang="en-US" altLang="ko-KR" sz="3300" dirty="0"/>
+                        <a:rPr lang="en-US" altLang="ko-KR" sz="2800" dirty="0"/>
                         <a:t>class</a:t>
                       </a:r>
                       <a:r>
-                        <a:rPr lang="ko-KR" altLang="en-US" sz="3300" dirty="0"/>
+                        <a:rPr lang="ko-KR" altLang="en-US" sz="2800" dirty="0"/>
                         <a:t>로 다중 상속은 불가능</a:t>
                       </a:r>
                       <a:r>
-                        <a:rPr lang="en-US" altLang="ko-KR" sz="3300" dirty="0"/>
+                        <a:rPr lang="en-US" altLang="ko-KR" sz="2800" dirty="0"/>
                         <a:t>; </a:t>
                       </a:r>
                       <a:r>
-                        <a:rPr lang="ko-KR" altLang="en-US" sz="3300" dirty="0"/>
+                        <a:rPr lang="ko-KR" altLang="en-US" sz="2800" dirty="0"/>
                         <a:t>대신 </a:t>
                       </a:r>
                       <a:r>
-                        <a:rPr lang="en-US" altLang="ko-KR" sz="3300" dirty="0"/>
+                        <a:rPr lang="en-US" altLang="ko-KR" sz="2800" dirty="0"/>
                         <a:t>interface</a:t>
                       </a:r>
                       <a:r>
-                        <a:rPr lang="ko-KR" altLang="en-US" sz="3300" dirty="0"/>
+                        <a:rPr lang="ko-KR" altLang="en-US" sz="2800" dirty="0"/>
                         <a:t>로는 가능</a:t>
                       </a:r>
                     </a:p>

--- a/C# 문법.pptx
+++ b/C# 문법.pptx
@@ -12,17 +12,18 @@
     <p:sldId id="261" r:id="rId6"/>
     <p:sldId id="262" r:id="rId7"/>
     <p:sldId id="263" r:id="rId8"/>
-    <p:sldId id="264" r:id="rId9"/>
-    <p:sldId id="265" r:id="rId10"/>
-    <p:sldId id="266" r:id="rId11"/>
-    <p:sldId id="267" r:id="rId12"/>
-    <p:sldId id="273" r:id="rId13"/>
-    <p:sldId id="272" r:id="rId14"/>
-    <p:sldId id="268" r:id="rId15"/>
-    <p:sldId id="269" r:id="rId16"/>
-    <p:sldId id="271" r:id="rId17"/>
-    <p:sldId id="270" r:id="rId18"/>
-    <p:sldId id="274" r:id="rId19"/>
+    <p:sldId id="275" r:id="rId9"/>
+    <p:sldId id="264" r:id="rId10"/>
+    <p:sldId id="265" r:id="rId11"/>
+    <p:sldId id="266" r:id="rId12"/>
+    <p:sldId id="267" r:id="rId13"/>
+    <p:sldId id="273" r:id="rId14"/>
+    <p:sldId id="272" r:id="rId15"/>
+    <p:sldId id="268" r:id="rId16"/>
+    <p:sldId id="269" r:id="rId17"/>
+    <p:sldId id="271" r:id="rId18"/>
+    <p:sldId id="270" r:id="rId19"/>
+    <p:sldId id="274" r:id="rId20"/>
   </p:sldIdLst>
   <p:sldSz cx="12192000" cy="6858000"/>
   <p:notesSz cx="6858000" cy="9144000"/>
@@ -24429,6 +24430,422 @@
       </p:grpSpPr>
       <p:sp useBgFill="1">
         <p:nvSpPr>
+          <p:cNvPr id="17" name="Rectangle 8">
+            <a:extLst>
+              <a:ext uri="{FF2B5EF4-FFF2-40B4-BE49-F238E27FC236}">
+                <a16:creationId xmlns:a16="http://schemas.microsoft.com/office/drawing/2014/main" id="{BACC6370-2D7E-4714-9D71-7542949D7D5D}"/>
+              </a:ext>
+              <a:ext uri="{C183D7F6-B498-43B3-948B-1728B52AA6E4}">
+                <adec:decorative xmlns:adec="http://schemas.microsoft.com/office/drawing/2017/decorative" val="1"/>
+              </a:ext>
+            </a:extLst>
+          </p:cNvPr>
+          <p:cNvSpPr>
+            <a:spLocks noGrp="1" noRot="1" noChangeAspect="1" noMove="1" noResize="1" noEditPoints="1" noAdjustHandles="1" noChangeArrowheads="1" noChangeShapeType="1" noTextEdit="1"/>
+          </p:cNvSpPr>
+          <p:nvPr>
+            <p:extLst>
+              <p:ext uri="{386F3935-93C4-4BCD-93E2-E3B085C9AB24}">
+                <p16:designElem xmlns:p16="http://schemas.microsoft.com/office/powerpoint/2015/main" val="1"/>
+              </p:ext>
+            </p:extLst>
+          </p:nvPr>
+        </p:nvSpPr>
+        <p:spPr>
+          <a:xfrm>
+            <a:off x="0" y="0"/>
+            <a:ext cx="12192000" cy="6858000"/>
+          </a:xfrm>
+          <a:prstGeom prst="rect">
+            <a:avLst/>
+          </a:prstGeom>
+          <a:ln w="12700" cap="flat" cmpd="sng" algn="ctr">
+            <a:noFill/>
+            <a:prstDash val="solid"/>
+            <a:miter lim="800000"/>
+          </a:ln>
+          <a:effectLst/>
+          <a:extLst>
+            <a:ext uri="{91240B29-F687-4F45-9708-019B960494DF}">
+              <a14:hiddenLine xmlns:a14="http://schemas.microsoft.com/office/drawing/2010/main" w="12700" cap="flat" cmpd="sng" algn="ctr">
+                <a:solidFill>
+                  <a:schemeClr val="accent1">
+                    <a:shade val="50000"/>
+                  </a:schemeClr>
+                </a:solidFill>
+                <a:prstDash val="solid"/>
+                <a:miter lim="800000"/>
+              </a14:hiddenLine>
+            </a:ext>
+          </a:extLst>
+        </p:spPr>
+        <p:style>
+          <a:lnRef idx="2">
+            <a:schemeClr val="accent1">
+              <a:shade val="50000"/>
+            </a:schemeClr>
+          </a:lnRef>
+          <a:fillRef idx="1">
+            <a:schemeClr val="accent1"/>
+          </a:fillRef>
+          <a:effectRef idx="0">
+            <a:schemeClr val="accent1"/>
+          </a:effectRef>
+          <a:fontRef idx="minor">
+            <a:schemeClr val="lt1"/>
+          </a:fontRef>
+        </p:style>
+        <p:txBody>
+          <a:bodyPr rtlCol="0" anchor="ctr"/>
+          <a:lstStyle/>
+          <a:p>
+            <a:pPr algn="ctr"/>
+            <a:endParaRPr lang="en-US"/>
+          </a:p>
+        </p:txBody>
+      </p:sp>
+      <p:sp>
+        <p:nvSpPr>
+          <p:cNvPr id="18" name="Rectangle 10">
+            <a:extLst>
+              <a:ext uri="{FF2B5EF4-FFF2-40B4-BE49-F238E27FC236}">
+                <a16:creationId xmlns:a16="http://schemas.microsoft.com/office/drawing/2014/main" id="{F68B3F68-107C-434F-AA38-110D5EA91B85}"/>
+              </a:ext>
+              <a:ext uri="{C183D7F6-B498-43B3-948B-1728B52AA6E4}">
+                <adec:decorative xmlns:adec="http://schemas.microsoft.com/office/drawing/2017/decorative" val="1"/>
+              </a:ext>
+            </a:extLst>
+          </p:cNvPr>
+          <p:cNvSpPr>
+            <a:spLocks noGrp="1" noRot="1" noChangeAspect="1" noMove="1" noResize="1" noEditPoints="1" noAdjustHandles="1" noChangeArrowheads="1" noChangeShapeType="1" noTextEdit="1"/>
+          </p:cNvSpPr>
+          <p:nvPr>
+            <p:extLst>
+              <p:ext uri="{386F3935-93C4-4BCD-93E2-E3B085C9AB24}">
+                <p16:designElem xmlns:p16="http://schemas.microsoft.com/office/powerpoint/2015/main" val="1"/>
+              </p:ext>
+            </p:extLst>
+          </p:nvPr>
+        </p:nvSpPr>
+        <p:spPr>
+          <a:xfrm flipH="1">
+            <a:off x="2" y="0"/>
+            <a:ext cx="12191998" cy="2170031"/>
+          </a:xfrm>
+          <a:prstGeom prst="rect">
+            <a:avLst/>
+          </a:prstGeom>
+          <a:gradFill>
+            <a:gsLst>
+              <a:gs pos="0">
+                <a:srgbClr val="000000">
+                  <a:alpha val="96000"/>
+                </a:srgbClr>
+              </a:gs>
+              <a:gs pos="100000">
+                <a:schemeClr val="accent1">
+                  <a:lumMod val="75000"/>
+                </a:schemeClr>
+              </a:gs>
+            </a:gsLst>
+            <a:lin ang="19800000" scaled="0"/>
+          </a:gradFill>
+          <a:ln>
+            <a:noFill/>
+          </a:ln>
+        </p:spPr>
+        <p:style>
+          <a:lnRef idx="2">
+            <a:schemeClr val="accent1">
+              <a:shade val="50000"/>
+            </a:schemeClr>
+          </a:lnRef>
+          <a:fillRef idx="1">
+            <a:schemeClr val="accent1"/>
+          </a:fillRef>
+          <a:effectRef idx="0">
+            <a:schemeClr val="accent1"/>
+          </a:effectRef>
+          <a:fontRef idx="minor">
+            <a:schemeClr val="lt1"/>
+          </a:fontRef>
+        </p:style>
+        <p:txBody>
+          <a:bodyPr rtlCol="0" anchor="ctr"/>
+          <a:lstStyle/>
+          <a:p>
+            <a:pPr algn="ctr"/>
+            <a:endParaRPr lang="en-US"/>
+          </a:p>
+        </p:txBody>
+      </p:sp>
+      <p:sp>
+        <p:nvSpPr>
+          <p:cNvPr id="19" name="Rectangle 12">
+            <a:extLst>
+              <a:ext uri="{FF2B5EF4-FFF2-40B4-BE49-F238E27FC236}">
+                <a16:creationId xmlns:a16="http://schemas.microsoft.com/office/drawing/2014/main" id="{AAD0DBB9-1A4B-4391-81D4-CB19F9AB918A}"/>
+              </a:ext>
+              <a:ext uri="{C183D7F6-B498-43B3-948B-1728B52AA6E4}">
+                <adec:decorative xmlns:adec="http://schemas.microsoft.com/office/drawing/2017/decorative" val="1"/>
+              </a:ext>
+            </a:extLst>
+          </p:cNvPr>
+          <p:cNvSpPr>
+            <a:spLocks noGrp="1" noRot="1" noChangeAspect="1" noMove="1" noResize="1" noEditPoints="1" noAdjustHandles="1" noChangeArrowheads="1" noChangeShapeType="1" noTextEdit="1"/>
+          </p:cNvSpPr>
+          <p:nvPr>
+            <p:extLst>
+              <p:ext uri="{386F3935-93C4-4BCD-93E2-E3B085C9AB24}">
+                <p16:designElem xmlns:p16="http://schemas.microsoft.com/office/powerpoint/2015/main" val="1"/>
+              </p:ext>
+            </p:extLst>
+          </p:nvPr>
+        </p:nvSpPr>
+        <p:spPr>
+          <a:xfrm flipH="1">
+            <a:off x="8082819" y="0"/>
+            <a:ext cx="4097211" cy="2170661"/>
+          </a:xfrm>
+          <a:prstGeom prst="rect">
+            <a:avLst/>
+          </a:prstGeom>
+          <a:gradFill>
+            <a:gsLst>
+              <a:gs pos="19000">
+                <a:schemeClr val="accent1">
+                  <a:lumMod val="50000"/>
+                  <a:alpha val="68000"/>
+                </a:schemeClr>
+              </a:gs>
+              <a:gs pos="100000">
+                <a:schemeClr val="accent1">
+                  <a:alpha val="48000"/>
+                </a:schemeClr>
+              </a:gs>
+            </a:gsLst>
+            <a:lin ang="19200000" scaled="0"/>
+          </a:gradFill>
+          <a:ln>
+            <a:noFill/>
+          </a:ln>
+        </p:spPr>
+        <p:style>
+          <a:lnRef idx="2">
+            <a:schemeClr val="accent1">
+              <a:shade val="50000"/>
+            </a:schemeClr>
+          </a:lnRef>
+          <a:fillRef idx="1">
+            <a:schemeClr val="accent1"/>
+          </a:fillRef>
+          <a:effectRef idx="0">
+            <a:schemeClr val="accent1"/>
+          </a:effectRef>
+          <a:fontRef idx="minor">
+            <a:schemeClr val="lt1"/>
+          </a:fontRef>
+        </p:style>
+        <p:txBody>
+          <a:bodyPr rtlCol="0" anchor="ctr"/>
+          <a:lstStyle/>
+          <a:p>
+            <a:pPr algn="ctr"/>
+            <a:endParaRPr lang="en-US"/>
+          </a:p>
+        </p:txBody>
+      </p:sp>
+      <p:sp>
+        <p:nvSpPr>
+          <p:cNvPr id="20" name="Rectangle 14">
+            <a:extLst>
+              <a:ext uri="{FF2B5EF4-FFF2-40B4-BE49-F238E27FC236}">
+                <a16:creationId xmlns:a16="http://schemas.microsoft.com/office/drawing/2014/main" id="{063BBA22-50EA-4C4D-BE05-F1CE4E63AA56}"/>
+              </a:ext>
+              <a:ext uri="{C183D7F6-B498-43B3-948B-1728B52AA6E4}">
+                <adec:decorative xmlns:adec="http://schemas.microsoft.com/office/drawing/2017/decorative" val="1"/>
+              </a:ext>
+            </a:extLst>
+          </p:cNvPr>
+          <p:cNvSpPr>
+            <a:spLocks noGrp="1" noRot="1" noChangeAspect="1" noMove="1" noResize="1" noEditPoints="1" noAdjustHandles="1" noChangeArrowheads="1" noChangeShapeType="1" noTextEdit="1"/>
+          </p:cNvSpPr>
+          <p:nvPr>
+            <p:extLst>
+              <p:ext uri="{386F3935-93C4-4BCD-93E2-E3B085C9AB24}">
+                <p16:designElem xmlns:p16="http://schemas.microsoft.com/office/powerpoint/2015/main" val="1"/>
+              </p:ext>
+            </p:extLst>
+          </p:nvPr>
+        </p:nvSpPr>
+        <p:spPr>
+          <a:xfrm rot="16200000" flipH="1">
+            <a:off x="5010646" y="-5010043"/>
+            <a:ext cx="2170709" cy="12192000"/>
+          </a:xfrm>
+          <a:prstGeom prst="rect">
+            <a:avLst/>
+          </a:prstGeom>
+          <a:gradFill>
+            <a:gsLst>
+              <a:gs pos="23000">
+                <a:schemeClr val="accent1">
+                  <a:lumMod val="75000"/>
+                  <a:alpha val="16000"/>
+                </a:schemeClr>
+              </a:gs>
+              <a:gs pos="99000">
+                <a:srgbClr val="000000">
+                  <a:alpha val="45000"/>
+                </a:srgbClr>
+              </a:gs>
+            </a:gsLst>
+            <a:lin ang="21000000" scaled="0"/>
+          </a:gradFill>
+          <a:ln>
+            <a:noFill/>
+          </a:ln>
+        </p:spPr>
+        <p:style>
+          <a:lnRef idx="2">
+            <a:schemeClr val="accent1">
+              <a:shade val="50000"/>
+            </a:schemeClr>
+          </a:lnRef>
+          <a:fillRef idx="1">
+            <a:schemeClr val="accent1"/>
+          </a:fillRef>
+          <a:effectRef idx="0">
+            <a:schemeClr val="accent1"/>
+          </a:effectRef>
+          <a:fontRef idx="minor">
+            <a:schemeClr val="lt1"/>
+          </a:fontRef>
+        </p:style>
+        <p:txBody>
+          <a:bodyPr rtlCol="0" anchor="ctr"/>
+          <a:lstStyle/>
+          <a:p>
+            <a:pPr algn="ctr"/>
+            <a:endParaRPr lang="en-US" dirty="0"/>
+          </a:p>
+        </p:txBody>
+      </p:sp>
+      <p:sp>
+        <p:nvSpPr>
+          <p:cNvPr id="2" name="제목 1">
+            <a:extLst>
+              <a:ext uri="{FF2B5EF4-FFF2-40B4-BE49-F238E27FC236}">
+                <a16:creationId xmlns:a16="http://schemas.microsoft.com/office/drawing/2014/main" id="{69649273-C900-70F9-AE53-E6795C3D3A80}"/>
+              </a:ext>
+            </a:extLst>
+          </p:cNvPr>
+          <p:cNvSpPr>
+            <a:spLocks noGrp="1"/>
+          </p:cNvSpPr>
+          <p:nvPr>
+            <p:ph type="title"/>
+          </p:nvPr>
+        </p:nvSpPr>
+        <p:spPr>
+          <a:xfrm>
+            <a:off x="1383564" y="348865"/>
+            <a:ext cx="9718111" cy="1576446"/>
+          </a:xfrm>
+        </p:spPr>
+        <p:txBody>
+          <a:bodyPr anchor="ctr">
+            <a:normAutofit/>
+          </a:bodyPr>
+          <a:lstStyle/>
+          <a:p>
+            <a:r>
+              <a:rPr lang="en-US" altLang="ko-KR" sz="4000">
+                <a:solidFill>
+                  <a:srgbClr val="FFFFFF"/>
+                </a:solidFill>
+              </a:rPr>
+              <a:t>nullable</a:t>
+            </a:r>
+            <a:endParaRPr lang="ko-KR" altLang="en-US" sz="4000">
+              <a:solidFill>
+                <a:srgbClr val="FFFFFF"/>
+              </a:solidFill>
+            </a:endParaRPr>
+          </a:p>
+        </p:txBody>
+      </p:sp>
+      <p:graphicFrame>
+        <p:nvGraphicFramePr>
+          <p:cNvPr id="21" name="내용 개체 틀 2">
+            <a:extLst>
+              <a:ext uri="{FF2B5EF4-FFF2-40B4-BE49-F238E27FC236}">
+                <a16:creationId xmlns:a16="http://schemas.microsoft.com/office/drawing/2014/main" id="{3C1ED804-4CE5-0363-4248-30F18479BBF2}"/>
+              </a:ext>
+            </a:extLst>
+          </p:cNvPr>
+          <p:cNvGraphicFramePr>
+            <a:graphicFrameLocks noGrp="1"/>
+          </p:cNvGraphicFramePr>
+          <p:nvPr>
+            <p:ph idx="1"/>
+            <p:extLst>
+              <p:ext uri="{D42A27DB-BD31-4B8C-83A1-F6EECF244321}">
+                <p14:modId xmlns:p14="http://schemas.microsoft.com/office/powerpoint/2010/main" val="2281938302"/>
+              </p:ext>
+            </p:extLst>
+          </p:nvPr>
+        </p:nvGraphicFramePr>
+        <p:xfrm>
+          <a:off x="644056" y="2615979"/>
+          <a:ext cx="10927829" cy="3689405"/>
+        </p:xfrm>
+        <a:graphic>
+          <a:graphicData uri="http://schemas.openxmlformats.org/drawingml/2006/diagram">
+            <dgm:relIds xmlns:dgm="http://schemas.openxmlformats.org/drawingml/2006/diagram" xmlns:r="http://schemas.openxmlformats.org/officeDocument/2006/relationships" r:dm="rId2" r:lo="rId3" r:qs="rId4" r:cs="rId5"/>
+          </a:graphicData>
+        </a:graphic>
+      </p:graphicFrame>
+    </p:spTree>
+    <p:extLst>
+      <p:ext uri="{BB962C8B-B14F-4D97-AF65-F5344CB8AC3E}">
+        <p14:creationId xmlns:p14="http://schemas.microsoft.com/office/powerpoint/2010/main" val="3920825907"/>
+      </p:ext>
+    </p:extLst>
+  </p:cSld>
+  <p:clrMapOvr>
+    <a:masterClrMapping/>
+  </p:clrMapOvr>
+</p:sld>
+</file>
+
+<file path=ppt/slides/slide11.xml><?xml version="1.0" encoding="utf-8"?>
+<p:sld xmlns:a="http://schemas.openxmlformats.org/drawingml/2006/main" xmlns:r="http://schemas.openxmlformats.org/officeDocument/2006/relationships" xmlns:p="http://schemas.openxmlformats.org/presentationml/2006/main">
+  <p:cSld>
+    <p:bg>
+      <p:bgPr>
+        <a:solidFill>
+          <a:schemeClr val="bg1"/>
+        </a:solidFill>
+        <a:effectLst/>
+      </p:bgPr>
+    </p:bg>
+    <p:spTree>
+      <p:nvGrpSpPr>
+        <p:cNvPr id="1" name=""/>
+        <p:cNvGrpSpPr/>
+        <p:nvPr/>
+      </p:nvGrpSpPr>
+      <p:grpSpPr>
+        <a:xfrm>
+          <a:off x="0" y="0"/>
+          <a:ext cx="0" cy="0"/>
+          <a:chOff x="0" y="0"/>
+          <a:chExt cx="0" cy="0"/>
+        </a:xfrm>
+      </p:grpSpPr>
+      <p:sp useBgFill="1">
+        <p:nvSpPr>
           <p:cNvPr id="9" name="Rectangle 8">
             <a:extLst>
               <a:ext uri="{FF2B5EF4-FFF2-40B4-BE49-F238E27FC236}">
@@ -25065,7 +25482,7 @@
 </p:sld>
 </file>
 
-<file path=ppt/slides/slide11.xml><?xml version="1.0" encoding="utf-8"?>
+<file path=ppt/slides/slide12.xml><?xml version="1.0" encoding="utf-8"?>
 <p:sld xmlns:a="http://schemas.openxmlformats.org/drawingml/2006/main" xmlns:r="http://schemas.openxmlformats.org/officeDocument/2006/relationships" xmlns:p="http://schemas.openxmlformats.org/presentationml/2006/main">
   <p:cSld>
     <p:bg>
@@ -26022,7 +26439,7 @@
 </p:sld>
 </file>
 
-<file path=ppt/slides/slide12.xml><?xml version="1.0" encoding="utf-8"?>
+<file path=ppt/slides/slide13.xml><?xml version="1.0" encoding="utf-8"?>
 <p:sld xmlns:a="http://schemas.openxmlformats.org/drawingml/2006/main" xmlns:r="http://schemas.openxmlformats.org/officeDocument/2006/relationships" xmlns:p="http://schemas.openxmlformats.org/presentationml/2006/main">
   <p:cSld>
     <p:bg>
@@ -26552,7 +26969,7 @@
 </p:sld>
 </file>
 
-<file path=ppt/slides/slide13.xml><?xml version="1.0" encoding="utf-8"?>
+<file path=ppt/slides/slide14.xml><?xml version="1.0" encoding="utf-8"?>
 <p:sld xmlns:a="http://schemas.openxmlformats.org/drawingml/2006/main" xmlns:r="http://schemas.openxmlformats.org/officeDocument/2006/relationships" xmlns:p="http://schemas.openxmlformats.org/presentationml/2006/main">
   <p:cSld>
     <p:bg>
@@ -27717,7 +28134,7 @@
 </p:sld>
 </file>
 
-<file path=ppt/slides/slide14.xml><?xml version="1.0" encoding="utf-8"?>
+<file path=ppt/slides/slide15.xml><?xml version="1.0" encoding="utf-8"?>
 <p:sld xmlns:a="http://schemas.openxmlformats.org/drawingml/2006/main" xmlns:r="http://schemas.openxmlformats.org/officeDocument/2006/relationships" xmlns:p="http://schemas.openxmlformats.org/presentationml/2006/main">
   <p:cSld>
     <p:bg>
@@ -28240,7 +28657,7 @@
 </p:sld>
 </file>
 
-<file path=ppt/slides/slide15.xml><?xml version="1.0" encoding="utf-8"?>
+<file path=ppt/slides/slide16.xml><?xml version="1.0" encoding="utf-8"?>
 <p:sld xmlns:a="http://schemas.openxmlformats.org/drawingml/2006/main" xmlns:r="http://schemas.openxmlformats.org/officeDocument/2006/relationships" xmlns:p="http://schemas.openxmlformats.org/presentationml/2006/main">
   <p:cSld>
     <p:bg>
@@ -29043,7 +29460,7 @@
 </p:sld>
 </file>
 
-<file path=ppt/slides/slide16.xml><?xml version="1.0" encoding="utf-8"?>
+<file path=ppt/slides/slide17.xml><?xml version="1.0" encoding="utf-8"?>
 <p:sld xmlns:a="http://schemas.openxmlformats.org/drawingml/2006/main" xmlns:r="http://schemas.openxmlformats.org/officeDocument/2006/relationships" xmlns:p="http://schemas.openxmlformats.org/presentationml/2006/main">
   <p:cSld>
     <p:bg>
@@ -29648,7 +30065,7 @@
 </p:sld>
 </file>
 
-<file path=ppt/slides/slide17.xml><?xml version="1.0" encoding="utf-8"?>
+<file path=ppt/slides/slide18.xml><?xml version="1.0" encoding="utf-8"?>
 <p:sld xmlns:a="http://schemas.openxmlformats.org/drawingml/2006/main" xmlns:r="http://schemas.openxmlformats.org/officeDocument/2006/relationships" xmlns:p="http://schemas.openxmlformats.org/presentationml/2006/main">
   <p:cSld>
     <p:bg>
@@ -30059,7 +30476,7 @@
 </p:sld>
 </file>
 
-<file path=ppt/slides/slide18.xml><?xml version="1.0" encoding="utf-8"?>
+<file path=ppt/slides/slide19.xml><?xml version="1.0" encoding="utf-8"?>
 <p:sld xmlns:a="http://schemas.openxmlformats.org/drawingml/2006/main" xmlns:r="http://schemas.openxmlformats.org/officeDocument/2006/relationships" xmlns:p="http://schemas.openxmlformats.org/presentationml/2006/main">
   <p:cSld>
     <p:bg>
@@ -33684,6 +34101,3551 @@
       </p:grpSpPr>
       <p:sp useBgFill="1">
         <p:nvSpPr>
+          <p:cNvPr id="10" name="Rectangle 9">
+            <a:extLst>
+              <a:ext uri="{FF2B5EF4-FFF2-40B4-BE49-F238E27FC236}">
+                <a16:creationId xmlns:a16="http://schemas.microsoft.com/office/drawing/2014/main" id="{245A9F99-D9B1-4094-A2E2-B90AC1DB7B9C}"/>
+              </a:ext>
+              <a:ext uri="{C183D7F6-B498-43B3-948B-1728B52AA6E4}">
+                <adec:decorative xmlns:adec="http://schemas.microsoft.com/office/drawing/2017/decorative" val="1"/>
+              </a:ext>
+            </a:extLst>
+          </p:cNvPr>
+          <p:cNvSpPr>
+            <a:spLocks noGrp="1" noRot="1" noChangeAspect="1" noMove="1" noResize="1" noEditPoints="1" noAdjustHandles="1" noChangeArrowheads="1" noChangeShapeType="1" noTextEdit="1"/>
+          </p:cNvSpPr>
+          <p:nvPr>
+            <p:extLst>
+              <p:ext uri="{386F3935-93C4-4BCD-93E2-E3B085C9AB24}">
+                <p16:designElem xmlns:p16="http://schemas.microsoft.com/office/powerpoint/2015/main" val="1"/>
+              </p:ext>
+            </p:extLst>
+          </p:nvPr>
+        </p:nvSpPr>
+        <p:spPr>
+          <a:xfrm>
+            <a:off x="0" y="0"/>
+            <a:ext cx="12192000" cy="6858000"/>
+          </a:xfrm>
+          <a:prstGeom prst="rect">
+            <a:avLst/>
+          </a:prstGeom>
+          <a:ln>
+            <a:noFill/>
+          </a:ln>
+        </p:spPr>
+        <p:style>
+          <a:lnRef idx="2">
+            <a:schemeClr val="accent1">
+              <a:shade val="50000"/>
+            </a:schemeClr>
+          </a:lnRef>
+          <a:fillRef idx="1">
+            <a:schemeClr val="accent1"/>
+          </a:fillRef>
+          <a:effectRef idx="0">
+            <a:schemeClr val="accent1"/>
+          </a:effectRef>
+          <a:fontRef idx="minor">
+            <a:schemeClr val="lt1"/>
+          </a:fontRef>
+        </p:style>
+        <p:txBody>
+          <a:bodyPr rtlCol="0" anchor="ctr"/>
+          <a:lstStyle/>
+          <a:p>
+            <a:pPr algn="ctr"/>
+            <a:endParaRPr lang="en-US"/>
+          </a:p>
+        </p:txBody>
+      </p:sp>
+      <p:sp>
+        <p:nvSpPr>
+          <p:cNvPr id="21" name="Rectangle 11">
+            <a:extLst>
+              <a:ext uri="{FF2B5EF4-FFF2-40B4-BE49-F238E27FC236}">
+                <a16:creationId xmlns:a16="http://schemas.microsoft.com/office/drawing/2014/main" id="{B7FAF607-473A-4A43-A23D-BBFF5C4117BB}"/>
+              </a:ext>
+              <a:ext uri="{C183D7F6-B498-43B3-948B-1728B52AA6E4}">
+                <adec:decorative xmlns:adec="http://schemas.microsoft.com/office/drawing/2017/decorative" val="1"/>
+              </a:ext>
+            </a:extLst>
+          </p:cNvPr>
+          <p:cNvSpPr>
+            <a:spLocks noGrp="1" noRot="1" noChangeAspect="1" noMove="1" noResize="1" noEditPoints="1" noAdjustHandles="1" noChangeArrowheads="1" noChangeShapeType="1" noTextEdit="1"/>
+          </p:cNvSpPr>
+          <p:nvPr>
+            <p:extLst>
+              <p:ext uri="{386F3935-93C4-4BCD-93E2-E3B085C9AB24}">
+                <p16:designElem xmlns:p16="http://schemas.microsoft.com/office/powerpoint/2015/main" val="1"/>
+              </p:ext>
+            </p:extLst>
+          </p:nvPr>
+        </p:nvSpPr>
+        <p:spPr>
+          <a:xfrm>
+            <a:off x="305" y="0"/>
+            <a:ext cx="12191695" cy="6858000"/>
+          </a:xfrm>
+          <a:prstGeom prst="rect">
+            <a:avLst/>
+          </a:prstGeom>
+          <a:solidFill>
+            <a:schemeClr val="bg1"/>
+          </a:solidFill>
+          <a:ln>
+            <a:noFill/>
+          </a:ln>
+        </p:spPr>
+        <p:style>
+          <a:lnRef idx="2">
+            <a:schemeClr val="accent1">
+              <a:shade val="50000"/>
+            </a:schemeClr>
+          </a:lnRef>
+          <a:fillRef idx="1">
+            <a:schemeClr val="accent1"/>
+          </a:fillRef>
+          <a:effectRef idx="0">
+            <a:schemeClr val="accent1"/>
+          </a:effectRef>
+          <a:fontRef idx="minor">
+            <a:schemeClr val="lt1"/>
+          </a:fontRef>
+        </p:style>
+        <p:txBody>
+          <a:bodyPr rtlCol="0" anchor="ctr"/>
+          <a:lstStyle/>
+          <a:p>
+            <a:pPr algn="ctr"/>
+            <a:endParaRPr lang="en-US"/>
+          </a:p>
+        </p:txBody>
+      </p:sp>
+      <p:sp>
+        <p:nvSpPr>
+          <p:cNvPr id="2" name="제목 1">
+            <a:extLst>
+              <a:ext uri="{FF2B5EF4-FFF2-40B4-BE49-F238E27FC236}">
+                <a16:creationId xmlns:a16="http://schemas.microsoft.com/office/drawing/2014/main" id="{5E779F72-0967-2523-67C7-D0691532F879}"/>
+              </a:ext>
+            </a:extLst>
+          </p:cNvPr>
+          <p:cNvSpPr>
+            <a:spLocks noGrp="1"/>
+          </p:cNvSpPr>
+          <p:nvPr>
+            <p:ph type="title"/>
+          </p:nvPr>
+        </p:nvSpPr>
+        <p:spPr>
+          <a:xfrm>
+            <a:off x="6096000" y="437195"/>
+            <a:ext cx="4977976" cy="1454051"/>
+          </a:xfrm>
+        </p:spPr>
+        <p:txBody>
+          <a:bodyPr>
+            <a:normAutofit/>
+          </a:bodyPr>
+          <a:lstStyle/>
+          <a:p>
+            <a:r>
+              <a:rPr lang="ko-KR" altLang="en-US" sz="3600" dirty="0">
+                <a:solidFill>
+                  <a:schemeClr val="tx2"/>
+                </a:solidFill>
+              </a:rPr>
+              <a:t>서식 있는 문자열</a:t>
+            </a:r>
+            <a:r>
+              <a:rPr lang="en-US" altLang="ko-KR" sz="3600" dirty="0">
+                <a:solidFill>
+                  <a:schemeClr val="tx2"/>
+                </a:solidFill>
+              </a:rPr>
+              <a:t>: $””</a:t>
+            </a:r>
+            <a:endParaRPr lang="ko-KR" altLang="en-US" sz="3600" dirty="0">
+              <a:solidFill>
+                <a:schemeClr val="tx2"/>
+              </a:solidFill>
+            </a:endParaRPr>
+          </a:p>
+        </p:txBody>
+      </p:sp>
+      <p:pic>
+        <p:nvPicPr>
+          <p:cNvPr id="7" name="Graphic 6" descr="계산기">
+            <a:extLst>
+              <a:ext uri="{FF2B5EF4-FFF2-40B4-BE49-F238E27FC236}">
+                <a16:creationId xmlns:a16="http://schemas.microsoft.com/office/drawing/2014/main" id="{D1F5036F-E139-13CF-CEE7-B0CBE5C0748E}"/>
+              </a:ext>
+            </a:extLst>
+          </p:cNvPr>
+          <p:cNvPicPr>
+            <a:picLocks noChangeAspect="1"/>
+          </p:cNvPicPr>
+          <p:nvPr/>
+        </p:nvPicPr>
+        <p:blipFill>
+          <a:blip r:embed="rId2">
+            <a:extLst>
+              <a:ext uri="{28A0092B-C50C-407E-A947-70E740481C1C}">
+                <a14:useLocalDpi xmlns:a14="http://schemas.microsoft.com/office/drawing/2010/main" val="0"/>
+              </a:ext>
+              <a:ext uri="{96DAC541-7B7A-43D3-8B79-37D633B846F1}">
+                <asvg:svgBlip xmlns:asvg="http://schemas.microsoft.com/office/drawing/2016/SVG/main" r:embed="rId3"/>
+              </a:ext>
+            </a:extLst>
+          </a:blip>
+          <a:stretch>
+            <a:fillRect/>
+          </a:stretch>
+        </p:blipFill>
+        <p:spPr>
+          <a:xfrm>
+            <a:off x="686951" y="1793846"/>
+            <a:ext cx="3620021" cy="3620021"/>
+          </a:xfrm>
+          <a:prstGeom prst="rect">
+            <a:avLst/>
+          </a:prstGeom>
+        </p:spPr>
+      </p:pic>
+      <p:sp>
+        <p:nvSpPr>
+          <p:cNvPr id="22" name="내용 개체 틀 2">
+            <a:extLst>
+              <a:ext uri="{FF2B5EF4-FFF2-40B4-BE49-F238E27FC236}">
+                <a16:creationId xmlns:a16="http://schemas.microsoft.com/office/drawing/2014/main" id="{63D97CAC-B8E3-2A68-77F0-22B7805CA878}"/>
+              </a:ext>
+            </a:extLst>
+          </p:cNvPr>
+          <p:cNvSpPr>
+            <a:spLocks noGrp="1"/>
+          </p:cNvSpPr>
+          <p:nvPr>
+            <p:ph idx="1"/>
+          </p:nvPr>
+        </p:nvSpPr>
+        <p:spPr>
+          <a:xfrm>
+            <a:off x="5813660" y="1857675"/>
+            <a:ext cx="6304547" cy="4649001"/>
+          </a:xfrm>
+        </p:spPr>
+        <p:txBody>
+          <a:bodyPr anchor="ctr">
+            <a:noAutofit/>
+          </a:bodyPr>
+          <a:lstStyle/>
+          <a:p>
+            <a:r>
+              <a:rPr lang="ko-KR" altLang="en-US" sz="2200" dirty="0">
+                <a:solidFill>
+                  <a:schemeClr val="tx2"/>
+                </a:solidFill>
+              </a:rPr>
+              <a:t>계산 결과 </a:t>
+            </a:r>
+            <a:r>
+              <a:rPr lang="en-US" altLang="ko-KR" sz="2200" dirty="0">
+                <a:solidFill>
+                  <a:schemeClr val="tx2"/>
+                </a:solidFill>
+                <a:sym typeface="Wingdings" panose="05000000000000000000" pitchFamily="2" charset="2"/>
+              </a:rPr>
+              <a:t> </a:t>
+            </a:r>
+            <a:r>
+              <a:rPr lang="ko-KR" altLang="en-US" sz="2200" dirty="0">
+                <a:solidFill>
+                  <a:schemeClr val="tx2"/>
+                </a:solidFill>
+                <a:sym typeface="Wingdings" panose="05000000000000000000" pitchFamily="2" charset="2"/>
+              </a:rPr>
+              <a:t>문자열</a:t>
+            </a:r>
+            <a:r>
+              <a:rPr lang="en-US" altLang="ko-KR" sz="2200" dirty="0">
+                <a:solidFill>
+                  <a:schemeClr val="tx2"/>
+                </a:solidFill>
+              </a:rPr>
+              <a:t>: {</a:t>
+            </a:r>
+            <a:r>
+              <a:rPr lang="ko-KR" altLang="en-US" sz="2200" dirty="0">
+                <a:solidFill>
+                  <a:schemeClr val="tx2"/>
+                </a:solidFill>
+              </a:rPr>
+              <a:t>출력 변수</a:t>
+            </a:r>
+            <a:r>
+              <a:rPr lang="en-US" altLang="ko-KR" sz="2200" dirty="0">
+                <a:solidFill>
+                  <a:schemeClr val="tx2"/>
+                </a:solidFill>
+              </a:rPr>
+              <a:t>, </a:t>
+            </a:r>
+            <a:r>
+              <a:rPr lang="ko-KR" altLang="en-US" sz="2200" dirty="0" err="1">
+                <a:solidFill>
+                  <a:schemeClr val="tx2"/>
+                </a:solidFill>
+              </a:rPr>
+              <a:t>자리수</a:t>
+            </a:r>
+            <a:r>
+              <a:rPr lang="en-US" altLang="ko-KR" sz="2200" dirty="0">
+                <a:solidFill>
+                  <a:schemeClr val="tx2"/>
+                </a:solidFill>
+              </a:rPr>
+              <a:t>:</a:t>
+            </a:r>
+            <a:r>
+              <a:rPr lang="ko-KR" altLang="en-US" sz="2200" dirty="0">
+                <a:solidFill>
+                  <a:schemeClr val="tx2"/>
+                </a:solidFill>
+              </a:rPr>
+              <a:t>서식</a:t>
+            </a:r>
+            <a:r>
+              <a:rPr lang="en-US" altLang="ko-KR" sz="2200" dirty="0">
+                <a:solidFill>
+                  <a:schemeClr val="tx2"/>
+                </a:solidFill>
+              </a:rPr>
+              <a:t>}</a:t>
+            </a:r>
+          </a:p>
+          <a:p>
+            <a:r>
+              <a:rPr lang="en-US" altLang="ko-KR" sz="2200" dirty="0">
+                <a:solidFill>
+                  <a:schemeClr val="tx2"/>
+                </a:solidFill>
+              </a:rPr>
+              <a:t>{</a:t>
+            </a:r>
+            <a:r>
+              <a:rPr lang="ko-KR" altLang="en-US" sz="2200" dirty="0">
+                <a:solidFill>
+                  <a:schemeClr val="tx2"/>
+                </a:solidFill>
+              </a:rPr>
+              <a:t>출력 변수</a:t>
+            </a:r>
+            <a:r>
+              <a:rPr lang="en-US" altLang="ko-KR" sz="2200" dirty="0">
+                <a:solidFill>
+                  <a:schemeClr val="tx2"/>
+                </a:solidFill>
+              </a:rPr>
+              <a:t>:</a:t>
+            </a:r>
+            <a:r>
+              <a:rPr lang="ko-KR" altLang="en-US" sz="2200" dirty="0">
+                <a:solidFill>
+                  <a:schemeClr val="tx2"/>
+                </a:solidFill>
+              </a:rPr>
+              <a:t>서식</a:t>
+            </a:r>
+            <a:r>
+              <a:rPr lang="en-US" altLang="ko-KR" sz="2200" dirty="0">
+                <a:solidFill>
+                  <a:schemeClr val="tx2"/>
+                </a:solidFill>
+              </a:rPr>
+              <a:t>}</a:t>
+            </a:r>
+            <a:r>
+              <a:rPr lang="ko-KR" altLang="en-US" sz="2200" dirty="0">
+                <a:solidFill>
+                  <a:schemeClr val="tx2"/>
+                </a:solidFill>
+              </a:rPr>
+              <a:t>도 가능</a:t>
+            </a:r>
+            <a:r>
+              <a:rPr lang="en-US" altLang="ko-KR" sz="2200" dirty="0">
+                <a:solidFill>
+                  <a:schemeClr val="tx2"/>
+                </a:solidFill>
+              </a:rPr>
+              <a:t>: </a:t>
+            </a:r>
+            <a:r>
+              <a:rPr lang="ko-KR" altLang="en-US" sz="2200" dirty="0" err="1">
+                <a:solidFill>
+                  <a:schemeClr val="tx2"/>
+                </a:solidFill>
+              </a:rPr>
+              <a:t>자리수</a:t>
+            </a:r>
+            <a:r>
+              <a:rPr lang="ko-KR" altLang="en-US" sz="2200" dirty="0">
+                <a:solidFill>
+                  <a:schemeClr val="tx2"/>
+                </a:solidFill>
+              </a:rPr>
+              <a:t> 생략</a:t>
+            </a:r>
+            <a:endParaRPr lang="en-US" altLang="ko-KR" sz="2200" dirty="0">
+              <a:solidFill>
+                <a:schemeClr val="tx2"/>
+              </a:solidFill>
+            </a:endParaRPr>
+          </a:p>
+          <a:p>
+            <a:r>
+              <a:rPr lang="ko-KR" altLang="en-US" sz="2200" dirty="0" err="1">
+                <a:solidFill>
+                  <a:schemeClr val="tx2"/>
+                </a:solidFill>
+              </a:rPr>
+              <a:t>자리수</a:t>
+            </a:r>
+            <a:endParaRPr lang="en-US" altLang="ko-KR" sz="2200" dirty="0">
+              <a:solidFill>
+                <a:schemeClr val="tx2"/>
+              </a:solidFill>
+            </a:endParaRPr>
+          </a:p>
+          <a:p>
+            <a:pPr lvl="1"/>
+            <a:r>
+              <a:rPr lang="en-US" altLang="ko-KR" sz="2200" dirty="0">
+                <a:solidFill>
+                  <a:schemeClr val="tx2"/>
+                </a:solidFill>
+              </a:rPr>
+              <a:t>N: N</a:t>
+            </a:r>
+            <a:r>
+              <a:rPr lang="ko-KR" altLang="en-US" sz="2200" dirty="0">
+                <a:solidFill>
+                  <a:schemeClr val="tx2"/>
+                </a:solidFill>
+              </a:rPr>
+              <a:t>자리의 오른쪽 맞춤</a:t>
+            </a:r>
+            <a:endParaRPr lang="en-US" altLang="ko-KR" sz="2200" dirty="0">
+              <a:solidFill>
+                <a:schemeClr val="tx2"/>
+              </a:solidFill>
+            </a:endParaRPr>
+          </a:p>
+          <a:p>
+            <a:pPr lvl="1"/>
+            <a:r>
+              <a:rPr lang="en-US" altLang="ko-KR" sz="2200" dirty="0">
+                <a:solidFill>
+                  <a:schemeClr val="tx2"/>
+                </a:solidFill>
+              </a:rPr>
+              <a:t>–N: N</a:t>
+            </a:r>
+            <a:r>
+              <a:rPr lang="ko-KR" altLang="en-US" sz="2200" dirty="0">
+                <a:solidFill>
+                  <a:schemeClr val="tx2"/>
+                </a:solidFill>
+              </a:rPr>
+              <a:t>자리의 왼쪽 맞춤</a:t>
+            </a:r>
+            <a:endParaRPr lang="en-US" altLang="ko-KR" sz="2200" dirty="0">
+              <a:solidFill>
+                <a:schemeClr val="tx2"/>
+              </a:solidFill>
+            </a:endParaRPr>
+          </a:p>
+          <a:p>
+            <a:r>
+              <a:rPr lang="ko-KR" altLang="en-US" sz="2200" dirty="0">
+                <a:solidFill>
+                  <a:schemeClr val="tx2"/>
+                </a:solidFill>
+              </a:rPr>
+              <a:t>서식</a:t>
+            </a:r>
+            <a:endParaRPr lang="en-US" altLang="ko-KR" sz="2200" dirty="0">
+              <a:solidFill>
+                <a:schemeClr val="tx2"/>
+              </a:solidFill>
+            </a:endParaRPr>
+          </a:p>
+          <a:p>
+            <a:pPr lvl="1"/>
+            <a:r>
+              <a:rPr lang="en-US" altLang="ko-KR" sz="2200" dirty="0">
+                <a:solidFill>
+                  <a:schemeClr val="tx2"/>
+                </a:solidFill>
+              </a:rPr>
+              <a:t>D: 10</a:t>
+            </a:r>
+            <a:r>
+              <a:rPr lang="ko-KR" altLang="en-US" sz="2200" dirty="0">
+                <a:solidFill>
+                  <a:schemeClr val="tx2"/>
+                </a:solidFill>
+              </a:rPr>
+              <a:t>진수</a:t>
+            </a:r>
+            <a:endParaRPr lang="en-US" altLang="ko-KR" sz="2200" dirty="0">
+              <a:solidFill>
+                <a:schemeClr val="tx2"/>
+              </a:solidFill>
+            </a:endParaRPr>
+          </a:p>
+          <a:p>
+            <a:pPr lvl="1"/>
+            <a:r>
+              <a:rPr lang="en-US" altLang="ko-KR" sz="2200" dirty="0">
+                <a:solidFill>
+                  <a:schemeClr val="tx2"/>
+                </a:solidFill>
+              </a:rPr>
+              <a:t>X: 16</a:t>
+            </a:r>
+            <a:r>
+              <a:rPr lang="ko-KR" altLang="en-US" sz="2200" dirty="0">
+                <a:solidFill>
+                  <a:schemeClr val="tx2"/>
+                </a:solidFill>
+              </a:rPr>
+              <a:t>진수</a:t>
+            </a:r>
+            <a:endParaRPr lang="en-US" altLang="ko-KR" sz="2200" dirty="0">
+              <a:solidFill>
+                <a:schemeClr val="tx2"/>
+              </a:solidFill>
+            </a:endParaRPr>
+          </a:p>
+          <a:p>
+            <a:pPr lvl="1"/>
+            <a:r>
+              <a:rPr lang="en-US" altLang="ko-KR" sz="2200" dirty="0">
+                <a:solidFill>
+                  <a:schemeClr val="tx2"/>
+                </a:solidFill>
+              </a:rPr>
+              <a:t>F: </a:t>
+            </a:r>
+            <a:r>
+              <a:rPr lang="ko-KR" altLang="en-US" sz="2200" dirty="0">
+                <a:solidFill>
+                  <a:schemeClr val="tx2"/>
+                </a:solidFill>
+              </a:rPr>
+              <a:t>고정 소수점</a:t>
+            </a:r>
+            <a:r>
+              <a:rPr lang="en-US" altLang="ko-KR" sz="2200" dirty="0">
+                <a:solidFill>
+                  <a:schemeClr val="tx2"/>
+                </a:solidFill>
+              </a:rPr>
+              <a:t>; Fi: </a:t>
+            </a:r>
+            <a:r>
+              <a:rPr lang="ko-KR" altLang="en-US" sz="2200" dirty="0">
+                <a:solidFill>
+                  <a:schemeClr val="tx2"/>
+                </a:solidFill>
+              </a:rPr>
+              <a:t>소수점 이하가 </a:t>
+            </a:r>
+            <a:r>
+              <a:rPr lang="en-US" altLang="ko-KR" sz="2200" dirty="0" err="1">
+                <a:solidFill>
+                  <a:schemeClr val="tx2"/>
+                </a:solidFill>
+              </a:rPr>
+              <a:t>i</a:t>
+            </a:r>
+            <a:r>
+              <a:rPr lang="ko-KR" altLang="en-US" sz="2200" dirty="0">
+                <a:solidFill>
+                  <a:schemeClr val="tx2"/>
+                </a:solidFill>
+              </a:rPr>
+              <a:t>자리인 고정 소수점</a:t>
+            </a:r>
+            <a:endParaRPr lang="en-US" altLang="ko-KR" sz="2200" dirty="0">
+              <a:solidFill>
+                <a:schemeClr val="tx2"/>
+              </a:solidFill>
+            </a:endParaRPr>
+          </a:p>
+          <a:p>
+            <a:pPr lvl="1"/>
+            <a:r>
+              <a:rPr lang="en-US" altLang="ko-KR" sz="2200" dirty="0">
+                <a:solidFill>
+                  <a:schemeClr val="tx2"/>
+                </a:solidFill>
+              </a:rPr>
+              <a:t>E: </a:t>
+            </a:r>
+            <a:r>
+              <a:rPr lang="ko-KR" altLang="en-US" sz="2200" dirty="0">
+                <a:solidFill>
+                  <a:schemeClr val="tx2"/>
+                </a:solidFill>
+              </a:rPr>
+              <a:t>지수 형식</a:t>
+            </a:r>
+            <a:endParaRPr lang="en-US" altLang="ko-KR" sz="2200" dirty="0">
+              <a:solidFill>
+                <a:schemeClr val="tx2"/>
+              </a:solidFill>
+            </a:endParaRPr>
+          </a:p>
+          <a:p>
+            <a:pPr lvl="1"/>
+            <a:r>
+              <a:rPr lang="en-US" altLang="ko-KR" sz="2200" dirty="0">
+                <a:solidFill>
+                  <a:schemeClr val="tx2"/>
+                </a:solidFill>
+              </a:rPr>
+              <a:t>N: </a:t>
+            </a:r>
+            <a:r>
+              <a:rPr lang="ko-KR" altLang="en-US" sz="2200" dirty="0">
+                <a:solidFill>
+                  <a:schemeClr val="tx2"/>
+                </a:solidFill>
+              </a:rPr>
+              <a:t>숫자에 쉼표 표기</a:t>
+            </a:r>
+          </a:p>
+        </p:txBody>
+      </p:sp>
+      <p:grpSp>
+        <p:nvGrpSpPr>
+          <p:cNvPr id="23" name="Group 13">
+            <a:extLst>
+              <a:ext uri="{FF2B5EF4-FFF2-40B4-BE49-F238E27FC236}">
+                <a16:creationId xmlns:a16="http://schemas.microsoft.com/office/drawing/2014/main" id="{C5F6476F-D303-44D3-B30F-1BA348F0F64A}"/>
+              </a:ext>
+              <a:ext uri="{C183D7F6-B498-43B3-948B-1728B52AA6E4}">
+                <adec:decorative xmlns:adec="http://schemas.microsoft.com/office/drawing/2017/decorative" val="1"/>
+              </a:ext>
+            </a:extLst>
+          </p:cNvPr>
+          <p:cNvGrpSpPr>
+            <a:grpSpLocks noGrp="1" noUngrp="1" noRot="1" noChangeAspect="1" noMove="1" noResize="1"/>
+          </p:cNvGrpSpPr>
+          <p:nvPr>
+            <p:extLst>
+              <p:ext uri="{386F3935-93C4-4BCD-93E2-E3B085C9AB24}">
+                <p16:designElem xmlns:p16="http://schemas.microsoft.com/office/powerpoint/2015/main" val="1"/>
+              </p:ext>
+            </p:extLst>
+          </p:nvPr>
+        </p:nvGrpSpPr>
+        <p:grpSpPr>
+          <a:xfrm flipH="1">
+            <a:off x="2635" y="52996"/>
+            <a:ext cx="5928607" cy="6805005"/>
+            <a:chOff x="6095999" y="52996"/>
+            <a:chExt cx="6093363" cy="6805005"/>
+          </a:xfrm>
+          <a:solidFill>
+            <a:schemeClr val="accent5">
+              <a:alpha val="10000"/>
+            </a:schemeClr>
+          </a:solidFill>
+        </p:grpSpPr>
+        <p:sp>
+          <p:nvSpPr>
+            <p:cNvPr id="24" name="Freeform: Shape 14">
+              <a:extLst>
+                <a:ext uri="{FF2B5EF4-FFF2-40B4-BE49-F238E27FC236}">
+                  <a16:creationId xmlns:a16="http://schemas.microsoft.com/office/drawing/2014/main" id="{C972EB4B-0539-4430-9340-8117B9D7C32D}"/>
+                </a:ext>
+                <a:ext uri="{C183D7F6-B498-43B3-948B-1728B52AA6E4}">
+                  <adec:decorative xmlns:adec="http://schemas.microsoft.com/office/drawing/2017/decorative" val="1"/>
+                </a:ext>
+              </a:extLst>
+            </p:cNvPr>
+            <p:cNvSpPr/>
+            <p:nvPr>
+              <p:extLst>
+                <p:ext uri="{386F3935-93C4-4BCD-93E2-E3B085C9AB24}">
+                  <p16:designElem xmlns:p16="http://schemas.microsoft.com/office/powerpoint/2015/main" val="1"/>
+                </p:ext>
+              </p:extLst>
+            </p:nvPr>
+          </p:nvSpPr>
+          <p:spPr>
+            <a:xfrm>
+              <a:off x="6096001" y="52996"/>
+              <a:ext cx="6093361" cy="6805003"/>
+            </a:xfrm>
+            <a:custGeom>
+              <a:avLst/>
+              <a:gdLst>
+                <a:gd name="connsiteX0" fmla="*/ 3391253 w 5890489"/>
+                <a:gd name="connsiteY0" fmla="*/ 0 h 6578438"/>
+                <a:gd name="connsiteX1" fmla="*/ 3434974 w 5890489"/>
+                <a:gd name="connsiteY1" fmla="*/ 646 h 6578438"/>
+                <a:gd name="connsiteX2" fmla="*/ 3522419 w 5890489"/>
+                <a:gd name="connsiteY2" fmla="*/ 2712 h 6578438"/>
+                <a:gd name="connsiteX3" fmla="*/ 3610261 w 5890489"/>
+                <a:gd name="connsiteY3" fmla="*/ 6458 h 6578438"/>
+                <a:gd name="connsiteX4" fmla="*/ 3786872 w 5890489"/>
+                <a:gd name="connsiteY4" fmla="*/ 20667 h 6578438"/>
+                <a:gd name="connsiteX5" fmla="*/ 3962291 w 5890489"/>
+                <a:gd name="connsiteY5" fmla="*/ 43530 h 6578438"/>
+                <a:gd name="connsiteX6" fmla="*/ 4135855 w 5890489"/>
+                <a:gd name="connsiteY6" fmla="*/ 75176 h 6578438"/>
+                <a:gd name="connsiteX7" fmla="*/ 4307299 w 5890489"/>
+                <a:gd name="connsiteY7" fmla="*/ 114315 h 6578438"/>
+                <a:gd name="connsiteX8" fmla="*/ 4476358 w 5890489"/>
+                <a:gd name="connsiteY8" fmla="*/ 160816 h 6578438"/>
+                <a:gd name="connsiteX9" fmla="*/ 4559829 w 5890489"/>
+                <a:gd name="connsiteY9" fmla="*/ 186779 h 6578438"/>
+                <a:gd name="connsiteX10" fmla="*/ 4642901 w 5890489"/>
+                <a:gd name="connsiteY10" fmla="*/ 213648 h 6578438"/>
+                <a:gd name="connsiteX11" fmla="*/ 5280847 w 5890489"/>
+                <a:gd name="connsiteY11" fmla="*/ 485936 h 6578438"/>
+                <a:gd name="connsiteX12" fmla="*/ 5865400 w 5890489"/>
+                <a:gd name="connsiteY12" fmla="*/ 851099 h 6578438"/>
+                <a:gd name="connsiteX13" fmla="*/ 5890489 w 5890489"/>
+                <a:gd name="connsiteY13" fmla="*/ 870950 h 6578438"/>
+                <a:gd name="connsiteX14" fmla="*/ 5890489 w 5890489"/>
+                <a:gd name="connsiteY14" fmla="*/ 1321814 h 6578438"/>
+                <a:gd name="connsiteX15" fmla="*/ 5887395 w 5890489"/>
+                <a:gd name="connsiteY15" fmla="*/ 1318952 h 6578438"/>
+                <a:gd name="connsiteX16" fmla="*/ 5830291 w 5890489"/>
+                <a:gd name="connsiteY16" fmla="*/ 1265992 h 6578438"/>
+                <a:gd name="connsiteX17" fmla="*/ 5815981 w 5890489"/>
+                <a:gd name="connsiteY17" fmla="*/ 1252687 h 6578438"/>
+                <a:gd name="connsiteX18" fmla="*/ 5801142 w 5890489"/>
+                <a:gd name="connsiteY18" fmla="*/ 1240158 h 6578438"/>
+                <a:gd name="connsiteX19" fmla="*/ 5771464 w 5890489"/>
+                <a:gd name="connsiteY19" fmla="*/ 1214969 h 6578438"/>
+                <a:gd name="connsiteX20" fmla="*/ 5651030 w 5890489"/>
+                <a:gd name="connsiteY20" fmla="*/ 1115767 h 6578438"/>
+                <a:gd name="connsiteX21" fmla="*/ 5123183 w 5890489"/>
+                <a:gd name="connsiteY21" fmla="*/ 780443 h 6578438"/>
+                <a:gd name="connsiteX22" fmla="*/ 4533860 w 5890489"/>
+                <a:gd name="connsiteY22" fmla="*/ 567701 h 6578438"/>
+                <a:gd name="connsiteX23" fmla="*/ 4457281 w 5890489"/>
+                <a:gd name="connsiteY23" fmla="*/ 550780 h 6578438"/>
+                <a:gd name="connsiteX24" fmla="*/ 4380568 w 5890489"/>
+                <a:gd name="connsiteY24" fmla="*/ 535279 h 6578438"/>
+                <a:gd name="connsiteX25" fmla="*/ 4303325 w 5890489"/>
+                <a:gd name="connsiteY25" fmla="*/ 522879 h 6578438"/>
+                <a:gd name="connsiteX26" fmla="*/ 4264769 w 5890489"/>
+                <a:gd name="connsiteY26" fmla="*/ 516679 h 6578438"/>
+                <a:gd name="connsiteX27" fmla="*/ 4226082 w 5890489"/>
+                <a:gd name="connsiteY27" fmla="*/ 511253 h 6578438"/>
+                <a:gd name="connsiteX28" fmla="*/ 4070934 w 5890489"/>
+                <a:gd name="connsiteY28" fmla="*/ 494848 h 6578438"/>
+                <a:gd name="connsiteX29" fmla="*/ 3915521 w 5890489"/>
+                <a:gd name="connsiteY29" fmla="*/ 486065 h 6578438"/>
+                <a:gd name="connsiteX30" fmla="*/ 3760241 w 5890489"/>
+                <a:gd name="connsiteY30" fmla="*/ 484257 h 6578438"/>
+                <a:gd name="connsiteX31" fmla="*/ 3682734 w 5890489"/>
+                <a:gd name="connsiteY31" fmla="*/ 486581 h 6578438"/>
+                <a:gd name="connsiteX32" fmla="*/ 3605491 w 5890489"/>
+                <a:gd name="connsiteY32" fmla="*/ 488907 h 6578438"/>
+                <a:gd name="connsiteX33" fmla="*/ 3527454 w 5890489"/>
+                <a:gd name="connsiteY33" fmla="*/ 493169 h 6578438"/>
+                <a:gd name="connsiteX34" fmla="*/ 3449151 w 5890489"/>
+                <a:gd name="connsiteY34" fmla="*/ 498336 h 6578438"/>
+                <a:gd name="connsiteX35" fmla="*/ 3410067 w 5890489"/>
+                <a:gd name="connsiteY35" fmla="*/ 500532 h 6578438"/>
+                <a:gd name="connsiteX36" fmla="*/ 3371246 w 5890489"/>
+                <a:gd name="connsiteY36" fmla="*/ 504279 h 6578438"/>
+                <a:gd name="connsiteX37" fmla="*/ 3293739 w 5890489"/>
+                <a:gd name="connsiteY37" fmla="*/ 511512 h 6578438"/>
+                <a:gd name="connsiteX38" fmla="*/ 2689445 w 5890489"/>
+                <a:gd name="connsiteY38" fmla="*/ 610198 h 6578438"/>
+                <a:gd name="connsiteX39" fmla="*/ 2117875 w 5890489"/>
+                <a:gd name="connsiteY39" fmla="*/ 800335 h 6578438"/>
+                <a:gd name="connsiteX40" fmla="*/ 1981276 w 5890489"/>
+                <a:gd name="connsiteY40" fmla="*/ 865566 h 6578438"/>
+                <a:gd name="connsiteX41" fmla="*/ 1847991 w 5890489"/>
+                <a:gd name="connsiteY41" fmla="*/ 938676 h 6578438"/>
+                <a:gd name="connsiteX42" fmla="*/ 1783069 w 5890489"/>
+                <a:gd name="connsiteY42" fmla="*/ 978718 h 6578438"/>
+                <a:gd name="connsiteX43" fmla="*/ 1750609 w 5890489"/>
+                <a:gd name="connsiteY43" fmla="*/ 998869 h 6578438"/>
+                <a:gd name="connsiteX44" fmla="*/ 1734312 w 5890489"/>
+                <a:gd name="connsiteY44" fmla="*/ 1008945 h 6578438"/>
+                <a:gd name="connsiteX45" fmla="*/ 1718547 w 5890489"/>
+                <a:gd name="connsiteY45" fmla="*/ 1019924 h 6578438"/>
+                <a:gd name="connsiteX46" fmla="*/ 1655481 w 5890489"/>
+                <a:gd name="connsiteY46" fmla="*/ 1063582 h 6578438"/>
+                <a:gd name="connsiteX47" fmla="*/ 1593077 w 5890489"/>
+                <a:gd name="connsiteY47" fmla="*/ 1108664 h 6578438"/>
+                <a:gd name="connsiteX48" fmla="*/ 1532263 w 5890489"/>
+                <a:gd name="connsiteY48" fmla="*/ 1156197 h 6578438"/>
+                <a:gd name="connsiteX49" fmla="*/ 1472509 w 5890489"/>
+                <a:gd name="connsiteY49" fmla="*/ 1205152 h 6578438"/>
+                <a:gd name="connsiteX50" fmla="*/ 1414212 w 5890489"/>
+                <a:gd name="connsiteY50" fmla="*/ 1256175 h 6578438"/>
+                <a:gd name="connsiteX51" fmla="*/ 1357242 w 5890489"/>
+                <a:gd name="connsiteY51" fmla="*/ 1308359 h 6578438"/>
+                <a:gd name="connsiteX52" fmla="*/ 1153072 w 5890489"/>
+                <a:gd name="connsiteY52" fmla="*/ 1529498 h 6578438"/>
+                <a:gd name="connsiteX53" fmla="*/ 1002694 w 5890489"/>
+                <a:gd name="connsiteY53" fmla="*/ 1770658 h 6578438"/>
+                <a:gd name="connsiteX54" fmla="*/ 974076 w 5890489"/>
+                <a:gd name="connsiteY54" fmla="*/ 1835371 h 6578438"/>
+                <a:gd name="connsiteX55" fmla="*/ 949564 w 5890489"/>
+                <a:gd name="connsiteY55" fmla="*/ 1903573 h 6578438"/>
+                <a:gd name="connsiteX56" fmla="*/ 927173 w 5890489"/>
+                <a:gd name="connsiteY56" fmla="*/ 1974229 h 6578438"/>
+                <a:gd name="connsiteX57" fmla="*/ 906107 w 5890489"/>
+                <a:gd name="connsiteY57" fmla="*/ 2046952 h 6578438"/>
+                <a:gd name="connsiteX58" fmla="*/ 751092 w 5890489"/>
+                <a:gd name="connsiteY58" fmla="*/ 2676266 h 6578438"/>
+                <a:gd name="connsiteX59" fmla="*/ 547189 w 5890489"/>
+                <a:gd name="connsiteY59" fmla="*/ 3308422 h 6578438"/>
+                <a:gd name="connsiteX60" fmla="*/ 441195 w 5890489"/>
+                <a:gd name="connsiteY60" fmla="*/ 3866306 h 6578438"/>
+                <a:gd name="connsiteX61" fmla="*/ 527182 w 5890489"/>
+                <a:gd name="connsiteY61" fmla="*/ 4439174 h 6578438"/>
+                <a:gd name="connsiteX62" fmla="*/ 775073 w 5890489"/>
+                <a:gd name="connsiteY62" fmla="*/ 4987240 h 6578438"/>
+                <a:gd name="connsiteX63" fmla="*/ 943206 w 5890489"/>
+                <a:gd name="connsiteY63" fmla="*/ 5244933 h 6578438"/>
+                <a:gd name="connsiteX64" fmla="*/ 1133728 w 5890489"/>
+                <a:gd name="connsiteY64" fmla="*/ 5490356 h 6578438"/>
+                <a:gd name="connsiteX65" fmla="*/ 1359626 w 5890489"/>
+                <a:gd name="connsiteY65" fmla="*/ 5709815 h 6578438"/>
+                <a:gd name="connsiteX66" fmla="*/ 1481254 w 5890489"/>
+                <a:gd name="connsiteY66" fmla="*/ 5809146 h 6578438"/>
+                <a:gd name="connsiteX67" fmla="*/ 1543260 w 5890489"/>
+                <a:gd name="connsiteY67" fmla="*/ 5856940 h 6578438"/>
+                <a:gd name="connsiteX68" fmla="*/ 1607518 w 5890489"/>
+                <a:gd name="connsiteY68" fmla="*/ 5901374 h 6578438"/>
+                <a:gd name="connsiteX69" fmla="*/ 2145566 w 5890489"/>
+                <a:gd name="connsiteY69" fmla="*/ 6193814 h 6578438"/>
+                <a:gd name="connsiteX70" fmla="*/ 2214991 w 5890489"/>
+                <a:gd name="connsiteY70" fmla="*/ 6221844 h 6578438"/>
+                <a:gd name="connsiteX71" fmla="*/ 2249307 w 5890489"/>
+                <a:gd name="connsiteY71" fmla="*/ 6236182 h 6578438"/>
+                <a:gd name="connsiteX72" fmla="*/ 2284285 w 5890489"/>
+                <a:gd name="connsiteY72" fmla="*/ 6248711 h 6578438"/>
+                <a:gd name="connsiteX73" fmla="*/ 2354241 w 5890489"/>
+                <a:gd name="connsiteY73" fmla="*/ 6273124 h 6578438"/>
+                <a:gd name="connsiteX74" fmla="*/ 2371597 w 5890489"/>
+                <a:gd name="connsiteY74" fmla="*/ 6279324 h 6578438"/>
+                <a:gd name="connsiteX75" fmla="*/ 2387894 w 5890489"/>
+                <a:gd name="connsiteY75" fmla="*/ 6287719 h 6578438"/>
+                <a:gd name="connsiteX76" fmla="*/ 2421414 w 5890489"/>
+                <a:gd name="connsiteY76" fmla="*/ 6302186 h 6578438"/>
+                <a:gd name="connsiteX77" fmla="*/ 2489117 w 5890489"/>
+                <a:gd name="connsiteY77" fmla="*/ 6329441 h 6578438"/>
+                <a:gd name="connsiteX78" fmla="*/ 2522902 w 5890489"/>
+                <a:gd name="connsiteY78" fmla="*/ 6343134 h 6578438"/>
+                <a:gd name="connsiteX79" fmla="*/ 2556953 w 5890489"/>
+                <a:gd name="connsiteY79" fmla="*/ 6356051 h 6578438"/>
+                <a:gd name="connsiteX80" fmla="*/ 2695009 w 5890489"/>
+                <a:gd name="connsiteY80" fmla="*/ 6401905 h 6578438"/>
+                <a:gd name="connsiteX81" fmla="*/ 3268035 w 5890489"/>
+                <a:gd name="connsiteY81" fmla="*/ 6501238 h 6578438"/>
+                <a:gd name="connsiteX82" fmla="*/ 3341038 w 5890489"/>
+                <a:gd name="connsiteY82" fmla="*/ 6506145 h 6578438"/>
+                <a:gd name="connsiteX83" fmla="*/ 3414703 w 5890489"/>
+                <a:gd name="connsiteY83" fmla="*/ 6507050 h 6578438"/>
+                <a:gd name="connsiteX84" fmla="*/ 3488237 w 5890489"/>
+                <a:gd name="connsiteY84" fmla="*/ 6508212 h 6578438"/>
+                <a:gd name="connsiteX85" fmla="*/ 3524142 w 5890489"/>
+                <a:gd name="connsiteY85" fmla="*/ 6507955 h 6578438"/>
+                <a:gd name="connsiteX86" fmla="*/ 3559252 w 5890489"/>
+                <a:gd name="connsiteY86" fmla="*/ 6506921 h 6578438"/>
+                <a:gd name="connsiteX87" fmla="*/ 3629207 w 5890489"/>
+                <a:gd name="connsiteY87" fmla="*/ 6503045 h 6578438"/>
+                <a:gd name="connsiteX88" fmla="*/ 3698633 w 5890489"/>
+                <a:gd name="connsiteY88" fmla="*/ 6496845 h 6578438"/>
+                <a:gd name="connsiteX89" fmla="*/ 3733213 w 5890489"/>
+                <a:gd name="connsiteY89" fmla="*/ 6493357 h 6578438"/>
+                <a:gd name="connsiteX90" fmla="*/ 3767529 w 5890489"/>
+                <a:gd name="connsiteY90" fmla="*/ 6488707 h 6578438"/>
+                <a:gd name="connsiteX91" fmla="*/ 3801845 w 5890489"/>
+                <a:gd name="connsiteY91" fmla="*/ 6484057 h 6578438"/>
+                <a:gd name="connsiteX92" fmla="*/ 3835895 w 5890489"/>
+                <a:gd name="connsiteY92" fmla="*/ 6478116 h 6578438"/>
+                <a:gd name="connsiteX93" fmla="*/ 4364801 w 5890489"/>
+                <a:gd name="connsiteY93" fmla="*/ 6308517 h 6578438"/>
+                <a:gd name="connsiteX94" fmla="*/ 4861379 w 5890489"/>
+                <a:gd name="connsiteY94" fmla="*/ 6000576 h 6578438"/>
+                <a:gd name="connsiteX95" fmla="*/ 5341263 w 5890489"/>
+                <a:gd name="connsiteY95" fmla="*/ 5605834 h 6578438"/>
+                <a:gd name="connsiteX96" fmla="*/ 5587301 w 5890489"/>
+                <a:gd name="connsiteY96" fmla="*/ 5390379 h 6578438"/>
+                <a:gd name="connsiteX97" fmla="*/ 5849105 w 5890489"/>
+                <a:gd name="connsiteY97" fmla="*/ 5176344 h 6578438"/>
+                <a:gd name="connsiteX98" fmla="*/ 5890489 w 5890489"/>
+                <a:gd name="connsiteY98" fmla="*/ 5145260 h 6578438"/>
+                <a:gd name="connsiteX99" fmla="*/ 5890489 w 5890489"/>
+                <a:gd name="connsiteY99" fmla="*/ 5995323 h 6578438"/>
+                <a:gd name="connsiteX100" fmla="*/ 5811477 w 5890489"/>
+                <a:gd name="connsiteY100" fmla="*/ 6077819 h 6578438"/>
+                <a:gd name="connsiteX101" fmla="*/ 5301384 w 5890489"/>
+                <a:gd name="connsiteY101" fmla="*/ 6542958 h 6578438"/>
+                <a:gd name="connsiteX102" fmla="*/ 5252008 w 5890489"/>
+                <a:gd name="connsiteY102" fmla="*/ 6578438 h 6578438"/>
+                <a:gd name="connsiteX103" fmla="*/ 1653730 w 5890489"/>
+                <a:gd name="connsiteY103" fmla="*/ 6578438 h 6578438"/>
+                <a:gd name="connsiteX104" fmla="*/ 1549768 w 5890489"/>
+                <a:gd name="connsiteY104" fmla="*/ 6488821 h 6578438"/>
+                <a:gd name="connsiteX105" fmla="*/ 1298282 w 5890489"/>
+                <a:gd name="connsiteY105" fmla="*/ 6243932 h 6578438"/>
+                <a:gd name="connsiteX106" fmla="*/ 1237999 w 5890489"/>
+                <a:gd name="connsiteY106" fmla="*/ 6181671 h 6578438"/>
+                <a:gd name="connsiteX107" fmla="*/ 1179967 w 5890489"/>
+                <a:gd name="connsiteY107" fmla="*/ 6117862 h 6578438"/>
+                <a:gd name="connsiteX108" fmla="*/ 1121936 w 5890489"/>
+                <a:gd name="connsiteY108" fmla="*/ 6054569 h 6578438"/>
+                <a:gd name="connsiteX109" fmla="*/ 1065628 w 5890489"/>
+                <a:gd name="connsiteY109" fmla="*/ 5990243 h 6578438"/>
+                <a:gd name="connsiteX110" fmla="*/ 954335 w 5890489"/>
+                <a:gd name="connsiteY110" fmla="*/ 5861460 h 6578438"/>
+                <a:gd name="connsiteX111" fmla="*/ 898953 w 5890489"/>
+                <a:gd name="connsiteY111" fmla="*/ 5797393 h 6578438"/>
+                <a:gd name="connsiteX112" fmla="*/ 842908 w 5890489"/>
+                <a:gd name="connsiteY112" fmla="*/ 5733582 h 6578438"/>
+                <a:gd name="connsiteX113" fmla="*/ 622442 w 5890489"/>
+                <a:gd name="connsiteY113" fmla="*/ 5471884 h 6578438"/>
+                <a:gd name="connsiteX114" fmla="*/ 425559 w 5890489"/>
+                <a:gd name="connsiteY114" fmla="*/ 5190036 h 6578438"/>
+                <a:gd name="connsiteX115" fmla="*/ 123877 w 5890489"/>
+                <a:gd name="connsiteY115" fmla="*/ 4564210 h 6578438"/>
+                <a:gd name="connsiteX116" fmla="*/ 130 w 5890489"/>
+                <a:gd name="connsiteY116" fmla="*/ 3865530 h 6578438"/>
+                <a:gd name="connsiteX117" fmla="*/ 30602 w 5890489"/>
+                <a:gd name="connsiteY117" fmla="*/ 3505793 h 6578438"/>
+                <a:gd name="connsiteX118" fmla="*/ 126924 w 5890489"/>
+                <a:gd name="connsiteY118" fmla="*/ 3157164 h 6578438"/>
+                <a:gd name="connsiteX119" fmla="*/ 334803 w 5890489"/>
+                <a:gd name="connsiteY119" fmla="*/ 2560530 h 6578438"/>
+                <a:gd name="connsiteX120" fmla="*/ 381176 w 5890489"/>
+                <a:gd name="connsiteY120" fmla="*/ 2409144 h 6578438"/>
+                <a:gd name="connsiteX121" fmla="*/ 425825 w 5890489"/>
+                <a:gd name="connsiteY121" fmla="*/ 2255819 h 6578438"/>
+                <a:gd name="connsiteX122" fmla="*/ 470210 w 5890489"/>
+                <a:gd name="connsiteY122" fmla="*/ 2099523 h 6578438"/>
+                <a:gd name="connsiteX123" fmla="*/ 492998 w 5890489"/>
+                <a:gd name="connsiteY123" fmla="*/ 2020213 h 6578438"/>
+                <a:gd name="connsiteX124" fmla="*/ 517509 w 5890489"/>
+                <a:gd name="connsiteY124" fmla="*/ 1939224 h 6578438"/>
+                <a:gd name="connsiteX125" fmla="*/ 544007 w 5890489"/>
+                <a:gd name="connsiteY125" fmla="*/ 1857201 h 6578438"/>
+                <a:gd name="connsiteX126" fmla="*/ 573288 w 5890489"/>
+                <a:gd name="connsiteY126" fmla="*/ 1774274 h 6578438"/>
+                <a:gd name="connsiteX127" fmla="*/ 606146 w 5890489"/>
+                <a:gd name="connsiteY127" fmla="*/ 1690832 h 6578438"/>
+                <a:gd name="connsiteX128" fmla="*/ 644569 w 5890489"/>
+                <a:gd name="connsiteY128" fmla="*/ 1607775 h 6578438"/>
+                <a:gd name="connsiteX129" fmla="*/ 837874 w 5890489"/>
+                <a:gd name="connsiteY129" fmla="*/ 1297638 h 6578438"/>
+                <a:gd name="connsiteX130" fmla="*/ 1069602 w 5890489"/>
+                <a:gd name="connsiteY130" fmla="*/ 1032194 h 6578438"/>
+                <a:gd name="connsiteX131" fmla="*/ 1130548 w 5890489"/>
+                <a:gd name="connsiteY131" fmla="*/ 970839 h 6578438"/>
+                <a:gd name="connsiteX132" fmla="*/ 1192024 w 5890489"/>
+                <a:gd name="connsiteY132" fmla="*/ 910129 h 6578438"/>
+                <a:gd name="connsiteX133" fmla="*/ 1255356 w 5890489"/>
+                <a:gd name="connsiteY133" fmla="*/ 850841 h 6578438"/>
+                <a:gd name="connsiteX134" fmla="*/ 1319614 w 5890489"/>
+                <a:gd name="connsiteY134" fmla="*/ 792068 h 6578438"/>
+                <a:gd name="connsiteX135" fmla="*/ 1385728 w 5890489"/>
+                <a:gd name="connsiteY135" fmla="*/ 734975 h 6578438"/>
+                <a:gd name="connsiteX136" fmla="*/ 1452768 w 5890489"/>
+                <a:gd name="connsiteY136" fmla="*/ 678528 h 6578438"/>
+                <a:gd name="connsiteX137" fmla="*/ 1469594 w 5890489"/>
+                <a:gd name="connsiteY137" fmla="*/ 664449 h 6578438"/>
+                <a:gd name="connsiteX138" fmla="*/ 1487083 w 5890489"/>
+                <a:gd name="connsiteY138" fmla="*/ 651015 h 6578438"/>
+                <a:gd name="connsiteX139" fmla="*/ 1522193 w 5890489"/>
+                <a:gd name="connsiteY139" fmla="*/ 624277 h 6578438"/>
+                <a:gd name="connsiteX140" fmla="*/ 1592415 w 5890489"/>
+                <a:gd name="connsiteY140" fmla="*/ 570671 h 6578438"/>
+                <a:gd name="connsiteX141" fmla="*/ 1738287 w 5890489"/>
+                <a:gd name="connsiteY141" fmla="*/ 469402 h 6578438"/>
+                <a:gd name="connsiteX142" fmla="*/ 1890918 w 5890489"/>
+                <a:gd name="connsiteY142" fmla="*/ 376530 h 6578438"/>
+                <a:gd name="connsiteX143" fmla="*/ 2555363 w 5890489"/>
+                <a:gd name="connsiteY143" fmla="*/ 105274 h 6578438"/>
+                <a:gd name="connsiteX144" fmla="*/ 3259291 w 5890489"/>
+                <a:gd name="connsiteY144" fmla="*/ 3229 h 6578438"/>
+                <a:gd name="connsiteX145" fmla="*/ 3347265 w 5890489"/>
+                <a:gd name="connsiteY145" fmla="*/ 903 h 6578438"/>
+              </a:gdLst>
+              <a:ahLst/>
+              <a:cxnLst>
+                <a:cxn ang="0">
+                  <a:pos x="connsiteX0" y="connsiteY0"/>
+                </a:cxn>
+                <a:cxn ang="0">
+                  <a:pos x="connsiteX1" y="connsiteY1"/>
+                </a:cxn>
+                <a:cxn ang="0">
+                  <a:pos x="connsiteX2" y="connsiteY2"/>
+                </a:cxn>
+                <a:cxn ang="0">
+                  <a:pos x="connsiteX3" y="connsiteY3"/>
+                </a:cxn>
+                <a:cxn ang="0">
+                  <a:pos x="connsiteX4" y="connsiteY4"/>
+                </a:cxn>
+                <a:cxn ang="0">
+                  <a:pos x="connsiteX5" y="connsiteY5"/>
+                </a:cxn>
+                <a:cxn ang="0">
+                  <a:pos x="connsiteX6" y="connsiteY6"/>
+                </a:cxn>
+                <a:cxn ang="0">
+                  <a:pos x="connsiteX7" y="connsiteY7"/>
+                </a:cxn>
+                <a:cxn ang="0">
+                  <a:pos x="connsiteX8" y="connsiteY8"/>
+                </a:cxn>
+                <a:cxn ang="0">
+                  <a:pos x="connsiteX9" y="connsiteY9"/>
+                </a:cxn>
+                <a:cxn ang="0">
+                  <a:pos x="connsiteX10" y="connsiteY10"/>
+                </a:cxn>
+                <a:cxn ang="0">
+                  <a:pos x="connsiteX11" y="connsiteY11"/>
+                </a:cxn>
+                <a:cxn ang="0">
+                  <a:pos x="connsiteX12" y="connsiteY12"/>
+                </a:cxn>
+                <a:cxn ang="0">
+                  <a:pos x="connsiteX13" y="connsiteY13"/>
+                </a:cxn>
+                <a:cxn ang="0">
+                  <a:pos x="connsiteX14" y="connsiteY14"/>
+                </a:cxn>
+                <a:cxn ang="0">
+                  <a:pos x="connsiteX15" y="connsiteY15"/>
+                </a:cxn>
+                <a:cxn ang="0">
+                  <a:pos x="connsiteX16" y="connsiteY16"/>
+                </a:cxn>
+                <a:cxn ang="0">
+                  <a:pos x="connsiteX17" y="connsiteY17"/>
+                </a:cxn>
+                <a:cxn ang="0">
+                  <a:pos x="connsiteX18" y="connsiteY18"/>
+                </a:cxn>
+                <a:cxn ang="0">
+                  <a:pos x="connsiteX19" y="connsiteY19"/>
+                </a:cxn>
+                <a:cxn ang="0">
+                  <a:pos x="connsiteX20" y="connsiteY20"/>
+                </a:cxn>
+                <a:cxn ang="0">
+                  <a:pos x="connsiteX21" y="connsiteY21"/>
+                </a:cxn>
+                <a:cxn ang="0">
+                  <a:pos x="connsiteX22" y="connsiteY22"/>
+                </a:cxn>
+                <a:cxn ang="0">
+                  <a:pos x="connsiteX23" y="connsiteY23"/>
+                </a:cxn>
+                <a:cxn ang="0">
+                  <a:pos x="connsiteX24" y="connsiteY24"/>
+                </a:cxn>
+                <a:cxn ang="0">
+                  <a:pos x="connsiteX25" y="connsiteY25"/>
+                </a:cxn>
+                <a:cxn ang="0">
+                  <a:pos x="connsiteX26" y="connsiteY26"/>
+                </a:cxn>
+                <a:cxn ang="0">
+                  <a:pos x="connsiteX27" y="connsiteY27"/>
+                </a:cxn>
+                <a:cxn ang="0">
+                  <a:pos x="connsiteX28" y="connsiteY28"/>
+                </a:cxn>
+                <a:cxn ang="0">
+                  <a:pos x="connsiteX29" y="connsiteY29"/>
+                </a:cxn>
+                <a:cxn ang="0">
+                  <a:pos x="connsiteX30" y="connsiteY30"/>
+                </a:cxn>
+                <a:cxn ang="0">
+                  <a:pos x="connsiteX31" y="connsiteY31"/>
+                </a:cxn>
+                <a:cxn ang="0">
+                  <a:pos x="connsiteX32" y="connsiteY32"/>
+                </a:cxn>
+                <a:cxn ang="0">
+                  <a:pos x="connsiteX33" y="connsiteY33"/>
+                </a:cxn>
+                <a:cxn ang="0">
+                  <a:pos x="connsiteX34" y="connsiteY34"/>
+                </a:cxn>
+                <a:cxn ang="0">
+                  <a:pos x="connsiteX35" y="connsiteY35"/>
+                </a:cxn>
+                <a:cxn ang="0">
+                  <a:pos x="connsiteX36" y="connsiteY36"/>
+                </a:cxn>
+                <a:cxn ang="0">
+                  <a:pos x="connsiteX37" y="connsiteY37"/>
+                </a:cxn>
+                <a:cxn ang="0">
+                  <a:pos x="connsiteX38" y="connsiteY38"/>
+                </a:cxn>
+                <a:cxn ang="0">
+                  <a:pos x="connsiteX39" y="connsiteY39"/>
+                </a:cxn>
+                <a:cxn ang="0">
+                  <a:pos x="connsiteX40" y="connsiteY40"/>
+                </a:cxn>
+                <a:cxn ang="0">
+                  <a:pos x="connsiteX41" y="connsiteY41"/>
+                </a:cxn>
+                <a:cxn ang="0">
+                  <a:pos x="connsiteX42" y="connsiteY42"/>
+                </a:cxn>
+                <a:cxn ang="0">
+                  <a:pos x="connsiteX43" y="connsiteY43"/>
+                </a:cxn>
+                <a:cxn ang="0">
+                  <a:pos x="connsiteX44" y="connsiteY44"/>
+                </a:cxn>
+                <a:cxn ang="0">
+                  <a:pos x="connsiteX45" y="connsiteY45"/>
+                </a:cxn>
+                <a:cxn ang="0">
+                  <a:pos x="connsiteX46" y="connsiteY46"/>
+                </a:cxn>
+                <a:cxn ang="0">
+                  <a:pos x="connsiteX47" y="connsiteY47"/>
+                </a:cxn>
+                <a:cxn ang="0">
+                  <a:pos x="connsiteX48" y="connsiteY48"/>
+                </a:cxn>
+                <a:cxn ang="0">
+                  <a:pos x="connsiteX49" y="connsiteY49"/>
+                </a:cxn>
+                <a:cxn ang="0">
+                  <a:pos x="connsiteX50" y="connsiteY50"/>
+                </a:cxn>
+                <a:cxn ang="0">
+                  <a:pos x="connsiteX51" y="connsiteY51"/>
+                </a:cxn>
+                <a:cxn ang="0">
+                  <a:pos x="connsiteX52" y="connsiteY52"/>
+                </a:cxn>
+                <a:cxn ang="0">
+                  <a:pos x="connsiteX53" y="connsiteY53"/>
+                </a:cxn>
+                <a:cxn ang="0">
+                  <a:pos x="connsiteX54" y="connsiteY54"/>
+                </a:cxn>
+                <a:cxn ang="0">
+                  <a:pos x="connsiteX55" y="connsiteY55"/>
+                </a:cxn>
+                <a:cxn ang="0">
+                  <a:pos x="connsiteX56" y="connsiteY56"/>
+                </a:cxn>
+                <a:cxn ang="0">
+                  <a:pos x="connsiteX57" y="connsiteY57"/>
+                </a:cxn>
+                <a:cxn ang="0">
+                  <a:pos x="connsiteX58" y="connsiteY58"/>
+                </a:cxn>
+                <a:cxn ang="0">
+                  <a:pos x="connsiteX59" y="connsiteY59"/>
+                </a:cxn>
+                <a:cxn ang="0">
+                  <a:pos x="connsiteX60" y="connsiteY60"/>
+                </a:cxn>
+                <a:cxn ang="0">
+                  <a:pos x="connsiteX61" y="connsiteY61"/>
+                </a:cxn>
+                <a:cxn ang="0">
+                  <a:pos x="connsiteX62" y="connsiteY62"/>
+                </a:cxn>
+                <a:cxn ang="0">
+                  <a:pos x="connsiteX63" y="connsiteY63"/>
+                </a:cxn>
+                <a:cxn ang="0">
+                  <a:pos x="connsiteX64" y="connsiteY64"/>
+                </a:cxn>
+                <a:cxn ang="0">
+                  <a:pos x="connsiteX65" y="connsiteY65"/>
+                </a:cxn>
+                <a:cxn ang="0">
+                  <a:pos x="connsiteX66" y="connsiteY66"/>
+                </a:cxn>
+                <a:cxn ang="0">
+                  <a:pos x="connsiteX67" y="connsiteY67"/>
+                </a:cxn>
+                <a:cxn ang="0">
+                  <a:pos x="connsiteX68" y="connsiteY68"/>
+                </a:cxn>
+                <a:cxn ang="0">
+                  <a:pos x="connsiteX69" y="connsiteY69"/>
+                </a:cxn>
+                <a:cxn ang="0">
+                  <a:pos x="connsiteX70" y="connsiteY70"/>
+                </a:cxn>
+                <a:cxn ang="0">
+                  <a:pos x="connsiteX71" y="connsiteY71"/>
+                </a:cxn>
+                <a:cxn ang="0">
+                  <a:pos x="connsiteX72" y="connsiteY72"/>
+                </a:cxn>
+                <a:cxn ang="0">
+                  <a:pos x="connsiteX73" y="connsiteY73"/>
+                </a:cxn>
+                <a:cxn ang="0">
+                  <a:pos x="connsiteX74" y="connsiteY74"/>
+                </a:cxn>
+                <a:cxn ang="0">
+                  <a:pos x="connsiteX75" y="connsiteY75"/>
+                </a:cxn>
+                <a:cxn ang="0">
+                  <a:pos x="connsiteX76" y="connsiteY76"/>
+                </a:cxn>
+                <a:cxn ang="0">
+                  <a:pos x="connsiteX77" y="connsiteY77"/>
+                </a:cxn>
+                <a:cxn ang="0">
+                  <a:pos x="connsiteX78" y="connsiteY78"/>
+                </a:cxn>
+                <a:cxn ang="0">
+                  <a:pos x="connsiteX79" y="connsiteY79"/>
+                </a:cxn>
+                <a:cxn ang="0">
+                  <a:pos x="connsiteX80" y="connsiteY80"/>
+                </a:cxn>
+                <a:cxn ang="0">
+                  <a:pos x="connsiteX81" y="connsiteY81"/>
+                </a:cxn>
+                <a:cxn ang="0">
+                  <a:pos x="connsiteX82" y="connsiteY82"/>
+                </a:cxn>
+                <a:cxn ang="0">
+                  <a:pos x="connsiteX83" y="connsiteY83"/>
+                </a:cxn>
+                <a:cxn ang="0">
+                  <a:pos x="connsiteX84" y="connsiteY84"/>
+                </a:cxn>
+                <a:cxn ang="0">
+                  <a:pos x="connsiteX85" y="connsiteY85"/>
+                </a:cxn>
+                <a:cxn ang="0">
+                  <a:pos x="connsiteX86" y="connsiteY86"/>
+                </a:cxn>
+                <a:cxn ang="0">
+                  <a:pos x="connsiteX87" y="connsiteY87"/>
+                </a:cxn>
+                <a:cxn ang="0">
+                  <a:pos x="connsiteX88" y="connsiteY88"/>
+                </a:cxn>
+                <a:cxn ang="0">
+                  <a:pos x="connsiteX89" y="connsiteY89"/>
+                </a:cxn>
+                <a:cxn ang="0">
+                  <a:pos x="connsiteX90" y="connsiteY90"/>
+                </a:cxn>
+                <a:cxn ang="0">
+                  <a:pos x="connsiteX91" y="connsiteY91"/>
+                </a:cxn>
+                <a:cxn ang="0">
+                  <a:pos x="connsiteX92" y="connsiteY92"/>
+                </a:cxn>
+                <a:cxn ang="0">
+                  <a:pos x="connsiteX93" y="connsiteY93"/>
+                </a:cxn>
+                <a:cxn ang="0">
+                  <a:pos x="connsiteX94" y="connsiteY94"/>
+                </a:cxn>
+                <a:cxn ang="0">
+                  <a:pos x="connsiteX95" y="connsiteY95"/>
+                </a:cxn>
+                <a:cxn ang="0">
+                  <a:pos x="connsiteX96" y="connsiteY96"/>
+                </a:cxn>
+                <a:cxn ang="0">
+                  <a:pos x="connsiteX97" y="connsiteY97"/>
+                </a:cxn>
+                <a:cxn ang="0">
+                  <a:pos x="connsiteX98" y="connsiteY98"/>
+                </a:cxn>
+                <a:cxn ang="0">
+                  <a:pos x="connsiteX99" y="connsiteY99"/>
+                </a:cxn>
+                <a:cxn ang="0">
+                  <a:pos x="connsiteX100" y="connsiteY100"/>
+                </a:cxn>
+                <a:cxn ang="0">
+                  <a:pos x="connsiteX101" y="connsiteY101"/>
+                </a:cxn>
+                <a:cxn ang="0">
+                  <a:pos x="connsiteX102" y="connsiteY102"/>
+                </a:cxn>
+                <a:cxn ang="0">
+                  <a:pos x="connsiteX103" y="connsiteY103"/>
+                </a:cxn>
+                <a:cxn ang="0">
+                  <a:pos x="connsiteX104" y="connsiteY104"/>
+                </a:cxn>
+                <a:cxn ang="0">
+                  <a:pos x="connsiteX105" y="connsiteY105"/>
+                </a:cxn>
+                <a:cxn ang="0">
+                  <a:pos x="connsiteX106" y="connsiteY106"/>
+                </a:cxn>
+                <a:cxn ang="0">
+                  <a:pos x="connsiteX107" y="connsiteY107"/>
+                </a:cxn>
+                <a:cxn ang="0">
+                  <a:pos x="connsiteX108" y="connsiteY108"/>
+                </a:cxn>
+                <a:cxn ang="0">
+                  <a:pos x="connsiteX109" y="connsiteY109"/>
+                </a:cxn>
+                <a:cxn ang="0">
+                  <a:pos x="connsiteX110" y="connsiteY110"/>
+                </a:cxn>
+                <a:cxn ang="0">
+                  <a:pos x="connsiteX111" y="connsiteY111"/>
+                </a:cxn>
+                <a:cxn ang="0">
+                  <a:pos x="connsiteX112" y="connsiteY112"/>
+                </a:cxn>
+                <a:cxn ang="0">
+                  <a:pos x="connsiteX113" y="connsiteY113"/>
+                </a:cxn>
+                <a:cxn ang="0">
+                  <a:pos x="connsiteX114" y="connsiteY114"/>
+                </a:cxn>
+                <a:cxn ang="0">
+                  <a:pos x="connsiteX115" y="connsiteY115"/>
+                </a:cxn>
+                <a:cxn ang="0">
+                  <a:pos x="connsiteX116" y="connsiteY116"/>
+                </a:cxn>
+                <a:cxn ang="0">
+                  <a:pos x="connsiteX117" y="connsiteY117"/>
+                </a:cxn>
+                <a:cxn ang="0">
+                  <a:pos x="connsiteX118" y="connsiteY118"/>
+                </a:cxn>
+                <a:cxn ang="0">
+                  <a:pos x="connsiteX119" y="connsiteY119"/>
+                </a:cxn>
+                <a:cxn ang="0">
+                  <a:pos x="connsiteX120" y="connsiteY120"/>
+                </a:cxn>
+                <a:cxn ang="0">
+                  <a:pos x="connsiteX121" y="connsiteY121"/>
+                </a:cxn>
+                <a:cxn ang="0">
+                  <a:pos x="connsiteX122" y="connsiteY122"/>
+                </a:cxn>
+                <a:cxn ang="0">
+                  <a:pos x="connsiteX123" y="connsiteY123"/>
+                </a:cxn>
+                <a:cxn ang="0">
+                  <a:pos x="connsiteX124" y="connsiteY124"/>
+                </a:cxn>
+                <a:cxn ang="0">
+                  <a:pos x="connsiteX125" y="connsiteY125"/>
+                </a:cxn>
+                <a:cxn ang="0">
+                  <a:pos x="connsiteX126" y="connsiteY126"/>
+                </a:cxn>
+                <a:cxn ang="0">
+                  <a:pos x="connsiteX127" y="connsiteY127"/>
+                </a:cxn>
+                <a:cxn ang="0">
+                  <a:pos x="connsiteX128" y="connsiteY128"/>
+                </a:cxn>
+                <a:cxn ang="0">
+                  <a:pos x="connsiteX129" y="connsiteY129"/>
+                </a:cxn>
+                <a:cxn ang="0">
+                  <a:pos x="connsiteX130" y="connsiteY130"/>
+                </a:cxn>
+                <a:cxn ang="0">
+                  <a:pos x="connsiteX131" y="connsiteY131"/>
+                </a:cxn>
+                <a:cxn ang="0">
+                  <a:pos x="connsiteX132" y="connsiteY132"/>
+                </a:cxn>
+                <a:cxn ang="0">
+                  <a:pos x="connsiteX133" y="connsiteY133"/>
+                </a:cxn>
+                <a:cxn ang="0">
+                  <a:pos x="connsiteX134" y="connsiteY134"/>
+                </a:cxn>
+                <a:cxn ang="0">
+                  <a:pos x="connsiteX135" y="connsiteY135"/>
+                </a:cxn>
+                <a:cxn ang="0">
+                  <a:pos x="connsiteX136" y="connsiteY136"/>
+                </a:cxn>
+                <a:cxn ang="0">
+                  <a:pos x="connsiteX137" y="connsiteY137"/>
+                </a:cxn>
+                <a:cxn ang="0">
+                  <a:pos x="connsiteX138" y="connsiteY138"/>
+                </a:cxn>
+                <a:cxn ang="0">
+                  <a:pos x="connsiteX139" y="connsiteY139"/>
+                </a:cxn>
+                <a:cxn ang="0">
+                  <a:pos x="connsiteX140" y="connsiteY140"/>
+                </a:cxn>
+                <a:cxn ang="0">
+                  <a:pos x="connsiteX141" y="connsiteY141"/>
+                </a:cxn>
+                <a:cxn ang="0">
+                  <a:pos x="connsiteX142" y="connsiteY142"/>
+                </a:cxn>
+                <a:cxn ang="0">
+                  <a:pos x="connsiteX143" y="connsiteY143"/>
+                </a:cxn>
+                <a:cxn ang="0">
+                  <a:pos x="connsiteX144" y="connsiteY144"/>
+                </a:cxn>
+                <a:cxn ang="0">
+                  <a:pos x="connsiteX145" y="connsiteY145"/>
+                </a:cxn>
+              </a:cxnLst>
+              <a:rect l="l" t="t" r="r" b="b"/>
+              <a:pathLst>
+                <a:path w="5890489" h="6578438">
+                  <a:moveTo>
+                    <a:pt x="3391253" y="0"/>
+                  </a:moveTo>
+                  <a:lnTo>
+                    <a:pt x="3434974" y="646"/>
+                  </a:lnTo>
+                  <a:lnTo>
+                    <a:pt x="3522419" y="2712"/>
+                  </a:lnTo>
+                  <a:cubicBezTo>
+                    <a:pt x="3551567" y="3488"/>
+                    <a:pt x="3580451" y="3746"/>
+                    <a:pt x="3610261" y="6458"/>
+                  </a:cubicBezTo>
+                  <a:cubicBezTo>
+                    <a:pt x="3669353" y="10850"/>
+                    <a:pt x="3728179" y="14337"/>
+                    <a:pt x="3786872" y="20667"/>
+                  </a:cubicBezTo>
+                  <a:lnTo>
+                    <a:pt x="3962291" y="43530"/>
+                  </a:lnTo>
+                  <a:lnTo>
+                    <a:pt x="4135855" y="75176"/>
+                  </a:lnTo>
+                  <a:cubicBezTo>
+                    <a:pt x="4193224" y="87836"/>
+                    <a:pt x="4250328" y="101398"/>
+                    <a:pt x="4307299" y="114315"/>
+                  </a:cubicBezTo>
+                  <a:cubicBezTo>
+                    <a:pt x="4364139" y="128394"/>
+                    <a:pt x="4420050" y="145575"/>
+                    <a:pt x="4476358" y="160816"/>
+                  </a:cubicBezTo>
+                  <a:cubicBezTo>
+                    <a:pt x="4504580" y="167921"/>
+                    <a:pt x="4532138" y="177995"/>
+                    <a:pt x="4559829" y="186779"/>
+                  </a:cubicBezTo>
+                  <a:lnTo>
+                    <a:pt x="4642901" y="213648"/>
+                  </a:lnTo>
+                  <a:cubicBezTo>
+                    <a:pt x="4863234" y="288307"/>
+                    <a:pt x="5076414" y="379371"/>
+                    <a:pt x="5280847" y="485936"/>
+                  </a:cubicBezTo>
+                  <a:cubicBezTo>
+                    <a:pt x="5485018" y="592631"/>
+                    <a:pt x="5681768" y="713145"/>
+                    <a:pt x="5865400" y="851099"/>
+                  </a:cubicBezTo>
+                  <a:lnTo>
+                    <a:pt x="5890489" y="870950"/>
+                  </a:lnTo>
+                  <a:lnTo>
+                    <a:pt x="5890489" y="1321814"/>
+                  </a:lnTo>
+                  <a:lnTo>
+                    <a:pt x="5887395" y="1318952"/>
+                  </a:lnTo>
+                  <a:lnTo>
+                    <a:pt x="5830291" y="1265992"/>
+                  </a:lnTo>
+                  <a:lnTo>
+                    <a:pt x="5815981" y="1252687"/>
+                  </a:lnTo>
+                  <a:lnTo>
+                    <a:pt x="5801142" y="1240158"/>
+                  </a:lnTo>
+                  <a:lnTo>
+                    <a:pt x="5771464" y="1214969"/>
+                  </a:lnTo>
+                  <a:cubicBezTo>
+                    <a:pt x="5731849" y="1181385"/>
+                    <a:pt x="5692897" y="1146896"/>
+                    <a:pt x="5651030" y="1115767"/>
+                  </a:cubicBezTo>
+                  <a:cubicBezTo>
+                    <a:pt x="5487534" y="986985"/>
+                    <a:pt x="5311321" y="872542"/>
+                    <a:pt x="5123183" y="780443"/>
+                  </a:cubicBezTo>
+                  <a:cubicBezTo>
+                    <a:pt x="4935309" y="688087"/>
+                    <a:pt x="4737102" y="616398"/>
+                    <a:pt x="4533860" y="567701"/>
+                  </a:cubicBezTo>
+                  <a:lnTo>
+                    <a:pt x="4457281" y="550780"/>
+                  </a:lnTo>
+                  <a:cubicBezTo>
+                    <a:pt x="4431709" y="545484"/>
+                    <a:pt x="4406536" y="538896"/>
+                    <a:pt x="4380568" y="535279"/>
+                  </a:cubicBezTo>
+                  <a:lnTo>
+                    <a:pt x="4303325" y="522879"/>
+                  </a:lnTo>
+                  <a:lnTo>
+                    <a:pt x="4264769" y="516679"/>
+                  </a:lnTo>
+                  <a:cubicBezTo>
+                    <a:pt x="4251918" y="514612"/>
+                    <a:pt x="4239067" y="512415"/>
+                    <a:pt x="4226082" y="511253"/>
+                  </a:cubicBezTo>
+                  <a:cubicBezTo>
+                    <a:pt x="4174145" y="505829"/>
+                    <a:pt x="4122606" y="499498"/>
+                    <a:pt x="4070934" y="494848"/>
+                  </a:cubicBezTo>
+                  <a:lnTo>
+                    <a:pt x="3915521" y="486065"/>
+                  </a:lnTo>
+                  <a:lnTo>
+                    <a:pt x="3760241" y="484257"/>
+                  </a:lnTo>
+                  <a:cubicBezTo>
+                    <a:pt x="3734405" y="483869"/>
+                    <a:pt x="3708571" y="485936"/>
+                    <a:pt x="3682734" y="486581"/>
+                  </a:cubicBezTo>
+                  <a:lnTo>
+                    <a:pt x="3605491" y="488907"/>
+                  </a:lnTo>
+                  <a:cubicBezTo>
+                    <a:pt x="3579921" y="489165"/>
+                    <a:pt x="3553555" y="491490"/>
+                    <a:pt x="3527454" y="493169"/>
+                  </a:cubicBezTo>
+                  <a:lnTo>
+                    <a:pt x="3449151" y="498336"/>
+                  </a:lnTo>
+                  <a:lnTo>
+                    <a:pt x="3410067" y="500532"/>
+                  </a:lnTo>
+                  <a:lnTo>
+                    <a:pt x="3371246" y="504279"/>
+                  </a:lnTo>
+                  <a:cubicBezTo>
+                    <a:pt x="3345410" y="506862"/>
+                    <a:pt x="3319575" y="509315"/>
+                    <a:pt x="3293739" y="511512"/>
+                  </a:cubicBezTo>
+                  <a:cubicBezTo>
+                    <a:pt x="3087450" y="531662"/>
+                    <a:pt x="2885531" y="563180"/>
+                    <a:pt x="2689445" y="610198"/>
+                  </a:cubicBezTo>
+                  <a:cubicBezTo>
+                    <a:pt x="2493357" y="657344"/>
+                    <a:pt x="2302303" y="719088"/>
+                    <a:pt x="2117875" y="800335"/>
+                  </a:cubicBezTo>
+                  <a:cubicBezTo>
+                    <a:pt x="2072298" y="821648"/>
+                    <a:pt x="2026854" y="843606"/>
+                    <a:pt x="1981276" y="865566"/>
+                  </a:cubicBezTo>
+                  <a:cubicBezTo>
+                    <a:pt x="1937025" y="889978"/>
+                    <a:pt x="1891978" y="913229"/>
+                    <a:pt x="1847991" y="938676"/>
+                  </a:cubicBezTo>
+                  <a:lnTo>
+                    <a:pt x="1783069" y="978718"/>
+                  </a:lnTo>
+                  <a:lnTo>
+                    <a:pt x="1750609" y="998869"/>
+                  </a:lnTo>
+                  <a:lnTo>
+                    <a:pt x="1734312" y="1008945"/>
+                  </a:lnTo>
+                  <a:lnTo>
+                    <a:pt x="1718547" y="1019924"/>
+                  </a:lnTo>
+                  <a:lnTo>
+                    <a:pt x="1655481" y="1063582"/>
+                  </a:lnTo>
+                  <a:cubicBezTo>
+                    <a:pt x="1634414" y="1078178"/>
+                    <a:pt x="1612950" y="1092259"/>
+                    <a:pt x="1593077" y="1108664"/>
+                  </a:cubicBezTo>
+                  <a:lnTo>
+                    <a:pt x="1532263" y="1156197"/>
+                  </a:lnTo>
+                  <a:cubicBezTo>
+                    <a:pt x="1511992" y="1172085"/>
+                    <a:pt x="1491587" y="1187844"/>
+                    <a:pt x="1472509" y="1205152"/>
+                  </a:cubicBezTo>
+                  <a:lnTo>
+                    <a:pt x="1414212" y="1256175"/>
+                  </a:lnTo>
+                  <a:cubicBezTo>
+                    <a:pt x="1395001" y="1273354"/>
+                    <a:pt x="1375127" y="1290147"/>
+                    <a:pt x="1357242" y="1308359"/>
+                  </a:cubicBezTo>
+                  <a:cubicBezTo>
+                    <a:pt x="1283178" y="1379532"/>
+                    <a:pt x="1212163" y="1452513"/>
+                    <a:pt x="1153072" y="1529498"/>
+                  </a:cubicBezTo>
+                  <a:cubicBezTo>
+                    <a:pt x="1090933" y="1605578"/>
+                    <a:pt x="1043501" y="1685794"/>
+                    <a:pt x="1002694" y="1770658"/>
+                  </a:cubicBezTo>
+                  <a:lnTo>
+                    <a:pt x="974076" y="1835371"/>
+                  </a:lnTo>
+                  <a:lnTo>
+                    <a:pt x="949564" y="1903573"/>
+                  </a:lnTo>
+                  <a:cubicBezTo>
+                    <a:pt x="940820" y="1925661"/>
+                    <a:pt x="934593" y="1950719"/>
+                    <a:pt x="927173" y="1974229"/>
+                  </a:cubicBezTo>
+                  <a:cubicBezTo>
+                    <a:pt x="920019" y="1998254"/>
+                    <a:pt x="912468" y="2021504"/>
+                    <a:pt x="906107" y="2046952"/>
+                  </a:cubicBezTo>
+                  <a:cubicBezTo>
+                    <a:pt x="853906" y="2245614"/>
+                    <a:pt x="809918" y="2463136"/>
+                    <a:pt x="751092" y="2676266"/>
+                  </a:cubicBezTo>
+                  <a:cubicBezTo>
+                    <a:pt x="693458" y="2889912"/>
+                    <a:pt x="624166" y="3100976"/>
+                    <a:pt x="547189" y="3308422"/>
+                  </a:cubicBezTo>
+                  <a:cubicBezTo>
+                    <a:pt x="479617" y="3487580"/>
+                    <a:pt x="444109" y="3675523"/>
+                    <a:pt x="441195" y="3866306"/>
+                  </a:cubicBezTo>
+                  <a:cubicBezTo>
+                    <a:pt x="438014" y="4057089"/>
+                    <a:pt x="469282" y="4250456"/>
+                    <a:pt x="527182" y="4439174"/>
+                  </a:cubicBezTo>
+                  <a:cubicBezTo>
+                    <a:pt x="584815" y="4628278"/>
+                    <a:pt x="671067" y="4811828"/>
+                    <a:pt x="775073" y="4987240"/>
+                  </a:cubicBezTo>
+                  <a:cubicBezTo>
+                    <a:pt x="827009" y="5075075"/>
+                    <a:pt x="884246" y="5160327"/>
+                    <a:pt x="943206" y="5244933"/>
+                  </a:cubicBezTo>
+                  <a:cubicBezTo>
+                    <a:pt x="1002296" y="5329411"/>
+                    <a:pt x="1064964" y="5412337"/>
+                    <a:pt x="1133728" y="5490356"/>
+                  </a:cubicBezTo>
+                  <a:cubicBezTo>
+                    <a:pt x="1203949" y="5567728"/>
+                    <a:pt x="1279337" y="5642259"/>
+                    <a:pt x="1359626" y="5709815"/>
+                  </a:cubicBezTo>
+                  <a:cubicBezTo>
+                    <a:pt x="1398711" y="5744949"/>
+                    <a:pt x="1439916" y="5777241"/>
+                    <a:pt x="1481254" y="5809146"/>
+                  </a:cubicBezTo>
+                  <a:cubicBezTo>
+                    <a:pt x="1501922" y="5825163"/>
+                    <a:pt x="1522325" y="5841309"/>
+                    <a:pt x="1543260" y="5856940"/>
+                  </a:cubicBezTo>
+                  <a:cubicBezTo>
+                    <a:pt x="1564591" y="5871923"/>
+                    <a:pt x="1585921" y="5886777"/>
+                    <a:pt x="1607518" y="5901374"/>
+                  </a:cubicBezTo>
+                  <a:cubicBezTo>
+                    <a:pt x="1778565" y="6019693"/>
+                    <a:pt x="1961271" y="6115924"/>
+                    <a:pt x="2145566" y="6193814"/>
+                  </a:cubicBezTo>
+                  <a:lnTo>
+                    <a:pt x="2214991" y="6221844"/>
+                  </a:lnTo>
+                  <a:lnTo>
+                    <a:pt x="2249307" y="6236182"/>
+                  </a:lnTo>
+                  <a:cubicBezTo>
+                    <a:pt x="2260702" y="6241089"/>
+                    <a:pt x="2272625" y="6244577"/>
+                    <a:pt x="2284285" y="6248711"/>
+                  </a:cubicBezTo>
+                  <a:lnTo>
+                    <a:pt x="2354241" y="6273124"/>
+                  </a:lnTo>
+                  <a:cubicBezTo>
+                    <a:pt x="2360070" y="6275190"/>
+                    <a:pt x="2365899" y="6277128"/>
+                    <a:pt x="2371597" y="6279324"/>
+                  </a:cubicBezTo>
+                  <a:cubicBezTo>
+                    <a:pt x="2377161" y="6281778"/>
+                    <a:pt x="2382329" y="6285007"/>
+                    <a:pt x="2387894" y="6287719"/>
+                  </a:cubicBezTo>
+                  <a:cubicBezTo>
+                    <a:pt x="2398757" y="6293274"/>
+                    <a:pt x="2410153" y="6297666"/>
+                    <a:pt x="2421414" y="6302186"/>
+                  </a:cubicBezTo>
+                  <a:lnTo>
+                    <a:pt x="2489117" y="6329441"/>
+                  </a:lnTo>
+                  <a:lnTo>
+                    <a:pt x="2522902" y="6343134"/>
+                  </a:lnTo>
+                  <a:cubicBezTo>
+                    <a:pt x="2534165" y="6347654"/>
+                    <a:pt x="2545294" y="6352563"/>
+                    <a:pt x="2556953" y="6356051"/>
+                  </a:cubicBezTo>
+                  <a:lnTo>
+                    <a:pt x="2695009" y="6401905"/>
+                  </a:lnTo>
+                  <a:cubicBezTo>
+                    <a:pt x="2880895" y="6457190"/>
+                    <a:pt x="3073141" y="6489095"/>
+                    <a:pt x="3268035" y="6501238"/>
+                  </a:cubicBezTo>
+                  <a:cubicBezTo>
+                    <a:pt x="3292413" y="6502659"/>
+                    <a:pt x="3316527" y="6505629"/>
+                    <a:pt x="3341038" y="6506145"/>
+                  </a:cubicBezTo>
+                  <a:lnTo>
+                    <a:pt x="3414703" y="6507050"/>
+                  </a:lnTo>
+                  <a:lnTo>
+                    <a:pt x="3488237" y="6508212"/>
+                  </a:lnTo>
+                  <a:cubicBezTo>
+                    <a:pt x="3500690" y="6508729"/>
+                    <a:pt x="3512483" y="6508471"/>
+                    <a:pt x="3524142" y="6507955"/>
+                  </a:cubicBezTo>
+                  <a:lnTo>
+                    <a:pt x="3559252" y="6506921"/>
+                  </a:lnTo>
+                  <a:cubicBezTo>
+                    <a:pt x="3582835" y="6506792"/>
+                    <a:pt x="3605889" y="6504467"/>
+                    <a:pt x="3629207" y="6503045"/>
+                  </a:cubicBezTo>
+                  <a:cubicBezTo>
+                    <a:pt x="3652526" y="6502012"/>
+                    <a:pt x="3675579" y="6499171"/>
+                    <a:pt x="3698633" y="6496845"/>
+                  </a:cubicBezTo>
+                  <a:cubicBezTo>
+                    <a:pt x="3710160" y="6495683"/>
+                    <a:pt x="3721819" y="6494907"/>
+                    <a:pt x="3733213" y="6493357"/>
+                  </a:cubicBezTo>
+                  <a:lnTo>
+                    <a:pt x="3767529" y="6488707"/>
+                  </a:lnTo>
+                  <a:lnTo>
+                    <a:pt x="3801845" y="6484057"/>
+                  </a:lnTo>
+                  <a:lnTo>
+                    <a:pt x="3835895" y="6478116"/>
+                  </a:lnTo>
+                  <a:cubicBezTo>
+                    <a:pt x="4017673" y="6446727"/>
+                    <a:pt x="4194152" y="6390281"/>
+                    <a:pt x="4364801" y="6308517"/>
+                  </a:cubicBezTo>
+                  <a:cubicBezTo>
+                    <a:pt x="4535583" y="6227139"/>
+                    <a:pt x="4700138" y="6120962"/>
+                    <a:pt x="4861379" y="6000576"/>
+                  </a:cubicBezTo>
+                  <a:cubicBezTo>
+                    <a:pt x="5022621" y="5879931"/>
+                    <a:pt x="5180684" y="5745337"/>
+                    <a:pt x="5341263" y="5605834"/>
+                  </a:cubicBezTo>
+                  <a:lnTo>
+                    <a:pt x="5587301" y="5390379"/>
+                  </a:lnTo>
+                  <a:cubicBezTo>
+                    <a:pt x="5674216" y="5315718"/>
+                    <a:pt x="5761527" y="5244416"/>
+                    <a:pt x="5849105" y="5176344"/>
+                  </a:cubicBezTo>
+                  <a:lnTo>
+                    <a:pt x="5890489" y="5145260"/>
+                  </a:lnTo>
+                  <a:lnTo>
+                    <a:pt x="5890489" y="5995323"/>
+                  </a:lnTo>
+                  <a:lnTo>
+                    <a:pt x="5811477" y="6077819"/>
+                  </a:lnTo>
+                  <a:cubicBezTo>
+                    <a:pt x="5654739" y="6238377"/>
+                    <a:pt x="5487138" y="6396093"/>
+                    <a:pt x="5301384" y="6542958"/>
+                  </a:cubicBezTo>
+                  <a:lnTo>
+                    <a:pt x="5252008" y="6578438"/>
+                  </a:lnTo>
+                  <a:lnTo>
+                    <a:pt x="1653730" y="6578438"/>
+                  </a:lnTo>
+                  <a:lnTo>
+                    <a:pt x="1549768" y="6488821"/>
+                  </a:lnTo>
+                  <a:cubicBezTo>
+                    <a:pt x="1461976" y="6409495"/>
+                    <a:pt x="1378573" y="6327182"/>
+                    <a:pt x="1298282" y="6243932"/>
+                  </a:cubicBezTo>
+                  <a:cubicBezTo>
+                    <a:pt x="1278277" y="6223006"/>
+                    <a:pt x="1258138" y="6202210"/>
+                    <a:pt x="1237999" y="6181671"/>
+                  </a:cubicBezTo>
+                  <a:lnTo>
+                    <a:pt x="1179967" y="6117862"/>
+                  </a:lnTo>
+                  <a:lnTo>
+                    <a:pt x="1121936" y="6054569"/>
+                  </a:lnTo>
+                  <a:cubicBezTo>
+                    <a:pt x="1102328" y="6033644"/>
+                    <a:pt x="1084573" y="6011427"/>
+                    <a:pt x="1065628" y="5990243"/>
+                  </a:cubicBezTo>
+                  <a:cubicBezTo>
+                    <a:pt x="1028662" y="5947099"/>
+                    <a:pt x="990239" y="5904991"/>
+                    <a:pt x="954335" y="5861460"/>
+                  </a:cubicBezTo>
+                  <a:cubicBezTo>
+                    <a:pt x="936050" y="5840018"/>
+                    <a:pt x="917634" y="5818446"/>
+                    <a:pt x="898953" y="5797393"/>
+                  </a:cubicBezTo>
+                  <a:cubicBezTo>
+                    <a:pt x="880404" y="5776208"/>
+                    <a:pt x="861325" y="5755412"/>
+                    <a:pt x="842908" y="5733582"/>
+                  </a:cubicBezTo>
+                  <a:cubicBezTo>
+                    <a:pt x="767919" y="5647942"/>
+                    <a:pt x="693061" y="5561786"/>
+                    <a:pt x="622442" y="5471884"/>
+                  </a:cubicBezTo>
+                  <a:cubicBezTo>
+                    <a:pt x="551559" y="5382112"/>
+                    <a:pt x="486639" y="5287430"/>
+                    <a:pt x="425559" y="5190036"/>
+                  </a:cubicBezTo>
+                  <a:cubicBezTo>
+                    <a:pt x="303668" y="4994990"/>
+                    <a:pt x="200193" y="4786123"/>
+                    <a:pt x="123877" y="4564210"/>
+                  </a:cubicBezTo>
+                  <a:cubicBezTo>
+                    <a:pt x="47694" y="4342555"/>
+                    <a:pt x="2249" y="4106045"/>
+                    <a:pt x="130" y="3865530"/>
+                  </a:cubicBezTo>
+                  <a:cubicBezTo>
+                    <a:pt x="-1328" y="3745403"/>
+                    <a:pt x="9537" y="3624629"/>
+                    <a:pt x="30602" y="3505793"/>
+                  </a:cubicBezTo>
+                  <a:cubicBezTo>
+                    <a:pt x="51802" y="3386828"/>
+                    <a:pt x="84659" y="3270059"/>
+                    <a:pt x="126924" y="3157164"/>
+                  </a:cubicBezTo>
+                  <a:cubicBezTo>
+                    <a:pt x="200457" y="2959276"/>
+                    <a:pt x="271737" y="2761388"/>
+                    <a:pt x="334803" y="2560530"/>
+                  </a:cubicBezTo>
+                  <a:lnTo>
+                    <a:pt x="381176" y="2409144"/>
+                  </a:lnTo>
+                  <a:lnTo>
+                    <a:pt x="425825" y="2255819"/>
+                  </a:lnTo>
+                  <a:lnTo>
+                    <a:pt x="470210" y="2099523"/>
+                  </a:lnTo>
+                  <a:lnTo>
+                    <a:pt x="492998" y="2020213"/>
+                  </a:lnTo>
+                  <a:lnTo>
+                    <a:pt x="517509" y="1939224"/>
+                  </a:lnTo>
+                  <a:cubicBezTo>
+                    <a:pt x="525061" y="1912485"/>
+                    <a:pt x="534866" y="1884586"/>
+                    <a:pt x="544007" y="1857201"/>
+                  </a:cubicBezTo>
+                  <a:cubicBezTo>
+                    <a:pt x="553680" y="1829559"/>
+                    <a:pt x="561496" y="1802304"/>
+                    <a:pt x="573288" y="1774274"/>
+                  </a:cubicBezTo>
+                  <a:lnTo>
+                    <a:pt x="606146" y="1690832"/>
+                  </a:lnTo>
+                  <a:cubicBezTo>
+                    <a:pt x="618467" y="1663060"/>
+                    <a:pt x="631716" y="1635417"/>
+                    <a:pt x="644569" y="1607775"/>
+                  </a:cubicBezTo>
+                  <a:cubicBezTo>
+                    <a:pt x="698625" y="1498368"/>
+                    <a:pt x="763413" y="1391287"/>
+                    <a:pt x="837874" y="1297638"/>
+                  </a:cubicBezTo>
+                  <a:cubicBezTo>
+                    <a:pt x="910348" y="1201278"/>
+                    <a:pt x="990107" y="1115897"/>
+                    <a:pt x="1069602" y="1032194"/>
+                  </a:cubicBezTo>
+                  <a:cubicBezTo>
+                    <a:pt x="1089079" y="1010624"/>
+                    <a:pt x="1110012" y="990990"/>
+                    <a:pt x="1130548" y="970839"/>
+                  </a:cubicBezTo>
+                  <a:lnTo>
+                    <a:pt x="1192024" y="910129"/>
+                  </a:lnTo>
+                  <a:cubicBezTo>
+                    <a:pt x="1212031" y="889462"/>
+                    <a:pt x="1234024" y="870475"/>
+                    <a:pt x="1255356" y="850841"/>
+                  </a:cubicBezTo>
+                  <a:lnTo>
+                    <a:pt x="1319614" y="792068"/>
+                  </a:lnTo>
+                  <a:cubicBezTo>
+                    <a:pt x="1340680" y="772176"/>
+                    <a:pt x="1363469" y="753834"/>
+                    <a:pt x="1385728" y="734975"/>
+                  </a:cubicBezTo>
+                  <a:lnTo>
+                    <a:pt x="1452768" y="678528"/>
+                  </a:lnTo>
+                  <a:lnTo>
+                    <a:pt x="1469594" y="664449"/>
+                  </a:lnTo>
+                  <a:lnTo>
+                    <a:pt x="1487083" y="651015"/>
+                  </a:lnTo>
+                  <a:lnTo>
+                    <a:pt x="1522193" y="624277"/>
+                  </a:lnTo>
+                  <a:lnTo>
+                    <a:pt x="1592415" y="570671"/>
+                  </a:lnTo>
+                  <a:cubicBezTo>
+                    <a:pt x="1640110" y="535925"/>
+                    <a:pt x="1689531" y="503245"/>
+                    <a:pt x="1738287" y="469402"/>
+                  </a:cubicBezTo>
+                  <a:cubicBezTo>
+                    <a:pt x="1788634" y="438015"/>
+                    <a:pt x="1839643" y="407013"/>
+                    <a:pt x="1890918" y="376530"/>
+                  </a:cubicBezTo>
+                  <a:cubicBezTo>
+                    <a:pt x="2098400" y="258209"/>
+                    <a:pt x="2323503" y="166241"/>
+                    <a:pt x="2555363" y="105274"/>
+                  </a:cubicBezTo>
+                  <a:cubicBezTo>
+                    <a:pt x="2787223" y="44047"/>
+                    <a:pt x="3024516" y="12013"/>
+                    <a:pt x="3259291" y="3229"/>
+                  </a:cubicBezTo>
+                  <a:lnTo>
+                    <a:pt x="3347265" y="903"/>
+                  </a:lnTo>
+                  <a:close/>
+                </a:path>
+              </a:pathLst>
+            </a:custGeom>
+            <a:gradFill>
+              <a:gsLst>
+                <a:gs pos="2000">
+                  <a:schemeClr val="bg1">
+                    <a:alpha val="10000"/>
+                  </a:schemeClr>
+                </a:gs>
+                <a:gs pos="16000">
+                  <a:schemeClr val="accent6">
+                    <a:alpha val="10000"/>
+                  </a:schemeClr>
+                </a:gs>
+                <a:gs pos="100000">
+                  <a:schemeClr val="bg1">
+                    <a:alpha val="10000"/>
+                  </a:schemeClr>
+                </a:gs>
+                <a:gs pos="85000">
+                  <a:schemeClr val="accent1">
+                    <a:alpha val="10000"/>
+                  </a:schemeClr>
+                </a:gs>
+              </a:gsLst>
+              <a:lin ang="12000000" scaled="0"/>
+            </a:gradFill>
+            <a:ln>
+              <a:noFill/>
+            </a:ln>
+          </p:spPr>
+          <p:style>
+            <a:lnRef idx="2">
+              <a:schemeClr val="accent1">
+                <a:shade val="50000"/>
+              </a:schemeClr>
+            </a:lnRef>
+            <a:fillRef idx="1">
+              <a:schemeClr val="accent1"/>
+            </a:fillRef>
+            <a:effectRef idx="0">
+              <a:schemeClr val="accent1"/>
+            </a:effectRef>
+            <a:fontRef idx="minor">
+              <a:schemeClr val="lt1"/>
+            </a:fontRef>
+          </p:style>
+          <p:txBody>
+            <a:bodyPr rtlCol="0" anchor="ctr"/>
+            <a:lstStyle/>
+            <a:p>
+              <a:pPr algn="ctr"/>
+              <a:endParaRPr lang="en-US"/>
+            </a:p>
+          </p:txBody>
+        </p:sp>
+        <p:sp>
+          <p:nvSpPr>
+            <p:cNvPr id="25" name="Freeform: Shape 15">
+              <a:extLst>
+                <a:ext uri="{FF2B5EF4-FFF2-40B4-BE49-F238E27FC236}">
+                  <a16:creationId xmlns:a16="http://schemas.microsoft.com/office/drawing/2014/main" id="{ACA5348F-9FF6-485F-898D-1BED7EC7270A}"/>
+                </a:ext>
+                <a:ext uri="{C183D7F6-B498-43B3-948B-1728B52AA6E4}">
+                  <adec:decorative xmlns:adec="http://schemas.microsoft.com/office/drawing/2017/decorative" val="1"/>
+                </a:ext>
+              </a:extLst>
+            </p:cNvPr>
+            <p:cNvSpPr/>
+            <p:nvPr>
+              <p:extLst>
+                <p:ext uri="{386F3935-93C4-4BCD-93E2-E3B085C9AB24}">
+                  <p16:designElem xmlns:p16="http://schemas.microsoft.com/office/powerpoint/2015/main" val="1"/>
+                </p:ext>
+              </p:extLst>
+            </p:nvPr>
+          </p:nvSpPr>
+          <p:spPr>
+            <a:xfrm>
+              <a:off x="6095999" y="52997"/>
+              <a:ext cx="6093363" cy="6805004"/>
+            </a:xfrm>
+            <a:custGeom>
+              <a:avLst/>
+              <a:gdLst>
+                <a:gd name="connsiteX0" fmla="*/ 3517682 w 5890491"/>
+                <a:gd name="connsiteY0" fmla="*/ 0 h 6578439"/>
+                <a:gd name="connsiteX1" fmla="*/ 5849513 w 5890491"/>
+                <a:gd name="connsiteY1" fmla="*/ 841730 h 6578439"/>
+                <a:gd name="connsiteX2" fmla="*/ 5890491 w 5890491"/>
+                <a:gd name="connsiteY2" fmla="*/ 879061 h 6578439"/>
+                <a:gd name="connsiteX3" fmla="*/ 5890491 w 5890491"/>
+                <a:gd name="connsiteY3" fmla="*/ 2034114 h 6578439"/>
+                <a:gd name="connsiteX4" fmla="*/ 5757065 w 5890491"/>
+                <a:gd name="connsiteY4" fmla="*/ 1854938 h 6578439"/>
+                <a:gd name="connsiteX5" fmla="*/ 5564060 w 5890491"/>
+                <a:gd name="connsiteY5" fmla="*/ 1642182 h 6578439"/>
+                <a:gd name="connsiteX6" fmla="*/ 3517551 w 5890491"/>
+                <a:gd name="connsiteY6" fmla="*/ 790012 h 6578439"/>
+                <a:gd name="connsiteX7" fmla="*/ 1611552 w 5890491"/>
+                <a:gd name="connsiteY7" fmla="*/ 1543282 h 6578439"/>
+                <a:gd name="connsiteX8" fmla="*/ 1340656 w 5890491"/>
+                <a:gd name="connsiteY8" fmla="*/ 1897925 h 6578439"/>
+                <a:gd name="connsiteX9" fmla="*/ 1201705 w 5890491"/>
+                <a:gd name="connsiteY9" fmla="*/ 2361213 h 6578439"/>
+                <a:gd name="connsiteX10" fmla="*/ 852705 w 5890491"/>
+                <a:gd name="connsiteY10" fmla="*/ 3529176 h 6578439"/>
+                <a:gd name="connsiteX11" fmla="*/ 863863 w 5890491"/>
+                <a:gd name="connsiteY11" fmla="*/ 4437051 h 6578439"/>
+                <a:gd name="connsiteX12" fmla="*/ 1413569 w 5890491"/>
+                <a:gd name="connsiteY12" fmla="*/ 5357174 h 6578439"/>
+                <a:gd name="connsiteX13" fmla="*/ 2339129 w 5890491"/>
+                <a:gd name="connsiteY13" fmla="*/ 6143367 h 6578439"/>
+                <a:gd name="connsiteX14" fmla="*/ 3439449 w 5890491"/>
+                <a:gd name="connsiteY14" fmla="*/ 6420049 h 6578439"/>
+                <a:gd name="connsiteX15" fmla="*/ 5251388 w 5890491"/>
+                <a:gd name="connsiteY15" fmla="*/ 5349009 h 6578439"/>
+                <a:gd name="connsiteX16" fmla="*/ 5657731 w 5890491"/>
+                <a:gd name="connsiteY16" fmla="*/ 4959205 h 6578439"/>
+                <a:gd name="connsiteX17" fmla="*/ 5836127 w 5890491"/>
+                <a:gd name="connsiteY17" fmla="*/ 4792052 h 6578439"/>
+                <a:gd name="connsiteX18" fmla="*/ 5890491 w 5890491"/>
+                <a:gd name="connsiteY18" fmla="*/ 4738662 h 6578439"/>
+                <a:gd name="connsiteX19" fmla="*/ 5890491 w 5890491"/>
+                <a:gd name="connsiteY19" fmla="*/ 5821964 h 6578439"/>
+                <a:gd name="connsiteX20" fmla="*/ 5802001 w 5890491"/>
+                <a:gd name="connsiteY20" fmla="*/ 5907904 h 6578439"/>
+                <a:gd name="connsiteX21" fmla="*/ 5294358 w 5890491"/>
+                <a:gd name="connsiteY21" fmla="*/ 6397505 h 6578439"/>
+                <a:gd name="connsiteX22" fmla="*/ 5077178 w 5890491"/>
+                <a:gd name="connsiteY22" fmla="*/ 6578439 h 6578439"/>
+                <a:gd name="connsiteX23" fmla="*/ 1567290 w 5890491"/>
+                <a:gd name="connsiteY23" fmla="*/ 6578439 h 6578439"/>
+                <a:gd name="connsiteX24" fmla="*/ 1508588 w 5890491"/>
+                <a:gd name="connsiteY24" fmla="*/ 6535186 h 6578439"/>
+                <a:gd name="connsiteX25" fmla="*/ 826498 w 5890491"/>
+                <a:gd name="connsiteY25" fmla="*/ 5876034 h 6578439"/>
+                <a:gd name="connsiteX26" fmla="*/ 122403 w 5890491"/>
+                <a:gd name="connsiteY26" fmla="*/ 3255655 h 6578439"/>
+                <a:gd name="connsiteX27" fmla="*/ 1061197 w 5890491"/>
+                <a:gd name="connsiteY27" fmla="*/ 984650 h 6578439"/>
+                <a:gd name="connsiteX28" fmla="*/ 3517682 w 5890491"/>
+                <a:gd name="connsiteY28" fmla="*/ 0 h 6578439"/>
+              </a:gdLst>
+              <a:ahLst/>
+              <a:cxnLst>
+                <a:cxn ang="0">
+                  <a:pos x="connsiteX0" y="connsiteY0"/>
+                </a:cxn>
+                <a:cxn ang="0">
+                  <a:pos x="connsiteX1" y="connsiteY1"/>
+                </a:cxn>
+                <a:cxn ang="0">
+                  <a:pos x="connsiteX2" y="connsiteY2"/>
+                </a:cxn>
+                <a:cxn ang="0">
+                  <a:pos x="connsiteX3" y="connsiteY3"/>
+                </a:cxn>
+                <a:cxn ang="0">
+                  <a:pos x="connsiteX4" y="connsiteY4"/>
+                </a:cxn>
+                <a:cxn ang="0">
+                  <a:pos x="connsiteX5" y="connsiteY5"/>
+                </a:cxn>
+                <a:cxn ang="0">
+                  <a:pos x="connsiteX6" y="connsiteY6"/>
+                </a:cxn>
+                <a:cxn ang="0">
+                  <a:pos x="connsiteX7" y="connsiteY7"/>
+                </a:cxn>
+                <a:cxn ang="0">
+                  <a:pos x="connsiteX8" y="connsiteY8"/>
+                </a:cxn>
+                <a:cxn ang="0">
+                  <a:pos x="connsiteX9" y="connsiteY9"/>
+                </a:cxn>
+                <a:cxn ang="0">
+                  <a:pos x="connsiteX10" y="connsiteY10"/>
+                </a:cxn>
+                <a:cxn ang="0">
+                  <a:pos x="connsiteX11" y="connsiteY11"/>
+                </a:cxn>
+                <a:cxn ang="0">
+                  <a:pos x="connsiteX12" y="connsiteY12"/>
+                </a:cxn>
+                <a:cxn ang="0">
+                  <a:pos x="connsiteX13" y="connsiteY13"/>
+                </a:cxn>
+                <a:cxn ang="0">
+                  <a:pos x="connsiteX14" y="connsiteY14"/>
+                </a:cxn>
+                <a:cxn ang="0">
+                  <a:pos x="connsiteX15" y="connsiteY15"/>
+                </a:cxn>
+                <a:cxn ang="0">
+                  <a:pos x="connsiteX16" y="connsiteY16"/>
+                </a:cxn>
+                <a:cxn ang="0">
+                  <a:pos x="connsiteX17" y="connsiteY17"/>
+                </a:cxn>
+                <a:cxn ang="0">
+                  <a:pos x="connsiteX18" y="connsiteY18"/>
+                </a:cxn>
+                <a:cxn ang="0">
+                  <a:pos x="connsiteX19" y="connsiteY19"/>
+                </a:cxn>
+                <a:cxn ang="0">
+                  <a:pos x="connsiteX20" y="connsiteY20"/>
+                </a:cxn>
+                <a:cxn ang="0">
+                  <a:pos x="connsiteX21" y="connsiteY21"/>
+                </a:cxn>
+                <a:cxn ang="0">
+                  <a:pos x="connsiteX22" y="connsiteY22"/>
+                </a:cxn>
+                <a:cxn ang="0">
+                  <a:pos x="connsiteX23" y="connsiteY23"/>
+                </a:cxn>
+                <a:cxn ang="0">
+                  <a:pos x="connsiteX24" y="connsiteY24"/>
+                </a:cxn>
+                <a:cxn ang="0">
+                  <a:pos x="connsiteX25" y="connsiteY25"/>
+                </a:cxn>
+                <a:cxn ang="0">
+                  <a:pos x="connsiteX26" y="connsiteY26"/>
+                </a:cxn>
+                <a:cxn ang="0">
+                  <a:pos x="connsiteX27" y="connsiteY27"/>
+                </a:cxn>
+                <a:cxn ang="0">
+                  <a:pos x="connsiteX28" y="connsiteY28"/>
+                </a:cxn>
+              </a:cxnLst>
+              <a:rect l="l" t="t" r="r" b="b"/>
+              <a:pathLst>
+                <a:path w="5890491" h="6578439">
+                  <a:moveTo>
+                    <a:pt x="3517682" y="0"/>
+                  </a:moveTo>
+                  <a:cubicBezTo>
+                    <a:pt x="4402017" y="0"/>
+                    <a:pt x="5213742" y="315483"/>
+                    <a:pt x="5849513" y="841730"/>
+                  </a:cubicBezTo>
+                  <a:lnTo>
+                    <a:pt x="5890491" y="879061"/>
+                  </a:lnTo>
+                  <a:lnTo>
+                    <a:pt x="5890491" y="2034114"/>
+                  </a:lnTo>
+                  <a:lnTo>
+                    <a:pt x="5757065" y="1854938"/>
+                  </a:lnTo>
+                  <a:cubicBezTo>
+                    <a:pt x="5696443" y="1781264"/>
+                    <a:pt x="5632076" y="1710299"/>
+                    <a:pt x="5564060" y="1642182"/>
+                  </a:cubicBezTo>
+                  <a:cubicBezTo>
+                    <a:pt x="5015393" y="1092636"/>
+                    <a:pt x="4288592" y="790012"/>
+                    <a:pt x="3517551" y="790012"/>
+                  </a:cubicBezTo>
+                  <a:cubicBezTo>
+                    <a:pt x="2701750" y="790012"/>
+                    <a:pt x="2131676" y="1015335"/>
+                    <a:pt x="1611552" y="1543282"/>
+                  </a:cubicBezTo>
+                  <a:cubicBezTo>
+                    <a:pt x="1435754" y="1721722"/>
+                    <a:pt x="1375945" y="1822729"/>
+                    <a:pt x="1340656" y="1897925"/>
+                  </a:cubicBezTo>
+                  <a:cubicBezTo>
+                    <a:pt x="1289148" y="2007623"/>
+                    <a:pt x="1252432" y="2155907"/>
+                    <a:pt x="1201705" y="2361213"/>
+                  </a:cubicBezTo>
+                  <a:cubicBezTo>
+                    <a:pt x="1133721" y="2635919"/>
+                    <a:pt x="1040568" y="3012290"/>
+                    <a:pt x="852705" y="3529176"/>
+                  </a:cubicBezTo>
+                  <a:cubicBezTo>
+                    <a:pt x="749952" y="3811784"/>
+                    <a:pt x="753584" y="4108747"/>
+                    <a:pt x="863863" y="4437051"/>
+                  </a:cubicBezTo>
+                  <a:cubicBezTo>
+                    <a:pt x="964800" y="4737438"/>
+                    <a:pt x="1154869" y="5055603"/>
+                    <a:pt x="1413569" y="5357174"/>
+                  </a:cubicBezTo>
+                  <a:cubicBezTo>
+                    <a:pt x="1718326" y="5712343"/>
+                    <a:pt x="2021008" y="5969404"/>
+                    <a:pt x="2339129" y="6143367"/>
+                  </a:cubicBezTo>
+                  <a:cubicBezTo>
+                    <a:pt x="2679565" y="6329577"/>
+                    <a:pt x="3039591" y="6420049"/>
+                    <a:pt x="3439449" y="6420049"/>
+                  </a:cubicBezTo>
+                  <a:cubicBezTo>
+                    <a:pt x="4142246" y="6420049"/>
+                    <a:pt x="4633828" y="5976251"/>
+                    <a:pt x="5251388" y="5349009"/>
+                  </a:cubicBezTo>
+                  <a:cubicBezTo>
+                    <a:pt x="5389949" y="5208364"/>
+                    <a:pt x="5526047" y="5081677"/>
+                    <a:pt x="5657731" y="4959205"/>
+                  </a:cubicBezTo>
+                  <a:cubicBezTo>
+                    <a:pt x="5719520" y="4901722"/>
+                    <a:pt x="5779200" y="4846206"/>
+                    <a:pt x="5836127" y="4792052"/>
+                  </a:cubicBezTo>
+                  <a:lnTo>
+                    <a:pt x="5890491" y="4738662"/>
+                  </a:lnTo>
+                  <a:lnTo>
+                    <a:pt x="5890491" y="5821964"/>
+                  </a:lnTo>
+                  <a:lnTo>
+                    <a:pt x="5802001" y="5907904"/>
+                  </a:lnTo>
+                  <a:cubicBezTo>
+                    <a:pt x="5634962" y="6077456"/>
+                    <a:pt x="5467509" y="6243625"/>
+                    <a:pt x="5294358" y="6397505"/>
+                  </a:cubicBezTo>
+                  <a:lnTo>
+                    <a:pt x="5077178" y="6578439"/>
+                  </a:lnTo>
+                  <a:lnTo>
+                    <a:pt x="1567290" y="6578439"/>
+                  </a:lnTo>
+                  <a:lnTo>
+                    <a:pt x="1508588" y="6535186"/>
+                  </a:lnTo>
+                  <a:cubicBezTo>
+                    <a:pt x="1263991" y="6345442"/>
+                    <a:pt x="1038054" y="6122666"/>
+                    <a:pt x="826498" y="5876034"/>
+                  </a:cubicBezTo>
+                  <a:cubicBezTo>
+                    <a:pt x="261613" y="5217713"/>
+                    <a:pt x="-239182" y="4250314"/>
+                    <a:pt x="122403" y="3255655"/>
+                  </a:cubicBezTo>
+                  <a:cubicBezTo>
+                    <a:pt x="607497" y="1921629"/>
+                    <a:pt x="393040" y="1662857"/>
+                    <a:pt x="1061197" y="984650"/>
+                  </a:cubicBezTo>
+                  <a:cubicBezTo>
+                    <a:pt x="1729484" y="306444"/>
+                    <a:pt x="2498060" y="0"/>
+                    <a:pt x="3517682" y="0"/>
+                  </a:cubicBezTo>
+                  <a:close/>
+                </a:path>
+              </a:pathLst>
+            </a:custGeom>
+            <a:gradFill>
+              <a:gsLst>
+                <a:gs pos="2000">
+                  <a:schemeClr val="bg1">
+                    <a:alpha val="10000"/>
+                  </a:schemeClr>
+                </a:gs>
+                <a:gs pos="16000">
+                  <a:schemeClr val="accent6">
+                    <a:alpha val="10000"/>
+                  </a:schemeClr>
+                </a:gs>
+                <a:gs pos="100000">
+                  <a:schemeClr val="bg1">
+                    <a:alpha val="10000"/>
+                  </a:schemeClr>
+                </a:gs>
+                <a:gs pos="85000">
+                  <a:schemeClr val="accent1">
+                    <a:alpha val="10000"/>
+                  </a:schemeClr>
+                </a:gs>
+              </a:gsLst>
+              <a:lin ang="12000000" scaled="0"/>
+            </a:gradFill>
+            <a:ln>
+              <a:noFill/>
+            </a:ln>
+          </p:spPr>
+          <p:style>
+            <a:lnRef idx="2">
+              <a:schemeClr val="accent1">
+                <a:shade val="50000"/>
+              </a:schemeClr>
+            </a:lnRef>
+            <a:fillRef idx="1">
+              <a:schemeClr val="accent1"/>
+            </a:fillRef>
+            <a:effectRef idx="0">
+              <a:schemeClr val="accent1"/>
+            </a:effectRef>
+            <a:fontRef idx="minor">
+              <a:schemeClr val="lt1"/>
+            </a:fontRef>
+          </p:style>
+          <p:txBody>
+            <a:bodyPr rtlCol="0" anchor="ctr"/>
+            <a:lstStyle/>
+            <a:p>
+              <a:pPr algn="ctr"/>
+              <a:endParaRPr lang="en-US"/>
+            </a:p>
+          </p:txBody>
+        </p:sp>
+        <p:sp>
+          <p:nvSpPr>
+            <p:cNvPr id="26" name="Freeform: Shape 16">
+              <a:extLst>
+                <a:ext uri="{FF2B5EF4-FFF2-40B4-BE49-F238E27FC236}">
+                  <a16:creationId xmlns:a16="http://schemas.microsoft.com/office/drawing/2014/main" id="{33B89F41-1D91-447A-88C5-8A917809FEE0}"/>
+                </a:ext>
+                <a:ext uri="{C183D7F6-B498-43B3-948B-1728B52AA6E4}">
+                  <adec:decorative xmlns:adec="http://schemas.microsoft.com/office/drawing/2017/decorative" val="1"/>
+                </a:ext>
+              </a:extLst>
+            </p:cNvPr>
+            <p:cNvSpPr/>
+            <p:nvPr>
+              <p:extLst>
+                <p:ext uri="{386F3935-93C4-4BCD-93E2-E3B085C9AB24}">
+                  <p16:designElem xmlns:p16="http://schemas.microsoft.com/office/powerpoint/2015/main" val="1"/>
+                </p:ext>
+              </p:extLst>
+            </p:nvPr>
+          </p:nvSpPr>
+          <p:spPr>
+            <a:xfrm>
+              <a:off x="6096000" y="52997"/>
+              <a:ext cx="6093362" cy="6805004"/>
+            </a:xfrm>
+            <a:custGeom>
+              <a:avLst/>
+              <a:gdLst>
+                <a:gd name="connsiteX0" fmla="*/ 5890490 w 5890490"/>
+                <a:gd name="connsiteY0" fmla="*/ 5389037 h 6578439"/>
+                <a:gd name="connsiteX1" fmla="*/ 5890490 w 5890490"/>
+                <a:gd name="connsiteY1" fmla="*/ 5855587 h 6578439"/>
+                <a:gd name="connsiteX2" fmla="*/ 5784593 w 5890490"/>
+                <a:gd name="connsiteY2" fmla="*/ 5962054 h 6578439"/>
+                <a:gd name="connsiteX3" fmla="*/ 5663414 w 5890490"/>
+                <a:gd name="connsiteY3" fmla="*/ 6082564 h 6578439"/>
+                <a:gd name="connsiteX4" fmla="*/ 5147099 w 5890490"/>
+                <a:gd name="connsiteY4" fmla="*/ 6547726 h 6578439"/>
+                <a:gd name="connsiteX5" fmla="*/ 5105015 w 5890490"/>
+                <a:gd name="connsiteY5" fmla="*/ 6578439 h 6578439"/>
+                <a:gd name="connsiteX6" fmla="*/ 4385601 w 5890490"/>
+                <a:gd name="connsiteY6" fmla="*/ 6578439 h 6578439"/>
+                <a:gd name="connsiteX7" fmla="*/ 4507252 w 5890490"/>
+                <a:gd name="connsiteY7" fmla="*/ 6515968 h 6578439"/>
+                <a:gd name="connsiteX8" fmla="*/ 4909330 w 5890490"/>
+                <a:gd name="connsiteY8" fmla="*/ 6253453 h 6578439"/>
+                <a:gd name="connsiteX9" fmla="*/ 5411374 w 5890490"/>
+                <a:gd name="connsiteY9" fmla="*/ 5828544 h 6578439"/>
+                <a:gd name="connsiteX10" fmla="*/ 5533570 w 5890490"/>
+                <a:gd name="connsiteY10" fmla="*/ 5714534 h 6578439"/>
+                <a:gd name="connsiteX11" fmla="*/ 5657425 w 5890490"/>
+                <a:gd name="connsiteY11" fmla="*/ 5597650 h 6578439"/>
+                <a:gd name="connsiteX12" fmla="*/ 3336813 w 5890490"/>
+                <a:gd name="connsiteY12" fmla="*/ 499 h 6578439"/>
+                <a:gd name="connsiteX13" fmla="*/ 3513674 w 5890490"/>
+                <a:gd name="connsiteY13" fmla="*/ 1202 h 6578439"/>
+                <a:gd name="connsiteX14" fmla="*/ 3602743 w 5890490"/>
+                <a:gd name="connsiteY14" fmla="*/ 4827 h 6578439"/>
+                <a:gd name="connsiteX15" fmla="*/ 3647213 w 5890490"/>
+                <a:gd name="connsiteY15" fmla="*/ 6703 h 6578439"/>
+                <a:gd name="connsiteX16" fmla="*/ 3691684 w 5890490"/>
+                <a:gd name="connsiteY16" fmla="*/ 9453 h 6578439"/>
+                <a:gd name="connsiteX17" fmla="*/ 3868927 w 5890490"/>
+                <a:gd name="connsiteY17" fmla="*/ 27080 h 6578439"/>
+                <a:gd name="connsiteX18" fmla="*/ 5200872 w 5890490"/>
+                <a:gd name="connsiteY18" fmla="*/ 472240 h 6578439"/>
+                <a:gd name="connsiteX19" fmla="*/ 5772711 w 5890490"/>
+                <a:gd name="connsiteY19" fmla="*/ 866334 h 6578439"/>
+                <a:gd name="connsiteX20" fmla="*/ 5890490 w 5890490"/>
+                <a:gd name="connsiteY20" fmla="*/ 972426 h 6578439"/>
+                <a:gd name="connsiteX21" fmla="*/ 5890490 w 5890490"/>
+                <a:gd name="connsiteY21" fmla="*/ 1158576 h 6578439"/>
+                <a:gd name="connsiteX22" fmla="*/ 5676045 w 5890490"/>
+                <a:gd name="connsiteY22" fmla="*/ 986969 h 6578439"/>
+                <a:gd name="connsiteX23" fmla="*/ 5103776 w 5890490"/>
+                <a:gd name="connsiteY23" fmla="*/ 655879 h 6578439"/>
+                <a:gd name="connsiteX24" fmla="*/ 4482465 w 5890490"/>
+                <a:gd name="connsiteY24" fmla="*/ 440363 h 6578439"/>
+                <a:gd name="connsiteX25" fmla="*/ 4402444 w 5890490"/>
+                <a:gd name="connsiteY25" fmla="*/ 422111 h 6578439"/>
+                <a:gd name="connsiteX26" fmla="*/ 4322423 w 5890490"/>
+                <a:gd name="connsiteY26" fmla="*/ 404610 h 6578439"/>
+                <a:gd name="connsiteX27" fmla="*/ 4241892 w 5890490"/>
+                <a:gd name="connsiteY27" fmla="*/ 389858 h 6578439"/>
+                <a:gd name="connsiteX28" fmla="*/ 4201627 w 5890490"/>
+                <a:gd name="connsiteY28" fmla="*/ 382483 h 6578439"/>
+                <a:gd name="connsiteX29" fmla="*/ 4161234 w 5890490"/>
+                <a:gd name="connsiteY29" fmla="*/ 375857 h 6578439"/>
+                <a:gd name="connsiteX30" fmla="*/ 3999280 w 5890490"/>
+                <a:gd name="connsiteY30" fmla="*/ 353606 h 6578439"/>
+                <a:gd name="connsiteX31" fmla="*/ 3836817 w 5890490"/>
+                <a:gd name="connsiteY31" fmla="*/ 338480 h 6578439"/>
+                <a:gd name="connsiteX32" fmla="*/ 3673972 w 5890490"/>
+                <a:gd name="connsiteY32" fmla="*/ 330604 h 6578439"/>
+                <a:gd name="connsiteX33" fmla="*/ 3511126 w 5890490"/>
+                <a:gd name="connsiteY33" fmla="*/ 328978 h 6578439"/>
+                <a:gd name="connsiteX34" fmla="*/ 3183142 w 5890490"/>
+                <a:gd name="connsiteY34" fmla="*/ 342854 h 6578439"/>
+                <a:gd name="connsiteX35" fmla="*/ 2541444 w 5890490"/>
+                <a:gd name="connsiteY35" fmla="*/ 439988 h 6578439"/>
+                <a:gd name="connsiteX36" fmla="*/ 1933895 w 5890490"/>
+                <a:gd name="connsiteY36" fmla="*/ 650505 h 6578439"/>
+                <a:gd name="connsiteX37" fmla="*/ 1378079 w 5890490"/>
+                <a:gd name="connsiteY37" fmla="*/ 983905 h 6578439"/>
+                <a:gd name="connsiteX38" fmla="*/ 1312967 w 5890490"/>
+                <a:gd name="connsiteY38" fmla="*/ 1033660 h 6578439"/>
+                <a:gd name="connsiteX39" fmla="*/ 1248364 w 5890490"/>
+                <a:gd name="connsiteY39" fmla="*/ 1084413 h 6578439"/>
+                <a:gd name="connsiteX40" fmla="*/ 1185163 w 5890490"/>
+                <a:gd name="connsiteY40" fmla="*/ 1137168 h 6578439"/>
+                <a:gd name="connsiteX41" fmla="*/ 1122852 w 5890490"/>
+                <a:gd name="connsiteY41" fmla="*/ 1190922 h 6578439"/>
+                <a:gd name="connsiteX42" fmla="*/ 892092 w 5890490"/>
+                <a:gd name="connsiteY42" fmla="*/ 1421440 h 6578439"/>
+                <a:gd name="connsiteX43" fmla="*/ 707202 w 5890490"/>
+                <a:gd name="connsiteY43" fmla="*/ 1684212 h 6578439"/>
+                <a:gd name="connsiteX44" fmla="*/ 670121 w 5890490"/>
+                <a:gd name="connsiteY44" fmla="*/ 1756093 h 6578439"/>
+                <a:gd name="connsiteX45" fmla="*/ 637630 w 5890490"/>
+                <a:gd name="connsiteY45" fmla="*/ 1830724 h 6578439"/>
+                <a:gd name="connsiteX46" fmla="*/ 607685 w 5890490"/>
+                <a:gd name="connsiteY46" fmla="*/ 1907105 h 6578439"/>
+                <a:gd name="connsiteX47" fmla="*/ 580034 w 5890490"/>
+                <a:gd name="connsiteY47" fmla="*/ 1984986 h 6578439"/>
+                <a:gd name="connsiteX48" fmla="*/ 481919 w 5890490"/>
+                <a:gd name="connsiteY48" fmla="*/ 2304386 h 6578439"/>
+                <a:gd name="connsiteX49" fmla="*/ 433881 w 5890490"/>
+                <a:gd name="connsiteY49" fmla="*/ 2465399 h 6578439"/>
+                <a:gd name="connsiteX50" fmla="*/ 384442 w 5890490"/>
+                <a:gd name="connsiteY50" fmla="*/ 2626163 h 6578439"/>
+                <a:gd name="connsiteX51" fmla="*/ 166039 w 5890490"/>
+                <a:gd name="connsiteY51" fmla="*/ 3261338 h 6578439"/>
+                <a:gd name="connsiteX52" fmla="*/ 56202 w 5890490"/>
+                <a:gd name="connsiteY52" fmla="*/ 3910265 h 6578439"/>
+                <a:gd name="connsiteX53" fmla="*/ 93664 w 5890490"/>
+                <a:gd name="connsiteY53" fmla="*/ 4237292 h 6578439"/>
+                <a:gd name="connsiteX54" fmla="*/ 111758 w 5890490"/>
+                <a:gd name="connsiteY54" fmla="*/ 4317548 h 6578439"/>
+                <a:gd name="connsiteX55" fmla="*/ 133038 w 5890490"/>
+                <a:gd name="connsiteY55" fmla="*/ 4397054 h 6578439"/>
+                <a:gd name="connsiteX56" fmla="*/ 157757 w 5890490"/>
+                <a:gd name="connsiteY56" fmla="*/ 4475560 h 6578439"/>
+                <a:gd name="connsiteX57" fmla="*/ 185153 w 5890490"/>
+                <a:gd name="connsiteY57" fmla="*/ 4553066 h 6578439"/>
+                <a:gd name="connsiteX58" fmla="*/ 493642 w 5890490"/>
+                <a:gd name="connsiteY58" fmla="*/ 5132239 h 6578439"/>
+                <a:gd name="connsiteX59" fmla="*/ 914391 w 5890490"/>
+                <a:gd name="connsiteY59" fmla="*/ 5636528 h 6578439"/>
+                <a:gd name="connsiteX60" fmla="*/ 1402034 w 5890490"/>
+                <a:gd name="connsiteY60" fmla="*/ 6076188 h 6578439"/>
+                <a:gd name="connsiteX61" fmla="*/ 1664397 w 5890490"/>
+                <a:gd name="connsiteY61" fmla="*/ 6267079 h 6578439"/>
+                <a:gd name="connsiteX62" fmla="*/ 1938992 w 5890490"/>
+                <a:gd name="connsiteY62" fmla="*/ 6434343 h 6578439"/>
+                <a:gd name="connsiteX63" fmla="*/ 2225931 w 5890490"/>
+                <a:gd name="connsiteY63" fmla="*/ 6574322 h 6578439"/>
+                <a:gd name="connsiteX64" fmla="*/ 2236328 w 5890490"/>
+                <a:gd name="connsiteY64" fmla="*/ 6578439 h 6578439"/>
+                <a:gd name="connsiteX65" fmla="*/ 1504665 w 5890490"/>
+                <a:gd name="connsiteY65" fmla="*/ 6578439 h 6578439"/>
+                <a:gd name="connsiteX66" fmla="*/ 1456827 w 5890490"/>
+                <a:gd name="connsiteY66" fmla="*/ 6543476 h 6578439"/>
+                <a:gd name="connsiteX67" fmla="*/ 1188475 w 5890490"/>
+                <a:gd name="connsiteY67" fmla="*/ 6314083 h 6578439"/>
+                <a:gd name="connsiteX68" fmla="*/ 721728 w 5890490"/>
+                <a:gd name="connsiteY68" fmla="*/ 5798666 h 6578439"/>
+                <a:gd name="connsiteX69" fmla="*/ 344175 w 5890490"/>
+                <a:gd name="connsiteY69" fmla="*/ 5219495 h 6578439"/>
+                <a:gd name="connsiteX70" fmla="*/ 87293 w 5890490"/>
+                <a:gd name="connsiteY70" fmla="*/ 4583569 h 6578439"/>
+                <a:gd name="connsiteX71" fmla="*/ 65886 w 5890490"/>
+                <a:gd name="connsiteY71" fmla="*/ 4500813 h 6578439"/>
+                <a:gd name="connsiteX72" fmla="*/ 47409 w 5890490"/>
+                <a:gd name="connsiteY72" fmla="*/ 4417431 h 6578439"/>
+                <a:gd name="connsiteX73" fmla="*/ 39000 w 5890490"/>
+                <a:gd name="connsiteY73" fmla="*/ 4375677 h 6578439"/>
+                <a:gd name="connsiteX74" fmla="*/ 31610 w 5890490"/>
+                <a:gd name="connsiteY74" fmla="*/ 4333674 h 6578439"/>
+                <a:gd name="connsiteX75" fmla="*/ 18868 w 5890490"/>
+                <a:gd name="connsiteY75" fmla="*/ 4249417 h 6578439"/>
+                <a:gd name="connsiteX76" fmla="*/ 646 w 5890490"/>
+                <a:gd name="connsiteY76" fmla="*/ 3910265 h 6578439"/>
+                <a:gd name="connsiteX77" fmla="*/ 130234 w 5890490"/>
+                <a:gd name="connsiteY77" fmla="*/ 3248337 h 6578439"/>
+                <a:gd name="connsiteX78" fmla="*/ 335383 w 5890490"/>
+                <a:gd name="connsiteY78" fmla="*/ 2611911 h 6578439"/>
+                <a:gd name="connsiteX79" fmla="*/ 487272 w 5890490"/>
+                <a:gd name="connsiteY79" fmla="*/ 1958609 h 6578439"/>
+                <a:gd name="connsiteX80" fmla="*/ 508550 w 5890490"/>
+                <a:gd name="connsiteY80" fmla="*/ 1876227 h 6578439"/>
+                <a:gd name="connsiteX81" fmla="*/ 531742 w 5890490"/>
+                <a:gd name="connsiteY81" fmla="*/ 1793721 h 6578439"/>
+                <a:gd name="connsiteX82" fmla="*/ 558245 w 5890490"/>
+                <a:gd name="connsiteY82" fmla="*/ 1711465 h 6578439"/>
+                <a:gd name="connsiteX83" fmla="*/ 590100 w 5890490"/>
+                <a:gd name="connsiteY83" fmla="*/ 1630332 h 6578439"/>
+                <a:gd name="connsiteX84" fmla="*/ 758680 w 5890490"/>
+                <a:gd name="connsiteY84" fmla="*/ 1322433 h 6578439"/>
+                <a:gd name="connsiteX85" fmla="*/ 976317 w 5890490"/>
+                <a:gd name="connsiteY85" fmla="*/ 1049286 h 6578439"/>
+                <a:gd name="connsiteX86" fmla="*/ 1035314 w 5890490"/>
+                <a:gd name="connsiteY86" fmla="*/ 985406 h 6578439"/>
+                <a:gd name="connsiteX87" fmla="*/ 1095329 w 5890490"/>
+                <a:gd name="connsiteY87" fmla="*/ 922526 h 6578439"/>
+                <a:gd name="connsiteX88" fmla="*/ 1157384 w 5890490"/>
+                <a:gd name="connsiteY88" fmla="*/ 861271 h 6578439"/>
+                <a:gd name="connsiteX89" fmla="*/ 1220841 w 5890490"/>
+                <a:gd name="connsiteY89" fmla="*/ 801017 h 6578439"/>
+                <a:gd name="connsiteX90" fmla="*/ 1286462 w 5890490"/>
+                <a:gd name="connsiteY90" fmla="*/ 742886 h 6578439"/>
+                <a:gd name="connsiteX91" fmla="*/ 1353233 w 5890490"/>
+                <a:gd name="connsiteY91" fmla="*/ 685632 h 6578439"/>
+                <a:gd name="connsiteX92" fmla="*/ 1369924 w 5890490"/>
+                <a:gd name="connsiteY92" fmla="*/ 671256 h 6578439"/>
+                <a:gd name="connsiteX93" fmla="*/ 1387380 w 5890490"/>
+                <a:gd name="connsiteY93" fmla="*/ 657755 h 6578439"/>
+                <a:gd name="connsiteX94" fmla="*/ 1422422 w 5890490"/>
+                <a:gd name="connsiteY94" fmla="*/ 630877 h 6578439"/>
+                <a:gd name="connsiteX95" fmla="*/ 1492759 w 5890490"/>
+                <a:gd name="connsiteY95" fmla="*/ 577248 h 6578439"/>
+                <a:gd name="connsiteX96" fmla="*/ 1528820 w 5890490"/>
+                <a:gd name="connsiteY96" fmla="*/ 551496 h 6578439"/>
+                <a:gd name="connsiteX97" fmla="*/ 1565390 w 5890490"/>
+                <a:gd name="connsiteY97" fmla="*/ 526370 h 6578439"/>
+                <a:gd name="connsiteX98" fmla="*/ 1639040 w 5890490"/>
+                <a:gd name="connsiteY98" fmla="*/ 476490 h 6578439"/>
+                <a:gd name="connsiteX99" fmla="*/ 1792075 w 5890490"/>
+                <a:gd name="connsiteY99" fmla="*/ 384859 h 6578439"/>
+                <a:gd name="connsiteX100" fmla="*/ 2455943 w 5890490"/>
+                <a:gd name="connsiteY100" fmla="*/ 117836 h 6578439"/>
+                <a:gd name="connsiteX101" fmla="*/ 3159952 w 5890490"/>
+                <a:gd name="connsiteY101" fmla="*/ 7203 h 6578439"/>
+                <a:gd name="connsiteX102" fmla="*/ 3336813 w 5890490"/>
+                <a:gd name="connsiteY102" fmla="*/ 499 h 6578439"/>
+              </a:gdLst>
+              <a:ahLst/>
+              <a:cxnLst>
+                <a:cxn ang="0">
+                  <a:pos x="connsiteX0" y="connsiteY0"/>
+                </a:cxn>
+                <a:cxn ang="0">
+                  <a:pos x="connsiteX1" y="connsiteY1"/>
+                </a:cxn>
+                <a:cxn ang="0">
+                  <a:pos x="connsiteX2" y="connsiteY2"/>
+                </a:cxn>
+                <a:cxn ang="0">
+                  <a:pos x="connsiteX3" y="connsiteY3"/>
+                </a:cxn>
+                <a:cxn ang="0">
+                  <a:pos x="connsiteX4" y="connsiteY4"/>
+                </a:cxn>
+                <a:cxn ang="0">
+                  <a:pos x="connsiteX5" y="connsiteY5"/>
+                </a:cxn>
+                <a:cxn ang="0">
+                  <a:pos x="connsiteX6" y="connsiteY6"/>
+                </a:cxn>
+                <a:cxn ang="0">
+                  <a:pos x="connsiteX7" y="connsiteY7"/>
+                </a:cxn>
+                <a:cxn ang="0">
+                  <a:pos x="connsiteX8" y="connsiteY8"/>
+                </a:cxn>
+                <a:cxn ang="0">
+                  <a:pos x="connsiteX9" y="connsiteY9"/>
+                </a:cxn>
+                <a:cxn ang="0">
+                  <a:pos x="connsiteX10" y="connsiteY10"/>
+                </a:cxn>
+                <a:cxn ang="0">
+                  <a:pos x="connsiteX11" y="connsiteY11"/>
+                </a:cxn>
+                <a:cxn ang="0">
+                  <a:pos x="connsiteX12" y="connsiteY12"/>
+                </a:cxn>
+                <a:cxn ang="0">
+                  <a:pos x="connsiteX13" y="connsiteY13"/>
+                </a:cxn>
+                <a:cxn ang="0">
+                  <a:pos x="connsiteX14" y="connsiteY14"/>
+                </a:cxn>
+                <a:cxn ang="0">
+                  <a:pos x="connsiteX15" y="connsiteY15"/>
+                </a:cxn>
+                <a:cxn ang="0">
+                  <a:pos x="connsiteX16" y="connsiteY16"/>
+                </a:cxn>
+                <a:cxn ang="0">
+                  <a:pos x="connsiteX17" y="connsiteY17"/>
+                </a:cxn>
+                <a:cxn ang="0">
+                  <a:pos x="connsiteX18" y="connsiteY18"/>
+                </a:cxn>
+                <a:cxn ang="0">
+                  <a:pos x="connsiteX19" y="connsiteY19"/>
+                </a:cxn>
+                <a:cxn ang="0">
+                  <a:pos x="connsiteX20" y="connsiteY20"/>
+                </a:cxn>
+                <a:cxn ang="0">
+                  <a:pos x="connsiteX21" y="connsiteY21"/>
+                </a:cxn>
+                <a:cxn ang="0">
+                  <a:pos x="connsiteX22" y="connsiteY22"/>
+                </a:cxn>
+                <a:cxn ang="0">
+                  <a:pos x="connsiteX23" y="connsiteY23"/>
+                </a:cxn>
+                <a:cxn ang="0">
+                  <a:pos x="connsiteX24" y="connsiteY24"/>
+                </a:cxn>
+                <a:cxn ang="0">
+                  <a:pos x="connsiteX25" y="connsiteY25"/>
+                </a:cxn>
+                <a:cxn ang="0">
+                  <a:pos x="connsiteX26" y="connsiteY26"/>
+                </a:cxn>
+                <a:cxn ang="0">
+                  <a:pos x="connsiteX27" y="connsiteY27"/>
+                </a:cxn>
+                <a:cxn ang="0">
+                  <a:pos x="connsiteX28" y="connsiteY28"/>
+                </a:cxn>
+                <a:cxn ang="0">
+                  <a:pos x="connsiteX29" y="connsiteY29"/>
+                </a:cxn>
+                <a:cxn ang="0">
+                  <a:pos x="connsiteX30" y="connsiteY30"/>
+                </a:cxn>
+                <a:cxn ang="0">
+                  <a:pos x="connsiteX31" y="connsiteY31"/>
+                </a:cxn>
+                <a:cxn ang="0">
+                  <a:pos x="connsiteX32" y="connsiteY32"/>
+                </a:cxn>
+                <a:cxn ang="0">
+                  <a:pos x="connsiteX33" y="connsiteY33"/>
+                </a:cxn>
+                <a:cxn ang="0">
+                  <a:pos x="connsiteX34" y="connsiteY34"/>
+                </a:cxn>
+                <a:cxn ang="0">
+                  <a:pos x="connsiteX35" y="connsiteY35"/>
+                </a:cxn>
+                <a:cxn ang="0">
+                  <a:pos x="connsiteX36" y="connsiteY36"/>
+                </a:cxn>
+                <a:cxn ang="0">
+                  <a:pos x="connsiteX37" y="connsiteY37"/>
+                </a:cxn>
+                <a:cxn ang="0">
+                  <a:pos x="connsiteX38" y="connsiteY38"/>
+                </a:cxn>
+                <a:cxn ang="0">
+                  <a:pos x="connsiteX39" y="connsiteY39"/>
+                </a:cxn>
+                <a:cxn ang="0">
+                  <a:pos x="connsiteX40" y="connsiteY40"/>
+                </a:cxn>
+                <a:cxn ang="0">
+                  <a:pos x="connsiteX41" y="connsiteY41"/>
+                </a:cxn>
+                <a:cxn ang="0">
+                  <a:pos x="connsiteX42" y="connsiteY42"/>
+                </a:cxn>
+                <a:cxn ang="0">
+                  <a:pos x="connsiteX43" y="connsiteY43"/>
+                </a:cxn>
+                <a:cxn ang="0">
+                  <a:pos x="connsiteX44" y="connsiteY44"/>
+                </a:cxn>
+                <a:cxn ang="0">
+                  <a:pos x="connsiteX45" y="connsiteY45"/>
+                </a:cxn>
+                <a:cxn ang="0">
+                  <a:pos x="connsiteX46" y="connsiteY46"/>
+                </a:cxn>
+                <a:cxn ang="0">
+                  <a:pos x="connsiteX47" y="connsiteY47"/>
+                </a:cxn>
+                <a:cxn ang="0">
+                  <a:pos x="connsiteX48" y="connsiteY48"/>
+                </a:cxn>
+                <a:cxn ang="0">
+                  <a:pos x="connsiteX49" y="connsiteY49"/>
+                </a:cxn>
+                <a:cxn ang="0">
+                  <a:pos x="connsiteX50" y="connsiteY50"/>
+                </a:cxn>
+                <a:cxn ang="0">
+                  <a:pos x="connsiteX51" y="connsiteY51"/>
+                </a:cxn>
+                <a:cxn ang="0">
+                  <a:pos x="connsiteX52" y="connsiteY52"/>
+                </a:cxn>
+                <a:cxn ang="0">
+                  <a:pos x="connsiteX53" y="connsiteY53"/>
+                </a:cxn>
+                <a:cxn ang="0">
+                  <a:pos x="connsiteX54" y="connsiteY54"/>
+                </a:cxn>
+                <a:cxn ang="0">
+                  <a:pos x="connsiteX55" y="connsiteY55"/>
+                </a:cxn>
+                <a:cxn ang="0">
+                  <a:pos x="connsiteX56" y="connsiteY56"/>
+                </a:cxn>
+                <a:cxn ang="0">
+                  <a:pos x="connsiteX57" y="connsiteY57"/>
+                </a:cxn>
+                <a:cxn ang="0">
+                  <a:pos x="connsiteX58" y="connsiteY58"/>
+                </a:cxn>
+                <a:cxn ang="0">
+                  <a:pos x="connsiteX59" y="connsiteY59"/>
+                </a:cxn>
+                <a:cxn ang="0">
+                  <a:pos x="connsiteX60" y="connsiteY60"/>
+                </a:cxn>
+                <a:cxn ang="0">
+                  <a:pos x="connsiteX61" y="connsiteY61"/>
+                </a:cxn>
+                <a:cxn ang="0">
+                  <a:pos x="connsiteX62" y="connsiteY62"/>
+                </a:cxn>
+                <a:cxn ang="0">
+                  <a:pos x="connsiteX63" y="connsiteY63"/>
+                </a:cxn>
+                <a:cxn ang="0">
+                  <a:pos x="connsiteX64" y="connsiteY64"/>
+                </a:cxn>
+                <a:cxn ang="0">
+                  <a:pos x="connsiteX65" y="connsiteY65"/>
+                </a:cxn>
+                <a:cxn ang="0">
+                  <a:pos x="connsiteX66" y="connsiteY66"/>
+                </a:cxn>
+                <a:cxn ang="0">
+                  <a:pos x="connsiteX67" y="connsiteY67"/>
+                </a:cxn>
+                <a:cxn ang="0">
+                  <a:pos x="connsiteX68" y="connsiteY68"/>
+                </a:cxn>
+                <a:cxn ang="0">
+                  <a:pos x="connsiteX69" y="connsiteY69"/>
+                </a:cxn>
+                <a:cxn ang="0">
+                  <a:pos x="connsiteX70" y="connsiteY70"/>
+                </a:cxn>
+                <a:cxn ang="0">
+                  <a:pos x="connsiteX71" y="connsiteY71"/>
+                </a:cxn>
+                <a:cxn ang="0">
+                  <a:pos x="connsiteX72" y="connsiteY72"/>
+                </a:cxn>
+                <a:cxn ang="0">
+                  <a:pos x="connsiteX73" y="connsiteY73"/>
+                </a:cxn>
+                <a:cxn ang="0">
+                  <a:pos x="connsiteX74" y="connsiteY74"/>
+                </a:cxn>
+                <a:cxn ang="0">
+                  <a:pos x="connsiteX75" y="connsiteY75"/>
+                </a:cxn>
+                <a:cxn ang="0">
+                  <a:pos x="connsiteX76" y="connsiteY76"/>
+                </a:cxn>
+                <a:cxn ang="0">
+                  <a:pos x="connsiteX77" y="connsiteY77"/>
+                </a:cxn>
+                <a:cxn ang="0">
+                  <a:pos x="connsiteX78" y="connsiteY78"/>
+                </a:cxn>
+                <a:cxn ang="0">
+                  <a:pos x="connsiteX79" y="connsiteY79"/>
+                </a:cxn>
+                <a:cxn ang="0">
+                  <a:pos x="connsiteX80" y="connsiteY80"/>
+                </a:cxn>
+                <a:cxn ang="0">
+                  <a:pos x="connsiteX81" y="connsiteY81"/>
+                </a:cxn>
+                <a:cxn ang="0">
+                  <a:pos x="connsiteX82" y="connsiteY82"/>
+                </a:cxn>
+                <a:cxn ang="0">
+                  <a:pos x="connsiteX83" y="connsiteY83"/>
+                </a:cxn>
+                <a:cxn ang="0">
+                  <a:pos x="connsiteX84" y="connsiteY84"/>
+                </a:cxn>
+                <a:cxn ang="0">
+                  <a:pos x="connsiteX85" y="connsiteY85"/>
+                </a:cxn>
+                <a:cxn ang="0">
+                  <a:pos x="connsiteX86" y="connsiteY86"/>
+                </a:cxn>
+                <a:cxn ang="0">
+                  <a:pos x="connsiteX87" y="connsiteY87"/>
+                </a:cxn>
+                <a:cxn ang="0">
+                  <a:pos x="connsiteX88" y="connsiteY88"/>
+                </a:cxn>
+                <a:cxn ang="0">
+                  <a:pos x="connsiteX89" y="connsiteY89"/>
+                </a:cxn>
+                <a:cxn ang="0">
+                  <a:pos x="connsiteX90" y="connsiteY90"/>
+                </a:cxn>
+                <a:cxn ang="0">
+                  <a:pos x="connsiteX91" y="connsiteY91"/>
+                </a:cxn>
+                <a:cxn ang="0">
+                  <a:pos x="connsiteX92" y="connsiteY92"/>
+                </a:cxn>
+                <a:cxn ang="0">
+                  <a:pos x="connsiteX93" y="connsiteY93"/>
+                </a:cxn>
+                <a:cxn ang="0">
+                  <a:pos x="connsiteX94" y="connsiteY94"/>
+                </a:cxn>
+                <a:cxn ang="0">
+                  <a:pos x="connsiteX95" y="connsiteY95"/>
+                </a:cxn>
+                <a:cxn ang="0">
+                  <a:pos x="connsiteX96" y="connsiteY96"/>
+                </a:cxn>
+                <a:cxn ang="0">
+                  <a:pos x="connsiteX97" y="connsiteY97"/>
+                </a:cxn>
+                <a:cxn ang="0">
+                  <a:pos x="connsiteX98" y="connsiteY98"/>
+                </a:cxn>
+                <a:cxn ang="0">
+                  <a:pos x="connsiteX99" y="connsiteY99"/>
+                </a:cxn>
+                <a:cxn ang="0">
+                  <a:pos x="connsiteX100" y="connsiteY100"/>
+                </a:cxn>
+                <a:cxn ang="0">
+                  <a:pos x="connsiteX101" y="connsiteY101"/>
+                </a:cxn>
+                <a:cxn ang="0">
+                  <a:pos x="connsiteX102" y="connsiteY102"/>
+                </a:cxn>
+              </a:cxnLst>
+              <a:rect l="l" t="t" r="r" b="b"/>
+              <a:pathLst>
+                <a:path w="5890490" h="6578439">
+                  <a:moveTo>
+                    <a:pt x="5890490" y="5389037"/>
+                  </a:moveTo>
+                  <a:lnTo>
+                    <a:pt x="5890490" y="5855587"/>
+                  </a:lnTo>
+                  <a:lnTo>
+                    <a:pt x="5784593" y="5962054"/>
+                  </a:lnTo>
+                  <a:cubicBezTo>
+                    <a:pt x="5744454" y="6002308"/>
+                    <a:pt x="5704062" y="6042436"/>
+                    <a:pt x="5663414" y="6082564"/>
+                  </a:cubicBezTo>
+                  <a:cubicBezTo>
+                    <a:pt x="5500314" y="6242577"/>
+                    <a:pt x="5330970" y="6400714"/>
+                    <a:pt x="5147099" y="6547726"/>
+                  </a:cubicBezTo>
+                  <a:lnTo>
+                    <a:pt x="5105015" y="6578439"/>
+                  </a:lnTo>
+                  <a:lnTo>
+                    <a:pt x="4385601" y="6578439"/>
+                  </a:lnTo>
+                  <a:lnTo>
+                    <a:pt x="4507252" y="6515968"/>
+                  </a:lnTo>
+                  <a:cubicBezTo>
+                    <a:pt x="4645901" y="6439679"/>
+                    <a:pt x="4779837" y="6350961"/>
+                    <a:pt x="4909330" y="6253453"/>
+                  </a:cubicBezTo>
+                  <a:cubicBezTo>
+                    <a:pt x="5082369" y="6123567"/>
+                    <a:pt x="5248145" y="5979180"/>
+                    <a:pt x="5411374" y="5828544"/>
+                  </a:cubicBezTo>
+                  <a:cubicBezTo>
+                    <a:pt x="5452149" y="5790791"/>
+                    <a:pt x="5492924" y="5752788"/>
+                    <a:pt x="5533570" y="5714534"/>
+                  </a:cubicBezTo>
+                  <a:lnTo>
+                    <a:pt x="5657425" y="5597650"/>
+                  </a:lnTo>
+                  <a:close/>
+                  <a:moveTo>
+                    <a:pt x="3336813" y="499"/>
+                  </a:moveTo>
+                  <a:cubicBezTo>
+                    <a:pt x="3395682" y="-392"/>
+                    <a:pt x="3454550" y="-48"/>
+                    <a:pt x="3513674" y="1202"/>
+                  </a:cubicBezTo>
+                  <a:lnTo>
+                    <a:pt x="3602743" y="4827"/>
+                  </a:lnTo>
+                  <a:lnTo>
+                    <a:pt x="3647213" y="6703"/>
+                  </a:lnTo>
+                  <a:cubicBezTo>
+                    <a:pt x="3661994" y="7327"/>
+                    <a:pt x="3676903" y="7703"/>
+                    <a:pt x="3691684" y="9453"/>
+                  </a:cubicBezTo>
+                  <a:lnTo>
+                    <a:pt x="3868927" y="27080"/>
+                  </a:lnTo>
+                  <a:cubicBezTo>
+                    <a:pt x="4340645" y="85584"/>
+                    <a:pt x="4795160" y="243221"/>
+                    <a:pt x="5200872" y="472240"/>
+                  </a:cubicBezTo>
+                  <a:cubicBezTo>
+                    <a:pt x="5403855" y="587124"/>
+                    <a:pt x="5594988" y="719447"/>
+                    <a:pt x="5772711" y="866334"/>
+                  </a:cubicBezTo>
+                  <a:lnTo>
+                    <a:pt x="5890490" y="972426"/>
+                  </a:lnTo>
+                  <a:lnTo>
+                    <a:pt x="5890490" y="1158576"/>
+                  </a:lnTo>
+                  <a:lnTo>
+                    <a:pt x="5676045" y="986969"/>
+                  </a:lnTo>
+                  <a:cubicBezTo>
+                    <a:pt x="5496587" y="857740"/>
+                    <a:pt x="5304275" y="746699"/>
+                    <a:pt x="5103776" y="655879"/>
+                  </a:cubicBezTo>
+                  <a:cubicBezTo>
+                    <a:pt x="4903214" y="564747"/>
+                    <a:pt x="4695006" y="492492"/>
+                    <a:pt x="4482465" y="440363"/>
+                  </a:cubicBezTo>
+                  <a:lnTo>
+                    <a:pt x="4402444" y="422111"/>
+                  </a:lnTo>
+                  <a:cubicBezTo>
+                    <a:pt x="4375813" y="416111"/>
+                    <a:pt x="4349436" y="408859"/>
+                    <a:pt x="4322423" y="404610"/>
+                  </a:cubicBezTo>
+                  <a:lnTo>
+                    <a:pt x="4241892" y="389858"/>
+                  </a:lnTo>
+                  <a:lnTo>
+                    <a:pt x="4201627" y="382483"/>
+                  </a:lnTo>
+                  <a:cubicBezTo>
+                    <a:pt x="4188248" y="379983"/>
+                    <a:pt x="4174869" y="377483"/>
+                    <a:pt x="4161234" y="375857"/>
+                  </a:cubicBezTo>
+                  <a:cubicBezTo>
+                    <a:pt x="4107208" y="368482"/>
+                    <a:pt x="4053308" y="360482"/>
+                    <a:pt x="3999280" y="353606"/>
+                  </a:cubicBezTo>
+                  <a:cubicBezTo>
+                    <a:pt x="3944999" y="348855"/>
+                    <a:pt x="3890844" y="343854"/>
+                    <a:pt x="3836817" y="338480"/>
+                  </a:cubicBezTo>
+                  <a:lnTo>
+                    <a:pt x="3673972" y="330604"/>
+                  </a:lnTo>
+                  <a:cubicBezTo>
+                    <a:pt x="3619690" y="329104"/>
+                    <a:pt x="3565281" y="329604"/>
+                    <a:pt x="3511126" y="328978"/>
+                  </a:cubicBezTo>
+                  <a:cubicBezTo>
+                    <a:pt x="3402054" y="330728"/>
+                    <a:pt x="3291706" y="334604"/>
+                    <a:pt x="3183142" y="342854"/>
+                  </a:cubicBezTo>
+                  <a:cubicBezTo>
+                    <a:pt x="2965505" y="358855"/>
+                    <a:pt x="2750670" y="389733"/>
+                    <a:pt x="2541444" y="439988"/>
+                  </a:cubicBezTo>
+                  <a:cubicBezTo>
+                    <a:pt x="2332216" y="490117"/>
+                    <a:pt x="2128850" y="559997"/>
+                    <a:pt x="1933895" y="650505"/>
+                  </a:cubicBezTo>
+                  <a:cubicBezTo>
+                    <a:pt x="1738939" y="741261"/>
+                    <a:pt x="1553540" y="854146"/>
+                    <a:pt x="1378079" y="983905"/>
+                  </a:cubicBezTo>
+                  <a:lnTo>
+                    <a:pt x="1312967" y="1033660"/>
+                  </a:lnTo>
+                  <a:cubicBezTo>
+                    <a:pt x="1291178" y="1050286"/>
+                    <a:pt x="1269006" y="1066412"/>
+                    <a:pt x="1248364" y="1084413"/>
+                  </a:cubicBezTo>
+                  <a:lnTo>
+                    <a:pt x="1185163" y="1137168"/>
+                  </a:lnTo>
+                  <a:cubicBezTo>
+                    <a:pt x="1164138" y="1154794"/>
+                    <a:pt x="1142603" y="1172046"/>
+                    <a:pt x="1122852" y="1190922"/>
+                  </a:cubicBezTo>
+                  <a:cubicBezTo>
+                    <a:pt x="1041557" y="1264303"/>
+                    <a:pt x="961663" y="1339309"/>
+                    <a:pt x="892092" y="1421440"/>
+                  </a:cubicBezTo>
+                  <a:cubicBezTo>
+                    <a:pt x="819589" y="1501822"/>
+                    <a:pt x="759827" y="1590329"/>
+                    <a:pt x="707202" y="1684212"/>
+                  </a:cubicBezTo>
+                  <a:cubicBezTo>
+                    <a:pt x="694715" y="1708089"/>
+                    <a:pt x="682227" y="1731841"/>
+                    <a:pt x="670121" y="1756093"/>
+                  </a:cubicBezTo>
+                  <a:lnTo>
+                    <a:pt x="637630" y="1830724"/>
+                  </a:lnTo>
+                  <a:cubicBezTo>
+                    <a:pt x="626161" y="1855350"/>
+                    <a:pt x="617624" y="1881603"/>
+                    <a:pt x="607685" y="1907105"/>
+                  </a:cubicBezTo>
+                  <a:cubicBezTo>
+                    <a:pt x="598128" y="1932857"/>
+                    <a:pt x="588317" y="1958483"/>
+                    <a:pt x="580034" y="1984986"/>
+                  </a:cubicBezTo>
+                  <a:cubicBezTo>
+                    <a:pt x="544611" y="2089620"/>
+                    <a:pt x="513393" y="2197128"/>
+                    <a:pt x="481919" y="2304386"/>
+                  </a:cubicBezTo>
+                  <a:lnTo>
+                    <a:pt x="433881" y="2465399"/>
+                  </a:lnTo>
+                  <a:lnTo>
+                    <a:pt x="384442" y="2626163"/>
+                  </a:lnTo>
+                  <a:cubicBezTo>
+                    <a:pt x="317672" y="2839680"/>
+                    <a:pt x="243129" y="3050946"/>
+                    <a:pt x="166039" y="3261338"/>
+                  </a:cubicBezTo>
+                  <a:cubicBezTo>
+                    <a:pt x="88822" y="3468979"/>
+                    <a:pt x="50850" y="3690248"/>
+                    <a:pt x="56202" y="3910265"/>
+                  </a:cubicBezTo>
+                  <a:cubicBezTo>
+                    <a:pt x="58495" y="4020274"/>
+                    <a:pt x="71493" y="4129783"/>
+                    <a:pt x="93664" y="4237292"/>
+                  </a:cubicBezTo>
+                  <a:cubicBezTo>
+                    <a:pt x="99143" y="4264168"/>
+                    <a:pt x="104623" y="4291045"/>
+                    <a:pt x="111758" y="4317548"/>
+                  </a:cubicBezTo>
+                  <a:cubicBezTo>
+                    <a:pt x="118384" y="4344176"/>
+                    <a:pt x="124627" y="4370802"/>
+                    <a:pt x="133038" y="4397054"/>
+                  </a:cubicBezTo>
+                  <a:cubicBezTo>
+                    <a:pt x="140810" y="4423307"/>
+                    <a:pt x="148456" y="4449683"/>
+                    <a:pt x="157757" y="4475560"/>
+                  </a:cubicBezTo>
+                  <a:cubicBezTo>
+                    <a:pt x="166549" y="4501562"/>
+                    <a:pt x="175087" y="4527564"/>
+                    <a:pt x="185153" y="4553066"/>
+                  </a:cubicBezTo>
+                  <a:cubicBezTo>
+                    <a:pt x="262371" y="4758458"/>
+                    <a:pt x="368895" y="4951974"/>
+                    <a:pt x="493642" y="5132239"/>
+                  </a:cubicBezTo>
+                  <a:cubicBezTo>
+                    <a:pt x="618389" y="5312627"/>
+                    <a:pt x="760846" y="5480391"/>
+                    <a:pt x="914391" y="5636528"/>
+                  </a:cubicBezTo>
+                  <a:cubicBezTo>
+                    <a:pt x="1069081" y="5793166"/>
+                    <a:pt x="1231544" y="5941677"/>
+                    <a:pt x="1402034" y="6076188"/>
+                  </a:cubicBezTo>
+                  <a:cubicBezTo>
+                    <a:pt x="1487535" y="6143320"/>
+                    <a:pt x="1574565" y="6207574"/>
+                    <a:pt x="1664397" y="6267079"/>
+                  </a:cubicBezTo>
+                  <a:cubicBezTo>
+                    <a:pt x="1753592" y="6327459"/>
+                    <a:pt x="1845336" y="6383088"/>
+                    <a:pt x="1938992" y="6434343"/>
+                  </a:cubicBezTo>
+                  <a:cubicBezTo>
+                    <a:pt x="2032647" y="6485659"/>
+                    <a:pt x="2128309" y="6532600"/>
+                    <a:pt x="2225931" y="6574322"/>
+                  </a:cubicBezTo>
+                  <a:lnTo>
+                    <a:pt x="2236328" y="6578439"/>
+                  </a:lnTo>
+                  <a:lnTo>
+                    <a:pt x="1504665" y="6578439"/>
+                  </a:lnTo>
+                  <a:lnTo>
+                    <a:pt x="1456827" y="6543476"/>
+                  </a:lnTo>
+                  <a:cubicBezTo>
+                    <a:pt x="1363554" y="6470595"/>
+                    <a:pt x="1273848" y="6394340"/>
+                    <a:pt x="1188475" y="6314083"/>
+                  </a:cubicBezTo>
+                  <a:cubicBezTo>
+                    <a:pt x="1017856" y="6153445"/>
+                    <a:pt x="863803" y="5979931"/>
+                    <a:pt x="721728" y="5798666"/>
+                  </a:cubicBezTo>
+                  <a:cubicBezTo>
+                    <a:pt x="579397" y="5616027"/>
+                    <a:pt x="452103" y="5422511"/>
+                    <a:pt x="344175" y="5219495"/>
+                  </a:cubicBezTo>
+                  <a:cubicBezTo>
+                    <a:pt x="236505" y="5016354"/>
+                    <a:pt x="147946" y="4803586"/>
+                    <a:pt x="87293" y="4583569"/>
+                  </a:cubicBezTo>
+                  <a:cubicBezTo>
+                    <a:pt x="79138" y="4556193"/>
+                    <a:pt x="72639" y="4528440"/>
+                    <a:pt x="65886" y="4500813"/>
+                  </a:cubicBezTo>
+                  <a:cubicBezTo>
+                    <a:pt x="58751" y="4473311"/>
+                    <a:pt x="53144" y="4445308"/>
+                    <a:pt x="47409" y="4417431"/>
+                  </a:cubicBezTo>
+                  <a:cubicBezTo>
+                    <a:pt x="44733" y="4403430"/>
+                    <a:pt x="41294" y="4389679"/>
+                    <a:pt x="39000" y="4375677"/>
+                  </a:cubicBezTo>
+                  <a:lnTo>
+                    <a:pt x="31610" y="4333674"/>
+                  </a:lnTo>
+                  <a:cubicBezTo>
+                    <a:pt x="26258" y="4305797"/>
+                    <a:pt x="22563" y="4277544"/>
+                    <a:pt x="18868" y="4249417"/>
+                  </a:cubicBezTo>
+                  <a:cubicBezTo>
+                    <a:pt x="4214" y="4136784"/>
+                    <a:pt x="-2158" y="4023275"/>
+                    <a:pt x="646" y="3910265"/>
+                  </a:cubicBezTo>
+                  <a:cubicBezTo>
+                    <a:pt x="5997" y="3683872"/>
+                    <a:pt x="50596" y="3459605"/>
+                    <a:pt x="130234" y="3248337"/>
+                  </a:cubicBezTo>
+                  <a:cubicBezTo>
+                    <a:pt x="207961" y="3039196"/>
+                    <a:pt x="278044" y="2827179"/>
+                    <a:pt x="335383" y="2611911"/>
+                  </a:cubicBezTo>
+                  <a:cubicBezTo>
+                    <a:pt x="393743" y="2396644"/>
+                    <a:pt x="435792" y="2178627"/>
+                    <a:pt x="487272" y="1958609"/>
+                  </a:cubicBezTo>
+                  <a:cubicBezTo>
+                    <a:pt x="493259" y="1931107"/>
+                    <a:pt x="501287" y="1903730"/>
+                    <a:pt x="508550" y="1876227"/>
+                  </a:cubicBezTo>
+                  <a:cubicBezTo>
+                    <a:pt x="516195" y="1848725"/>
+                    <a:pt x="522312" y="1820972"/>
+                    <a:pt x="531742" y="1793721"/>
+                  </a:cubicBezTo>
+                  <a:lnTo>
+                    <a:pt x="558245" y="1711465"/>
+                  </a:lnTo>
+                  <a:cubicBezTo>
+                    <a:pt x="568439" y="1684337"/>
+                    <a:pt x="579652" y="1657459"/>
+                    <a:pt x="590100" y="1630332"/>
+                  </a:cubicBezTo>
+                  <a:cubicBezTo>
+                    <a:pt x="635080" y="1523075"/>
+                    <a:pt x="690637" y="1417566"/>
+                    <a:pt x="758680" y="1322433"/>
+                  </a:cubicBezTo>
+                  <a:cubicBezTo>
+                    <a:pt x="824430" y="1225051"/>
+                    <a:pt x="899610" y="1136168"/>
+                    <a:pt x="976317" y="1049286"/>
+                  </a:cubicBezTo>
+                  <a:cubicBezTo>
+                    <a:pt x="995049" y="1027035"/>
+                    <a:pt x="1015436" y="1006533"/>
+                    <a:pt x="1035314" y="985406"/>
+                  </a:cubicBezTo>
+                  <a:lnTo>
+                    <a:pt x="1095329" y="922526"/>
+                  </a:lnTo>
+                  <a:cubicBezTo>
+                    <a:pt x="1114953" y="901149"/>
+                    <a:pt x="1136359" y="881397"/>
+                    <a:pt x="1157384" y="861271"/>
+                  </a:cubicBezTo>
+                  <a:lnTo>
+                    <a:pt x="1220841" y="801017"/>
+                  </a:lnTo>
+                  <a:cubicBezTo>
+                    <a:pt x="1241610" y="780514"/>
+                    <a:pt x="1264418" y="762014"/>
+                    <a:pt x="1286462" y="742886"/>
+                  </a:cubicBezTo>
+                  <a:lnTo>
+                    <a:pt x="1353233" y="685632"/>
+                  </a:lnTo>
+                  <a:lnTo>
+                    <a:pt x="1369924" y="671256"/>
+                  </a:lnTo>
+                  <a:cubicBezTo>
+                    <a:pt x="1375658" y="666631"/>
+                    <a:pt x="1381520" y="662255"/>
+                    <a:pt x="1387380" y="657755"/>
+                  </a:cubicBezTo>
+                  <a:lnTo>
+                    <a:pt x="1422422" y="630877"/>
+                  </a:lnTo>
+                  <a:lnTo>
+                    <a:pt x="1492759" y="577248"/>
+                  </a:lnTo>
+                  <a:cubicBezTo>
+                    <a:pt x="1504355" y="567997"/>
+                    <a:pt x="1516714" y="559997"/>
+                    <a:pt x="1528820" y="551496"/>
+                  </a:cubicBezTo>
+                  <a:lnTo>
+                    <a:pt x="1565390" y="526370"/>
+                  </a:lnTo>
+                  <a:lnTo>
+                    <a:pt x="1639040" y="476490"/>
+                  </a:lnTo>
+                  <a:cubicBezTo>
+                    <a:pt x="1689754" y="445613"/>
+                    <a:pt x="1740723" y="414986"/>
+                    <a:pt x="1792075" y="384859"/>
+                  </a:cubicBezTo>
+                  <a:cubicBezTo>
+                    <a:pt x="2000282" y="268724"/>
+                    <a:pt x="2224927" y="179467"/>
+                    <a:pt x="2455943" y="117836"/>
+                  </a:cubicBezTo>
+                  <a:cubicBezTo>
+                    <a:pt x="2687088" y="55957"/>
+                    <a:pt x="2923964" y="21204"/>
+                    <a:pt x="3159952" y="7203"/>
+                  </a:cubicBezTo>
+                  <a:cubicBezTo>
+                    <a:pt x="3219076" y="3515"/>
+                    <a:pt x="3277945" y="1389"/>
+                    <a:pt x="3336813" y="499"/>
+                  </a:cubicBezTo>
+                  <a:close/>
+                </a:path>
+              </a:pathLst>
+            </a:custGeom>
+            <a:gradFill>
+              <a:gsLst>
+                <a:gs pos="2000">
+                  <a:schemeClr val="bg1">
+                    <a:alpha val="10000"/>
+                  </a:schemeClr>
+                </a:gs>
+                <a:gs pos="16000">
+                  <a:schemeClr val="accent6">
+                    <a:alpha val="10000"/>
+                  </a:schemeClr>
+                </a:gs>
+                <a:gs pos="100000">
+                  <a:schemeClr val="bg1">
+                    <a:alpha val="10000"/>
+                  </a:schemeClr>
+                </a:gs>
+                <a:gs pos="85000">
+                  <a:schemeClr val="accent1">
+                    <a:alpha val="10000"/>
+                  </a:schemeClr>
+                </a:gs>
+              </a:gsLst>
+              <a:lin ang="12000000" scaled="0"/>
+            </a:gradFill>
+            <a:ln>
+              <a:noFill/>
+            </a:ln>
+          </p:spPr>
+          <p:style>
+            <a:lnRef idx="2">
+              <a:schemeClr val="accent1">
+                <a:shade val="50000"/>
+              </a:schemeClr>
+            </a:lnRef>
+            <a:fillRef idx="1">
+              <a:schemeClr val="accent1"/>
+            </a:fillRef>
+            <a:effectRef idx="0">
+              <a:schemeClr val="accent1"/>
+            </a:effectRef>
+            <a:fontRef idx="minor">
+              <a:schemeClr val="lt1"/>
+            </a:fontRef>
+          </p:style>
+          <p:txBody>
+            <a:bodyPr rtlCol="0" anchor="ctr"/>
+            <a:lstStyle/>
+            <a:p>
+              <a:pPr algn="ctr"/>
+              <a:endParaRPr lang="en-US" dirty="0"/>
+            </a:p>
+          </p:txBody>
+        </p:sp>
+      </p:grpSp>
+    </p:spTree>
+    <p:extLst>
+      <p:ext uri="{BB962C8B-B14F-4D97-AF65-F5344CB8AC3E}">
+        <p14:creationId xmlns:p14="http://schemas.microsoft.com/office/powerpoint/2010/main" val="2283560065"/>
+      </p:ext>
+    </p:extLst>
+  </p:cSld>
+  <p:clrMapOvr>
+    <a:masterClrMapping/>
+  </p:clrMapOvr>
+</p:sld>
+</file>
+
+<file path=ppt/slides/slide9.xml><?xml version="1.0" encoding="utf-8"?>
+<p:sld xmlns:a="http://schemas.openxmlformats.org/drawingml/2006/main" xmlns:r="http://schemas.openxmlformats.org/officeDocument/2006/relationships" xmlns:p="http://schemas.openxmlformats.org/presentationml/2006/main">
+  <p:cSld>
+    <p:bg>
+      <p:bgPr>
+        <a:solidFill>
+          <a:schemeClr val="bg1"/>
+        </a:solidFill>
+        <a:effectLst/>
+      </p:bgPr>
+    </p:bg>
+    <p:spTree>
+      <p:nvGrpSpPr>
+        <p:cNvPr id="1" name=""/>
+        <p:cNvGrpSpPr/>
+        <p:nvPr/>
+      </p:nvGrpSpPr>
+      <p:grpSpPr>
+        <a:xfrm>
+          <a:off x="0" y="0"/>
+          <a:ext cx="0" cy="0"/>
+          <a:chOff x="0" y="0"/>
+          <a:chExt cx="0" cy="0"/>
+        </a:xfrm>
+      </p:grpSpPr>
+      <p:sp useBgFill="1">
+        <p:nvSpPr>
           <p:cNvPr id="9" name="Rectangle 8">
             <a:extLst>
               <a:ext uri="{FF2B5EF4-FFF2-40B4-BE49-F238E27FC236}">
@@ -34582,422 +38544,6 @@
 </p:sld>
 </file>
 
-<file path=ppt/slides/slide9.xml><?xml version="1.0" encoding="utf-8"?>
-<p:sld xmlns:a="http://schemas.openxmlformats.org/drawingml/2006/main" xmlns:r="http://schemas.openxmlformats.org/officeDocument/2006/relationships" xmlns:p="http://schemas.openxmlformats.org/presentationml/2006/main">
-  <p:cSld>
-    <p:bg>
-      <p:bgPr>
-        <a:solidFill>
-          <a:schemeClr val="bg1"/>
-        </a:solidFill>
-        <a:effectLst/>
-      </p:bgPr>
-    </p:bg>
-    <p:spTree>
-      <p:nvGrpSpPr>
-        <p:cNvPr id="1" name=""/>
-        <p:cNvGrpSpPr/>
-        <p:nvPr/>
-      </p:nvGrpSpPr>
-      <p:grpSpPr>
-        <a:xfrm>
-          <a:off x="0" y="0"/>
-          <a:ext cx="0" cy="0"/>
-          <a:chOff x="0" y="0"/>
-          <a:chExt cx="0" cy="0"/>
-        </a:xfrm>
-      </p:grpSpPr>
-      <p:sp useBgFill="1">
-        <p:nvSpPr>
-          <p:cNvPr id="17" name="Rectangle 8">
-            <a:extLst>
-              <a:ext uri="{FF2B5EF4-FFF2-40B4-BE49-F238E27FC236}">
-                <a16:creationId xmlns:a16="http://schemas.microsoft.com/office/drawing/2014/main" id="{BACC6370-2D7E-4714-9D71-7542949D7D5D}"/>
-              </a:ext>
-              <a:ext uri="{C183D7F6-B498-43B3-948B-1728B52AA6E4}">
-                <adec:decorative xmlns:adec="http://schemas.microsoft.com/office/drawing/2017/decorative" val="1"/>
-              </a:ext>
-            </a:extLst>
-          </p:cNvPr>
-          <p:cNvSpPr>
-            <a:spLocks noGrp="1" noRot="1" noChangeAspect="1" noMove="1" noResize="1" noEditPoints="1" noAdjustHandles="1" noChangeArrowheads="1" noChangeShapeType="1" noTextEdit="1"/>
-          </p:cNvSpPr>
-          <p:nvPr>
-            <p:extLst>
-              <p:ext uri="{386F3935-93C4-4BCD-93E2-E3B085C9AB24}">
-                <p16:designElem xmlns:p16="http://schemas.microsoft.com/office/powerpoint/2015/main" val="1"/>
-              </p:ext>
-            </p:extLst>
-          </p:nvPr>
-        </p:nvSpPr>
-        <p:spPr>
-          <a:xfrm>
-            <a:off x="0" y="0"/>
-            <a:ext cx="12192000" cy="6858000"/>
-          </a:xfrm>
-          <a:prstGeom prst="rect">
-            <a:avLst/>
-          </a:prstGeom>
-          <a:ln w="12700" cap="flat" cmpd="sng" algn="ctr">
-            <a:noFill/>
-            <a:prstDash val="solid"/>
-            <a:miter lim="800000"/>
-          </a:ln>
-          <a:effectLst/>
-          <a:extLst>
-            <a:ext uri="{91240B29-F687-4F45-9708-019B960494DF}">
-              <a14:hiddenLine xmlns:a14="http://schemas.microsoft.com/office/drawing/2010/main" w="12700" cap="flat" cmpd="sng" algn="ctr">
-                <a:solidFill>
-                  <a:schemeClr val="accent1">
-                    <a:shade val="50000"/>
-                  </a:schemeClr>
-                </a:solidFill>
-                <a:prstDash val="solid"/>
-                <a:miter lim="800000"/>
-              </a14:hiddenLine>
-            </a:ext>
-          </a:extLst>
-        </p:spPr>
-        <p:style>
-          <a:lnRef idx="2">
-            <a:schemeClr val="accent1">
-              <a:shade val="50000"/>
-            </a:schemeClr>
-          </a:lnRef>
-          <a:fillRef idx="1">
-            <a:schemeClr val="accent1"/>
-          </a:fillRef>
-          <a:effectRef idx="0">
-            <a:schemeClr val="accent1"/>
-          </a:effectRef>
-          <a:fontRef idx="minor">
-            <a:schemeClr val="lt1"/>
-          </a:fontRef>
-        </p:style>
-        <p:txBody>
-          <a:bodyPr rtlCol="0" anchor="ctr"/>
-          <a:lstStyle/>
-          <a:p>
-            <a:pPr algn="ctr"/>
-            <a:endParaRPr lang="en-US"/>
-          </a:p>
-        </p:txBody>
-      </p:sp>
-      <p:sp>
-        <p:nvSpPr>
-          <p:cNvPr id="18" name="Rectangle 10">
-            <a:extLst>
-              <a:ext uri="{FF2B5EF4-FFF2-40B4-BE49-F238E27FC236}">
-                <a16:creationId xmlns:a16="http://schemas.microsoft.com/office/drawing/2014/main" id="{F68B3F68-107C-434F-AA38-110D5EA91B85}"/>
-              </a:ext>
-              <a:ext uri="{C183D7F6-B498-43B3-948B-1728B52AA6E4}">
-                <adec:decorative xmlns:adec="http://schemas.microsoft.com/office/drawing/2017/decorative" val="1"/>
-              </a:ext>
-            </a:extLst>
-          </p:cNvPr>
-          <p:cNvSpPr>
-            <a:spLocks noGrp="1" noRot="1" noChangeAspect="1" noMove="1" noResize="1" noEditPoints="1" noAdjustHandles="1" noChangeArrowheads="1" noChangeShapeType="1" noTextEdit="1"/>
-          </p:cNvSpPr>
-          <p:nvPr>
-            <p:extLst>
-              <p:ext uri="{386F3935-93C4-4BCD-93E2-E3B085C9AB24}">
-                <p16:designElem xmlns:p16="http://schemas.microsoft.com/office/powerpoint/2015/main" val="1"/>
-              </p:ext>
-            </p:extLst>
-          </p:nvPr>
-        </p:nvSpPr>
-        <p:spPr>
-          <a:xfrm flipH="1">
-            <a:off x="2" y="0"/>
-            <a:ext cx="12191998" cy="2170031"/>
-          </a:xfrm>
-          <a:prstGeom prst="rect">
-            <a:avLst/>
-          </a:prstGeom>
-          <a:gradFill>
-            <a:gsLst>
-              <a:gs pos="0">
-                <a:srgbClr val="000000">
-                  <a:alpha val="96000"/>
-                </a:srgbClr>
-              </a:gs>
-              <a:gs pos="100000">
-                <a:schemeClr val="accent1">
-                  <a:lumMod val="75000"/>
-                </a:schemeClr>
-              </a:gs>
-            </a:gsLst>
-            <a:lin ang="19800000" scaled="0"/>
-          </a:gradFill>
-          <a:ln>
-            <a:noFill/>
-          </a:ln>
-        </p:spPr>
-        <p:style>
-          <a:lnRef idx="2">
-            <a:schemeClr val="accent1">
-              <a:shade val="50000"/>
-            </a:schemeClr>
-          </a:lnRef>
-          <a:fillRef idx="1">
-            <a:schemeClr val="accent1"/>
-          </a:fillRef>
-          <a:effectRef idx="0">
-            <a:schemeClr val="accent1"/>
-          </a:effectRef>
-          <a:fontRef idx="minor">
-            <a:schemeClr val="lt1"/>
-          </a:fontRef>
-        </p:style>
-        <p:txBody>
-          <a:bodyPr rtlCol="0" anchor="ctr"/>
-          <a:lstStyle/>
-          <a:p>
-            <a:pPr algn="ctr"/>
-            <a:endParaRPr lang="en-US"/>
-          </a:p>
-        </p:txBody>
-      </p:sp>
-      <p:sp>
-        <p:nvSpPr>
-          <p:cNvPr id="19" name="Rectangle 12">
-            <a:extLst>
-              <a:ext uri="{FF2B5EF4-FFF2-40B4-BE49-F238E27FC236}">
-                <a16:creationId xmlns:a16="http://schemas.microsoft.com/office/drawing/2014/main" id="{AAD0DBB9-1A4B-4391-81D4-CB19F9AB918A}"/>
-              </a:ext>
-              <a:ext uri="{C183D7F6-B498-43B3-948B-1728B52AA6E4}">
-                <adec:decorative xmlns:adec="http://schemas.microsoft.com/office/drawing/2017/decorative" val="1"/>
-              </a:ext>
-            </a:extLst>
-          </p:cNvPr>
-          <p:cNvSpPr>
-            <a:spLocks noGrp="1" noRot="1" noChangeAspect="1" noMove="1" noResize="1" noEditPoints="1" noAdjustHandles="1" noChangeArrowheads="1" noChangeShapeType="1" noTextEdit="1"/>
-          </p:cNvSpPr>
-          <p:nvPr>
-            <p:extLst>
-              <p:ext uri="{386F3935-93C4-4BCD-93E2-E3B085C9AB24}">
-                <p16:designElem xmlns:p16="http://schemas.microsoft.com/office/powerpoint/2015/main" val="1"/>
-              </p:ext>
-            </p:extLst>
-          </p:nvPr>
-        </p:nvSpPr>
-        <p:spPr>
-          <a:xfrm flipH="1">
-            <a:off x="8082819" y="0"/>
-            <a:ext cx="4097211" cy="2170661"/>
-          </a:xfrm>
-          <a:prstGeom prst="rect">
-            <a:avLst/>
-          </a:prstGeom>
-          <a:gradFill>
-            <a:gsLst>
-              <a:gs pos="19000">
-                <a:schemeClr val="accent1">
-                  <a:lumMod val="50000"/>
-                  <a:alpha val="68000"/>
-                </a:schemeClr>
-              </a:gs>
-              <a:gs pos="100000">
-                <a:schemeClr val="accent1">
-                  <a:alpha val="48000"/>
-                </a:schemeClr>
-              </a:gs>
-            </a:gsLst>
-            <a:lin ang="19200000" scaled="0"/>
-          </a:gradFill>
-          <a:ln>
-            <a:noFill/>
-          </a:ln>
-        </p:spPr>
-        <p:style>
-          <a:lnRef idx="2">
-            <a:schemeClr val="accent1">
-              <a:shade val="50000"/>
-            </a:schemeClr>
-          </a:lnRef>
-          <a:fillRef idx="1">
-            <a:schemeClr val="accent1"/>
-          </a:fillRef>
-          <a:effectRef idx="0">
-            <a:schemeClr val="accent1"/>
-          </a:effectRef>
-          <a:fontRef idx="minor">
-            <a:schemeClr val="lt1"/>
-          </a:fontRef>
-        </p:style>
-        <p:txBody>
-          <a:bodyPr rtlCol="0" anchor="ctr"/>
-          <a:lstStyle/>
-          <a:p>
-            <a:pPr algn="ctr"/>
-            <a:endParaRPr lang="en-US"/>
-          </a:p>
-        </p:txBody>
-      </p:sp>
-      <p:sp>
-        <p:nvSpPr>
-          <p:cNvPr id="20" name="Rectangle 14">
-            <a:extLst>
-              <a:ext uri="{FF2B5EF4-FFF2-40B4-BE49-F238E27FC236}">
-                <a16:creationId xmlns:a16="http://schemas.microsoft.com/office/drawing/2014/main" id="{063BBA22-50EA-4C4D-BE05-F1CE4E63AA56}"/>
-              </a:ext>
-              <a:ext uri="{C183D7F6-B498-43B3-948B-1728B52AA6E4}">
-                <adec:decorative xmlns:adec="http://schemas.microsoft.com/office/drawing/2017/decorative" val="1"/>
-              </a:ext>
-            </a:extLst>
-          </p:cNvPr>
-          <p:cNvSpPr>
-            <a:spLocks noGrp="1" noRot="1" noChangeAspect="1" noMove="1" noResize="1" noEditPoints="1" noAdjustHandles="1" noChangeArrowheads="1" noChangeShapeType="1" noTextEdit="1"/>
-          </p:cNvSpPr>
-          <p:nvPr>
-            <p:extLst>
-              <p:ext uri="{386F3935-93C4-4BCD-93E2-E3B085C9AB24}">
-                <p16:designElem xmlns:p16="http://schemas.microsoft.com/office/powerpoint/2015/main" val="1"/>
-              </p:ext>
-            </p:extLst>
-          </p:nvPr>
-        </p:nvSpPr>
-        <p:spPr>
-          <a:xfrm rot="16200000" flipH="1">
-            <a:off x="5010646" y="-5010043"/>
-            <a:ext cx="2170709" cy="12192000"/>
-          </a:xfrm>
-          <a:prstGeom prst="rect">
-            <a:avLst/>
-          </a:prstGeom>
-          <a:gradFill>
-            <a:gsLst>
-              <a:gs pos="23000">
-                <a:schemeClr val="accent1">
-                  <a:lumMod val="75000"/>
-                  <a:alpha val="16000"/>
-                </a:schemeClr>
-              </a:gs>
-              <a:gs pos="99000">
-                <a:srgbClr val="000000">
-                  <a:alpha val="45000"/>
-                </a:srgbClr>
-              </a:gs>
-            </a:gsLst>
-            <a:lin ang="21000000" scaled="0"/>
-          </a:gradFill>
-          <a:ln>
-            <a:noFill/>
-          </a:ln>
-        </p:spPr>
-        <p:style>
-          <a:lnRef idx="2">
-            <a:schemeClr val="accent1">
-              <a:shade val="50000"/>
-            </a:schemeClr>
-          </a:lnRef>
-          <a:fillRef idx="1">
-            <a:schemeClr val="accent1"/>
-          </a:fillRef>
-          <a:effectRef idx="0">
-            <a:schemeClr val="accent1"/>
-          </a:effectRef>
-          <a:fontRef idx="minor">
-            <a:schemeClr val="lt1"/>
-          </a:fontRef>
-        </p:style>
-        <p:txBody>
-          <a:bodyPr rtlCol="0" anchor="ctr"/>
-          <a:lstStyle/>
-          <a:p>
-            <a:pPr algn="ctr"/>
-            <a:endParaRPr lang="en-US" dirty="0"/>
-          </a:p>
-        </p:txBody>
-      </p:sp>
-      <p:sp>
-        <p:nvSpPr>
-          <p:cNvPr id="2" name="제목 1">
-            <a:extLst>
-              <a:ext uri="{FF2B5EF4-FFF2-40B4-BE49-F238E27FC236}">
-                <a16:creationId xmlns:a16="http://schemas.microsoft.com/office/drawing/2014/main" id="{69649273-C900-70F9-AE53-E6795C3D3A80}"/>
-              </a:ext>
-            </a:extLst>
-          </p:cNvPr>
-          <p:cNvSpPr>
-            <a:spLocks noGrp="1"/>
-          </p:cNvSpPr>
-          <p:nvPr>
-            <p:ph type="title"/>
-          </p:nvPr>
-        </p:nvSpPr>
-        <p:spPr>
-          <a:xfrm>
-            <a:off x="1383564" y="348865"/>
-            <a:ext cx="9718111" cy="1576446"/>
-          </a:xfrm>
-        </p:spPr>
-        <p:txBody>
-          <a:bodyPr anchor="ctr">
-            <a:normAutofit/>
-          </a:bodyPr>
-          <a:lstStyle/>
-          <a:p>
-            <a:r>
-              <a:rPr lang="en-US" altLang="ko-KR" sz="4000">
-                <a:solidFill>
-                  <a:srgbClr val="FFFFFF"/>
-                </a:solidFill>
-              </a:rPr>
-              <a:t>nullable</a:t>
-            </a:r>
-            <a:endParaRPr lang="ko-KR" altLang="en-US" sz="4000">
-              <a:solidFill>
-                <a:srgbClr val="FFFFFF"/>
-              </a:solidFill>
-            </a:endParaRPr>
-          </a:p>
-        </p:txBody>
-      </p:sp>
-      <p:graphicFrame>
-        <p:nvGraphicFramePr>
-          <p:cNvPr id="21" name="내용 개체 틀 2">
-            <a:extLst>
-              <a:ext uri="{FF2B5EF4-FFF2-40B4-BE49-F238E27FC236}">
-                <a16:creationId xmlns:a16="http://schemas.microsoft.com/office/drawing/2014/main" id="{3C1ED804-4CE5-0363-4248-30F18479BBF2}"/>
-              </a:ext>
-            </a:extLst>
-          </p:cNvPr>
-          <p:cNvGraphicFramePr>
-            <a:graphicFrameLocks noGrp="1"/>
-          </p:cNvGraphicFramePr>
-          <p:nvPr>
-            <p:ph idx="1"/>
-            <p:extLst>
-              <p:ext uri="{D42A27DB-BD31-4B8C-83A1-F6EECF244321}">
-                <p14:modId xmlns:p14="http://schemas.microsoft.com/office/powerpoint/2010/main" val="2281938302"/>
-              </p:ext>
-            </p:extLst>
-          </p:nvPr>
-        </p:nvGraphicFramePr>
-        <p:xfrm>
-          <a:off x="644056" y="2615979"/>
-          <a:ext cx="10927829" cy="3689405"/>
-        </p:xfrm>
-        <a:graphic>
-          <a:graphicData uri="http://schemas.openxmlformats.org/drawingml/2006/diagram">
-            <dgm:relIds xmlns:dgm="http://schemas.openxmlformats.org/drawingml/2006/diagram" xmlns:r="http://schemas.openxmlformats.org/officeDocument/2006/relationships" r:dm="rId2" r:lo="rId3" r:qs="rId4" r:cs="rId5"/>
-          </a:graphicData>
-        </a:graphic>
-      </p:graphicFrame>
-    </p:spTree>
-    <p:extLst>
-      <p:ext uri="{BB962C8B-B14F-4D97-AF65-F5344CB8AC3E}">
-        <p14:creationId xmlns:p14="http://schemas.microsoft.com/office/powerpoint/2010/main" val="3920825907"/>
-      </p:ext>
-    </p:extLst>
-  </p:cSld>
-  <p:clrMapOvr>
-    <a:masterClrMapping/>
-  </p:clrMapOvr>
-</p:sld>
-</file>
-
 <file path=ppt/theme/theme1.xml><?xml version="1.0" encoding="utf-8"?>
 <a:theme xmlns:a="http://schemas.openxmlformats.org/drawingml/2006/main" name="Office 테마">
   <a:themeElements>
